--- a/Funding_Hub_Antigravity_Workshop.pptx
+++ b/Funding_Hub_Antigravity_Workshop.pptx
@@ -5,10 +5,10 @@
     <p:sldMasterId id="2147483648" r:id="rId1"/>
   </p:sldMasterIdLst>
   <p:notesMasterIdLst>
-    <p:notesMasterId r:id="rId29"/>
+    <p:notesMasterId r:id="rId33"/>
   </p:notesMasterIdLst>
   <p:sldIdLst>
-    <p:sldId id="256" r:id="rId2"/>
+    <p:sldId id="294" r:id="rId2"/>
     <p:sldId id="257" r:id="rId3"/>
     <p:sldId id="258" r:id="rId4"/>
     <p:sldId id="259" r:id="rId5"/>
@@ -29,12 +29,16 @@
     <p:sldId id="278" r:id="rId20"/>
     <p:sldId id="279" r:id="rId21"/>
     <p:sldId id="280" r:id="rId22"/>
-    <p:sldId id="281" r:id="rId23"/>
-    <p:sldId id="282" r:id="rId24"/>
-    <p:sldId id="284" r:id="rId25"/>
-    <p:sldId id="285" r:id="rId26"/>
-    <p:sldId id="292" r:id="rId27"/>
-    <p:sldId id="293" r:id="rId28"/>
+    <p:sldId id="297" r:id="rId23"/>
+    <p:sldId id="281" r:id="rId24"/>
+    <p:sldId id="296" r:id="rId25"/>
+    <p:sldId id="282" r:id="rId26"/>
+    <p:sldId id="298" r:id="rId27"/>
+    <p:sldId id="284" r:id="rId28"/>
+    <p:sldId id="285" r:id="rId29"/>
+    <p:sldId id="295" r:id="rId30"/>
+    <p:sldId id="292" r:id="rId31"/>
+    <p:sldId id="293" r:id="rId32"/>
   </p:sldIdLst>
   <p:sldSz cx="12192000" cy="6858000"/>
   <p:notesSz cx="6858000" cy="12192000"/>
@@ -309,7 +313,7 @@
           <a:p>
             <a:r>
               <a:rPr lang="en-US" dirty="0"/>
-              <a:t>แนะนำตัว ถามพื้นฐานผู้เรียน: ใครเคยเขียนเว็บมาก่อน ใครเคยใช้ AI ช่วยเขียนโค้ด</a:t>
+              <a:t>แนะนำตัว 2 นาที. ย้ำว่าวันนี้ทุกคนจะได้ระบบจริงที่เปิดจากมือถือได้ก่อนกลับบ้าน. ประโยคสำคัญ: AI เก่งเรื่อง "ทำอย่างไร" แต่เราต้องเป็นคนตอบว่า "ทำอะไร และทำไม".</a:t>
             </a:r>
           </a:p>
         </p:txBody>
@@ -1507,7 +1511,7 @@
           <a:p>
             <a:fld id="{F7021451-1387-4CA6-816F-3879F97B5CBC}" type="slidenum">
               <a:rPr lang="en-US"/>
-              <a:t>22</a:t>
+              <a:t>23</a:t>
             </a:fld>
             <a:endParaRPr lang="en-US"/>
           </a:p>
@@ -1591,7 +1595,7 @@
           <a:p>
             <a:fld id="{F7021451-1387-4CA6-816F-3879F97B5CBC}" type="slidenum">
               <a:rPr lang="en-US"/>
-              <a:t>23</a:t>
+              <a:t>25</a:t>
             </a:fld>
             <a:endParaRPr lang="en-US"/>
           </a:p>
@@ -1675,7 +1679,7 @@
           <a:p>
             <a:fld id="{F7021451-1387-4CA6-816F-3879F97B5CBC}" type="slidenum">
               <a:rPr lang="en-US"/>
-              <a:t>24</a:t>
+              <a:t>27</a:t>
             </a:fld>
             <a:endParaRPr lang="en-US"/>
           </a:p>
@@ -1759,7 +1763,7 @@
           <a:p>
             <a:fld id="{F7021451-1387-4CA6-816F-3879F97B5CBC}" type="slidenum">
               <a:rPr lang="en-US"/>
-              <a:t>25</a:t>
+              <a:t>28</a:t>
             </a:fld>
             <a:endParaRPr lang="en-US"/>
           </a:p>
@@ -1843,7 +1847,7 @@
           <a:p>
             <a:fld id="{F7021451-1387-4CA6-816F-3879F97B5CBC}" type="slidenum">
               <a:rPr lang="en-US"/>
-              <a:t>26</a:t>
+              <a:t>30</a:t>
             </a:fld>
             <a:endParaRPr lang="en-US"/>
           </a:p>
@@ -1927,7 +1931,7 @@
           <a:p>
             <a:fld id="{F7021451-1387-4CA6-816F-3879F97B5CBC}" type="slidenum">
               <a:rPr lang="en-US"/>
-              <a:t>27</a:t>
+              <a:t>31</a:t>
             </a:fld>
             <a:endParaRPr lang="en-US"/>
           </a:p>
@@ -2848,11 +2852,13 @@
 
 <file path=ppt/slides/slide1.xml><?xml version="1.0" encoding="utf-8"?>
 <p:sld xmlns:a="http://schemas.openxmlformats.org/drawingml/2006/main" xmlns:r="http://schemas.openxmlformats.org/officeDocument/2006/relationships" xmlns:p="http://schemas.openxmlformats.org/presentationml/2006/main">
-  <p:cSld name="Slide 1">
+  <p:cSld>
     <p:bg>
       <p:bgPr>
         <a:solidFill>
-          <a:srgbClr val="222831"/>
+          <a:schemeClr val="tx2">
+            <a:lumMod val="50000"/>
+          </a:schemeClr>
         </a:solidFill>
         <a:effectLst/>
       </p:bgPr>
@@ -2873,169 +2879,78 @@
       </p:grpSpPr>
       <p:sp>
         <p:nvSpPr>
-          <p:cNvPr id="2" name="Text 0"/>
-          <p:cNvSpPr/>
-          <p:nvPr/>
-        </p:nvSpPr>
-        <p:spPr>
-          <a:xfrm>
-            <a:off x="11018520" y="6263640"/>
-            <a:ext cx="548640" cy="274320"/>
-          </a:xfrm>
-          <a:prstGeom prst="rect">
-            <a:avLst/>
-          </a:prstGeom>
-          <a:noFill/>
-          <a:ln/>
-        </p:spPr>
-        <p:txBody>
-          <a:bodyPr wrap="square" lIns="0" tIns="0" rIns="0" bIns="0" rtlCol="0" anchor="ctr"/>
-          <a:lstStyle/>
-          <a:p>
-            <a:pPr marL="0" indent="0" algn="r">
-              <a:buNone/>
-            </a:pPr>
-            <a:r>
-              <a:rPr lang="en-US" sz="1200" dirty="0">
-                <a:solidFill>
-                  <a:srgbClr val="9AA3AD"/>
-                </a:solidFill>
-                <a:latin typeface="TH Sarabun New" pitchFamily="34" charset="0"/>
-                <a:ea typeface="TH Sarabun New" pitchFamily="34" charset="-122"/>
-                <a:cs typeface="TH Sarabun New" pitchFamily="34" charset="-120"/>
-              </a:rPr>
-              <a:t>1</a:t>
-            </a:r>
-            <a:endParaRPr lang="en-US" sz="1200" dirty="0"/>
-          </a:p>
-        </p:txBody>
-      </p:sp>
-      <p:sp>
-        <p:nvSpPr>
-          <p:cNvPr id="3" name="Text 1"/>
-          <p:cNvSpPr/>
-          <p:nvPr/>
-        </p:nvSpPr>
-        <p:spPr>
-          <a:xfrm>
-            <a:off x="594360" y="1417320"/>
-            <a:ext cx="10972800" cy="310896"/>
-          </a:xfrm>
-          <a:prstGeom prst="rect">
-            <a:avLst/>
-          </a:prstGeom>
-          <a:noFill/>
-          <a:ln/>
-        </p:spPr>
-        <p:txBody>
-          <a:bodyPr wrap="square" lIns="0" tIns="0" rIns="0" bIns="0" rtlCol="0" anchor="ctr"/>
-          <a:lstStyle/>
-          <a:p>
-            <a:pPr marL="0" indent="0">
-              <a:buNone/>
-            </a:pPr>
-            <a:r>
-              <a:rPr lang="en-US" sz="1700" b="1" kern="0" spc="200" dirty="0">
-                <a:solidFill>
-                  <a:srgbClr val="00ADB5"/>
-                </a:solidFill>
-                <a:latin typeface="TH Sarabun New" pitchFamily="34" charset="0"/>
-                <a:ea typeface="TH Sarabun New" pitchFamily="34" charset="-122"/>
-                <a:cs typeface="TH Sarabun New" pitchFamily="34" charset="-120"/>
-              </a:rPr>
-              <a:t>WORKSHOP</a:t>
-            </a:r>
-            <a:endParaRPr lang="en-US" sz="1700" dirty="0"/>
-          </a:p>
-        </p:txBody>
-      </p:sp>
-      <p:sp>
-        <p:nvSpPr>
-          <p:cNvPr id="4" name="Text 2"/>
-          <p:cNvSpPr/>
-          <p:nvPr/>
-        </p:nvSpPr>
-        <p:spPr>
-          <a:xfrm>
-            <a:off x="594360" y="1828800"/>
-            <a:ext cx="9875520" cy="1600200"/>
-          </a:xfrm>
-          <a:prstGeom prst="rect">
-            <a:avLst/>
-          </a:prstGeom>
-          <a:noFill/>
-          <a:ln/>
-        </p:spPr>
-        <p:txBody>
-          <a:bodyPr wrap="square" lIns="0" tIns="0" rIns="0" bIns="0" rtlCol="0" anchor="ctr"/>
-          <a:lstStyle/>
-          <a:p>
-            <a:pPr marL="0" indent="0">
-              <a:lnSpc>
-                <a:spcPts val="4800"/>
-              </a:lnSpc>
-              <a:buNone/>
-            </a:pPr>
-            <a:r>
-              <a:rPr lang="en-US" sz="4200" b="1" dirty="0">
-                <a:solidFill>
-                  <a:srgbClr val="FFFFFF"/>
-                </a:solidFill>
-                <a:latin typeface="TH Sarabun New" pitchFamily="34" charset="0"/>
-                <a:ea typeface="TH Sarabun New" pitchFamily="34" charset="-122"/>
-                <a:cs typeface="TH Sarabun New" pitchFamily="34" charset="-120"/>
-              </a:rPr>
-              <a:t>การพัฒนา Web Application</a:t>
-            </a:r>
-            <a:endParaRPr lang="en-US" sz="4200" dirty="0"/>
-          </a:p>
-          <a:p>
-            <a:pPr marL="0" indent="0">
-              <a:lnSpc>
-                <a:spcPts val="4800"/>
-              </a:lnSpc>
-              <a:buNone/>
-            </a:pPr>
-            <a:r>
-              <a:rPr lang="en-US" sz="4200" b="1" dirty="0">
-                <a:solidFill>
-                  <a:srgbClr val="FFFFFF"/>
-                </a:solidFill>
-                <a:latin typeface="TH Sarabun New" pitchFamily="34" charset="0"/>
-                <a:ea typeface="TH Sarabun New" pitchFamily="34" charset="-122"/>
-                <a:cs typeface="TH Sarabun New" pitchFamily="34" charset="-120"/>
-              </a:rPr>
-              <a:t>ด้วย Google Antigravity</a:t>
-            </a:r>
-            <a:endParaRPr lang="en-US" sz="4200" dirty="0"/>
-          </a:p>
-        </p:txBody>
-      </p:sp>
-      <p:sp>
-        <p:nvSpPr>
-          <p:cNvPr id="5" name="Shape 3"/>
-          <p:cNvSpPr/>
-          <p:nvPr/>
-        </p:nvSpPr>
-        <p:spPr>
-          <a:xfrm>
-            <a:off x="594360" y="3611880"/>
-            <a:ext cx="6675120" cy="566928"/>
+          <p:cNvPr id="2" name="Shape 0"/>
+          <p:cNvSpPr/>
+          <p:nvPr/>
+        </p:nvSpPr>
+        <p:spPr>
+          <a:xfrm>
+            <a:off x="8778240" y="-2011680"/>
+            <a:ext cx="5852160" cy="5852160"/>
+          </a:xfrm>
+          <a:prstGeom prst="ellipse">
+            <a:avLst/>
+          </a:prstGeom>
+          <a:solidFill>
+            <a:srgbClr val="1B3A57"/>
+          </a:solidFill>
+          <a:ln/>
+        </p:spPr>
+        <p:txBody>
+          <a:bodyPr/>
+          <a:lstStyle/>
+          <a:p>
+            <a:endParaRPr lang="en-TH"/>
+          </a:p>
+        </p:txBody>
+      </p:sp>
+      <p:sp>
+        <p:nvSpPr>
+          <p:cNvPr id="3" name="Shape 1"/>
+          <p:cNvSpPr/>
+          <p:nvPr/>
+        </p:nvSpPr>
+        <p:spPr>
+          <a:xfrm>
+            <a:off x="10241280" y="3840480"/>
+            <a:ext cx="3840480" cy="3840480"/>
+          </a:xfrm>
+          <a:prstGeom prst="ellipse">
+            <a:avLst/>
+          </a:prstGeom>
+          <a:solidFill>
+            <a:srgbClr val="17324B"/>
+          </a:solidFill>
+          <a:ln/>
+        </p:spPr>
+        <p:txBody>
+          <a:bodyPr/>
+          <a:lstStyle/>
+          <a:p>
+            <a:endParaRPr lang="en-TH"/>
+          </a:p>
+        </p:txBody>
+      </p:sp>
+      <p:sp>
+        <p:nvSpPr>
+          <p:cNvPr id="4" name="Shape 2"/>
+          <p:cNvSpPr/>
+          <p:nvPr/>
+        </p:nvSpPr>
+        <p:spPr>
+          <a:xfrm>
+            <a:off x="566928" y="1298448"/>
+            <a:ext cx="2103120" cy="292608"/>
           </a:xfrm>
           <a:prstGeom prst="roundRect">
             <a:avLst>
-              <a:gd name="adj" fmla="val 16129"/>
+              <a:gd name="adj" fmla="val 40625"/>
             </a:avLst>
           </a:prstGeom>
           <a:solidFill>
-            <a:srgbClr val="2E3742"/>
+            <a:srgbClr val="E8952F"/>
           </a:solidFill>
-          <a:ln w="12700">
-            <a:solidFill>
-              <a:srgbClr val="2E3742"/>
-            </a:solidFill>
-            <a:prstDash val="solid"/>
-          </a:ln>
+          <a:ln/>
         </p:spPr>
         <p:txBody>
           <a:bodyPr/>
@@ -3047,40 +2962,79 @@
       </p:sp>
       <p:sp>
         <p:nvSpPr>
+          <p:cNvPr id="5" name="Text 3"/>
+          <p:cNvSpPr/>
+          <p:nvPr/>
+        </p:nvSpPr>
+        <p:spPr>
+          <a:xfrm>
+            <a:off x="566928" y="1298448"/>
+            <a:ext cx="2103120" cy="292608"/>
+          </a:xfrm>
+          <a:prstGeom prst="rect">
+            <a:avLst/>
+          </a:prstGeom>
+          <a:noFill/>
+          <a:ln/>
+        </p:spPr>
+        <p:txBody>
+          <a:bodyPr wrap="square" lIns="0" tIns="0" rIns="0" bIns="0" rtlCol="0" anchor="ctr"/>
+          <a:lstStyle/>
+          <a:p>
+            <a:pPr marL="0" indent="0" algn="ctr">
+              <a:buNone/>
+            </a:pPr>
+            <a:r>
+              <a:rPr lang="en-US" sz="1050" b="1" kern="0" spc="80" dirty="0">
+                <a:solidFill>
+                  <a:srgbClr val="FFFFFF"/>
+                </a:solidFill>
+                <a:latin typeface="Tahoma" pitchFamily="34" charset="0"/>
+                <a:ea typeface="Tahoma" pitchFamily="34" charset="-122"/>
+                <a:cs typeface="Tahoma" pitchFamily="34" charset="-120"/>
+              </a:rPr>
+              <a:t>WORKSHOP</a:t>
+            </a:r>
+            <a:endParaRPr lang="en-US" sz="1050" dirty="0"/>
+          </a:p>
+        </p:txBody>
+      </p:sp>
+      <p:sp>
+        <p:nvSpPr>
           <p:cNvPr id="6" name="Text 4"/>
           <p:cNvSpPr/>
           <p:nvPr/>
         </p:nvSpPr>
         <p:spPr>
           <a:xfrm>
-            <a:off x="813816" y="3611880"/>
-            <a:ext cx="6400800" cy="566928"/>
-          </a:xfrm>
-          <a:prstGeom prst="rect">
-            <a:avLst/>
-          </a:prstGeom>
-          <a:noFill/>
-          <a:ln/>
-        </p:spPr>
-        <p:txBody>
-          <a:bodyPr wrap="square" lIns="0" tIns="0" rIns="0" bIns="0" rtlCol="0" anchor="ctr"/>
-          <a:lstStyle/>
-          <a:p>
-            <a:pPr marL="0" indent="0">
-              <a:buNone/>
-            </a:pPr>
-            <a:r>
-              <a:rPr lang="en-US" sz="1900" dirty="0">
-                <a:solidFill>
-                  <a:srgbClr val="D6F5F7"/>
-                </a:solidFill>
-                <a:latin typeface="TH Sarabun New" pitchFamily="34" charset="0"/>
-                <a:ea typeface="TH Sarabun New" pitchFamily="34" charset="-122"/>
-                <a:cs typeface="TH Sarabun New" pitchFamily="34" charset="-120"/>
-              </a:rPr>
-              <a:t>กรณีศึกษา : Funding Hub — ระบบจัดการข้อมูลทุนวิจัย</a:t>
-            </a:r>
-            <a:endParaRPr lang="en-US" sz="1900" dirty="0"/>
+            <a:off x="566928" y="1755648"/>
+            <a:ext cx="8229600" cy="566928"/>
+          </a:xfrm>
+          <a:prstGeom prst="rect">
+            <a:avLst/>
+          </a:prstGeom>
+          <a:noFill/>
+          <a:ln/>
+        </p:spPr>
+        <p:txBody>
+          <a:bodyPr wrap="square" lIns="0" tIns="0" rIns="0" bIns="0" rtlCol="0" anchor="ctr"/>
+          <a:lstStyle/>
+          <a:p>
+            <a:pPr marL="0" indent="0">
+              <a:buNone/>
+            </a:pPr>
+            <a:r>
+              <a:rPr lang="en-US" sz="2700" dirty="0">
+                <a:solidFill>
+                  <a:srgbClr val="CFE0EC"/>
+                </a:solidFill>
+                <a:latin typeface="Tahoma" pitchFamily="34" charset="0"/>
+                <a:ea typeface="Tahoma" pitchFamily="34" charset="-122"/>
+                <a:cs typeface="Tahoma" pitchFamily="34" charset="-120"/>
+              </a:rPr>
+              <a:t>สร้างเว็บแอปด้วย</a:t>
+            </a:r>
+            <a:endParaRPr lang="en-US" sz="2700" dirty="0"/>
           </a:p>
         </p:txBody>
       </p:sp>
@@ -3092,36 +3046,417 @@
         </p:nvSpPr>
         <p:spPr>
           <a:xfrm>
-            <a:off x="594360" y="4434840"/>
-            <a:ext cx="10972800" cy="310896"/>
-          </a:xfrm>
-          <a:prstGeom prst="rect">
-            <a:avLst/>
-          </a:prstGeom>
-          <a:noFill/>
-          <a:ln/>
-        </p:spPr>
-        <p:txBody>
-          <a:bodyPr wrap="square" lIns="0" tIns="0" rIns="0" bIns="0" rtlCol="0" anchor="ctr"/>
-          <a:lstStyle/>
-          <a:p>
-            <a:pPr marL="0" indent="0">
-              <a:buNone/>
-            </a:pPr>
-            <a:r>
-              <a:rPr lang="th-TH" sz="1500" dirty="0">
-                <a:solidFill>
-                  <a:srgbClr val="9FB0B3"/>
-                </a:solidFill>
-                <a:latin typeface="TH Sarabun New" pitchFamily="34" charset="0"/>
-                <a:cs typeface="TH Sarabun New" pitchFamily="34" charset="-120"/>
+            <a:off x="566928" y="2267712"/>
+            <a:ext cx="8778240" cy="914400"/>
+          </a:xfrm>
+          <a:prstGeom prst="rect">
+            <a:avLst/>
+          </a:prstGeom>
+          <a:noFill/>
+          <a:ln/>
+        </p:spPr>
+        <p:txBody>
+          <a:bodyPr wrap="square" lIns="0" tIns="0" rIns="0" bIns="0" rtlCol="0" anchor="ctr"/>
+          <a:lstStyle/>
+          <a:p>
+            <a:pPr marL="0" indent="0">
+              <a:buNone/>
+            </a:pPr>
+            <a:r>
+              <a:rPr lang="en-US" sz="4800" b="1" dirty="0">
+                <a:solidFill>
+                  <a:srgbClr val="FFFFFF"/>
+                </a:solidFill>
+                <a:latin typeface="Tahoma" pitchFamily="34" charset="0"/>
+                <a:ea typeface="Tahoma" pitchFamily="34" charset="-122"/>
+                <a:cs typeface="Tahoma" pitchFamily="34" charset="-120"/>
+              </a:rPr>
+              <a:t>Google Antigravity</a:t>
+            </a:r>
+            <a:endParaRPr lang="en-US" sz="4800" dirty="0"/>
+          </a:p>
+        </p:txBody>
+      </p:sp>
+      <p:sp>
+        <p:nvSpPr>
+          <p:cNvPr id="10" name="Shape 8"/>
+          <p:cNvSpPr/>
+          <p:nvPr/>
+        </p:nvSpPr>
+        <p:spPr>
+          <a:xfrm>
+            <a:off x="566928" y="4663440"/>
+            <a:ext cx="2066544" cy="402336"/>
+          </a:xfrm>
+          <a:prstGeom prst="roundRect">
+            <a:avLst>
+              <a:gd name="adj" fmla="val 50000"/>
+            </a:avLst>
+          </a:prstGeom>
+          <a:solidFill>
+            <a:srgbClr val="1F4463"/>
+          </a:solidFill>
+          <a:ln/>
+        </p:spPr>
+        <p:txBody>
+          <a:bodyPr/>
+          <a:lstStyle/>
+          <a:p>
+            <a:endParaRPr lang="en-TH"/>
+          </a:p>
+        </p:txBody>
+      </p:sp>
+      <p:sp>
+        <p:nvSpPr>
+          <p:cNvPr id="11" name="Text 9"/>
+          <p:cNvSpPr/>
+          <p:nvPr/>
+        </p:nvSpPr>
+        <p:spPr>
+          <a:xfrm>
+            <a:off x="566928" y="4663440"/>
+            <a:ext cx="2066544" cy="402336"/>
+          </a:xfrm>
+          <a:prstGeom prst="rect">
+            <a:avLst/>
+          </a:prstGeom>
+          <a:noFill/>
+          <a:ln/>
+        </p:spPr>
+        <p:txBody>
+          <a:bodyPr wrap="square" lIns="0" tIns="0" rIns="0" bIns="0" rtlCol="0" anchor="ctr"/>
+          <a:lstStyle/>
+          <a:p>
+            <a:pPr marL="0" indent="0" algn="ctr">
+              <a:buNone/>
+            </a:pPr>
+            <a:r>
+              <a:rPr lang="en-US" sz="1150" dirty="0">
+                <a:solidFill>
+                  <a:srgbClr val="CFE0EC"/>
+                </a:solidFill>
+                <a:latin typeface="Tahoma" pitchFamily="34" charset="0"/>
+                <a:ea typeface="Tahoma" pitchFamily="34" charset="-122"/>
+                <a:cs typeface="Tahoma" pitchFamily="34" charset="-120"/>
+              </a:rPr>
+              <a:t>ออกแบบด้วย Flowchart</a:t>
+            </a:r>
+            <a:endParaRPr lang="en-US" sz="1150" dirty="0"/>
+          </a:p>
+        </p:txBody>
+      </p:sp>
+      <p:sp>
+        <p:nvSpPr>
+          <p:cNvPr id="12" name="Shape 10"/>
+          <p:cNvSpPr/>
+          <p:nvPr/>
+        </p:nvSpPr>
+        <p:spPr>
+          <a:xfrm>
+            <a:off x="2798064" y="4663440"/>
+            <a:ext cx="1618488" cy="402336"/>
+          </a:xfrm>
+          <a:prstGeom prst="roundRect">
+            <a:avLst>
+              <a:gd name="adj" fmla="val 50000"/>
+            </a:avLst>
+          </a:prstGeom>
+          <a:solidFill>
+            <a:srgbClr val="1F4463"/>
+          </a:solidFill>
+          <a:ln/>
+        </p:spPr>
+        <p:txBody>
+          <a:bodyPr/>
+          <a:lstStyle/>
+          <a:p>
+            <a:endParaRPr lang="en-TH"/>
+          </a:p>
+        </p:txBody>
+      </p:sp>
+      <p:sp>
+        <p:nvSpPr>
+          <p:cNvPr id="13" name="Text 11"/>
+          <p:cNvSpPr/>
+          <p:nvPr/>
+        </p:nvSpPr>
+        <p:spPr>
+          <a:xfrm>
+            <a:off x="2798064" y="4663440"/>
+            <a:ext cx="1618488" cy="402336"/>
+          </a:xfrm>
+          <a:prstGeom prst="rect">
+            <a:avLst/>
+          </a:prstGeom>
+          <a:noFill/>
+          <a:ln/>
+        </p:spPr>
+        <p:txBody>
+          <a:bodyPr wrap="square" lIns="0" tIns="0" rIns="0" bIns="0" rtlCol="0" anchor="ctr"/>
+          <a:lstStyle/>
+          <a:p>
+            <a:pPr marL="0" indent="0" algn="ctr">
+              <a:buNone/>
+            </a:pPr>
+            <a:r>
+              <a:rPr lang="en-US" sz="1150" dirty="0">
+                <a:solidFill>
+                  <a:srgbClr val="CFE0EC"/>
+                </a:solidFill>
+                <a:latin typeface="Tahoma" pitchFamily="34" charset="0"/>
+                <a:ea typeface="Tahoma" pitchFamily="34" charset="-122"/>
+                <a:cs typeface="Tahoma" pitchFamily="34" charset="-120"/>
+              </a:rPr>
+              <a:t>Agent เขียนโค้ด</a:t>
+            </a:r>
+            <a:endParaRPr lang="en-US" sz="1150" dirty="0"/>
+          </a:p>
+        </p:txBody>
+      </p:sp>
+      <p:sp>
+        <p:nvSpPr>
+          <p:cNvPr id="14" name="Shape 12"/>
+          <p:cNvSpPr/>
+          <p:nvPr/>
+        </p:nvSpPr>
+        <p:spPr>
+          <a:xfrm>
+            <a:off x="4581144" y="4663440"/>
+            <a:ext cx="2156155" cy="402336"/>
+          </a:xfrm>
+          <a:prstGeom prst="roundRect">
+            <a:avLst>
+              <a:gd name="adj" fmla="val 50000"/>
+            </a:avLst>
+          </a:prstGeom>
+          <a:solidFill>
+            <a:srgbClr val="1F4463"/>
+          </a:solidFill>
+          <a:ln/>
+        </p:spPr>
+        <p:txBody>
+          <a:bodyPr/>
+          <a:lstStyle/>
+          <a:p>
+            <a:endParaRPr lang="en-TH"/>
+          </a:p>
+        </p:txBody>
+      </p:sp>
+      <p:sp>
+        <p:nvSpPr>
+          <p:cNvPr id="15" name="Text 13"/>
+          <p:cNvSpPr/>
+          <p:nvPr/>
+        </p:nvSpPr>
+        <p:spPr>
+          <a:xfrm>
+            <a:off x="4581144" y="4663440"/>
+            <a:ext cx="2156155" cy="402336"/>
+          </a:xfrm>
+          <a:prstGeom prst="rect">
+            <a:avLst/>
+          </a:prstGeom>
+          <a:noFill/>
+          <a:ln/>
+        </p:spPr>
+        <p:txBody>
+          <a:bodyPr wrap="square" lIns="0" tIns="0" rIns="0" bIns="0" rtlCol="0" anchor="ctr"/>
+          <a:lstStyle/>
+          <a:p>
+            <a:pPr marL="0" indent="0" algn="ctr">
+              <a:buNone/>
+            </a:pPr>
+            <a:r>
+              <a:rPr lang="en-US" sz="1150" dirty="0">
+                <a:solidFill>
+                  <a:srgbClr val="CFE0EC"/>
+                </a:solidFill>
+                <a:latin typeface="Tahoma" pitchFamily="34" charset="0"/>
+                <a:ea typeface="Tahoma" pitchFamily="34" charset="-122"/>
+                <a:cs typeface="Tahoma" pitchFamily="34" charset="-120"/>
+              </a:rPr>
+              <a:t>Browser Agent ตรวจงาน</a:t>
+            </a:r>
+            <a:endParaRPr lang="en-US" sz="1150" dirty="0"/>
+          </a:p>
+        </p:txBody>
+      </p:sp>
+      <p:sp>
+        <p:nvSpPr>
+          <p:cNvPr id="16" name="Shape 14"/>
+          <p:cNvSpPr/>
+          <p:nvPr/>
+        </p:nvSpPr>
+        <p:spPr>
+          <a:xfrm>
+            <a:off x="6901891" y="4663440"/>
+            <a:ext cx="1528877" cy="402336"/>
+          </a:xfrm>
+          <a:prstGeom prst="roundRect">
+            <a:avLst>
+              <a:gd name="adj" fmla="val 50000"/>
+            </a:avLst>
+          </a:prstGeom>
+          <a:solidFill>
+            <a:srgbClr val="1F4463"/>
+          </a:solidFill>
+          <a:ln/>
+        </p:spPr>
+        <p:txBody>
+          <a:bodyPr/>
+          <a:lstStyle/>
+          <a:p>
+            <a:endParaRPr lang="en-TH"/>
+          </a:p>
+        </p:txBody>
+      </p:sp>
+      <p:sp>
+        <p:nvSpPr>
+          <p:cNvPr id="17" name="Text 15"/>
+          <p:cNvSpPr/>
+          <p:nvPr/>
+        </p:nvSpPr>
+        <p:spPr>
+          <a:xfrm>
+            <a:off x="6901891" y="4663440"/>
+            <a:ext cx="1528877" cy="402336"/>
+          </a:xfrm>
+          <a:prstGeom prst="rect">
+            <a:avLst/>
+          </a:prstGeom>
+          <a:noFill/>
+          <a:ln/>
+        </p:spPr>
+        <p:txBody>
+          <a:bodyPr wrap="square" lIns="0" tIns="0" rIns="0" bIns="0" rtlCol="0" anchor="ctr"/>
+          <a:lstStyle/>
+          <a:p>
+            <a:pPr marL="0" indent="0" algn="ctr">
+              <a:buNone/>
+            </a:pPr>
+            <a:r>
+              <a:rPr lang="en-US" sz="1150" dirty="0">
+                <a:solidFill>
+                  <a:srgbClr val="CFE0EC"/>
+                </a:solidFill>
+                <a:latin typeface="Tahoma" pitchFamily="34" charset="0"/>
+                <a:ea typeface="Tahoma" pitchFamily="34" charset="-122"/>
+                <a:cs typeface="Tahoma" pitchFamily="34" charset="-120"/>
+              </a:rPr>
+              <a:t>Deploy ใช้จริง</a:t>
+            </a:r>
+            <a:endParaRPr lang="en-US" sz="1150" dirty="0"/>
+          </a:p>
+        </p:txBody>
+      </p:sp>
+      <p:sp>
+        <p:nvSpPr>
+          <p:cNvPr id="18" name="Text 16"/>
+          <p:cNvSpPr/>
+          <p:nvPr/>
+        </p:nvSpPr>
+        <p:spPr>
+          <a:xfrm>
+            <a:off x="566928" y="5623560"/>
+            <a:ext cx="10058400" cy="329184"/>
+          </a:xfrm>
+          <a:prstGeom prst="rect">
+            <a:avLst/>
+          </a:prstGeom>
+          <a:noFill/>
+          <a:ln/>
+        </p:spPr>
+        <p:txBody>
+          <a:bodyPr wrap="square" lIns="0" tIns="0" rIns="0" bIns="0" rtlCol="0" anchor="ctr"/>
+          <a:lstStyle/>
+          <a:p>
+            <a:pPr marL="0" indent="0">
+              <a:buNone/>
+            </a:pPr>
+            <a:r>
+              <a:rPr lang="th-TH" sz="1200" dirty="0">
+                <a:solidFill>
+                  <a:srgbClr val="8FA9BF"/>
+                </a:solidFill>
+                <a:latin typeface="Tahoma" pitchFamily="34" charset="0"/>
+                <a:ea typeface="Tahoma" pitchFamily="34" charset="-122"/>
+                <a:cs typeface="Tahoma" pitchFamily="34" charset="-120"/>
               </a:rPr>
               <a:t>ศักดิ์ดา หอมหวล</a:t>
             </a:r>
-            <a:endParaRPr lang="en-US" sz="1500" dirty="0"/>
-          </a:p>
-        </p:txBody>
-      </p:sp>
+            <a:endParaRPr lang="en-US" sz="1200" dirty="0"/>
+          </a:p>
+        </p:txBody>
+      </p:sp>
+      <p:sp>
+        <p:nvSpPr>
+          <p:cNvPr id="21" name="Text 18"/>
+          <p:cNvSpPr/>
+          <p:nvPr/>
+        </p:nvSpPr>
+        <p:spPr>
+          <a:xfrm>
+            <a:off x="11064240" y="6382512"/>
+            <a:ext cx="548640" cy="274320"/>
+          </a:xfrm>
+          <a:prstGeom prst="rect">
+            <a:avLst/>
+          </a:prstGeom>
+          <a:noFill/>
+          <a:ln/>
+        </p:spPr>
+        <p:txBody>
+          <a:bodyPr wrap="square" lIns="0" tIns="0" rIns="0" bIns="0" rtlCol="0" anchor="ctr"/>
+          <a:lstStyle/>
+          <a:p>
+            <a:pPr marL="0" indent="0" algn="r">
+              <a:buNone/>
+            </a:pPr>
+            <a:r>
+              <a:rPr lang="en-US" sz="900" dirty="0">
+                <a:solidFill>
+                  <a:srgbClr val="6E7F91"/>
+                </a:solidFill>
+                <a:latin typeface="Tahoma" pitchFamily="34" charset="0"/>
+                <a:ea typeface="Tahoma" pitchFamily="34" charset="-122"/>
+                <a:cs typeface="Tahoma" pitchFamily="34" charset="-120"/>
+              </a:rPr>
+              <a:t>1</a:t>
+            </a:r>
+            <a:endParaRPr lang="en-US" sz="900" dirty="0"/>
+          </a:p>
+        </p:txBody>
+      </p:sp>
+      <p:pic>
+        <p:nvPicPr>
+          <p:cNvPr id="19" name="Picture 18" descr="Antigravity IDE Community - Guides, Tutorials &amp; Reviews (Unofficial)">
+            <a:extLst>
+              <a:ext uri="{FF2B5EF4-FFF2-40B4-BE49-F238E27FC236}">
+                <a16:creationId xmlns:a16="http://schemas.microsoft.com/office/drawing/2014/main" id="{23648048-B75D-7042-BBC9-454592533EE5}"/>
+              </a:ext>
+            </a:extLst>
+          </p:cNvPr>
+          <p:cNvPicPr>
+            <a:picLocks noChangeAspect="1"/>
+          </p:cNvPicPr>
+          <p:nvPr/>
+        </p:nvPicPr>
+        <p:blipFill>
+          <a:blip r:embed="rId3"/>
+          <a:stretch>
+            <a:fillRect/>
+          </a:stretch>
+        </p:blipFill>
+        <p:spPr>
+          <a:xfrm>
+            <a:off x="7525306" y="1591056"/>
+            <a:ext cx="2942083" cy="2706716"/>
+          </a:xfrm>
+          <a:prstGeom prst="rect">
+            <a:avLst/>
+          </a:prstGeom>
+        </p:spPr>
+      </p:pic>
     </p:spTree>
   </p:cSld>
   <p:clrMapOvr>
@@ -4697,7 +5032,7 @@
               <a:buChar char="•"/>
             </a:pPr>
             <a:r>
-              <a:rPr lang="en-US" sz="1700" dirty="0">
+              <a:rPr lang="en-US" sz="2000" dirty="0">
                 <a:solidFill>
                   <a:srgbClr val="393E46"/>
                 </a:solidFill>
@@ -4707,7 +5042,7 @@
               </a:rPr>
               <a:t>สภาพแวดล้อมการพัฒนาแบบ agent-first ของ Google เปิดตัวเดือนพฤศจิกายน 2568 พัฒนาต่อจาก VS Code</a:t>
             </a:r>
-            <a:endParaRPr lang="en-US" sz="1700" dirty="0"/>
+            <a:endParaRPr lang="en-US" sz="2000" dirty="0"/>
           </a:p>
           <a:p>
             <a:pPr marL="342900" indent="-342900">
@@ -4718,7 +5053,7 @@
               <a:buChar char="•"/>
             </a:pPr>
             <a:r>
-              <a:rPr lang="en-US" sz="1700" dirty="0">
+              <a:rPr lang="en-US" sz="2000" dirty="0">
                 <a:solidFill>
                   <a:srgbClr val="393E46"/>
                 </a:solidFill>
@@ -4728,7 +5063,7 @@
               </a:rPr>
               <a:t>แนวคิดหลักคือเรามอบหมายงานระดับ “สิ่งที่อยากได้” ให้ AI Agent แทนการพิมพ์โค้ดทุกบรรทัดเอง</a:t>
             </a:r>
-            <a:endParaRPr lang="en-US" sz="1700" dirty="0"/>
+            <a:endParaRPr lang="en-US" sz="2000" dirty="0"/>
           </a:p>
           <a:p>
             <a:pPr marL="342900" indent="-342900">
@@ -4739,7 +5074,7 @@
               <a:buChar char="•"/>
             </a:pPr>
             <a:r>
-              <a:rPr lang="en-US" sz="1700" dirty="0">
+              <a:rPr lang="en-US" sz="2000" dirty="0">
                 <a:solidFill>
                   <a:srgbClr val="393E46"/>
                 </a:solidFill>
@@ -4749,7 +5084,7 @@
               </a:rPr>
               <a:t>ปี 2569 มี Antigravity 2.0 เป็นแอปแยกสำหรับสั่งงาน Agent หลายตัวพร้อมกัน พร้อม CLI และ SDK</a:t>
             </a:r>
-            <a:endParaRPr lang="en-US" sz="1700" dirty="0"/>
+            <a:endParaRPr lang="en-US" sz="2000" dirty="0"/>
           </a:p>
         </p:txBody>
       </p:sp>
@@ -4858,7 +5193,7 @@
               <a:buNone/>
             </a:pPr>
             <a:r>
-              <a:rPr lang="en-US" sz="1650" dirty="0">
+              <a:rPr lang="en-US" sz="2000" dirty="0">
                 <a:solidFill>
                   <a:srgbClr val="393E46"/>
                 </a:solidFill>
@@ -4868,7 +5203,7 @@
               </a:rPr>
               <a:t>เพราะผู้เริ่มต้นควรเห็นทั้งไฟล์โค้ด หน้าต่างคำสั่ง และเบราว์เซอร์ทดสอบอยู่ในหน้าจอเดียวกัน จะได้เข้าใจว่า Agent กำลังทำอะไรกับโปรเจกต์ของเรา</a:t>
             </a:r>
-            <a:endParaRPr lang="en-US" sz="1650" dirty="0"/>
+            <a:endParaRPr lang="en-US" sz="2000" dirty="0"/>
           </a:p>
         </p:txBody>
       </p:sp>
@@ -13535,6 +13870,166 @@
 
 <file path=ppt/slides/slide22.xml><?xml version="1.0" encoding="utf-8"?>
 <p:sld xmlns:a="http://schemas.openxmlformats.org/drawingml/2006/main" xmlns:r="http://schemas.openxmlformats.org/officeDocument/2006/relationships" xmlns:p="http://schemas.openxmlformats.org/presentationml/2006/main">
+  <p:cSld>
+    <p:spTree>
+      <p:nvGrpSpPr>
+        <p:cNvPr id="1" name=""/>
+        <p:cNvGrpSpPr/>
+        <p:nvPr/>
+      </p:nvGrpSpPr>
+      <p:grpSpPr>
+        <a:xfrm>
+          <a:off x="0" y="0"/>
+          <a:ext cx="0" cy="0"/>
+          <a:chOff x="0" y="0"/>
+          <a:chExt cx="0" cy="0"/>
+        </a:xfrm>
+      </p:grpSpPr>
+      <p:sp>
+        <p:nvSpPr>
+          <p:cNvPr id="3" name="TextBox 2">
+            <a:extLst>
+              <a:ext uri="{FF2B5EF4-FFF2-40B4-BE49-F238E27FC236}">
+                <a16:creationId xmlns:a16="http://schemas.microsoft.com/office/drawing/2014/main" id="{5B27496A-2BA5-5A3D-72E1-B2411E2D0DE3}"/>
+              </a:ext>
+            </a:extLst>
+          </p:cNvPr>
+          <p:cNvSpPr txBox="1"/>
+          <p:nvPr/>
+        </p:nvSpPr>
+        <p:spPr>
+          <a:xfrm>
+            <a:off x="416490" y="5626697"/>
+            <a:ext cx="6093912" cy="307777"/>
+          </a:xfrm>
+          <a:prstGeom prst="rect">
+            <a:avLst/>
+          </a:prstGeom>
+          <a:noFill/>
+        </p:spPr>
+        <p:txBody>
+          <a:bodyPr wrap="square">
+            <a:spAutoFit/>
+          </a:bodyPr>
+          <a:lstStyle/>
+          <a:p>
+            <a:r>
+              <a:rPr lang="en-TH" sz="1400"/>
+              <a:t>https://ixdf.org/literature/article/top-10-ui-trends-every-designer-should-know</a:t>
+            </a:r>
+          </a:p>
+        </p:txBody>
+      </p:sp>
+      <p:sp>
+        <p:nvSpPr>
+          <p:cNvPr id="5" name="TextBox 4">
+            <a:extLst>
+              <a:ext uri="{FF2B5EF4-FFF2-40B4-BE49-F238E27FC236}">
+                <a16:creationId xmlns:a16="http://schemas.microsoft.com/office/drawing/2014/main" id="{DA05E196-E949-DE44-FE48-457784EBC698}"/>
+              </a:ext>
+            </a:extLst>
+          </p:cNvPr>
+          <p:cNvSpPr txBox="1"/>
+          <p:nvPr/>
+        </p:nvSpPr>
+        <p:spPr>
+          <a:xfrm>
+            <a:off x="7280753" y="5626697"/>
+            <a:ext cx="6093912" cy="307777"/>
+          </a:xfrm>
+          <a:prstGeom prst="rect">
+            <a:avLst/>
+          </a:prstGeom>
+          <a:noFill/>
+        </p:spPr>
+        <p:txBody>
+          <a:bodyPr wrap="square">
+            <a:spAutoFit/>
+          </a:bodyPr>
+          <a:lstStyle/>
+          <a:p>
+            <a:r>
+              <a:rPr lang="en-TH" sz="1400"/>
+              <a:t>https://www.uistyleguide.com/</a:t>
+            </a:r>
+          </a:p>
+        </p:txBody>
+      </p:sp>
+      <p:pic>
+        <p:nvPicPr>
+          <p:cNvPr id="7" name="Picture 6">
+            <a:extLst>
+              <a:ext uri="{FF2B5EF4-FFF2-40B4-BE49-F238E27FC236}">
+                <a16:creationId xmlns:a16="http://schemas.microsoft.com/office/drawing/2014/main" id="{BA2080FF-2229-41D4-95D0-E027681C9D5F}"/>
+              </a:ext>
+            </a:extLst>
+          </p:cNvPr>
+          <p:cNvPicPr>
+            <a:picLocks noChangeAspect="1"/>
+          </p:cNvPicPr>
+          <p:nvPr/>
+        </p:nvPicPr>
+        <p:blipFill>
+          <a:blip r:embed="rId2"/>
+          <a:stretch>
+            <a:fillRect/>
+          </a:stretch>
+        </p:blipFill>
+        <p:spPr>
+          <a:xfrm>
+            <a:off x="889348" y="637766"/>
+            <a:ext cx="3206663" cy="4784973"/>
+          </a:xfrm>
+          <a:prstGeom prst="rect">
+            <a:avLst/>
+          </a:prstGeom>
+        </p:spPr>
+      </p:pic>
+      <p:pic>
+        <p:nvPicPr>
+          <p:cNvPr id="9" name="Picture 8">
+            <a:extLst>
+              <a:ext uri="{FF2B5EF4-FFF2-40B4-BE49-F238E27FC236}">
+                <a16:creationId xmlns:a16="http://schemas.microsoft.com/office/drawing/2014/main" id="{C1DBBC1F-7B69-DDD2-31F2-83BF9F61A3F5}"/>
+              </a:ext>
+            </a:extLst>
+          </p:cNvPr>
+          <p:cNvPicPr>
+            <a:picLocks noChangeAspect="1"/>
+          </p:cNvPicPr>
+          <p:nvPr/>
+        </p:nvPicPr>
+        <p:blipFill>
+          <a:blip r:embed="rId3"/>
+          <a:stretch>
+            <a:fillRect/>
+          </a:stretch>
+        </p:blipFill>
+        <p:spPr>
+          <a:xfrm>
+            <a:off x="5997530" y="1252602"/>
+            <a:ext cx="5845827" cy="3669095"/>
+          </a:xfrm>
+          <a:prstGeom prst="rect">
+            <a:avLst/>
+          </a:prstGeom>
+        </p:spPr>
+      </p:pic>
+    </p:spTree>
+    <p:extLst>
+      <p:ext uri="{BB962C8B-B14F-4D97-AF65-F5344CB8AC3E}">
+        <p14:creationId xmlns:p14="http://schemas.microsoft.com/office/powerpoint/2010/main" val="1151974160"/>
+      </p:ext>
+    </p:extLst>
+  </p:cSld>
+  <p:clrMapOvr>
+    <a:masterClrMapping/>
+  </p:clrMapOvr>
+</p:sld>
+</file>
+
+<file path=ppt/slides/slide23.xml><?xml version="1.0" encoding="utf-8"?>
+<p:sld xmlns:a="http://schemas.openxmlformats.org/drawingml/2006/main" xmlns:r="http://schemas.openxmlformats.org/officeDocument/2006/relationships" xmlns:p="http://schemas.openxmlformats.org/presentationml/2006/main">
   <p:cSld name="Slide 26">
     <p:bg>
       <p:bgPr>
@@ -13630,7 +14125,7 @@
                 <a:ea typeface="TH Sarabun New" pitchFamily="34" charset="-122"/>
                 <a:cs typeface="TH Sarabun New" pitchFamily="34" charset="-120"/>
               </a:rPr>
-              <a:t>เลือกจานสี : colorhunt.co</a:t>
+              <a:t>เลือกสี : colorhunt.co</a:t>
             </a:r>
             <a:endParaRPr lang="en-US" sz="3200" dirty="0"/>
           </a:p>
@@ -15001,7 +15496,102 @@
 </p:sld>
 </file>
 
-<file path=ppt/slides/slide23.xml><?xml version="1.0" encoding="utf-8"?>
+<file path=ppt/slides/slide24.xml><?xml version="1.0" encoding="utf-8"?>
+<p:sld xmlns:a="http://schemas.openxmlformats.org/drawingml/2006/main" xmlns:r="http://schemas.openxmlformats.org/officeDocument/2006/relationships" xmlns:p="http://schemas.openxmlformats.org/presentationml/2006/main">
+  <p:cSld>
+    <p:spTree>
+      <p:nvGrpSpPr>
+        <p:cNvPr id="1" name=""/>
+        <p:cNvGrpSpPr/>
+        <p:nvPr/>
+      </p:nvGrpSpPr>
+      <p:grpSpPr>
+        <a:xfrm>
+          <a:off x="0" y="0"/>
+          <a:ext cx="0" cy="0"/>
+          <a:chOff x="0" y="0"/>
+          <a:chExt cx="0" cy="0"/>
+        </a:xfrm>
+      </p:grpSpPr>
+      <p:pic>
+        <p:nvPicPr>
+          <p:cNvPr id="2" name="Picture 1">
+            <a:extLst>
+              <a:ext uri="{FF2B5EF4-FFF2-40B4-BE49-F238E27FC236}">
+                <a16:creationId xmlns:a16="http://schemas.microsoft.com/office/drawing/2014/main" id="{09B78BE8-CFA4-D873-DA78-DE403BBA6BAA}"/>
+              </a:ext>
+            </a:extLst>
+          </p:cNvPr>
+          <p:cNvPicPr>
+            <a:picLocks noChangeAspect="1"/>
+          </p:cNvPicPr>
+          <p:nvPr/>
+        </p:nvPicPr>
+        <p:blipFill>
+          <a:blip r:embed="rId2"/>
+          <a:stretch>
+            <a:fillRect/>
+          </a:stretch>
+        </p:blipFill>
+        <p:spPr>
+          <a:xfrm>
+            <a:off x="2491113" y="445974"/>
+            <a:ext cx="7209773" cy="5557422"/>
+          </a:xfrm>
+          <a:prstGeom prst="rect">
+            <a:avLst/>
+          </a:prstGeom>
+        </p:spPr>
+      </p:pic>
+      <p:sp>
+        <p:nvSpPr>
+          <p:cNvPr id="4" name="TextBox 3">
+            <a:extLst>
+              <a:ext uri="{FF2B5EF4-FFF2-40B4-BE49-F238E27FC236}">
+                <a16:creationId xmlns:a16="http://schemas.microsoft.com/office/drawing/2014/main" id="{D5EB1F6F-D3EE-BAC3-1304-DEA56D3D870A}"/>
+              </a:ext>
+            </a:extLst>
+          </p:cNvPr>
+          <p:cNvSpPr txBox="1"/>
+          <p:nvPr/>
+        </p:nvSpPr>
+        <p:spPr>
+          <a:xfrm>
+            <a:off x="2583493" y="6073242"/>
+            <a:ext cx="6093912" cy="369332"/>
+          </a:xfrm>
+          <a:prstGeom prst="rect">
+            <a:avLst/>
+          </a:prstGeom>
+          <a:noFill/>
+        </p:spPr>
+        <p:txBody>
+          <a:bodyPr wrap="square">
+            <a:spAutoFit/>
+          </a:bodyPr>
+          <a:lstStyle/>
+          <a:p>
+            <a:r>
+              <a:rPr lang="en-TH"/>
+              <a:t>https://colorhunt.co/</a:t>
+            </a:r>
+          </a:p>
+        </p:txBody>
+      </p:sp>
+    </p:spTree>
+    <p:extLst>
+      <p:ext uri="{BB962C8B-B14F-4D97-AF65-F5344CB8AC3E}">
+        <p14:creationId xmlns:p14="http://schemas.microsoft.com/office/powerpoint/2010/main" val="1853283140"/>
+      </p:ext>
+    </p:extLst>
+  </p:cSld>
+  <p:clrMapOvr>
+    <a:masterClrMapping/>
+  </p:clrMapOvr>
+</p:sld>
+</file>
+
+<file path=ppt/slides/slide25.xml><?xml version="1.0" encoding="utf-8"?>
 <p:sld xmlns:a="http://schemas.openxmlformats.org/drawingml/2006/main" xmlns:r="http://schemas.openxmlformats.org/officeDocument/2006/relationships" xmlns:p="http://schemas.openxmlformats.org/presentationml/2006/main">
   <p:cSld name="Slide 27">
     <p:bg>
@@ -16390,7 +16980,102 @@
 </p:sld>
 </file>
 
-<file path=ppt/slides/slide24.xml><?xml version="1.0" encoding="utf-8"?>
+<file path=ppt/slides/slide26.xml><?xml version="1.0" encoding="utf-8"?>
+<p:sld xmlns:a="http://schemas.openxmlformats.org/drawingml/2006/main" xmlns:r="http://schemas.openxmlformats.org/officeDocument/2006/relationships" xmlns:p="http://schemas.openxmlformats.org/presentationml/2006/main">
+  <p:cSld>
+    <p:spTree>
+      <p:nvGrpSpPr>
+        <p:cNvPr id="1" name=""/>
+        <p:cNvGrpSpPr/>
+        <p:nvPr/>
+      </p:nvGrpSpPr>
+      <p:grpSpPr>
+        <a:xfrm>
+          <a:off x="0" y="0"/>
+          <a:ext cx="0" cy="0"/>
+          <a:chOff x="0" y="0"/>
+          <a:chExt cx="0" cy="0"/>
+        </a:xfrm>
+      </p:grpSpPr>
+      <p:pic>
+        <p:nvPicPr>
+          <p:cNvPr id="2" name="Picture 1">
+            <a:extLst>
+              <a:ext uri="{FF2B5EF4-FFF2-40B4-BE49-F238E27FC236}">
+                <a16:creationId xmlns:a16="http://schemas.microsoft.com/office/drawing/2014/main" id="{013F3709-EC61-39AB-69FD-B6876A28515E}"/>
+              </a:ext>
+            </a:extLst>
+          </p:cNvPr>
+          <p:cNvPicPr>
+            <a:picLocks noChangeAspect="1"/>
+          </p:cNvPicPr>
+          <p:nvPr/>
+        </p:nvPicPr>
+        <p:blipFill>
+          <a:blip r:embed="rId2"/>
+          <a:stretch>
+            <a:fillRect/>
+          </a:stretch>
+        </p:blipFill>
+        <p:spPr>
+          <a:xfrm>
+            <a:off x="2209800" y="701457"/>
+            <a:ext cx="7772400" cy="5164721"/>
+          </a:xfrm>
+          <a:prstGeom prst="rect">
+            <a:avLst/>
+          </a:prstGeom>
+        </p:spPr>
+      </p:pic>
+      <p:sp>
+        <p:nvSpPr>
+          <p:cNvPr id="4" name="TextBox 3">
+            <a:extLst>
+              <a:ext uri="{FF2B5EF4-FFF2-40B4-BE49-F238E27FC236}">
+                <a16:creationId xmlns:a16="http://schemas.microsoft.com/office/drawing/2014/main" id="{2F7F63ED-EEDD-2394-5122-D80F4E2ADF0A}"/>
+              </a:ext>
+            </a:extLst>
+          </p:cNvPr>
+          <p:cNvSpPr txBox="1"/>
+          <p:nvPr/>
+        </p:nvSpPr>
+        <p:spPr>
+          <a:xfrm>
+            <a:off x="2520863" y="6208645"/>
+            <a:ext cx="6093912" cy="369332"/>
+          </a:xfrm>
+          <a:prstGeom prst="rect">
+            <a:avLst/>
+          </a:prstGeom>
+          <a:noFill/>
+        </p:spPr>
+        <p:txBody>
+          <a:bodyPr wrap="square">
+            <a:spAutoFit/>
+          </a:bodyPr>
+          <a:lstStyle/>
+          <a:p>
+            <a:r>
+              <a:rPr lang="en-TH"/>
+              <a:t>https://fonts.google.com/?query=thai</a:t>
+            </a:r>
+          </a:p>
+        </p:txBody>
+      </p:sp>
+    </p:spTree>
+    <p:extLst>
+      <p:ext uri="{BB962C8B-B14F-4D97-AF65-F5344CB8AC3E}">
+        <p14:creationId xmlns:p14="http://schemas.microsoft.com/office/powerpoint/2010/main" val="3116714125"/>
+      </p:ext>
+    </p:extLst>
+  </p:cSld>
+  <p:clrMapOvr>
+    <a:masterClrMapping/>
+  </p:clrMapOvr>
+</p:sld>
+</file>
+
+<file path=ppt/slides/slide27.xml><?xml version="1.0" encoding="utf-8"?>
 <p:sld xmlns:a="http://schemas.openxmlformats.org/drawingml/2006/main" xmlns:r="http://schemas.openxmlformats.org/officeDocument/2006/relationships" xmlns:p="http://schemas.openxmlformats.org/presentationml/2006/main">
   <p:cSld name="Slide 29">
     <p:bg>
@@ -16597,7 +17282,7 @@
                 <a:ea typeface="TH Sarabun New" pitchFamily="34" charset="-122"/>
                 <a:cs typeface="TH Sarabun New" pitchFamily="34" charset="-120"/>
               </a:rPr>
-              <a:t>จากสเปกบนกระดาษ สู่ระบบที่ใช้งานได้จริง</a:t>
+              <a:t>จากสเปก สู่ระบบที่ใช้งานได้จริง</a:t>
             </a:r>
             <a:endParaRPr lang="en-US" sz="1700" dirty="0"/>
           </a:p>
@@ -16611,7 +17296,7 @@
 </p:sld>
 </file>
 
-<file path=ppt/slides/slide25.xml><?xml version="1.0" encoding="utf-8"?>
+<file path=ppt/slides/slide28.xml><?xml version="1.0" encoding="utf-8"?>
 <p:sld xmlns:a="http://schemas.openxmlformats.org/drawingml/2006/main" xmlns:r="http://schemas.openxmlformats.org/officeDocument/2006/relationships" xmlns:p="http://schemas.openxmlformats.org/presentationml/2006/main">
   <p:cSld name="Slide 30">
     <p:bg>
@@ -16929,7 +17614,7 @@
               <a:buNone/>
             </a:pPr>
             <a:r>
-              <a:rPr lang="en-US" sz="1500" dirty="0">
+              <a:rPr lang="en-US" dirty="0">
                 <a:solidFill>
                   <a:srgbClr val="393E46"/>
                 </a:solidFill>
@@ -16939,7 +17624,7 @@
               </a:rPr>
               <a:t>ตั้งชื่อ fundinghub เลือก region Singapore และตั้งรหัสผ่านฐานข้อมูลเอง</a:t>
             </a:r>
-            <a:endParaRPr lang="en-US" sz="1500" dirty="0"/>
+            <a:endParaRPr lang="en-US" dirty="0"/>
           </a:p>
         </p:txBody>
       </p:sp>
@@ -17116,7 +17801,7 @@
           <a:lstStyle/>
           <a:p>
             <a:r>
-              <a:rPr lang="en-US" sz="1500" dirty="0">
+              <a:rPr lang="en-US" dirty="0">
                 <a:solidFill>
                   <a:srgbClr val="393E46"/>
                 </a:solidFill>
@@ -17127,7 +17812,7 @@
               <a:t>คัดลอกคำสั่งจาก จาก AI </a:t>
             </a:r>
             <a:r>
-              <a:rPr lang="th-TH" sz="1500" dirty="0">
+              <a:rPr lang="th-TH" dirty="0">
                 <a:solidFill>
                   <a:srgbClr val="393E46"/>
                 </a:solidFill>
@@ -17138,7 +17823,7 @@
               <a:t>ที่ให้มา </a:t>
             </a:r>
             <a:r>
-              <a:rPr lang="en-US" sz="1500" dirty="0">
+              <a:rPr lang="en-US" dirty="0">
                 <a:solidFill>
                   <a:srgbClr val="393E46"/>
                 </a:solidFill>
@@ -17148,7 +17833,7 @@
               </a:rPr>
               <a:t>ครอบคลุมตาราง ดัชนี trigger และ RLS policy</a:t>
             </a:r>
-            <a:endParaRPr lang="en-US" sz="1500" dirty="0"/>
+            <a:endParaRPr lang="en-US" dirty="0"/>
           </a:p>
         </p:txBody>
       </p:sp>
@@ -17328,7 +18013,7 @@
               <a:buNone/>
             </a:pPr>
             <a:r>
-              <a:rPr lang="en-US" sz="1500" dirty="0">
+              <a:rPr lang="en-US" dirty="0">
                 <a:solidFill>
                   <a:srgbClr val="393E46"/>
                 </a:solidFill>
@@ -17339,7 +18024,7 @@
               <a:t>รัน INSERT จาก AI </a:t>
             </a:r>
             <a:r>
-              <a:rPr lang="th-TH" sz="1500" dirty="0">
+              <a:rPr lang="th-TH" dirty="0">
                 <a:solidFill>
                   <a:srgbClr val="393E46"/>
                 </a:solidFill>
@@ -17350,7 +18035,7 @@
               <a:t>ที่ให้มา </a:t>
             </a:r>
             <a:r>
-              <a:rPr lang="en-US" sz="1500" dirty="0">
+              <a:rPr lang="en-US" dirty="0">
                 <a:solidFill>
                   <a:srgbClr val="393E46"/>
                 </a:solidFill>
@@ -17360,7 +18045,7 @@
               </a:rPr>
               <a:t>แล้วคัดลอก Project URL กับ anon key มาไว้ใน .env.local</a:t>
             </a:r>
-            <a:endParaRPr lang="en-US" sz="1500" dirty="0"/>
+            <a:endParaRPr lang="en-US" dirty="0"/>
           </a:p>
         </p:txBody>
       </p:sp>
@@ -17469,7 +18154,7 @@
               <a:buNone/>
             </a:pPr>
             <a:r>
-              <a:rPr lang="en-US" sz="1500" dirty="0">
+              <a:rPr lang="en-US" dirty="0">
                 <a:solidFill>
                   <a:srgbClr val="393E46"/>
                 </a:solidFill>
@@ -17479,7 +18164,7 @@
               </a:rPr>
               <a:t>กติกาในฐานข้อมูลที่กำหนดว่า “ใครทำอะไรกับแถวไหนได้บ้าง” เวิร์กช็อปนี้เปิดสิทธิ์ให้ทุกคนเพื่อความง่าย แต่ระบบใช้งานจริงต้องผูกกับผู้ใช้ที่ล็อกอิน</a:t>
             </a:r>
-            <a:endParaRPr lang="en-US" sz="1500" dirty="0"/>
+            <a:endParaRPr lang="en-US" dirty="0"/>
           </a:p>
         </p:txBody>
       </p:sp>
@@ -17743,17 +18428,9 @@
 </p:sld>
 </file>
 
-<file path=ppt/slides/slide26.xml><?xml version="1.0" encoding="utf-8"?>
+<file path=ppt/slides/slide29.xml><?xml version="1.0" encoding="utf-8"?>
 <p:sld xmlns:a="http://schemas.openxmlformats.org/drawingml/2006/main" xmlns:r="http://schemas.openxmlformats.org/officeDocument/2006/relationships" xmlns:p="http://schemas.openxmlformats.org/presentationml/2006/main">
-  <p:cSld name="Slide 37">
-    <p:bg>
-      <p:bgPr>
-        <a:solidFill>
-          <a:srgbClr val="FFFFFF"/>
-        </a:solidFill>
-        <a:effectLst/>
-      </p:bgPr>
-    </p:bg>
+  <p:cSld>
     <p:spTree>
       <p:nvGrpSpPr>
         <p:cNvPr id="1" name=""/>
@@ -17770,204 +18447,20 @@
       </p:grpSpPr>
       <p:sp>
         <p:nvSpPr>
-          <p:cNvPr id="2" name="Text 0"/>
-          <p:cNvSpPr/>
-          <p:nvPr/>
-        </p:nvSpPr>
-        <p:spPr>
-          <a:xfrm>
-            <a:off x="11018520" y="6263640"/>
-            <a:ext cx="548640" cy="274320"/>
-          </a:xfrm>
-          <a:prstGeom prst="rect">
-            <a:avLst/>
-          </a:prstGeom>
-          <a:noFill/>
-          <a:ln/>
-        </p:spPr>
-        <p:txBody>
-          <a:bodyPr wrap="square" lIns="0" tIns="0" rIns="0" bIns="0" rtlCol="0" anchor="ctr"/>
-          <a:lstStyle/>
-          <a:p>
-            <a:pPr marL="0" indent="0" algn="r">
-              <a:buNone/>
-            </a:pPr>
-            <a:r>
-              <a:rPr lang="en-US" sz="1200" dirty="0">
-                <a:solidFill>
-                  <a:srgbClr val="9AA3AD"/>
-                </a:solidFill>
-                <a:latin typeface="TH Sarabun New" pitchFamily="34" charset="0"/>
-                <a:ea typeface="TH Sarabun New" pitchFamily="34" charset="-122"/>
-                <a:cs typeface="TH Sarabun New" pitchFamily="34" charset="-120"/>
-              </a:rPr>
-              <a:t>37</a:t>
-            </a:r>
-            <a:endParaRPr lang="en-US" sz="1200" dirty="0"/>
-          </a:p>
-        </p:txBody>
-      </p:sp>
-      <p:sp>
-        <p:nvSpPr>
-          <p:cNvPr id="3" name="Text 1"/>
-          <p:cNvSpPr/>
-          <p:nvPr/>
-        </p:nvSpPr>
-        <p:spPr>
-          <a:xfrm>
-            <a:off x="594360" y="329184"/>
-            <a:ext cx="10972800" cy="566928"/>
-          </a:xfrm>
-          <a:prstGeom prst="rect">
-            <a:avLst/>
-          </a:prstGeom>
-          <a:noFill/>
-          <a:ln/>
-        </p:spPr>
-        <p:txBody>
-          <a:bodyPr wrap="square" lIns="0" tIns="0" rIns="0" bIns="0" rtlCol="0" anchor="ctr"/>
-          <a:lstStyle/>
-          <a:p>
-            <a:pPr marL="0" indent="0">
-              <a:buNone/>
-            </a:pPr>
-            <a:r>
-              <a:rPr lang="en-US" sz="3200" b="1" dirty="0">
-                <a:solidFill>
-                  <a:srgbClr val="222831"/>
-                </a:solidFill>
-                <a:latin typeface="TH Sarabun New" pitchFamily="34" charset="0"/>
-                <a:ea typeface="TH Sarabun New" pitchFamily="34" charset="-122"/>
-                <a:cs typeface="TH Sarabun New" pitchFamily="34" charset="-120"/>
-              </a:rPr>
-              <a:t>ข้อจำกัดของ AI และความรับผิดชอบของเรา</a:t>
-            </a:r>
-            <a:endParaRPr lang="en-US" sz="3200" dirty="0"/>
-          </a:p>
-        </p:txBody>
-      </p:sp>
-      <p:sp>
-        <p:nvSpPr>
-          <p:cNvPr id="4" name="Text 2"/>
-          <p:cNvSpPr/>
-          <p:nvPr/>
-        </p:nvSpPr>
-        <p:spPr>
-          <a:xfrm>
-            <a:off x="594360" y="896112"/>
-            <a:ext cx="10972800" cy="329184"/>
-          </a:xfrm>
-          <a:prstGeom prst="rect">
-            <a:avLst/>
-          </a:prstGeom>
-          <a:noFill/>
-          <a:ln/>
-        </p:spPr>
-        <p:txBody>
-          <a:bodyPr wrap="square" lIns="0" tIns="0" rIns="0" bIns="0" rtlCol="0" anchor="ctr"/>
-          <a:lstStyle/>
-          <a:p>
-            <a:pPr marL="0" indent="0">
-              <a:buNone/>
-            </a:pPr>
-            <a:r>
-              <a:rPr lang="en-US" sz="1700" dirty="0">
-                <a:solidFill>
-                  <a:srgbClr val="8A94A6"/>
-                </a:solidFill>
-                <a:latin typeface="TH Sarabun New" pitchFamily="34" charset="0"/>
-                <a:ea typeface="TH Sarabun New" pitchFamily="34" charset="-122"/>
-                <a:cs typeface="TH Sarabun New" pitchFamily="34" charset="-120"/>
-              </a:rPr>
-              <a:t>สิ่งที่ต้องจำให้ขึ้นใจเมื่อกลับไปทำงานจริง</a:t>
-            </a:r>
-            <a:endParaRPr lang="en-US" sz="1700" dirty="0"/>
-          </a:p>
-        </p:txBody>
-      </p:sp>
-      <p:sp>
-        <p:nvSpPr>
-          <p:cNvPr id="5" name="Shape 3"/>
-          <p:cNvSpPr/>
-          <p:nvPr/>
-        </p:nvSpPr>
-        <p:spPr>
-          <a:xfrm>
-            <a:off x="594360" y="1481328"/>
-            <a:ext cx="5340096" cy="1572768"/>
-          </a:xfrm>
-          <a:prstGeom prst="roundRect">
-            <a:avLst>
-              <a:gd name="adj" fmla="val 5233"/>
-            </a:avLst>
-          </a:prstGeom>
-          <a:solidFill>
-            <a:srgbClr val="F5F7F8"/>
-          </a:solidFill>
-          <a:ln w="9525">
-            <a:solidFill>
-              <a:srgbClr val="F5F7F8"/>
-            </a:solidFill>
-            <a:prstDash val="solid"/>
-          </a:ln>
-          <a:effectLst>
-            <a:outerShdw blurRad="101600" dist="12700" dir="5400000" algn="bl" rotWithShape="0">
-              <a:srgbClr val="222831">
-                <a:alpha val="10000"/>
-              </a:srgbClr>
-            </a:outerShdw>
-          </a:effectLst>
-        </p:spPr>
-        <p:txBody>
-          <a:bodyPr/>
-          <a:lstStyle/>
-          <a:p>
-            <a:endParaRPr lang="en-TH"/>
-          </a:p>
-        </p:txBody>
-      </p:sp>
-      <p:sp>
-        <p:nvSpPr>
-          <p:cNvPr id="6" name="Shape 4"/>
-          <p:cNvSpPr/>
-          <p:nvPr/>
-        </p:nvSpPr>
-        <p:spPr>
-          <a:xfrm>
-            <a:off x="850392" y="1737360"/>
-            <a:ext cx="402336" cy="402336"/>
-          </a:xfrm>
-          <a:prstGeom prst="ellipse">
-            <a:avLst/>
-          </a:prstGeom>
-          <a:solidFill>
-            <a:srgbClr val="00ADB5"/>
-          </a:solidFill>
-          <a:ln w="12700">
-            <a:solidFill>
-              <a:srgbClr val="00ADB5"/>
-            </a:solidFill>
-            <a:prstDash val="solid"/>
-          </a:ln>
-        </p:spPr>
-        <p:txBody>
-          <a:bodyPr/>
-          <a:lstStyle/>
-          <a:p>
-            <a:endParaRPr lang="en-TH"/>
-          </a:p>
-        </p:txBody>
-      </p:sp>
-      <p:sp>
-        <p:nvSpPr>
-          <p:cNvPr id="7" name="Text 5"/>
-          <p:cNvSpPr/>
-          <p:nvPr/>
-        </p:nvSpPr>
-        <p:spPr>
-          <a:xfrm>
-            <a:off x="850392" y="1737360"/>
-            <a:ext cx="402336" cy="402336"/>
+          <p:cNvPr id="2" name="Text 2">
+            <a:extLst>
+              <a:ext uri="{FF2B5EF4-FFF2-40B4-BE49-F238E27FC236}">
+                <a16:creationId xmlns:a16="http://schemas.microsoft.com/office/drawing/2014/main" id="{F555BF37-A986-2AF9-A98F-97D659CA9AEB}"/>
+              </a:ext>
+            </a:extLst>
+          </p:cNvPr>
+          <p:cNvSpPr/>
+          <p:nvPr/>
+        </p:nvSpPr>
+        <p:spPr>
+          <a:xfrm>
+            <a:off x="0" y="3108960"/>
+            <a:ext cx="12191999" cy="640080"/>
           </a:xfrm>
           <a:prstGeom prst="rect">
             <a:avLst/>
@@ -17983,1590 +18476,23 @@
               <a:buNone/>
             </a:pPr>
             <a:r>
-              <a:rPr lang="en-US" sz="1500" b="1" dirty="0">
-                <a:solidFill>
-                  <a:srgbClr val="FFFFFF"/>
-                </a:solidFill>
-                <a:latin typeface="TH Sarabun New" pitchFamily="34" charset="0"/>
-                <a:ea typeface="TH Sarabun New" pitchFamily="34" charset="-122"/>
-                <a:cs typeface="TH Sarabun New" pitchFamily="34" charset="-120"/>
-              </a:rPr>
-              <a:t>1</a:t>
-            </a:r>
-            <a:endParaRPr lang="en-US" sz="1500" dirty="0"/>
-          </a:p>
-        </p:txBody>
-      </p:sp>
-      <p:sp>
-        <p:nvSpPr>
-          <p:cNvPr id="8" name="Text 6"/>
-          <p:cNvSpPr/>
-          <p:nvPr/>
-        </p:nvSpPr>
-        <p:spPr>
-          <a:xfrm>
-            <a:off x="1380744" y="1700784"/>
-            <a:ext cx="4389120" cy="384048"/>
-          </a:xfrm>
-          <a:prstGeom prst="rect">
-            <a:avLst/>
-          </a:prstGeom>
-          <a:noFill/>
-          <a:ln/>
-        </p:spPr>
-        <p:txBody>
-          <a:bodyPr wrap="square" lIns="0" tIns="0" rIns="0" bIns="0" rtlCol="0" anchor="ctr"/>
-          <a:lstStyle/>
-          <a:p>
-            <a:pPr marL="0" indent="0">
-              <a:buNone/>
-            </a:pPr>
-            <a:r>
-              <a:rPr lang="en-US" sz="1800" b="1" dirty="0">
-                <a:solidFill>
-                  <a:srgbClr val="222831"/>
-                </a:solidFill>
-                <a:latin typeface="TH Sarabun New" pitchFamily="34" charset="0"/>
-                <a:ea typeface="TH Sarabun New" pitchFamily="34" charset="-122"/>
-                <a:cs typeface="TH Sarabun New" pitchFamily="34" charset="-120"/>
-              </a:rPr>
-              <a:t>AI ไม่รู้ว่าอะไรถูก ถ้าเราไม่บอก</a:t>
-            </a:r>
-            <a:endParaRPr lang="en-US" sz="1800" dirty="0"/>
-          </a:p>
-        </p:txBody>
-      </p:sp>
-      <p:sp>
-        <p:nvSpPr>
-          <p:cNvPr id="9" name="Text 7"/>
-          <p:cNvSpPr/>
-          <p:nvPr/>
-        </p:nvSpPr>
-        <p:spPr>
-          <a:xfrm>
-            <a:off x="1380744" y="2139696"/>
-            <a:ext cx="4389120" cy="777240"/>
-          </a:xfrm>
-          <a:prstGeom prst="rect">
-            <a:avLst/>
-          </a:prstGeom>
-          <a:noFill/>
-          <a:ln/>
-        </p:spPr>
-        <p:txBody>
-          <a:bodyPr wrap="square" lIns="0" tIns="0" rIns="0" bIns="0" rtlCol="0" anchor="ctr"/>
-          <a:lstStyle/>
-          <a:p>
-            <a:pPr marL="0" indent="0">
-              <a:buNone/>
-            </a:pPr>
-            <a:r>
-              <a:rPr lang="en-US" sz="1550" dirty="0">
-                <a:solidFill>
-                  <a:srgbClr val="393E46"/>
-                </a:solidFill>
-                <a:latin typeface="TH Sarabun New" pitchFamily="34" charset="0"/>
-                <a:ea typeface="TH Sarabun New" pitchFamily="34" charset="-122"/>
-                <a:cs typeface="TH Sarabun New" pitchFamily="34" charset="-120"/>
-              </a:rPr>
-              <a:t>มันทำตามสิ่งที่เขียนไว้ ไม่ใช่สิ่งที่เราคิดในใจ ความคลุมเครือทุกจุดจะกลายเป็นการเดา</a:t>
-            </a:r>
-            <a:endParaRPr lang="en-US" sz="1550" dirty="0"/>
-          </a:p>
-        </p:txBody>
-      </p:sp>
-      <p:sp>
-        <p:nvSpPr>
-          <p:cNvPr id="10" name="Shape 8"/>
-          <p:cNvSpPr/>
-          <p:nvPr/>
-        </p:nvSpPr>
-        <p:spPr>
-          <a:xfrm>
-            <a:off x="6227064" y="1481328"/>
-            <a:ext cx="5340096" cy="1572768"/>
-          </a:xfrm>
-          <a:prstGeom prst="roundRect">
-            <a:avLst>
-              <a:gd name="adj" fmla="val 5233"/>
-            </a:avLst>
-          </a:prstGeom>
-          <a:solidFill>
-            <a:srgbClr val="F5F7F8"/>
-          </a:solidFill>
-          <a:ln w="9525">
-            <a:solidFill>
-              <a:srgbClr val="F5F7F8"/>
-            </a:solidFill>
-            <a:prstDash val="solid"/>
-          </a:ln>
-          <a:effectLst>
-            <a:outerShdw blurRad="101600" dist="12700" dir="5400000" algn="bl" rotWithShape="0">
-              <a:srgbClr val="222831">
-                <a:alpha val="10000"/>
-              </a:srgbClr>
-            </a:outerShdw>
-          </a:effectLst>
-        </p:spPr>
-        <p:txBody>
-          <a:bodyPr/>
-          <a:lstStyle/>
-          <a:p>
-            <a:endParaRPr lang="en-TH"/>
-          </a:p>
-        </p:txBody>
-      </p:sp>
-      <p:sp>
-        <p:nvSpPr>
-          <p:cNvPr id="11" name="Shape 9"/>
-          <p:cNvSpPr/>
-          <p:nvPr/>
-        </p:nvSpPr>
-        <p:spPr>
-          <a:xfrm>
-            <a:off x="6483096" y="1737360"/>
-            <a:ext cx="402336" cy="402336"/>
-          </a:xfrm>
-          <a:prstGeom prst="ellipse">
-            <a:avLst/>
-          </a:prstGeom>
-          <a:solidFill>
-            <a:srgbClr val="00ADB5"/>
-          </a:solidFill>
-          <a:ln w="12700">
-            <a:solidFill>
-              <a:srgbClr val="00ADB5"/>
-            </a:solidFill>
-            <a:prstDash val="solid"/>
-          </a:ln>
-        </p:spPr>
-        <p:txBody>
-          <a:bodyPr/>
-          <a:lstStyle/>
-          <a:p>
-            <a:endParaRPr lang="en-TH"/>
-          </a:p>
-        </p:txBody>
-      </p:sp>
-      <p:sp>
-        <p:nvSpPr>
-          <p:cNvPr id="12" name="Text 10"/>
-          <p:cNvSpPr/>
-          <p:nvPr/>
-        </p:nvSpPr>
-        <p:spPr>
-          <a:xfrm>
-            <a:off x="6483096" y="1737360"/>
-            <a:ext cx="402336" cy="402336"/>
-          </a:xfrm>
-          <a:prstGeom prst="rect">
-            <a:avLst/>
-          </a:prstGeom>
-          <a:noFill/>
-          <a:ln/>
-        </p:spPr>
-        <p:txBody>
-          <a:bodyPr wrap="square" lIns="0" tIns="0" rIns="0" bIns="0" rtlCol="0" anchor="ctr"/>
-          <a:lstStyle/>
-          <a:p>
-            <a:pPr marL="0" indent="0" algn="ctr">
-              <a:buNone/>
-            </a:pPr>
-            <a:r>
-              <a:rPr lang="en-US" sz="1500" b="1" dirty="0">
-                <a:solidFill>
-                  <a:srgbClr val="FFFFFF"/>
-                </a:solidFill>
-                <a:latin typeface="TH Sarabun New" pitchFamily="34" charset="0"/>
-                <a:ea typeface="TH Sarabun New" pitchFamily="34" charset="-122"/>
-                <a:cs typeface="TH Sarabun New" pitchFamily="34" charset="-120"/>
-              </a:rPr>
-              <a:t>2</a:t>
-            </a:r>
-            <a:endParaRPr lang="en-US" sz="1500" dirty="0"/>
-          </a:p>
-        </p:txBody>
-      </p:sp>
-      <p:sp>
-        <p:nvSpPr>
-          <p:cNvPr id="13" name="Text 11"/>
-          <p:cNvSpPr/>
-          <p:nvPr/>
-        </p:nvSpPr>
-        <p:spPr>
-          <a:xfrm>
-            <a:off x="7013448" y="1700784"/>
-            <a:ext cx="4389120" cy="384048"/>
-          </a:xfrm>
-          <a:prstGeom prst="rect">
-            <a:avLst/>
-          </a:prstGeom>
-          <a:noFill/>
-          <a:ln/>
-        </p:spPr>
-        <p:txBody>
-          <a:bodyPr wrap="square" lIns="0" tIns="0" rIns="0" bIns="0" rtlCol="0" anchor="ctr"/>
-          <a:lstStyle/>
-          <a:p>
-            <a:pPr marL="0" indent="0">
-              <a:buNone/>
-            </a:pPr>
-            <a:r>
-              <a:rPr lang="en-US" sz="1800" b="1" dirty="0">
-                <a:solidFill>
-                  <a:srgbClr val="222831"/>
-                </a:solidFill>
-                <a:latin typeface="TH Sarabun New" pitchFamily="34" charset="0"/>
-                <a:ea typeface="TH Sarabun New" pitchFamily="34" charset="-122"/>
-                <a:cs typeface="TH Sarabun New" pitchFamily="34" charset="-120"/>
-              </a:rPr>
-              <a:t>โค้ดที่ได้ยังเป็นความรับผิดชอบของเรา</a:t>
-            </a:r>
-            <a:endParaRPr lang="en-US" sz="1800" dirty="0"/>
-          </a:p>
-        </p:txBody>
-      </p:sp>
-      <p:sp>
-        <p:nvSpPr>
-          <p:cNvPr id="14" name="Text 12"/>
-          <p:cNvSpPr/>
-          <p:nvPr/>
-        </p:nvSpPr>
-        <p:spPr>
-          <a:xfrm>
-            <a:off x="7013448" y="2139696"/>
-            <a:ext cx="4389120" cy="777240"/>
-          </a:xfrm>
-          <a:prstGeom prst="rect">
-            <a:avLst/>
-          </a:prstGeom>
-          <a:noFill/>
-          <a:ln/>
-        </p:spPr>
-        <p:txBody>
-          <a:bodyPr wrap="square" lIns="0" tIns="0" rIns="0" bIns="0" rtlCol="0" anchor="ctr"/>
-          <a:lstStyle/>
-          <a:p>
-            <a:pPr marL="0" indent="0">
-              <a:buNone/>
-            </a:pPr>
-            <a:r>
-              <a:rPr lang="en-US" sz="1550" dirty="0">
-                <a:solidFill>
-                  <a:srgbClr val="393E46"/>
-                </a:solidFill>
-                <a:latin typeface="TH Sarabun New" pitchFamily="34" charset="0"/>
-                <a:ea typeface="TH Sarabun New" pitchFamily="34" charset="-122"/>
-                <a:cs typeface="TH Sarabun New" pitchFamily="34" charset="-120"/>
-              </a:rPr>
-              <a:t>ต้องอ่าน ต้องทดสอบ ต้องเข้าใจก่อนนำไปใช้จริง โดยเฉพาะระบบที่มีข้อมูลของคนอื่น</a:t>
-            </a:r>
-            <a:endParaRPr lang="en-US" sz="1550" dirty="0"/>
-          </a:p>
-        </p:txBody>
-      </p:sp>
-      <p:sp>
-        <p:nvSpPr>
-          <p:cNvPr id="15" name="Shape 13"/>
-          <p:cNvSpPr/>
-          <p:nvPr/>
-        </p:nvSpPr>
-        <p:spPr>
-          <a:xfrm>
-            <a:off x="594360" y="3264408"/>
-            <a:ext cx="5340096" cy="1572768"/>
-          </a:xfrm>
-          <a:prstGeom prst="roundRect">
-            <a:avLst>
-              <a:gd name="adj" fmla="val 5233"/>
-            </a:avLst>
-          </a:prstGeom>
-          <a:solidFill>
-            <a:srgbClr val="F5F7F8"/>
-          </a:solidFill>
-          <a:ln w="9525">
-            <a:solidFill>
-              <a:srgbClr val="F5F7F8"/>
-            </a:solidFill>
-            <a:prstDash val="solid"/>
-          </a:ln>
-          <a:effectLst>
-            <a:outerShdw blurRad="101600" dist="12700" dir="5400000" algn="bl" rotWithShape="0">
-              <a:srgbClr val="222831">
-                <a:alpha val="10000"/>
-              </a:srgbClr>
-            </a:outerShdw>
-          </a:effectLst>
-        </p:spPr>
-        <p:txBody>
-          <a:bodyPr/>
-          <a:lstStyle/>
-          <a:p>
-            <a:endParaRPr lang="en-TH"/>
-          </a:p>
-        </p:txBody>
-      </p:sp>
-      <p:sp>
-        <p:nvSpPr>
-          <p:cNvPr id="16" name="Shape 14"/>
-          <p:cNvSpPr/>
-          <p:nvPr/>
-        </p:nvSpPr>
-        <p:spPr>
-          <a:xfrm>
-            <a:off x="850392" y="3520440"/>
-            <a:ext cx="402336" cy="402336"/>
-          </a:xfrm>
-          <a:prstGeom prst="ellipse">
-            <a:avLst/>
-          </a:prstGeom>
-          <a:solidFill>
-            <a:srgbClr val="00ADB5"/>
-          </a:solidFill>
-          <a:ln w="12700">
-            <a:solidFill>
-              <a:srgbClr val="00ADB5"/>
-            </a:solidFill>
-            <a:prstDash val="solid"/>
-          </a:ln>
-        </p:spPr>
-        <p:txBody>
-          <a:bodyPr/>
-          <a:lstStyle/>
-          <a:p>
-            <a:endParaRPr lang="en-TH"/>
-          </a:p>
-        </p:txBody>
-      </p:sp>
-      <p:sp>
-        <p:nvSpPr>
-          <p:cNvPr id="17" name="Text 15"/>
-          <p:cNvSpPr/>
-          <p:nvPr/>
-        </p:nvSpPr>
-        <p:spPr>
-          <a:xfrm>
-            <a:off x="850392" y="3520440"/>
-            <a:ext cx="402336" cy="402336"/>
-          </a:xfrm>
-          <a:prstGeom prst="rect">
-            <a:avLst/>
-          </a:prstGeom>
-          <a:noFill/>
-          <a:ln/>
-        </p:spPr>
-        <p:txBody>
-          <a:bodyPr wrap="square" lIns="0" tIns="0" rIns="0" bIns="0" rtlCol="0" anchor="ctr"/>
-          <a:lstStyle/>
-          <a:p>
-            <a:pPr marL="0" indent="0" algn="ctr">
-              <a:buNone/>
-            </a:pPr>
-            <a:r>
-              <a:rPr lang="en-US" sz="1500" b="1" dirty="0">
-                <a:solidFill>
-                  <a:srgbClr val="FFFFFF"/>
-                </a:solidFill>
-                <a:latin typeface="TH Sarabun New" pitchFamily="34" charset="0"/>
-                <a:ea typeface="TH Sarabun New" pitchFamily="34" charset="-122"/>
-                <a:cs typeface="TH Sarabun New" pitchFamily="34" charset="-120"/>
-              </a:rPr>
-              <a:t>3</a:t>
-            </a:r>
-            <a:endParaRPr lang="en-US" sz="1500" dirty="0"/>
-          </a:p>
-        </p:txBody>
-      </p:sp>
-      <p:sp>
-        <p:nvSpPr>
-          <p:cNvPr id="18" name="Text 16"/>
-          <p:cNvSpPr/>
-          <p:nvPr/>
-        </p:nvSpPr>
-        <p:spPr>
-          <a:xfrm>
-            <a:off x="1380744" y="3483864"/>
-            <a:ext cx="4389120" cy="384048"/>
-          </a:xfrm>
-          <a:prstGeom prst="rect">
-            <a:avLst/>
-          </a:prstGeom>
-          <a:noFill/>
-          <a:ln/>
-        </p:spPr>
-        <p:txBody>
-          <a:bodyPr wrap="square" lIns="0" tIns="0" rIns="0" bIns="0" rtlCol="0" anchor="ctr"/>
-          <a:lstStyle/>
-          <a:p>
-            <a:pPr marL="0" indent="0">
-              <a:buNone/>
-            </a:pPr>
-            <a:r>
-              <a:rPr lang="en-US" sz="1800" b="1" dirty="0">
-                <a:solidFill>
-                  <a:srgbClr val="222831"/>
-                </a:solidFill>
-                <a:latin typeface="TH Sarabun New" pitchFamily="34" charset="0"/>
-                <a:ea typeface="TH Sarabun New" pitchFamily="34" charset="-122"/>
-                <a:cs typeface="TH Sarabun New" pitchFamily="34" charset="-120"/>
-              </a:rPr>
-              <a:t>ความลับห้ามอยู่ในโค้ด</a:t>
-            </a:r>
-            <a:endParaRPr lang="en-US" sz="1800" dirty="0"/>
-          </a:p>
-        </p:txBody>
-      </p:sp>
-      <p:sp>
-        <p:nvSpPr>
-          <p:cNvPr id="19" name="Text 17"/>
-          <p:cNvSpPr/>
-          <p:nvPr/>
-        </p:nvSpPr>
-        <p:spPr>
-          <a:xfrm>
-            <a:off x="1380744" y="3922776"/>
-            <a:ext cx="4389120" cy="777240"/>
-          </a:xfrm>
-          <a:prstGeom prst="rect">
-            <a:avLst/>
-          </a:prstGeom>
-          <a:noFill/>
-          <a:ln/>
-        </p:spPr>
-        <p:txBody>
-          <a:bodyPr wrap="square" lIns="0" tIns="0" rIns="0" bIns="0" rtlCol="0" anchor="ctr"/>
-          <a:lstStyle/>
-          <a:p>
-            <a:pPr marL="0" indent="0">
-              <a:buNone/>
-            </a:pPr>
-            <a:r>
-              <a:rPr lang="en-US" sz="1550" dirty="0">
-                <a:solidFill>
-                  <a:srgbClr val="393E46"/>
-                </a:solidFill>
-                <a:latin typeface="TH Sarabun New" pitchFamily="34" charset="0"/>
-                <a:ea typeface="TH Sarabun New" pitchFamily="34" charset="-122"/>
-                <a:cs typeface="TH Sarabun New" pitchFamily="34" charset="-120"/>
-              </a:rPr>
-              <a:t>กุญแจ รหัสผ่าน และข้อมูลส่วนบุคคล ต้องอยู่นอกโปรเจกต์เสมอ</a:t>
-            </a:r>
-            <a:endParaRPr lang="en-US" sz="1550" dirty="0"/>
-          </a:p>
-        </p:txBody>
-      </p:sp>
-      <p:sp>
-        <p:nvSpPr>
-          <p:cNvPr id="20" name="Shape 18"/>
-          <p:cNvSpPr/>
-          <p:nvPr/>
-        </p:nvSpPr>
-        <p:spPr>
-          <a:xfrm>
-            <a:off x="6227064" y="3264408"/>
-            <a:ext cx="5340096" cy="1572768"/>
-          </a:xfrm>
-          <a:prstGeom prst="roundRect">
-            <a:avLst>
-              <a:gd name="adj" fmla="val 5233"/>
-            </a:avLst>
-          </a:prstGeom>
-          <a:solidFill>
-            <a:srgbClr val="F5F7F8"/>
-          </a:solidFill>
-          <a:ln w="9525">
-            <a:solidFill>
-              <a:srgbClr val="F5F7F8"/>
-            </a:solidFill>
-            <a:prstDash val="solid"/>
-          </a:ln>
-          <a:effectLst>
-            <a:outerShdw blurRad="101600" dist="12700" dir="5400000" algn="bl" rotWithShape="0">
-              <a:srgbClr val="222831">
-                <a:alpha val="10000"/>
-              </a:srgbClr>
-            </a:outerShdw>
-          </a:effectLst>
-        </p:spPr>
-        <p:txBody>
-          <a:bodyPr/>
-          <a:lstStyle/>
-          <a:p>
-            <a:endParaRPr lang="en-TH"/>
-          </a:p>
-        </p:txBody>
-      </p:sp>
-      <p:sp>
-        <p:nvSpPr>
-          <p:cNvPr id="21" name="Shape 19"/>
-          <p:cNvSpPr/>
-          <p:nvPr/>
-        </p:nvSpPr>
-        <p:spPr>
-          <a:xfrm>
-            <a:off x="6483096" y="3520440"/>
-            <a:ext cx="402336" cy="402336"/>
-          </a:xfrm>
-          <a:prstGeom prst="ellipse">
-            <a:avLst/>
-          </a:prstGeom>
-          <a:solidFill>
-            <a:srgbClr val="00ADB5"/>
-          </a:solidFill>
-          <a:ln w="12700">
-            <a:solidFill>
-              <a:srgbClr val="00ADB5"/>
-            </a:solidFill>
-            <a:prstDash val="solid"/>
-          </a:ln>
-        </p:spPr>
-        <p:txBody>
-          <a:bodyPr/>
-          <a:lstStyle/>
-          <a:p>
-            <a:endParaRPr lang="en-TH"/>
-          </a:p>
-        </p:txBody>
-      </p:sp>
-      <p:sp>
-        <p:nvSpPr>
-          <p:cNvPr id="22" name="Text 20"/>
-          <p:cNvSpPr/>
-          <p:nvPr/>
-        </p:nvSpPr>
-        <p:spPr>
-          <a:xfrm>
-            <a:off x="6483096" y="3520440"/>
-            <a:ext cx="402336" cy="402336"/>
-          </a:xfrm>
-          <a:prstGeom prst="rect">
-            <a:avLst/>
-          </a:prstGeom>
-          <a:noFill/>
-          <a:ln/>
-        </p:spPr>
-        <p:txBody>
-          <a:bodyPr wrap="square" lIns="0" tIns="0" rIns="0" bIns="0" rtlCol="0" anchor="ctr"/>
-          <a:lstStyle/>
-          <a:p>
-            <a:pPr marL="0" indent="0" algn="ctr">
-              <a:buNone/>
-            </a:pPr>
-            <a:r>
-              <a:rPr lang="en-US" sz="1500" b="1" dirty="0">
-                <a:solidFill>
-                  <a:srgbClr val="FFFFFF"/>
-                </a:solidFill>
-                <a:latin typeface="TH Sarabun New" pitchFamily="34" charset="0"/>
-                <a:ea typeface="TH Sarabun New" pitchFamily="34" charset="-122"/>
-                <a:cs typeface="TH Sarabun New" pitchFamily="34" charset="-120"/>
-              </a:rPr>
-              <a:t>4</a:t>
-            </a:r>
-            <a:endParaRPr lang="en-US" sz="1500" dirty="0"/>
-          </a:p>
-        </p:txBody>
-      </p:sp>
-      <p:sp>
-        <p:nvSpPr>
-          <p:cNvPr id="23" name="Text 21"/>
-          <p:cNvSpPr/>
-          <p:nvPr/>
-        </p:nvSpPr>
-        <p:spPr>
-          <a:xfrm>
-            <a:off x="7013448" y="3483864"/>
-            <a:ext cx="4389120" cy="384048"/>
-          </a:xfrm>
-          <a:prstGeom prst="rect">
-            <a:avLst/>
-          </a:prstGeom>
-          <a:noFill/>
-          <a:ln/>
-        </p:spPr>
-        <p:txBody>
-          <a:bodyPr wrap="square" lIns="0" tIns="0" rIns="0" bIns="0" rtlCol="0" anchor="ctr"/>
-          <a:lstStyle/>
-          <a:p>
-            <a:pPr marL="0" indent="0">
-              <a:buNone/>
-            </a:pPr>
-            <a:r>
-              <a:rPr lang="en-US" sz="1800" b="1" dirty="0">
-                <a:solidFill>
-                  <a:srgbClr val="222831"/>
-                </a:solidFill>
-                <a:latin typeface="TH Sarabun New" pitchFamily="34" charset="0"/>
-                <a:ea typeface="TH Sarabun New" pitchFamily="34" charset="-122"/>
-                <a:cs typeface="TH Sarabun New" pitchFamily="34" charset="-120"/>
-              </a:rPr>
-              <a:t>ระบบจริงต้องมีสิทธิ์ผู้ใช้จริง</a:t>
-            </a:r>
-            <a:endParaRPr lang="en-US" sz="1800" dirty="0"/>
-          </a:p>
-        </p:txBody>
-      </p:sp>
-      <p:sp>
-        <p:nvSpPr>
-          <p:cNvPr id="24" name="Text 22"/>
-          <p:cNvSpPr/>
-          <p:nvPr/>
-        </p:nvSpPr>
-        <p:spPr>
-          <a:xfrm>
-            <a:off x="7013448" y="3922776"/>
-            <a:ext cx="4389120" cy="777240"/>
-          </a:xfrm>
-          <a:prstGeom prst="rect">
-            <a:avLst/>
-          </a:prstGeom>
-          <a:noFill/>
-          <a:ln/>
-        </p:spPr>
-        <p:txBody>
-          <a:bodyPr wrap="square" lIns="0" tIns="0" rIns="0" bIns="0" rtlCol="0" anchor="ctr"/>
-          <a:lstStyle/>
-          <a:p>
-            <a:pPr marL="0" indent="0">
-              <a:buNone/>
-            </a:pPr>
-            <a:r>
-              <a:rPr lang="en-US" sz="1550" dirty="0">
-                <a:solidFill>
-                  <a:srgbClr val="393E46"/>
-                </a:solidFill>
-                <a:latin typeface="TH Sarabun New" pitchFamily="34" charset="0"/>
-                <a:ea typeface="TH Sarabun New" pitchFamily="34" charset="-122"/>
-                <a:cs typeface="TH Sarabun New" pitchFamily="34" charset="-120"/>
-              </a:rPr>
-              <a:t>RLS แบบเปิดทุกสิทธิ์ใช้ได้เฉพาะการฝึกอบรม ระบบที่มีข้อมูลจริงต้องผูกกับผู้ใช้ที่ล็อกอินและคำนึงถึง PDPA</a:t>
-            </a:r>
-            <a:endParaRPr lang="en-US" sz="1550" dirty="0"/>
+              <a:rPr lang="en-US" sz="2800" b="1" dirty="0">
+                <a:solidFill>
+                  <a:srgbClr val="12324A"/>
+                </a:solidFill>
+              </a:rPr>
+              <a:t>Requirement → Spec → UI/Data Model → Implementation → Test → Deploy</a:t>
+            </a:r>
+            <a:endParaRPr lang="en-US" sz="2800" dirty="0"/>
           </a:p>
         </p:txBody>
       </p:sp>
     </p:spTree>
-  </p:cSld>
-  <p:clrMapOvr>
-    <a:masterClrMapping/>
-  </p:clrMapOvr>
-</p:sld>
-</file>
-
-<file path=ppt/slides/slide27.xml><?xml version="1.0" encoding="utf-8"?>
-<p:sld xmlns:a="http://schemas.openxmlformats.org/drawingml/2006/main" xmlns:r="http://schemas.openxmlformats.org/officeDocument/2006/relationships" xmlns:p="http://schemas.openxmlformats.org/presentationml/2006/main">
-  <p:cSld name="Slide 38">
-    <p:bg>
-      <p:bgPr>
-        <a:solidFill>
-          <a:srgbClr val="222831"/>
-        </a:solidFill>
-        <a:effectLst/>
-      </p:bgPr>
-    </p:bg>
-    <p:spTree>
-      <p:nvGrpSpPr>
-        <p:cNvPr id="1" name=""/>
-        <p:cNvGrpSpPr/>
-        <p:nvPr/>
-      </p:nvGrpSpPr>
-      <p:grpSpPr>
-        <a:xfrm>
-          <a:off x="0" y="0"/>
-          <a:ext cx="0" cy="0"/>
-          <a:chOff x="0" y="0"/>
-          <a:chExt cx="0" cy="0"/>
-        </a:xfrm>
-      </p:grpSpPr>
-      <p:sp>
-        <p:nvSpPr>
-          <p:cNvPr id="2" name="Text 0"/>
-          <p:cNvSpPr/>
-          <p:nvPr/>
-        </p:nvSpPr>
-        <p:spPr>
-          <a:xfrm>
-            <a:off x="11018520" y="6263640"/>
-            <a:ext cx="548640" cy="274320"/>
-          </a:xfrm>
-          <a:prstGeom prst="rect">
-            <a:avLst/>
-          </a:prstGeom>
-          <a:noFill/>
-          <a:ln/>
-        </p:spPr>
-        <p:txBody>
-          <a:bodyPr wrap="square" lIns="0" tIns="0" rIns="0" bIns="0" rtlCol="0" anchor="ctr"/>
-          <a:lstStyle/>
-          <a:p>
-            <a:pPr marL="0" indent="0" algn="r">
-              <a:buNone/>
-            </a:pPr>
-            <a:r>
-              <a:rPr lang="en-US" sz="1200" dirty="0">
-                <a:solidFill>
-                  <a:srgbClr val="9AA3AD"/>
-                </a:solidFill>
-                <a:latin typeface="TH Sarabun New" pitchFamily="34" charset="0"/>
-                <a:ea typeface="TH Sarabun New" pitchFamily="34" charset="-122"/>
-                <a:cs typeface="TH Sarabun New" pitchFamily="34" charset="-120"/>
-              </a:rPr>
-              <a:t>38</a:t>
-            </a:r>
-            <a:endParaRPr lang="en-US" sz="1200" dirty="0"/>
-          </a:p>
-        </p:txBody>
-      </p:sp>
-      <p:sp>
-        <p:nvSpPr>
-          <p:cNvPr id="3" name="Text 1"/>
-          <p:cNvSpPr/>
-          <p:nvPr/>
-        </p:nvSpPr>
-        <p:spPr>
-          <a:xfrm>
-            <a:off x="594360" y="685800"/>
-            <a:ext cx="10972800" cy="566928"/>
-          </a:xfrm>
-          <a:prstGeom prst="rect">
-            <a:avLst/>
-          </a:prstGeom>
-          <a:noFill/>
-          <a:ln/>
-        </p:spPr>
-        <p:txBody>
-          <a:bodyPr wrap="square" lIns="0" tIns="0" rIns="0" bIns="0" rtlCol="0" anchor="ctr"/>
-          <a:lstStyle/>
-          <a:p>
-            <a:pPr marL="0" indent="0">
-              <a:buNone/>
-            </a:pPr>
-            <a:r>
-              <a:rPr lang="en-US" sz="3400" b="1" dirty="0">
-                <a:solidFill>
-                  <a:srgbClr val="FFFFFF"/>
-                </a:solidFill>
-                <a:latin typeface="TH Sarabun New" pitchFamily="34" charset="0"/>
-                <a:ea typeface="TH Sarabun New" pitchFamily="34" charset="-122"/>
-                <a:cs typeface="TH Sarabun New" pitchFamily="34" charset="-120"/>
-              </a:rPr>
-              <a:t>สรุปสิ่งที่ได้เรียนรู้</a:t>
-            </a:r>
-            <a:endParaRPr lang="en-US" sz="3400" dirty="0"/>
-          </a:p>
-        </p:txBody>
-      </p:sp>
-      <p:sp>
-        <p:nvSpPr>
-          <p:cNvPr id="4" name="Shape 2"/>
-          <p:cNvSpPr/>
-          <p:nvPr/>
-        </p:nvSpPr>
-        <p:spPr>
-          <a:xfrm>
-            <a:off x="594360" y="1481328"/>
-            <a:ext cx="10972800" cy="713232"/>
-          </a:xfrm>
-          <a:prstGeom prst="roundRect">
-            <a:avLst>
-              <a:gd name="adj" fmla="val 11538"/>
-            </a:avLst>
-          </a:prstGeom>
-          <a:solidFill>
-            <a:srgbClr val="2E3742"/>
-          </a:solidFill>
-          <a:ln w="12700">
-            <a:solidFill>
-              <a:srgbClr val="2E3742"/>
-            </a:solidFill>
-            <a:prstDash val="solid"/>
-          </a:ln>
-        </p:spPr>
-        <p:txBody>
-          <a:bodyPr/>
-          <a:lstStyle/>
-          <a:p>
-            <a:endParaRPr lang="en-TH"/>
-          </a:p>
-        </p:txBody>
-      </p:sp>
-      <p:sp>
-        <p:nvSpPr>
-          <p:cNvPr id="5" name="Shape 3"/>
-          <p:cNvSpPr/>
-          <p:nvPr/>
-        </p:nvSpPr>
-        <p:spPr>
-          <a:xfrm>
-            <a:off x="832104" y="1655064"/>
-            <a:ext cx="365760" cy="365760"/>
-          </a:xfrm>
-          <a:prstGeom prst="ellipse">
-            <a:avLst/>
-          </a:prstGeom>
-          <a:solidFill>
-            <a:srgbClr val="00ADB5"/>
-          </a:solidFill>
-          <a:ln w="12700">
-            <a:solidFill>
-              <a:srgbClr val="00ADB5"/>
-            </a:solidFill>
-            <a:prstDash val="solid"/>
-          </a:ln>
-        </p:spPr>
-        <p:txBody>
-          <a:bodyPr/>
-          <a:lstStyle/>
-          <a:p>
-            <a:endParaRPr lang="en-TH"/>
-          </a:p>
-        </p:txBody>
-      </p:sp>
-      <p:sp>
-        <p:nvSpPr>
-          <p:cNvPr id="6" name="Text 4"/>
-          <p:cNvSpPr/>
-          <p:nvPr/>
-        </p:nvSpPr>
-        <p:spPr>
-          <a:xfrm>
-            <a:off x="832104" y="1655064"/>
-            <a:ext cx="365760" cy="365760"/>
-          </a:xfrm>
-          <a:prstGeom prst="rect">
-            <a:avLst/>
-          </a:prstGeom>
-          <a:noFill/>
-          <a:ln/>
-        </p:spPr>
-        <p:txBody>
-          <a:bodyPr wrap="square" lIns="0" tIns="0" rIns="0" bIns="0" rtlCol="0" anchor="ctr"/>
-          <a:lstStyle/>
-          <a:p>
-            <a:pPr marL="0" indent="0" algn="ctr">
-              <a:buNone/>
-            </a:pPr>
-            <a:r>
-              <a:rPr lang="en-US" sz="1500" b="1" dirty="0">
-                <a:solidFill>
-                  <a:srgbClr val="FFFFFF"/>
-                </a:solidFill>
-                <a:latin typeface="TH Sarabun New" pitchFamily="34" charset="0"/>
-                <a:ea typeface="TH Sarabun New" pitchFamily="34" charset="-122"/>
-                <a:cs typeface="TH Sarabun New" pitchFamily="34" charset="-120"/>
-              </a:rPr>
-              <a:t>1</a:t>
-            </a:r>
-            <a:endParaRPr lang="en-US" sz="1500" dirty="0"/>
-          </a:p>
-        </p:txBody>
-      </p:sp>
-      <p:sp>
-        <p:nvSpPr>
-          <p:cNvPr id="7" name="Text 5"/>
-          <p:cNvSpPr/>
-          <p:nvPr/>
-        </p:nvSpPr>
-        <p:spPr>
-          <a:xfrm>
-            <a:off x="1344168" y="1481328"/>
-            <a:ext cx="4206240" cy="713232"/>
-          </a:xfrm>
-          <a:prstGeom prst="rect">
-            <a:avLst/>
-          </a:prstGeom>
-          <a:noFill/>
-          <a:ln/>
-        </p:spPr>
-        <p:txBody>
-          <a:bodyPr wrap="square" lIns="0" tIns="0" rIns="0" bIns="0" rtlCol="0" anchor="ctr"/>
-          <a:lstStyle/>
-          <a:p>
-            <a:pPr marL="0" indent="0">
-              <a:buNone/>
-            </a:pPr>
-            <a:r>
-              <a:rPr lang="en-US" sz="1750" b="1" dirty="0">
-                <a:solidFill>
-                  <a:srgbClr val="FFFFFF"/>
-                </a:solidFill>
-                <a:latin typeface="TH Sarabun New" pitchFamily="34" charset="0"/>
-                <a:ea typeface="TH Sarabun New" pitchFamily="34" charset="-122"/>
-                <a:cs typeface="TH Sarabun New" pitchFamily="34" charset="-120"/>
-              </a:rPr>
-              <a:t>เขียนสเปกก่อน แล้วค่อยสั่ง</a:t>
-            </a:r>
-            <a:endParaRPr lang="en-US" sz="1750" dirty="0"/>
-          </a:p>
-        </p:txBody>
-      </p:sp>
-      <p:sp>
-        <p:nvSpPr>
-          <p:cNvPr id="8" name="Text 6"/>
-          <p:cNvSpPr/>
-          <p:nvPr/>
-        </p:nvSpPr>
-        <p:spPr>
-          <a:xfrm>
-            <a:off x="5623560" y="1481328"/>
-            <a:ext cx="5669280" cy="713232"/>
-          </a:xfrm>
-          <a:prstGeom prst="rect">
-            <a:avLst/>
-          </a:prstGeom>
-          <a:noFill/>
-          <a:ln/>
-        </p:spPr>
-        <p:txBody>
-          <a:bodyPr wrap="square" lIns="0" tIns="0" rIns="0" bIns="0" rtlCol="0" anchor="ctr"/>
-          <a:lstStyle/>
-          <a:p>
-            <a:pPr marL="0" indent="0">
-              <a:buNone/>
-            </a:pPr>
-            <a:r>
-              <a:rPr lang="en-US" sz="1550" dirty="0">
-                <a:solidFill>
-                  <a:srgbClr val="9FB0B3"/>
-                </a:solidFill>
-                <a:latin typeface="TH Sarabun New" pitchFamily="34" charset="0"/>
-                <a:ea typeface="TH Sarabun New" pitchFamily="34" charset="-122"/>
-                <a:cs typeface="TH Sarabun New" pitchFamily="34" charset="-120"/>
-              </a:rPr>
-              <a:t>SPEC ไฟล์เดียว + prompt สั้นที่อ้างหมายเลขหัวข้อ</a:t>
-            </a:r>
-            <a:endParaRPr lang="en-US" sz="1550" dirty="0"/>
-          </a:p>
-        </p:txBody>
-      </p:sp>
-      <p:sp>
-        <p:nvSpPr>
-          <p:cNvPr id="9" name="Shape 7"/>
-          <p:cNvSpPr/>
-          <p:nvPr/>
-        </p:nvSpPr>
-        <p:spPr>
-          <a:xfrm>
-            <a:off x="594360" y="2322576"/>
-            <a:ext cx="10972800" cy="713232"/>
-          </a:xfrm>
-          <a:prstGeom prst="roundRect">
-            <a:avLst>
-              <a:gd name="adj" fmla="val 11538"/>
-            </a:avLst>
-          </a:prstGeom>
-          <a:solidFill>
-            <a:srgbClr val="2E3742"/>
-          </a:solidFill>
-          <a:ln w="12700">
-            <a:solidFill>
-              <a:srgbClr val="2E3742"/>
-            </a:solidFill>
-            <a:prstDash val="solid"/>
-          </a:ln>
-        </p:spPr>
-        <p:txBody>
-          <a:bodyPr/>
-          <a:lstStyle/>
-          <a:p>
-            <a:endParaRPr lang="en-TH"/>
-          </a:p>
-        </p:txBody>
-      </p:sp>
-      <p:sp>
-        <p:nvSpPr>
-          <p:cNvPr id="10" name="Shape 8"/>
-          <p:cNvSpPr/>
-          <p:nvPr/>
-        </p:nvSpPr>
-        <p:spPr>
-          <a:xfrm>
-            <a:off x="832104" y="2496312"/>
-            <a:ext cx="365760" cy="365760"/>
-          </a:xfrm>
-          <a:prstGeom prst="ellipse">
-            <a:avLst/>
-          </a:prstGeom>
-          <a:solidFill>
-            <a:srgbClr val="00ADB5"/>
-          </a:solidFill>
-          <a:ln w="12700">
-            <a:solidFill>
-              <a:srgbClr val="00ADB5"/>
-            </a:solidFill>
-            <a:prstDash val="solid"/>
-          </a:ln>
-        </p:spPr>
-        <p:txBody>
-          <a:bodyPr/>
-          <a:lstStyle/>
-          <a:p>
-            <a:endParaRPr lang="en-TH"/>
-          </a:p>
-        </p:txBody>
-      </p:sp>
-      <p:sp>
-        <p:nvSpPr>
-          <p:cNvPr id="11" name="Text 9"/>
-          <p:cNvSpPr/>
-          <p:nvPr/>
-        </p:nvSpPr>
-        <p:spPr>
-          <a:xfrm>
-            <a:off x="832104" y="2496312"/>
-            <a:ext cx="365760" cy="365760"/>
-          </a:xfrm>
-          <a:prstGeom prst="rect">
-            <a:avLst/>
-          </a:prstGeom>
-          <a:noFill/>
-          <a:ln/>
-        </p:spPr>
-        <p:txBody>
-          <a:bodyPr wrap="square" lIns="0" tIns="0" rIns="0" bIns="0" rtlCol="0" anchor="ctr"/>
-          <a:lstStyle/>
-          <a:p>
-            <a:pPr marL="0" indent="0" algn="ctr">
-              <a:buNone/>
-            </a:pPr>
-            <a:r>
-              <a:rPr lang="en-US" sz="1500" b="1" dirty="0">
-                <a:solidFill>
-                  <a:srgbClr val="FFFFFF"/>
-                </a:solidFill>
-                <a:latin typeface="TH Sarabun New" pitchFamily="34" charset="0"/>
-                <a:ea typeface="TH Sarabun New" pitchFamily="34" charset="-122"/>
-                <a:cs typeface="TH Sarabun New" pitchFamily="34" charset="-120"/>
-              </a:rPr>
-              <a:t>2</a:t>
-            </a:r>
-            <a:endParaRPr lang="en-US" sz="1500" dirty="0"/>
-          </a:p>
-        </p:txBody>
-      </p:sp>
-      <p:sp>
-        <p:nvSpPr>
-          <p:cNvPr id="12" name="Text 10"/>
-          <p:cNvSpPr/>
-          <p:nvPr/>
-        </p:nvSpPr>
-        <p:spPr>
-          <a:xfrm>
-            <a:off x="1344168" y="2322576"/>
-            <a:ext cx="4206240" cy="713232"/>
-          </a:xfrm>
-          <a:prstGeom prst="rect">
-            <a:avLst/>
-          </a:prstGeom>
-          <a:noFill/>
-          <a:ln/>
-        </p:spPr>
-        <p:txBody>
-          <a:bodyPr wrap="square" lIns="0" tIns="0" rIns="0" bIns="0" rtlCol="0" anchor="ctr"/>
-          <a:lstStyle/>
-          <a:p>
-            <a:pPr marL="0" indent="0">
-              <a:buNone/>
-            </a:pPr>
-            <a:r>
-              <a:rPr lang="en-US" sz="1750" b="1" dirty="0">
-                <a:solidFill>
-                  <a:srgbClr val="FFFFFF"/>
-                </a:solidFill>
-                <a:latin typeface="TH Sarabun New" pitchFamily="34" charset="0"/>
-                <a:ea typeface="TH Sarabun New" pitchFamily="34" charset="-122"/>
-                <a:cs typeface="TH Sarabun New" pitchFamily="34" charset="-120"/>
-              </a:rPr>
-              <a:t>ออกแบบก่อนสร้าง</a:t>
-            </a:r>
-            <a:endParaRPr lang="en-US" sz="1750" dirty="0"/>
-          </a:p>
-        </p:txBody>
-      </p:sp>
-      <p:sp>
-        <p:nvSpPr>
-          <p:cNvPr id="13" name="Text 11"/>
-          <p:cNvSpPr/>
-          <p:nvPr/>
-        </p:nvSpPr>
-        <p:spPr>
-          <a:xfrm>
-            <a:off x="5623560" y="2322576"/>
-            <a:ext cx="5669280" cy="713232"/>
-          </a:xfrm>
-          <a:prstGeom prst="rect">
-            <a:avLst/>
-          </a:prstGeom>
-          <a:noFill/>
-          <a:ln/>
-        </p:spPr>
-        <p:txBody>
-          <a:bodyPr wrap="square" lIns="0" tIns="0" rIns="0" bIns="0" rtlCol="0" anchor="ctr"/>
-          <a:lstStyle/>
-          <a:p>
-            <a:pPr marL="0" indent="0">
-              <a:buNone/>
-            </a:pPr>
-            <a:r>
-              <a:rPr lang="en-US" sz="1550" dirty="0">
-                <a:solidFill>
-                  <a:srgbClr val="9FB0B3"/>
-                </a:solidFill>
-                <a:latin typeface="TH Sarabun New" pitchFamily="34" charset="0"/>
-                <a:ea typeface="TH Sarabun New" pitchFamily="34" charset="-122"/>
-                <a:cs typeface="TH Sarabun New" pitchFamily="34" charset="-120"/>
-              </a:rPr>
-              <a:t>สไตล์จาก uistyleguide · สีจาก colorhunt · ฟอนต์จาก Google Fonts</a:t>
-            </a:r>
-            <a:endParaRPr lang="en-US" sz="1550" dirty="0"/>
-          </a:p>
-        </p:txBody>
-      </p:sp>
-      <p:sp>
-        <p:nvSpPr>
-          <p:cNvPr id="14" name="Shape 12"/>
-          <p:cNvSpPr/>
-          <p:nvPr/>
-        </p:nvSpPr>
-        <p:spPr>
-          <a:xfrm>
-            <a:off x="594360" y="3163824"/>
-            <a:ext cx="10972800" cy="713232"/>
-          </a:xfrm>
-          <a:prstGeom prst="roundRect">
-            <a:avLst>
-              <a:gd name="adj" fmla="val 11538"/>
-            </a:avLst>
-          </a:prstGeom>
-          <a:solidFill>
-            <a:srgbClr val="2E3742"/>
-          </a:solidFill>
-          <a:ln w="12700">
-            <a:solidFill>
-              <a:srgbClr val="2E3742"/>
-            </a:solidFill>
-            <a:prstDash val="solid"/>
-          </a:ln>
-        </p:spPr>
-        <p:txBody>
-          <a:bodyPr/>
-          <a:lstStyle/>
-          <a:p>
-            <a:endParaRPr lang="en-TH"/>
-          </a:p>
-        </p:txBody>
-      </p:sp>
-      <p:sp>
-        <p:nvSpPr>
-          <p:cNvPr id="15" name="Shape 13"/>
-          <p:cNvSpPr/>
-          <p:nvPr/>
-        </p:nvSpPr>
-        <p:spPr>
-          <a:xfrm>
-            <a:off x="832104" y="3337560"/>
-            <a:ext cx="365760" cy="365760"/>
-          </a:xfrm>
-          <a:prstGeom prst="ellipse">
-            <a:avLst/>
-          </a:prstGeom>
-          <a:solidFill>
-            <a:srgbClr val="00ADB5"/>
-          </a:solidFill>
-          <a:ln w="12700">
-            <a:solidFill>
-              <a:srgbClr val="00ADB5"/>
-            </a:solidFill>
-            <a:prstDash val="solid"/>
-          </a:ln>
-        </p:spPr>
-        <p:txBody>
-          <a:bodyPr/>
-          <a:lstStyle/>
-          <a:p>
-            <a:endParaRPr lang="en-TH"/>
-          </a:p>
-        </p:txBody>
-      </p:sp>
-      <p:sp>
-        <p:nvSpPr>
-          <p:cNvPr id="16" name="Text 14"/>
-          <p:cNvSpPr/>
-          <p:nvPr/>
-        </p:nvSpPr>
-        <p:spPr>
-          <a:xfrm>
-            <a:off x="832104" y="3337560"/>
-            <a:ext cx="365760" cy="365760"/>
-          </a:xfrm>
-          <a:prstGeom prst="rect">
-            <a:avLst/>
-          </a:prstGeom>
-          <a:noFill/>
-          <a:ln/>
-        </p:spPr>
-        <p:txBody>
-          <a:bodyPr wrap="square" lIns="0" tIns="0" rIns="0" bIns="0" rtlCol="0" anchor="ctr"/>
-          <a:lstStyle/>
-          <a:p>
-            <a:pPr marL="0" indent="0" algn="ctr">
-              <a:buNone/>
-            </a:pPr>
-            <a:r>
-              <a:rPr lang="en-US" sz="1500" b="1" dirty="0">
-                <a:solidFill>
-                  <a:srgbClr val="FFFFFF"/>
-                </a:solidFill>
-                <a:latin typeface="TH Sarabun New" pitchFamily="34" charset="0"/>
-                <a:ea typeface="TH Sarabun New" pitchFamily="34" charset="-122"/>
-                <a:cs typeface="TH Sarabun New" pitchFamily="34" charset="-120"/>
-              </a:rPr>
-              <a:t>3</a:t>
-            </a:r>
-            <a:endParaRPr lang="en-US" sz="1500" dirty="0"/>
-          </a:p>
-        </p:txBody>
-      </p:sp>
-      <p:sp>
-        <p:nvSpPr>
-          <p:cNvPr id="17" name="Text 15"/>
-          <p:cNvSpPr/>
-          <p:nvPr/>
-        </p:nvSpPr>
-        <p:spPr>
-          <a:xfrm>
-            <a:off x="1344168" y="3163824"/>
-            <a:ext cx="4206240" cy="713232"/>
-          </a:xfrm>
-          <a:prstGeom prst="rect">
-            <a:avLst/>
-          </a:prstGeom>
-          <a:noFill/>
-          <a:ln/>
-        </p:spPr>
-        <p:txBody>
-          <a:bodyPr wrap="square" lIns="0" tIns="0" rIns="0" bIns="0" rtlCol="0" anchor="ctr"/>
-          <a:lstStyle/>
-          <a:p>
-            <a:pPr marL="0" indent="0">
-              <a:buNone/>
-            </a:pPr>
-            <a:r>
-              <a:rPr lang="en-US" sz="1750" b="1" dirty="0">
-                <a:solidFill>
-                  <a:srgbClr val="FFFFFF"/>
-                </a:solidFill>
-                <a:latin typeface="TH Sarabun New" pitchFamily="34" charset="0"/>
-                <a:ea typeface="TH Sarabun New" pitchFamily="34" charset="-122"/>
-                <a:cs typeface="TH Sarabun New" pitchFamily="34" charset="-120"/>
-              </a:rPr>
-              <a:t>สร้างทีละชั้น ตรวจทีละชั้น</a:t>
-            </a:r>
-            <a:endParaRPr lang="en-US" sz="1750" dirty="0"/>
-          </a:p>
-        </p:txBody>
-      </p:sp>
-      <p:sp>
-        <p:nvSpPr>
-          <p:cNvPr id="18" name="Text 16"/>
-          <p:cNvSpPr/>
-          <p:nvPr/>
-        </p:nvSpPr>
-        <p:spPr>
-          <a:xfrm>
-            <a:off x="5623560" y="3163824"/>
-            <a:ext cx="5669280" cy="713232"/>
-          </a:xfrm>
-          <a:prstGeom prst="rect">
-            <a:avLst/>
-          </a:prstGeom>
-          <a:noFill/>
-          <a:ln/>
-        </p:spPr>
-        <p:txBody>
-          <a:bodyPr wrap="square" lIns="0" tIns="0" rIns="0" bIns="0" rtlCol="0" anchor="ctr"/>
-          <a:lstStyle/>
-          <a:p>
-            <a:pPr marL="0" indent="0">
-              <a:buNone/>
-            </a:pPr>
-            <a:r>
-              <a:rPr lang="en-US" sz="1550" dirty="0">
-                <a:solidFill>
-                  <a:srgbClr val="9FB0B3"/>
-                </a:solidFill>
-                <a:latin typeface="TH Sarabun New" pitchFamily="34" charset="0"/>
-                <a:ea typeface="TH Sarabun New" pitchFamily="34" charset="-122"/>
-                <a:cs typeface="TH Sarabun New" pitchFamily="34" charset="-120"/>
-              </a:rPr>
-              <a:t>L1 ถึง L6 และตรวจด้วยเกณฑ์ยอมรับที่วัดผลได้</a:t>
-            </a:r>
-            <a:endParaRPr lang="en-US" sz="1550" dirty="0"/>
-          </a:p>
-        </p:txBody>
-      </p:sp>
-      <p:sp>
-        <p:nvSpPr>
-          <p:cNvPr id="19" name="Shape 17"/>
-          <p:cNvSpPr/>
-          <p:nvPr/>
-        </p:nvSpPr>
-        <p:spPr>
-          <a:xfrm>
-            <a:off x="594360" y="4005072"/>
-            <a:ext cx="10972800" cy="713232"/>
-          </a:xfrm>
-          <a:prstGeom prst="roundRect">
-            <a:avLst>
-              <a:gd name="adj" fmla="val 11538"/>
-            </a:avLst>
-          </a:prstGeom>
-          <a:solidFill>
-            <a:srgbClr val="2E3742"/>
-          </a:solidFill>
-          <a:ln w="12700">
-            <a:solidFill>
-              <a:srgbClr val="2E3742"/>
-            </a:solidFill>
-            <a:prstDash val="solid"/>
-          </a:ln>
-        </p:spPr>
-        <p:txBody>
-          <a:bodyPr/>
-          <a:lstStyle/>
-          <a:p>
-            <a:endParaRPr lang="en-TH"/>
-          </a:p>
-        </p:txBody>
-      </p:sp>
-      <p:sp>
-        <p:nvSpPr>
-          <p:cNvPr id="20" name="Shape 18"/>
-          <p:cNvSpPr/>
-          <p:nvPr/>
-        </p:nvSpPr>
-        <p:spPr>
-          <a:xfrm>
-            <a:off x="832104" y="4178808"/>
-            <a:ext cx="365760" cy="365760"/>
-          </a:xfrm>
-          <a:prstGeom prst="ellipse">
-            <a:avLst/>
-          </a:prstGeom>
-          <a:solidFill>
-            <a:srgbClr val="00ADB5"/>
-          </a:solidFill>
-          <a:ln w="12700">
-            <a:solidFill>
-              <a:srgbClr val="00ADB5"/>
-            </a:solidFill>
-            <a:prstDash val="solid"/>
-          </a:ln>
-        </p:spPr>
-        <p:txBody>
-          <a:bodyPr/>
-          <a:lstStyle/>
-          <a:p>
-            <a:endParaRPr lang="en-TH"/>
-          </a:p>
-        </p:txBody>
-      </p:sp>
-      <p:sp>
-        <p:nvSpPr>
-          <p:cNvPr id="21" name="Text 19"/>
-          <p:cNvSpPr/>
-          <p:nvPr/>
-        </p:nvSpPr>
-        <p:spPr>
-          <a:xfrm>
-            <a:off x="832104" y="4178808"/>
-            <a:ext cx="365760" cy="365760"/>
-          </a:xfrm>
-          <a:prstGeom prst="rect">
-            <a:avLst/>
-          </a:prstGeom>
-          <a:noFill/>
-          <a:ln/>
-        </p:spPr>
-        <p:txBody>
-          <a:bodyPr wrap="square" lIns="0" tIns="0" rIns="0" bIns="0" rtlCol="0" anchor="ctr"/>
-          <a:lstStyle/>
-          <a:p>
-            <a:pPr marL="0" indent="0" algn="ctr">
-              <a:buNone/>
-            </a:pPr>
-            <a:r>
-              <a:rPr lang="en-US" sz="1500" b="1" dirty="0">
-                <a:solidFill>
-                  <a:srgbClr val="FFFFFF"/>
-                </a:solidFill>
-                <a:latin typeface="TH Sarabun New" pitchFamily="34" charset="0"/>
-                <a:ea typeface="TH Sarabun New" pitchFamily="34" charset="-122"/>
-                <a:cs typeface="TH Sarabun New" pitchFamily="34" charset="-120"/>
-              </a:rPr>
-              <a:t>4</a:t>
-            </a:r>
-            <a:endParaRPr lang="en-US" sz="1500" dirty="0"/>
-          </a:p>
-        </p:txBody>
-      </p:sp>
-      <p:sp>
-        <p:nvSpPr>
-          <p:cNvPr id="22" name="Text 20"/>
-          <p:cNvSpPr/>
-          <p:nvPr/>
-        </p:nvSpPr>
-        <p:spPr>
-          <a:xfrm>
-            <a:off x="1344168" y="4005072"/>
-            <a:ext cx="4206240" cy="713232"/>
-          </a:xfrm>
-          <a:prstGeom prst="rect">
-            <a:avLst/>
-          </a:prstGeom>
-          <a:noFill/>
-          <a:ln/>
-        </p:spPr>
-        <p:txBody>
-          <a:bodyPr wrap="square" lIns="0" tIns="0" rIns="0" bIns="0" rtlCol="0" anchor="ctr"/>
-          <a:lstStyle/>
-          <a:p>
-            <a:pPr marL="0" indent="0">
-              <a:buNone/>
-            </a:pPr>
-            <a:r>
-              <a:rPr lang="en-US" sz="1750" b="1" dirty="0">
-                <a:solidFill>
-                  <a:srgbClr val="FFFFFF"/>
-                </a:solidFill>
-                <a:latin typeface="TH Sarabun New" pitchFamily="34" charset="0"/>
-                <a:ea typeface="TH Sarabun New" pitchFamily="34" charset="-122"/>
-                <a:cs typeface="TH Sarabun New" pitchFamily="34" charset="-120"/>
-              </a:rPr>
-              <a:t>งานเสร็จเมื่อคนอื่นเปิดใช้ได้</a:t>
-            </a:r>
-            <a:endParaRPr lang="en-US" sz="1750" dirty="0"/>
-          </a:p>
-        </p:txBody>
-      </p:sp>
-      <p:sp>
-        <p:nvSpPr>
-          <p:cNvPr id="23" name="Text 21"/>
-          <p:cNvSpPr/>
-          <p:nvPr/>
-        </p:nvSpPr>
-        <p:spPr>
-          <a:xfrm>
-            <a:off x="5623560" y="4005072"/>
-            <a:ext cx="5669280" cy="713232"/>
-          </a:xfrm>
-          <a:prstGeom prst="rect">
-            <a:avLst/>
-          </a:prstGeom>
-          <a:noFill/>
-          <a:ln/>
-        </p:spPr>
-        <p:txBody>
-          <a:bodyPr wrap="square" lIns="0" tIns="0" rIns="0" bIns="0" rtlCol="0" anchor="ctr"/>
-          <a:lstStyle/>
-          <a:p>
-            <a:pPr marL="0" indent="0">
-              <a:buNone/>
-            </a:pPr>
-            <a:r>
-              <a:rPr lang="en-US" sz="1550" dirty="0">
-                <a:solidFill>
-                  <a:srgbClr val="9FB0B3"/>
-                </a:solidFill>
-                <a:latin typeface="TH Sarabun New" pitchFamily="34" charset="0"/>
-                <a:ea typeface="TH Sarabun New" pitchFamily="34" charset="-122"/>
-                <a:cs typeface="TH Sarabun New" pitchFamily="34" charset="-120"/>
-              </a:rPr>
-              <a:t>ทดสอบ 3 ระดับ แล้วนำขึ้น GitHub Pages</a:t>
-            </a:r>
-            <a:endParaRPr lang="en-US" sz="1550" dirty="0"/>
-          </a:p>
-        </p:txBody>
-      </p:sp>
-      <p:sp>
-        <p:nvSpPr>
-          <p:cNvPr id="24" name="Text 22"/>
-          <p:cNvSpPr/>
-          <p:nvPr/>
-        </p:nvSpPr>
-        <p:spPr>
-          <a:xfrm>
-            <a:off x="594360" y="5029200"/>
-            <a:ext cx="10972800" cy="457200"/>
-          </a:xfrm>
-          <a:prstGeom prst="rect">
-            <a:avLst/>
-          </a:prstGeom>
-          <a:noFill/>
-          <a:ln/>
-        </p:spPr>
-        <p:txBody>
-          <a:bodyPr wrap="square" lIns="0" tIns="0" rIns="0" bIns="0" rtlCol="0" anchor="ctr"/>
-          <a:lstStyle/>
-          <a:p>
-            <a:pPr marL="0" indent="0">
-              <a:buNone/>
-            </a:pPr>
-            <a:r>
-              <a:rPr lang="en-US" sz="2600" b="1" dirty="0">
-                <a:solidFill>
-                  <a:srgbClr val="00ADB5"/>
-                </a:solidFill>
-                <a:latin typeface="TH Sarabun New" pitchFamily="34" charset="0"/>
-                <a:ea typeface="TH Sarabun New" pitchFamily="34" charset="-122"/>
-                <a:cs typeface="TH Sarabun New" pitchFamily="34" charset="-120"/>
-              </a:rPr>
-              <a:t>ขอบคุณครับ  ·  ช่วงถาม-ตอบ</a:t>
-            </a:r>
-            <a:endParaRPr lang="en-US" sz="2600" dirty="0"/>
-          </a:p>
-        </p:txBody>
-      </p:sp>
-      <p:sp>
-        <p:nvSpPr>
-          <p:cNvPr id="25" name="Text 23"/>
-          <p:cNvSpPr/>
-          <p:nvPr/>
-        </p:nvSpPr>
-        <p:spPr>
-          <a:xfrm>
-            <a:off x="594360" y="5532120"/>
-            <a:ext cx="10972800" cy="365760"/>
-          </a:xfrm>
-          <a:prstGeom prst="rect">
-            <a:avLst/>
-          </a:prstGeom>
-          <a:noFill/>
-          <a:ln/>
-        </p:spPr>
-        <p:txBody>
-          <a:bodyPr wrap="square" lIns="0" tIns="0" rIns="0" bIns="0" rtlCol="0" anchor="ctr"/>
-          <a:lstStyle/>
-          <a:p>
-            <a:pPr marL="0" indent="0">
-              <a:buNone/>
-            </a:pPr>
-            <a:r>
-              <a:rPr lang="en-US" sz="1500" dirty="0">
-                <a:solidFill>
-                  <a:srgbClr val="9FB0B3"/>
-                </a:solidFill>
-                <a:latin typeface="TH Sarabun New" pitchFamily="34" charset="0"/>
-                <a:ea typeface="TH Sarabun New" pitchFamily="34" charset="-122"/>
-                <a:cs typeface="TH Sarabun New" pitchFamily="34" charset="-120"/>
-              </a:rPr>
-              <a:t>ไฟล์ประกอบ : SPEC_FundingHub.md  ·  LAB_FundingHub_Antigravity.md</a:t>
-            </a:r>
-            <a:endParaRPr lang="en-US" sz="1500" dirty="0"/>
-          </a:p>
-        </p:txBody>
-      </p:sp>
-    </p:spTree>
+    <p:extLst>
+      <p:ext uri="{BB962C8B-B14F-4D97-AF65-F5344CB8AC3E}">
+        <p14:creationId xmlns:p14="http://schemas.microsoft.com/office/powerpoint/2010/main" val="2368330024"/>
+      </p:ext>
+    </p:extLst>
   </p:cSld>
   <p:clrMapOvr>
     <a:masterClrMapping/>
@@ -21320,6 +20246,1798 @@
               <a:t>แถบสีฟ้า = ช่วงลงมือปฏิบัติ  ·  LAB A เตรียมพร้อม  ·  LAB B ประกอบสเปกด้วยการคัดลอกวาง  ·  LAB C สั่งสร้างและ deploy</a:t>
             </a:r>
             <a:endParaRPr lang="en-US" sz="1300" dirty="0"/>
+          </a:p>
+        </p:txBody>
+      </p:sp>
+    </p:spTree>
+  </p:cSld>
+  <p:clrMapOvr>
+    <a:masterClrMapping/>
+  </p:clrMapOvr>
+</p:sld>
+</file>
+
+<file path=ppt/slides/slide30.xml><?xml version="1.0" encoding="utf-8"?>
+<p:sld xmlns:a="http://schemas.openxmlformats.org/drawingml/2006/main" xmlns:r="http://schemas.openxmlformats.org/officeDocument/2006/relationships" xmlns:p="http://schemas.openxmlformats.org/presentationml/2006/main">
+  <p:cSld name="Slide 37">
+    <p:bg>
+      <p:bgPr>
+        <a:solidFill>
+          <a:srgbClr val="FFFFFF"/>
+        </a:solidFill>
+        <a:effectLst/>
+      </p:bgPr>
+    </p:bg>
+    <p:spTree>
+      <p:nvGrpSpPr>
+        <p:cNvPr id="1" name=""/>
+        <p:cNvGrpSpPr/>
+        <p:nvPr/>
+      </p:nvGrpSpPr>
+      <p:grpSpPr>
+        <a:xfrm>
+          <a:off x="0" y="0"/>
+          <a:ext cx="0" cy="0"/>
+          <a:chOff x="0" y="0"/>
+          <a:chExt cx="0" cy="0"/>
+        </a:xfrm>
+      </p:grpSpPr>
+      <p:sp>
+        <p:nvSpPr>
+          <p:cNvPr id="2" name="Text 0"/>
+          <p:cNvSpPr/>
+          <p:nvPr/>
+        </p:nvSpPr>
+        <p:spPr>
+          <a:xfrm>
+            <a:off x="11018520" y="6263640"/>
+            <a:ext cx="548640" cy="274320"/>
+          </a:xfrm>
+          <a:prstGeom prst="rect">
+            <a:avLst/>
+          </a:prstGeom>
+          <a:noFill/>
+          <a:ln/>
+        </p:spPr>
+        <p:txBody>
+          <a:bodyPr wrap="square" lIns="0" tIns="0" rIns="0" bIns="0" rtlCol="0" anchor="ctr"/>
+          <a:lstStyle/>
+          <a:p>
+            <a:pPr marL="0" indent="0" algn="r">
+              <a:buNone/>
+            </a:pPr>
+            <a:r>
+              <a:rPr lang="en-US" sz="1200" dirty="0">
+                <a:solidFill>
+                  <a:srgbClr val="9AA3AD"/>
+                </a:solidFill>
+                <a:latin typeface="TH Sarabun New" pitchFamily="34" charset="0"/>
+                <a:ea typeface="TH Sarabun New" pitchFamily="34" charset="-122"/>
+                <a:cs typeface="TH Sarabun New" pitchFamily="34" charset="-120"/>
+              </a:rPr>
+              <a:t>37</a:t>
+            </a:r>
+            <a:endParaRPr lang="en-US" sz="1200" dirty="0"/>
+          </a:p>
+        </p:txBody>
+      </p:sp>
+      <p:sp>
+        <p:nvSpPr>
+          <p:cNvPr id="3" name="Text 1"/>
+          <p:cNvSpPr/>
+          <p:nvPr/>
+        </p:nvSpPr>
+        <p:spPr>
+          <a:xfrm>
+            <a:off x="594360" y="329184"/>
+            <a:ext cx="10972800" cy="566928"/>
+          </a:xfrm>
+          <a:prstGeom prst="rect">
+            <a:avLst/>
+          </a:prstGeom>
+          <a:noFill/>
+          <a:ln/>
+        </p:spPr>
+        <p:txBody>
+          <a:bodyPr wrap="square" lIns="0" tIns="0" rIns="0" bIns="0" rtlCol="0" anchor="ctr"/>
+          <a:lstStyle/>
+          <a:p>
+            <a:pPr marL="0" indent="0">
+              <a:buNone/>
+            </a:pPr>
+            <a:r>
+              <a:rPr lang="en-US" sz="3200" b="1" dirty="0">
+                <a:solidFill>
+                  <a:srgbClr val="222831"/>
+                </a:solidFill>
+                <a:latin typeface="TH Sarabun New" pitchFamily="34" charset="0"/>
+                <a:ea typeface="TH Sarabun New" pitchFamily="34" charset="-122"/>
+                <a:cs typeface="TH Sarabun New" pitchFamily="34" charset="-120"/>
+              </a:rPr>
+              <a:t>ข้อจำกัดของ AI และความรับผิดชอบของเรา</a:t>
+            </a:r>
+            <a:endParaRPr lang="en-US" sz="3200" dirty="0"/>
+          </a:p>
+        </p:txBody>
+      </p:sp>
+      <p:sp>
+        <p:nvSpPr>
+          <p:cNvPr id="4" name="Text 2"/>
+          <p:cNvSpPr/>
+          <p:nvPr/>
+        </p:nvSpPr>
+        <p:spPr>
+          <a:xfrm>
+            <a:off x="594360" y="896112"/>
+            <a:ext cx="10972800" cy="329184"/>
+          </a:xfrm>
+          <a:prstGeom prst="rect">
+            <a:avLst/>
+          </a:prstGeom>
+          <a:noFill/>
+          <a:ln/>
+        </p:spPr>
+        <p:txBody>
+          <a:bodyPr wrap="square" lIns="0" tIns="0" rIns="0" bIns="0" rtlCol="0" anchor="ctr"/>
+          <a:lstStyle/>
+          <a:p>
+            <a:pPr marL="0" indent="0">
+              <a:buNone/>
+            </a:pPr>
+            <a:r>
+              <a:rPr lang="en-US" sz="1700" dirty="0">
+                <a:solidFill>
+                  <a:srgbClr val="8A94A6"/>
+                </a:solidFill>
+                <a:latin typeface="TH Sarabun New" pitchFamily="34" charset="0"/>
+                <a:ea typeface="TH Sarabun New" pitchFamily="34" charset="-122"/>
+                <a:cs typeface="TH Sarabun New" pitchFamily="34" charset="-120"/>
+              </a:rPr>
+              <a:t>สิ่งที่ต้องจำให้ขึ้นใจเมื่อกลับไปทำงานจริง</a:t>
+            </a:r>
+            <a:endParaRPr lang="en-US" sz="1700" dirty="0"/>
+          </a:p>
+        </p:txBody>
+      </p:sp>
+      <p:sp>
+        <p:nvSpPr>
+          <p:cNvPr id="5" name="Shape 3"/>
+          <p:cNvSpPr/>
+          <p:nvPr/>
+        </p:nvSpPr>
+        <p:spPr>
+          <a:xfrm>
+            <a:off x="594360" y="1481328"/>
+            <a:ext cx="5340096" cy="1572768"/>
+          </a:xfrm>
+          <a:prstGeom prst="roundRect">
+            <a:avLst>
+              <a:gd name="adj" fmla="val 5233"/>
+            </a:avLst>
+          </a:prstGeom>
+          <a:solidFill>
+            <a:srgbClr val="F5F7F8"/>
+          </a:solidFill>
+          <a:ln w="9525">
+            <a:solidFill>
+              <a:srgbClr val="F5F7F8"/>
+            </a:solidFill>
+            <a:prstDash val="solid"/>
+          </a:ln>
+          <a:effectLst>
+            <a:outerShdw blurRad="101600" dist="12700" dir="5400000" algn="bl" rotWithShape="0">
+              <a:srgbClr val="222831">
+                <a:alpha val="10000"/>
+              </a:srgbClr>
+            </a:outerShdw>
+          </a:effectLst>
+        </p:spPr>
+        <p:txBody>
+          <a:bodyPr/>
+          <a:lstStyle/>
+          <a:p>
+            <a:endParaRPr lang="en-TH"/>
+          </a:p>
+        </p:txBody>
+      </p:sp>
+      <p:sp>
+        <p:nvSpPr>
+          <p:cNvPr id="6" name="Shape 4"/>
+          <p:cNvSpPr/>
+          <p:nvPr/>
+        </p:nvSpPr>
+        <p:spPr>
+          <a:xfrm>
+            <a:off x="850392" y="1737360"/>
+            <a:ext cx="402336" cy="402336"/>
+          </a:xfrm>
+          <a:prstGeom prst="ellipse">
+            <a:avLst/>
+          </a:prstGeom>
+          <a:solidFill>
+            <a:srgbClr val="00ADB5"/>
+          </a:solidFill>
+          <a:ln w="12700">
+            <a:solidFill>
+              <a:srgbClr val="00ADB5"/>
+            </a:solidFill>
+            <a:prstDash val="solid"/>
+          </a:ln>
+        </p:spPr>
+        <p:txBody>
+          <a:bodyPr/>
+          <a:lstStyle/>
+          <a:p>
+            <a:endParaRPr lang="en-TH"/>
+          </a:p>
+        </p:txBody>
+      </p:sp>
+      <p:sp>
+        <p:nvSpPr>
+          <p:cNvPr id="7" name="Text 5"/>
+          <p:cNvSpPr/>
+          <p:nvPr/>
+        </p:nvSpPr>
+        <p:spPr>
+          <a:xfrm>
+            <a:off x="850392" y="1737360"/>
+            <a:ext cx="402336" cy="402336"/>
+          </a:xfrm>
+          <a:prstGeom prst="rect">
+            <a:avLst/>
+          </a:prstGeom>
+          <a:noFill/>
+          <a:ln/>
+        </p:spPr>
+        <p:txBody>
+          <a:bodyPr wrap="square" lIns="0" tIns="0" rIns="0" bIns="0" rtlCol="0" anchor="ctr"/>
+          <a:lstStyle/>
+          <a:p>
+            <a:pPr marL="0" indent="0" algn="ctr">
+              <a:buNone/>
+            </a:pPr>
+            <a:r>
+              <a:rPr lang="en-US" sz="1500" b="1" dirty="0">
+                <a:solidFill>
+                  <a:srgbClr val="FFFFFF"/>
+                </a:solidFill>
+                <a:latin typeface="TH Sarabun New" pitchFamily="34" charset="0"/>
+                <a:ea typeface="TH Sarabun New" pitchFamily="34" charset="-122"/>
+                <a:cs typeface="TH Sarabun New" pitchFamily="34" charset="-120"/>
+              </a:rPr>
+              <a:t>1</a:t>
+            </a:r>
+            <a:endParaRPr lang="en-US" sz="1500" dirty="0"/>
+          </a:p>
+        </p:txBody>
+      </p:sp>
+      <p:sp>
+        <p:nvSpPr>
+          <p:cNvPr id="8" name="Text 6"/>
+          <p:cNvSpPr/>
+          <p:nvPr/>
+        </p:nvSpPr>
+        <p:spPr>
+          <a:xfrm>
+            <a:off x="1380744" y="1700784"/>
+            <a:ext cx="4389120" cy="384048"/>
+          </a:xfrm>
+          <a:prstGeom prst="rect">
+            <a:avLst/>
+          </a:prstGeom>
+          <a:noFill/>
+          <a:ln/>
+        </p:spPr>
+        <p:txBody>
+          <a:bodyPr wrap="square" lIns="0" tIns="0" rIns="0" bIns="0" rtlCol="0" anchor="ctr"/>
+          <a:lstStyle/>
+          <a:p>
+            <a:pPr marL="0" indent="0">
+              <a:buNone/>
+            </a:pPr>
+            <a:r>
+              <a:rPr lang="en-US" sz="1800" b="1" dirty="0">
+                <a:solidFill>
+                  <a:srgbClr val="222831"/>
+                </a:solidFill>
+                <a:latin typeface="TH Sarabun New" pitchFamily="34" charset="0"/>
+                <a:ea typeface="TH Sarabun New" pitchFamily="34" charset="-122"/>
+                <a:cs typeface="TH Sarabun New" pitchFamily="34" charset="-120"/>
+              </a:rPr>
+              <a:t>AI ไม่รู้ว่าอะไรถูก ถ้าเราไม่บอก</a:t>
+            </a:r>
+            <a:endParaRPr lang="en-US" sz="1800" dirty="0"/>
+          </a:p>
+        </p:txBody>
+      </p:sp>
+      <p:sp>
+        <p:nvSpPr>
+          <p:cNvPr id="9" name="Text 7"/>
+          <p:cNvSpPr/>
+          <p:nvPr/>
+        </p:nvSpPr>
+        <p:spPr>
+          <a:xfrm>
+            <a:off x="1380744" y="2139696"/>
+            <a:ext cx="4389120" cy="777240"/>
+          </a:xfrm>
+          <a:prstGeom prst="rect">
+            <a:avLst/>
+          </a:prstGeom>
+          <a:noFill/>
+          <a:ln/>
+        </p:spPr>
+        <p:txBody>
+          <a:bodyPr wrap="square" lIns="0" tIns="0" rIns="0" bIns="0" rtlCol="0" anchor="ctr"/>
+          <a:lstStyle/>
+          <a:p>
+            <a:pPr marL="0" indent="0">
+              <a:buNone/>
+            </a:pPr>
+            <a:r>
+              <a:rPr lang="en-US" sz="1550" dirty="0">
+                <a:solidFill>
+                  <a:srgbClr val="393E46"/>
+                </a:solidFill>
+                <a:latin typeface="TH Sarabun New" pitchFamily="34" charset="0"/>
+                <a:ea typeface="TH Sarabun New" pitchFamily="34" charset="-122"/>
+                <a:cs typeface="TH Sarabun New" pitchFamily="34" charset="-120"/>
+              </a:rPr>
+              <a:t>มันทำตามสิ่งที่เขียนไว้ ไม่ใช่สิ่งที่เราคิดในใจ ความคลุมเครือทุกจุดจะกลายเป็นการเดา</a:t>
+            </a:r>
+            <a:endParaRPr lang="en-US" sz="1550" dirty="0"/>
+          </a:p>
+        </p:txBody>
+      </p:sp>
+      <p:sp>
+        <p:nvSpPr>
+          <p:cNvPr id="10" name="Shape 8"/>
+          <p:cNvSpPr/>
+          <p:nvPr/>
+        </p:nvSpPr>
+        <p:spPr>
+          <a:xfrm>
+            <a:off x="6227064" y="1481328"/>
+            <a:ext cx="5340096" cy="1572768"/>
+          </a:xfrm>
+          <a:prstGeom prst="roundRect">
+            <a:avLst>
+              <a:gd name="adj" fmla="val 5233"/>
+            </a:avLst>
+          </a:prstGeom>
+          <a:solidFill>
+            <a:srgbClr val="F5F7F8"/>
+          </a:solidFill>
+          <a:ln w="9525">
+            <a:solidFill>
+              <a:srgbClr val="F5F7F8"/>
+            </a:solidFill>
+            <a:prstDash val="solid"/>
+          </a:ln>
+          <a:effectLst>
+            <a:outerShdw blurRad="101600" dist="12700" dir="5400000" algn="bl" rotWithShape="0">
+              <a:srgbClr val="222831">
+                <a:alpha val="10000"/>
+              </a:srgbClr>
+            </a:outerShdw>
+          </a:effectLst>
+        </p:spPr>
+        <p:txBody>
+          <a:bodyPr/>
+          <a:lstStyle/>
+          <a:p>
+            <a:endParaRPr lang="en-TH"/>
+          </a:p>
+        </p:txBody>
+      </p:sp>
+      <p:sp>
+        <p:nvSpPr>
+          <p:cNvPr id="11" name="Shape 9"/>
+          <p:cNvSpPr/>
+          <p:nvPr/>
+        </p:nvSpPr>
+        <p:spPr>
+          <a:xfrm>
+            <a:off x="6483096" y="1737360"/>
+            <a:ext cx="402336" cy="402336"/>
+          </a:xfrm>
+          <a:prstGeom prst="ellipse">
+            <a:avLst/>
+          </a:prstGeom>
+          <a:solidFill>
+            <a:srgbClr val="00ADB5"/>
+          </a:solidFill>
+          <a:ln w="12700">
+            <a:solidFill>
+              <a:srgbClr val="00ADB5"/>
+            </a:solidFill>
+            <a:prstDash val="solid"/>
+          </a:ln>
+        </p:spPr>
+        <p:txBody>
+          <a:bodyPr/>
+          <a:lstStyle/>
+          <a:p>
+            <a:endParaRPr lang="en-TH"/>
+          </a:p>
+        </p:txBody>
+      </p:sp>
+      <p:sp>
+        <p:nvSpPr>
+          <p:cNvPr id="12" name="Text 10"/>
+          <p:cNvSpPr/>
+          <p:nvPr/>
+        </p:nvSpPr>
+        <p:spPr>
+          <a:xfrm>
+            <a:off x="6483096" y="1737360"/>
+            <a:ext cx="402336" cy="402336"/>
+          </a:xfrm>
+          <a:prstGeom prst="rect">
+            <a:avLst/>
+          </a:prstGeom>
+          <a:noFill/>
+          <a:ln/>
+        </p:spPr>
+        <p:txBody>
+          <a:bodyPr wrap="square" lIns="0" tIns="0" rIns="0" bIns="0" rtlCol="0" anchor="ctr"/>
+          <a:lstStyle/>
+          <a:p>
+            <a:pPr marL="0" indent="0" algn="ctr">
+              <a:buNone/>
+            </a:pPr>
+            <a:r>
+              <a:rPr lang="en-US" sz="1500" b="1" dirty="0">
+                <a:solidFill>
+                  <a:srgbClr val="FFFFFF"/>
+                </a:solidFill>
+                <a:latin typeface="TH Sarabun New" pitchFamily="34" charset="0"/>
+                <a:ea typeface="TH Sarabun New" pitchFamily="34" charset="-122"/>
+                <a:cs typeface="TH Sarabun New" pitchFamily="34" charset="-120"/>
+              </a:rPr>
+              <a:t>2</a:t>
+            </a:r>
+            <a:endParaRPr lang="en-US" sz="1500" dirty="0"/>
+          </a:p>
+        </p:txBody>
+      </p:sp>
+      <p:sp>
+        <p:nvSpPr>
+          <p:cNvPr id="13" name="Text 11"/>
+          <p:cNvSpPr/>
+          <p:nvPr/>
+        </p:nvSpPr>
+        <p:spPr>
+          <a:xfrm>
+            <a:off x="7013448" y="1700784"/>
+            <a:ext cx="4389120" cy="384048"/>
+          </a:xfrm>
+          <a:prstGeom prst="rect">
+            <a:avLst/>
+          </a:prstGeom>
+          <a:noFill/>
+          <a:ln/>
+        </p:spPr>
+        <p:txBody>
+          <a:bodyPr wrap="square" lIns="0" tIns="0" rIns="0" bIns="0" rtlCol="0" anchor="ctr"/>
+          <a:lstStyle/>
+          <a:p>
+            <a:pPr marL="0" indent="0">
+              <a:buNone/>
+            </a:pPr>
+            <a:r>
+              <a:rPr lang="en-US" sz="1800" b="1" dirty="0">
+                <a:solidFill>
+                  <a:srgbClr val="222831"/>
+                </a:solidFill>
+                <a:latin typeface="TH Sarabun New" pitchFamily="34" charset="0"/>
+                <a:ea typeface="TH Sarabun New" pitchFamily="34" charset="-122"/>
+                <a:cs typeface="TH Sarabun New" pitchFamily="34" charset="-120"/>
+              </a:rPr>
+              <a:t>โค้ดที่ได้ยังเป็นความรับผิดชอบของเรา</a:t>
+            </a:r>
+            <a:endParaRPr lang="en-US" sz="1800" dirty="0"/>
+          </a:p>
+        </p:txBody>
+      </p:sp>
+      <p:sp>
+        <p:nvSpPr>
+          <p:cNvPr id="14" name="Text 12"/>
+          <p:cNvSpPr/>
+          <p:nvPr/>
+        </p:nvSpPr>
+        <p:spPr>
+          <a:xfrm>
+            <a:off x="7013448" y="2139696"/>
+            <a:ext cx="4389120" cy="777240"/>
+          </a:xfrm>
+          <a:prstGeom prst="rect">
+            <a:avLst/>
+          </a:prstGeom>
+          <a:noFill/>
+          <a:ln/>
+        </p:spPr>
+        <p:txBody>
+          <a:bodyPr wrap="square" lIns="0" tIns="0" rIns="0" bIns="0" rtlCol="0" anchor="ctr"/>
+          <a:lstStyle/>
+          <a:p>
+            <a:pPr marL="0" indent="0">
+              <a:buNone/>
+            </a:pPr>
+            <a:r>
+              <a:rPr lang="en-US" sz="1550" dirty="0">
+                <a:solidFill>
+                  <a:srgbClr val="393E46"/>
+                </a:solidFill>
+                <a:latin typeface="TH Sarabun New" pitchFamily="34" charset="0"/>
+                <a:ea typeface="TH Sarabun New" pitchFamily="34" charset="-122"/>
+                <a:cs typeface="TH Sarabun New" pitchFamily="34" charset="-120"/>
+              </a:rPr>
+              <a:t>ต้องอ่าน ต้องทดสอบ ต้องเข้าใจก่อนนำไปใช้จริง โดยเฉพาะระบบที่มีข้อมูลของคนอื่น</a:t>
+            </a:r>
+            <a:endParaRPr lang="en-US" sz="1550" dirty="0"/>
+          </a:p>
+        </p:txBody>
+      </p:sp>
+      <p:sp>
+        <p:nvSpPr>
+          <p:cNvPr id="15" name="Shape 13"/>
+          <p:cNvSpPr/>
+          <p:nvPr/>
+        </p:nvSpPr>
+        <p:spPr>
+          <a:xfrm>
+            <a:off x="594360" y="3264408"/>
+            <a:ext cx="5340096" cy="1572768"/>
+          </a:xfrm>
+          <a:prstGeom prst="roundRect">
+            <a:avLst>
+              <a:gd name="adj" fmla="val 5233"/>
+            </a:avLst>
+          </a:prstGeom>
+          <a:solidFill>
+            <a:srgbClr val="F5F7F8"/>
+          </a:solidFill>
+          <a:ln w="9525">
+            <a:solidFill>
+              <a:srgbClr val="F5F7F8"/>
+            </a:solidFill>
+            <a:prstDash val="solid"/>
+          </a:ln>
+          <a:effectLst>
+            <a:outerShdw blurRad="101600" dist="12700" dir="5400000" algn="bl" rotWithShape="0">
+              <a:srgbClr val="222831">
+                <a:alpha val="10000"/>
+              </a:srgbClr>
+            </a:outerShdw>
+          </a:effectLst>
+        </p:spPr>
+        <p:txBody>
+          <a:bodyPr/>
+          <a:lstStyle/>
+          <a:p>
+            <a:endParaRPr lang="en-TH"/>
+          </a:p>
+        </p:txBody>
+      </p:sp>
+      <p:sp>
+        <p:nvSpPr>
+          <p:cNvPr id="16" name="Shape 14"/>
+          <p:cNvSpPr/>
+          <p:nvPr/>
+        </p:nvSpPr>
+        <p:spPr>
+          <a:xfrm>
+            <a:off x="850392" y="3520440"/>
+            <a:ext cx="402336" cy="402336"/>
+          </a:xfrm>
+          <a:prstGeom prst="ellipse">
+            <a:avLst/>
+          </a:prstGeom>
+          <a:solidFill>
+            <a:srgbClr val="00ADB5"/>
+          </a:solidFill>
+          <a:ln w="12700">
+            <a:solidFill>
+              <a:srgbClr val="00ADB5"/>
+            </a:solidFill>
+            <a:prstDash val="solid"/>
+          </a:ln>
+        </p:spPr>
+        <p:txBody>
+          <a:bodyPr/>
+          <a:lstStyle/>
+          <a:p>
+            <a:endParaRPr lang="en-TH"/>
+          </a:p>
+        </p:txBody>
+      </p:sp>
+      <p:sp>
+        <p:nvSpPr>
+          <p:cNvPr id="17" name="Text 15"/>
+          <p:cNvSpPr/>
+          <p:nvPr/>
+        </p:nvSpPr>
+        <p:spPr>
+          <a:xfrm>
+            <a:off x="850392" y="3520440"/>
+            <a:ext cx="402336" cy="402336"/>
+          </a:xfrm>
+          <a:prstGeom prst="rect">
+            <a:avLst/>
+          </a:prstGeom>
+          <a:noFill/>
+          <a:ln/>
+        </p:spPr>
+        <p:txBody>
+          <a:bodyPr wrap="square" lIns="0" tIns="0" rIns="0" bIns="0" rtlCol="0" anchor="ctr"/>
+          <a:lstStyle/>
+          <a:p>
+            <a:pPr marL="0" indent="0" algn="ctr">
+              <a:buNone/>
+            </a:pPr>
+            <a:r>
+              <a:rPr lang="en-US" sz="1500" b="1" dirty="0">
+                <a:solidFill>
+                  <a:srgbClr val="FFFFFF"/>
+                </a:solidFill>
+                <a:latin typeface="TH Sarabun New" pitchFamily="34" charset="0"/>
+                <a:ea typeface="TH Sarabun New" pitchFamily="34" charset="-122"/>
+                <a:cs typeface="TH Sarabun New" pitchFamily="34" charset="-120"/>
+              </a:rPr>
+              <a:t>3</a:t>
+            </a:r>
+            <a:endParaRPr lang="en-US" sz="1500" dirty="0"/>
+          </a:p>
+        </p:txBody>
+      </p:sp>
+      <p:sp>
+        <p:nvSpPr>
+          <p:cNvPr id="18" name="Text 16"/>
+          <p:cNvSpPr/>
+          <p:nvPr/>
+        </p:nvSpPr>
+        <p:spPr>
+          <a:xfrm>
+            <a:off x="1380744" y="3483864"/>
+            <a:ext cx="4389120" cy="384048"/>
+          </a:xfrm>
+          <a:prstGeom prst="rect">
+            <a:avLst/>
+          </a:prstGeom>
+          <a:noFill/>
+          <a:ln/>
+        </p:spPr>
+        <p:txBody>
+          <a:bodyPr wrap="square" lIns="0" tIns="0" rIns="0" bIns="0" rtlCol="0" anchor="ctr"/>
+          <a:lstStyle/>
+          <a:p>
+            <a:pPr marL="0" indent="0">
+              <a:buNone/>
+            </a:pPr>
+            <a:r>
+              <a:rPr lang="en-US" sz="1800" b="1" dirty="0">
+                <a:solidFill>
+                  <a:srgbClr val="222831"/>
+                </a:solidFill>
+                <a:latin typeface="TH Sarabun New" pitchFamily="34" charset="0"/>
+                <a:ea typeface="TH Sarabun New" pitchFamily="34" charset="-122"/>
+                <a:cs typeface="TH Sarabun New" pitchFamily="34" charset="-120"/>
+              </a:rPr>
+              <a:t>ความลับห้ามอยู่ในโค้ด</a:t>
+            </a:r>
+            <a:endParaRPr lang="en-US" sz="1800" dirty="0"/>
+          </a:p>
+        </p:txBody>
+      </p:sp>
+      <p:sp>
+        <p:nvSpPr>
+          <p:cNvPr id="19" name="Text 17"/>
+          <p:cNvSpPr/>
+          <p:nvPr/>
+        </p:nvSpPr>
+        <p:spPr>
+          <a:xfrm>
+            <a:off x="1380744" y="3922776"/>
+            <a:ext cx="4389120" cy="777240"/>
+          </a:xfrm>
+          <a:prstGeom prst="rect">
+            <a:avLst/>
+          </a:prstGeom>
+          <a:noFill/>
+          <a:ln/>
+        </p:spPr>
+        <p:txBody>
+          <a:bodyPr wrap="square" lIns="0" tIns="0" rIns="0" bIns="0" rtlCol="0" anchor="ctr"/>
+          <a:lstStyle/>
+          <a:p>
+            <a:pPr marL="0" indent="0">
+              <a:buNone/>
+            </a:pPr>
+            <a:r>
+              <a:rPr lang="en-US" sz="1550" dirty="0">
+                <a:solidFill>
+                  <a:srgbClr val="393E46"/>
+                </a:solidFill>
+                <a:latin typeface="TH Sarabun New" pitchFamily="34" charset="0"/>
+                <a:ea typeface="TH Sarabun New" pitchFamily="34" charset="-122"/>
+                <a:cs typeface="TH Sarabun New" pitchFamily="34" charset="-120"/>
+              </a:rPr>
+              <a:t>กุญแจ รหัสผ่าน และข้อมูลส่วนบุคคล ต้องอยู่นอกโปรเจกต์เสมอ</a:t>
+            </a:r>
+            <a:endParaRPr lang="en-US" sz="1550" dirty="0"/>
+          </a:p>
+        </p:txBody>
+      </p:sp>
+      <p:sp>
+        <p:nvSpPr>
+          <p:cNvPr id="20" name="Shape 18"/>
+          <p:cNvSpPr/>
+          <p:nvPr/>
+        </p:nvSpPr>
+        <p:spPr>
+          <a:xfrm>
+            <a:off x="6227064" y="3264408"/>
+            <a:ext cx="5340096" cy="1572768"/>
+          </a:xfrm>
+          <a:prstGeom prst="roundRect">
+            <a:avLst>
+              <a:gd name="adj" fmla="val 5233"/>
+            </a:avLst>
+          </a:prstGeom>
+          <a:solidFill>
+            <a:srgbClr val="F5F7F8"/>
+          </a:solidFill>
+          <a:ln w="9525">
+            <a:solidFill>
+              <a:srgbClr val="F5F7F8"/>
+            </a:solidFill>
+            <a:prstDash val="solid"/>
+          </a:ln>
+          <a:effectLst>
+            <a:outerShdw blurRad="101600" dist="12700" dir="5400000" algn="bl" rotWithShape="0">
+              <a:srgbClr val="222831">
+                <a:alpha val="10000"/>
+              </a:srgbClr>
+            </a:outerShdw>
+          </a:effectLst>
+        </p:spPr>
+        <p:txBody>
+          <a:bodyPr/>
+          <a:lstStyle/>
+          <a:p>
+            <a:endParaRPr lang="en-TH"/>
+          </a:p>
+        </p:txBody>
+      </p:sp>
+      <p:sp>
+        <p:nvSpPr>
+          <p:cNvPr id="21" name="Shape 19"/>
+          <p:cNvSpPr/>
+          <p:nvPr/>
+        </p:nvSpPr>
+        <p:spPr>
+          <a:xfrm>
+            <a:off x="6483096" y="3520440"/>
+            <a:ext cx="402336" cy="402336"/>
+          </a:xfrm>
+          <a:prstGeom prst="ellipse">
+            <a:avLst/>
+          </a:prstGeom>
+          <a:solidFill>
+            <a:srgbClr val="00ADB5"/>
+          </a:solidFill>
+          <a:ln w="12700">
+            <a:solidFill>
+              <a:srgbClr val="00ADB5"/>
+            </a:solidFill>
+            <a:prstDash val="solid"/>
+          </a:ln>
+        </p:spPr>
+        <p:txBody>
+          <a:bodyPr/>
+          <a:lstStyle/>
+          <a:p>
+            <a:endParaRPr lang="en-TH"/>
+          </a:p>
+        </p:txBody>
+      </p:sp>
+      <p:sp>
+        <p:nvSpPr>
+          <p:cNvPr id="22" name="Text 20"/>
+          <p:cNvSpPr/>
+          <p:nvPr/>
+        </p:nvSpPr>
+        <p:spPr>
+          <a:xfrm>
+            <a:off x="6483096" y="3520440"/>
+            <a:ext cx="402336" cy="402336"/>
+          </a:xfrm>
+          <a:prstGeom prst="rect">
+            <a:avLst/>
+          </a:prstGeom>
+          <a:noFill/>
+          <a:ln/>
+        </p:spPr>
+        <p:txBody>
+          <a:bodyPr wrap="square" lIns="0" tIns="0" rIns="0" bIns="0" rtlCol="0" anchor="ctr"/>
+          <a:lstStyle/>
+          <a:p>
+            <a:pPr marL="0" indent="0" algn="ctr">
+              <a:buNone/>
+            </a:pPr>
+            <a:r>
+              <a:rPr lang="en-US" sz="1500" b="1" dirty="0">
+                <a:solidFill>
+                  <a:srgbClr val="FFFFFF"/>
+                </a:solidFill>
+                <a:latin typeface="TH Sarabun New" pitchFamily="34" charset="0"/>
+                <a:ea typeface="TH Sarabun New" pitchFamily="34" charset="-122"/>
+                <a:cs typeface="TH Sarabun New" pitchFamily="34" charset="-120"/>
+              </a:rPr>
+              <a:t>4</a:t>
+            </a:r>
+            <a:endParaRPr lang="en-US" sz="1500" dirty="0"/>
+          </a:p>
+        </p:txBody>
+      </p:sp>
+      <p:sp>
+        <p:nvSpPr>
+          <p:cNvPr id="23" name="Text 21"/>
+          <p:cNvSpPr/>
+          <p:nvPr/>
+        </p:nvSpPr>
+        <p:spPr>
+          <a:xfrm>
+            <a:off x="7013448" y="3483864"/>
+            <a:ext cx="4389120" cy="384048"/>
+          </a:xfrm>
+          <a:prstGeom prst="rect">
+            <a:avLst/>
+          </a:prstGeom>
+          <a:noFill/>
+          <a:ln/>
+        </p:spPr>
+        <p:txBody>
+          <a:bodyPr wrap="square" lIns="0" tIns="0" rIns="0" bIns="0" rtlCol="0" anchor="ctr"/>
+          <a:lstStyle/>
+          <a:p>
+            <a:pPr marL="0" indent="0">
+              <a:buNone/>
+            </a:pPr>
+            <a:r>
+              <a:rPr lang="en-US" sz="1800" b="1" dirty="0">
+                <a:solidFill>
+                  <a:srgbClr val="222831"/>
+                </a:solidFill>
+                <a:latin typeface="TH Sarabun New" pitchFamily="34" charset="0"/>
+                <a:ea typeface="TH Sarabun New" pitchFamily="34" charset="-122"/>
+                <a:cs typeface="TH Sarabun New" pitchFamily="34" charset="-120"/>
+              </a:rPr>
+              <a:t>ระบบจริงต้องมีสิทธิ์ผู้ใช้จริง</a:t>
+            </a:r>
+            <a:endParaRPr lang="en-US" sz="1800" dirty="0"/>
+          </a:p>
+        </p:txBody>
+      </p:sp>
+      <p:sp>
+        <p:nvSpPr>
+          <p:cNvPr id="24" name="Text 22"/>
+          <p:cNvSpPr/>
+          <p:nvPr/>
+        </p:nvSpPr>
+        <p:spPr>
+          <a:xfrm>
+            <a:off x="7013448" y="3922776"/>
+            <a:ext cx="4389120" cy="777240"/>
+          </a:xfrm>
+          <a:prstGeom prst="rect">
+            <a:avLst/>
+          </a:prstGeom>
+          <a:noFill/>
+          <a:ln/>
+        </p:spPr>
+        <p:txBody>
+          <a:bodyPr wrap="square" lIns="0" tIns="0" rIns="0" bIns="0" rtlCol="0" anchor="ctr"/>
+          <a:lstStyle/>
+          <a:p>
+            <a:pPr marL="0" indent="0">
+              <a:buNone/>
+            </a:pPr>
+            <a:r>
+              <a:rPr lang="en-US" sz="1550" dirty="0">
+                <a:solidFill>
+                  <a:srgbClr val="393E46"/>
+                </a:solidFill>
+                <a:latin typeface="TH Sarabun New" pitchFamily="34" charset="0"/>
+                <a:ea typeface="TH Sarabun New" pitchFamily="34" charset="-122"/>
+                <a:cs typeface="TH Sarabun New" pitchFamily="34" charset="-120"/>
+              </a:rPr>
+              <a:t>RLS แบบเปิดทุกสิทธิ์ใช้ได้เฉพาะการฝึกอบรม ระบบที่มีข้อมูลจริงต้องผูกกับผู้ใช้ที่ล็อกอินและคำนึงถึง PDPA</a:t>
+            </a:r>
+            <a:endParaRPr lang="en-US" sz="1550" dirty="0"/>
+          </a:p>
+        </p:txBody>
+      </p:sp>
+    </p:spTree>
+  </p:cSld>
+  <p:clrMapOvr>
+    <a:masterClrMapping/>
+  </p:clrMapOvr>
+</p:sld>
+</file>
+
+<file path=ppt/slides/slide31.xml><?xml version="1.0" encoding="utf-8"?>
+<p:sld xmlns:a="http://schemas.openxmlformats.org/drawingml/2006/main" xmlns:r="http://schemas.openxmlformats.org/officeDocument/2006/relationships" xmlns:p="http://schemas.openxmlformats.org/presentationml/2006/main">
+  <p:cSld name="Slide 38">
+    <p:bg>
+      <p:bgPr>
+        <a:solidFill>
+          <a:srgbClr val="222831"/>
+        </a:solidFill>
+        <a:effectLst/>
+      </p:bgPr>
+    </p:bg>
+    <p:spTree>
+      <p:nvGrpSpPr>
+        <p:cNvPr id="1" name=""/>
+        <p:cNvGrpSpPr/>
+        <p:nvPr/>
+      </p:nvGrpSpPr>
+      <p:grpSpPr>
+        <a:xfrm>
+          <a:off x="0" y="0"/>
+          <a:ext cx="0" cy="0"/>
+          <a:chOff x="0" y="0"/>
+          <a:chExt cx="0" cy="0"/>
+        </a:xfrm>
+      </p:grpSpPr>
+      <p:sp>
+        <p:nvSpPr>
+          <p:cNvPr id="2" name="Text 0"/>
+          <p:cNvSpPr/>
+          <p:nvPr/>
+        </p:nvSpPr>
+        <p:spPr>
+          <a:xfrm>
+            <a:off x="11018520" y="6263640"/>
+            <a:ext cx="548640" cy="274320"/>
+          </a:xfrm>
+          <a:prstGeom prst="rect">
+            <a:avLst/>
+          </a:prstGeom>
+          <a:noFill/>
+          <a:ln/>
+        </p:spPr>
+        <p:txBody>
+          <a:bodyPr wrap="square" lIns="0" tIns="0" rIns="0" bIns="0" rtlCol="0" anchor="ctr"/>
+          <a:lstStyle/>
+          <a:p>
+            <a:pPr marL="0" indent="0" algn="r">
+              <a:buNone/>
+            </a:pPr>
+            <a:r>
+              <a:rPr lang="en-US" sz="1200" dirty="0">
+                <a:solidFill>
+                  <a:srgbClr val="9AA3AD"/>
+                </a:solidFill>
+                <a:latin typeface="TH Sarabun New" pitchFamily="34" charset="0"/>
+                <a:ea typeface="TH Sarabun New" pitchFamily="34" charset="-122"/>
+                <a:cs typeface="TH Sarabun New" pitchFamily="34" charset="-120"/>
+              </a:rPr>
+              <a:t>38</a:t>
+            </a:r>
+            <a:endParaRPr lang="en-US" sz="1200" dirty="0"/>
+          </a:p>
+        </p:txBody>
+      </p:sp>
+      <p:sp>
+        <p:nvSpPr>
+          <p:cNvPr id="3" name="Text 1"/>
+          <p:cNvSpPr/>
+          <p:nvPr/>
+        </p:nvSpPr>
+        <p:spPr>
+          <a:xfrm>
+            <a:off x="594360" y="685800"/>
+            <a:ext cx="10972800" cy="566928"/>
+          </a:xfrm>
+          <a:prstGeom prst="rect">
+            <a:avLst/>
+          </a:prstGeom>
+          <a:noFill/>
+          <a:ln/>
+        </p:spPr>
+        <p:txBody>
+          <a:bodyPr wrap="square" lIns="0" tIns="0" rIns="0" bIns="0" rtlCol="0" anchor="ctr"/>
+          <a:lstStyle/>
+          <a:p>
+            <a:pPr marL="0" indent="0">
+              <a:buNone/>
+            </a:pPr>
+            <a:r>
+              <a:rPr lang="en-US" sz="3400" b="1" dirty="0">
+                <a:solidFill>
+                  <a:srgbClr val="FFFFFF"/>
+                </a:solidFill>
+                <a:latin typeface="TH Sarabun New" pitchFamily="34" charset="0"/>
+                <a:ea typeface="TH Sarabun New" pitchFamily="34" charset="-122"/>
+                <a:cs typeface="TH Sarabun New" pitchFamily="34" charset="-120"/>
+              </a:rPr>
+              <a:t>สรุปสิ่งที่ได้เรียนรู้</a:t>
+            </a:r>
+            <a:endParaRPr lang="en-US" sz="3400" dirty="0"/>
+          </a:p>
+        </p:txBody>
+      </p:sp>
+      <p:sp>
+        <p:nvSpPr>
+          <p:cNvPr id="4" name="Shape 2"/>
+          <p:cNvSpPr/>
+          <p:nvPr/>
+        </p:nvSpPr>
+        <p:spPr>
+          <a:xfrm>
+            <a:off x="594360" y="1481328"/>
+            <a:ext cx="10972800" cy="713232"/>
+          </a:xfrm>
+          <a:prstGeom prst="roundRect">
+            <a:avLst>
+              <a:gd name="adj" fmla="val 11538"/>
+            </a:avLst>
+          </a:prstGeom>
+          <a:solidFill>
+            <a:srgbClr val="2E3742"/>
+          </a:solidFill>
+          <a:ln w="12700">
+            <a:solidFill>
+              <a:srgbClr val="2E3742"/>
+            </a:solidFill>
+            <a:prstDash val="solid"/>
+          </a:ln>
+        </p:spPr>
+        <p:txBody>
+          <a:bodyPr/>
+          <a:lstStyle/>
+          <a:p>
+            <a:endParaRPr lang="en-TH"/>
+          </a:p>
+        </p:txBody>
+      </p:sp>
+      <p:sp>
+        <p:nvSpPr>
+          <p:cNvPr id="5" name="Shape 3"/>
+          <p:cNvSpPr/>
+          <p:nvPr/>
+        </p:nvSpPr>
+        <p:spPr>
+          <a:xfrm>
+            <a:off x="832104" y="1655064"/>
+            <a:ext cx="365760" cy="365760"/>
+          </a:xfrm>
+          <a:prstGeom prst="ellipse">
+            <a:avLst/>
+          </a:prstGeom>
+          <a:solidFill>
+            <a:srgbClr val="00ADB5"/>
+          </a:solidFill>
+          <a:ln w="12700">
+            <a:solidFill>
+              <a:srgbClr val="00ADB5"/>
+            </a:solidFill>
+            <a:prstDash val="solid"/>
+          </a:ln>
+        </p:spPr>
+        <p:txBody>
+          <a:bodyPr/>
+          <a:lstStyle/>
+          <a:p>
+            <a:endParaRPr lang="en-TH"/>
+          </a:p>
+        </p:txBody>
+      </p:sp>
+      <p:sp>
+        <p:nvSpPr>
+          <p:cNvPr id="6" name="Text 4"/>
+          <p:cNvSpPr/>
+          <p:nvPr/>
+        </p:nvSpPr>
+        <p:spPr>
+          <a:xfrm>
+            <a:off x="832104" y="1655064"/>
+            <a:ext cx="365760" cy="365760"/>
+          </a:xfrm>
+          <a:prstGeom prst="rect">
+            <a:avLst/>
+          </a:prstGeom>
+          <a:noFill/>
+          <a:ln/>
+        </p:spPr>
+        <p:txBody>
+          <a:bodyPr wrap="square" lIns="0" tIns="0" rIns="0" bIns="0" rtlCol="0" anchor="ctr"/>
+          <a:lstStyle/>
+          <a:p>
+            <a:pPr marL="0" indent="0" algn="ctr">
+              <a:buNone/>
+            </a:pPr>
+            <a:r>
+              <a:rPr lang="en-US" sz="1500" b="1" dirty="0">
+                <a:solidFill>
+                  <a:srgbClr val="FFFFFF"/>
+                </a:solidFill>
+                <a:latin typeface="TH Sarabun New" pitchFamily="34" charset="0"/>
+                <a:ea typeface="TH Sarabun New" pitchFamily="34" charset="-122"/>
+                <a:cs typeface="TH Sarabun New" pitchFamily="34" charset="-120"/>
+              </a:rPr>
+              <a:t>1</a:t>
+            </a:r>
+            <a:endParaRPr lang="en-US" sz="1500" dirty="0"/>
+          </a:p>
+        </p:txBody>
+      </p:sp>
+      <p:sp>
+        <p:nvSpPr>
+          <p:cNvPr id="7" name="Text 5"/>
+          <p:cNvSpPr/>
+          <p:nvPr/>
+        </p:nvSpPr>
+        <p:spPr>
+          <a:xfrm>
+            <a:off x="1344168" y="1481328"/>
+            <a:ext cx="4206240" cy="713232"/>
+          </a:xfrm>
+          <a:prstGeom prst="rect">
+            <a:avLst/>
+          </a:prstGeom>
+          <a:noFill/>
+          <a:ln/>
+        </p:spPr>
+        <p:txBody>
+          <a:bodyPr wrap="square" lIns="0" tIns="0" rIns="0" bIns="0" rtlCol="0" anchor="ctr"/>
+          <a:lstStyle/>
+          <a:p>
+            <a:pPr marL="0" indent="0">
+              <a:buNone/>
+            </a:pPr>
+            <a:r>
+              <a:rPr lang="en-US" sz="1750" b="1" dirty="0">
+                <a:solidFill>
+                  <a:srgbClr val="FFFFFF"/>
+                </a:solidFill>
+                <a:latin typeface="TH Sarabun New" pitchFamily="34" charset="0"/>
+                <a:ea typeface="TH Sarabun New" pitchFamily="34" charset="-122"/>
+                <a:cs typeface="TH Sarabun New" pitchFamily="34" charset="-120"/>
+              </a:rPr>
+              <a:t>เขียนสเปกก่อน แล้วค่อยสั่ง</a:t>
+            </a:r>
+            <a:endParaRPr lang="en-US" sz="1750" dirty="0"/>
+          </a:p>
+        </p:txBody>
+      </p:sp>
+      <p:sp>
+        <p:nvSpPr>
+          <p:cNvPr id="8" name="Text 6"/>
+          <p:cNvSpPr/>
+          <p:nvPr/>
+        </p:nvSpPr>
+        <p:spPr>
+          <a:xfrm>
+            <a:off x="5623560" y="1481328"/>
+            <a:ext cx="5669280" cy="713232"/>
+          </a:xfrm>
+          <a:prstGeom prst="rect">
+            <a:avLst/>
+          </a:prstGeom>
+          <a:noFill/>
+          <a:ln/>
+        </p:spPr>
+        <p:txBody>
+          <a:bodyPr wrap="square" lIns="0" tIns="0" rIns="0" bIns="0" rtlCol="0" anchor="ctr"/>
+          <a:lstStyle/>
+          <a:p>
+            <a:pPr marL="0" indent="0">
+              <a:buNone/>
+            </a:pPr>
+            <a:r>
+              <a:rPr lang="en-US" sz="1550" dirty="0">
+                <a:solidFill>
+                  <a:srgbClr val="9FB0B3"/>
+                </a:solidFill>
+                <a:latin typeface="TH Sarabun New" pitchFamily="34" charset="0"/>
+                <a:ea typeface="TH Sarabun New" pitchFamily="34" charset="-122"/>
+                <a:cs typeface="TH Sarabun New" pitchFamily="34" charset="-120"/>
+              </a:rPr>
+              <a:t>SPEC ไฟล์เดียว + prompt สั้นที่อ้างหมายเลขหัวข้อ</a:t>
+            </a:r>
+            <a:endParaRPr lang="en-US" sz="1550" dirty="0"/>
+          </a:p>
+        </p:txBody>
+      </p:sp>
+      <p:sp>
+        <p:nvSpPr>
+          <p:cNvPr id="9" name="Shape 7"/>
+          <p:cNvSpPr/>
+          <p:nvPr/>
+        </p:nvSpPr>
+        <p:spPr>
+          <a:xfrm>
+            <a:off x="594360" y="2322576"/>
+            <a:ext cx="10972800" cy="713232"/>
+          </a:xfrm>
+          <a:prstGeom prst="roundRect">
+            <a:avLst>
+              <a:gd name="adj" fmla="val 11538"/>
+            </a:avLst>
+          </a:prstGeom>
+          <a:solidFill>
+            <a:srgbClr val="2E3742"/>
+          </a:solidFill>
+          <a:ln w="12700">
+            <a:solidFill>
+              <a:srgbClr val="2E3742"/>
+            </a:solidFill>
+            <a:prstDash val="solid"/>
+          </a:ln>
+        </p:spPr>
+        <p:txBody>
+          <a:bodyPr/>
+          <a:lstStyle/>
+          <a:p>
+            <a:endParaRPr lang="en-TH"/>
+          </a:p>
+        </p:txBody>
+      </p:sp>
+      <p:sp>
+        <p:nvSpPr>
+          <p:cNvPr id="10" name="Shape 8"/>
+          <p:cNvSpPr/>
+          <p:nvPr/>
+        </p:nvSpPr>
+        <p:spPr>
+          <a:xfrm>
+            <a:off x="832104" y="2496312"/>
+            <a:ext cx="365760" cy="365760"/>
+          </a:xfrm>
+          <a:prstGeom prst="ellipse">
+            <a:avLst/>
+          </a:prstGeom>
+          <a:solidFill>
+            <a:srgbClr val="00ADB5"/>
+          </a:solidFill>
+          <a:ln w="12700">
+            <a:solidFill>
+              <a:srgbClr val="00ADB5"/>
+            </a:solidFill>
+            <a:prstDash val="solid"/>
+          </a:ln>
+        </p:spPr>
+        <p:txBody>
+          <a:bodyPr/>
+          <a:lstStyle/>
+          <a:p>
+            <a:endParaRPr lang="en-TH"/>
+          </a:p>
+        </p:txBody>
+      </p:sp>
+      <p:sp>
+        <p:nvSpPr>
+          <p:cNvPr id="11" name="Text 9"/>
+          <p:cNvSpPr/>
+          <p:nvPr/>
+        </p:nvSpPr>
+        <p:spPr>
+          <a:xfrm>
+            <a:off x="832104" y="2496312"/>
+            <a:ext cx="365760" cy="365760"/>
+          </a:xfrm>
+          <a:prstGeom prst="rect">
+            <a:avLst/>
+          </a:prstGeom>
+          <a:noFill/>
+          <a:ln/>
+        </p:spPr>
+        <p:txBody>
+          <a:bodyPr wrap="square" lIns="0" tIns="0" rIns="0" bIns="0" rtlCol="0" anchor="ctr"/>
+          <a:lstStyle/>
+          <a:p>
+            <a:pPr marL="0" indent="0" algn="ctr">
+              <a:buNone/>
+            </a:pPr>
+            <a:r>
+              <a:rPr lang="en-US" sz="1500" b="1" dirty="0">
+                <a:solidFill>
+                  <a:srgbClr val="FFFFFF"/>
+                </a:solidFill>
+                <a:latin typeface="TH Sarabun New" pitchFamily="34" charset="0"/>
+                <a:ea typeface="TH Sarabun New" pitchFamily="34" charset="-122"/>
+                <a:cs typeface="TH Sarabun New" pitchFamily="34" charset="-120"/>
+              </a:rPr>
+              <a:t>2</a:t>
+            </a:r>
+            <a:endParaRPr lang="en-US" sz="1500" dirty="0"/>
+          </a:p>
+        </p:txBody>
+      </p:sp>
+      <p:sp>
+        <p:nvSpPr>
+          <p:cNvPr id="12" name="Text 10"/>
+          <p:cNvSpPr/>
+          <p:nvPr/>
+        </p:nvSpPr>
+        <p:spPr>
+          <a:xfrm>
+            <a:off x="1344168" y="2322576"/>
+            <a:ext cx="4206240" cy="713232"/>
+          </a:xfrm>
+          <a:prstGeom prst="rect">
+            <a:avLst/>
+          </a:prstGeom>
+          <a:noFill/>
+          <a:ln/>
+        </p:spPr>
+        <p:txBody>
+          <a:bodyPr wrap="square" lIns="0" tIns="0" rIns="0" bIns="0" rtlCol="0" anchor="ctr"/>
+          <a:lstStyle/>
+          <a:p>
+            <a:pPr marL="0" indent="0">
+              <a:buNone/>
+            </a:pPr>
+            <a:r>
+              <a:rPr lang="en-US" sz="1750" b="1" dirty="0">
+                <a:solidFill>
+                  <a:srgbClr val="FFFFFF"/>
+                </a:solidFill>
+                <a:latin typeface="TH Sarabun New" pitchFamily="34" charset="0"/>
+                <a:ea typeface="TH Sarabun New" pitchFamily="34" charset="-122"/>
+                <a:cs typeface="TH Sarabun New" pitchFamily="34" charset="-120"/>
+              </a:rPr>
+              <a:t>ออกแบบก่อนสร้าง</a:t>
+            </a:r>
+            <a:endParaRPr lang="en-US" sz="1750" dirty="0"/>
+          </a:p>
+        </p:txBody>
+      </p:sp>
+      <p:sp>
+        <p:nvSpPr>
+          <p:cNvPr id="13" name="Text 11"/>
+          <p:cNvSpPr/>
+          <p:nvPr/>
+        </p:nvSpPr>
+        <p:spPr>
+          <a:xfrm>
+            <a:off x="5623560" y="2322576"/>
+            <a:ext cx="5669280" cy="713232"/>
+          </a:xfrm>
+          <a:prstGeom prst="rect">
+            <a:avLst/>
+          </a:prstGeom>
+          <a:noFill/>
+          <a:ln/>
+        </p:spPr>
+        <p:txBody>
+          <a:bodyPr wrap="square" lIns="0" tIns="0" rIns="0" bIns="0" rtlCol="0" anchor="ctr"/>
+          <a:lstStyle/>
+          <a:p>
+            <a:pPr marL="0" indent="0">
+              <a:buNone/>
+            </a:pPr>
+            <a:r>
+              <a:rPr lang="en-US" sz="1550" dirty="0">
+                <a:solidFill>
+                  <a:srgbClr val="9FB0B3"/>
+                </a:solidFill>
+                <a:latin typeface="TH Sarabun New" pitchFamily="34" charset="0"/>
+                <a:ea typeface="TH Sarabun New" pitchFamily="34" charset="-122"/>
+                <a:cs typeface="TH Sarabun New" pitchFamily="34" charset="-120"/>
+              </a:rPr>
+              <a:t>สไตล์จาก uistyleguide · สีจาก colorhunt · ฟอนต์จาก Google Fonts</a:t>
+            </a:r>
+            <a:endParaRPr lang="en-US" sz="1550" dirty="0"/>
+          </a:p>
+        </p:txBody>
+      </p:sp>
+      <p:sp>
+        <p:nvSpPr>
+          <p:cNvPr id="14" name="Shape 12"/>
+          <p:cNvSpPr/>
+          <p:nvPr/>
+        </p:nvSpPr>
+        <p:spPr>
+          <a:xfrm>
+            <a:off x="594360" y="3163824"/>
+            <a:ext cx="10972800" cy="713232"/>
+          </a:xfrm>
+          <a:prstGeom prst="roundRect">
+            <a:avLst>
+              <a:gd name="adj" fmla="val 11538"/>
+            </a:avLst>
+          </a:prstGeom>
+          <a:solidFill>
+            <a:srgbClr val="2E3742"/>
+          </a:solidFill>
+          <a:ln w="12700">
+            <a:solidFill>
+              <a:srgbClr val="2E3742"/>
+            </a:solidFill>
+            <a:prstDash val="solid"/>
+          </a:ln>
+        </p:spPr>
+        <p:txBody>
+          <a:bodyPr/>
+          <a:lstStyle/>
+          <a:p>
+            <a:endParaRPr lang="en-TH"/>
+          </a:p>
+        </p:txBody>
+      </p:sp>
+      <p:sp>
+        <p:nvSpPr>
+          <p:cNvPr id="15" name="Shape 13"/>
+          <p:cNvSpPr/>
+          <p:nvPr/>
+        </p:nvSpPr>
+        <p:spPr>
+          <a:xfrm>
+            <a:off x="832104" y="3337560"/>
+            <a:ext cx="365760" cy="365760"/>
+          </a:xfrm>
+          <a:prstGeom prst="ellipse">
+            <a:avLst/>
+          </a:prstGeom>
+          <a:solidFill>
+            <a:srgbClr val="00ADB5"/>
+          </a:solidFill>
+          <a:ln w="12700">
+            <a:solidFill>
+              <a:srgbClr val="00ADB5"/>
+            </a:solidFill>
+            <a:prstDash val="solid"/>
+          </a:ln>
+        </p:spPr>
+        <p:txBody>
+          <a:bodyPr/>
+          <a:lstStyle/>
+          <a:p>
+            <a:endParaRPr lang="en-TH"/>
+          </a:p>
+        </p:txBody>
+      </p:sp>
+      <p:sp>
+        <p:nvSpPr>
+          <p:cNvPr id="16" name="Text 14"/>
+          <p:cNvSpPr/>
+          <p:nvPr/>
+        </p:nvSpPr>
+        <p:spPr>
+          <a:xfrm>
+            <a:off x="832104" y="3337560"/>
+            <a:ext cx="365760" cy="365760"/>
+          </a:xfrm>
+          <a:prstGeom prst="rect">
+            <a:avLst/>
+          </a:prstGeom>
+          <a:noFill/>
+          <a:ln/>
+        </p:spPr>
+        <p:txBody>
+          <a:bodyPr wrap="square" lIns="0" tIns="0" rIns="0" bIns="0" rtlCol="0" anchor="ctr"/>
+          <a:lstStyle/>
+          <a:p>
+            <a:pPr marL="0" indent="0" algn="ctr">
+              <a:buNone/>
+            </a:pPr>
+            <a:r>
+              <a:rPr lang="en-US" sz="1500" b="1" dirty="0">
+                <a:solidFill>
+                  <a:srgbClr val="FFFFFF"/>
+                </a:solidFill>
+                <a:latin typeface="TH Sarabun New" pitchFamily="34" charset="0"/>
+                <a:ea typeface="TH Sarabun New" pitchFamily="34" charset="-122"/>
+                <a:cs typeface="TH Sarabun New" pitchFamily="34" charset="-120"/>
+              </a:rPr>
+              <a:t>3</a:t>
+            </a:r>
+            <a:endParaRPr lang="en-US" sz="1500" dirty="0"/>
+          </a:p>
+        </p:txBody>
+      </p:sp>
+      <p:sp>
+        <p:nvSpPr>
+          <p:cNvPr id="17" name="Text 15"/>
+          <p:cNvSpPr/>
+          <p:nvPr/>
+        </p:nvSpPr>
+        <p:spPr>
+          <a:xfrm>
+            <a:off x="1344168" y="3163824"/>
+            <a:ext cx="4206240" cy="713232"/>
+          </a:xfrm>
+          <a:prstGeom prst="rect">
+            <a:avLst/>
+          </a:prstGeom>
+          <a:noFill/>
+          <a:ln/>
+        </p:spPr>
+        <p:txBody>
+          <a:bodyPr wrap="square" lIns="0" tIns="0" rIns="0" bIns="0" rtlCol="0" anchor="ctr"/>
+          <a:lstStyle/>
+          <a:p>
+            <a:pPr marL="0" indent="0">
+              <a:buNone/>
+            </a:pPr>
+            <a:r>
+              <a:rPr lang="en-US" sz="1750" b="1" dirty="0">
+                <a:solidFill>
+                  <a:srgbClr val="FFFFFF"/>
+                </a:solidFill>
+                <a:latin typeface="TH Sarabun New" pitchFamily="34" charset="0"/>
+                <a:ea typeface="TH Sarabun New" pitchFamily="34" charset="-122"/>
+                <a:cs typeface="TH Sarabun New" pitchFamily="34" charset="-120"/>
+              </a:rPr>
+              <a:t>สร้างทีละชั้น ตรวจทีละชั้น</a:t>
+            </a:r>
+            <a:endParaRPr lang="en-US" sz="1750" dirty="0"/>
+          </a:p>
+        </p:txBody>
+      </p:sp>
+      <p:sp>
+        <p:nvSpPr>
+          <p:cNvPr id="18" name="Text 16"/>
+          <p:cNvSpPr/>
+          <p:nvPr/>
+        </p:nvSpPr>
+        <p:spPr>
+          <a:xfrm>
+            <a:off x="5623560" y="3163824"/>
+            <a:ext cx="5669280" cy="713232"/>
+          </a:xfrm>
+          <a:prstGeom prst="rect">
+            <a:avLst/>
+          </a:prstGeom>
+          <a:noFill/>
+          <a:ln/>
+        </p:spPr>
+        <p:txBody>
+          <a:bodyPr wrap="square" lIns="0" tIns="0" rIns="0" bIns="0" rtlCol="0" anchor="ctr"/>
+          <a:lstStyle/>
+          <a:p>
+            <a:pPr marL="0" indent="0">
+              <a:buNone/>
+            </a:pPr>
+            <a:r>
+              <a:rPr lang="en-US" sz="1550" dirty="0">
+                <a:solidFill>
+                  <a:srgbClr val="9FB0B3"/>
+                </a:solidFill>
+                <a:latin typeface="TH Sarabun New" pitchFamily="34" charset="0"/>
+                <a:ea typeface="TH Sarabun New" pitchFamily="34" charset="-122"/>
+                <a:cs typeface="TH Sarabun New" pitchFamily="34" charset="-120"/>
+              </a:rPr>
+              <a:t>ตรวจด้วยเกณฑ์ยอมรับที่วัดผลได้</a:t>
+            </a:r>
+            <a:endParaRPr lang="en-US" sz="1550" dirty="0"/>
+          </a:p>
+        </p:txBody>
+      </p:sp>
+      <p:sp>
+        <p:nvSpPr>
+          <p:cNvPr id="19" name="Shape 17"/>
+          <p:cNvSpPr/>
+          <p:nvPr/>
+        </p:nvSpPr>
+        <p:spPr>
+          <a:xfrm>
+            <a:off x="594360" y="4005072"/>
+            <a:ext cx="10972800" cy="713232"/>
+          </a:xfrm>
+          <a:prstGeom prst="roundRect">
+            <a:avLst>
+              <a:gd name="adj" fmla="val 11538"/>
+            </a:avLst>
+          </a:prstGeom>
+          <a:solidFill>
+            <a:srgbClr val="2E3742"/>
+          </a:solidFill>
+          <a:ln w="12700">
+            <a:solidFill>
+              <a:srgbClr val="2E3742"/>
+            </a:solidFill>
+            <a:prstDash val="solid"/>
+          </a:ln>
+        </p:spPr>
+        <p:txBody>
+          <a:bodyPr/>
+          <a:lstStyle/>
+          <a:p>
+            <a:endParaRPr lang="en-TH"/>
+          </a:p>
+        </p:txBody>
+      </p:sp>
+      <p:sp>
+        <p:nvSpPr>
+          <p:cNvPr id="20" name="Shape 18"/>
+          <p:cNvSpPr/>
+          <p:nvPr/>
+        </p:nvSpPr>
+        <p:spPr>
+          <a:xfrm>
+            <a:off x="832104" y="4178808"/>
+            <a:ext cx="365760" cy="365760"/>
+          </a:xfrm>
+          <a:prstGeom prst="ellipse">
+            <a:avLst/>
+          </a:prstGeom>
+          <a:solidFill>
+            <a:srgbClr val="00ADB5"/>
+          </a:solidFill>
+          <a:ln w="12700">
+            <a:solidFill>
+              <a:srgbClr val="00ADB5"/>
+            </a:solidFill>
+            <a:prstDash val="solid"/>
+          </a:ln>
+        </p:spPr>
+        <p:txBody>
+          <a:bodyPr/>
+          <a:lstStyle/>
+          <a:p>
+            <a:endParaRPr lang="en-TH"/>
+          </a:p>
+        </p:txBody>
+      </p:sp>
+      <p:sp>
+        <p:nvSpPr>
+          <p:cNvPr id="21" name="Text 19"/>
+          <p:cNvSpPr/>
+          <p:nvPr/>
+        </p:nvSpPr>
+        <p:spPr>
+          <a:xfrm>
+            <a:off x="832104" y="4178808"/>
+            <a:ext cx="365760" cy="365760"/>
+          </a:xfrm>
+          <a:prstGeom prst="rect">
+            <a:avLst/>
+          </a:prstGeom>
+          <a:noFill/>
+          <a:ln/>
+        </p:spPr>
+        <p:txBody>
+          <a:bodyPr wrap="square" lIns="0" tIns="0" rIns="0" bIns="0" rtlCol="0" anchor="ctr"/>
+          <a:lstStyle/>
+          <a:p>
+            <a:pPr marL="0" indent="0" algn="ctr">
+              <a:buNone/>
+            </a:pPr>
+            <a:r>
+              <a:rPr lang="en-US" sz="1500" b="1" dirty="0">
+                <a:solidFill>
+                  <a:srgbClr val="FFFFFF"/>
+                </a:solidFill>
+                <a:latin typeface="TH Sarabun New" pitchFamily="34" charset="0"/>
+                <a:ea typeface="TH Sarabun New" pitchFamily="34" charset="-122"/>
+                <a:cs typeface="TH Sarabun New" pitchFamily="34" charset="-120"/>
+              </a:rPr>
+              <a:t>4</a:t>
+            </a:r>
+            <a:endParaRPr lang="en-US" sz="1500" dirty="0"/>
+          </a:p>
+        </p:txBody>
+      </p:sp>
+      <p:sp>
+        <p:nvSpPr>
+          <p:cNvPr id="22" name="Text 20"/>
+          <p:cNvSpPr/>
+          <p:nvPr/>
+        </p:nvSpPr>
+        <p:spPr>
+          <a:xfrm>
+            <a:off x="1344168" y="4005072"/>
+            <a:ext cx="4206240" cy="713232"/>
+          </a:xfrm>
+          <a:prstGeom prst="rect">
+            <a:avLst/>
+          </a:prstGeom>
+          <a:noFill/>
+          <a:ln/>
+        </p:spPr>
+        <p:txBody>
+          <a:bodyPr wrap="square" lIns="0" tIns="0" rIns="0" bIns="0" rtlCol="0" anchor="ctr"/>
+          <a:lstStyle/>
+          <a:p>
+            <a:pPr marL="0" indent="0">
+              <a:buNone/>
+            </a:pPr>
+            <a:r>
+              <a:rPr lang="en-US" sz="1750" b="1" dirty="0">
+                <a:solidFill>
+                  <a:srgbClr val="FFFFFF"/>
+                </a:solidFill>
+                <a:latin typeface="TH Sarabun New" pitchFamily="34" charset="0"/>
+                <a:ea typeface="TH Sarabun New" pitchFamily="34" charset="-122"/>
+                <a:cs typeface="TH Sarabun New" pitchFamily="34" charset="-120"/>
+              </a:rPr>
+              <a:t>งานเสร็จเมื่อคนอื่นเปิดใช้ได้</a:t>
+            </a:r>
+            <a:endParaRPr lang="en-US" sz="1750" dirty="0"/>
+          </a:p>
+        </p:txBody>
+      </p:sp>
+      <p:sp>
+        <p:nvSpPr>
+          <p:cNvPr id="23" name="Text 21"/>
+          <p:cNvSpPr/>
+          <p:nvPr/>
+        </p:nvSpPr>
+        <p:spPr>
+          <a:xfrm>
+            <a:off x="5623560" y="4005072"/>
+            <a:ext cx="5669280" cy="713232"/>
+          </a:xfrm>
+          <a:prstGeom prst="rect">
+            <a:avLst/>
+          </a:prstGeom>
+          <a:noFill/>
+          <a:ln/>
+        </p:spPr>
+        <p:txBody>
+          <a:bodyPr wrap="square" lIns="0" tIns="0" rIns="0" bIns="0" rtlCol="0" anchor="ctr"/>
+          <a:lstStyle/>
+          <a:p>
+            <a:pPr marL="0" indent="0">
+              <a:buNone/>
+            </a:pPr>
+            <a:r>
+              <a:rPr lang="en-US" sz="1550" dirty="0">
+                <a:solidFill>
+                  <a:srgbClr val="9FB0B3"/>
+                </a:solidFill>
+                <a:latin typeface="TH Sarabun New" pitchFamily="34" charset="0"/>
+                <a:ea typeface="TH Sarabun New" pitchFamily="34" charset="-122"/>
+                <a:cs typeface="TH Sarabun New" pitchFamily="34" charset="-120"/>
+              </a:rPr>
+              <a:t>ทดสอบ 3 ระดับ แล้วนำขึ้น GitHub Pages</a:t>
+            </a:r>
+            <a:endParaRPr lang="en-US" sz="1550" dirty="0"/>
+          </a:p>
+        </p:txBody>
+      </p:sp>
+      <p:sp>
+        <p:nvSpPr>
+          <p:cNvPr id="24" name="Text 22"/>
+          <p:cNvSpPr/>
+          <p:nvPr/>
+        </p:nvSpPr>
+        <p:spPr>
+          <a:xfrm>
+            <a:off x="594360" y="5029200"/>
+            <a:ext cx="10972800" cy="457200"/>
+          </a:xfrm>
+          <a:prstGeom prst="rect">
+            <a:avLst/>
+          </a:prstGeom>
+          <a:noFill/>
+          <a:ln/>
+        </p:spPr>
+        <p:txBody>
+          <a:bodyPr wrap="square" lIns="0" tIns="0" rIns="0" bIns="0" rtlCol="0" anchor="ctr"/>
+          <a:lstStyle/>
+          <a:p>
+            <a:pPr marL="0" indent="0">
+              <a:buNone/>
+            </a:pPr>
+            <a:r>
+              <a:rPr lang="en-US" sz="2600" b="1" dirty="0">
+                <a:solidFill>
+                  <a:srgbClr val="00ADB5"/>
+                </a:solidFill>
+                <a:latin typeface="TH Sarabun New" pitchFamily="34" charset="0"/>
+                <a:ea typeface="TH Sarabun New" pitchFamily="34" charset="-122"/>
+                <a:cs typeface="TH Sarabun New" pitchFamily="34" charset="-120"/>
+              </a:rPr>
+              <a:t>ขอบคุณครับ  ·  ช่วงถาม-ตอบ</a:t>
+            </a:r>
+            <a:endParaRPr lang="en-US" sz="2600" dirty="0"/>
           </a:p>
         </p:txBody>
       </p:sp>
@@ -23298,7 +24016,7 @@
               <a:buNone/>
             </a:pPr>
             <a:r>
-              <a:rPr lang="en-US" sz="1250" dirty="0">
+              <a:rPr lang="en-US" sz="1250" b="1" dirty="0">
                 <a:solidFill>
                   <a:srgbClr val="D6F5F7"/>
                 </a:solidFill>
@@ -23308,7 +24026,7 @@
               </a:rPr>
               <a:t>HTML</a:t>
             </a:r>
-            <a:endParaRPr lang="en-US" sz="1250" dirty="0"/>
+            <a:endParaRPr lang="en-US" sz="1250" b="1" dirty="0"/>
           </a:p>
         </p:txBody>
       </p:sp>
@@ -23461,7 +24179,7 @@
           <a:bodyPr/>
           <a:lstStyle/>
           <a:p>
-            <a:endParaRPr lang="en-TH"/>
+            <a:endParaRPr lang="en-TH" b="1"/>
           </a:p>
         </p:txBody>
       </p:sp>
@@ -23682,7 +24400,7 @@
               <a:buNone/>
             </a:pPr>
             <a:r>
-              <a:rPr lang="en-US" sz="1250" dirty="0">
+              <a:rPr lang="en-US" sz="1250" b="1" dirty="0">
                 <a:solidFill>
                   <a:srgbClr val="D6F5F7"/>
                 </a:solidFill>
@@ -23692,7 +24410,7 @@
               </a:rPr>
               <a:t>JavaScript</a:t>
             </a:r>
-            <a:endParaRPr lang="en-US" sz="1250" dirty="0"/>
+            <a:endParaRPr lang="en-US" sz="1250" b="1" dirty="0"/>
           </a:p>
         </p:txBody>
       </p:sp>

--- a/Funding_Hub_Antigravity_Workshop.pptx
+++ b/Funding_Hub_Antigravity_Workshop.pptx
@@ -5,40 +5,39 @@
     <p:sldMasterId id="2147483648" r:id="rId1"/>
   </p:sldMasterIdLst>
   <p:notesMasterIdLst>
-    <p:notesMasterId r:id="rId33"/>
+    <p:notesMasterId r:id="rId32"/>
   </p:notesMasterIdLst>
   <p:sldIdLst>
     <p:sldId id="294" r:id="rId2"/>
     <p:sldId id="257" r:id="rId3"/>
-    <p:sldId id="258" r:id="rId4"/>
-    <p:sldId id="259" r:id="rId5"/>
-    <p:sldId id="260" r:id="rId6"/>
-    <p:sldId id="261" r:id="rId7"/>
-    <p:sldId id="262" r:id="rId8"/>
-    <p:sldId id="263" r:id="rId9"/>
-    <p:sldId id="264" r:id="rId10"/>
-    <p:sldId id="265" r:id="rId11"/>
-    <p:sldId id="266" r:id="rId12"/>
-    <p:sldId id="267" r:id="rId13"/>
-    <p:sldId id="268" r:id="rId14"/>
-    <p:sldId id="269" r:id="rId15"/>
-    <p:sldId id="270" r:id="rId16"/>
-    <p:sldId id="271" r:id="rId17"/>
-    <p:sldId id="272" r:id="rId18"/>
-    <p:sldId id="273" r:id="rId19"/>
-    <p:sldId id="278" r:id="rId20"/>
-    <p:sldId id="279" r:id="rId21"/>
-    <p:sldId id="280" r:id="rId22"/>
-    <p:sldId id="297" r:id="rId23"/>
-    <p:sldId id="281" r:id="rId24"/>
-    <p:sldId id="296" r:id="rId25"/>
-    <p:sldId id="282" r:id="rId26"/>
-    <p:sldId id="298" r:id="rId27"/>
-    <p:sldId id="284" r:id="rId28"/>
-    <p:sldId id="285" r:id="rId29"/>
-    <p:sldId id="295" r:id="rId30"/>
-    <p:sldId id="292" r:id="rId31"/>
-    <p:sldId id="293" r:id="rId32"/>
+    <p:sldId id="259" r:id="rId4"/>
+    <p:sldId id="260" r:id="rId5"/>
+    <p:sldId id="261" r:id="rId6"/>
+    <p:sldId id="262" r:id="rId7"/>
+    <p:sldId id="263" r:id="rId8"/>
+    <p:sldId id="264" r:id="rId9"/>
+    <p:sldId id="265" r:id="rId10"/>
+    <p:sldId id="266" r:id="rId11"/>
+    <p:sldId id="267" r:id="rId12"/>
+    <p:sldId id="268" r:id="rId13"/>
+    <p:sldId id="269" r:id="rId14"/>
+    <p:sldId id="270" r:id="rId15"/>
+    <p:sldId id="271" r:id="rId16"/>
+    <p:sldId id="272" r:id="rId17"/>
+    <p:sldId id="273" r:id="rId18"/>
+    <p:sldId id="278" r:id="rId19"/>
+    <p:sldId id="279" r:id="rId20"/>
+    <p:sldId id="280" r:id="rId21"/>
+    <p:sldId id="297" r:id="rId22"/>
+    <p:sldId id="281" r:id="rId23"/>
+    <p:sldId id="296" r:id="rId24"/>
+    <p:sldId id="282" r:id="rId25"/>
+    <p:sldId id="298" r:id="rId26"/>
+    <p:sldId id="284" r:id="rId27"/>
+    <p:sldId id="285" r:id="rId28"/>
+    <p:sldId id="295" r:id="rId29"/>
+    <p:sldId id="292" r:id="rId30"/>
+    <p:sldId id="293" r:id="rId31"/>
   </p:sldIdLst>
   <p:sldSz cx="12192000" cy="6858000"/>
   <p:notesSz cx="6858000" cy="12192000"/>
@@ -1427,7 +1426,7 @@
           <a:p>
             <a:fld id="{F7021451-1387-4CA6-816F-3879F97B5CBC}" type="slidenum">
               <a:rPr lang="en-US"/>
-              <a:t>21</a:t>
+              <a:t>22</a:t>
             </a:fld>
             <a:endParaRPr lang="en-US"/>
           </a:p>
@@ -1511,7 +1510,7 @@
           <a:p>
             <a:fld id="{F7021451-1387-4CA6-816F-3879F97B5CBC}" type="slidenum">
               <a:rPr lang="en-US"/>
-              <a:t>23</a:t>
+              <a:t>24</a:t>
             </a:fld>
             <a:endParaRPr lang="en-US"/>
           </a:p>
@@ -1595,7 +1594,7 @@
           <a:p>
             <a:fld id="{F7021451-1387-4CA6-816F-3879F97B5CBC}" type="slidenum">
               <a:rPr lang="en-US"/>
-              <a:t>25</a:t>
+              <a:t>26</a:t>
             </a:fld>
             <a:endParaRPr lang="en-US"/>
           </a:p>
@@ -1763,7 +1762,7 @@
           <a:p>
             <a:fld id="{F7021451-1387-4CA6-816F-3879F97B5CBC}" type="slidenum">
               <a:rPr lang="en-US"/>
-              <a:t>28</a:t>
+              <a:t>29</a:t>
             </a:fld>
             <a:endParaRPr lang="en-US"/>
           </a:p>
@@ -1848,90 +1847,6 @@
             <a:fld id="{F7021451-1387-4CA6-816F-3879F97B5CBC}" type="slidenum">
               <a:rPr lang="en-US"/>
               <a:t>30</a:t>
-            </a:fld>
-            <a:endParaRPr lang="en-US"/>
-          </a:p>
-        </p:txBody>
-      </p:sp>
-    </p:spTree>
-    <p:extLst>
-      <p:ext uri="{BB962C8B-B14F-4D97-AF65-F5344CB8AC3E}">
-        <p14:creationId xmlns:p14="http://schemas.microsoft.com/office/powerpoint/2010/main" val="1024086991"/>
-      </p:ext>
-    </p:extLst>
-  </p:cSld>
-  <p:clrMapOvr>
-    <a:masterClrMapping/>
-  </p:clrMapOvr>
-</p:notes>
-</file>
-
-<file path=ppt/notesSlides/notesSlide27.xml><?xml version="1.0" encoding="utf-8"?>
-<p:notes xmlns:a="http://schemas.openxmlformats.org/drawingml/2006/main" xmlns:r="http://schemas.openxmlformats.org/officeDocument/2006/relationships" xmlns:p="http://schemas.openxmlformats.org/presentationml/2006/main">
-  <p:cSld>
-    <p:spTree>
-      <p:nvGrpSpPr>
-        <p:cNvPr id="1" name=""/>
-        <p:cNvGrpSpPr/>
-        <p:nvPr/>
-      </p:nvGrpSpPr>
-      <p:grpSpPr>
-        <a:xfrm>
-          <a:off x="0" y="0"/>
-          <a:ext cx="0" cy="0"/>
-          <a:chOff x="0" y="0"/>
-          <a:chExt cx="0" cy="0"/>
-        </a:xfrm>
-      </p:grpSpPr>
-      <p:sp>
-        <p:nvSpPr>
-          <p:cNvPr id="2" name="Slide Image Placeholder 1"/>
-          <p:cNvSpPr>
-            <a:spLocks noGrp="1" noRot="1" noChangeAspect="1"/>
-          </p:cNvSpPr>
-          <p:nvPr>
-            <p:ph type="sldImg"/>
-          </p:nvPr>
-        </p:nvSpPr>
-        <p:spPr/>
-      </p:sp>
-      <p:sp>
-        <p:nvSpPr>
-          <p:cNvPr id="3" name="Notes Placeholder 2"/>
-          <p:cNvSpPr>
-            <a:spLocks noGrp="1"/>
-          </p:cNvSpPr>
-          <p:nvPr>
-            <p:ph type="body" idx="1"/>
-          </p:nvPr>
-        </p:nvSpPr>
-        <p:spPr/>
-        <p:txBody>
-          <a:bodyPr/>
-          <a:lstStyle/>
-          <a:p>
-            <a:endParaRPr lang="en-US" dirty="0"/>
-          </a:p>
-        </p:txBody>
-      </p:sp>
-      <p:sp>
-        <p:nvSpPr>
-          <p:cNvPr id="4" name="Slide Number Placeholder 3"/>
-          <p:cNvSpPr>
-            <a:spLocks noGrp="1"/>
-          </p:cNvSpPr>
-          <p:nvPr>
-            <p:ph type="sldNum" sz="quarter" idx="10"/>
-          </p:nvPr>
-        </p:nvSpPr>
-        <p:spPr/>
-        <p:txBody>
-          <a:bodyPr/>
-          <a:lstStyle/>
-          <a:p>
-            <a:fld id="{F7021451-1387-4CA6-816F-3879F97B5CBC}" type="slidenum">
-              <a:rPr lang="en-US"/>
-              <a:t>31</a:t>
             </a:fld>
             <a:endParaRPr lang="en-US"/>
           </a:p>
@@ -3467,1179 +3382,6 @@
 
 <file path=ppt/slides/slide10.xml><?xml version="1.0" encoding="utf-8"?>
 <p:sld xmlns:a="http://schemas.openxmlformats.org/drawingml/2006/main" xmlns:r="http://schemas.openxmlformats.org/officeDocument/2006/relationships" xmlns:p="http://schemas.openxmlformats.org/presentationml/2006/main">
-  <p:cSld name="Slide 10">
-    <p:bg>
-      <p:bgPr>
-        <a:solidFill>
-          <a:srgbClr val="E8F6F7"/>
-        </a:solidFill>
-        <a:effectLst/>
-      </p:bgPr>
-    </p:bg>
-    <p:spTree>
-      <p:nvGrpSpPr>
-        <p:cNvPr id="1" name=""/>
-        <p:cNvGrpSpPr/>
-        <p:nvPr/>
-      </p:nvGrpSpPr>
-      <p:grpSpPr>
-        <a:xfrm>
-          <a:off x="0" y="0"/>
-          <a:ext cx="0" cy="0"/>
-          <a:chOff x="0" y="0"/>
-          <a:chExt cx="0" cy="0"/>
-        </a:xfrm>
-      </p:grpSpPr>
-      <p:sp>
-        <p:nvSpPr>
-          <p:cNvPr id="2" name="Text 0"/>
-          <p:cNvSpPr/>
-          <p:nvPr/>
-        </p:nvSpPr>
-        <p:spPr>
-          <a:xfrm>
-            <a:off x="11018520" y="6263640"/>
-            <a:ext cx="548640" cy="274320"/>
-          </a:xfrm>
-          <a:prstGeom prst="rect">
-            <a:avLst/>
-          </a:prstGeom>
-          <a:noFill/>
-          <a:ln/>
-        </p:spPr>
-        <p:txBody>
-          <a:bodyPr wrap="square" lIns="0" tIns="0" rIns="0" bIns="0" rtlCol="0" anchor="ctr"/>
-          <a:lstStyle/>
-          <a:p>
-            <a:pPr marL="0" indent="0" algn="r">
-              <a:buNone/>
-            </a:pPr>
-            <a:r>
-              <a:rPr lang="en-US" sz="1200" dirty="0">
-                <a:solidFill>
-                  <a:srgbClr val="9AA3AD"/>
-                </a:solidFill>
-                <a:latin typeface="TH Sarabun New" pitchFamily="34" charset="0"/>
-                <a:ea typeface="TH Sarabun New" pitchFamily="34" charset="-122"/>
-                <a:cs typeface="TH Sarabun New" pitchFamily="34" charset="-120"/>
-              </a:rPr>
-              <a:t>10</a:t>
-            </a:r>
-            <a:endParaRPr lang="en-US" sz="1200" dirty="0"/>
-          </a:p>
-        </p:txBody>
-      </p:sp>
-      <p:sp>
-        <p:nvSpPr>
-          <p:cNvPr id="3" name="Shape 1"/>
-          <p:cNvSpPr/>
-          <p:nvPr/>
-        </p:nvSpPr>
-        <p:spPr>
-          <a:xfrm>
-            <a:off x="594360" y="310896"/>
-            <a:ext cx="1481328" cy="475488"/>
-          </a:xfrm>
-          <a:prstGeom prst="roundRect">
-            <a:avLst>
-              <a:gd name="adj" fmla="val 50000"/>
-            </a:avLst>
-          </a:prstGeom>
-          <a:solidFill>
-            <a:srgbClr val="00ADB5"/>
-          </a:solidFill>
-          <a:ln w="12700">
-            <a:solidFill>
-              <a:srgbClr val="00ADB5"/>
-            </a:solidFill>
-            <a:prstDash val="solid"/>
-          </a:ln>
-        </p:spPr>
-        <p:txBody>
-          <a:bodyPr/>
-          <a:lstStyle/>
-          <a:p>
-            <a:endParaRPr lang="en-TH"/>
-          </a:p>
-        </p:txBody>
-      </p:sp>
-      <p:sp>
-        <p:nvSpPr>
-          <p:cNvPr id="4" name="Text 2"/>
-          <p:cNvSpPr/>
-          <p:nvPr/>
-        </p:nvSpPr>
-        <p:spPr>
-          <a:xfrm>
-            <a:off x="594360" y="310896"/>
-            <a:ext cx="1481328" cy="475488"/>
-          </a:xfrm>
-          <a:prstGeom prst="rect">
-            <a:avLst/>
-          </a:prstGeom>
-          <a:noFill/>
-          <a:ln/>
-        </p:spPr>
-        <p:txBody>
-          <a:bodyPr wrap="square" lIns="0" tIns="0" rIns="0" bIns="0" rtlCol="0" anchor="ctr"/>
-          <a:lstStyle/>
-          <a:p>
-            <a:pPr marL="0" indent="0" algn="ctr">
-              <a:buNone/>
-            </a:pPr>
-            <a:r>
-              <a:rPr lang="en-US" sz="1800" b="1" dirty="0">
-                <a:solidFill>
-                  <a:srgbClr val="FFFFFF"/>
-                </a:solidFill>
-                <a:latin typeface="TH Sarabun New" pitchFamily="34" charset="0"/>
-                <a:ea typeface="TH Sarabun New" pitchFamily="34" charset="-122"/>
-                <a:cs typeface="TH Sarabun New" pitchFamily="34" charset="-120"/>
-              </a:rPr>
-              <a:t>LAB A</a:t>
-            </a:r>
-            <a:endParaRPr lang="en-US" sz="1800" dirty="0"/>
-          </a:p>
-        </p:txBody>
-      </p:sp>
-      <p:sp>
-        <p:nvSpPr>
-          <p:cNvPr id="5" name="Text 3"/>
-          <p:cNvSpPr/>
-          <p:nvPr/>
-        </p:nvSpPr>
-        <p:spPr>
-          <a:xfrm>
-            <a:off x="2286000" y="274320"/>
-            <a:ext cx="7315200" cy="548640"/>
-          </a:xfrm>
-          <a:prstGeom prst="rect">
-            <a:avLst/>
-          </a:prstGeom>
-          <a:noFill/>
-          <a:ln/>
-        </p:spPr>
-        <p:txBody>
-          <a:bodyPr wrap="square" lIns="0" tIns="0" rIns="0" bIns="0" rtlCol="0" anchor="ctr"/>
-          <a:lstStyle/>
-          <a:p>
-            <a:pPr marL="0" indent="0">
-              <a:buNone/>
-            </a:pPr>
-            <a:r>
-              <a:rPr lang="en-US" sz="3000" b="1" dirty="0">
-                <a:solidFill>
-                  <a:srgbClr val="222831"/>
-                </a:solidFill>
-                <a:latin typeface="TH Sarabun New" pitchFamily="34" charset="0"/>
-                <a:ea typeface="TH Sarabun New" pitchFamily="34" charset="-122"/>
-                <a:cs typeface="TH Sarabun New" pitchFamily="34" charset="-120"/>
-              </a:rPr>
-              <a:t>เตรียมเครื่องและเปิดโปรเจกต์</a:t>
-            </a:r>
-            <a:endParaRPr lang="en-US" sz="3000" dirty="0"/>
-          </a:p>
-        </p:txBody>
-      </p:sp>
-      <p:sp>
-        <p:nvSpPr>
-          <p:cNvPr id="6" name="Text 4"/>
-          <p:cNvSpPr/>
-          <p:nvPr/>
-        </p:nvSpPr>
-        <p:spPr>
-          <a:xfrm>
-            <a:off x="9738360" y="310896"/>
-            <a:ext cx="1828800" cy="475488"/>
-          </a:xfrm>
-          <a:prstGeom prst="rect">
-            <a:avLst/>
-          </a:prstGeom>
-          <a:noFill/>
-          <a:ln/>
-        </p:spPr>
-        <p:txBody>
-          <a:bodyPr wrap="square" lIns="0" tIns="0" rIns="0" bIns="0" rtlCol="0" anchor="ctr"/>
-          <a:lstStyle/>
-          <a:p>
-            <a:pPr marL="0" indent="0" algn="r">
-              <a:buNone/>
-            </a:pPr>
-            <a:r>
-              <a:rPr lang="en-US" sz="1700" dirty="0">
-                <a:solidFill>
-                  <a:srgbClr val="393E46"/>
-                </a:solidFill>
-                <a:latin typeface="TH Sarabun New" pitchFamily="34" charset="0"/>
-                <a:ea typeface="TH Sarabun New" pitchFamily="34" charset="-122"/>
-                <a:cs typeface="TH Sarabun New" pitchFamily="34" charset="-120"/>
-              </a:rPr>
-              <a:t>10 นาที</a:t>
-            </a:r>
-            <a:endParaRPr lang="en-US" sz="1700" dirty="0"/>
-          </a:p>
-        </p:txBody>
-      </p:sp>
-      <p:sp>
-        <p:nvSpPr>
-          <p:cNvPr id="7" name="Shape 5"/>
-          <p:cNvSpPr/>
-          <p:nvPr/>
-        </p:nvSpPr>
-        <p:spPr>
-          <a:xfrm>
-            <a:off x="594360" y="1024128"/>
-            <a:ext cx="5760720" cy="3794760"/>
-          </a:xfrm>
-          <a:prstGeom prst="roundRect">
-            <a:avLst>
-              <a:gd name="adj" fmla="val 2169"/>
-            </a:avLst>
-          </a:prstGeom>
-          <a:solidFill>
-            <a:srgbClr val="FFFFFF"/>
-          </a:solidFill>
-          <a:ln w="9525">
-            <a:solidFill>
-              <a:srgbClr val="FFFFFF"/>
-            </a:solidFill>
-            <a:prstDash val="solid"/>
-          </a:ln>
-          <a:effectLst>
-            <a:outerShdw blurRad="101600" dist="12700" dir="5400000" algn="bl" rotWithShape="0">
-              <a:srgbClr val="222831">
-                <a:alpha val="10000"/>
-              </a:srgbClr>
-            </a:outerShdw>
-          </a:effectLst>
-        </p:spPr>
-        <p:txBody>
-          <a:bodyPr/>
-          <a:lstStyle/>
-          <a:p>
-            <a:endParaRPr lang="en-TH"/>
-          </a:p>
-        </p:txBody>
-      </p:sp>
-      <p:sp>
-        <p:nvSpPr>
-          <p:cNvPr id="8" name="Text 6"/>
-          <p:cNvSpPr/>
-          <p:nvPr/>
-        </p:nvSpPr>
-        <p:spPr>
-          <a:xfrm>
-            <a:off x="850392" y="1188720"/>
-            <a:ext cx="5248656" cy="310896"/>
-          </a:xfrm>
-          <a:prstGeom prst="rect">
-            <a:avLst/>
-          </a:prstGeom>
-          <a:noFill/>
-          <a:ln/>
-        </p:spPr>
-        <p:txBody>
-          <a:bodyPr wrap="square" lIns="0" tIns="0" rIns="0" bIns="0" rtlCol="0" anchor="ctr"/>
-          <a:lstStyle/>
-          <a:p>
-            <a:pPr marL="0" indent="0">
-              <a:buNone/>
-            </a:pPr>
-            <a:r>
-              <a:rPr lang="en-US" sz="1900" b="1" dirty="0">
-                <a:solidFill>
-                  <a:srgbClr val="222831"/>
-                </a:solidFill>
-                <a:latin typeface="TH Sarabun New" pitchFamily="34" charset="0"/>
-                <a:ea typeface="TH Sarabun New" pitchFamily="34" charset="-122"/>
-                <a:cs typeface="TH Sarabun New" pitchFamily="34" charset="-120"/>
-              </a:rPr>
-              <a:t>สิ่งที่ต้องทำ</a:t>
-            </a:r>
-            <a:endParaRPr lang="en-US" sz="1900" dirty="0"/>
-          </a:p>
-        </p:txBody>
-      </p:sp>
-      <p:sp>
-        <p:nvSpPr>
-          <p:cNvPr id="9" name="Shape 7"/>
-          <p:cNvSpPr/>
-          <p:nvPr/>
-        </p:nvSpPr>
-        <p:spPr>
-          <a:xfrm>
-            <a:off x="868680" y="1636776"/>
-            <a:ext cx="329184" cy="329184"/>
-          </a:xfrm>
-          <a:prstGeom prst="ellipse">
-            <a:avLst/>
-          </a:prstGeom>
-          <a:solidFill>
-            <a:srgbClr val="00ADB5"/>
-          </a:solidFill>
-          <a:ln w="12700">
-            <a:solidFill>
-              <a:srgbClr val="00ADB5"/>
-            </a:solidFill>
-            <a:prstDash val="solid"/>
-          </a:ln>
-        </p:spPr>
-        <p:txBody>
-          <a:bodyPr/>
-          <a:lstStyle/>
-          <a:p>
-            <a:endParaRPr lang="en-TH"/>
-          </a:p>
-        </p:txBody>
-      </p:sp>
-      <p:sp>
-        <p:nvSpPr>
-          <p:cNvPr id="10" name="Text 8"/>
-          <p:cNvSpPr/>
-          <p:nvPr/>
-        </p:nvSpPr>
-        <p:spPr>
-          <a:xfrm>
-            <a:off x="868680" y="1636776"/>
-            <a:ext cx="329184" cy="329184"/>
-          </a:xfrm>
-          <a:prstGeom prst="rect">
-            <a:avLst/>
-          </a:prstGeom>
-          <a:noFill/>
-          <a:ln/>
-        </p:spPr>
-        <p:txBody>
-          <a:bodyPr wrap="square" lIns="0" tIns="0" rIns="0" bIns="0" rtlCol="0" anchor="ctr"/>
-          <a:lstStyle/>
-          <a:p>
-            <a:pPr marL="0" indent="0" algn="ctr">
-              <a:buNone/>
-            </a:pPr>
-            <a:r>
-              <a:rPr lang="en-US" sz="1500" b="1" dirty="0">
-                <a:solidFill>
-                  <a:srgbClr val="FFFFFF"/>
-                </a:solidFill>
-                <a:latin typeface="TH Sarabun New" pitchFamily="34" charset="0"/>
-                <a:ea typeface="TH Sarabun New" pitchFamily="34" charset="-122"/>
-                <a:cs typeface="TH Sarabun New" pitchFamily="34" charset="-120"/>
-              </a:rPr>
-              <a:t>1</a:t>
-            </a:r>
-            <a:endParaRPr lang="en-US" sz="1500" dirty="0"/>
-          </a:p>
-        </p:txBody>
-      </p:sp>
-      <p:sp>
-        <p:nvSpPr>
-          <p:cNvPr id="11" name="Text 9"/>
-          <p:cNvSpPr/>
-          <p:nvPr/>
-        </p:nvSpPr>
-        <p:spPr>
-          <a:xfrm>
-            <a:off x="1307592" y="1572768"/>
-            <a:ext cx="4754880" cy="457200"/>
-          </a:xfrm>
-          <a:prstGeom prst="rect">
-            <a:avLst/>
-          </a:prstGeom>
-          <a:noFill/>
-          <a:ln/>
-        </p:spPr>
-        <p:txBody>
-          <a:bodyPr wrap="square" lIns="0" tIns="0" rIns="0" bIns="0" rtlCol="0" anchor="ctr"/>
-          <a:lstStyle/>
-          <a:p>
-            <a:pPr marL="0" indent="0">
-              <a:buNone/>
-            </a:pPr>
-            <a:r>
-              <a:rPr lang="en-US" sz="1600" dirty="0">
-                <a:solidFill>
-                  <a:srgbClr val="393E46"/>
-                </a:solidFill>
-                <a:latin typeface="TH Sarabun New" pitchFamily="34" charset="0"/>
-                <a:ea typeface="TH Sarabun New" pitchFamily="34" charset="-122"/>
-                <a:cs typeface="TH Sarabun New" pitchFamily="34" charset="-120"/>
-              </a:rPr>
-              <a:t>ตรวจว่ามี Node.js, Git และ Antigravity IDE แล้ว</a:t>
-            </a:r>
-            <a:endParaRPr lang="en-US" sz="1600" dirty="0"/>
-          </a:p>
-        </p:txBody>
-      </p:sp>
-      <p:sp>
-        <p:nvSpPr>
-          <p:cNvPr id="12" name="Shape 10"/>
-          <p:cNvSpPr/>
-          <p:nvPr/>
-        </p:nvSpPr>
-        <p:spPr>
-          <a:xfrm>
-            <a:off x="868680" y="2221992"/>
-            <a:ext cx="329184" cy="329184"/>
-          </a:xfrm>
-          <a:prstGeom prst="ellipse">
-            <a:avLst/>
-          </a:prstGeom>
-          <a:solidFill>
-            <a:srgbClr val="00ADB5"/>
-          </a:solidFill>
-          <a:ln w="12700">
-            <a:solidFill>
-              <a:srgbClr val="00ADB5"/>
-            </a:solidFill>
-            <a:prstDash val="solid"/>
-          </a:ln>
-        </p:spPr>
-        <p:txBody>
-          <a:bodyPr/>
-          <a:lstStyle/>
-          <a:p>
-            <a:endParaRPr lang="en-TH"/>
-          </a:p>
-        </p:txBody>
-      </p:sp>
-      <p:sp>
-        <p:nvSpPr>
-          <p:cNvPr id="13" name="Text 11"/>
-          <p:cNvSpPr/>
-          <p:nvPr/>
-        </p:nvSpPr>
-        <p:spPr>
-          <a:xfrm>
-            <a:off x="868680" y="2221992"/>
-            <a:ext cx="329184" cy="329184"/>
-          </a:xfrm>
-          <a:prstGeom prst="rect">
-            <a:avLst/>
-          </a:prstGeom>
-          <a:noFill/>
-          <a:ln/>
-        </p:spPr>
-        <p:txBody>
-          <a:bodyPr wrap="square" lIns="0" tIns="0" rIns="0" bIns="0" rtlCol="0" anchor="ctr"/>
-          <a:lstStyle/>
-          <a:p>
-            <a:pPr marL="0" indent="0" algn="ctr">
-              <a:buNone/>
-            </a:pPr>
-            <a:r>
-              <a:rPr lang="en-US" sz="1500" b="1" dirty="0">
-                <a:solidFill>
-                  <a:srgbClr val="FFFFFF"/>
-                </a:solidFill>
-                <a:latin typeface="TH Sarabun New" pitchFamily="34" charset="0"/>
-                <a:ea typeface="TH Sarabun New" pitchFamily="34" charset="-122"/>
-                <a:cs typeface="TH Sarabun New" pitchFamily="34" charset="-120"/>
-              </a:rPr>
-              <a:t>2</a:t>
-            </a:r>
-            <a:endParaRPr lang="en-US" sz="1500" dirty="0"/>
-          </a:p>
-        </p:txBody>
-      </p:sp>
-      <p:sp>
-        <p:nvSpPr>
-          <p:cNvPr id="14" name="Text 12"/>
-          <p:cNvSpPr/>
-          <p:nvPr/>
-        </p:nvSpPr>
-        <p:spPr>
-          <a:xfrm>
-            <a:off x="1307592" y="2157984"/>
-            <a:ext cx="4754880" cy="457200"/>
-          </a:xfrm>
-          <a:prstGeom prst="rect">
-            <a:avLst/>
-          </a:prstGeom>
-          <a:noFill/>
-          <a:ln/>
-        </p:spPr>
-        <p:txBody>
-          <a:bodyPr wrap="square" lIns="0" tIns="0" rIns="0" bIns="0" rtlCol="0" anchor="ctr"/>
-          <a:lstStyle/>
-          <a:p>
-            <a:pPr marL="0" indent="0">
-              <a:buNone/>
-            </a:pPr>
-            <a:r>
-              <a:rPr lang="en-US" sz="1600" dirty="0">
-                <a:solidFill>
-                  <a:srgbClr val="393E46"/>
-                </a:solidFill>
-                <a:latin typeface="TH Sarabun New" pitchFamily="34" charset="0"/>
-                <a:ea typeface="TH Sarabun New" pitchFamily="34" charset="-122"/>
-                <a:cs typeface="TH Sarabun New" pitchFamily="34" charset="-120"/>
-              </a:rPr>
-              <a:t>สร้างโฟลเดอร์ fundinghub แล้วเปิดใน Antigravity</a:t>
-            </a:r>
-            <a:endParaRPr lang="en-US" sz="1600" dirty="0"/>
-          </a:p>
-        </p:txBody>
-      </p:sp>
-      <p:sp>
-        <p:nvSpPr>
-          <p:cNvPr id="15" name="Shape 13"/>
-          <p:cNvSpPr/>
-          <p:nvPr/>
-        </p:nvSpPr>
-        <p:spPr>
-          <a:xfrm>
-            <a:off x="868680" y="2807208"/>
-            <a:ext cx="329184" cy="329184"/>
-          </a:xfrm>
-          <a:prstGeom prst="ellipse">
-            <a:avLst/>
-          </a:prstGeom>
-          <a:solidFill>
-            <a:srgbClr val="00ADB5"/>
-          </a:solidFill>
-          <a:ln w="12700">
-            <a:solidFill>
-              <a:srgbClr val="00ADB5"/>
-            </a:solidFill>
-            <a:prstDash val="solid"/>
-          </a:ln>
-        </p:spPr>
-        <p:txBody>
-          <a:bodyPr/>
-          <a:lstStyle/>
-          <a:p>
-            <a:endParaRPr lang="en-TH"/>
-          </a:p>
-        </p:txBody>
-      </p:sp>
-      <p:sp>
-        <p:nvSpPr>
-          <p:cNvPr id="16" name="Text 14"/>
-          <p:cNvSpPr/>
-          <p:nvPr/>
-        </p:nvSpPr>
-        <p:spPr>
-          <a:xfrm>
-            <a:off x="868680" y="2807208"/>
-            <a:ext cx="329184" cy="329184"/>
-          </a:xfrm>
-          <a:prstGeom prst="rect">
-            <a:avLst/>
-          </a:prstGeom>
-          <a:noFill/>
-          <a:ln/>
-        </p:spPr>
-        <p:txBody>
-          <a:bodyPr wrap="square" lIns="0" tIns="0" rIns="0" bIns="0" rtlCol="0" anchor="ctr"/>
-          <a:lstStyle/>
-          <a:p>
-            <a:pPr marL="0" indent="0" algn="ctr">
-              <a:buNone/>
-            </a:pPr>
-            <a:r>
-              <a:rPr lang="en-US" sz="1500" b="1" dirty="0">
-                <a:solidFill>
-                  <a:srgbClr val="FFFFFF"/>
-                </a:solidFill>
-                <a:latin typeface="TH Sarabun New" pitchFamily="34" charset="0"/>
-                <a:ea typeface="TH Sarabun New" pitchFamily="34" charset="-122"/>
-                <a:cs typeface="TH Sarabun New" pitchFamily="34" charset="-120"/>
-              </a:rPr>
-              <a:t>3</a:t>
-            </a:r>
-            <a:endParaRPr lang="en-US" sz="1500" dirty="0"/>
-          </a:p>
-        </p:txBody>
-      </p:sp>
-      <p:sp>
-        <p:nvSpPr>
-          <p:cNvPr id="17" name="Text 15"/>
-          <p:cNvSpPr/>
-          <p:nvPr/>
-        </p:nvSpPr>
-        <p:spPr>
-          <a:xfrm>
-            <a:off x="1307592" y="2743200"/>
-            <a:ext cx="4754880" cy="457200"/>
-          </a:xfrm>
-          <a:prstGeom prst="rect">
-            <a:avLst/>
-          </a:prstGeom>
-          <a:noFill/>
-          <a:ln/>
-        </p:spPr>
-        <p:txBody>
-          <a:bodyPr wrap="square" lIns="0" tIns="0" rIns="0" bIns="0" rtlCol="0" anchor="ctr"/>
-          <a:lstStyle/>
-          <a:p>
-            <a:pPr marL="0" indent="0">
-              <a:buNone/>
-            </a:pPr>
-            <a:r>
-              <a:rPr lang="en-US" sz="1600" dirty="0">
-                <a:solidFill>
-                  <a:srgbClr val="393E46"/>
-                </a:solidFill>
-                <a:latin typeface="TH Sarabun New" pitchFamily="34" charset="0"/>
-                <a:ea typeface="TH Sarabun New" pitchFamily="34" charset="-122"/>
-                <a:cs typeface="TH Sarabun New" pitchFamily="34" charset="-120"/>
-              </a:rPr>
-              <a:t>สร้างไฟล์เปล่าชื่อ SPEC_FundingHub.md ที่รากโปรเจกต์</a:t>
-            </a:r>
-            <a:endParaRPr lang="en-US" sz="1600" dirty="0"/>
-          </a:p>
-        </p:txBody>
-      </p:sp>
-      <p:sp>
-        <p:nvSpPr>
-          <p:cNvPr id="18" name="Shape 16"/>
-          <p:cNvSpPr/>
-          <p:nvPr/>
-        </p:nvSpPr>
-        <p:spPr>
-          <a:xfrm>
-            <a:off x="868680" y="3392424"/>
-            <a:ext cx="329184" cy="329184"/>
-          </a:xfrm>
-          <a:prstGeom prst="ellipse">
-            <a:avLst/>
-          </a:prstGeom>
-          <a:solidFill>
-            <a:srgbClr val="00ADB5"/>
-          </a:solidFill>
-          <a:ln w="12700">
-            <a:solidFill>
-              <a:srgbClr val="00ADB5"/>
-            </a:solidFill>
-            <a:prstDash val="solid"/>
-          </a:ln>
-        </p:spPr>
-        <p:txBody>
-          <a:bodyPr/>
-          <a:lstStyle/>
-          <a:p>
-            <a:endParaRPr lang="en-TH"/>
-          </a:p>
-        </p:txBody>
-      </p:sp>
-      <p:sp>
-        <p:nvSpPr>
-          <p:cNvPr id="19" name="Text 17"/>
-          <p:cNvSpPr/>
-          <p:nvPr/>
-        </p:nvSpPr>
-        <p:spPr>
-          <a:xfrm>
-            <a:off x="868680" y="3392424"/>
-            <a:ext cx="329184" cy="329184"/>
-          </a:xfrm>
-          <a:prstGeom prst="rect">
-            <a:avLst/>
-          </a:prstGeom>
-          <a:noFill/>
-          <a:ln/>
-        </p:spPr>
-        <p:txBody>
-          <a:bodyPr wrap="square" lIns="0" tIns="0" rIns="0" bIns="0" rtlCol="0" anchor="ctr"/>
-          <a:lstStyle/>
-          <a:p>
-            <a:pPr marL="0" indent="0" algn="ctr">
-              <a:buNone/>
-            </a:pPr>
-            <a:r>
-              <a:rPr lang="en-US" sz="1500" b="1" dirty="0">
-                <a:solidFill>
-                  <a:srgbClr val="FFFFFF"/>
-                </a:solidFill>
-                <a:latin typeface="TH Sarabun New" pitchFamily="34" charset="0"/>
-                <a:ea typeface="TH Sarabun New" pitchFamily="34" charset="-122"/>
-                <a:cs typeface="TH Sarabun New" pitchFamily="34" charset="-120"/>
-              </a:rPr>
-              <a:t>4</a:t>
-            </a:r>
-            <a:endParaRPr lang="en-US" sz="1500" dirty="0"/>
-          </a:p>
-        </p:txBody>
-      </p:sp>
-      <p:sp>
-        <p:nvSpPr>
-          <p:cNvPr id="20" name="Text 18"/>
-          <p:cNvSpPr/>
-          <p:nvPr/>
-        </p:nvSpPr>
-        <p:spPr>
-          <a:xfrm>
-            <a:off x="1307592" y="3328416"/>
-            <a:ext cx="4754880" cy="457200"/>
-          </a:xfrm>
-          <a:prstGeom prst="rect">
-            <a:avLst/>
-          </a:prstGeom>
-          <a:noFill/>
-          <a:ln/>
-        </p:spPr>
-        <p:txBody>
-          <a:bodyPr wrap="square" lIns="0" tIns="0" rIns="0" bIns="0" rtlCol="0" anchor="ctr"/>
-          <a:lstStyle/>
-          <a:p>
-            <a:pPr marL="0" indent="0">
-              <a:buNone/>
-            </a:pPr>
-            <a:r>
-              <a:rPr lang="en-US" sz="1600" dirty="0">
-                <a:solidFill>
-                  <a:srgbClr val="393E46"/>
-                </a:solidFill>
-                <a:latin typeface="TH Sarabun New" pitchFamily="34" charset="0"/>
-                <a:ea typeface="TH Sarabun New" pitchFamily="34" charset="-122"/>
-                <a:cs typeface="TH Sarabun New" pitchFamily="34" charset="-120"/>
-              </a:rPr>
-              <a:t>เปิดไฟล์ SPEC_BLOCKS.md ที่แจกให้ ไว้อีกหน้าต่างหนึ่ง</a:t>
-            </a:r>
-            <a:endParaRPr lang="en-US" sz="1600" dirty="0"/>
-          </a:p>
-        </p:txBody>
-      </p:sp>
-      <p:sp>
-        <p:nvSpPr>
-          <p:cNvPr id="21" name="Shape 19"/>
-          <p:cNvSpPr/>
-          <p:nvPr/>
-        </p:nvSpPr>
-        <p:spPr>
-          <a:xfrm>
-            <a:off x="868680" y="3977640"/>
-            <a:ext cx="329184" cy="329184"/>
-          </a:xfrm>
-          <a:prstGeom prst="ellipse">
-            <a:avLst/>
-          </a:prstGeom>
-          <a:solidFill>
-            <a:srgbClr val="00ADB5"/>
-          </a:solidFill>
-          <a:ln w="12700">
-            <a:solidFill>
-              <a:srgbClr val="00ADB5"/>
-            </a:solidFill>
-            <a:prstDash val="solid"/>
-          </a:ln>
-        </p:spPr>
-        <p:txBody>
-          <a:bodyPr/>
-          <a:lstStyle/>
-          <a:p>
-            <a:endParaRPr lang="en-TH"/>
-          </a:p>
-        </p:txBody>
-      </p:sp>
-      <p:sp>
-        <p:nvSpPr>
-          <p:cNvPr id="22" name="Text 20"/>
-          <p:cNvSpPr/>
-          <p:nvPr/>
-        </p:nvSpPr>
-        <p:spPr>
-          <a:xfrm>
-            <a:off x="868680" y="3977640"/>
-            <a:ext cx="329184" cy="329184"/>
-          </a:xfrm>
-          <a:prstGeom prst="rect">
-            <a:avLst/>
-          </a:prstGeom>
-          <a:noFill/>
-          <a:ln/>
-        </p:spPr>
-        <p:txBody>
-          <a:bodyPr wrap="square" lIns="0" tIns="0" rIns="0" bIns="0" rtlCol="0" anchor="ctr"/>
-          <a:lstStyle/>
-          <a:p>
-            <a:pPr marL="0" indent="0" algn="ctr">
-              <a:buNone/>
-            </a:pPr>
-            <a:r>
-              <a:rPr lang="en-US" sz="1500" b="1" dirty="0">
-                <a:solidFill>
-                  <a:srgbClr val="FFFFFF"/>
-                </a:solidFill>
-                <a:latin typeface="TH Sarabun New" pitchFamily="34" charset="0"/>
-                <a:ea typeface="TH Sarabun New" pitchFamily="34" charset="-122"/>
-                <a:cs typeface="TH Sarabun New" pitchFamily="34" charset="-120"/>
-              </a:rPr>
-              <a:t>5</a:t>
-            </a:r>
-            <a:endParaRPr lang="en-US" sz="1500" dirty="0"/>
-          </a:p>
-        </p:txBody>
-      </p:sp>
-      <p:sp>
-        <p:nvSpPr>
-          <p:cNvPr id="23" name="Text 21"/>
-          <p:cNvSpPr/>
-          <p:nvPr/>
-        </p:nvSpPr>
-        <p:spPr>
-          <a:xfrm>
-            <a:off x="1307592" y="3913632"/>
-            <a:ext cx="4754880" cy="457200"/>
-          </a:xfrm>
-          <a:prstGeom prst="rect">
-            <a:avLst/>
-          </a:prstGeom>
-          <a:noFill/>
-          <a:ln/>
-        </p:spPr>
-        <p:txBody>
-          <a:bodyPr wrap="square" lIns="0" tIns="0" rIns="0" bIns="0" rtlCol="0" anchor="ctr"/>
-          <a:lstStyle/>
-          <a:p>
-            <a:pPr marL="0" indent="0">
-              <a:buNone/>
-            </a:pPr>
-            <a:r>
-              <a:rPr lang="en-US" sz="1600" dirty="0">
-                <a:solidFill>
-                  <a:srgbClr val="393E46"/>
-                </a:solidFill>
-                <a:latin typeface="TH Sarabun New" pitchFamily="34" charset="0"/>
-                <a:ea typeface="TH Sarabun New" pitchFamily="34" charset="-122"/>
-                <a:cs typeface="TH Sarabun New" pitchFamily="34" charset="-120"/>
-              </a:rPr>
-              <a:t>หาให้เจอ 4 ส่วน : Editor / Agent / Artifacts / Browser</a:t>
-            </a:r>
-            <a:endParaRPr lang="en-US" sz="1600" dirty="0"/>
-          </a:p>
-        </p:txBody>
-      </p:sp>
-      <p:sp>
-        <p:nvSpPr>
-          <p:cNvPr id="24" name="Shape 22"/>
-          <p:cNvSpPr/>
-          <p:nvPr/>
-        </p:nvSpPr>
-        <p:spPr>
-          <a:xfrm>
-            <a:off x="6583680" y="1024128"/>
-            <a:ext cx="4983480" cy="1600200"/>
-          </a:xfrm>
-          <a:prstGeom prst="roundRect">
-            <a:avLst>
-              <a:gd name="adj" fmla="val 4000"/>
-            </a:avLst>
-          </a:prstGeom>
-          <a:solidFill>
-            <a:srgbClr val="222831"/>
-          </a:solidFill>
-          <a:ln w="12700">
-            <a:solidFill>
-              <a:srgbClr val="222831"/>
-            </a:solidFill>
-            <a:prstDash val="solid"/>
-          </a:ln>
-        </p:spPr>
-        <p:txBody>
-          <a:bodyPr/>
-          <a:lstStyle/>
-          <a:p>
-            <a:endParaRPr lang="en-TH"/>
-          </a:p>
-        </p:txBody>
-      </p:sp>
-      <p:sp>
-        <p:nvSpPr>
-          <p:cNvPr id="25" name="Text 23"/>
-          <p:cNvSpPr/>
-          <p:nvPr/>
-        </p:nvSpPr>
-        <p:spPr>
-          <a:xfrm>
-            <a:off x="6729984" y="1115568"/>
-            <a:ext cx="4690872" cy="1417320"/>
-          </a:xfrm>
-          <a:prstGeom prst="rect">
-            <a:avLst/>
-          </a:prstGeom>
-          <a:noFill/>
-          <a:ln/>
-        </p:spPr>
-        <p:txBody>
-          <a:bodyPr wrap="square" lIns="0" tIns="0" rIns="0" bIns="0" rtlCol="0" anchor="t"/>
-          <a:lstStyle/>
-          <a:p>
-            <a:pPr marL="0" indent="0">
-              <a:lnSpc>
-                <a:spcPts val="1700"/>
-              </a:lnSpc>
-              <a:buNone/>
-            </a:pPr>
-            <a:r>
-              <a:rPr lang="en-US" sz="1150" dirty="0">
-                <a:solidFill>
-                  <a:srgbClr val="D6F5F7"/>
-                </a:solidFill>
-                <a:latin typeface="Courier New" pitchFamily="34" charset="0"/>
-                <a:ea typeface="Courier New" pitchFamily="34" charset="-122"/>
-                <a:cs typeface="Courier New" pitchFamily="34" charset="-120"/>
-              </a:rPr>
-              <a:t>node -v</a:t>
-            </a:r>
-            <a:endParaRPr lang="en-US" sz="1150" dirty="0"/>
-          </a:p>
-          <a:p>
-            <a:pPr marL="0" indent="0">
-              <a:lnSpc>
-                <a:spcPts val="1700"/>
-              </a:lnSpc>
-              <a:buNone/>
-            </a:pPr>
-            <a:r>
-              <a:rPr lang="en-US" sz="1150" dirty="0">
-                <a:solidFill>
-                  <a:srgbClr val="D6F5F7"/>
-                </a:solidFill>
-                <a:latin typeface="Courier New" pitchFamily="34" charset="0"/>
-                <a:ea typeface="Courier New" pitchFamily="34" charset="-122"/>
-                <a:cs typeface="Courier New" pitchFamily="34" charset="-120"/>
-              </a:rPr>
-              <a:t>npm -v</a:t>
-            </a:r>
-            <a:endParaRPr lang="en-US" sz="1150" dirty="0"/>
-          </a:p>
-          <a:p>
-            <a:pPr marL="0" indent="0">
-              <a:lnSpc>
-                <a:spcPts val="1700"/>
-              </a:lnSpc>
-              <a:buNone/>
-            </a:pPr>
-            <a:r>
-              <a:rPr lang="en-US" sz="1150" dirty="0">
-                <a:solidFill>
-                  <a:srgbClr val="D6F5F7"/>
-                </a:solidFill>
-                <a:latin typeface="Courier New" pitchFamily="34" charset="0"/>
-                <a:ea typeface="Courier New" pitchFamily="34" charset="-122"/>
-                <a:cs typeface="Courier New" pitchFamily="34" charset="-120"/>
-              </a:rPr>
-              <a:t>git --version</a:t>
-            </a:r>
-            <a:endParaRPr lang="en-US" sz="1150" dirty="0"/>
-          </a:p>
-        </p:txBody>
-      </p:sp>
-      <p:sp>
-        <p:nvSpPr>
-          <p:cNvPr id="26" name="Shape 24"/>
-          <p:cNvSpPr/>
-          <p:nvPr/>
-        </p:nvSpPr>
-        <p:spPr>
-          <a:xfrm>
-            <a:off x="6583680" y="2788920"/>
-            <a:ext cx="4983480" cy="2029968"/>
-          </a:xfrm>
-          <a:prstGeom prst="roundRect">
-            <a:avLst>
-              <a:gd name="adj" fmla="val 4054"/>
-            </a:avLst>
-          </a:prstGeom>
-          <a:solidFill>
-            <a:srgbClr val="FFFFFF"/>
-          </a:solidFill>
-          <a:ln w="9525">
-            <a:solidFill>
-              <a:srgbClr val="FFFFFF"/>
-            </a:solidFill>
-            <a:prstDash val="solid"/>
-          </a:ln>
-          <a:effectLst>
-            <a:outerShdw blurRad="101600" dist="12700" dir="5400000" algn="bl" rotWithShape="0">
-              <a:srgbClr val="222831">
-                <a:alpha val="10000"/>
-              </a:srgbClr>
-            </a:outerShdw>
-          </a:effectLst>
-        </p:spPr>
-        <p:txBody>
-          <a:bodyPr/>
-          <a:lstStyle/>
-          <a:p>
-            <a:endParaRPr lang="en-TH"/>
-          </a:p>
-        </p:txBody>
-      </p:sp>
-      <p:sp>
-        <p:nvSpPr>
-          <p:cNvPr id="27" name="Text 25"/>
-          <p:cNvSpPr/>
-          <p:nvPr/>
-        </p:nvSpPr>
-        <p:spPr>
-          <a:xfrm>
-            <a:off x="6812280" y="2926080"/>
-            <a:ext cx="4526280" cy="310896"/>
-          </a:xfrm>
-          <a:prstGeom prst="rect">
-            <a:avLst/>
-          </a:prstGeom>
-          <a:noFill/>
-          <a:ln/>
-        </p:spPr>
-        <p:txBody>
-          <a:bodyPr wrap="square" lIns="0" tIns="0" rIns="0" bIns="0" rtlCol="0" anchor="ctr"/>
-          <a:lstStyle/>
-          <a:p>
-            <a:pPr marL="0" indent="0">
-              <a:buNone/>
-            </a:pPr>
-            <a:r>
-              <a:rPr lang="en-US" sz="1800" b="1" dirty="0">
-                <a:solidFill>
-                  <a:srgbClr val="222831"/>
-                </a:solidFill>
-                <a:latin typeface="TH Sarabun New" pitchFamily="34" charset="0"/>
-                <a:ea typeface="TH Sarabun New" pitchFamily="34" charset="-122"/>
-                <a:cs typeface="TH Sarabun New" pitchFamily="34" charset="-120"/>
-              </a:rPr>
-              <a:t>เกณฑ์ผ่าน</a:t>
-            </a:r>
-            <a:endParaRPr lang="en-US" sz="1800" dirty="0"/>
-          </a:p>
-        </p:txBody>
-      </p:sp>
-      <p:sp>
-        <p:nvSpPr>
-          <p:cNvPr id="28" name="Text 26"/>
-          <p:cNvSpPr/>
-          <p:nvPr/>
-        </p:nvSpPr>
-        <p:spPr>
-          <a:xfrm>
-            <a:off x="6812280" y="3310128"/>
-            <a:ext cx="4480560" cy="1371600"/>
-          </a:xfrm>
-          <a:prstGeom prst="rect">
-            <a:avLst/>
-          </a:prstGeom>
-          <a:noFill/>
-          <a:ln/>
-        </p:spPr>
-        <p:txBody>
-          <a:bodyPr wrap="square" lIns="0" tIns="0" rIns="0" bIns="0" rtlCol="0" anchor="t"/>
-          <a:lstStyle/>
-          <a:p>
-            <a:pPr marL="342900" indent="-342900">
-              <a:spcAft>
-                <a:spcPts val="800"/>
-              </a:spcAft>
-              <a:buSzPct val="100000"/>
-              <a:buChar char="•"/>
-            </a:pPr>
-            <a:r>
-              <a:rPr lang="en-US" sz="1550" dirty="0">
-                <a:solidFill>
-                  <a:srgbClr val="393E46"/>
-                </a:solidFill>
-                <a:latin typeface="TH Sarabun New" pitchFamily="34" charset="0"/>
-                <a:ea typeface="TH Sarabun New" pitchFamily="34" charset="-122"/>
-                <a:cs typeface="TH Sarabun New" pitchFamily="34" charset="-120"/>
-              </a:rPr>
-              <a:t>ทุกคำสั่งขึ้นเลขเวอร์ชัน ไม่ขึ้น command not found</a:t>
-            </a:r>
-            <a:endParaRPr lang="en-US" sz="1550" dirty="0"/>
-          </a:p>
-          <a:p>
-            <a:pPr marL="342900" indent="-342900">
-              <a:spcAft>
-                <a:spcPts val="800"/>
-              </a:spcAft>
-              <a:buSzPct val="100000"/>
-              <a:buChar char="•"/>
-            </a:pPr>
-            <a:r>
-              <a:rPr lang="en-US" sz="1550" dirty="0">
-                <a:solidFill>
-                  <a:srgbClr val="393E46"/>
-                </a:solidFill>
-                <a:latin typeface="TH Sarabun New" pitchFamily="34" charset="0"/>
-                <a:ea typeface="TH Sarabun New" pitchFamily="34" charset="-122"/>
-                <a:cs typeface="TH Sarabun New" pitchFamily="34" charset="-120"/>
-              </a:rPr>
-              <a:t>เปิดโฟลเดอร์ fundinghub ใน Antigravity ได้</a:t>
-            </a:r>
-            <a:endParaRPr lang="en-US" sz="1550" dirty="0"/>
-          </a:p>
-          <a:p>
-            <a:pPr marL="342900" indent="-342900">
-              <a:spcAft>
-                <a:spcPts val="800"/>
-              </a:spcAft>
-              <a:buSzPct val="100000"/>
-              <a:buChar char="•"/>
-            </a:pPr>
-            <a:r>
-              <a:rPr lang="en-US" sz="1550" dirty="0">
-                <a:solidFill>
-                  <a:srgbClr val="393E46"/>
-                </a:solidFill>
-                <a:latin typeface="TH Sarabun New" pitchFamily="34" charset="0"/>
-                <a:ea typeface="TH Sarabun New" pitchFamily="34" charset="-122"/>
-                <a:cs typeface="TH Sarabun New" pitchFamily="34" charset="-120"/>
-              </a:rPr>
-              <a:t>มีไฟล์เปล่า SPEC_FundingHub.md รออยู่</a:t>
-            </a:r>
-            <a:endParaRPr lang="en-US" sz="1550" dirty="0"/>
-          </a:p>
-        </p:txBody>
-      </p:sp>
-      <p:sp>
-        <p:nvSpPr>
-          <p:cNvPr id="29" name="Text 27"/>
-          <p:cNvSpPr/>
-          <p:nvPr/>
-        </p:nvSpPr>
-        <p:spPr>
-          <a:xfrm>
-            <a:off x="594360" y="6263640"/>
-            <a:ext cx="10972800" cy="292608"/>
-          </a:xfrm>
-          <a:prstGeom prst="rect">
-            <a:avLst/>
-          </a:prstGeom>
-          <a:noFill/>
-          <a:ln/>
-        </p:spPr>
-        <p:txBody>
-          <a:bodyPr wrap="square" lIns="0" tIns="0" rIns="0" bIns="0" rtlCol="0" anchor="ctr"/>
-          <a:lstStyle/>
-          <a:p>
-            <a:pPr marL="0" indent="0">
-              <a:buNone/>
-            </a:pPr>
-            <a:r>
-              <a:rPr lang="en-US" sz="1300" dirty="0">
-                <a:solidFill>
-                  <a:srgbClr val="8A94A6"/>
-                </a:solidFill>
-                <a:latin typeface="TH Sarabun New" pitchFamily="34" charset="0"/>
-                <a:ea typeface="TH Sarabun New" pitchFamily="34" charset="-122"/>
-                <a:cs typeface="TH Sarabun New" pitchFamily="34" charset="-120"/>
-              </a:rPr>
-              <a:t>เอกสารแล็บ : LAB A  ·  การติดตั้งควรทำมาล่วงหน้าก่อนวันอบรม เวลาในห้องมีเพียง 10 นาทีสำหรับตรวจความพร้อม</a:t>
-            </a:r>
-            <a:endParaRPr lang="en-US" sz="1300" dirty="0"/>
-          </a:p>
-        </p:txBody>
-      </p:sp>
-    </p:spTree>
-  </p:cSld>
-  <p:clrMapOvr>
-    <a:masterClrMapping/>
-  </p:clrMapOvr>
-</p:sld>
-</file>
-
-<file path=ppt/slides/slide11.xml><?xml version="1.0" encoding="utf-8"?>
-<p:sld xmlns:a="http://schemas.openxmlformats.org/drawingml/2006/main" xmlns:r="http://schemas.openxmlformats.org/officeDocument/2006/relationships" xmlns:p="http://schemas.openxmlformats.org/presentationml/2006/main">
   <p:cSld name="Slide 11">
     <p:bg>
       <p:bgPr>
@@ -4859,7 +3601,7 @@
 </p:sld>
 </file>
 
-<file path=ppt/slides/slide12.xml><?xml version="1.0" encoding="utf-8"?>
+<file path=ppt/slides/slide11.xml><?xml version="1.0" encoding="utf-8"?>
 <p:sld xmlns:a="http://schemas.openxmlformats.org/drawingml/2006/main" xmlns:r="http://schemas.openxmlformats.org/officeDocument/2006/relationships" xmlns:p="http://schemas.openxmlformats.org/presentationml/2006/main">
   <p:cSld name="Slide 12">
     <p:bg>
@@ -5284,7 +4026,7 @@
 </p:sld>
 </file>
 
-<file path=ppt/slides/slide13.xml><?xml version="1.0" encoding="utf-8"?>
+<file path=ppt/slides/slide12.xml><?xml version="1.0" encoding="utf-8"?>
 <p:sld xmlns:a="http://schemas.openxmlformats.org/drawingml/2006/main" xmlns:r="http://schemas.openxmlformats.org/officeDocument/2006/relationships" xmlns:p="http://schemas.openxmlformats.org/presentationml/2006/main">
   <p:cSld name="Slide 13">
     <p:bg>
@@ -6233,7 +4975,7 @@
 </p:sld>
 </file>
 
-<file path=ppt/slides/slide14.xml><?xml version="1.0" encoding="utf-8"?>
+<file path=ppt/slides/slide13.xml><?xml version="1.0" encoding="utf-8"?>
 <p:sld xmlns:a="http://schemas.openxmlformats.org/drawingml/2006/main" xmlns:r="http://schemas.openxmlformats.org/officeDocument/2006/relationships" xmlns:p="http://schemas.openxmlformats.org/presentationml/2006/main">
   <p:cSld name="Slide 14">
     <p:bg>
@@ -6948,7 +5690,7 @@
 </p:sld>
 </file>
 
-<file path=ppt/slides/slide15.xml><?xml version="1.0" encoding="utf-8"?>
+<file path=ppt/slides/slide14.xml><?xml version="1.0" encoding="utf-8"?>
 <p:sld xmlns:a="http://schemas.openxmlformats.org/drawingml/2006/main" xmlns:r="http://schemas.openxmlformats.org/officeDocument/2006/relationships" xmlns:p="http://schemas.openxmlformats.org/presentationml/2006/main">
   <p:cSld name="Slide 15">
     <p:bg>
@@ -8113,7 +6855,7 @@
 </p:sld>
 </file>
 
-<file path=ppt/slides/slide16.xml><?xml version="1.0" encoding="utf-8"?>
+<file path=ppt/slides/slide15.xml><?xml version="1.0" encoding="utf-8"?>
 <p:sld xmlns:a="http://schemas.openxmlformats.org/drawingml/2006/main" xmlns:r="http://schemas.openxmlformats.org/officeDocument/2006/relationships" xmlns:p="http://schemas.openxmlformats.org/presentationml/2006/main">
   <p:cSld name="Slide 16">
     <p:bg>
@@ -9175,7 +7917,7 @@
 </p:sld>
 </file>
 
-<file path=ppt/slides/slide17.xml><?xml version="1.0" encoding="utf-8"?>
+<file path=ppt/slides/slide16.xml><?xml version="1.0" encoding="utf-8"?>
 <p:sld xmlns:a="http://schemas.openxmlformats.org/drawingml/2006/main" xmlns:r="http://schemas.openxmlformats.org/officeDocument/2006/relationships" xmlns:p="http://schemas.openxmlformats.org/presentationml/2006/main">
   <p:cSld name="Slide 17">
     <p:bg>
@@ -9396,7 +8138,7 @@
 </p:sld>
 </file>
 
-<file path=ppt/slides/slide18.xml><?xml version="1.0" encoding="utf-8"?>
+<file path=ppt/slides/slide17.xml><?xml version="1.0" encoding="utf-8"?>
 <p:sld xmlns:a="http://schemas.openxmlformats.org/drawingml/2006/main" xmlns:r="http://schemas.openxmlformats.org/officeDocument/2006/relationships" xmlns:p="http://schemas.openxmlformats.org/presentationml/2006/main">
   <p:cSld name="Slide 18">
     <p:bg>
@@ -10372,7 +9114,7 @@
 </p:sld>
 </file>
 
-<file path=ppt/slides/slide19.xml><?xml version="1.0" encoding="utf-8"?>
+<file path=ppt/slides/slide18.xml><?xml version="1.0" encoding="utf-8"?>
 <p:sld xmlns:a="http://schemas.openxmlformats.org/drawingml/2006/main" xmlns:r="http://schemas.openxmlformats.org/officeDocument/2006/relationships" xmlns:p="http://schemas.openxmlformats.org/presentationml/2006/main">
   <p:cSld name="Slide 23">
     <p:bg>
@@ -10582,6 +9324,1098 @@
               <a:t>กำหนดสไตล์ สี และฟอนต์ด้วยตัวเอง เพื่อไม่ให้งานของทุกคนหน้าตาเหมือนกัน</a:t>
             </a:r>
             <a:endParaRPr lang="en-US" sz="1700" dirty="0"/>
+          </a:p>
+        </p:txBody>
+      </p:sp>
+    </p:spTree>
+  </p:cSld>
+  <p:clrMapOvr>
+    <a:masterClrMapping/>
+  </p:clrMapOvr>
+</p:sld>
+</file>
+
+<file path=ppt/slides/slide19.xml><?xml version="1.0" encoding="utf-8"?>
+<p:sld xmlns:a="http://schemas.openxmlformats.org/drawingml/2006/main" xmlns:r="http://schemas.openxmlformats.org/officeDocument/2006/relationships" xmlns:p="http://schemas.openxmlformats.org/presentationml/2006/main">
+  <p:cSld name="Slide 24">
+    <p:bg>
+      <p:bgPr>
+        <a:solidFill>
+          <a:srgbClr val="FFFFFF"/>
+        </a:solidFill>
+        <a:effectLst/>
+      </p:bgPr>
+    </p:bg>
+    <p:spTree>
+      <p:nvGrpSpPr>
+        <p:cNvPr id="1" name=""/>
+        <p:cNvGrpSpPr/>
+        <p:nvPr/>
+      </p:nvGrpSpPr>
+      <p:grpSpPr>
+        <a:xfrm>
+          <a:off x="0" y="0"/>
+          <a:ext cx="0" cy="0"/>
+          <a:chOff x="0" y="0"/>
+          <a:chExt cx="0" cy="0"/>
+        </a:xfrm>
+      </p:grpSpPr>
+      <p:sp>
+        <p:nvSpPr>
+          <p:cNvPr id="2" name="Text 0"/>
+          <p:cNvSpPr/>
+          <p:nvPr/>
+        </p:nvSpPr>
+        <p:spPr>
+          <a:xfrm>
+            <a:off x="11018520" y="6263640"/>
+            <a:ext cx="548640" cy="274320"/>
+          </a:xfrm>
+          <a:prstGeom prst="rect">
+            <a:avLst/>
+          </a:prstGeom>
+          <a:noFill/>
+          <a:ln/>
+        </p:spPr>
+        <p:txBody>
+          <a:bodyPr wrap="square" lIns="0" tIns="0" rIns="0" bIns="0" rtlCol="0" anchor="ctr"/>
+          <a:lstStyle/>
+          <a:p>
+            <a:pPr marL="0" indent="0" algn="r">
+              <a:buNone/>
+            </a:pPr>
+            <a:r>
+              <a:rPr lang="en-US" sz="1200" dirty="0">
+                <a:solidFill>
+                  <a:srgbClr val="9AA3AD"/>
+                </a:solidFill>
+                <a:latin typeface="TH Sarabun New" pitchFamily="34" charset="0"/>
+                <a:ea typeface="TH Sarabun New" pitchFamily="34" charset="-122"/>
+                <a:cs typeface="TH Sarabun New" pitchFamily="34" charset="-120"/>
+              </a:rPr>
+              <a:t>24</a:t>
+            </a:r>
+            <a:endParaRPr lang="en-US" sz="1200" dirty="0"/>
+          </a:p>
+        </p:txBody>
+      </p:sp>
+      <p:sp>
+        <p:nvSpPr>
+          <p:cNvPr id="3" name="Text 1"/>
+          <p:cNvSpPr/>
+          <p:nvPr/>
+        </p:nvSpPr>
+        <p:spPr>
+          <a:xfrm>
+            <a:off x="594360" y="329184"/>
+            <a:ext cx="10972800" cy="566928"/>
+          </a:xfrm>
+          <a:prstGeom prst="rect">
+            <a:avLst/>
+          </a:prstGeom>
+          <a:noFill/>
+          <a:ln/>
+        </p:spPr>
+        <p:txBody>
+          <a:bodyPr wrap="square" lIns="0" tIns="0" rIns="0" bIns="0" rtlCol="0" anchor="ctr"/>
+          <a:lstStyle/>
+          <a:p>
+            <a:pPr marL="0" indent="0">
+              <a:buNone/>
+            </a:pPr>
+            <a:r>
+              <a:rPr lang="en-US" sz="3200" b="1" dirty="0">
+                <a:solidFill>
+                  <a:srgbClr val="222831"/>
+                </a:solidFill>
+                <a:latin typeface="TH Sarabun New" pitchFamily="34" charset="0"/>
+                <a:ea typeface="TH Sarabun New" pitchFamily="34" charset="-122"/>
+                <a:cs typeface="TH Sarabun New" pitchFamily="34" charset="-120"/>
+              </a:rPr>
+              <a:t>ทำไมต้องกำหนด Design System ก่อน</a:t>
+            </a:r>
+            <a:endParaRPr lang="en-US" sz="3200" dirty="0"/>
+          </a:p>
+        </p:txBody>
+      </p:sp>
+      <p:sp>
+        <p:nvSpPr>
+          <p:cNvPr id="4" name="Shape 2"/>
+          <p:cNvSpPr/>
+          <p:nvPr/>
+        </p:nvSpPr>
+        <p:spPr>
+          <a:xfrm>
+            <a:off x="594360" y="1417320"/>
+            <a:ext cx="5303520" cy="2286000"/>
+          </a:xfrm>
+          <a:prstGeom prst="roundRect">
+            <a:avLst>
+              <a:gd name="adj" fmla="val 3600"/>
+            </a:avLst>
+          </a:prstGeom>
+          <a:solidFill>
+            <a:srgbClr val="FEF2F2"/>
+          </a:solidFill>
+          <a:ln w="9525">
+            <a:solidFill>
+              <a:srgbClr val="FCA5A5"/>
+            </a:solidFill>
+            <a:prstDash val="solid"/>
+          </a:ln>
+          <a:effectLst>
+            <a:outerShdw blurRad="101600" dist="12700" dir="5400000" algn="bl" rotWithShape="0">
+              <a:srgbClr val="222831">
+                <a:alpha val="10000"/>
+              </a:srgbClr>
+            </a:outerShdw>
+          </a:effectLst>
+        </p:spPr>
+        <p:txBody>
+          <a:bodyPr/>
+          <a:lstStyle/>
+          <a:p>
+            <a:endParaRPr lang="en-TH"/>
+          </a:p>
+        </p:txBody>
+      </p:sp>
+      <p:sp>
+        <p:nvSpPr>
+          <p:cNvPr id="5" name="Text 3"/>
+          <p:cNvSpPr/>
+          <p:nvPr/>
+        </p:nvSpPr>
+        <p:spPr>
+          <a:xfrm>
+            <a:off x="868680" y="1572768"/>
+            <a:ext cx="4754880" cy="347472"/>
+          </a:xfrm>
+          <a:prstGeom prst="rect">
+            <a:avLst/>
+          </a:prstGeom>
+          <a:noFill/>
+          <a:ln/>
+        </p:spPr>
+        <p:txBody>
+          <a:bodyPr wrap="square" lIns="0" tIns="0" rIns="0" bIns="0" rtlCol="0" anchor="ctr"/>
+          <a:lstStyle/>
+          <a:p>
+            <a:pPr marL="0" indent="0">
+              <a:buNone/>
+            </a:pPr>
+            <a:r>
+              <a:rPr lang="en-US" sz="2000" b="1" dirty="0">
+                <a:solidFill>
+                  <a:srgbClr val="DC2626"/>
+                </a:solidFill>
+                <a:latin typeface="TH Sarabun New" pitchFamily="34" charset="0"/>
+                <a:ea typeface="TH Sarabun New" pitchFamily="34" charset="-122"/>
+                <a:cs typeface="TH Sarabun New" pitchFamily="34" charset="-120"/>
+              </a:rPr>
+              <a:t>ถ้าไม่กำหนด</a:t>
+            </a:r>
+            <a:endParaRPr lang="en-US" sz="2000" dirty="0"/>
+          </a:p>
+        </p:txBody>
+      </p:sp>
+      <p:sp>
+        <p:nvSpPr>
+          <p:cNvPr id="6" name="Text 4"/>
+          <p:cNvSpPr/>
+          <p:nvPr/>
+        </p:nvSpPr>
+        <p:spPr>
+          <a:xfrm>
+            <a:off x="868680" y="1993392"/>
+            <a:ext cx="4754880" cy="1554480"/>
+          </a:xfrm>
+          <a:prstGeom prst="rect">
+            <a:avLst/>
+          </a:prstGeom>
+          <a:noFill/>
+          <a:ln/>
+        </p:spPr>
+        <p:txBody>
+          <a:bodyPr wrap="square" lIns="0" tIns="0" rIns="0" bIns="0" rtlCol="0" anchor="t"/>
+          <a:lstStyle/>
+          <a:p>
+            <a:pPr marL="342900" indent="-342900">
+              <a:spcAft>
+                <a:spcPts val="700"/>
+              </a:spcAft>
+              <a:buSzPct val="100000"/>
+              <a:buChar char="•"/>
+            </a:pPr>
+            <a:r>
+              <a:rPr lang="en-US" sz="1600" dirty="0">
+                <a:solidFill>
+                  <a:srgbClr val="393E46"/>
+                </a:solidFill>
+                <a:latin typeface="TH Sarabun New" pitchFamily="34" charset="0"/>
+                <a:ea typeface="TH Sarabun New" pitchFamily="34" charset="-122"/>
+                <a:cs typeface="TH Sarabun New" pitchFamily="34" charset="-120"/>
+              </a:rPr>
+              <a:t>AI เลือกสีน้ำเงินและฟอนต์สากลให้ทุกครั้ง</a:t>
+            </a:r>
+            <a:endParaRPr lang="en-US" sz="1600" dirty="0"/>
+          </a:p>
+          <a:p>
+            <a:pPr marL="342900" indent="-342900">
+              <a:spcAft>
+                <a:spcPts val="700"/>
+              </a:spcAft>
+              <a:buSzPct val="100000"/>
+              <a:buChar char="•"/>
+            </a:pPr>
+            <a:r>
+              <a:rPr lang="en-US" sz="1600" dirty="0">
+                <a:solidFill>
+                  <a:srgbClr val="393E46"/>
+                </a:solidFill>
+                <a:latin typeface="TH Sarabun New" pitchFamily="34" charset="0"/>
+                <a:ea typeface="TH Sarabun New" pitchFamily="34" charset="-122"/>
+                <a:cs typeface="TH Sarabun New" pitchFamily="34" charset="-120"/>
+              </a:rPr>
+              <a:t>งานของผู้เข้าอบรมทุกคนหน้าตาเหมือนกันหมด</a:t>
+            </a:r>
+            <a:endParaRPr lang="en-US" sz="1600" dirty="0"/>
+          </a:p>
+          <a:p>
+            <a:pPr marL="342900" indent="-342900">
+              <a:spcAft>
+                <a:spcPts val="700"/>
+              </a:spcAft>
+              <a:buSzPct val="100000"/>
+              <a:buChar char="•"/>
+            </a:pPr>
+            <a:r>
+              <a:rPr lang="en-US" sz="1600" dirty="0">
+                <a:solidFill>
+                  <a:srgbClr val="393E46"/>
+                </a:solidFill>
+                <a:latin typeface="TH Sarabun New" pitchFamily="34" charset="0"/>
+                <a:ea typeface="TH Sarabun New" pitchFamily="34" charset="-122"/>
+                <a:cs typeface="TH Sarabun New" pitchFamily="34" charset="-120"/>
+              </a:rPr>
+              <a:t>สั่งแก้หน้าหนึ่ง สีเพี้ยนไปอีกหน้าหนึ่ง</a:t>
+            </a:r>
+            <a:endParaRPr lang="en-US" sz="1600" dirty="0"/>
+          </a:p>
+          <a:p>
+            <a:pPr marL="342900" indent="-342900">
+              <a:spcAft>
+                <a:spcPts val="700"/>
+              </a:spcAft>
+              <a:buSzPct val="100000"/>
+              <a:buChar char="•"/>
+            </a:pPr>
+            <a:r>
+              <a:rPr lang="en-US" sz="1600" dirty="0">
+                <a:solidFill>
+                  <a:srgbClr val="393E46"/>
+                </a:solidFill>
+                <a:latin typeface="TH Sarabun New" pitchFamily="34" charset="0"/>
+                <a:ea typeface="TH Sarabun New" pitchFamily="34" charset="-122"/>
+                <a:cs typeface="TH Sarabun New" pitchFamily="34" charset="-120"/>
+              </a:rPr>
+              <a:t>ภาษาไทยแสดงผลเพี้ยนเพราะฟอนต์ไม่รองรับ</a:t>
+            </a:r>
+            <a:endParaRPr lang="en-US" sz="1600" dirty="0"/>
+          </a:p>
+        </p:txBody>
+      </p:sp>
+      <p:sp>
+        <p:nvSpPr>
+          <p:cNvPr id="7" name="Shape 5"/>
+          <p:cNvSpPr/>
+          <p:nvPr/>
+        </p:nvSpPr>
+        <p:spPr>
+          <a:xfrm>
+            <a:off x="6263640" y="1417320"/>
+            <a:ext cx="5303520" cy="2286000"/>
+          </a:xfrm>
+          <a:prstGeom prst="roundRect">
+            <a:avLst>
+              <a:gd name="adj" fmla="val 3600"/>
+            </a:avLst>
+          </a:prstGeom>
+          <a:solidFill>
+            <a:srgbClr val="CCFBF1"/>
+          </a:solidFill>
+          <a:ln w="9525">
+            <a:solidFill>
+              <a:srgbClr val="CCFBF1"/>
+            </a:solidFill>
+            <a:prstDash val="solid"/>
+          </a:ln>
+          <a:effectLst>
+            <a:outerShdw blurRad="101600" dist="12700" dir="5400000" algn="bl" rotWithShape="0">
+              <a:srgbClr val="222831">
+                <a:alpha val="10000"/>
+              </a:srgbClr>
+            </a:outerShdw>
+          </a:effectLst>
+        </p:spPr>
+        <p:txBody>
+          <a:bodyPr/>
+          <a:lstStyle/>
+          <a:p>
+            <a:endParaRPr lang="en-TH"/>
+          </a:p>
+        </p:txBody>
+      </p:sp>
+      <p:sp>
+        <p:nvSpPr>
+          <p:cNvPr id="8" name="Text 6"/>
+          <p:cNvSpPr/>
+          <p:nvPr/>
+        </p:nvSpPr>
+        <p:spPr>
+          <a:xfrm>
+            <a:off x="6537960" y="1572768"/>
+            <a:ext cx="4754880" cy="347472"/>
+          </a:xfrm>
+          <a:prstGeom prst="rect">
+            <a:avLst/>
+          </a:prstGeom>
+          <a:noFill/>
+          <a:ln/>
+        </p:spPr>
+        <p:txBody>
+          <a:bodyPr wrap="square" lIns="0" tIns="0" rIns="0" bIns="0" rtlCol="0" anchor="ctr"/>
+          <a:lstStyle/>
+          <a:p>
+            <a:pPr marL="0" indent="0">
+              <a:buNone/>
+            </a:pPr>
+            <a:r>
+              <a:rPr lang="en-US" sz="2000" b="1" dirty="0">
+                <a:solidFill>
+                  <a:srgbClr val="0F766E"/>
+                </a:solidFill>
+                <a:latin typeface="TH Sarabun New" pitchFamily="34" charset="0"/>
+                <a:ea typeface="TH Sarabun New" pitchFamily="34" charset="-122"/>
+                <a:cs typeface="TH Sarabun New" pitchFamily="34" charset="-120"/>
+              </a:rPr>
+              <a:t>ถ้ากำหนดไว้ใน §4</a:t>
+            </a:r>
+            <a:endParaRPr lang="en-US" sz="2000" dirty="0"/>
+          </a:p>
+        </p:txBody>
+      </p:sp>
+      <p:sp>
+        <p:nvSpPr>
+          <p:cNvPr id="9" name="Text 7"/>
+          <p:cNvSpPr/>
+          <p:nvPr/>
+        </p:nvSpPr>
+        <p:spPr>
+          <a:xfrm>
+            <a:off x="6537960" y="1993392"/>
+            <a:ext cx="4754880" cy="1554480"/>
+          </a:xfrm>
+          <a:prstGeom prst="rect">
+            <a:avLst/>
+          </a:prstGeom>
+          <a:noFill/>
+          <a:ln/>
+        </p:spPr>
+        <p:txBody>
+          <a:bodyPr wrap="square" lIns="0" tIns="0" rIns="0" bIns="0" rtlCol="0" anchor="t"/>
+          <a:lstStyle/>
+          <a:p>
+            <a:pPr marL="342900" indent="-342900">
+              <a:spcAft>
+                <a:spcPts val="700"/>
+              </a:spcAft>
+              <a:buSzPct val="100000"/>
+              <a:buChar char="•"/>
+            </a:pPr>
+            <a:r>
+              <a:rPr lang="en-US" sz="1600" dirty="0">
+                <a:solidFill>
+                  <a:srgbClr val="393E46"/>
+                </a:solidFill>
+                <a:latin typeface="TH Sarabun New" pitchFamily="34" charset="0"/>
+                <a:ea typeface="TH Sarabun New" pitchFamily="34" charset="-122"/>
+                <a:cs typeface="TH Sarabun New" pitchFamily="34" charset="-120"/>
+              </a:rPr>
+              <a:t>ทุกหน้าใช้สีและฟอนต์ชุดเดียวกันโดยอัตโนมัติ</a:t>
+            </a:r>
+            <a:endParaRPr lang="en-US" sz="1600" dirty="0"/>
+          </a:p>
+          <a:p>
+            <a:pPr marL="342900" indent="-342900">
+              <a:spcAft>
+                <a:spcPts val="700"/>
+              </a:spcAft>
+              <a:buSzPct val="100000"/>
+              <a:buChar char="•"/>
+            </a:pPr>
+            <a:r>
+              <a:rPr lang="en-US" sz="1600" dirty="0">
+                <a:solidFill>
+                  <a:srgbClr val="393E46"/>
+                </a:solidFill>
+                <a:latin typeface="TH Sarabun New" pitchFamily="34" charset="0"/>
+                <a:ea typeface="TH Sarabun New" pitchFamily="34" charset="-122"/>
+                <a:cs typeface="TH Sarabun New" pitchFamily="34" charset="-120"/>
+              </a:rPr>
+              <a:t>เปลี่ยนสีทั้งระบบด้วยการแก้ไฟล์สเปกที่เดียว</a:t>
+            </a:r>
+            <a:endParaRPr lang="en-US" sz="1600" dirty="0"/>
+          </a:p>
+          <a:p>
+            <a:pPr marL="342900" indent="-342900">
+              <a:spcAft>
+                <a:spcPts val="700"/>
+              </a:spcAft>
+              <a:buSzPct val="100000"/>
+              <a:buChar char="•"/>
+            </a:pPr>
+            <a:r>
+              <a:rPr lang="en-US" sz="1600" dirty="0">
+                <a:solidFill>
+                  <a:srgbClr val="393E46"/>
+                </a:solidFill>
+                <a:latin typeface="TH Sarabun New" pitchFamily="34" charset="0"/>
+                <a:ea typeface="TH Sarabun New" pitchFamily="34" charset="-122"/>
+                <a:cs typeface="TH Sarabun New" pitchFamily="34" charset="-120"/>
+              </a:rPr>
+              <a:t>งานออกมาเป็นเอกลักษณ์ของเราเอง</a:t>
+            </a:r>
+            <a:endParaRPr lang="en-US" sz="1600" dirty="0"/>
+          </a:p>
+          <a:p>
+            <a:pPr marL="342900" indent="-342900">
+              <a:spcAft>
+                <a:spcPts val="700"/>
+              </a:spcAft>
+              <a:buSzPct val="100000"/>
+              <a:buChar char="•"/>
+            </a:pPr>
+            <a:r>
+              <a:rPr lang="en-US" sz="1600" dirty="0">
+                <a:solidFill>
+                  <a:srgbClr val="393E46"/>
+                </a:solidFill>
+                <a:latin typeface="TH Sarabun New" pitchFamily="34" charset="0"/>
+                <a:ea typeface="TH Sarabun New" pitchFamily="34" charset="-122"/>
+                <a:cs typeface="TH Sarabun New" pitchFamily="34" charset="-120"/>
+              </a:rPr>
+              <a:t>ภาษาไทยอ่านง่าย เพราะเลือกฟอนต์ที่รองรับ</a:t>
+            </a:r>
+            <a:endParaRPr lang="en-US" sz="1600" dirty="0"/>
+          </a:p>
+        </p:txBody>
+      </p:sp>
+      <p:sp>
+        <p:nvSpPr>
+          <p:cNvPr id="10" name="Text 8"/>
+          <p:cNvSpPr/>
+          <p:nvPr/>
+        </p:nvSpPr>
+        <p:spPr>
+          <a:xfrm>
+            <a:off x="594360" y="3931920"/>
+            <a:ext cx="10972800" cy="329184"/>
+          </a:xfrm>
+          <a:prstGeom prst="rect">
+            <a:avLst/>
+          </a:prstGeom>
+          <a:noFill/>
+          <a:ln/>
+        </p:spPr>
+        <p:txBody>
+          <a:bodyPr wrap="square" lIns="0" tIns="0" rIns="0" bIns="0" rtlCol="0" anchor="ctr"/>
+          <a:lstStyle/>
+          <a:p>
+            <a:pPr marL="0" indent="0">
+              <a:buNone/>
+            </a:pPr>
+            <a:r>
+              <a:rPr lang="en-US" sz="2000" b="1" dirty="0">
+                <a:solidFill>
+                  <a:srgbClr val="222831"/>
+                </a:solidFill>
+                <a:latin typeface="TH Sarabun New" pitchFamily="34" charset="0"/>
+                <a:ea typeface="TH Sarabun New" pitchFamily="34" charset="-122"/>
+                <a:cs typeface="TH Sarabun New" pitchFamily="34" charset="-120"/>
+              </a:rPr>
+              <a:t>สามสิ่งที่ต้องเลือกใน LAB 3</a:t>
+            </a:r>
+            <a:endParaRPr lang="en-US" sz="2000" dirty="0"/>
+          </a:p>
+        </p:txBody>
+      </p:sp>
+      <p:sp>
+        <p:nvSpPr>
+          <p:cNvPr id="11" name="Shape 9"/>
+          <p:cNvSpPr/>
+          <p:nvPr/>
+        </p:nvSpPr>
+        <p:spPr>
+          <a:xfrm>
+            <a:off x="594360" y="4343400"/>
+            <a:ext cx="3566160" cy="1097280"/>
+          </a:xfrm>
+          <a:prstGeom prst="roundRect">
+            <a:avLst>
+              <a:gd name="adj" fmla="val 7500"/>
+            </a:avLst>
+          </a:prstGeom>
+          <a:solidFill>
+            <a:srgbClr val="E8F6F7"/>
+          </a:solidFill>
+          <a:ln w="9525">
+            <a:solidFill>
+              <a:srgbClr val="E8F6F7"/>
+            </a:solidFill>
+            <a:prstDash val="solid"/>
+          </a:ln>
+          <a:effectLst>
+            <a:outerShdw blurRad="101600" dist="12700" dir="5400000" algn="bl" rotWithShape="0">
+              <a:srgbClr val="222831">
+                <a:alpha val="10000"/>
+              </a:srgbClr>
+            </a:outerShdw>
+          </a:effectLst>
+        </p:spPr>
+        <p:txBody>
+          <a:bodyPr/>
+          <a:lstStyle/>
+          <a:p>
+            <a:endParaRPr lang="en-TH"/>
+          </a:p>
+        </p:txBody>
+      </p:sp>
+      <p:sp>
+        <p:nvSpPr>
+          <p:cNvPr id="12" name="Shape 10"/>
+          <p:cNvSpPr/>
+          <p:nvPr/>
+        </p:nvSpPr>
+        <p:spPr>
+          <a:xfrm>
+            <a:off x="850392" y="4617720"/>
+            <a:ext cx="384048" cy="384048"/>
+          </a:xfrm>
+          <a:prstGeom prst="ellipse">
+            <a:avLst/>
+          </a:prstGeom>
+          <a:solidFill>
+            <a:srgbClr val="00ADB5"/>
+          </a:solidFill>
+          <a:ln w="12700">
+            <a:solidFill>
+              <a:srgbClr val="00ADB5"/>
+            </a:solidFill>
+            <a:prstDash val="solid"/>
+          </a:ln>
+        </p:spPr>
+        <p:txBody>
+          <a:bodyPr/>
+          <a:lstStyle/>
+          <a:p>
+            <a:endParaRPr lang="en-TH"/>
+          </a:p>
+        </p:txBody>
+      </p:sp>
+      <p:sp>
+        <p:nvSpPr>
+          <p:cNvPr id="13" name="Text 11"/>
+          <p:cNvSpPr/>
+          <p:nvPr/>
+        </p:nvSpPr>
+        <p:spPr>
+          <a:xfrm>
+            <a:off x="850392" y="4617720"/>
+            <a:ext cx="384048" cy="384048"/>
+          </a:xfrm>
+          <a:prstGeom prst="rect">
+            <a:avLst/>
+          </a:prstGeom>
+          <a:noFill/>
+          <a:ln/>
+        </p:spPr>
+        <p:txBody>
+          <a:bodyPr wrap="square" lIns="0" tIns="0" rIns="0" bIns="0" rtlCol="0" anchor="ctr"/>
+          <a:lstStyle/>
+          <a:p>
+            <a:pPr marL="0" indent="0" algn="ctr">
+              <a:buNone/>
+            </a:pPr>
+            <a:r>
+              <a:rPr lang="en-US" sz="1500" b="1" dirty="0">
+                <a:solidFill>
+                  <a:srgbClr val="FFFFFF"/>
+                </a:solidFill>
+                <a:latin typeface="TH Sarabun New" pitchFamily="34" charset="0"/>
+                <a:ea typeface="TH Sarabun New" pitchFamily="34" charset="-122"/>
+                <a:cs typeface="TH Sarabun New" pitchFamily="34" charset="-120"/>
+              </a:rPr>
+              <a:t>1</a:t>
+            </a:r>
+            <a:endParaRPr lang="en-US" sz="1500" dirty="0"/>
+          </a:p>
+        </p:txBody>
+      </p:sp>
+      <p:sp>
+        <p:nvSpPr>
+          <p:cNvPr id="14" name="Text 12"/>
+          <p:cNvSpPr/>
+          <p:nvPr/>
+        </p:nvSpPr>
+        <p:spPr>
+          <a:xfrm>
+            <a:off x="1380744" y="4526280"/>
+            <a:ext cx="2560320" cy="329184"/>
+          </a:xfrm>
+          <a:prstGeom prst="rect">
+            <a:avLst/>
+          </a:prstGeom>
+          <a:noFill/>
+          <a:ln/>
+        </p:spPr>
+        <p:txBody>
+          <a:bodyPr wrap="square" lIns="0" tIns="0" rIns="0" bIns="0" rtlCol="0" anchor="ctr"/>
+          <a:lstStyle/>
+          <a:p>
+            <a:pPr marL="0" indent="0">
+              <a:buNone/>
+            </a:pPr>
+            <a:r>
+              <a:rPr lang="en-US" sz="1900" b="1" dirty="0">
+                <a:solidFill>
+                  <a:srgbClr val="222831"/>
+                </a:solidFill>
+                <a:latin typeface="TH Sarabun New" pitchFamily="34" charset="0"/>
+                <a:ea typeface="TH Sarabun New" pitchFamily="34" charset="-122"/>
+                <a:cs typeface="TH Sarabun New" pitchFamily="34" charset="-120"/>
+              </a:rPr>
+              <a:t>สไตล์</a:t>
+            </a:r>
+            <a:endParaRPr lang="en-US" sz="1900" dirty="0"/>
+          </a:p>
+        </p:txBody>
+      </p:sp>
+      <p:sp>
+        <p:nvSpPr>
+          <p:cNvPr id="15" name="Text 13"/>
+          <p:cNvSpPr/>
+          <p:nvPr/>
+        </p:nvSpPr>
+        <p:spPr>
+          <a:xfrm>
+            <a:off x="1380744" y="4864608"/>
+            <a:ext cx="2560320" cy="310896"/>
+          </a:xfrm>
+          <a:prstGeom prst="rect">
+            <a:avLst/>
+          </a:prstGeom>
+          <a:noFill/>
+          <a:ln/>
+        </p:spPr>
+        <p:txBody>
+          <a:bodyPr wrap="square" lIns="0" tIns="0" rIns="0" bIns="0" rtlCol="0" anchor="ctr"/>
+          <a:lstStyle/>
+          <a:p>
+            <a:pPr marL="0" indent="0">
+              <a:buNone/>
+            </a:pPr>
+            <a:r>
+              <a:rPr lang="en-US" sz="1150" dirty="0">
+                <a:solidFill>
+                  <a:srgbClr val="00ADB5"/>
+                </a:solidFill>
+                <a:latin typeface="Courier New" pitchFamily="34" charset="0"/>
+                <a:ea typeface="Courier New" pitchFamily="34" charset="-122"/>
+                <a:cs typeface="Courier New" pitchFamily="34" charset="-120"/>
+              </a:rPr>
+              <a:t>uistyleguide.com</a:t>
+            </a:r>
+            <a:endParaRPr lang="en-US" sz="1150" dirty="0"/>
+          </a:p>
+        </p:txBody>
+      </p:sp>
+      <p:sp>
+        <p:nvSpPr>
+          <p:cNvPr id="16" name="Shape 14"/>
+          <p:cNvSpPr/>
+          <p:nvPr/>
+        </p:nvSpPr>
+        <p:spPr>
+          <a:xfrm>
+            <a:off x="4297680" y="4343400"/>
+            <a:ext cx="3566160" cy="1097280"/>
+          </a:xfrm>
+          <a:prstGeom prst="roundRect">
+            <a:avLst>
+              <a:gd name="adj" fmla="val 7500"/>
+            </a:avLst>
+          </a:prstGeom>
+          <a:solidFill>
+            <a:srgbClr val="E8F6F7"/>
+          </a:solidFill>
+          <a:ln w="9525">
+            <a:solidFill>
+              <a:srgbClr val="E8F6F7"/>
+            </a:solidFill>
+            <a:prstDash val="solid"/>
+          </a:ln>
+          <a:effectLst>
+            <a:outerShdw blurRad="101600" dist="12700" dir="5400000" algn="bl" rotWithShape="0">
+              <a:srgbClr val="222831">
+                <a:alpha val="10000"/>
+              </a:srgbClr>
+            </a:outerShdw>
+          </a:effectLst>
+        </p:spPr>
+        <p:txBody>
+          <a:bodyPr/>
+          <a:lstStyle/>
+          <a:p>
+            <a:endParaRPr lang="en-TH"/>
+          </a:p>
+        </p:txBody>
+      </p:sp>
+      <p:sp>
+        <p:nvSpPr>
+          <p:cNvPr id="17" name="Shape 15"/>
+          <p:cNvSpPr/>
+          <p:nvPr/>
+        </p:nvSpPr>
+        <p:spPr>
+          <a:xfrm>
+            <a:off x="4553712" y="4617720"/>
+            <a:ext cx="384048" cy="384048"/>
+          </a:xfrm>
+          <a:prstGeom prst="ellipse">
+            <a:avLst/>
+          </a:prstGeom>
+          <a:solidFill>
+            <a:srgbClr val="00ADB5"/>
+          </a:solidFill>
+          <a:ln w="12700">
+            <a:solidFill>
+              <a:srgbClr val="00ADB5"/>
+            </a:solidFill>
+            <a:prstDash val="solid"/>
+          </a:ln>
+        </p:spPr>
+        <p:txBody>
+          <a:bodyPr/>
+          <a:lstStyle/>
+          <a:p>
+            <a:endParaRPr lang="en-TH"/>
+          </a:p>
+        </p:txBody>
+      </p:sp>
+      <p:sp>
+        <p:nvSpPr>
+          <p:cNvPr id="18" name="Text 16"/>
+          <p:cNvSpPr/>
+          <p:nvPr/>
+        </p:nvSpPr>
+        <p:spPr>
+          <a:xfrm>
+            <a:off x="4553712" y="4617720"/>
+            <a:ext cx="384048" cy="384048"/>
+          </a:xfrm>
+          <a:prstGeom prst="rect">
+            <a:avLst/>
+          </a:prstGeom>
+          <a:noFill/>
+          <a:ln/>
+        </p:spPr>
+        <p:txBody>
+          <a:bodyPr wrap="square" lIns="0" tIns="0" rIns="0" bIns="0" rtlCol="0" anchor="ctr"/>
+          <a:lstStyle/>
+          <a:p>
+            <a:pPr marL="0" indent="0" algn="ctr">
+              <a:buNone/>
+            </a:pPr>
+            <a:r>
+              <a:rPr lang="en-US" sz="1500" b="1" dirty="0">
+                <a:solidFill>
+                  <a:srgbClr val="FFFFFF"/>
+                </a:solidFill>
+                <a:latin typeface="TH Sarabun New" pitchFamily="34" charset="0"/>
+                <a:ea typeface="TH Sarabun New" pitchFamily="34" charset="-122"/>
+                <a:cs typeface="TH Sarabun New" pitchFamily="34" charset="-120"/>
+              </a:rPr>
+              <a:t>2</a:t>
+            </a:r>
+            <a:endParaRPr lang="en-US" sz="1500" dirty="0"/>
+          </a:p>
+        </p:txBody>
+      </p:sp>
+      <p:sp>
+        <p:nvSpPr>
+          <p:cNvPr id="19" name="Text 17"/>
+          <p:cNvSpPr/>
+          <p:nvPr/>
+        </p:nvSpPr>
+        <p:spPr>
+          <a:xfrm>
+            <a:off x="5084064" y="4526280"/>
+            <a:ext cx="2560320" cy="329184"/>
+          </a:xfrm>
+          <a:prstGeom prst="rect">
+            <a:avLst/>
+          </a:prstGeom>
+          <a:noFill/>
+          <a:ln/>
+        </p:spPr>
+        <p:txBody>
+          <a:bodyPr wrap="square" lIns="0" tIns="0" rIns="0" bIns="0" rtlCol="0" anchor="ctr"/>
+          <a:lstStyle/>
+          <a:p>
+            <a:pPr marL="0" indent="0">
+              <a:buNone/>
+            </a:pPr>
+            <a:r>
+              <a:rPr lang="en-US" sz="1900" b="1" dirty="0">
+                <a:solidFill>
+                  <a:srgbClr val="222831"/>
+                </a:solidFill>
+                <a:latin typeface="TH Sarabun New" pitchFamily="34" charset="0"/>
+                <a:ea typeface="TH Sarabun New" pitchFamily="34" charset="-122"/>
+                <a:cs typeface="TH Sarabun New" pitchFamily="34" charset="-120"/>
+              </a:rPr>
+              <a:t>จานสี</a:t>
+            </a:r>
+            <a:endParaRPr lang="en-US" sz="1900" dirty="0"/>
+          </a:p>
+        </p:txBody>
+      </p:sp>
+      <p:sp>
+        <p:nvSpPr>
+          <p:cNvPr id="20" name="Text 18"/>
+          <p:cNvSpPr/>
+          <p:nvPr/>
+        </p:nvSpPr>
+        <p:spPr>
+          <a:xfrm>
+            <a:off x="5084064" y="4864608"/>
+            <a:ext cx="2560320" cy="310896"/>
+          </a:xfrm>
+          <a:prstGeom prst="rect">
+            <a:avLst/>
+          </a:prstGeom>
+          <a:noFill/>
+          <a:ln/>
+        </p:spPr>
+        <p:txBody>
+          <a:bodyPr wrap="square" lIns="0" tIns="0" rIns="0" bIns="0" rtlCol="0" anchor="ctr"/>
+          <a:lstStyle/>
+          <a:p>
+            <a:pPr marL="0" indent="0">
+              <a:buNone/>
+            </a:pPr>
+            <a:r>
+              <a:rPr lang="en-US" sz="1150" dirty="0">
+                <a:solidFill>
+                  <a:srgbClr val="00ADB5"/>
+                </a:solidFill>
+                <a:latin typeface="Courier New" pitchFamily="34" charset="0"/>
+                <a:ea typeface="Courier New" pitchFamily="34" charset="-122"/>
+                <a:cs typeface="Courier New" pitchFamily="34" charset="-120"/>
+              </a:rPr>
+              <a:t>colorhunt.co</a:t>
+            </a:r>
+            <a:endParaRPr lang="en-US" sz="1150" dirty="0"/>
+          </a:p>
+        </p:txBody>
+      </p:sp>
+      <p:sp>
+        <p:nvSpPr>
+          <p:cNvPr id="21" name="Shape 19"/>
+          <p:cNvSpPr/>
+          <p:nvPr/>
+        </p:nvSpPr>
+        <p:spPr>
+          <a:xfrm>
+            <a:off x="8001000" y="4343400"/>
+            <a:ext cx="3566160" cy="1097280"/>
+          </a:xfrm>
+          <a:prstGeom prst="roundRect">
+            <a:avLst>
+              <a:gd name="adj" fmla="val 7500"/>
+            </a:avLst>
+          </a:prstGeom>
+          <a:solidFill>
+            <a:srgbClr val="E8F6F7"/>
+          </a:solidFill>
+          <a:ln w="9525">
+            <a:solidFill>
+              <a:srgbClr val="E8F6F7"/>
+            </a:solidFill>
+            <a:prstDash val="solid"/>
+          </a:ln>
+          <a:effectLst>
+            <a:outerShdw blurRad="101600" dist="12700" dir="5400000" algn="bl" rotWithShape="0">
+              <a:srgbClr val="222831">
+                <a:alpha val="10000"/>
+              </a:srgbClr>
+            </a:outerShdw>
+          </a:effectLst>
+        </p:spPr>
+        <p:txBody>
+          <a:bodyPr/>
+          <a:lstStyle/>
+          <a:p>
+            <a:endParaRPr lang="en-TH"/>
+          </a:p>
+        </p:txBody>
+      </p:sp>
+      <p:sp>
+        <p:nvSpPr>
+          <p:cNvPr id="22" name="Shape 20"/>
+          <p:cNvSpPr/>
+          <p:nvPr/>
+        </p:nvSpPr>
+        <p:spPr>
+          <a:xfrm>
+            <a:off x="8257032" y="4617720"/>
+            <a:ext cx="384048" cy="384048"/>
+          </a:xfrm>
+          <a:prstGeom prst="ellipse">
+            <a:avLst/>
+          </a:prstGeom>
+          <a:solidFill>
+            <a:srgbClr val="00ADB5"/>
+          </a:solidFill>
+          <a:ln w="12700">
+            <a:solidFill>
+              <a:srgbClr val="00ADB5"/>
+            </a:solidFill>
+            <a:prstDash val="solid"/>
+          </a:ln>
+        </p:spPr>
+        <p:txBody>
+          <a:bodyPr/>
+          <a:lstStyle/>
+          <a:p>
+            <a:endParaRPr lang="en-TH"/>
+          </a:p>
+        </p:txBody>
+      </p:sp>
+      <p:sp>
+        <p:nvSpPr>
+          <p:cNvPr id="23" name="Text 21"/>
+          <p:cNvSpPr/>
+          <p:nvPr/>
+        </p:nvSpPr>
+        <p:spPr>
+          <a:xfrm>
+            <a:off x="8257032" y="4617720"/>
+            <a:ext cx="384048" cy="384048"/>
+          </a:xfrm>
+          <a:prstGeom prst="rect">
+            <a:avLst/>
+          </a:prstGeom>
+          <a:noFill/>
+          <a:ln/>
+        </p:spPr>
+        <p:txBody>
+          <a:bodyPr wrap="square" lIns="0" tIns="0" rIns="0" bIns="0" rtlCol="0" anchor="ctr"/>
+          <a:lstStyle/>
+          <a:p>
+            <a:pPr marL="0" indent="0" algn="ctr">
+              <a:buNone/>
+            </a:pPr>
+            <a:r>
+              <a:rPr lang="en-US" sz="1500" b="1" dirty="0">
+                <a:solidFill>
+                  <a:srgbClr val="FFFFFF"/>
+                </a:solidFill>
+                <a:latin typeface="TH Sarabun New" pitchFamily="34" charset="0"/>
+                <a:ea typeface="TH Sarabun New" pitchFamily="34" charset="-122"/>
+                <a:cs typeface="TH Sarabun New" pitchFamily="34" charset="-120"/>
+              </a:rPr>
+              <a:t>3</a:t>
+            </a:r>
+            <a:endParaRPr lang="en-US" sz="1500" dirty="0"/>
+          </a:p>
+        </p:txBody>
+      </p:sp>
+      <p:sp>
+        <p:nvSpPr>
+          <p:cNvPr id="24" name="Text 22"/>
+          <p:cNvSpPr/>
+          <p:nvPr/>
+        </p:nvSpPr>
+        <p:spPr>
+          <a:xfrm>
+            <a:off x="8787384" y="4526280"/>
+            <a:ext cx="2560320" cy="329184"/>
+          </a:xfrm>
+          <a:prstGeom prst="rect">
+            <a:avLst/>
+          </a:prstGeom>
+          <a:noFill/>
+          <a:ln/>
+        </p:spPr>
+        <p:txBody>
+          <a:bodyPr wrap="square" lIns="0" tIns="0" rIns="0" bIns="0" rtlCol="0" anchor="ctr"/>
+          <a:lstStyle/>
+          <a:p>
+            <a:pPr marL="0" indent="0">
+              <a:buNone/>
+            </a:pPr>
+            <a:r>
+              <a:rPr lang="en-US" sz="1900" b="1" dirty="0">
+                <a:solidFill>
+                  <a:srgbClr val="222831"/>
+                </a:solidFill>
+                <a:latin typeface="TH Sarabun New" pitchFamily="34" charset="0"/>
+                <a:ea typeface="TH Sarabun New" pitchFamily="34" charset="-122"/>
+                <a:cs typeface="TH Sarabun New" pitchFamily="34" charset="-120"/>
+              </a:rPr>
+              <a:t>ฟอนต์</a:t>
+            </a:r>
+            <a:endParaRPr lang="en-US" sz="1900" dirty="0"/>
+          </a:p>
+        </p:txBody>
+      </p:sp>
+      <p:sp>
+        <p:nvSpPr>
+          <p:cNvPr id="25" name="Text 23"/>
+          <p:cNvSpPr/>
+          <p:nvPr/>
+        </p:nvSpPr>
+        <p:spPr>
+          <a:xfrm>
+            <a:off x="8787384" y="4864608"/>
+            <a:ext cx="2560320" cy="310896"/>
+          </a:xfrm>
+          <a:prstGeom prst="rect">
+            <a:avLst/>
+          </a:prstGeom>
+          <a:noFill/>
+          <a:ln/>
+        </p:spPr>
+        <p:txBody>
+          <a:bodyPr wrap="square" lIns="0" tIns="0" rIns="0" bIns="0" rtlCol="0" anchor="ctr"/>
+          <a:lstStyle/>
+          <a:p>
+            <a:pPr marL="0" indent="0">
+              <a:buNone/>
+            </a:pPr>
+            <a:r>
+              <a:rPr lang="en-US" sz="1150" dirty="0">
+                <a:solidFill>
+                  <a:srgbClr val="00ADB5"/>
+                </a:solidFill>
+                <a:latin typeface="Courier New" pitchFamily="34" charset="0"/>
+                <a:ea typeface="Courier New" pitchFamily="34" charset="-122"/>
+                <a:cs typeface="Courier New" pitchFamily="34" charset="-120"/>
+              </a:rPr>
+              <a:t>fonts.google.com</a:t>
+            </a:r>
+            <a:endParaRPr lang="en-US" sz="1150" dirty="0"/>
           </a:p>
         </p:txBody>
       </p:sp>
@@ -11505,1098 +11339,6 @@
 
 <file path=ppt/slides/slide20.xml><?xml version="1.0" encoding="utf-8"?>
 <p:sld xmlns:a="http://schemas.openxmlformats.org/drawingml/2006/main" xmlns:r="http://schemas.openxmlformats.org/officeDocument/2006/relationships" xmlns:p="http://schemas.openxmlformats.org/presentationml/2006/main">
-  <p:cSld name="Slide 24">
-    <p:bg>
-      <p:bgPr>
-        <a:solidFill>
-          <a:srgbClr val="FFFFFF"/>
-        </a:solidFill>
-        <a:effectLst/>
-      </p:bgPr>
-    </p:bg>
-    <p:spTree>
-      <p:nvGrpSpPr>
-        <p:cNvPr id="1" name=""/>
-        <p:cNvGrpSpPr/>
-        <p:nvPr/>
-      </p:nvGrpSpPr>
-      <p:grpSpPr>
-        <a:xfrm>
-          <a:off x="0" y="0"/>
-          <a:ext cx="0" cy="0"/>
-          <a:chOff x="0" y="0"/>
-          <a:chExt cx="0" cy="0"/>
-        </a:xfrm>
-      </p:grpSpPr>
-      <p:sp>
-        <p:nvSpPr>
-          <p:cNvPr id="2" name="Text 0"/>
-          <p:cNvSpPr/>
-          <p:nvPr/>
-        </p:nvSpPr>
-        <p:spPr>
-          <a:xfrm>
-            <a:off x="11018520" y="6263640"/>
-            <a:ext cx="548640" cy="274320"/>
-          </a:xfrm>
-          <a:prstGeom prst="rect">
-            <a:avLst/>
-          </a:prstGeom>
-          <a:noFill/>
-          <a:ln/>
-        </p:spPr>
-        <p:txBody>
-          <a:bodyPr wrap="square" lIns="0" tIns="0" rIns="0" bIns="0" rtlCol="0" anchor="ctr"/>
-          <a:lstStyle/>
-          <a:p>
-            <a:pPr marL="0" indent="0" algn="r">
-              <a:buNone/>
-            </a:pPr>
-            <a:r>
-              <a:rPr lang="en-US" sz="1200" dirty="0">
-                <a:solidFill>
-                  <a:srgbClr val="9AA3AD"/>
-                </a:solidFill>
-                <a:latin typeface="TH Sarabun New" pitchFamily="34" charset="0"/>
-                <a:ea typeface="TH Sarabun New" pitchFamily="34" charset="-122"/>
-                <a:cs typeface="TH Sarabun New" pitchFamily="34" charset="-120"/>
-              </a:rPr>
-              <a:t>24</a:t>
-            </a:r>
-            <a:endParaRPr lang="en-US" sz="1200" dirty="0"/>
-          </a:p>
-        </p:txBody>
-      </p:sp>
-      <p:sp>
-        <p:nvSpPr>
-          <p:cNvPr id="3" name="Text 1"/>
-          <p:cNvSpPr/>
-          <p:nvPr/>
-        </p:nvSpPr>
-        <p:spPr>
-          <a:xfrm>
-            <a:off x="594360" y="329184"/>
-            <a:ext cx="10972800" cy="566928"/>
-          </a:xfrm>
-          <a:prstGeom prst="rect">
-            <a:avLst/>
-          </a:prstGeom>
-          <a:noFill/>
-          <a:ln/>
-        </p:spPr>
-        <p:txBody>
-          <a:bodyPr wrap="square" lIns="0" tIns="0" rIns="0" bIns="0" rtlCol="0" anchor="ctr"/>
-          <a:lstStyle/>
-          <a:p>
-            <a:pPr marL="0" indent="0">
-              <a:buNone/>
-            </a:pPr>
-            <a:r>
-              <a:rPr lang="en-US" sz="3200" b="1" dirty="0">
-                <a:solidFill>
-                  <a:srgbClr val="222831"/>
-                </a:solidFill>
-                <a:latin typeface="TH Sarabun New" pitchFamily="34" charset="0"/>
-                <a:ea typeface="TH Sarabun New" pitchFamily="34" charset="-122"/>
-                <a:cs typeface="TH Sarabun New" pitchFamily="34" charset="-120"/>
-              </a:rPr>
-              <a:t>ทำไมต้องกำหนด Design System ก่อน</a:t>
-            </a:r>
-            <a:endParaRPr lang="en-US" sz="3200" dirty="0"/>
-          </a:p>
-        </p:txBody>
-      </p:sp>
-      <p:sp>
-        <p:nvSpPr>
-          <p:cNvPr id="4" name="Shape 2"/>
-          <p:cNvSpPr/>
-          <p:nvPr/>
-        </p:nvSpPr>
-        <p:spPr>
-          <a:xfrm>
-            <a:off x="594360" y="1417320"/>
-            <a:ext cx="5303520" cy="2286000"/>
-          </a:xfrm>
-          <a:prstGeom prst="roundRect">
-            <a:avLst>
-              <a:gd name="adj" fmla="val 3600"/>
-            </a:avLst>
-          </a:prstGeom>
-          <a:solidFill>
-            <a:srgbClr val="FEF2F2"/>
-          </a:solidFill>
-          <a:ln w="9525">
-            <a:solidFill>
-              <a:srgbClr val="FCA5A5"/>
-            </a:solidFill>
-            <a:prstDash val="solid"/>
-          </a:ln>
-          <a:effectLst>
-            <a:outerShdw blurRad="101600" dist="12700" dir="5400000" algn="bl" rotWithShape="0">
-              <a:srgbClr val="222831">
-                <a:alpha val="10000"/>
-              </a:srgbClr>
-            </a:outerShdw>
-          </a:effectLst>
-        </p:spPr>
-        <p:txBody>
-          <a:bodyPr/>
-          <a:lstStyle/>
-          <a:p>
-            <a:endParaRPr lang="en-TH"/>
-          </a:p>
-        </p:txBody>
-      </p:sp>
-      <p:sp>
-        <p:nvSpPr>
-          <p:cNvPr id="5" name="Text 3"/>
-          <p:cNvSpPr/>
-          <p:nvPr/>
-        </p:nvSpPr>
-        <p:spPr>
-          <a:xfrm>
-            <a:off x="868680" y="1572768"/>
-            <a:ext cx="4754880" cy="347472"/>
-          </a:xfrm>
-          <a:prstGeom prst="rect">
-            <a:avLst/>
-          </a:prstGeom>
-          <a:noFill/>
-          <a:ln/>
-        </p:spPr>
-        <p:txBody>
-          <a:bodyPr wrap="square" lIns="0" tIns="0" rIns="0" bIns="0" rtlCol="0" anchor="ctr"/>
-          <a:lstStyle/>
-          <a:p>
-            <a:pPr marL="0" indent="0">
-              <a:buNone/>
-            </a:pPr>
-            <a:r>
-              <a:rPr lang="en-US" sz="2000" b="1" dirty="0">
-                <a:solidFill>
-                  <a:srgbClr val="DC2626"/>
-                </a:solidFill>
-                <a:latin typeface="TH Sarabun New" pitchFamily="34" charset="0"/>
-                <a:ea typeface="TH Sarabun New" pitchFamily="34" charset="-122"/>
-                <a:cs typeface="TH Sarabun New" pitchFamily="34" charset="-120"/>
-              </a:rPr>
-              <a:t>ถ้าไม่กำหนด</a:t>
-            </a:r>
-            <a:endParaRPr lang="en-US" sz="2000" dirty="0"/>
-          </a:p>
-        </p:txBody>
-      </p:sp>
-      <p:sp>
-        <p:nvSpPr>
-          <p:cNvPr id="6" name="Text 4"/>
-          <p:cNvSpPr/>
-          <p:nvPr/>
-        </p:nvSpPr>
-        <p:spPr>
-          <a:xfrm>
-            <a:off x="868680" y="1993392"/>
-            <a:ext cx="4754880" cy="1554480"/>
-          </a:xfrm>
-          <a:prstGeom prst="rect">
-            <a:avLst/>
-          </a:prstGeom>
-          <a:noFill/>
-          <a:ln/>
-        </p:spPr>
-        <p:txBody>
-          <a:bodyPr wrap="square" lIns="0" tIns="0" rIns="0" bIns="0" rtlCol="0" anchor="t"/>
-          <a:lstStyle/>
-          <a:p>
-            <a:pPr marL="342900" indent="-342900">
-              <a:spcAft>
-                <a:spcPts val="700"/>
-              </a:spcAft>
-              <a:buSzPct val="100000"/>
-              <a:buChar char="•"/>
-            </a:pPr>
-            <a:r>
-              <a:rPr lang="en-US" sz="1600" dirty="0">
-                <a:solidFill>
-                  <a:srgbClr val="393E46"/>
-                </a:solidFill>
-                <a:latin typeface="TH Sarabun New" pitchFamily="34" charset="0"/>
-                <a:ea typeface="TH Sarabun New" pitchFamily="34" charset="-122"/>
-                <a:cs typeface="TH Sarabun New" pitchFamily="34" charset="-120"/>
-              </a:rPr>
-              <a:t>AI เลือกสีน้ำเงินและฟอนต์สากลให้ทุกครั้ง</a:t>
-            </a:r>
-            <a:endParaRPr lang="en-US" sz="1600" dirty="0"/>
-          </a:p>
-          <a:p>
-            <a:pPr marL="342900" indent="-342900">
-              <a:spcAft>
-                <a:spcPts val="700"/>
-              </a:spcAft>
-              <a:buSzPct val="100000"/>
-              <a:buChar char="•"/>
-            </a:pPr>
-            <a:r>
-              <a:rPr lang="en-US" sz="1600" dirty="0">
-                <a:solidFill>
-                  <a:srgbClr val="393E46"/>
-                </a:solidFill>
-                <a:latin typeface="TH Sarabun New" pitchFamily="34" charset="0"/>
-                <a:ea typeface="TH Sarabun New" pitchFamily="34" charset="-122"/>
-                <a:cs typeface="TH Sarabun New" pitchFamily="34" charset="-120"/>
-              </a:rPr>
-              <a:t>งานของผู้เข้าอบรมทุกคนหน้าตาเหมือนกันหมด</a:t>
-            </a:r>
-            <a:endParaRPr lang="en-US" sz="1600" dirty="0"/>
-          </a:p>
-          <a:p>
-            <a:pPr marL="342900" indent="-342900">
-              <a:spcAft>
-                <a:spcPts val="700"/>
-              </a:spcAft>
-              <a:buSzPct val="100000"/>
-              <a:buChar char="•"/>
-            </a:pPr>
-            <a:r>
-              <a:rPr lang="en-US" sz="1600" dirty="0">
-                <a:solidFill>
-                  <a:srgbClr val="393E46"/>
-                </a:solidFill>
-                <a:latin typeface="TH Sarabun New" pitchFamily="34" charset="0"/>
-                <a:ea typeface="TH Sarabun New" pitchFamily="34" charset="-122"/>
-                <a:cs typeface="TH Sarabun New" pitchFamily="34" charset="-120"/>
-              </a:rPr>
-              <a:t>สั่งแก้หน้าหนึ่ง สีเพี้ยนไปอีกหน้าหนึ่ง</a:t>
-            </a:r>
-            <a:endParaRPr lang="en-US" sz="1600" dirty="0"/>
-          </a:p>
-          <a:p>
-            <a:pPr marL="342900" indent="-342900">
-              <a:spcAft>
-                <a:spcPts val="700"/>
-              </a:spcAft>
-              <a:buSzPct val="100000"/>
-              <a:buChar char="•"/>
-            </a:pPr>
-            <a:r>
-              <a:rPr lang="en-US" sz="1600" dirty="0">
-                <a:solidFill>
-                  <a:srgbClr val="393E46"/>
-                </a:solidFill>
-                <a:latin typeface="TH Sarabun New" pitchFamily="34" charset="0"/>
-                <a:ea typeface="TH Sarabun New" pitchFamily="34" charset="-122"/>
-                <a:cs typeface="TH Sarabun New" pitchFamily="34" charset="-120"/>
-              </a:rPr>
-              <a:t>ภาษาไทยแสดงผลเพี้ยนเพราะฟอนต์ไม่รองรับ</a:t>
-            </a:r>
-            <a:endParaRPr lang="en-US" sz="1600" dirty="0"/>
-          </a:p>
-        </p:txBody>
-      </p:sp>
-      <p:sp>
-        <p:nvSpPr>
-          <p:cNvPr id="7" name="Shape 5"/>
-          <p:cNvSpPr/>
-          <p:nvPr/>
-        </p:nvSpPr>
-        <p:spPr>
-          <a:xfrm>
-            <a:off x="6263640" y="1417320"/>
-            <a:ext cx="5303520" cy="2286000"/>
-          </a:xfrm>
-          <a:prstGeom prst="roundRect">
-            <a:avLst>
-              <a:gd name="adj" fmla="val 3600"/>
-            </a:avLst>
-          </a:prstGeom>
-          <a:solidFill>
-            <a:srgbClr val="CCFBF1"/>
-          </a:solidFill>
-          <a:ln w="9525">
-            <a:solidFill>
-              <a:srgbClr val="CCFBF1"/>
-            </a:solidFill>
-            <a:prstDash val="solid"/>
-          </a:ln>
-          <a:effectLst>
-            <a:outerShdw blurRad="101600" dist="12700" dir="5400000" algn="bl" rotWithShape="0">
-              <a:srgbClr val="222831">
-                <a:alpha val="10000"/>
-              </a:srgbClr>
-            </a:outerShdw>
-          </a:effectLst>
-        </p:spPr>
-        <p:txBody>
-          <a:bodyPr/>
-          <a:lstStyle/>
-          <a:p>
-            <a:endParaRPr lang="en-TH"/>
-          </a:p>
-        </p:txBody>
-      </p:sp>
-      <p:sp>
-        <p:nvSpPr>
-          <p:cNvPr id="8" name="Text 6"/>
-          <p:cNvSpPr/>
-          <p:nvPr/>
-        </p:nvSpPr>
-        <p:spPr>
-          <a:xfrm>
-            <a:off x="6537960" y="1572768"/>
-            <a:ext cx="4754880" cy="347472"/>
-          </a:xfrm>
-          <a:prstGeom prst="rect">
-            <a:avLst/>
-          </a:prstGeom>
-          <a:noFill/>
-          <a:ln/>
-        </p:spPr>
-        <p:txBody>
-          <a:bodyPr wrap="square" lIns="0" tIns="0" rIns="0" bIns="0" rtlCol="0" anchor="ctr"/>
-          <a:lstStyle/>
-          <a:p>
-            <a:pPr marL="0" indent="0">
-              <a:buNone/>
-            </a:pPr>
-            <a:r>
-              <a:rPr lang="en-US" sz="2000" b="1" dirty="0">
-                <a:solidFill>
-                  <a:srgbClr val="0F766E"/>
-                </a:solidFill>
-                <a:latin typeface="TH Sarabun New" pitchFamily="34" charset="0"/>
-                <a:ea typeface="TH Sarabun New" pitchFamily="34" charset="-122"/>
-                <a:cs typeface="TH Sarabun New" pitchFamily="34" charset="-120"/>
-              </a:rPr>
-              <a:t>ถ้ากำหนดไว้ใน §4</a:t>
-            </a:r>
-            <a:endParaRPr lang="en-US" sz="2000" dirty="0"/>
-          </a:p>
-        </p:txBody>
-      </p:sp>
-      <p:sp>
-        <p:nvSpPr>
-          <p:cNvPr id="9" name="Text 7"/>
-          <p:cNvSpPr/>
-          <p:nvPr/>
-        </p:nvSpPr>
-        <p:spPr>
-          <a:xfrm>
-            <a:off x="6537960" y="1993392"/>
-            <a:ext cx="4754880" cy="1554480"/>
-          </a:xfrm>
-          <a:prstGeom prst="rect">
-            <a:avLst/>
-          </a:prstGeom>
-          <a:noFill/>
-          <a:ln/>
-        </p:spPr>
-        <p:txBody>
-          <a:bodyPr wrap="square" lIns="0" tIns="0" rIns="0" bIns="0" rtlCol="0" anchor="t"/>
-          <a:lstStyle/>
-          <a:p>
-            <a:pPr marL="342900" indent="-342900">
-              <a:spcAft>
-                <a:spcPts val="700"/>
-              </a:spcAft>
-              <a:buSzPct val="100000"/>
-              <a:buChar char="•"/>
-            </a:pPr>
-            <a:r>
-              <a:rPr lang="en-US" sz="1600" dirty="0">
-                <a:solidFill>
-                  <a:srgbClr val="393E46"/>
-                </a:solidFill>
-                <a:latin typeface="TH Sarabun New" pitchFamily="34" charset="0"/>
-                <a:ea typeface="TH Sarabun New" pitchFamily="34" charset="-122"/>
-                <a:cs typeface="TH Sarabun New" pitchFamily="34" charset="-120"/>
-              </a:rPr>
-              <a:t>ทุกหน้าใช้สีและฟอนต์ชุดเดียวกันโดยอัตโนมัติ</a:t>
-            </a:r>
-            <a:endParaRPr lang="en-US" sz="1600" dirty="0"/>
-          </a:p>
-          <a:p>
-            <a:pPr marL="342900" indent="-342900">
-              <a:spcAft>
-                <a:spcPts val="700"/>
-              </a:spcAft>
-              <a:buSzPct val="100000"/>
-              <a:buChar char="•"/>
-            </a:pPr>
-            <a:r>
-              <a:rPr lang="en-US" sz="1600" dirty="0">
-                <a:solidFill>
-                  <a:srgbClr val="393E46"/>
-                </a:solidFill>
-                <a:latin typeface="TH Sarabun New" pitchFamily="34" charset="0"/>
-                <a:ea typeface="TH Sarabun New" pitchFamily="34" charset="-122"/>
-                <a:cs typeface="TH Sarabun New" pitchFamily="34" charset="-120"/>
-              </a:rPr>
-              <a:t>เปลี่ยนสีทั้งระบบด้วยการแก้ไฟล์สเปกที่เดียว</a:t>
-            </a:r>
-            <a:endParaRPr lang="en-US" sz="1600" dirty="0"/>
-          </a:p>
-          <a:p>
-            <a:pPr marL="342900" indent="-342900">
-              <a:spcAft>
-                <a:spcPts val="700"/>
-              </a:spcAft>
-              <a:buSzPct val="100000"/>
-              <a:buChar char="•"/>
-            </a:pPr>
-            <a:r>
-              <a:rPr lang="en-US" sz="1600" dirty="0">
-                <a:solidFill>
-                  <a:srgbClr val="393E46"/>
-                </a:solidFill>
-                <a:latin typeface="TH Sarabun New" pitchFamily="34" charset="0"/>
-                <a:ea typeface="TH Sarabun New" pitchFamily="34" charset="-122"/>
-                <a:cs typeface="TH Sarabun New" pitchFamily="34" charset="-120"/>
-              </a:rPr>
-              <a:t>งานออกมาเป็นเอกลักษณ์ของเราเอง</a:t>
-            </a:r>
-            <a:endParaRPr lang="en-US" sz="1600" dirty="0"/>
-          </a:p>
-          <a:p>
-            <a:pPr marL="342900" indent="-342900">
-              <a:spcAft>
-                <a:spcPts val="700"/>
-              </a:spcAft>
-              <a:buSzPct val="100000"/>
-              <a:buChar char="•"/>
-            </a:pPr>
-            <a:r>
-              <a:rPr lang="en-US" sz="1600" dirty="0">
-                <a:solidFill>
-                  <a:srgbClr val="393E46"/>
-                </a:solidFill>
-                <a:latin typeface="TH Sarabun New" pitchFamily="34" charset="0"/>
-                <a:ea typeface="TH Sarabun New" pitchFamily="34" charset="-122"/>
-                <a:cs typeface="TH Sarabun New" pitchFamily="34" charset="-120"/>
-              </a:rPr>
-              <a:t>ภาษาไทยอ่านง่าย เพราะเลือกฟอนต์ที่รองรับ</a:t>
-            </a:r>
-            <a:endParaRPr lang="en-US" sz="1600" dirty="0"/>
-          </a:p>
-        </p:txBody>
-      </p:sp>
-      <p:sp>
-        <p:nvSpPr>
-          <p:cNvPr id="10" name="Text 8"/>
-          <p:cNvSpPr/>
-          <p:nvPr/>
-        </p:nvSpPr>
-        <p:spPr>
-          <a:xfrm>
-            <a:off x="594360" y="3931920"/>
-            <a:ext cx="10972800" cy="329184"/>
-          </a:xfrm>
-          <a:prstGeom prst="rect">
-            <a:avLst/>
-          </a:prstGeom>
-          <a:noFill/>
-          <a:ln/>
-        </p:spPr>
-        <p:txBody>
-          <a:bodyPr wrap="square" lIns="0" tIns="0" rIns="0" bIns="0" rtlCol="0" anchor="ctr"/>
-          <a:lstStyle/>
-          <a:p>
-            <a:pPr marL="0" indent="0">
-              <a:buNone/>
-            </a:pPr>
-            <a:r>
-              <a:rPr lang="en-US" sz="2000" b="1" dirty="0">
-                <a:solidFill>
-                  <a:srgbClr val="222831"/>
-                </a:solidFill>
-                <a:latin typeface="TH Sarabun New" pitchFamily="34" charset="0"/>
-                <a:ea typeface="TH Sarabun New" pitchFamily="34" charset="-122"/>
-                <a:cs typeface="TH Sarabun New" pitchFamily="34" charset="-120"/>
-              </a:rPr>
-              <a:t>สามสิ่งที่ต้องเลือกใน LAB 3</a:t>
-            </a:r>
-            <a:endParaRPr lang="en-US" sz="2000" dirty="0"/>
-          </a:p>
-        </p:txBody>
-      </p:sp>
-      <p:sp>
-        <p:nvSpPr>
-          <p:cNvPr id="11" name="Shape 9"/>
-          <p:cNvSpPr/>
-          <p:nvPr/>
-        </p:nvSpPr>
-        <p:spPr>
-          <a:xfrm>
-            <a:off x="594360" y="4343400"/>
-            <a:ext cx="3566160" cy="1097280"/>
-          </a:xfrm>
-          <a:prstGeom prst="roundRect">
-            <a:avLst>
-              <a:gd name="adj" fmla="val 7500"/>
-            </a:avLst>
-          </a:prstGeom>
-          <a:solidFill>
-            <a:srgbClr val="E8F6F7"/>
-          </a:solidFill>
-          <a:ln w="9525">
-            <a:solidFill>
-              <a:srgbClr val="E8F6F7"/>
-            </a:solidFill>
-            <a:prstDash val="solid"/>
-          </a:ln>
-          <a:effectLst>
-            <a:outerShdw blurRad="101600" dist="12700" dir="5400000" algn="bl" rotWithShape="0">
-              <a:srgbClr val="222831">
-                <a:alpha val="10000"/>
-              </a:srgbClr>
-            </a:outerShdw>
-          </a:effectLst>
-        </p:spPr>
-        <p:txBody>
-          <a:bodyPr/>
-          <a:lstStyle/>
-          <a:p>
-            <a:endParaRPr lang="en-TH"/>
-          </a:p>
-        </p:txBody>
-      </p:sp>
-      <p:sp>
-        <p:nvSpPr>
-          <p:cNvPr id="12" name="Shape 10"/>
-          <p:cNvSpPr/>
-          <p:nvPr/>
-        </p:nvSpPr>
-        <p:spPr>
-          <a:xfrm>
-            <a:off x="850392" y="4617720"/>
-            <a:ext cx="384048" cy="384048"/>
-          </a:xfrm>
-          <a:prstGeom prst="ellipse">
-            <a:avLst/>
-          </a:prstGeom>
-          <a:solidFill>
-            <a:srgbClr val="00ADB5"/>
-          </a:solidFill>
-          <a:ln w="12700">
-            <a:solidFill>
-              <a:srgbClr val="00ADB5"/>
-            </a:solidFill>
-            <a:prstDash val="solid"/>
-          </a:ln>
-        </p:spPr>
-        <p:txBody>
-          <a:bodyPr/>
-          <a:lstStyle/>
-          <a:p>
-            <a:endParaRPr lang="en-TH"/>
-          </a:p>
-        </p:txBody>
-      </p:sp>
-      <p:sp>
-        <p:nvSpPr>
-          <p:cNvPr id="13" name="Text 11"/>
-          <p:cNvSpPr/>
-          <p:nvPr/>
-        </p:nvSpPr>
-        <p:spPr>
-          <a:xfrm>
-            <a:off x="850392" y="4617720"/>
-            <a:ext cx="384048" cy="384048"/>
-          </a:xfrm>
-          <a:prstGeom prst="rect">
-            <a:avLst/>
-          </a:prstGeom>
-          <a:noFill/>
-          <a:ln/>
-        </p:spPr>
-        <p:txBody>
-          <a:bodyPr wrap="square" lIns="0" tIns="0" rIns="0" bIns="0" rtlCol="0" anchor="ctr"/>
-          <a:lstStyle/>
-          <a:p>
-            <a:pPr marL="0" indent="0" algn="ctr">
-              <a:buNone/>
-            </a:pPr>
-            <a:r>
-              <a:rPr lang="en-US" sz="1500" b="1" dirty="0">
-                <a:solidFill>
-                  <a:srgbClr val="FFFFFF"/>
-                </a:solidFill>
-                <a:latin typeface="TH Sarabun New" pitchFamily="34" charset="0"/>
-                <a:ea typeface="TH Sarabun New" pitchFamily="34" charset="-122"/>
-                <a:cs typeface="TH Sarabun New" pitchFamily="34" charset="-120"/>
-              </a:rPr>
-              <a:t>1</a:t>
-            </a:r>
-            <a:endParaRPr lang="en-US" sz="1500" dirty="0"/>
-          </a:p>
-        </p:txBody>
-      </p:sp>
-      <p:sp>
-        <p:nvSpPr>
-          <p:cNvPr id="14" name="Text 12"/>
-          <p:cNvSpPr/>
-          <p:nvPr/>
-        </p:nvSpPr>
-        <p:spPr>
-          <a:xfrm>
-            <a:off x="1380744" y="4526280"/>
-            <a:ext cx="2560320" cy="329184"/>
-          </a:xfrm>
-          <a:prstGeom prst="rect">
-            <a:avLst/>
-          </a:prstGeom>
-          <a:noFill/>
-          <a:ln/>
-        </p:spPr>
-        <p:txBody>
-          <a:bodyPr wrap="square" lIns="0" tIns="0" rIns="0" bIns="0" rtlCol="0" anchor="ctr"/>
-          <a:lstStyle/>
-          <a:p>
-            <a:pPr marL="0" indent="0">
-              <a:buNone/>
-            </a:pPr>
-            <a:r>
-              <a:rPr lang="en-US" sz="1900" b="1" dirty="0">
-                <a:solidFill>
-                  <a:srgbClr val="222831"/>
-                </a:solidFill>
-                <a:latin typeface="TH Sarabun New" pitchFamily="34" charset="0"/>
-                <a:ea typeface="TH Sarabun New" pitchFamily="34" charset="-122"/>
-                <a:cs typeface="TH Sarabun New" pitchFamily="34" charset="-120"/>
-              </a:rPr>
-              <a:t>สไตล์</a:t>
-            </a:r>
-            <a:endParaRPr lang="en-US" sz="1900" dirty="0"/>
-          </a:p>
-        </p:txBody>
-      </p:sp>
-      <p:sp>
-        <p:nvSpPr>
-          <p:cNvPr id="15" name="Text 13"/>
-          <p:cNvSpPr/>
-          <p:nvPr/>
-        </p:nvSpPr>
-        <p:spPr>
-          <a:xfrm>
-            <a:off x="1380744" y="4864608"/>
-            <a:ext cx="2560320" cy="310896"/>
-          </a:xfrm>
-          <a:prstGeom prst="rect">
-            <a:avLst/>
-          </a:prstGeom>
-          <a:noFill/>
-          <a:ln/>
-        </p:spPr>
-        <p:txBody>
-          <a:bodyPr wrap="square" lIns="0" tIns="0" rIns="0" bIns="0" rtlCol="0" anchor="ctr"/>
-          <a:lstStyle/>
-          <a:p>
-            <a:pPr marL="0" indent="0">
-              <a:buNone/>
-            </a:pPr>
-            <a:r>
-              <a:rPr lang="en-US" sz="1150" dirty="0">
-                <a:solidFill>
-                  <a:srgbClr val="00ADB5"/>
-                </a:solidFill>
-                <a:latin typeface="Courier New" pitchFamily="34" charset="0"/>
-                <a:ea typeface="Courier New" pitchFamily="34" charset="-122"/>
-                <a:cs typeface="Courier New" pitchFamily="34" charset="-120"/>
-              </a:rPr>
-              <a:t>uistyleguide.com</a:t>
-            </a:r>
-            <a:endParaRPr lang="en-US" sz="1150" dirty="0"/>
-          </a:p>
-        </p:txBody>
-      </p:sp>
-      <p:sp>
-        <p:nvSpPr>
-          <p:cNvPr id="16" name="Shape 14"/>
-          <p:cNvSpPr/>
-          <p:nvPr/>
-        </p:nvSpPr>
-        <p:spPr>
-          <a:xfrm>
-            <a:off x="4297680" y="4343400"/>
-            <a:ext cx="3566160" cy="1097280"/>
-          </a:xfrm>
-          <a:prstGeom prst="roundRect">
-            <a:avLst>
-              <a:gd name="adj" fmla="val 7500"/>
-            </a:avLst>
-          </a:prstGeom>
-          <a:solidFill>
-            <a:srgbClr val="E8F6F7"/>
-          </a:solidFill>
-          <a:ln w="9525">
-            <a:solidFill>
-              <a:srgbClr val="E8F6F7"/>
-            </a:solidFill>
-            <a:prstDash val="solid"/>
-          </a:ln>
-          <a:effectLst>
-            <a:outerShdw blurRad="101600" dist="12700" dir="5400000" algn="bl" rotWithShape="0">
-              <a:srgbClr val="222831">
-                <a:alpha val="10000"/>
-              </a:srgbClr>
-            </a:outerShdw>
-          </a:effectLst>
-        </p:spPr>
-        <p:txBody>
-          <a:bodyPr/>
-          <a:lstStyle/>
-          <a:p>
-            <a:endParaRPr lang="en-TH"/>
-          </a:p>
-        </p:txBody>
-      </p:sp>
-      <p:sp>
-        <p:nvSpPr>
-          <p:cNvPr id="17" name="Shape 15"/>
-          <p:cNvSpPr/>
-          <p:nvPr/>
-        </p:nvSpPr>
-        <p:spPr>
-          <a:xfrm>
-            <a:off x="4553712" y="4617720"/>
-            <a:ext cx="384048" cy="384048"/>
-          </a:xfrm>
-          <a:prstGeom prst="ellipse">
-            <a:avLst/>
-          </a:prstGeom>
-          <a:solidFill>
-            <a:srgbClr val="00ADB5"/>
-          </a:solidFill>
-          <a:ln w="12700">
-            <a:solidFill>
-              <a:srgbClr val="00ADB5"/>
-            </a:solidFill>
-            <a:prstDash val="solid"/>
-          </a:ln>
-        </p:spPr>
-        <p:txBody>
-          <a:bodyPr/>
-          <a:lstStyle/>
-          <a:p>
-            <a:endParaRPr lang="en-TH"/>
-          </a:p>
-        </p:txBody>
-      </p:sp>
-      <p:sp>
-        <p:nvSpPr>
-          <p:cNvPr id="18" name="Text 16"/>
-          <p:cNvSpPr/>
-          <p:nvPr/>
-        </p:nvSpPr>
-        <p:spPr>
-          <a:xfrm>
-            <a:off x="4553712" y="4617720"/>
-            <a:ext cx="384048" cy="384048"/>
-          </a:xfrm>
-          <a:prstGeom prst="rect">
-            <a:avLst/>
-          </a:prstGeom>
-          <a:noFill/>
-          <a:ln/>
-        </p:spPr>
-        <p:txBody>
-          <a:bodyPr wrap="square" lIns="0" tIns="0" rIns="0" bIns="0" rtlCol="0" anchor="ctr"/>
-          <a:lstStyle/>
-          <a:p>
-            <a:pPr marL="0" indent="0" algn="ctr">
-              <a:buNone/>
-            </a:pPr>
-            <a:r>
-              <a:rPr lang="en-US" sz="1500" b="1" dirty="0">
-                <a:solidFill>
-                  <a:srgbClr val="FFFFFF"/>
-                </a:solidFill>
-                <a:latin typeface="TH Sarabun New" pitchFamily="34" charset="0"/>
-                <a:ea typeface="TH Sarabun New" pitchFamily="34" charset="-122"/>
-                <a:cs typeface="TH Sarabun New" pitchFamily="34" charset="-120"/>
-              </a:rPr>
-              <a:t>2</a:t>
-            </a:r>
-            <a:endParaRPr lang="en-US" sz="1500" dirty="0"/>
-          </a:p>
-        </p:txBody>
-      </p:sp>
-      <p:sp>
-        <p:nvSpPr>
-          <p:cNvPr id="19" name="Text 17"/>
-          <p:cNvSpPr/>
-          <p:nvPr/>
-        </p:nvSpPr>
-        <p:spPr>
-          <a:xfrm>
-            <a:off x="5084064" y="4526280"/>
-            <a:ext cx="2560320" cy="329184"/>
-          </a:xfrm>
-          <a:prstGeom prst="rect">
-            <a:avLst/>
-          </a:prstGeom>
-          <a:noFill/>
-          <a:ln/>
-        </p:spPr>
-        <p:txBody>
-          <a:bodyPr wrap="square" lIns="0" tIns="0" rIns="0" bIns="0" rtlCol="0" anchor="ctr"/>
-          <a:lstStyle/>
-          <a:p>
-            <a:pPr marL="0" indent="0">
-              <a:buNone/>
-            </a:pPr>
-            <a:r>
-              <a:rPr lang="en-US" sz="1900" b="1" dirty="0">
-                <a:solidFill>
-                  <a:srgbClr val="222831"/>
-                </a:solidFill>
-                <a:latin typeface="TH Sarabun New" pitchFamily="34" charset="0"/>
-                <a:ea typeface="TH Sarabun New" pitchFamily="34" charset="-122"/>
-                <a:cs typeface="TH Sarabun New" pitchFamily="34" charset="-120"/>
-              </a:rPr>
-              <a:t>จานสี</a:t>
-            </a:r>
-            <a:endParaRPr lang="en-US" sz="1900" dirty="0"/>
-          </a:p>
-        </p:txBody>
-      </p:sp>
-      <p:sp>
-        <p:nvSpPr>
-          <p:cNvPr id="20" name="Text 18"/>
-          <p:cNvSpPr/>
-          <p:nvPr/>
-        </p:nvSpPr>
-        <p:spPr>
-          <a:xfrm>
-            <a:off x="5084064" y="4864608"/>
-            <a:ext cx="2560320" cy="310896"/>
-          </a:xfrm>
-          <a:prstGeom prst="rect">
-            <a:avLst/>
-          </a:prstGeom>
-          <a:noFill/>
-          <a:ln/>
-        </p:spPr>
-        <p:txBody>
-          <a:bodyPr wrap="square" lIns="0" tIns="0" rIns="0" bIns="0" rtlCol="0" anchor="ctr"/>
-          <a:lstStyle/>
-          <a:p>
-            <a:pPr marL="0" indent="0">
-              <a:buNone/>
-            </a:pPr>
-            <a:r>
-              <a:rPr lang="en-US" sz="1150" dirty="0">
-                <a:solidFill>
-                  <a:srgbClr val="00ADB5"/>
-                </a:solidFill>
-                <a:latin typeface="Courier New" pitchFamily="34" charset="0"/>
-                <a:ea typeface="Courier New" pitchFamily="34" charset="-122"/>
-                <a:cs typeface="Courier New" pitchFamily="34" charset="-120"/>
-              </a:rPr>
-              <a:t>colorhunt.co</a:t>
-            </a:r>
-            <a:endParaRPr lang="en-US" sz="1150" dirty="0"/>
-          </a:p>
-        </p:txBody>
-      </p:sp>
-      <p:sp>
-        <p:nvSpPr>
-          <p:cNvPr id="21" name="Shape 19"/>
-          <p:cNvSpPr/>
-          <p:nvPr/>
-        </p:nvSpPr>
-        <p:spPr>
-          <a:xfrm>
-            <a:off x="8001000" y="4343400"/>
-            <a:ext cx="3566160" cy="1097280"/>
-          </a:xfrm>
-          <a:prstGeom prst="roundRect">
-            <a:avLst>
-              <a:gd name="adj" fmla="val 7500"/>
-            </a:avLst>
-          </a:prstGeom>
-          <a:solidFill>
-            <a:srgbClr val="E8F6F7"/>
-          </a:solidFill>
-          <a:ln w="9525">
-            <a:solidFill>
-              <a:srgbClr val="E8F6F7"/>
-            </a:solidFill>
-            <a:prstDash val="solid"/>
-          </a:ln>
-          <a:effectLst>
-            <a:outerShdw blurRad="101600" dist="12700" dir="5400000" algn="bl" rotWithShape="0">
-              <a:srgbClr val="222831">
-                <a:alpha val="10000"/>
-              </a:srgbClr>
-            </a:outerShdw>
-          </a:effectLst>
-        </p:spPr>
-        <p:txBody>
-          <a:bodyPr/>
-          <a:lstStyle/>
-          <a:p>
-            <a:endParaRPr lang="en-TH"/>
-          </a:p>
-        </p:txBody>
-      </p:sp>
-      <p:sp>
-        <p:nvSpPr>
-          <p:cNvPr id="22" name="Shape 20"/>
-          <p:cNvSpPr/>
-          <p:nvPr/>
-        </p:nvSpPr>
-        <p:spPr>
-          <a:xfrm>
-            <a:off x="8257032" y="4617720"/>
-            <a:ext cx="384048" cy="384048"/>
-          </a:xfrm>
-          <a:prstGeom prst="ellipse">
-            <a:avLst/>
-          </a:prstGeom>
-          <a:solidFill>
-            <a:srgbClr val="00ADB5"/>
-          </a:solidFill>
-          <a:ln w="12700">
-            <a:solidFill>
-              <a:srgbClr val="00ADB5"/>
-            </a:solidFill>
-            <a:prstDash val="solid"/>
-          </a:ln>
-        </p:spPr>
-        <p:txBody>
-          <a:bodyPr/>
-          <a:lstStyle/>
-          <a:p>
-            <a:endParaRPr lang="en-TH"/>
-          </a:p>
-        </p:txBody>
-      </p:sp>
-      <p:sp>
-        <p:nvSpPr>
-          <p:cNvPr id="23" name="Text 21"/>
-          <p:cNvSpPr/>
-          <p:nvPr/>
-        </p:nvSpPr>
-        <p:spPr>
-          <a:xfrm>
-            <a:off x="8257032" y="4617720"/>
-            <a:ext cx="384048" cy="384048"/>
-          </a:xfrm>
-          <a:prstGeom prst="rect">
-            <a:avLst/>
-          </a:prstGeom>
-          <a:noFill/>
-          <a:ln/>
-        </p:spPr>
-        <p:txBody>
-          <a:bodyPr wrap="square" lIns="0" tIns="0" rIns="0" bIns="0" rtlCol="0" anchor="ctr"/>
-          <a:lstStyle/>
-          <a:p>
-            <a:pPr marL="0" indent="0" algn="ctr">
-              <a:buNone/>
-            </a:pPr>
-            <a:r>
-              <a:rPr lang="en-US" sz="1500" b="1" dirty="0">
-                <a:solidFill>
-                  <a:srgbClr val="FFFFFF"/>
-                </a:solidFill>
-                <a:latin typeface="TH Sarabun New" pitchFamily="34" charset="0"/>
-                <a:ea typeface="TH Sarabun New" pitchFamily="34" charset="-122"/>
-                <a:cs typeface="TH Sarabun New" pitchFamily="34" charset="-120"/>
-              </a:rPr>
-              <a:t>3</a:t>
-            </a:r>
-            <a:endParaRPr lang="en-US" sz="1500" dirty="0"/>
-          </a:p>
-        </p:txBody>
-      </p:sp>
-      <p:sp>
-        <p:nvSpPr>
-          <p:cNvPr id="24" name="Text 22"/>
-          <p:cNvSpPr/>
-          <p:nvPr/>
-        </p:nvSpPr>
-        <p:spPr>
-          <a:xfrm>
-            <a:off x="8787384" y="4526280"/>
-            <a:ext cx="2560320" cy="329184"/>
-          </a:xfrm>
-          <a:prstGeom prst="rect">
-            <a:avLst/>
-          </a:prstGeom>
-          <a:noFill/>
-          <a:ln/>
-        </p:spPr>
-        <p:txBody>
-          <a:bodyPr wrap="square" lIns="0" tIns="0" rIns="0" bIns="0" rtlCol="0" anchor="ctr"/>
-          <a:lstStyle/>
-          <a:p>
-            <a:pPr marL="0" indent="0">
-              <a:buNone/>
-            </a:pPr>
-            <a:r>
-              <a:rPr lang="en-US" sz="1900" b="1" dirty="0">
-                <a:solidFill>
-                  <a:srgbClr val="222831"/>
-                </a:solidFill>
-                <a:latin typeface="TH Sarabun New" pitchFamily="34" charset="0"/>
-                <a:ea typeface="TH Sarabun New" pitchFamily="34" charset="-122"/>
-                <a:cs typeface="TH Sarabun New" pitchFamily="34" charset="-120"/>
-              </a:rPr>
-              <a:t>ฟอนต์</a:t>
-            </a:r>
-            <a:endParaRPr lang="en-US" sz="1900" dirty="0"/>
-          </a:p>
-        </p:txBody>
-      </p:sp>
-      <p:sp>
-        <p:nvSpPr>
-          <p:cNvPr id="25" name="Text 23"/>
-          <p:cNvSpPr/>
-          <p:nvPr/>
-        </p:nvSpPr>
-        <p:spPr>
-          <a:xfrm>
-            <a:off x="8787384" y="4864608"/>
-            <a:ext cx="2560320" cy="310896"/>
-          </a:xfrm>
-          <a:prstGeom prst="rect">
-            <a:avLst/>
-          </a:prstGeom>
-          <a:noFill/>
-          <a:ln/>
-        </p:spPr>
-        <p:txBody>
-          <a:bodyPr wrap="square" lIns="0" tIns="0" rIns="0" bIns="0" rtlCol="0" anchor="ctr"/>
-          <a:lstStyle/>
-          <a:p>
-            <a:pPr marL="0" indent="0">
-              <a:buNone/>
-            </a:pPr>
-            <a:r>
-              <a:rPr lang="en-US" sz="1150" dirty="0">
-                <a:solidFill>
-                  <a:srgbClr val="00ADB5"/>
-                </a:solidFill>
-                <a:latin typeface="Courier New" pitchFamily="34" charset="0"/>
-                <a:ea typeface="Courier New" pitchFamily="34" charset="-122"/>
-                <a:cs typeface="Courier New" pitchFamily="34" charset="-120"/>
-              </a:rPr>
-              <a:t>fonts.google.com</a:t>
-            </a:r>
-            <a:endParaRPr lang="en-US" sz="1150" dirty="0"/>
-          </a:p>
-        </p:txBody>
-      </p:sp>
-    </p:spTree>
-  </p:cSld>
-  <p:clrMapOvr>
-    <a:masterClrMapping/>
-  </p:clrMapOvr>
-</p:sld>
-</file>
-
-<file path=ppt/slides/slide21.xml><?xml version="1.0" encoding="utf-8"?>
-<p:sld xmlns:a="http://schemas.openxmlformats.org/drawingml/2006/main" xmlns:r="http://schemas.openxmlformats.org/officeDocument/2006/relationships" xmlns:p="http://schemas.openxmlformats.org/presentationml/2006/main">
   <p:cSld name="Slide 25">
     <p:bg>
       <p:bgPr>
@@ -13868,7 +12610,7 @@
 </p:sld>
 </file>
 
-<file path=ppt/slides/slide22.xml><?xml version="1.0" encoding="utf-8"?>
+<file path=ppt/slides/slide21.xml><?xml version="1.0" encoding="utf-8"?>
 <p:sld xmlns:a="http://schemas.openxmlformats.org/drawingml/2006/main" xmlns:r="http://schemas.openxmlformats.org/officeDocument/2006/relationships" xmlns:p="http://schemas.openxmlformats.org/presentationml/2006/main">
   <p:cSld>
     <p:spTree>
@@ -14028,7 +12770,7 @@
 </p:sld>
 </file>
 
-<file path=ppt/slides/slide23.xml><?xml version="1.0" encoding="utf-8"?>
+<file path=ppt/slides/slide22.xml><?xml version="1.0" encoding="utf-8"?>
 <p:sld xmlns:a="http://schemas.openxmlformats.org/drawingml/2006/main" xmlns:r="http://schemas.openxmlformats.org/officeDocument/2006/relationships" xmlns:p="http://schemas.openxmlformats.org/presentationml/2006/main">
   <p:cSld name="Slide 26">
     <p:bg>
@@ -15496,7 +14238,7 @@
 </p:sld>
 </file>
 
-<file path=ppt/slides/slide24.xml><?xml version="1.0" encoding="utf-8"?>
+<file path=ppt/slides/slide23.xml><?xml version="1.0" encoding="utf-8"?>
 <p:sld xmlns:a="http://schemas.openxmlformats.org/drawingml/2006/main" xmlns:r="http://schemas.openxmlformats.org/officeDocument/2006/relationships" xmlns:p="http://schemas.openxmlformats.org/presentationml/2006/main">
   <p:cSld>
     <p:spTree>
@@ -15591,7 +14333,7 @@
 </p:sld>
 </file>
 
-<file path=ppt/slides/slide25.xml><?xml version="1.0" encoding="utf-8"?>
+<file path=ppt/slides/slide24.xml><?xml version="1.0" encoding="utf-8"?>
 <p:sld xmlns:a="http://schemas.openxmlformats.org/drawingml/2006/main" xmlns:r="http://schemas.openxmlformats.org/officeDocument/2006/relationships" xmlns:p="http://schemas.openxmlformats.org/presentationml/2006/main">
   <p:cSld name="Slide 27">
     <p:bg>
@@ -16980,7 +15722,7 @@
 </p:sld>
 </file>
 
-<file path=ppt/slides/slide26.xml><?xml version="1.0" encoding="utf-8"?>
+<file path=ppt/slides/slide25.xml><?xml version="1.0" encoding="utf-8"?>
 <p:sld xmlns:a="http://schemas.openxmlformats.org/drawingml/2006/main" xmlns:r="http://schemas.openxmlformats.org/officeDocument/2006/relationships" xmlns:p="http://schemas.openxmlformats.org/presentationml/2006/main">
   <p:cSld>
     <p:spTree>
@@ -17075,7 +15817,7 @@
 </p:sld>
 </file>
 
-<file path=ppt/slides/slide27.xml><?xml version="1.0" encoding="utf-8"?>
+<file path=ppt/slides/slide26.xml><?xml version="1.0" encoding="utf-8"?>
 <p:sld xmlns:a="http://schemas.openxmlformats.org/drawingml/2006/main" xmlns:r="http://schemas.openxmlformats.org/officeDocument/2006/relationships" xmlns:p="http://schemas.openxmlformats.org/presentationml/2006/main">
   <p:cSld name="Slide 29">
     <p:bg>
@@ -17296,7 +16038,7 @@
 </p:sld>
 </file>
 
-<file path=ppt/slides/slide28.xml><?xml version="1.0" encoding="utf-8"?>
+<file path=ppt/slides/slide27.xml><?xml version="1.0" encoding="utf-8"?>
 <p:sld xmlns:a="http://schemas.openxmlformats.org/drawingml/2006/main" xmlns:r="http://schemas.openxmlformats.org/officeDocument/2006/relationships" xmlns:p="http://schemas.openxmlformats.org/presentationml/2006/main">
   <p:cSld name="Slide 30">
     <p:bg>
@@ -18428,7 +17170,7 @@
 </p:sld>
 </file>
 
-<file path=ppt/slides/slide29.xml><?xml version="1.0" encoding="utf-8"?>
+<file path=ppt/slides/slide28.xml><?xml version="1.0" encoding="utf-8"?>
 <p:sld xmlns:a="http://schemas.openxmlformats.org/drawingml/2006/main" xmlns:r="http://schemas.openxmlformats.org/officeDocument/2006/relationships" xmlns:p="http://schemas.openxmlformats.org/presentationml/2006/main">
   <p:cSld>
     <p:spTree>
@@ -18500,1764 +17242,7 @@
 </p:sld>
 </file>
 
-<file path=ppt/slides/slide3.xml><?xml version="1.0" encoding="utf-8"?>
-<p:sld xmlns:a="http://schemas.openxmlformats.org/drawingml/2006/main" xmlns:r="http://schemas.openxmlformats.org/officeDocument/2006/relationships" xmlns:p="http://schemas.openxmlformats.org/presentationml/2006/main">
-  <p:cSld name="Slide 3">
-    <p:bg>
-      <p:bgPr>
-        <a:solidFill>
-          <a:srgbClr val="FFFFFF"/>
-        </a:solidFill>
-        <a:effectLst/>
-      </p:bgPr>
-    </p:bg>
-    <p:spTree>
-      <p:nvGrpSpPr>
-        <p:cNvPr id="1" name=""/>
-        <p:cNvGrpSpPr/>
-        <p:nvPr/>
-      </p:nvGrpSpPr>
-      <p:grpSpPr>
-        <a:xfrm>
-          <a:off x="0" y="0"/>
-          <a:ext cx="0" cy="0"/>
-          <a:chOff x="0" y="0"/>
-          <a:chExt cx="0" cy="0"/>
-        </a:xfrm>
-      </p:grpSpPr>
-      <p:sp>
-        <p:nvSpPr>
-          <p:cNvPr id="2" name="Text 0"/>
-          <p:cNvSpPr/>
-          <p:nvPr/>
-        </p:nvSpPr>
-        <p:spPr>
-          <a:xfrm>
-            <a:off x="11018520" y="6263640"/>
-            <a:ext cx="548640" cy="274320"/>
-          </a:xfrm>
-          <a:prstGeom prst="rect">
-            <a:avLst/>
-          </a:prstGeom>
-          <a:noFill/>
-          <a:ln/>
-        </p:spPr>
-        <p:txBody>
-          <a:bodyPr wrap="square" lIns="0" tIns="0" rIns="0" bIns="0" rtlCol="0" anchor="ctr"/>
-          <a:lstStyle/>
-          <a:p>
-            <a:pPr marL="0" indent="0" algn="r">
-              <a:buNone/>
-            </a:pPr>
-            <a:r>
-              <a:rPr lang="en-US" sz="1200" dirty="0">
-                <a:solidFill>
-                  <a:srgbClr val="9AA3AD"/>
-                </a:solidFill>
-                <a:latin typeface="TH Sarabun New" pitchFamily="34" charset="0"/>
-                <a:ea typeface="TH Sarabun New" pitchFamily="34" charset="-122"/>
-                <a:cs typeface="TH Sarabun New" pitchFamily="34" charset="-120"/>
-              </a:rPr>
-              <a:t>3</a:t>
-            </a:r>
-            <a:endParaRPr lang="en-US" sz="1200" dirty="0"/>
-          </a:p>
-        </p:txBody>
-      </p:sp>
-      <p:sp>
-        <p:nvSpPr>
-          <p:cNvPr id="3" name="Text 1"/>
-          <p:cNvSpPr/>
-          <p:nvPr/>
-        </p:nvSpPr>
-        <p:spPr>
-          <a:xfrm>
-            <a:off x="594360" y="329184"/>
-            <a:ext cx="10972800" cy="566928"/>
-          </a:xfrm>
-          <a:prstGeom prst="rect">
-            <a:avLst/>
-          </a:prstGeom>
-          <a:noFill/>
-          <a:ln/>
-        </p:spPr>
-        <p:txBody>
-          <a:bodyPr wrap="square" lIns="0" tIns="0" rIns="0" bIns="0" rtlCol="0" anchor="ctr"/>
-          <a:lstStyle/>
-          <a:p>
-            <a:pPr marL="0" indent="0">
-              <a:buNone/>
-            </a:pPr>
-            <a:r>
-              <a:rPr lang="en-US" sz="3200" b="1" dirty="0">
-                <a:solidFill>
-                  <a:srgbClr val="222831"/>
-                </a:solidFill>
-                <a:latin typeface="TH Sarabun New" pitchFamily="34" charset="0"/>
-                <a:ea typeface="TH Sarabun New" pitchFamily="34" charset="-122"/>
-                <a:cs typeface="TH Sarabun New" pitchFamily="34" charset="-120"/>
-              </a:rPr>
-              <a:t>กำหนดการ 3 ชั่วโมง 30 นาที</a:t>
-            </a:r>
-            <a:endParaRPr lang="en-US" sz="3200" dirty="0"/>
-          </a:p>
-        </p:txBody>
-      </p:sp>
-      <p:sp>
-        <p:nvSpPr>
-          <p:cNvPr id="4" name="Text 2"/>
-          <p:cNvSpPr/>
-          <p:nvPr/>
-        </p:nvSpPr>
-        <p:spPr>
-          <a:xfrm>
-            <a:off x="594360" y="896112"/>
-            <a:ext cx="10972800" cy="329184"/>
-          </a:xfrm>
-          <a:prstGeom prst="rect">
-            <a:avLst/>
-          </a:prstGeom>
-          <a:noFill/>
-          <a:ln/>
-        </p:spPr>
-        <p:txBody>
-          <a:bodyPr wrap="square" lIns="0" tIns="0" rIns="0" bIns="0" rtlCol="0" anchor="ctr"/>
-          <a:lstStyle/>
-          <a:p>
-            <a:pPr marL="0" indent="0">
-              <a:buNone/>
-            </a:pPr>
-            <a:r>
-              <a:rPr lang="en-US" sz="1700" dirty="0">
-                <a:solidFill>
-                  <a:srgbClr val="8A94A6"/>
-                </a:solidFill>
-                <a:latin typeface="TH Sarabun New" pitchFamily="34" charset="0"/>
-                <a:ea typeface="TH Sarabun New" pitchFamily="34" charset="-122"/>
-                <a:cs typeface="TH Sarabun New" pitchFamily="34" charset="-120"/>
-              </a:rPr>
-              <a:t>บรรยาย 110 นาที · ปฏิบัติ 100 นาที — แบ่งเป็น 3 แล็บ ต่อเนื่องกันเป็นเรื่องเดียว</a:t>
-            </a:r>
-            <a:endParaRPr lang="en-US" sz="1700" dirty="0"/>
-          </a:p>
-        </p:txBody>
-      </p:sp>
-      <p:sp>
-        <p:nvSpPr>
-          <p:cNvPr id="5" name="Shape 3"/>
-          <p:cNvSpPr/>
-          <p:nvPr/>
-        </p:nvSpPr>
-        <p:spPr>
-          <a:xfrm>
-            <a:off x="594360" y="1463040"/>
-            <a:ext cx="5303520" cy="475488"/>
-          </a:xfrm>
-          <a:prstGeom prst="roundRect">
-            <a:avLst>
-              <a:gd name="adj" fmla="val 13462"/>
-            </a:avLst>
-          </a:prstGeom>
-          <a:solidFill>
-            <a:srgbClr val="FFFFFF"/>
-          </a:solidFill>
-          <a:ln w="9525">
-            <a:solidFill>
-              <a:srgbClr val="E1E4E8"/>
-            </a:solidFill>
-            <a:prstDash val="solid"/>
-          </a:ln>
-        </p:spPr>
-        <p:txBody>
-          <a:bodyPr/>
-          <a:lstStyle/>
-          <a:p>
-            <a:endParaRPr lang="en-TH"/>
-          </a:p>
-        </p:txBody>
-      </p:sp>
-      <p:sp>
-        <p:nvSpPr>
-          <p:cNvPr id="6" name="Text 4"/>
-          <p:cNvSpPr/>
-          <p:nvPr/>
-        </p:nvSpPr>
-        <p:spPr>
-          <a:xfrm>
-            <a:off x="777240" y="1463040"/>
-            <a:ext cx="731520" cy="475488"/>
-          </a:xfrm>
-          <a:prstGeom prst="rect">
-            <a:avLst/>
-          </a:prstGeom>
-          <a:noFill/>
-          <a:ln/>
-        </p:spPr>
-        <p:txBody>
-          <a:bodyPr wrap="square" lIns="0" tIns="0" rIns="0" bIns="0" rtlCol="0" anchor="ctr"/>
-          <a:lstStyle/>
-          <a:p>
-            <a:pPr marL="0" indent="0">
-              <a:buNone/>
-            </a:pPr>
-            <a:r>
-              <a:rPr lang="en-US" sz="1550" b="1" dirty="0">
-                <a:solidFill>
-                  <a:srgbClr val="8A94A6"/>
-                </a:solidFill>
-                <a:latin typeface="TH Sarabun New" pitchFamily="34" charset="0"/>
-                <a:ea typeface="TH Sarabun New" pitchFamily="34" charset="-122"/>
-                <a:cs typeface="TH Sarabun New" pitchFamily="34" charset="-120"/>
-              </a:rPr>
-              <a:t>10 น.</a:t>
-            </a:r>
-            <a:endParaRPr lang="en-US" sz="1550" dirty="0"/>
-          </a:p>
-        </p:txBody>
-      </p:sp>
-      <p:sp>
-        <p:nvSpPr>
-          <p:cNvPr id="7" name="Text 5"/>
-          <p:cNvSpPr/>
-          <p:nvPr/>
-        </p:nvSpPr>
-        <p:spPr>
-          <a:xfrm>
-            <a:off x="1508760" y="1463040"/>
-            <a:ext cx="4297680" cy="475488"/>
-          </a:xfrm>
-          <a:prstGeom prst="rect">
-            <a:avLst/>
-          </a:prstGeom>
-          <a:noFill/>
-          <a:ln/>
-        </p:spPr>
-        <p:txBody>
-          <a:bodyPr wrap="square" lIns="0" tIns="0" rIns="0" bIns="0" rtlCol="0" anchor="ctr"/>
-          <a:lstStyle/>
-          <a:p>
-            <a:pPr marL="0" indent="0">
-              <a:buNone/>
-            </a:pPr>
-            <a:r>
-              <a:rPr lang="en-US" sz="1650" dirty="0">
-                <a:solidFill>
-                  <a:srgbClr val="393E46"/>
-                </a:solidFill>
-                <a:latin typeface="TH Sarabun New" pitchFamily="34" charset="0"/>
-                <a:ea typeface="TH Sarabun New" pitchFamily="34" charset="-122"/>
-                <a:cs typeface="TH Sarabun New" pitchFamily="34" charset="-120"/>
-              </a:rPr>
-              <a:t>เปิดการอบรม / ภาพรวม</a:t>
-            </a:r>
-            <a:endParaRPr lang="en-US" sz="1650" dirty="0"/>
-          </a:p>
-        </p:txBody>
-      </p:sp>
-      <p:sp>
-        <p:nvSpPr>
-          <p:cNvPr id="8" name="Shape 6"/>
-          <p:cNvSpPr/>
-          <p:nvPr/>
-        </p:nvSpPr>
-        <p:spPr>
-          <a:xfrm>
-            <a:off x="594360" y="2029968"/>
-            <a:ext cx="5303520" cy="475488"/>
-          </a:xfrm>
-          <a:prstGeom prst="roundRect">
-            <a:avLst>
-              <a:gd name="adj" fmla="val 13462"/>
-            </a:avLst>
-          </a:prstGeom>
-          <a:solidFill>
-            <a:srgbClr val="FFFFFF"/>
-          </a:solidFill>
-          <a:ln w="9525">
-            <a:solidFill>
-              <a:srgbClr val="E1E4E8"/>
-            </a:solidFill>
-            <a:prstDash val="solid"/>
-          </a:ln>
-        </p:spPr>
-        <p:txBody>
-          <a:bodyPr/>
-          <a:lstStyle/>
-          <a:p>
-            <a:endParaRPr lang="en-TH"/>
-          </a:p>
-        </p:txBody>
-      </p:sp>
-      <p:sp>
-        <p:nvSpPr>
-          <p:cNvPr id="9" name="Text 7"/>
-          <p:cNvSpPr/>
-          <p:nvPr/>
-        </p:nvSpPr>
-        <p:spPr>
-          <a:xfrm>
-            <a:off x="777240" y="2029968"/>
-            <a:ext cx="731520" cy="475488"/>
-          </a:xfrm>
-          <a:prstGeom prst="rect">
-            <a:avLst/>
-          </a:prstGeom>
-          <a:noFill/>
-          <a:ln/>
-        </p:spPr>
-        <p:txBody>
-          <a:bodyPr wrap="square" lIns="0" tIns="0" rIns="0" bIns="0" rtlCol="0" anchor="ctr"/>
-          <a:lstStyle/>
-          <a:p>
-            <a:pPr marL="0" indent="0">
-              <a:buNone/>
-            </a:pPr>
-            <a:r>
-              <a:rPr lang="en-US" sz="1550" b="1" dirty="0">
-                <a:solidFill>
-                  <a:srgbClr val="8A94A6"/>
-                </a:solidFill>
-                <a:latin typeface="TH Sarabun New" pitchFamily="34" charset="0"/>
-                <a:ea typeface="TH Sarabun New" pitchFamily="34" charset="-122"/>
-                <a:cs typeface="TH Sarabun New" pitchFamily="34" charset="-120"/>
-              </a:rPr>
-              <a:t>20 น.</a:t>
-            </a:r>
-            <a:endParaRPr lang="en-US" sz="1550" dirty="0"/>
-          </a:p>
-        </p:txBody>
-      </p:sp>
-      <p:sp>
-        <p:nvSpPr>
-          <p:cNvPr id="10" name="Text 8"/>
-          <p:cNvSpPr/>
-          <p:nvPr/>
-        </p:nvSpPr>
-        <p:spPr>
-          <a:xfrm>
-            <a:off x="1508760" y="2029968"/>
-            <a:ext cx="4297680" cy="475488"/>
-          </a:xfrm>
-          <a:prstGeom prst="rect">
-            <a:avLst/>
-          </a:prstGeom>
-          <a:noFill/>
-          <a:ln/>
-        </p:spPr>
-        <p:txBody>
-          <a:bodyPr wrap="square" lIns="0" tIns="0" rIns="0" bIns="0" rtlCol="0" anchor="ctr"/>
-          <a:lstStyle/>
-          <a:p>
-            <a:pPr marL="0" indent="0">
-              <a:buNone/>
-            </a:pPr>
-            <a:r>
-              <a:rPr lang="en-US" sz="1650" dirty="0">
-                <a:solidFill>
-                  <a:srgbClr val="393E46"/>
-                </a:solidFill>
-                <a:latin typeface="TH Sarabun New" pitchFamily="34" charset="0"/>
-                <a:ea typeface="TH Sarabun New" pitchFamily="34" charset="-122"/>
-                <a:cs typeface="TH Sarabun New" pitchFamily="34" charset="-120"/>
-              </a:rPr>
-              <a:t>พื้นฐาน Web Application</a:t>
-            </a:r>
-            <a:endParaRPr lang="en-US" sz="1650" dirty="0"/>
-          </a:p>
-        </p:txBody>
-      </p:sp>
-      <p:sp>
-        <p:nvSpPr>
-          <p:cNvPr id="11" name="Shape 9"/>
-          <p:cNvSpPr/>
-          <p:nvPr/>
-        </p:nvSpPr>
-        <p:spPr>
-          <a:xfrm>
-            <a:off x="594360" y="2596896"/>
-            <a:ext cx="5303520" cy="475488"/>
-          </a:xfrm>
-          <a:prstGeom prst="roundRect">
-            <a:avLst>
-              <a:gd name="adj" fmla="val 13462"/>
-            </a:avLst>
-          </a:prstGeom>
-          <a:solidFill>
-            <a:srgbClr val="E8F6F7"/>
-          </a:solidFill>
-          <a:ln w="9525">
-            <a:solidFill>
-              <a:srgbClr val="BEE7EA"/>
-            </a:solidFill>
-            <a:prstDash val="solid"/>
-          </a:ln>
-        </p:spPr>
-        <p:txBody>
-          <a:bodyPr/>
-          <a:lstStyle/>
-          <a:p>
-            <a:endParaRPr lang="en-TH"/>
-          </a:p>
-        </p:txBody>
-      </p:sp>
-      <p:sp>
-        <p:nvSpPr>
-          <p:cNvPr id="12" name="Text 10"/>
-          <p:cNvSpPr/>
-          <p:nvPr/>
-        </p:nvSpPr>
-        <p:spPr>
-          <a:xfrm>
-            <a:off x="777240" y="2596896"/>
-            <a:ext cx="731520" cy="475488"/>
-          </a:xfrm>
-          <a:prstGeom prst="rect">
-            <a:avLst/>
-          </a:prstGeom>
-          <a:noFill/>
-          <a:ln/>
-        </p:spPr>
-        <p:txBody>
-          <a:bodyPr wrap="square" lIns="0" tIns="0" rIns="0" bIns="0" rtlCol="0" anchor="ctr"/>
-          <a:lstStyle/>
-          <a:p>
-            <a:pPr marL="0" indent="0">
-              <a:buNone/>
-            </a:pPr>
-            <a:r>
-              <a:rPr lang="en-US" sz="1550" b="1" dirty="0">
-                <a:solidFill>
-                  <a:srgbClr val="00ADB5"/>
-                </a:solidFill>
-                <a:latin typeface="TH Sarabun New" pitchFamily="34" charset="0"/>
-                <a:ea typeface="TH Sarabun New" pitchFamily="34" charset="-122"/>
-                <a:cs typeface="TH Sarabun New" pitchFamily="34" charset="-120"/>
-              </a:rPr>
-              <a:t>10 น.</a:t>
-            </a:r>
-            <a:endParaRPr lang="en-US" sz="1550" dirty="0"/>
-          </a:p>
-        </p:txBody>
-      </p:sp>
-      <p:sp>
-        <p:nvSpPr>
-          <p:cNvPr id="13" name="Text 11"/>
-          <p:cNvSpPr/>
-          <p:nvPr/>
-        </p:nvSpPr>
-        <p:spPr>
-          <a:xfrm>
-            <a:off x="1508760" y="2596896"/>
-            <a:ext cx="4297680" cy="475488"/>
-          </a:xfrm>
-          <a:prstGeom prst="rect">
-            <a:avLst/>
-          </a:prstGeom>
-          <a:noFill/>
-          <a:ln/>
-        </p:spPr>
-        <p:txBody>
-          <a:bodyPr wrap="square" lIns="0" tIns="0" rIns="0" bIns="0" rtlCol="0" anchor="ctr"/>
-          <a:lstStyle/>
-          <a:p>
-            <a:pPr marL="0" indent="0">
-              <a:buNone/>
-            </a:pPr>
-            <a:r>
-              <a:rPr lang="en-US" sz="1650" b="1" dirty="0">
-                <a:solidFill>
-                  <a:srgbClr val="222831"/>
-                </a:solidFill>
-                <a:latin typeface="TH Sarabun New" pitchFamily="34" charset="0"/>
-                <a:ea typeface="TH Sarabun New" pitchFamily="34" charset="-122"/>
-                <a:cs typeface="TH Sarabun New" pitchFamily="34" charset="-120"/>
-              </a:rPr>
-              <a:t>LAB A · เตรียมเครื่องและเปิดโปรเจกต์</a:t>
-            </a:r>
-            <a:endParaRPr lang="en-US" sz="1650" dirty="0"/>
-          </a:p>
-        </p:txBody>
-      </p:sp>
-      <p:sp>
-        <p:nvSpPr>
-          <p:cNvPr id="14" name="Shape 12"/>
-          <p:cNvSpPr/>
-          <p:nvPr/>
-        </p:nvSpPr>
-        <p:spPr>
-          <a:xfrm>
-            <a:off x="594360" y="3163824"/>
-            <a:ext cx="5303520" cy="475488"/>
-          </a:xfrm>
-          <a:prstGeom prst="roundRect">
-            <a:avLst>
-              <a:gd name="adj" fmla="val 13462"/>
-            </a:avLst>
-          </a:prstGeom>
-          <a:solidFill>
-            <a:srgbClr val="FFFFFF"/>
-          </a:solidFill>
-          <a:ln w="9525">
-            <a:solidFill>
-              <a:srgbClr val="E1E4E8"/>
-            </a:solidFill>
-            <a:prstDash val="solid"/>
-          </a:ln>
-        </p:spPr>
-        <p:txBody>
-          <a:bodyPr/>
-          <a:lstStyle/>
-          <a:p>
-            <a:endParaRPr lang="en-TH"/>
-          </a:p>
-        </p:txBody>
-      </p:sp>
-      <p:sp>
-        <p:nvSpPr>
-          <p:cNvPr id="15" name="Text 13"/>
-          <p:cNvSpPr/>
-          <p:nvPr/>
-        </p:nvSpPr>
-        <p:spPr>
-          <a:xfrm>
-            <a:off x="777240" y="3163824"/>
-            <a:ext cx="731520" cy="475488"/>
-          </a:xfrm>
-          <a:prstGeom prst="rect">
-            <a:avLst/>
-          </a:prstGeom>
-          <a:noFill/>
-          <a:ln/>
-        </p:spPr>
-        <p:txBody>
-          <a:bodyPr wrap="square" lIns="0" tIns="0" rIns="0" bIns="0" rtlCol="0" anchor="ctr"/>
-          <a:lstStyle/>
-          <a:p>
-            <a:pPr marL="0" indent="0">
-              <a:buNone/>
-            </a:pPr>
-            <a:r>
-              <a:rPr lang="en-US" sz="1550" b="1" dirty="0">
-                <a:solidFill>
-                  <a:srgbClr val="8A94A6"/>
-                </a:solidFill>
-                <a:latin typeface="TH Sarabun New" pitchFamily="34" charset="0"/>
-                <a:ea typeface="TH Sarabun New" pitchFamily="34" charset="-122"/>
-                <a:cs typeface="TH Sarabun New" pitchFamily="34" charset="-120"/>
-              </a:rPr>
-              <a:t>15 น.</a:t>
-            </a:r>
-            <a:endParaRPr lang="en-US" sz="1550" dirty="0"/>
-          </a:p>
-        </p:txBody>
-      </p:sp>
-      <p:sp>
-        <p:nvSpPr>
-          <p:cNvPr id="16" name="Text 14"/>
-          <p:cNvSpPr/>
-          <p:nvPr/>
-        </p:nvSpPr>
-        <p:spPr>
-          <a:xfrm>
-            <a:off x="1508760" y="3163824"/>
-            <a:ext cx="4297680" cy="475488"/>
-          </a:xfrm>
-          <a:prstGeom prst="rect">
-            <a:avLst/>
-          </a:prstGeom>
-          <a:noFill/>
-          <a:ln/>
-        </p:spPr>
-        <p:txBody>
-          <a:bodyPr wrap="square" lIns="0" tIns="0" rIns="0" bIns="0" rtlCol="0" anchor="ctr"/>
-          <a:lstStyle/>
-          <a:p>
-            <a:pPr marL="0" indent="0">
-              <a:buNone/>
-            </a:pPr>
-            <a:r>
-              <a:rPr lang="en-US" sz="1650" dirty="0">
-                <a:solidFill>
-                  <a:srgbClr val="393E46"/>
-                </a:solidFill>
-                <a:latin typeface="TH Sarabun New" pitchFamily="34" charset="0"/>
-                <a:ea typeface="TH Sarabun New" pitchFamily="34" charset="-122"/>
-                <a:cs typeface="TH Sarabun New" pitchFamily="34" charset="-120"/>
-              </a:rPr>
-              <a:t>รู้จัก Google Antigravity</a:t>
-            </a:r>
-            <a:endParaRPr lang="en-US" sz="1650" dirty="0"/>
-          </a:p>
-        </p:txBody>
-      </p:sp>
-      <p:sp>
-        <p:nvSpPr>
-          <p:cNvPr id="17" name="Shape 15"/>
-          <p:cNvSpPr/>
-          <p:nvPr/>
-        </p:nvSpPr>
-        <p:spPr>
-          <a:xfrm>
-            <a:off x="594360" y="3730752"/>
-            <a:ext cx="5303520" cy="475488"/>
-          </a:xfrm>
-          <a:prstGeom prst="roundRect">
-            <a:avLst>
-              <a:gd name="adj" fmla="val 13462"/>
-            </a:avLst>
-          </a:prstGeom>
-          <a:solidFill>
-            <a:srgbClr val="E8F6F7"/>
-          </a:solidFill>
-          <a:ln w="9525">
-            <a:solidFill>
-              <a:srgbClr val="BEE7EA"/>
-            </a:solidFill>
-            <a:prstDash val="solid"/>
-          </a:ln>
-        </p:spPr>
-        <p:txBody>
-          <a:bodyPr/>
-          <a:lstStyle/>
-          <a:p>
-            <a:endParaRPr lang="en-TH"/>
-          </a:p>
-        </p:txBody>
-      </p:sp>
-      <p:sp>
-        <p:nvSpPr>
-          <p:cNvPr id="18" name="Text 16"/>
-          <p:cNvSpPr/>
-          <p:nvPr/>
-        </p:nvSpPr>
-        <p:spPr>
-          <a:xfrm>
-            <a:off x="777240" y="3730752"/>
-            <a:ext cx="731520" cy="475488"/>
-          </a:xfrm>
-          <a:prstGeom prst="rect">
-            <a:avLst/>
-          </a:prstGeom>
-          <a:noFill/>
-          <a:ln/>
-        </p:spPr>
-        <p:txBody>
-          <a:bodyPr wrap="square" lIns="0" tIns="0" rIns="0" bIns="0" rtlCol="0" anchor="ctr"/>
-          <a:lstStyle/>
-          <a:p>
-            <a:pPr marL="0" indent="0">
-              <a:buNone/>
-            </a:pPr>
-            <a:r>
-              <a:rPr lang="en-US" sz="1550" b="1" dirty="0">
-                <a:solidFill>
-                  <a:srgbClr val="00ADB5"/>
-                </a:solidFill>
-                <a:latin typeface="TH Sarabun New" pitchFamily="34" charset="0"/>
-                <a:ea typeface="TH Sarabun New" pitchFamily="34" charset="-122"/>
-                <a:cs typeface="TH Sarabun New" pitchFamily="34" charset="-120"/>
-              </a:rPr>
-              <a:t>5 น.</a:t>
-            </a:r>
-            <a:endParaRPr lang="en-US" sz="1550" dirty="0"/>
-          </a:p>
-        </p:txBody>
-      </p:sp>
-      <p:sp>
-        <p:nvSpPr>
-          <p:cNvPr id="19" name="Text 17"/>
-          <p:cNvSpPr/>
-          <p:nvPr/>
-        </p:nvSpPr>
-        <p:spPr>
-          <a:xfrm>
-            <a:off x="1508760" y="3730752"/>
-            <a:ext cx="4297680" cy="475488"/>
-          </a:xfrm>
-          <a:prstGeom prst="rect">
-            <a:avLst/>
-          </a:prstGeom>
-          <a:noFill/>
-          <a:ln/>
-        </p:spPr>
-        <p:txBody>
-          <a:bodyPr wrap="square" lIns="0" tIns="0" rIns="0" bIns="0" rtlCol="0" anchor="ctr"/>
-          <a:lstStyle/>
-          <a:p>
-            <a:pPr marL="0" indent="0">
-              <a:buNone/>
-            </a:pPr>
-            <a:r>
-              <a:rPr lang="en-US" sz="1650" b="1" dirty="0">
-                <a:solidFill>
-                  <a:srgbClr val="222831"/>
-                </a:solidFill>
-                <a:latin typeface="TH Sarabun New" pitchFamily="34" charset="0"/>
-                <a:ea typeface="TH Sarabun New" pitchFamily="34" charset="-122"/>
-                <a:cs typeface="TH Sarabun New" pitchFamily="34" charset="-120"/>
-              </a:rPr>
-              <a:t>LAB A · วางบล็อกแรกของสเปก</a:t>
-            </a:r>
-            <a:endParaRPr lang="en-US" sz="1650" dirty="0"/>
-          </a:p>
-        </p:txBody>
-      </p:sp>
-      <p:sp>
-        <p:nvSpPr>
-          <p:cNvPr id="20" name="Shape 18"/>
-          <p:cNvSpPr/>
-          <p:nvPr/>
-        </p:nvSpPr>
-        <p:spPr>
-          <a:xfrm>
-            <a:off x="594360" y="4297680"/>
-            <a:ext cx="5303520" cy="475488"/>
-          </a:xfrm>
-          <a:prstGeom prst="roundRect">
-            <a:avLst>
-              <a:gd name="adj" fmla="val 13462"/>
-            </a:avLst>
-          </a:prstGeom>
-          <a:solidFill>
-            <a:srgbClr val="FFFFFF"/>
-          </a:solidFill>
-          <a:ln w="9525">
-            <a:solidFill>
-              <a:srgbClr val="E1E4E8"/>
-            </a:solidFill>
-            <a:prstDash val="solid"/>
-          </a:ln>
-        </p:spPr>
-        <p:txBody>
-          <a:bodyPr/>
-          <a:lstStyle/>
-          <a:p>
-            <a:endParaRPr lang="en-TH"/>
-          </a:p>
-        </p:txBody>
-      </p:sp>
-      <p:sp>
-        <p:nvSpPr>
-          <p:cNvPr id="21" name="Text 19"/>
-          <p:cNvSpPr/>
-          <p:nvPr/>
-        </p:nvSpPr>
-        <p:spPr>
-          <a:xfrm>
-            <a:off x="777240" y="4297680"/>
-            <a:ext cx="731520" cy="475488"/>
-          </a:xfrm>
-          <a:prstGeom prst="rect">
-            <a:avLst/>
-          </a:prstGeom>
-          <a:noFill/>
-          <a:ln/>
-        </p:spPr>
-        <p:txBody>
-          <a:bodyPr wrap="square" lIns="0" tIns="0" rIns="0" bIns="0" rtlCol="0" anchor="ctr"/>
-          <a:lstStyle/>
-          <a:p>
-            <a:pPr marL="0" indent="0">
-              <a:buNone/>
-            </a:pPr>
-            <a:r>
-              <a:rPr lang="en-US" sz="1550" b="1" dirty="0">
-                <a:solidFill>
-                  <a:srgbClr val="8A94A6"/>
-                </a:solidFill>
-                <a:latin typeface="TH Sarabun New" pitchFamily="34" charset="0"/>
-                <a:ea typeface="TH Sarabun New" pitchFamily="34" charset="-122"/>
-                <a:cs typeface="TH Sarabun New" pitchFamily="34" charset="-120"/>
-              </a:rPr>
-              <a:t>20 น.</a:t>
-            </a:r>
-            <a:endParaRPr lang="en-US" sz="1550" dirty="0"/>
-          </a:p>
-        </p:txBody>
-      </p:sp>
-      <p:sp>
-        <p:nvSpPr>
-          <p:cNvPr id="22" name="Text 20"/>
-          <p:cNvSpPr/>
-          <p:nvPr/>
-        </p:nvSpPr>
-        <p:spPr>
-          <a:xfrm>
-            <a:off x="1508760" y="4297680"/>
-            <a:ext cx="4297680" cy="475488"/>
-          </a:xfrm>
-          <a:prstGeom prst="rect">
-            <a:avLst/>
-          </a:prstGeom>
-          <a:noFill/>
-          <a:ln/>
-        </p:spPr>
-        <p:txBody>
-          <a:bodyPr wrap="square" lIns="0" tIns="0" rIns="0" bIns="0" rtlCol="0" anchor="ctr"/>
-          <a:lstStyle/>
-          <a:p>
-            <a:pPr marL="0" indent="0">
-              <a:buNone/>
-            </a:pPr>
-            <a:r>
-              <a:rPr lang="en-US" sz="1650" dirty="0">
-                <a:solidFill>
-                  <a:srgbClr val="393E46"/>
-                </a:solidFill>
-                <a:latin typeface="TH Sarabun New" pitchFamily="34" charset="0"/>
-                <a:ea typeface="TH Sarabun New" pitchFamily="34" charset="-122"/>
-                <a:cs typeface="TH Sarabun New" pitchFamily="34" charset="-120"/>
-              </a:rPr>
-              <a:t>แกะโจทย์ให้เป็นสเปก</a:t>
-            </a:r>
-            <a:endParaRPr lang="en-US" sz="1650" dirty="0"/>
-          </a:p>
-        </p:txBody>
-      </p:sp>
-      <p:sp>
-        <p:nvSpPr>
-          <p:cNvPr id="23" name="Shape 21"/>
-          <p:cNvSpPr/>
-          <p:nvPr/>
-        </p:nvSpPr>
-        <p:spPr>
-          <a:xfrm>
-            <a:off x="594360" y="4864608"/>
-            <a:ext cx="5303520" cy="475488"/>
-          </a:xfrm>
-          <a:prstGeom prst="roundRect">
-            <a:avLst>
-              <a:gd name="adj" fmla="val 13462"/>
-            </a:avLst>
-          </a:prstGeom>
-          <a:solidFill>
-            <a:srgbClr val="E8F6F7"/>
-          </a:solidFill>
-          <a:ln w="9525">
-            <a:solidFill>
-              <a:srgbClr val="BEE7EA"/>
-            </a:solidFill>
-            <a:prstDash val="solid"/>
-          </a:ln>
-        </p:spPr>
-        <p:txBody>
-          <a:bodyPr/>
-          <a:lstStyle/>
-          <a:p>
-            <a:endParaRPr lang="en-TH"/>
-          </a:p>
-        </p:txBody>
-      </p:sp>
-      <p:sp>
-        <p:nvSpPr>
-          <p:cNvPr id="24" name="Text 22"/>
-          <p:cNvSpPr/>
-          <p:nvPr/>
-        </p:nvSpPr>
-        <p:spPr>
-          <a:xfrm>
-            <a:off x="777240" y="4864608"/>
-            <a:ext cx="731520" cy="475488"/>
-          </a:xfrm>
-          <a:prstGeom prst="rect">
-            <a:avLst/>
-          </a:prstGeom>
-          <a:noFill/>
-          <a:ln/>
-        </p:spPr>
-        <p:txBody>
-          <a:bodyPr wrap="square" lIns="0" tIns="0" rIns="0" bIns="0" rtlCol="0" anchor="ctr"/>
-          <a:lstStyle/>
-          <a:p>
-            <a:pPr marL="0" indent="0">
-              <a:buNone/>
-            </a:pPr>
-            <a:r>
-              <a:rPr lang="en-US" sz="1550" b="1" dirty="0">
-                <a:solidFill>
-                  <a:srgbClr val="00ADB5"/>
-                </a:solidFill>
-                <a:latin typeface="TH Sarabun New" pitchFamily="34" charset="0"/>
-                <a:ea typeface="TH Sarabun New" pitchFamily="34" charset="-122"/>
-                <a:cs typeface="TH Sarabun New" pitchFamily="34" charset="-120"/>
-              </a:rPr>
-              <a:t>20 น.</a:t>
-            </a:r>
-            <a:endParaRPr lang="en-US" sz="1550" dirty="0"/>
-          </a:p>
-        </p:txBody>
-      </p:sp>
-      <p:sp>
-        <p:nvSpPr>
-          <p:cNvPr id="25" name="Text 23"/>
-          <p:cNvSpPr/>
-          <p:nvPr/>
-        </p:nvSpPr>
-        <p:spPr>
-          <a:xfrm>
-            <a:off x="1508760" y="4864608"/>
-            <a:ext cx="4297680" cy="475488"/>
-          </a:xfrm>
-          <a:prstGeom prst="rect">
-            <a:avLst/>
-          </a:prstGeom>
-          <a:noFill/>
-          <a:ln/>
-        </p:spPr>
-        <p:txBody>
-          <a:bodyPr wrap="square" lIns="0" tIns="0" rIns="0" bIns="0" rtlCol="0" anchor="ctr"/>
-          <a:lstStyle/>
-          <a:p>
-            <a:pPr marL="0" indent="0">
-              <a:buNone/>
-            </a:pPr>
-            <a:r>
-              <a:rPr lang="en-US" sz="1650" b="1" dirty="0">
-                <a:solidFill>
-                  <a:srgbClr val="222831"/>
-                </a:solidFill>
-                <a:latin typeface="TH Sarabun New" pitchFamily="34" charset="0"/>
-                <a:ea typeface="TH Sarabun New" pitchFamily="34" charset="-122"/>
-                <a:cs typeface="TH Sarabun New" pitchFamily="34" charset="-120"/>
-              </a:rPr>
-              <a:t>LAB B · ประกอบสเปก ตอนที่ 1</a:t>
-            </a:r>
-            <a:endParaRPr lang="en-US" sz="1650" dirty="0"/>
-          </a:p>
-        </p:txBody>
-      </p:sp>
-      <p:sp>
-        <p:nvSpPr>
-          <p:cNvPr id="26" name="Shape 24"/>
-          <p:cNvSpPr/>
-          <p:nvPr/>
-        </p:nvSpPr>
-        <p:spPr>
-          <a:xfrm>
-            <a:off x="6263640" y="1463040"/>
-            <a:ext cx="5303520" cy="475488"/>
-          </a:xfrm>
-          <a:prstGeom prst="roundRect">
-            <a:avLst>
-              <a:gd name="adj" fmla="val 13462"/>
-            </a:avLst>
-          </a:prstGeom>
-          <a:solidFill>
-            <a:srgbClr val="FFFFFF"/>
-          </a:solidFill>
-          <a:ln w="9525">
-            <a:solidFill>
-              <a:srgbClr val="E1E4E8"/>
-            </a:solidFill>
-            <a:prstDash val="solid"/>
-          </a:ln>
-        </p:spPr>
-        <p:txBody>
-          <a:bodyPr/>
-          <a:lstStyle/>
-          <a:p>
-            <a:endParaRPr lang="en-TH"/>
-          </a:p>
-        </p:txBody>
-      </p:sp>
-      <p:sp>
-        <p:nvSpPr>
-          <p:cNvPr id="27" name="Text 25"/>
-          <p:cNvSpPr/>
-          <p:nvPr/>
-        </p:nvSpPr>
-        <p:spPr>
-          <a:xfrm>
-            <a:off x="6446520" y="1463040"/>
-            <a:ext cx="731520" cy="475488"/>
-          </a:xfrm>
-          <a:prstGeom prst="rect">
-            <a:avLst/>
-          </a:prstGeom>
-          <a:noFill/>
-          <a:ln/>
-        </p:spPr>
-        <p:txBody>
-          <a:bodyPr wrap="square" lIns="0" tIns="0" rIns="0" bIns="0" rtlCol="0" anchor="ctr"/>
-          <a:lstStyle/>
-          <a:p>
-            <a:pPr marL="0" indent="0">
-              <a:buNone/>
-            </a:pPr>
-            <a:r>
-              <a:rPr lang="en-US" sz="1550" b="1" dirty="0">
-                <a:solidFill>
-                  <a:srgbClr val="8A94A6"/>
-                </a:solidFill>
-                <a:latin typeface="TH Sarabun New" pitchFamily="34" charset="0"/>
-                <a:ea typeface="TH Sarabun New" pitchFamily="34" charset="-122"/>
-                <a:cs typeface="TH Sarabun New" pitchFamily="34" charset="-120"/>
-              </a:rPr>
-              <a:t>20 น.</a:t>
-            </a:r>
-            <a:endParaRPr lang="en-US" sz="1550" dirty="0"/>
-          </a:p>
-        </p:txBody>
-      </p:sp>
-      <p:sp>
-        <p:nvSpPr>
-          <p:cNvPr id="28" name="Text 26"/>
-          <p:cNvSpPr/>
-          <p:nvPr/>
-        </p:nvSpPr>
-        <p:spPr>
-          <a:xfrm>
-            <a:off x="7178040" y="1463040"/>
-            <a:ext cx="4297680" cy="475488"/>
-          </a:xfrm>
-          <a:prstGeom prst="rect">
-            <a:avLst/>
-          </a:prstGeom>
-          <a:noFill/>
-          <a:ln/>
-        </p:spPr>
-        <p:txBody>
-          <a:bodyPr wrap="square" lIns="0" tIns="0" rIns="0" bIns="0" rtlCol="0" anchor="ctr"/>
-          <a:lstStyle/>
-          <a:p>
-            <a:pPr marL="0" indent="0">
-              <a:buNone/>
-            </a:pPr>
-            <a:r>
-              <a:rPr lang="en-US" sz="1650" dirty="0">
-                <a:solidFill>
-                  <a:srgbClr val="393E46"/>
-                </a:solidFill>
-                <a:latin typeface="TH Sarabun New" pitchFamily="34" charset="0"/>
-                <a:ea typeface="TH Sarabun New" pitchFamily="34" charset="-122"/>
-                <a:cs typeface="TH Sarabun New" pitchFamily="34" charset="-120"/>
-              </a:rPr>
-              <a:t>ออกแบบ UI : สไตล์ สี ฟอนต์</a:t>
-            </a:r>
-            <a:endParaRPr lang="en-US" sz="1650" dirty="0"/>
-          </a:p>
-        </p:txBody>
-      </p:sp>
-      <p:sp>
-        <p:nvSpPr>
-          <p:cNvPr id="29" name="Shape 27"/>
-          <p:cNvSpPr/>
-          <p:nvPr/>
-        </p:nvSpPr>
-        <p:spPr>
-          <a:xfrm>
-            <a:off x="6263640" y="2029968"/>
-            <a:ext cx="5303520" cy="475488"/>
-          </a:xfrm>
-          <a:prstGeom prst="roundRect">
-            <a:avLst>
-              <a:gd name="adj" fmla="val 13462"/>
-            </a:avLst>
-          </a:prstGeom>
-          <a:solidFill>
-            <a:srgbClr val="E8F6F7"/>
-          </a:solidFill>
-          <a:ln w="9525">
-            <a:solidFill>
-              <a:srgbClr val="BEE7EA"/>
-            </a:solidFill>
-            <a:prstDash val="solid"/>
-          </a:ln>
-        </p:spPr>
-        <p:txBody>
-          <a:bodyPr/>
-          <a:lstStyle/>
-          <a:p>
-            <a:endParaRPr lang="en-TH"/>
-          </a:p>
-        </p:txBody>
-      </p:sp>
-      <p:sp>
-        <p:nvSpPr>
-          <p:cNvPr id="30" name="Text 28"/>
-          <p:cNvSpPr/>
-          <p:nvPr/>
-        </p:nvSpPr>
-        <p:spPr>
-          <a:xfrm>
-            <a:off x="6446520" y="2029968"/>
-            <a:ext cx="731520" cy="475488"/>
-          </a:xfrm>
-          <a:prstGeom prst="rect">
-            <a:avLst/>
-          </a:prstGeom>
-          <a:noFill/>
-          <a:ln/>
-        </p:spPr>
-        <p:txBody>
-          <a:bodyPr wrap="square" lIns="0" tIns="0" rIns="0" bIns="0" rtlCol="0" anchor="ctr"/>
-          <a:lstStyle/>
-          <a:p>
-            <a:pPr marL="0" indent="0">
-              <a:buNone/>
-            </a:pPr>
-            <a:r>
-              <a:rPr lang="en-US" sz="1550" b="1" dirty="0">
-                <a:solidFill>
-                  <a:srgbClr val="00ADB5"/>
-                </a:solidFill>
-                <a:latin typeface="TH Sarabun New" pitchFamily="34" charset="0"/>
-                <a:ea typeface="TH Sarabun New" pitchFamily="34" charset="-122"/>
-                <a:cs typeface="TH Sarabun New" pitchFamily="34" charset="-120"/>
-              </a:rPr>
-              <a:t>15 น.</a:t>
-            </a:r>
-            <a:endParaRPr lang="en-US" sz="1550" dirty="0"/>
-          </a:p>
-        </p:txBody>
-      </p:sp>
-      <p:sp>
-        <p:nvSpPr>
-          <p:cNvPr id="31" name="Text 29"/>
-          <p:cNvSpPr/>
-          <p:nvPr/>
-        </p:nvSpPr>
-        <p:spPr>
-          <a:xfrm>
-            <a:off x="7178040" y="2029968"/>
-            <a:ext cx="4297680" cy="475488"/>
-          </a:xfrm>
-          <a:prstGeom prst="rect">
-            <a:avLst/>
-          </a:prstGeom>
-          <a:noFill/>
-          <a:ln/>
-        </p:spPr>
-        <p:txBody>
-          <a:bodyPr wrap="square" lIns="0" tIns="0" rIns="0" bIns="0" rtlCol="0" anchor="ctr"/>
-          <a:lstStyle/>
-          <a:p>
-            <a:pPr marL="0" indent="0">
-              <a:buNone/>
-            </a:pPr>
-            <a:r>
-              <a:rPr lang="en-US" sz="1650" b="1" dirty="0">
-                <a:solidFill>
-                  <a:srgbClr val="222831"/>
-                </a:solidFill>
-                <a:latin typeface="TH Sarabun New" pitchFamily="34" charset="0"/>
-                <a:ea typeface="TH Sarabun New" pitchFamily="34" charset="-122"/>
-                <a:cs typeface="TH Sarabun New" pitchFamily="34" charset="-120"/>
-              </a:rPr>
-              <a:t>LAB B · ตอนที่ 2 — Design System</a:t>
-            </a:r>
-            <a:endParaRPr lang="en-US" sz="1650" dirty="0"/>
-          </a:p>
-        </p:txBody>
-      </p:sp>
-      <p:sp>
-        <p:nvSpPr>
-          <p:cNvPr id="32" name="Shape 30"/>
-          <p:cNvSpPr/>
-          <p:nvPr/>
-        </p:nvSpPr>
-        <p:spPr>
-          <a:xfrm>
-            <a:off x="6263640" y="2596896"/>
-            <a:ext cx="5303520" cy="475488"/>
-          </a:xfrm>
-          <a:prstGeom prst="roundRect">
-            <a:avLst>
-              <a:gd name="adj" fmla="val 13462"/>
-            </a:avLst>
-          </a:prstGeom>
-          <a:solidFill>
-            <a:srgbClr val="FFFFFF"/>
-          </a:solidFill>
-          <a:ln w="9525">
-            <a:solidFill>
-              <a:srgbClr val="E1E4E8"/>
-            </a:solidFill>
-            <a:prstDash val="solid"/>
-          </a:ln>
-        </p:spPr>
-        <p:txBody>
-          <a:bodyPr/>
-          <a:lstStyle/>
-          <a:p>
-            <a:endParaRPr lang="en-TH"/>
-          </a:p>
-        </p:txBody>
-      </p:sp>
-      <p:sp>
-        <p:nvSpPr>
-          <p:cNvPr id="33" name="Text 31"/>
-          <p:cNvSpPr/>
-          <p:nvPr/>
-        </p:nvSpPr>
-        <p:spPr>
-          <a:xfrm>
-            <a:off x="6446520" y="2596896"/>
-            <a:ext cx="731520" cy="475488"/>
-          </a:xfrm>
-          <a:prstGeom prst="rect">
-            <a:avLst/>
-          </a:prstGeom>
-          <a:noFill/>
-          <a:ln/>
-        </p:spPr>
-        <p:txBody>
-          <a:bodyPr wrap="square" lIns="0" tIns="0" rIns="0" bIns="0" rtlCol="0" anchor="ctr"/>
-          <a:lstStyle/>
-          <a:p>
-            <a:pPr marL="0" indent="0">
-              <a:buNone/>
-            </a:pPr>
-            <a:r>
-              <a:rPr lang="en-US" sz="1550" b="1" dirty="0">
-                <a:solidFill>
-                  <a:srgbClr val="8A94A6"/>
-                </a:solidFill>
-                <a:latin typeface="TH Sarabun New" pitchFamily="34" charset="0"/>
-                <a:ea typeface="TH Sarabun New" pitchFamily="34" charset="-122"/>
-                <a:cs typeface="TH Sarabun New" pitchFamily="34" charset="-120"/>
-              </a:rPr>
-              <a:t>10 น.</a:t>
-            </a:r>
-            <a:endParaRPr lang="en-US" sz="1550" dirty="0"/>
-          </a:p>
-        </p:txBody>
-      </p:sp>
-      <p:sp>
-        <p:nvSpPr>
-          <p:cNvPr id="34" name="Text 32"/>
-          <p:cNvSpPr/>
-          <p:nvPr/>
-        </p:nvSpPr>
-        <p:spPr>
-          <a:xfrm>
-            <a:off x="7178040" y="2596896"/>
-            <a:ext cx="4297680" cy="475488"/>
-          </a:xfrm>
-          <a:prstGeom prst="rect">
-            <a:avLst/>
-          </a:prstGeom>
-          <a:noFill/>
-          <a:ln/>
-        </p:spPr>
-        <p:txBody>
-          <a:bodyPr wrap="square" lIns="0" tIns="0" rIns="0" bIns="0" rtlCol="0" anchor="ctr"/>
-          <a:lstStyle/>
-          <a:p>
-            <a:pPr marL="0" indent="0">
-              <a:buNone/>
-            </a:pPr>
-            <a:r>
-              <a:rPr lang="en-US" sz="1650" dirty="0">
-                <a:solidFill>
-                  <a:srgbClr val="393E46"/>
-                </a:solidFill>
-                <a:latin typeface="TH Sarabun New" pitchFamily="34" charset="0"/>
-                <a:ea typeface="TH Sarabun New" pitchFamily="34" charset="-122"/>
-                <a:cs typeface="TH Sarabun New" pitchFamily="34" charset="-120"/>
-              </a:rPr>
-              <a:t>ฐานข้อมูลด้วย Supabase</a:t>
-            </a:r>
-            <a:endParaRPr lang="en-US" sz="1650" dirty="0"/>
-          </a:p>
-        </p:txBody>
-      </p:sp>
-      <p:sp>
-        <p:nvSpPr>
-          <p:cNvPr id="35" name="Shape 33"/>
-          <p:cNvSpPr/>
-          <p:nvPr/>
-        </p:nvSpPr>
-        <p:spPr>
-          <a:xfrm>
-            <a:off x="6263640" y="3163824"/>
-            <a:ext cx="5303520" cy="475488"/>
-          </a:xfrm>
-          <a:prstGeom prst="roundRect">
-            <a:avLst>
-              <a:gd name="adj" fmla="val 13462"/>
-            </a:avLst>
-          </a:prstGeom>
-          <a:solidFill>
-            <a:srgbClr val="E8F6F7"/>
-          </a:solidFill>
-          <a:ln w="9525">
-            <a:solidFill>
-              <a:srgbClr val="BEE7EA"/>
-            </a:solidFill>
-            <a:prstDash val="solid"/>
-          </a:ln>
-        </p:spPr>
-        <p:txBody>
-          <a:bodyPr/>
-          <a:lstStyle/>
-          <a:p>
-            <a:endParaRPr lang="en-TH"/>
-          </a:p>
-        </p:txBody>
-      </p:sp>
-      <p:sp>
-        <p:nvSpPr>
-          <p:cNvPr id="36" name="Text 34"/>
-          <p:cNvSpPr/>
-          <p:nvPr/>
-        </p:nvSpPr>
-        <p:spPr>
-          <a:xfrm>
-            <a:off x="6446520" y="3163824"/>
-            <a:ext cx="731520" cy="475488"/>
-          </a:xfrm>
-          <a:prstGeom prst="rect">
-            <a:avLst/>
-          </a:prstGeom>
-          <a:noFill/>
-          <a:ln/>
-        </p:spPr>
-        <p:txBody>
-          <a:bodyPr wrap="square" lIns="0" tIns="0" rIns="0" bIns="0" rtlCol="0" anchor="ctr"/>
-          <a:lstStyle/>
-          <a:p>
-            <a:pPr marL="0" indent="0">
-              <a:buNone/>
-            </a:pPr>
-            <a:r>
-              <a:rPr lang="en-US" sz="1550" b="1" dirty="0">
-                <a:solidFill>
-                  <a:srgbClr val="00ADB5"/>
-                </a:solidFill>
-                <a:latin typeface="TH Sarabun New" pitchFamily="34" charset="0"/>
-                <a:ea typeface="TH Sarabun New" pitchFamily="34" charset="-122"/>
-                <a:cs typeface="TH Sarabun New" pitchFamily="34" charset="-120"/>
-              </a:rPr>
-              <a:t>10 น.</a:t>
-            </a:r>
-            <a:endParaRPr lang="en-US" sz="1550" dirty="0"/>
-          </a:p>
-        </p:txBody>
-      </p:sp>
-      <p:sp>
-        <p:nvSpPr>
-          <p:cNvPr id="37" name="Text 35"/>
-          <p:cNvSpPr/>
-          <p:nvPr/>
-        </p:nvSpPr>
-        <p:spPr>
-          <a:xfrm>
-            <a:off x="7178040" y="3163824"/>
-            <a:ext cx="4297680" cy="475488"/>
-          </a:xfrm>
-          <a:prstGeom prst="rect">
-            <a:avLst/>
-          </a:prstGeom>
-          <a:noFill/>
-          <a:ln/>
-        </p:spPr>
-        <p:txBody>
-          <a:bodyPr wrap="square" lIns="0" tIns="0" rIns="0" bIns="0" rtlCol="0" anchor="ctr"/>
-          <a:lstStyle/>
-          <a:p>
-            <a:pPr marL="0" indent="0">
-              <a:buNone/>
-            </a:pPr>
-            <a:r>
-              <a:rPr lang="en-US" sz="1650" b="1" dirty="0">
-                <a:solidFill>
-                  <a:srgbClr val="222831"/>
-                </a:solidFill>
-                <a:latin typeface="TH Sarabun New" pitchFamily="34" charset="0"/>
-                <a:ea typeface="TH Sarabun New" pitchFamily="34" charset="-122"/>
-                <a:cs typeface="TH Sarabun New" pitchFamily="34" charset="-120"/>
-              </a:rPr>
-              <a:t>LAB B · ตอนที่ 3 — ฐานข้อมูล</a:t>
-            </a:r>
-            <a:endParaRPr lang="en-US" sz="1650" dirty="0"/>
-          </a:p>
-        </p:txBody>
-      </p:sp>
-      <p:sp>
-        <p:nvSpPr>
-          <p:cNvPr id="38" name="Shape 36"/>
-          <p:cNvSpPr/>
-          <p:nvPr/>
-        </p:nvSpPr>
-        <p:spPr>
-          <a:xfrm>
-            <a:off x="6263640" y="3730752"/>
-            <a:ext cx="5303520" cy="475488"/>
-          </a:xfrm>
-          <a:prstGeom prst="roundRect">
-            <a:avLst>
-              <a:gd name="adj" fmla="val 13462"/>
-            </a:avLst>
-          </a:prstGeom>
-          <a:solidFill>
-            <a:srgbClr val="FFFFFF"/>
-          </a:solidFill>
-          <a:ln w="9525">
-            <a:solidFill>
-              <a:srgbClr val="E1E4E8"/>
-            </a:solidFill>
-            <a:prstDash val="solid"/>
-          </a:ln>
-        </p:spPr>
-        <p:txBody>
-          <a:bodyPr/>
-          <a:lstStyle/>
-          <a:p>
-            <a:endParaRPr lang="en-TH"/>
-          </a:p>
-        </p:txBody>
-      </p:sp>
-      <p:sp>
-        <p:nvSpPr>
-          <p:cNvPr id="39" name="Text 37"/>
-          <p:cNvSpPr/>
-          <p:nvPr/>
-        </p:nvSpPr>
-        <p:spPr>
-          <a:xfrm>
-            <a:off x="6446520" y="3730752"/>
-            <a:ext cx="731520" cy="475488"/>
-          </a:xfrm>
-          <a:prstGeom prst="rect">
-            <a:avLst/>
-          </a:prstGeom>
-          <a:noFill/>
-          <a:ln/>
-        </p:spPr>
-        <p:txBody>
-          <a:bodyPr wrap="square" lIns="0" tIns="0" rIns="0" bIns="0" rtlCol="0" anchor="ctr"/>
-          <a:lstStyle/>
-          <a:p>
-            <a:pPr marL="0" indent="0">
-              <a:buNone/>
-            </a:pPr>
-            <a:r>
-              <a:rPr lang="en-US" sz="1550" b="1" dirty="0">
-                <a:solidFill>
-                  <a:srgbClr val="8A94A6"/>
-                </a:solidFill>
-                <a:latin typeface="TH Sarabun New" pitchFamily="34" charset="0"/>
-                <a:ea typeface="TH Sarabun New" pitchFamily="34" charset="-122"/>
-                <a:cs typeface="TH Sarabun New" pitchFamily="34" charset="-120"/>
-              </a:rPr>
-              <a:t>10 น.</a:t>
-            </a:r>
-            <a:endParaRPr lang="en-US" sz="1550" dirty="0"/>
-          </a:p>
-        </p:txBody>
-      </p:sp>
-      <p:sp>
-        <p:nvSpPr>
-          <p:cNvPr id="40" name="Text 38"/>
-          <p:cNvSpPr/>
-          <p:nvPr/>
-        </p:nvSpPr>
-        <p:spPr>
-          <a:xfrm>
-            <a:off x="7178040" y="3730752"/>
-            <a:ext cx="4297680" cy="475488"/>
-          </a:xfrm>
-          <a:prstGeom prst="rect">
-            <a:avLst/>
-          </a:prstGeom>
-          <a:noFill/>
-          <a:ln/>
-        </p:spPr>
-        <p:txBody>
-          <a:bodyPr wrap="square" lIns="0" tIns="0" rIns="0" bIns="0" rtlCol="0" anchor="ctr"/>
-          <a:lstStyle/>
-          <a:p>
-            <a:pPr marL="0" indent="0">
-              <a:buNone/>
-            </a:pPr>
-            <a:r>
-              <a:rPr lang="en-US" sz="1650" dirty="0">
-                <a:solidFill>
-                  <a:srgbClr val="393E46"/>
-                </a:solidFill>
-                <a:latin typeface="TH Sarabun New" pitchFamily="34" charset="0"/>
-                <a:ea typeface="TH Sarabun New" pitchFamily="34" charset="-122"/>
-                <a:cs typeface="TH Sarabun New" pitchFamily="34" charset="-120"/>
-              </a:rPr>
-              <a:t>กลยุทธ์สั่งงาน AI Agent</a:t>
-            </a:r>
-            <a:endParaRPr lang="en-US" sz="1650" dirty="0"/>
-          </a:p>
-        </p:txBody>
-      </p:sp>
-      <p:sp>
-        <p:nvSpPr>
-          <p:cNvPr id="41" name="Shape 39"/>
-          <p:cNvSpPr/>
-          <p:nvPr/>
-        </p:nvSpPr>
-        <p:spPr>
-          <a:xfrm>
-            <a:off x="6263640" y="4297680"/>
-            <a:ext cx="5303520" cy="475488"/>
-          </a:xfrm>
-          <a:prstGeom prst="roundRect">
-            <a:avLst>
-              <a:gd name="adj" fmla="val 13462"/>
-            </a:avLst>
-          </a:prstGeom>
-          <a:solidFill>
-            <a:srgbClr val="E8F6F7"/>
-          </a:solidFill>
-          <a:ln w="9525">
-            <a:solidFill>
-              <a:srgbClr val="BEE7EA"/>
-            </a:solidFill>
-            <a:prstDash val="solid"/>
-          </a:ln>
-        </p:spPr>
-        <p:txBody>
-          <a:bodyPr/>
-          <a:lstStyle/>
-          <a:p>
-            <a:endParaRPr lang="en-TH"/>
-          </a:p>
-        </p:txBody>
-      </p:sp>
-      <p:sp>
-        <p:nvSpPr>
-          <p:cNvPr id="42" name="Text 40"/>
-          <p:cNvSpPr/>
-          <p:nvPr/>
-        </p:nvSpPr>
-        <p:spPr>
-          <a:xfrm>
-            <a:off x="6446520" y="4297680"/>
-            <a:ext cx="731520" cy="475488"/>
-          </a:xfrm>
-          <a:prstGeom prst="rect">
-            <a:avLst/>
-          </a:prstGeom>
-          <a:noFill/>
-          <a:ln/>
-        </p:spPr>
-        <p:txBody>
-          <a:bodyPr wrap="square" lIns="0" tIns="0" rIns="0" bIns="0" rtlCol="0" anchor="ctr"/>
-          <a:lstStyle/>
-          <a:p>
-            <a:pPr marL="0" indent="0">
-              <a:buNone/>
-            </a:pPr>
-            <a:r>
-              <a:rPr lang="en-US" sz="1550" b="1" dirty="0">
-                <a:solidFill>
-                  <a:srgbClr val="00ADB5"/>
-                </a:solidFill>
-                <a:latin typeface="TH Sarabun New" pitchFamily="34" charset="0"/>
-                <a:ea typeface="TH Sarabun New" pitchFamily="34" charset="-122"/>
-                <a:cs typeface="TH Sarabun New" pitchFamily="34" charset="-120"/>
-              </a:rPr>
-              <a:t>30 น.</a:t>
-            </a:r>
-            <a:endParaRPr lang="en-US" sz="1550" dirty="0"/>
-          </a:p>
-        </p:txBody>
-      </p:sp>
-      <p:sp>
-        <p:nvSpPr>
-          <p:cNvPr id="43" name="Text 41"/>
-          <p:cNvSpPr/>
-          <p:nvPr/>
-        </p:nvSpPr>
-        <p:spPr>
-          <a:xfrm>
-            <a:off x="7178040" y="4297680"/>
-            <a:ext cx="4297680" cy="475488"/>
-          </a:xfrm>
-          <a:prstGeom prst="rect">
-            <a:avLst/>
-          </a:prstGeom>
-          <a:noFill/>
-          <a:ln/>
-        </p:spPr>
-        <p:txBody>
-          <a:bodyPr wrap="square" lIns="0" tIns="0" rIns="0" bIns="0" rtlCol="0" anchor="ctr"/>
-          <a:lstStyle/>
-          <a:p>
-            <a:pPr marL="0" indent="0">
-              <a:buNone/>
-            </a:pPr>
-            <a:r>
-              <a:rPr lang="en-US" sz="1650" b="1" dirty="0">
-                <a:solidFill>
-                  <a:srgbClr val="222831"/>
-                </a:solidFill>
-                <a:latin typeface="TH Sarabun New" pitchFamily="34" charset="0"/>
-                <a:ea typeface="TH Sarabun New" pitchFamily="34" charset="-122"/>
-                <a:cs typeface="TH Sarabun New" pitchFamily="34" charset="-120"/>
-              </a:rPr>
-              <a:t>LAB C · สั่ง Antigravity สร้างแอป</a:t>
-            </a:r>
-            <a:endParaRPr lang="en-US" sz="1650" dirty="0"/>
-          </a:p>
-        </p:txBody>
-      </p:sp>
-      <p:sp>
-        <p:nvSpPr>
-          <p:cNvPr id="44" name="Shape 42"/>
-          <p:cNvSpPr/>
-          <p:nvPr/>
-        </p:nvSpPr>
-        <p:spPr>
-          <a:xfrm>
-            <a:off x="6263640" y="4864608"/>
-            <a:ext cx="5303520" cy="475488"/>
-          </a:xfrm>
-          <a:prstGeom prst="roundRect">
-            <a:avLst>
-              <a:gd name="adj" fmla="val 13462"/>
-            </a:avLst>
-          </a:prstGeom>
-          <a:solidFill>
-            <a:srgbClr val="E8F6F7"/>
-          </a:solidFill>
-          <a:ln w="9525">
-            <a:solidFill>
-              <a:srgbClr val="BEE7EA"/>
-            </a:solidFill>
-            <a:prstDash val="solid"/>
-          </a:ln>
-        </p:spPr>
-        <p:txBody>
-          <a:bodyPr/>
-          <a:lstStyle/>
-          <a:p>
-            <a:endParaRPr lang="en-TH"/>
-          </a:p>
-        </p:txBody>
-      </p:sp>
-      <p:sp>
-        <p:nvSpPr>
-          <p:cNvPr id="45" name="Text 43"/>
-          <p:cNvSpPr/>
-          <p:nvPr/>
-        </p:nvSpPr>
-        <p:spPr>
-          <a:xfrm>
-            <a:off x="6446520" y="4864608"/>
-            <a:ext cx="731520" cy="475488"/>
-          </a:xfrm>
-          <a:prstGeom prst="rect">
-            <a:avLst/>
-          </a:prstGeom>
-          <a:noFill/>
-          <a:ln/>
-        </p:spPr>
-        <p:txBody>
-          <a:bodyPr wrap="square" lIns="0" tIns="0" rIns="0" bIns="0" rtlCol="0" anchor="ctr"/>
-          <a:lstStyle/>
-          <a:p>
-            <a:pPr marL="0" indent="0">
-              <a:buNone/>
-            </a:pPr>
-            <a:r>
-              <a:rPr lang="en-US" sz="1550" b="1" dirty="0">
-                <a:solidFill>
-                  <a:srgbClr val="00ADB5"/>
-                </a:solidFill>
-                <a:latin typeface="TH Sarabun New" pitchFamily="34" charset="0"/>
-                <a:ea typeface="TH Sarabun New" pitchFamily="34" charset="-122"/>
-                <a:cs typeface="TH Sarabun New" pitchFamily="34" charset="-120"/>
-              </a:rPr>
-              <a:t>15 น.</a:t>
-            </a:r>
-            <a:endParaRPr lang="en-US" sz="1550" dirty="0"/>
-          </a:p>
-        </p:txBody>
-      </p:sp>
-      <p:sp>
-        <p:nvSpPr>
-          <p:cNvPr id="46" name="Text 44"/>
-          <p:cNvSpPr/>
-          <p:nvPr/>
-        </p:nvSpPr>
-        <p:spPr>
-          <a:xfrm>
-            <a:off x="7178040" y="4864608"/>
-            <a:ext cx="4297680" cy="475488"/>
-          </a:xfrm>
-          <a:prstGeom prst="rect">
-            <a:avLst/>
-          </a:prstGeom>
-          <a:noFill/>
-          <a:ln/>
-        </p:spPr>
-        <p:txBody>
-          <a:bodyPr wrap="square" lIns="0" tIns="0" rIns="0" bIns="0" rtlCol="0" anchor="ctr"/>
-          <a:lstStyle/>
-          <a:p>
-            <a:pPr marL="0" indent="0">
-              <a:buNone/>
-            </a:pPr>
-            <a:r>
-              <a:rPr lang="en-US" sz="1650" b="1" dirty="0">
-                <a:solidFill>
-                  <a:srgbClr val="222831"/>
-                </a:solidFill>
-                <a:latin typeface="TH Sarabun New" pitchFamily="34" charset="0"/>
-                <a:ea typeface="TH Sarabun New" pitchFamily="34" charset="-122"/>
-                <a:cs typeface="TH Sarabun New" pitchFamily="34" charset="-120"/>
-              </a:rPr>
-              <a:t>ทดสอบ · Deploy · สรุป</a:t>
-            </a:r>
-            <a:endParaRPr lang="en-US" sz="1650" dirty="0"/>
-          </a:p>
-        </p:txBody>
-      </p:sp>
-      <p:sp>
-        <p:nvSpPr>
-          <p:cNvPr id="47" name="Text 45"/>
-          <p:cNvSpPr/>
-          <p:nvPr/>
-        </p:nvSpPr>
-        <p:spPr>
-          <a:xfrm>
-            <a:off x="594360" y="6263640"/>
-            <a:ext cx="10972800" cy="292608"/>
-          </a:xfrm>
-          <a:prstGeom prst="rect">
-            <a:avLst/>
-          </a:prstGeom>
-          <a:noFill/>
-          <a:ln/>
-        </p:spPr>
-        <p:txBody>
-          <a:bodyPr wrap="square" lIns="0" tIns="0" rIns="0" bIns="0" rtlCol="0" anchor="ctr"/>
-          <a:lstStyle/>
-          <a:p>
-            <a:pPr marL="0" indent="0">
-              <a:buNone/>
-            </a:pPr>
-            <a:r>
-              <a:rPr lang="en-US" sz="1300" dirty="0">
-                <a:solidFill>
-                  <a:srgbClr val="8A94A6"/>
-                </a:solidFill>
-                <a:latin typeface="TH Sarabun New" pitchFamily="34" charset="0"/>
-                <a:ea typeface="TH Sarabun New" pitchFamily="34" charset="-122"/>
-                <a:cs typeface="TH Sarabun New" pitchFamily="34" charset="-120"/>
-              </a:rPr>
-              <a:t>แถบสีฟ้า = ช่วงลงมือปฏิบัติ  ·  LAB A เตรียมพร้อม  ·  LAB B ประกอบสเปกด้วยการคัดลอกวาง  ·  LAB C สั่งสร้างและ deploy</a:t>
-            </a:r>
-            <a:endParaRPr lang="en-US" sz="1300" dirty="0"/>
-          </a:p>
-        </p:txBody>
-      </p:sp>
-    </p:spTree>
-  </p:cSld>
-  <p:clrMapOvr>
-    <a:masterClrMapping/>
-  </p:clrMapOvr>
-</p:sld>
-</file>
-
-<file path=ppt/slides/slide30.xml><?xml version="1.0" encoding="utf-8"?>
+<file path=ppt/slides/slide29.xml><?xml version="1.0" encoding="utf-8"?>
 <p:sld xmlns:a="http://schemas.openxmlformats.org/drawingml/2006/main" xmlns:r="http://schemas.openxmlformats.org/officeDocument/2006/relationships" xmlns:p="http://schemas.openxmlformats.org/presentationml/2006/main">
   <p:cSld name="Slide 37">
     <p:bg>
@@ -21167,7 +18152,228 @@
 </p:sld>
 </file>
 
-<file path=ppt/slides/slide31.xml><?xml version="1.0" encoding="utf-8"?>
+<file path=ppt/slides/slide3.xml><?xml version="1.0" encoding="utf-8"?>
+<p:sld xmlns:a="http://schemas.openxmlformats.org/drawingml/2006/main" xmlns:r="http://schemas.openxmlformats.org/officeDocument/2006/relationships" xmlns:p="http://schemas.openxmlformats.org/presentationml/2006/main">
+  <p:cSld name="Slide 4">
+    <p:bg>
+      <p:bgPr>
+        <a:solidFill>
+          <a:srgbClr val="222831"/>
+        </a:solidFill>
+        <a:effectLst/>
+      </p:bgPr>
+    </p:bg>
+    <p:spTree>
+      <p:nvGrpSpPr>
+        <p:cNvPr id="1" name=""/>
+        <p:cNvGrpSpPr/>
+        <p:nvPr/>
+      </p:nvGrpSpPr>
+      <p:grpSpPr>
+        <a:xfrm>
+          <a:off x="0" y="0"/>
+          <a:ext cx="0" cy="0"/>
+          <a:chOff x="0" y="0"/>
+          <a:chExt cx="0" cy="0"/>
+        </a:xfrm>
+      </p:grpSpPr>
+      <p:sp>
+        <p:nvSpPr>
+          <p:cNvPr id="2" name="Text 0"/>
+          <p:cNvSpPr/>
+          <p:nvPr/>
+        </p:nvSpPr>
+        <p:spPr>
+          <a:xfrm>
+            <a:off x="11018520" y="6263640"/>
+            <a:ext cx="548640" cy="274320"/>
+          </a:xfrm>
+          <a:prstGeom prst="rect">
+            <a:avLst/>
+          </a:prstGeom>
+          <a:noFill/>
+          <a:ln/>
+        </p:spPr>
+        <p:txBody>
+          <a:bodyPr wrap="square" lIns="0" tIns="0" rIns="0" bIns="0" rtlCol="0" anchor="ctr"/>
+          <a:lstStyle/>
+          <a:p>
+            <a:pPr marL="0" indent="0" algn="r">
+              <a:buNone/>
+            </a:pPr>
+            <a:r>
+              <a:rPr lang="en-US" sz="1200" dirty="0">
+                <a:solidFill>
+                  <a:srgbClr val="9AA3AD"/>
+                </a:solidFill>
+                <a:latin typeface="TH Sarabun New" pitchFamily="34" charset="0"/>
+                <a:ea typeface="TH Sarabun New" pitchFamily="34" charset="-122"/>
+                <a:cs typeface="TH Sarabun New" pitchFamily="34" charset="-120"/>
+              </a:rPr>
+              <a:t>4</a:t>
+            </a:r>
+            <a:endParaRPr lang="en-US" sz="1200" dirty="0"/>
+          </a:p>
+        </p:txBody>
+      </p:sp>
+      <p:sp>
+        <p:nvSpPr>
+          <p:cNvPr id="3" name="Shape 1"/>
+          <p:cNvSpPr/>
+          <p:nvPr/>
+        </p:nvSpPr>
+        <p:spPr>
+          <a:xfrm>
+            <a:off x="594360" y="2212848"/>
+            <a:ext cx="960120" cy="960120"/>
+          </a:xfrm>
+          <a:prstGeom prst="ellipse">
+            <a:avLst/>
+          </a:prstGeom>
+          <a:solidFill>
+            <a:srgbClr val="00ADB5"/>
+          </a:solidFill>
+          <a:ln w="12700">
+            <a:solidFill>
+              <a:srgbClr val="00ADB5"/>
+            </a:solidFill>
+            <a:prstDash val="solid"/>
+          </a:ln>
+        </p:spPr>
+        <p:txBody>
+          <a:bodyPr/>
+          <a:lstStyle/>
+          <a:p>
+            <a:endParaRPr lang="en-TH"/>
+          </a:p>
+        </p:txBody>
+      </p:sp>
+      <p:sp>
+        <p:nvSpPr>
+          <p:cNvPr id="4" name="Text 2"/>
+          <p:cNvSpPr/>
+          <p:nvPr/>
+        </p:nvSpPr>
+        <p:spPr>
+          <a:xfrm>
+            <a:off x="594360" y="2212848"/>
+            <a:ext cx="960120" cy="960120"/>
+          </a:xfrm>
+          <a:prstGeom prst="rect">
+            <a:avLst/>
+          </a:prstGeom>
+          <a:noFill/>
+          <a:ln/>
+        </p:spPr>
+        <p:txBody>
+          <a:bodyPr wrap="square" lIns="0" tIns="0" rIns="0" bIns="0" rtlCol="0" anchor="ctr"/>
+          <a:lstStyle/>
+          <a:p>
+            <a:pPr marL="0" indent="0" algn="ctr">
+              <a:buNone/>
+            </a:pPr>
+            <a:r>
+              <a:rPr lang="en-US" sz="3000" b="1" dirty="0">
+                <a:solidFill>
+                  <a:srgbClr val="222831"/>
+                </a:solidFill>
+                <a:latin typeface="TH Sarabun New" pitchFamily="34" charset="0"/>
+                <a:ea typeface="TH Sarabun New" pitchFamily="34" charset="-122"/>
+                <a:cs typeface="TH Sarabun New" pitchFamily="34" charset="-120"/>
+              </a:rPr>
+              <a:t>01</a:t>
+            </a:r>
+            <a:endParaRPr lang="en-US" sz="3000" dirty="0"/>
+          </a:p>
+        </p:txBody>
+      </p:sp>
+      <p:sp>
+        <p:nvSpPr>
+          <p:cNvPr id="5" name="Text 3"/>
+          <p:cNvSpPr/>
+          <p:nvPr/>
+        </p:nvSpPr>
+        <p:spPr>
+          <a:xfrm>
+            <a:off x="1920240" y="2286000"/>
+            <a:ext cx="9646920" cy="640080"/>
+          </a:xfrm>
+          <a:prstGeom prst="rect">
+            <a:avLst/>
+          </a:prstGeom>
+          <a:noFill/>
+          <a:ln/>
+        </p:spPr>
+        <p:txBody>
+          <a:bodyPr wrap="square" lIns="0" tIns="0" rIns="0" bIns="0" rtlCol="0" anchor="ctr"/>
+          <a:lstStyle/>
+          <a:p>
+            <a:pPr marL="0" indent="0">
+              <a:buNone/>
+            </a:pPr>
+            <a:r>
+              <a:rPr lang="en-US" sz="3600" b="1" dirty="0">
+                <a:solidFill>
+                  <a:srgbClr val="FFFFFF"/>
+                </a:solidFill>
+                <a:latin typeface="TH Sarabun New" pitchFamily="34" charset="0"/>
+                <a:ea typeface="TH Sarabun New" pitchFamily="34" charset="-122"/>
+                <a:cs typeface="TH Sarabun New" pitchFamily="34" charset="-120"/>
+              </a:rPr>
+              <a:t>พื้นฐาน Web Application</a:t>
+            </a:r>
+            <a:endParaRPr lang="en-US" sz="3600" dirty="0"/>
+          </a:p>
+        </p:txBody>
+      </p:sp>
+      <p:sp>
+        <p:nvSpPr>
+          <p:cNvPr id="6" name="Text 4"/>
+          <p:cNvSpPr/>
+          <p:nvPr/>
+        </p:nvSpPr>
+        <p:spPr>
+          <a:xfrm>
+            <a:off x="1920240" y="2907792"/>
+            <a:ext cx="9646920" cy="365760"/>
+          </a:xfrm>
+          <a:prstGeom prst="rect">
+            <a:avLst/>
+          </a:prstGeom>
+          <a:noFill/>
+          <a:ln/>
+        </p:spPr>
+        <p:txBody>
+          <a:bodyPr wrap="square" lIns="0" tIns="0" rIns="0" bIns="0" rtlCol="0" anchor="ctr"/>
+          <a:lstStyle/>
+          <a:p>
+            <a:pPr marL="0" indent="0">
+              <a:buNone/>
+            </a:pPr>
+            <a:r>
+              <a:rPr lang="en-US" sz="1700" dirty="0">
+                <a:solidFill>
+                  <a:srgbClr val="9FB0B3"/>
+                </a:solidFill>
+                <a:latin typeface="TH Sarabun New" pitchFamily="34" charset="0"/>
+                <a:ea typeface="TH Sarabun New" pitchFamily="34" charset="-122"/>
+                <a:cs typeface="TH Sarabun New" pitchFamily="34" charset="-120"/>
+              </a:rPr>
+              <a:t>รู้ว่าเรากำลังสร้างอะไร ก่อนจะสั่งให้ AI สร้างให้</a:t>
+            </a:r>
+            <a:endParaRPr lang="en-US" sz="1700" dirty="0"/>
+          </a:p>
+        </p:txBody>
+      </p:sp>
+    </p:spTree>
+  </p:cSld>
+  <p:clrMapOvr>
+    <a:masterClrMapping/>
+  </p:clrMapOvr>
+</p:sld>
+</file>
+
+<file path=ppt/slides/slide30.xml><?xml version="1.0" encoding="utf-8"?>
 <p:sld xmlns:a="http://schemas.openxmlformats.org/drawingml/2006/main" xmlns:r="http://schemas.openxmlformats.org/officeDocument/2006/relationships" xmlns:p="http://schemas.openxmlformats.org/presentationml/2006/main">
   <p:cSld name="Slide 38">
     <p:bg>
@@ -22051,227 +19257,6 @@
 
 <file path=ppt/slides/slide4.xml><?xml version="1.0" encoding="utf-8"?>
 <p:sld xmlns:a="http://schemas.openxmlformats.org/drawingml/2006/main" xmlns:r="http://schemas.openxmlformats.org/officeDocument/2006/relationships" xmlns:p="http://schemas.openxmlformats.org/presentationml/2006/main">
-  <p:cSld name="Slide 4">
-    <p:bg>
-      <p:bgPr>
-        <a:solidFill>
-          <a:srgbClr val="222831"/>
-        </a:solidFill>
-        <a:effectLst/>
-      </p:bgPr>
-    </p:bg>
-    <p:spTree>
-      <p:nvGrpSpPr>
-        <p:cNvPr id="1" name=""/>
-        <p:cNvGrpSpPr/>
-        <p:nvPr/>
-      </p:nvGrpSpPr>
-      <p:grpSpPr>
-        <a:xfrm>
-          <a:off x="0" y="0"/>
-          <a:ext cx="0" cy="0"/>
-          <a:chOff x="0" y="0"/>
-          <a:chExt cx="0" cy="0"/>
-        </a:xfrm>
-      </p:grpSpPr>
-      <p:sp>
-        <p:nvSpPr>
-          <p:cNvPr id="2" name="Text 0"/>
-          <p:cNvSpPr/>
-          <p:nvPr/>
-        </p:nvSpPr>
-        <p:spPr>
-          <a:xfrm>
-            <a:off x="11018520" y="6263640"/>
-            <a:ext cx="548640" cy="274320"/>
-          </a:xfrm>
-          <a:prstGeom prst="rect">
-            <a:avLst/>
-          </a:prstGeom>
-          <a:noFill/>
-          <a:ln/>
-        </p:spPr>
-        <p:txBody>
-          <a:bodyPr wrap="square" lIns="0" tIns="0" rIns="0" bIns="0" rtlCol="0" anchor="ctr"/>
-          <a:lstStyle/>
-          <a:p>
-            <a:pPr marL="0" indent="0" algn="r">
-              <a:buNone/>
-            </a:pPr>
-            <a:r>
-              <a:rPr lang="en-US" sz="1200" dirty="0">
-                <a:solidFill>
-                  <a:srgbClr val="9AA3AD"/>
-                </a:solidFill>
-                <a:latin typeface="TH Sarabun New" pitchFamily="34" charset="0"/>
-                <a:ea typeface="TH Sarabun New" pitchFamily="34" charset="-122"/>
-                <a:cs typeface="TH Sarabun New" pitchFamily="34" charset="-120"/>
-              </a:rPr>
-              <a:t>4</a:t>
-            </a:r>
-            <a:endParaRPr lang="en-US" sz="1200" dirty="0"/>
-          </a:p>
-        </p:txBody>
-      </p:sp>
-      <p:sp>
-        <p:nvSpPr>
-          <p:cNvPr id="3" name="Shape 1"/>
-          <p:cNvSpPr/>
-          <p:nvPr/>
-        </p:nvSpPr>
-        <p:spPr>
-          <a:xfrm>
-            <a:off x="594360" y="2212848"/>
-            <a:ext cx="960120" cy="960120"/>
-          </a:xfrm>
-          <a:prstGeom prst="ellipse">
-            <a:avLst/>
-          </a:prstGeom>
-          <a:solidFill>
-            <a:srgbClr val="00ADB5"/>
-          </a:solidFill>
-          <a:ln w="12700">
-            <a:solidFill>
-              <a:srgbClr val="00ADB5"/>
-            </a:solidFill>
-            <a:prstDash val="solid"/>
-          </a:ln>
-        </p:spPr>
-        <p:txBody>
-          <a:bodyPr/>
-          <a:lstStyle/>
-          <a:p>
-            <a:endParaRPr lang="en-TH"/>
-          </a:p>
-        </p:txBody>
-      </p:sp>
-      <p:sp>
-        <p:nvSpPr>
-          <p:cNvPr id="4" name="Text 2"/>
-          <p:cNvSpPr/>
-          <p:nvPr/>
-        </p:nvSpPr>
-        <p:spPr>
-          <a:xfrm>
-            <a:off x="594360" y="2212848"/>
-            <a:ext cx="960120" cy="960120"/>
-          </a:xfrm>
-          <a:prstGeom prst="rect">
-            <a:avLst/>
-          </a:prstGeom>
-          <a:noFill/>
-          <a:ln/>
-        </p:spPr>
-        <p:txBody>
-          <a:bodyPr wrap="square" lIns="0" tIns="0" rIns="0" bIns="0" rtlCol="0" anchor="ctr"/>
-          <a:lstStyle/>
-          <a:p>
-            <a:pPr marL="0" indent="0" algn="ctr">
-              <a:buNone/>
-            </a:pPr>
-            <a:r>
-              <a:rPr lang="en-US" sz="3000" b="1" dirty="0">
-                <a:solidFill>
-                  <a:srgbClr val="222831"/>
-                </a:solidFill>
-                <a:latin typeface="TH Sarabun New" pitchFamily="34" charset="0"/>
-                <a:ea typeface="TH Sarabun New" pitchFamily="34" charset="-122"/>
-                <a:cs typeface="TH Sarabun New" pitchFamily="34" charset="-120"/>
-              </a:rPr>
-              <a:t>01</a:t>
-            </a:r>
-            <a:endParaRPr lang="en-US" sz="3000" dirty="0"/>
-          </a:p>
-        </p:txBody>
-      </p:sp>
-      <p:sp>
-        <p:nvSpPr>
-          <p:cNvPr id="5" name="Text 3"/>
-          <p:cNvSpPr/>
-          <p:nvPr/>
-        </p:nvSpPr>
-        <p:spPr>
-          <a:xfrm>
-            <a:off x="1920240" y="2286000"/>
-            <a:ext cx="9646920" cy="640080"/>
-          </a:xfrm>
-          <a:prstGeom prst="rect">
-            <a:avLst/>
-          </a:prstGeom>
-          <a:noFill/>
-          <a:ln/>
-        </p:spPr>
-        <p:txBody>
-          <a:bodyPr wrap="square" lIns="0" tIns="0" rIns="0" bIns="0" rtlCol="0" anchor="ctr"/>
-          <a:lstStyle/>
-          <a:p>
-            <a:pPr marL="0" indent="0">
-              <a:buNone/>
-            </a:pPr>
-            <a:r>
-              <a:rPr lang="en-US" sz="3600" b="1" dirty="0">
-                <a:solidFill>
-                  <a:srgbClr val="FFFFFF"/>
-                </a:solidFill>
-                <a:latin typeface="TH Sarabun New" pitchFamily="34" charset="0"/>
-                <a:ea typeface="TH Sarabun New" pitchFamily="34" charset="-122"/>
-                <a:cs typeface="TH Sarabun New" pitchFamily="34" charset="-120"/>
-              </a:rPr>
-              <a:t>พื้นฐาน Web Application</a:t>
-            </a:r>
-            <a:endParaRPr lang="en-US" sz="3600" dirty="0"/>
-          </a:p>
-        </p:txBody>
-      </p:sp>
-      <p:sp>
-        <p:nvSpPr>
-          <p:cNvPr id="6" name="Text 4"/>
-          <p:cNvSpPr/>
-          <p:nvPr/>
-        </p:nvSpPr>
-        <p:spPr>
-          <a:xfrm>
-            <a:off x="1920240" y="2907792"/>
-            <a:ext cx="9646920" cy="365760"/>
-          </a:xfrm>
-          <a:prstGeom prst="rect">
-            <a:avLst/>
-          </a:prstGeom>
-          <a:noFill/>
-          <a:ln/>
-        </p:spPr>
-        <p:txBody>
-          <a:bodyPr wrap="square" lIns="0" tIns="0" rIns="0" bIns="0" rtlCol="0" anchor="ctr"/>
-          <a:lstStyle/>
-          <a:p>
-            <a:pPr marL="0" indent="0">
-              <a:buNone/>
-            </a:pPr>
-            <a:r>
-              <a:rPr lang="en-US" sz="1700" dirty="0">
-                <a:solidFill>
-                  <a:srgbClr val="9FB0B3"/>
-                </a:solidFill>
-                <a:latin typeface="TH Sarabun New" pitchFamily="34" charset="0"/>
-                <a:ea typeface="TH Sarabun New" pitchFamily="34" charset="-122"/>
-                <a:cs typeface="TH Sarabun New" pitchFamily="34" charset="-120"/>
-              </a:rPr>
-              <a:t>รู้ว่าเรากำลังสร้างอะไร ก่อนจะสั่งให้ AI สร้างให้</a:t>
-            </a:r>
-            <a:endParaRPr lang="en-US" sz="1700" dirty="0"/>
-          </a:p>
-        </p:txBody>
-      </p:sp>
-    </p:spTree>
-  </p:cSld>
-  <p:clrMapOvr>
-    <a:masterClrMapping/>
-  </p:clrMapOvr>
-</p:sld>
-</file>
-
-<file path=ppt/slides/slide5.xml><?xml version="1.0" encoding="utf-8"?>
-<p:sld xmlns:a="http://schemas.openxmlformats.org/drawingml/2006/main" xmlns:r="http://schemas.openxmlformats.org/officeDocument/2006/relationships" xmlns:p="http://schemas.openxmlformats.org/presentationml/2006/main">
   <p:cSld name="Slide 5">
     <p:bg>
       <p:bgPr>
@@ -22826,7 +19811,7 @@
 </p:sld>
 </file>
 
-<file path=ppt/slides/slide6.xml><?xml version="1.0" encoding="utf-8"?>
+<file path=ppt/slides/slide5.xml><?xml version="1.0" encoding="utf-8"?>
 <p:sld xmlns:a="http://schemas.openxmlformats.org/drawingml/2006/main" xmlns:r="http://schemas.openxmlformats.org/officeDocument/2006/relationships" xmlns:p="http://schemas.openxmlformats.org/presentationml/2006/main">
   <p:cSld name="Slide 6">
     <p:bg>
@@ -23813,7 +20798,7 @@
 </p:sld>
 </file>
 
-<file path=ppt/slides/slide7.xml><?xml version="1.0" encoding="utf-8"?>
+<file path=ppt/slides/slide6.xml><?xml version="1.0" encoding="utf-8"?>
 <p:sld xmlns:a="http://schemas.openxmlformats.org/drawingml/2006/main" xmlns:r="http://schemas.openxmlformats.org/officeDocument/2006/relationships" xmlns:p="http://schemas.openxmlformats.org/presentationml/2006/main">
   <p:cSld name="Slide 7">
     <p:bg>
@@ -24644,7 +21629,7 @@
 </p:sld>
 </file>
 
-<file path=ppt/slides/slide8.xml><?xml version="1.0" encoding="utf-8"?>
+<file path=ppt/slides/slide7.xml><?xml version="1.0" encoding="utf-8"?>
 <p:sld xmlns:a="http://schemas.openxmlformats.org/drawingml/2006/main" xmlns:r="http://schemas.openxmlformats.org/officeDocument/2006/relationships" xmlns:p="http://schemas.openxmlformats.org/presentationml/2006/main">
   <p:cSld name="Slide 8">
     <p:bg>
@@ -25997,7 +22982,7 @@
 </p:sld>
 </file>
 
-<file path=ppt/slides/slide9.xml><?xml version="1.0" encoding="utf-8"?>
+<file path=ppt/slides/slide8.xml><?xml version="1.0" encoding="utf-8"?>
 <p:sld xmlns:a="http://schemas.openxmlformats.org/drawingml/2006/main" xmlns:r="http://schemas.openxmlformats.org/officeDocument/2006/relationships" xmlns:p="http://schemas.openxmlformats.org/presentationml/2006/main">
   <p:cSld name="Slide 9">
     <p:bg>
@@ -27469,6 +24454,1179 @@
               <a:t>AI Agent ที่เขียนโค้ดให้เรา</a:t>
             </a:r>
             <a:endParaRPr lang="en-US" sz="1500" dirty="0"/>
+          </a:p>
+        </p:txBody>
+      </p:sp>
+    </p:spTree>
+  </p:cSld>
+  <p:clrMapOvr>
+    <a:masterClrMapping/>
+  </p:clrMapOvr>
+</p:sld>
+</file>
+
+<file path=ppt/slides/slide9.xml><?xml version="1.0" encoding="utf-8"?>
+<p:sld xmlns:a="http://schemas.openxmlformats.org/drawingml/2006/main" xmlns:r="http://schemas.openxmlformats.org/officeDocument/2006/relationships" xmlns:p="http://schemas.openxmlformats.org/presentationml/2006/main">
+  <p:cSld name="Slide 10">
+    <p:bg>
+      <p:bgPr>
+        <a:solidFill>
+          <a:srgbClr val="E8F6F7"/>
+        </a:solidFill>
+        <a:effectLst/>
+      </p:bgPr>
+    </p:bg>
+    <p:spTree>
+      <p:nvGrpSpPr>
+        <p:cNvPr id="1" name=""/>
+        <p:cNvGrpSpPr/>
+        <p:nvPr/>
+      </p:nvGrpSpPr>
+      <p:grpSpPr>
+        <a:xfrm>
+          <a:off x="0" y="0"/>
+          <a:ext cx="0" cy="0"/>
+          <a:chOff x="0" y="0"/>
+          <a:chExt cx="0" cy="0"/>
+        </a:xfrm>
+      </p:grpSpPr>
+      <p:sp>
+        <p:nvSpPr>
+          <p:cNvPr id="2" name="Text 0"/>
+          <p:cNvSpPr/>
+          <p:nvPr/>
+        </p:nvSpPr>
+        <p:spPr>
+          <a:xfrm>
+            <a:off x="11018520" y="6263640"/>
+            <a:ext cx="548640" cy="274320"/>
+          </a:xfrm>
+          <a:prstGeom prst="rect">
+            <a:avLst/>
+          </a:prstGeom>
+          <a:noFill/>
+          <a:ln/>
+        </p:spPr>
+        <p:txBody>
+          <a:bodyPr wrap="square" lIns="0" tIns="0" rIns="0" bIns="0" rtlCol="0" anchor="ctr"/>
+          <a:lstStyle/>
+          <a:p>
+            <a:pPr marL="0" indent="0" algn="r">
+              <a:buNone/>
+            </a:pPr>
+            <a:r>
+              <a:rPr lang="en-US" sz="1200" dirty="0">
+                <a:solidFill>
+                  <a:srgbClr val="9AA3AD"/>
+                </a:solidFill>
+                <a:latin typeface="TH Sarabun New" pitchFamily="34" charset="0"/>
+                <a:ea typeface="TH Sarabun New" pitchFamily="34" charset="-122"/>
+                <a:cs typeface="TH Sarabun New" pitchFamily="34" charset="-120"/>
+              </a:rPr>
+              <a:t>10</a:t>
+            </a:r>
+            <a:endParaRPr lang="en-US" sz="1200" dirty="0"/>
+          </a:p>
+        </p:txBody>
+      </p:sp>
+      <p:sp>
+        <p:nvSpPr>
+          <p:cNvPr id="3" name="Shape 1"/>
+          <p:cNvSpPr/>
+          <p:nvPr/>
+        </p:nvSpPr>
+        <p:spPr>
+          <a:xfrm>
+            <a:off x="594360" y="310896"/>
+            <a:ext cx="1481328" cy="475488"/>
+          </a:xfrm>
+          <a:prstGeom prst="roundRect">
+            <a:avLst>
+              <a:gd name="adj" fmla="val 50000"/>
+            </a:avLst>
+          </a:prstGeom>
+          <a:solidFill>
+            <a:srgbClr val="00ADB5"/>
+          </a:solidFill>
+          <a:ln w="12700">
+            <a:solidFill>
+              <a:srgbClr val="00ADB5"/>
+            </a:solidFill>
+            <a:prstDash val="solid"/>
+          </a:ln>
+        </p:spPr>
+        <p:txBody>
+          <a:bodyPr/>
+          <a:lstStyle/>
+          <a:p>
+            <a:endParaRPr lang="en-TH"/>
+          </a:p>
+        </p:txBody>
+      </p:sp>
+      <p:sp>
+        <p:nvSpPr>
+          <p:cNvPr id="4" name="Text 2"/>
+          <p:cNvSpPr/>
+          <p:nvPr/>
+        </p:nvSpPr>
+        <p:spPr>
+          <a:xfrm>
+            <a:off x="594360" y="310896"/>
+            <a:ext cx="1481328" cy="475488"/>
+          </a:xfrm>
+          <a:prstGeom prst="rect">
+            <a:avLst/>
+          </a:prstGeom>
+          <a:noFill/>
+          <a:ln/>
+        </p:spPr>
+        <p:txBody>
+          <a:bodyPr wrap="square" lIns="0" tIns="0" rIns="0" bIns="0" rtlCol="0" anchor="ctr"/>
+          <a:lstStyle/>
+          <a:p>
+            <a:pPr marL="0" indent="0" algn="ctr">
+              <a:buNone/>
+            </a:pPr>
+            <a:r>
+              <a:rPr lang="en-US" sz="1800" b="1" dirty="0">
+                <a:solidFill>
+                  <a:srgbClr val="FFFFFF"/>
+                </a:solidFill>
+                <a:latin typeface="TH Sarabun New" pitchFamily="34" charset="0"/>
+                <a:ea typeface="TH Sarabun New" pitchFamily="34" charset="-122"/>
+                <a:cs typeface="TH Sarabun New" pitchFamily="34" charset="-120"/>
+              </a:rPr>
+              <a:t>LAB A</a:t>
+            </a:r>
+            <a:endParaRPr lang="en-US" sz="1800" dirty="0"/>
+          </a:p>
+        </p:txBody>
+      </p:sp>
+      <p:sp>
+        <p:nvSpPr>
+          <p:cNvPr id="5" name="Text 3"/>
+          <p:cNvSpPr/>
+          <p:nvPr/>
+        </p:nvSpPr>
+        <p:spPr>
+          <a:xfrm>
+            <a:off x="2286000" y="274320"/>
+            <a:ext cx="7315200" cy="548640"/>
+          </a:xfrm>
+          <a:prstGeom prst="rect">
+            <a:avLst/>
+          </a:prstGeom>
+          <a:noFill/>
+          <a:ln/>
+        </p:spPr>
+        <p:txBody>
+          <a:bodyPr wrap="square" lIns="0" tIns="0" rIns="0" bIns="0" rtlCol="0" anchor="ctr"/>
+          <a:lstStyle/>
+          <a:p>
+            <a:pPr marL="0" indent="0">
+              <a:buNone/>
+            </a:pPr>
+            <a:r>
+              <a:rPr lang="en-US" sz="3000" b="1" dirty="0">
+                <a:solidFill>
+                  <a:srgbClr val="222831"/>
+                </a:solidFill>
+                <a:latin typeface="TH Sarabun New" pitchFamily="34" charset="0"/>
+                <a:ea typeface="TH Sarabun New" pitchFamily="34" charset="-122"/>
+                <a:cs typeface="TH Sarabun New" pitchFamily="34" charset="-120"/>
+              </a:rPr>
+              <a:t>เตรียมเครื่องและเปิดโปรเจกต์</a:t>
+            </a:r>
+            <a:endParaRPr lang="en-US" sz="3000" dirty="0"/>
+          </a:p>
+        </p:txBody>
+      </p:sp>
+      <p:sp>
+        <p:nvSpPr>
+          <p:cNvPr id="6" name="Text 4"/>
+          <p:cNvSpPr/>
+          <p:nvPr/>
+        </p:nvSpPr>
+        <p:spPr>
+          <a:xfrm>
+            <a:off x="9738360" y="310896"/>
+            <a:ext cx="1828800" cy="475488"/>
+          </a:xfrm>
+          <a:prstGeom prst="rect">
+            <a:avLst/>
+          </a:prstGeom>
+          <a:noFill/>
+          <a:ln/>
+        </p:spPr>
+        <p:txBody>
+          <a:bodyPr wrap="square" lIns="0" tIns="0" rIns="0" bIns="0" rtlCol="0" anchor="ctr"/>
+          <a:lstStyle/>
+          <a:p>
+            <a:pPr marL="0" indent="0" algn="r">
+              <a:buNone/>
+            </a:pPr>
+            <a:r>
+              <a:rPr lang="en-US" sz="1700" dirty="0">
+                <a:solidFill>
+                  <a:srgbClr val="393E46"/>
+                </a:solidFill>
+                <a:latin typeface="TH Sarabun New" pitchFamily="34" charset="0"/>
+                <a:ea typeface="TH Sarabun New" pitchFamily="34" charset="-122"/>
+                <a:cs typeface="TH Sarabun New" pitchFamily="34" charset="-120"/>
+              </a:rPr>
+              <a:t>10 นาที</a:t>
+            </a:r>
+            <a:endParaRPr lang="en-US" sz="1700" dirty="0"/>
+          </a:p>
+        </p:txBody>
+      </p:sp>
+      <p:sp>
+        <p:nvSpPr>
+          <p:cNvPr id="7" name="Shape 5"/>
+          <p:cNvSpPr/>
+          <p:nvPr/>
+        </p:nvSpPr>
+        <p:spPr>
+          <a:xfrm>
+            <a:off x="594360" y="1024128"/>
+            <a:ext cx="5760720" cy="3794760"/>
+          </a:xfrm>
+          <a:prstGeom prst="roundRect">
+            <a:avLst>
+              <a:gd name="adj" fmla="val 2169"/>
+            </a:avLst>
+          </a:prstGeom>
+          <a:solidFill>
+            <a:srgbClr val="FFFFFF"/>
+          </a:solidFill>
+          <a:ln w="9525">
+            <a:solidFill>
+              <a:srgbClr val="FFFFFF"/>
+            </a:solidFill>
+            <a:prstDash val="solid"/>
+          </a:ln>
+          <a:effectLst>
+            <a:outerShdw blurRad="101600" dist="12700" dir="5400000" algn="bl" rotWithShape="0">
+              <a:srgbClr val="222831">
+                <a:alpha val="10000"/>
+              </a:srgbClr>
+            </a:outerShdw>
+          </a:effectLst>
+        </p:spPr>
+        <p:txBody>
+          <a:bodyPr/>
+          <a:lstStyle/>
+          <a:p>
+            <a:endParaRPr lang="en-TH"/>
+          </a:p>
+        </p:txBody>
+      </p:sp>
+      <p:sp>
+        <p:nvSpPr>
+          <p:cNvPr id="8" name="Text 6"/>
+          <p:cNvSpPr/>
+          <p:nvPr/>
+        </p:nvSpPr>
+        <p:spPr>
+          <a:xfrm>
+            <a:off x="850392" y="1188720"/>
+            <a:ext cx="5248656" cy="310896"/>
+          </a:xfrm>
+          <a:prstGeom prst="rect">
+            <a:avLst/>
+          </a:prstGeom>
+          <a:noFill/>
+          <a:ln/>
+        </p:spPr>
+        <p:txBody>
+          <a:bodyPr wrap="square" lIns="0" tIns="0" rIns="0" bIns="0" rtlCol="0" anchor="ctr"/>
+          <a:lstStyle/>
+          <a:p>
+            <a:pPr marL="0" indent="0">
+              <a:buNone/>
+            </a:pPr>
+            <a:r>
+              <a:rPr lang="en-US" sz="1900" b="1" dirty="0">
+                <a:solidFill>
+                  <a:srgbClr val="222831"/>
+                </a:solidFill>
+                <a:latin typeface="TH Sarabun New" pitchFamily="34" charset="0"/>
+                <a:ea typeface="TH Sarabun New" pitchFamily="34" charset="-122"/>
+                <a:cs typeface="TH Sarabun New" pitchFamily="34" charset="-120"/>
+              </a:rPr>
+              <a:t>สิ่งที่ต้องทำ</a:t>
+            </a:r>
+            <a:endParaRPr lang="en-US" sz="1900" dirty="0"/>
+          </a:p>
+        </p:txBody>
+      </p:sp>
+      <p:sp>
+        <p:nvSpPr>
+          <p:cNvPr id="9" name="Shape 7"/>
+          <p:cNvSpPr/>
+          <p:nvPr/>
+        </p:nvSpPr>
+        <p:spPr>
+          <a:xfrm>
+            <a:off x="868680" y="1636776"/>
+            <a:ext cx="329184" cy="329184"/>
+          </a:xfrm>
+          <a:prstGeom prst="ellipse">
+            <a:avLst/>
+          </a:prstGeom>
+          <a:solidFill>
+            <a:srgbClr val="00ADB5"/>
+          </a:solidFill>
+          <a:ln w="12700">
+            <a:solidFill>
+              <a:srgbClr val="00ADB5"/>
+            </a:solidFill>
+            <a:prstDash val="solid"/>
+          </a:ln>
+        </p:spPr>
+        <p:txBody>
+          <a:bodyPr/>
+          <a:lstStyle/>
+          <a:p>
+            <a:endParaRPr lang="en-TH"/>
+          </a:p>
+        </p:txBody>
+      </p:sp>
+      <p:sp>
+        <p:nvSpPr>
+          <p:cNvPr id="10" name="Text 8"/>
+          <p:cNvSpPr/>
+          <p:nvPr/>
+        </p:nvSpPr>
+        <p:spPr>
+          <a:xfrm>
+            <a:off x="868680" y="1636776"/>
+            <a:ext cx="329184" cy="329184"/>
+          </a:xfrm>
+          <a:prstGeom prst="rect">
+            <a:avLst/>
+          </a:prstGeom>
+          <a:noFill/>
+          <a:ln/>
+        </p:spPr>
+        <p:txBody>
+          <a:bodyPr wrap="square" lIns="0" tIns="0" rIns="0" bIns="0" rtlCol="0" anchor="ctr"/>
+          <a:lstStyle/>
+          <a:p>
+            <a:pPr marL="0" indent="0" algn="ctr">
+              <a:buNone/>
+            </a:pPr>
+            <a:r>
+              <a:rPr lang="en-US" sz="1500" b="1" dirty="0">
+                <a:solidFill>
+                  <a:srgbClr val="FFFFFF"/>
+                </a:solidFill>
+                <a:latin typeface="TH Sarabun New" pitchFamily="34" charset="0"/>
+                <a:ea typeface="TH Sarabun New" pitchFamily="34" charset="-122"/>
+                <a:cs typeface="TH Sarabun New" pitchFamily="34" charset="-120"/>
+              </a:rPr>
+              <a:t>1</a:t>
+            </a:r>
+            <a:endParaRPr lang="en-US" sz="1500" dirty="0"/>
+          </a:p>
+        </p:txBody>
+      </p:sp>
+      <p:sp>
+        <p:nvSpPr>
+          <p:cNvPr id="11" name="Text 9"/>
+          <p:cNvSpPr/>
+          <p:nvPr/>
+        </p:nvSpPr>
+        <p:spPr>
+          <a:xfrm>
+            <a:off x="1307592" y="1572768"/>
+            <a:ext cx="4754880" cy="457200"/>
+          </a:xfrm>
+          <a:prstGeom prst="rect">
+            <a:avLst/>
+          </a:prstGeom>
+          <a:noFill/>
+          <a:ln/>
+        </p:spPr>
+        <p:txBody>
+          <a:bodyPr wrap="square" lIns="0" tIns="0" rIns="0" bIns="0" rtlCol="0" anchor="ctr"/>
+          <a:lstStyle/>
+          <a:p>
+            <a:pPr marL="0" indent="0">
+              <a:buNone/>
+            </a:pPr>
+            <a:r>
+              <a:rPr lang="en-US" sz="1600" dirty="0">
+                <a:solidFill>
+                  <a:srgbClr val="393E46"/>
+                </a:solidFill>
+                <a:latin typeface="TH Sarabun New" pitchFamily="34" charset="0"/>
+                <a:ea typeface="TH Sarabun New" pitchFamily="34" charset="-122"/>
+                <a:cs typeface="TH Sarabun New" pitchFamily="34" charset="-120"/>
+              </a:rPr>
+              <a:t>ตรวจว่ามี Node.js, Git และ Antigravity IDE แล้ว</a:t>
+            </a:r>
+            <a:endParaRPr lang="en-US" sz="1600" dirty="0"/>
+          </a:p>
+        </p:txBody>
+      </p:sp>
+      <p:sp>
+        <p:nvSpPr>
+          <p:cNvPr id="12" name="Shape 10"/>
+          <p:cNvSpPr/>
+          <p:nvPr/>
+        </p:nvSpPr>
+        <p:spPr>
+          <a:xfrm>
+            <a:off x="868680" y="2221992"/>
+            <a:ext cx="329184" cy="329184"/>
+          </a:xfrm>
+          <a:prstGeom prst="ellipse">
+            <a:avLst/>
+          </a:prstGeom>
+          <a:solidFill>
+            <a:srgbClr val="00ADB5"/>
+          </a:solidFill>
+          <a:ln w="12700">
+            <a:solidFill>
+              <a:srgbClr val="00ADB5"/>
+            </a:solidFill>
+            <a:prstDash val="solid"/>
+          </a:ln>
+        </p:spPr>
+        <p:txBody>
+          <a:bodyPr/>
+          <a:lstStyle/>
+          <a:p>
+            <a:endParaRPr lang="en-TH"/>
+          </a:p>
+        </p:txBody>
+      </p:sp>
+      <p:sp>
+        <p:nvSpPr>
+          <p:cNvPr id="13" name="Text 11"/>
+          <p:cNvSpPr/>
+          <p:nvPr/>
+        </p:nvSpPr>
+        <p:spPr>
+          <a:xfrm>
+            <a:off x="868680" y="2221992"/>
+            <a:ext cx="329184" cy="329184"/>
+          </a:xfrm>
+          <a:prstGeom prst="rect">
+            <a:avLst/>
+          </a:prstGeom>
+          <a:noFill/>
+          <a:ln/>
+        </p:spPr>
+        <p:txBody>
+          <a:bodyPr wrap="square" lIns="0" tIns="0" rIns="0" bIns="0" rtlCol="0" anchor="ctr"/>
+          <a:lstStyle/>
+          <a:p>
+            <a:pPr marL="0" indent="0" algn="ctr">
+              <a:buNone/>
+            </a:pPr>
+            <a:r>
+              <a:rPr lang="en-US" sz="1500" b="1" dirty="0">
+                <a:solidFill>
+                  <a:srgbClr val="FFFFFF"/>
+                </a:solidFill>
+                <a:latin typeface="TH Sarabun New" pitchFamily="34" charset="0"/>
+                <a:ea typeface="TH Sarabun New" pitchFamily="34" charset="-122"/>
+                <a:cs typeface="TH Sarabun New" pitchFamily="34" charset="-120"/>
+              </a:rPr>
+              <a:t>2</a:t>
+            </a:r>
+            <a:endParaRPr lang="en-US" sz="1500" dirty="0"/>
+          </a:p>
+        </p:txBody>
+      </p:sp>
+      <p:sp>
+        <p:nvSpPr>
+          <p:cNvPr id="14" name="Text 12"/>
+          <p:cNvSpPr/>
+          <p:nvPr/>
+        </p:nvSpPr>
+        <p:spPr>
+          <a:xfrm>
+            <a:off x="1307592" y="2157984"/>
+            <a:ext cx="4754880" cy="457200"/>
+          </a:xfrm>
+          <a:prstGeom prst="rect">
+            <a:avLst/>
+          </a:prstGeom>
+          <a:noFill/>
+          <a:ln/>
+        </p:spPr>
+        <p:txBody>
+          <a:bodyPr wrap="square" lIns="0" tIns="0" rIns="0" bIns="0" rtlCol="0" anchor="ctr"/>
+          <a:lstStyle/>
+          <a:p>
+            <a:pPr marL="0" indent="0">
+              <a:buNone/>
+            </a:pPr>
+            <a:r>
+              <a:rPr lang="en-US" sz="1600" dirty="0">
+                <a:solidFill>
+                  <a:srgbClr val="393E46"/>
+                </a:solidFill>
+                <a:latin typeface="TH Sarabun New" pitchFamily="34" charset="0"/>
+                <a:ea typeface="TH Sarabun New" pitchFamily="34" charset="-122"/>
+                <a:cs typeface="TH Sarabun New" pitchFamily="34" charset="-120"/>
+              </a:rPr>
+              <a:t>สร้างโฟลเดอร์ fundinghub แล้วเปิดใน Antigravity</a:t>
+            </a:r>
+            <a:endParaRPr lang="en-US" sz="1600" dirty="0"/>
+          </a:p>
+        </p:txBody>
+      </p:sp>
+      <p:sp>
+        <p:nvSpPr>
+          <p:cNvPr id="15" name="Shape 13"/>
+          <p:cNvSpPr/>
+          <p:nvPr/>
+        </p:nvSpPr>
+        <p:spPr>
+          <a:xfrm>
+            <a:off x="868680" y="2807208"/>
+            <a:ext cx="329184" cy="329184"/>
+          </a:xfrm>
+          <a:prstGeom prst="ellipse">
+            <a:avLst/>
+          </a:prstGeom>
+          <a:solidFill>
+            <a:srgbClr val="00ADB5"/>
+          </a:solidFill>
+          <a:ln w="12700">
+            <a:solidFill>
+              <a:srgbClr val="00ADB5"/>
+            </a:solidFill>
+            <a:prstDash val="solid"/>
+          </a:ln>
+        </p:spPr>
+        <p:txBody>
+          <a:bodyPr/>
+          <a:lstStyle/>
+          <a:p>
+            <a:endParaRPr lang="en-TH"/>
+          </a:p>
+        </p:txBody>
+      </p:sp>
+      <p:sp>
+        <p:nvSpPr>
+          <p:cNvPr id="16" name="Text 14"/>
+          <p:cNvSpPr/>
+          <p:nvPr/>
+        </p:nvSpPr>
+        <p:spPr>
+          <a:xfrm>
+            <a:off x="868680" y="2807208"/>
+            <a:ext cx="329184" cy="329184"/>
+          </a:xfrm>
+          <a:prstGeom prst="rect">
+            <a:avLst/>
+          </a:prstGeom>
+          <a:noFill/>
+          <a:ln/>
+        </p:spPr>
+        <p:txBody>
+          <a:bodyPr wrap="square" lIns="0" tIns="0" rIns="0" bIns="0" rtlCol="0" anchor="ctr"/>
+          <a:lstStyle/>
+          <a:p>
+            <a:pPr marL="0" indent="0" algn="ctr">
+              <a:buNone/>
+            </a:pPr>
+            <a:r>
+              <a:rPr lang="en-US" sz="1500" b="1" dirty="0">
+                <a:solidFill>
+                  <a:srgbClr val="FFFFFF"/>
+                </a:solidFill>
+                <a:latin typeface="TH Sarabun New" pitchFamily="34" charset="0"/>
+                <a:ea typeface="TH Sarabun New" pitchFamily="34" charset="-122"/>
+                <a:cs typeface="TH Sarabun New" pitchFamily="34" charset="-120"/>
+              </a:rPr>
+              <a:t>3</a:t>
+            </a:r>
+            <a:endParaRPr lang="en-US" sz="1500" dirty="0"/>
+          </a:p>
+        </p:txBody>
+      </p:sp>
+      <p:sp>
+        <p:nvSpPr>
+          <p:cNvPr id="17" name="Text 15"/>
+          <p:cNvSpPr/>
+          <p:nvPr/>
+        </p:nvSpPr>
+        <p:spPr>
+          <a:xfrm>
+            <a:off x="1307592" y="2743200"/>
+            <a:ext cx="4754880" cy="457200"/>
+          </a:xfrm>
+          <a:prstGeom prst="rect">
+            <a:avLst/>
+          </a:prstGeom>
+          <a:noFill/>
+          <a:ln/>
+        </p:spPr>
+        <p:txBody>
+          <a:bodyPr wrap="square" lIns="0" tIns="0" rIns="0" bIns="0" rtlCol="0" anchor="ctr"/>
+          <a:lstStyle/>
+          <a:p>
+            <a:pPr marL="0" indent="0">
+              <a:buNone/>
+            </a:pPr>
+            <a:r>
+              <a:rPr lang="en-US" sz="1600" dirty="0">
+                <a:solidFill>
+                  <a:srgbClr val="393E46"/>
+                </a:solidFill>
+                <a:latin typeface="TH Sarabun New" pitchFamily="34" charset="0"/>
+                <a:ea typeface="TH Sarabun New" pitchFamily="34" charset="-122"/>
+                <a:cs typeface="TH Sarabun New" pitchFamily="34" charset="-120"/>
+              </a:rPr>
+              <a:t>สร้างไฟล์เปล่าชื่อ SPEC_FundingHub.md ที่รากโปรเจกต์</a:t>
+            </a:r>
+            <a:endParaRPr lang="en-US" sz="1600" dirty="0"/>
+          </a:p>
+        </p:txBody>
+      </p:sp>
+      <p:sp>
+        <p:nvSpPr>
+          <p:cNvPr id="18" name="Shape 16"/>
+          <p:cNvSpPr/>
+          <p:nvPr/>
+        </p:nvSpPr>
+        <p:spPr>
+          <a:xfrm>
+            <a:off x="868680" y="3392424"/>
+            <a:ext cx="329184" cy="329184"/>
+          </a:xfrm>
+          <a:prstGeom prst="ellipse">
+            <a:avLst/>
+          </a:prstGeom>
+          <a:solidFill>
+            <a:srgbClr val="00ADB5"/>
+          </a:solidFill>
+          <a:ln w="12700">
+            <a:solidFill>
+              <a:srgbClr val="00ADB5"/>
+            </a:solidFill>
+            <a:prstDash val="solid"/>
+          </a:ln>
+        </p:spPr>
+        <p:txBody>
+          <a:bodyPr/>
+          <a:lstStyle/>
+          <a:p>
+            <a:endParaRPr lang="en-TH"/>
+          </a:p>
+        </p:txBody>
+      </p:sp>
+      <p:sp>
+        <p:nvSpPr>
+          <p:cNvPr id="19" name="Text 17"/>
+          <p:cNvSpPr/>
+          <p:nvPr/>
+        </p:nvSpPr>
+        <p:spPr>
+          <a:xfrm>
+            <a:off x="868680" y="3392424"/>
+            <a:ext cx="329184" cy="329184"/>
+          </a:xfrm>
+          <a:prstGeom prst="rect">
+            <a:avLst/>
+          </a:prstGeom>
+          <a:noFill/>
+          <a:ln/>
+        </p:spPr>
+        <p:txBody>
+          <a:bodyPr wrap="square" lIns="0" tIns="0" rIns="0" bIns="0" rtlCol="0" anchor="ctr"/>
+          <a:lstStyle/>
+          <a:p>
+            <a:pPr marL="0" indent="0" algn="ctr">
+              <a:buNone/>
+            </a:pPr>
+            <a:r>
+              <a:rPr lang="en-US" sz="1500" b="1" dirty="0">
+                <a:solidFill>
+                  <a:srgbClr val="FFFFFF"/>
+                </a:solidFill>
+                <a:latin typeface="TH Sarabun New" pitchFamily="34" charset="0"/>
+                <a:ea typeface="TH Sarabun New" pitchFamily="34" charset="-122"/>
+                <a:cs typeface="TH Sarabun New" pitchFamily="34" charset="-120"/>
+              </a:rPr>
+              <a:t>4</a:t>
+            </a:r>
+            <a:endParaRPr lang="en-US" sz="1500" dirty="0"/>
+          </a:p>
+        </p:txBody>
+      </p:sp>
+      <p:sp>
+        <p:nvSpPr>
+          <p:cNvPr id="20" name="Text 18"/>
+          <p:cNvSpPr/>
+          <p:nvPr/>
+        </p:nvSpPr>
+        <p:spPr>
+          <a:xfrm>
+            <a:off x="1307592" y="3328416"/>
+            <a:ext cx="4754880" cy="457200"/>
+          </a:xfrm>
+          <a:prstGeom prst="rect">
+            <a:avLst/>
+          </a:prstGeom>
+          <a:noFill/>
+          <a:ln/>
+        </p:spPr>
+        <p:txBody>
+          <a:bodyPr wrap="square" lIns="0" tIns="0" rIns="0" bIns="0" rtlCol="0" anchor="ctr"/>
+          <a:lstStyle/>
+          <a:p>
+            <a:pPr marL="0" indent="0">
+              <a:buNone/>
+            </a:pPr>
+            <a:r>
+              <a:rPr lang="en-US" sz="1600" dirty="0">
+                <a:solidFill>
+                  <a:srgbClr val="393E46"/>
+                </a:solidFill>
+                <a:latin typeface="TH Sarabun New" pitchFamily="34" charset="0"/>
+                <a:ea typeface="TH Sarabun New" pitchFamily="34" charset="-122"/>
+                <a:cs typeface="TH Sarabun New" pitchFamily="34" charset="-120"/>
+              </a:rPr>
+              <a:t>เปิดไฟล์ SPEC_BLOCKS.md ที่แจกให้ ไว้อีกหน้าต่างหนึ่ง</a:t>
+            </a:r>
+            <a:endParaRPr lang="en-US" sz="1600" dirty="0"/>
+          </a:p>
+        </p:txBody>
+      </p:sp>
+      <p:sp>
+        <p:nvSpPr>
+          <p:cNvPr id="21" name="Shape 19"/>
+          <p:cNvSpPr/>
+          <p:nvPr/>
+        </p:nvSpPr>
+        <p:spPr>
+          <a:xfrm>
+            <a:off x="868680" y="3977640"/>
+            <a:ext cx="329184" cy="329184"/>
+          </a:xfrm>
+          <a:prstGeom prst="ellipse">
+            <a:avLst/>
+          </a:prstGeom>
+          <a:solidFill>
+            <a:srgbClr val="00ADB5"/>
+          </a:solidFill>
+          <a:ln w="12700">
+            <a:solidFill>
+              <a:srgbClr val="00ADB5"/>
+            </a:solidFill>
+            <a:prstDash val="solid"/>
+          </a:ln>
+        </p:spPr>
+        <p:txBody>
+          <a:bodyPr/>
+          <a:lstStyle/>
+          <a:p>
+            <a:endParaRPr lang="en-TH"/>
+          </a:p>
+        </p:txBody>
+      </p:sp>
+      <p:sp>
+        <p:nvSpPr>
+          <p:cNvPr id="22" name="Text 20"/>
+          <p:cNvSpPr/>
+          <p:nvPr/>
+        </p:nvSpPr>
+        <p:spPr>
+          <a:xfrm>
+            <a:off x="868680" y="3977640"/>
+            <a:ext cx="329184" cy="329184"/>
+          </a:xfrm>
+          <a:prstGeom prst="rect">
+            <a:avLst/>
+          </a:prstGeom>
+          <a:noFill/>
+          <a:ln/>
+        </p:spPr>
+        <p:txBody>
+          <a:bodyPr wrap="square" lIns="0" tIns="0" rIns="0" bIns="0" rtlCol="0" anchor="ctr"/>
+          <a:lstStyle/>
+          <a:p>
+            <a:pPr marL="0" indent="0" algn="ctr">
+              <a:buNone/>
+            </a:pPr>
+            <a:r>
+              <a:rPr lang="en-US" sz="1500" b="1" dirty="0">
+                <a:solidFill>
+                  <a:srgbClr val="FFFFFF"/>
+                </a:solidFill>
+                <a:latin typeface="TH Sarabun New" pitchFamily="34" charset="0"/>
+                <a:ea typeface="TH Sarabun New" pitchFamily="34" charset="-122"/>
+                <a:cs typeface="TH Sarabun New" pitchFamily="34" charset="-120"/>
+              </a:rPr>
+              <a:t>5</a:t>
+            </a:r>
+            <a:endParaRPr lang="en-US" sz="1500" dirty="0"/>
+          </a:p>
+        </p:txBody>
+      </p:sp>
+      <p:sp>
+        <p:nvSpPr>
+          <p:cNvPr id="23" name="Text 21"/>
+          <p:cNvSpPr/>
+          <p:nvPr/>
+        </p:nvSpPr>
+        <p:spPr>
+          <a:xfrm>
+            <a:off x="1307592" y="3913632"/>
+            <a:ext cx="4754880" cy="457200"/>
+          </a:xfrm>
+          <a:prstGeom prst="rect">
+            <a:avLst/>
+          </a:prstGeom>
+          <a:noFill/>
+          <a:ln/>
+        </p:spPr>
+        <p:txBody>
+          <a:bodyPr wrap="square" lIns="0" tIns="0" rIns="0" bIns="0" rtlCol="0" anchor="ctr"/>
+          <a:lstStyle/>
+          <a:p>
+            <a:pPr marL="0" indent="0">
+              <a:buNone/>
+            </a:pPr>
+            <a:r>
+              <a:rPr lang="en-US" sz="1600" dirty="0">
+                <a:solidFill>
+                  <a:srgbClr val="393E46"/>
+                </a:solidFill>
+                <a:latin typeface="TH Sarabun New" pitchFamily="34" charset="0"/>
+                <a:ea typeface="TH Sarabun New" pitchFamily="34" charset="-122"/>
+                <a:cs typeface="TH Sarabun New" pitchFamily="34" charset="-120"/>
+              </a:rPr>
+              <a:t>หาให้เจอ 4 ส่วน : Editor / Agent / Artifacts / Browser</a:t>
+            </a:r>
+            <a:endParaRPr lang="en-US" sz="1600" dirty="0"/>
+          </a:p>
+        </p:txBody>
+      </p:sp>
+      <p:sp>
+        <p:nvSpPr>
+          <p:cNvPr id="24" name="Shape 22"/>
+          <p:cNvSpPr/>
+          <p:nvPr/>
+        </p:nvSpPr>
+        <p:spPr>
+          <a:xfrm>
+            <a:off x="6583680" y="1024128"/>
+            <a:ext cx="4983480" cy="1600200"/>
+          </a:xfrm>
+          <a:prstGeom prst="roundRect">
+            <a:avLst>
+              <a:gd name="adj" fmla="val 4000"/>
+            </a:avLst>
+          </a:prstGeom>
+          <a:solidFill>
+            <a:srgbClr val="222831"/>
+          </a:solidFill>
+          <a:ln w="12700">
+            <a:solidFill>
+              <a:srgbClr val="222831"/>
+            </a:solidFill>
+            <a:prstDash val="solid"/>
+          </a:ln>
+        </p:spPr>
+        <p:txBody>
+          <a:bodyPr/>
+          <a:lstStyle/>
+          <a:p>
+            <a:endParaRPr lang="en-TH"/>
+          </a:p>
+        </p:txBody>
+      </p:sp>
+      <p:sp>
+        <p:nvSpPr>
+          <p:cNvPr id="25" name="Text 23"/>
+          <p:cNvSpPr/>
+          <p:nvPr/>
+        </p:nvSpPr>
+        <p:spPr>
+          <a:xfrm>
+            <a:off x="6729984" y="1115568"/>
+            <a:ext cx="4690872" cy="1417320"/>
+          </a:xfrm>
+          <a:prstGeom prst="rect">
+            <a:avLst/>
+          </a:prstGeom>
+          <a:noFill/>
+          <a:ln/>
+        </p:spPr>
+        <p:txBody>
+          <a:bodyPr wrap="square" lIns="0" tIns="0" rIns="0" bIns="0" rtlCol="0" anchor="t"/>
+          <a:lstStyle/>
+          <a:p>
+            <a:pPr marL="0" indent="0">
+              <a:lnSpc>
+                <a:spcPts val="1700"/>
+              </a:lnSpc>
+              <a:buNone/>
+            </a:pPr>
+            <a:r>
+              <a:rPr lang="en-US" sz="1150" dirty="0">
+                <a:solidFill>
+                  <a:srgbClr val="D6F5F7"/>
+                </a:solidFill>
+                <a:latin typeface="Courier New" pitchFamily="34" charset="0"/>
+                <a:ea typeface="Courier New" pitchFamily="34" charset="-122"/>
+                <a:cs typeface="Courier New" pitchFamily="34" charset="-120"/>
+              </a:rPr>
+              <a:t>node -v</a:t>
+            </a:r>
+            <a:endParaRPr lang="en-US" sz="1150" dirty="0"/>
+          </a:p>
+          <a:p>
+            <a:pPr marL="0" indent="0">
+              <a:lnSpc>
+                <a:spcPts val="1700"/>
+              </a:lnSpc>
+              <a:buNone/>
+            </a:pPr>
+            <a:r>
+              <a:rPr lang="en-US" sz="1150" dirty="0">
+                <a:solidFill>
+                  <a:srgbClr val="D6F5F7"/>
+                </a:solidFill>
+                <a:latin typeface="Courier New" pitchFamily="34" charset="0"/>
+                <a:ea typeface="Courier New" pitchFamily="34" charset="-122"/>
+                <a:cs typeface="Courier New" pitchFamily="34" charset="-120"/>
+              </a:rPr>
+              <a:t>npm -v</a:t>
+            </a:r>
+            <a:endParaRPr lang="en-US" sz="1150" dirty="0"/>
+          </a:p>
+          <a:p>
+            <a:pPr marL="0" indent="0">
+              <a:lnSpc>
+                <a:spcPts val="1700"/>
+              </a:lnSpc>
+              <a:buNone/>
+            </a:pPr>
+            <a:r>
+              <a:rPr lang="en-US" sz="1150" dirty="0">
+                <a:solidFill>
+                  <a:srgbClr val="D6F5F7"/>
+                </a:solidFill>
+                <a:latin typeface="Courier New" pitchFamily="34" charset="0"/>
+                <a:ea typeface="Courier New" pitchFamily="34" charset="-122"/>
+                <a:cs typeface="Courier New" pitchFamily="34" charset="-120"/>
+              </a:rPr>
+              <a:t>git --version</a:t>
+            </a:r>
+            <a:endParaRPr lang="en-US" sz="1150" dirty="0"/>
+          </a:p>
+        </p:txBody>
+      </p:sp>
+      <p:sp>
+        <p:nvSpPr>
+          <p:cNvPr id="26" name="Shape 24"/>
+          <p:cNvSpPr/>
+          <p:nvPr/>
+        </p:nvSpPr>
+        <p:spPr>
+          <a:xfrm>
+            <a:off x="6583680" y="2788920"/>
+            <a:ext cx="4983480" cy="2029968"/>
+          </a:xfrm>
+          <a:prstGeom prst="roundRect">
+            <a:avLst>
+              <a:gd name="adj" fmla="val 4054"/>
+            </a:avLst>
+          </a:prstGeom>
+          <a:solidFill>
+            <a:srgbClr val="FFFFFF"/>
+          </a:solidFill>
+          <a:ln w="9525">
+            <a:solidFill>
+              <a:srgbClr val="FFFFFF"/>
+            </a:solidFill>
+            <a:prstDash val="solid"/>
+          </a:ln>
+          <a:effectLst>
+            <a:outerShdw blurRad="101600" dist="12700" dir="5400000" algn="bl" rotWithShape="0">
+              <a:srgbClr val="222831">
+                <a:alpha val="10000"/>
+              </a:srgbClr>
+            </a:outerShdw>
+          </a:effectLst>
+        </p:spPr>
+        <p:txBody>
+          <a:bodyPr/>
+          <a:lstStyle/>
+          <a:p>
+            <a:endParaRPr lang="en-TH"/>
+          </a:p>
+        </p:txBody>
+      </p:sp>
+      <p:sp>
+        <p:nvSpPr>
+          <p:cNvPr id="27" name="Text 25"/>
+          <p:cNvSpPr/>
+          <p:nvPr/>
+        </p:nvSpPr>
+        <p:spPr>
+          <a:xfrm>
+            <a:off x="6812280" y="2926080"/>
+            <a:ext cx="4526280" cy="310896"/>
+          </a:xfrm>
+          <a:prstGeom prst="rect">
+            <a:avLst/>
+          </a:prstGeom>
+          <a:noFill/>
+          <a:ln/>
+        </p:spPr>
+        <p:txBody>
+          <a:bodyPr wrap="square" lIns="0" tIns="0" rIns="0" bIns="0" rtlCol="0" anchor="ctr"/>
+          <a:lstStyle/>
+          <a:p>
+            <a:pPr marL="0" indent="0">
+              <a:buNone/>
+            </a:pPr>
+            <a:r>
+              <a:rPr lang="en-US" sz="1800" b="1" dirty="0">
+                <a:solidFill>
+                  <a:srgbClr val="222831"/>
+                </a:solidFill>
+                <a:latin typeface="TH Sarabun New" pitchFamily="34" charset="0"/>
+                <a:ea typeface="TH Sarabun New" pitchFamily="34" charset="-122"/>
+                <a:cs typeface="TH Sarabun New" pitchFamily="34" charset="-120"/>
+              </a:rPr>
+              <a:t>เกณฑ์ผ่าน</a:t>
+            </a:r>
+            <a:endParaRPr lang="en-US" sz="1800" dirty="0"/>
+          </a:p>
+        </p:txBody>
+      </p:sp>
+      <p:sp>
+        <p:nvSpPr>
+          <p:cNvPr id="28" name="Text 26"/>
+          <p:cNvSpPr/>
+          <p:nvPr/>
+        </p:nvSpPr>
+        <p:spPr>
+          <a:xfrm>
+            <a:off x="6812280" y="3310128"/>
+            <a:ext cx="4480560" cy="1371600"/>
+          </a:xfrm>
+          <a:prstGeom prst="rect">
+            <a:avLst/>
+          </a:prstGeom>
+          <a:noFill/>
+          <a:ln/>
+        </p:spPr>
+        <p:txBody>
+          <a:bodyPr wrap="square" lIns="0" tIns="0" rIns="0" bIns="0" rtlCol="0" anchor="t"/>
+          <a:lstStyle/>
+          <a:p>
+            <a:pPr marL="342900" indent="-342900">
+              <a:spcAft>
+                <a:spcPts val="800"/>
+              </a:spcAft>
+              <a:buSzPct val="100000"/>
+              <a:buChar char="•"/>
+            </a:pPr>
+            <a:r>
+              <a:rPr lang="en-US" sz="1550" dirty="0">
+                <a:solidFill>
+                  <a:srgbClr val="393E46"/>
+                </a:solidFill>
+                <a:latin typeface="TH Sarabun New" pitchFamily="34" charset="0"/>
+                <a:ea typeface="TH Sarabun New" pitchFamily="34" charset="-122"/>
+                <a:cs typeface="TH Sarabun New" pitchFamily="34" charset="-120"/>
+              </a:rPr>
+              <a:t>ทุกคำสั่งขึ้นเลขเวอร์ชัน ไม่ขึ้น command not found</a:t>
+            </a:r>
+            <a:endParaRPr lang="en-US" sz="1550" dirty="0"/>
+          </a:p>
+          <a:p>
+            <a:pPr marL="342900" indent="-342900">
+              <a:spcAft>
+                <a:spcPts val="800"/>
+              </a:spcAft>
+              <a:buSzPct val="100000"/>
+              <a:buChar char="•"/>
+            </a:pPr>
+            <a:r>
+              <a:rPr lang="en-US" sz="1550" dirty="0">
+                <a:solidFill>
+                  <a:srgbClr val="393E46"/>
+                </a:solidFill>
+                <a:latin typeface="TH Sarabun New" pitchFamily="34" charset="0"/>
+                <a:ea typeface="TH Sarabun New" pitchFamily="34" charset="-122"/>
+                <a:cs typeface="TH Sarabun New" pitchFamily="34" charset="-120"/>
+              </a:rPr>
+              <a:t>เปิดโฟลเดอร์ fundinghub ใน Antigravity ได้</a:t>
+            </a:r>
+            <a:endParaRPr lang="en-US" sz="1550" dirty="0"/>
+          </a:p>
+          <a:p>
+            <a:pPr marL="342900" indent="-342900">
+              <a:spcAft>
+                <a:spcPts val="800"/>
+              </a:spcAft>
+              <a:buSzPct val="100000"/>
+              <a:buChar char="•"/>
+            </a:pPr>
+            <a:r>
+              <a:rPr lang="en-US" sz="1550" dirty="0">
+                <a:solidFill>
+                  <a:srgbClr val="393E46"/>
+                </a:solidFill>
+                <a:latin typeface="TH Sarabun New" pitchFamily="34" charset="0"/>
+                <a:ea typeface="TH Sarabun New" pitchFamily="34" charset="-122"/>
+                <a:cs typeface="TH Sarabun New" pitchFamily="34" charset="-120"/>
+              </a:rPr>
+              <a:t>มีไฟล์เปล่า SPEC_FundingHub.md รออยู่</a:t>
+            </a:r>
+            <a:endParaRPr lang="en-US" sz="1550" dirty="0"/>
+          </a:p>
+        </p:txBody>
+      </p:sp>
+      <p:sp>
+        <p:nvSpPr>
+          <p:cNvPr id="29" name="Text 27"/>
+          <p:cNvSpPr/>
+          <p:nvPr/>
+        </p:nvSpPr>
+        <p:spPr>
+          <a:xfrm>
+            <a:off x="594360" y="6263640"/>
+            <a:ext cx="10972800" cy="292608"/>
+          </a:xfrm>
+          <a:prstGeom prst="rect">
+            <a:avLst/>
+          </a:prstGeom>
+          <a:noFill/>
+          <a:ln/>
+        </p:spPr>
+        <p:txBody>
+          <a:bodyPr wrap="square" lIns="0" tIns="0" rIns="0" bIns="0" rtlCol="0" anchor="ctr"/>
+          <a:lstStyle/>
+          <a:p>
+            <a:pPr marL="0" indent="0">
+              <a:buNone/>
+            </a:pPr>
+            <a:r>
+              <a:rPr lang="en-US" sz="1300" dirty="0">
+                <a:solidFill>
+                  <a:srgbClr val="8A94A6"/>
+                </a:solidFill>
+                <a:latin typeface="TH Sarabun New" pitchFamily="34" charset="0"/>
+                <a:ea typeface="TH Sarabun New" pitchFamily="34" charset="-122"/>
+                <a:cs typeface="TH Sarabun New" pitchFamily="34" charset="-120"/>
+              </a:rPr>
+              <a:t>เอกสารแล็บ : LAB A  ·  การติดตั้งควรทำมาล่วงหน้าก่อนวันอบรม เวลาในห้องมีเพียง 10 นาทีสำหรับตรวจความพร้อม</a:t>
+            </a:r>
+            <a:endParaRPr lang="en-US" sz="1300" dirty="0"/>
           </a:p>
         </p:txBody>
       </p:sp>

--- a/Funding_Hub_Antigravity_Workshop.pptx
+++ b/Funding_Hub_Antigravity_Workshop.pptx
@@ -5,7 +5,7 @@
     <p:sldMasterId id="2147483648" r:id="rId1"/>
   </p:sldMasterIdLst>
   <p:notesMasterIdLst>
-    <p:notesMasterId r:id="rId32"/>
+    <p:notesMasterId r:id="rId31"/>
   </p:notesMasterIdLst>
   <p:sldIdLst>
     <p:sldId id="294" r:id="rId2"/>
@@ -21,23 +21,22 @@
     <p:sldId id="267" r:id="rId12"/>
     <p:sldId id="268" r:id="rId13"/>
     <p:sldId id="269" r:id="rId14"/>
-    <p:sldId id="270" r:id="rId15"/>
-    <p:sldId id="271" r:id="rId16"/>
-    <p:sldId id="272" r:id="rId17"/>
-    <p:sldId id="273" r:id="rId18"/>
-    <p:sldId id="278" r:id="rId19"/>
-    <p:sldId id="279" r:id="rId20"/>
-    <p:sldId id="280" r:id="rId21"/>
-    <p:sldId id="297" r:id="rId22"/>
-    <p:sldId id="281" r:id="rId23"/>
-    <p:sldId id="296" r:id="rId24"/>
-    <p:sldId id="282" r:id="rId25"/>
-    <p:sldId id="298" r:id="rId26"/>
-    <p:sldId id="284" r:id="rId27"/>
-    <p:sldId id="285" r:id="rId28"/>
-    <p:sldId id="295" r:id="rId29"/>
-    <p:sldId id="292" r:id="rId30"/>
-    <p:sldId id="293" r:id="rId31"/>
+    <p:sldId id="271" r:id="rId15"/>
+    <p:sldId id="272" r:id="rId16"/>
+    <p:sldId id="273" r:id="rId17"/>
+    <p:sldId id="278" r:id="rId18"/>
+    <p:sldId id="279" r:id="rId19"/>
+    <p:sldId id="280" r:id="rId20"/>
+    <p:sldId id="297" r:id="rId21"/>
+    <p:sldId id="281" r:id="rId22"/>
+    <p:sldId id="296" r:id="rId23"/>
+    <p:sldId id="282" r:id="rId24"/>
+    <p:sldId id="298" r:id="rId25"/>
+    <p:sldId id="284" r:id="rId26"/>
+    <p:sldId id="285" r:id="rId27"/>
+    <p:sldId id="295" r:id="rId28"/>
+    <p:sldId id="292" r:id="rId29"/>
+    <p:sldId id="293" r:id="rId30"/>
   </p:sldIdLst>
   <p:sldSz cx="12192000" cy="6858000"/>
   <p:notesSz cx="6858000" cy="12192000"/>
@@ -1342,7 +1341,7 @@
           <a:p>
             <a:fld id="{F7021451-1387-4CA6-816F-3879F97B5CBC}" type="slidenum">
               <a:rPr lang="en-US"/>
-              <a:t>20</a:t>
+              <a:t>21</a:t>
             </a:fld>
             <a:endParaRPr lang="en-US"/>
           </a:p>
@@ -1426,7 +1425,7 @@
           <a:p>
             <a:fld id="{F7021451-1387-4CA6-816F-3879F97B5CBC}" type="slidenum">
               <a:rPr lang="en-US"/>
-              <a:t>22</a:t>
+              <a:t>23</a:t>
             </a:fld>
             <a:endParaRPr lang="en-US"/>
           </a:p>
@@ -1510,7 +1509,7 @@
           <a:p>
             <a:fld id="{F7021451-1387-4CA6-816F-3879F97B5CBC}" type="slidenum">
               <a:rPr lang="en-US"/>
-              <a:t>24</a:t>
+              <a:t>25</a:t>
             </a:fld>
             <a:endParaRPr lang="en-US"/>
           </a:p>
@@ -1678,7 +1677,7 @@
           <a:p>
             <a:fld id="{F7021451-1387-4CA6-816F-3879F97B5CBC}" type="slidenum">
               <a:rPr lang="en-US"/>
-              <a:t>27</a:t>
+              <a:t>28</a:t>
             </a:fld>
             <a:endParaRPr lang="en-US"/>
           </a:p>
@@ -1763,90 +1762,6 @@
             <a:fld id="{F7021451-1387-4CA6-816F-3879F97B5CBC}" type="slidenum">
               <a:rPr lang="en-US"/>
               <a:t>29</a:t>
-            </a:fld>
-            <a:endParaRPr lang="en-US"/>
-          </a:p>
-        </p:txBody>
-      </p:sp>
-    </p:spTree>
-    <p:extLst>
-      <p:ext uri="{BB962C8B-B14F-4D97-AF65-F5344CB8AC3E}">
-        <p14:creationId xmlns:p14="http://schemas.microsoft.com/office/powerpoint/2010/main" val="1024086991"/>
-      </p:ext>
-    </p:extLst>
-  </p:cSld>
-  <p:clrMapOvr>
-    <a:masterClrMapping/>
-  </p:clrMapOvr>
-</p:notes>
-</file>
-
-<file path=ppt/notesSlides/notesSlide26.xml><?xml version="1.0" encoding="utf-8"?>
-<p:notes xmlns:a="http://schemas.openxmlformats.org/drawingml/2006/main" xmlns:r="http://schemas.openxmlformats.org/officeDocument/2006/relationships" xmlns:p="http://schemas.openxmlformats.org/presentationml/2006/main">
-  <p:cSld>
-    <p:spTree>
-      <p:nvGrpSpPr>
-        <p:cNvPr id="1" name=""/>
-        <p:cNvGrpSpPr/>
-        <p:nvPr/>
-      </p:nvGrpSpPr>
-      <p:grpSpPr>
-        <a:xfrm>
-          <a:off x="0" y="0"/>
-          <a:ext cx="0" cy="0"/>
-          <a:chOff x="0" y="0"/>
-          <a:chExt cx="0" cy="0"/>
-        </a:xfrm>
-      </p:grpSpPr>
-      <p:sp>
-        <p:nvSpPr>
-          <p:cNvPr id="2" name="Slide Image Placeholder 1"/>
-          <p:cNvSpPr>
-            <a:spLocks noGrp="1" noRot="1" noChangeAspect="1"/>
-          </p:cNvSpPr>
-          <p:nvPr>
-            <p:ph type="sldImg"/>
-          </p:nvPr>
-        </p:nvSpPr>
-        <p:spPr/>
-      </p:sp>
-      <p:sp>
-        <p:nvSpPr>
-          <p:cNvPr id="3" name="Notes Placeholder 2"/>
-          <p:cNvSpPr>
-            <a:spLocks noGrp="1"/>
-          </p:cNvSpPr>
-          <p:nvPr>
-            <p:ph type="body" idx="1"/>
-          </p:nvPr>
-        </p:nvSpPr>
-        <p:spPr/>
-        <p:txBody>
-          <a:bodyPr/>
-          <a:lstStyle/>
-          <a:p>
-            <a:endParaRPr lang="en-US" dirty="0"/>
-          </a:p>
-        </p:txBody>
-      </p:sp>
-      <p:sp>
-        <p:nvSpPr>
-          <p:cNvPr id="4" name="Slide Number Placeholder 3"/>
-          <p:cNvSpPr>
-            <a:spLocks noGrp="1"/>
-          </p:cNvSpPr>
-          <p:nvPr>
-            <p:ph type="sldNum" sz="quarter" idx="10"/>
-          </p:nvPr>
-        </p:nvSpPr>
-        <p:spPr/>
-        <p:txBody>
-          <a:bodyPr/>
-          <a:lstStyle/>
-          <a:p>
-            <a:fld id="{F7021451-1387-4CA6-816F-3879F97B5CBC}" type="slidenum">
-              <a:rPr lang="en-US"/>
-              <a:t>30</a:t>
             </a:fld>
             <a:endParaRPr lang="en-US"/>
           </a:p>
@@ -5154,7 +5069,7 @@
           <a:bodyPr/>
           <a:lstStyle/>
           <a:p>
-            <a:endParaRPr lang="en-TH"/>
+            <a:endParaRPr lang="en-TH" sz="2400"/>
           </a:p>
         </p:txBody>
       </p:sp>
@@ -5183,7 +5098,7 @@
               <a:buNone/>
             </a:pPr>
             <a:r>
-              <a:rPr lang="en-US" sz="2100" b="1" dirty="0">
+              <a:rPr lang="en-US" sz="2800" b="1" dirty="0">
                 <a:solidFill>
                   <a:srgbClr val="DC2626"/>
                 </a:solidFill>
@@ -5193,7 +5108,7 @@
               </a:rPr>
               <a:t>Vibe Coding</a:t>
             </a:r>
-            <a:endParaRPr lang="en-US" sz="2100" dirty="0"/>
+            <a:endParaRPr lang="en-US" sz="2800" dirty="0"/>
           </a:p>
         </p:txBody>
       </p:sp>
@@ -5222,7 +5137,7 @@
               <a:buNone/>
             </a:pPr>
             <a:r>
-              <a:rPr lang="en-US" sz="1550" dirty="0">
+              <a:rPr lang="en-US" dirty="0">
                 <a:solidFill>
                   <a:srgbClr val="8A94A6"/>
                 </a:solidFill>
@@ -5232,7 +5147,7 @@
               </a:rPr>
               <a:t>พิมพ์บอกสั้น ๆ ตามความรู้สึก แล้วดูว่า AI ให้อะไรมา</a:t>
             </a:r>
-            <a:endParaRPr lang="en-US" sz="1550" dirty="0"/>
+            <a:endParaRPr lang="en-US" dirty="0"/>
           </a:p>
         </p:txBody>
       </p:sp>
@@ -5265,7 +5180,7 @@
               <a:buChar char="•"/>
             </a:pPr>
             <a:r>
-              <a:rPr lang="en-US" sz="1600" dirty="0">
+              <a:rPr lang="en-US" sz="2000" dirty="0">
                 <a:solidFill>
                   <a:srgbClr val="393E46"/>
                 </a:solidFill>
@@ -5275,7 +5190,7 @@
               </a:rPr>
               <a:t>ได้ผลเร็วมากในช่วงแรก</a:t>
             </a:r>
-            <a:endParaRPr lang="en-US" sz="1600" dirty="0"/>
+            <a:endParaRPr lang="en-US" sz="2000" dirty="0"/>
           </a:p>
           <a:p>
             <a:pPr marL="342900" indent="-342900">
@@ -5286,7 +5201,7 @@
               <a:buChar char="•"/>
             </a:pPr>
             <a:r>
-              <a:rPr lang="en-US" sz="1600" dirty="0">
+              <a:rPr lang="en-US" sz="2000" dirty="0">
                 <a:solidFill>
                   <a:srgbClr val="393E46"/>
                 </a:solidFill>
@@ -5296,7 +5211,7 @@
               </a:rPr>
               <a:t>สั่งคำเดิมสองครั้ง ได้ผลไม่เหมือนกัน</a:t>
             </a:r>
-            <a:endParaRPr lang="en-US" sz="1600" dirty="0"/>
+            <a:endParaRPr lang="en-US" sz="2000" dirty="0"/>
           </a:p>
           <a:p>
             <a:pPr marL="342900" indent="-342900">
@@ -5307,7 +5222,7 @@
               <a:buChar char="•"/>
             </a:pPr>
             <a:r>
-              <a:rPr lang="en-US" sz="1600" dirty="0">
+              <a:rPr lang="en-US" sz="2000" dirty="0">
                 <a:solidFill>
                   <a:srgbClr val="393E46"/>
                 </a:solidFill>
@@ -5317,7 +5232,7 @@
               </a:rPr>
               <a:t>AI เติมฟีเจอร์ที่เราไม่ได้ขอ</a:t>
             </a:r>
-            <a:endParaRPr lang="en-US" sz="1600" dirty="0"/>
+            <a:endParaRPr lang="en-US" sz="2000" dirty="0"/>
           </a:p>
           <a:p>
             <a:pPr marL="342900" indent="-342900">
@@ -5328,7 +5243,7 @@
               <a:buChar char="•"/>
             </a:pPr>
             <a:r>
-              <a:rPr lang="en-US" sz="1600" dirty="0">
+              <a:rPr lang="en-US" sz="2000" dirty="0">
                 <a:solidFill>
                   <a:srgbClr val="393E46"/>
                 </a:solidFill>
@@ -5338,7 +5253,7 @@
               </a:rPr>
               <a:t>แก้จุดหนึ่ง พังอีกจุดหนึ่ง</a:t>
             </a:r>
-            <a:endParaRPr lang="en-US" sz="1600" dirty="0"/>
+            <a:endParaRPr lang="en-US" sz="2000" dirty="0"/>
           </a:p>
           <a:p>
             <a:pPr marL="342900" indent="-342900">
@@ -5349,7 +5264,7 @@
               <a:buChar char="•"/>
             </a:pPr>
             <a:r>
-              <a:rPr lang="en-US" sz="1600" dirty="0">
+              <a:rPr lang="en-US" sz="2000" dirty="0">
                 <a:solidFill>
                   <a:srgbClr val="393E46"/>
                 </a:solidFill>
@@ -5359,7 +5274,7 @@
               </a:rPr>
               <a:t>ไม่มีเกณฑ์บอกว่างานเสร็จหรือยัง</a:t>
             </a:r>
-            <a:endParaRPr lang="en-US" sz="1600" dirty="0"/>
+            <a:endParaRPr lang="en-US" sz="2000" dirty="0"/>
           </a:p>
         </p:txBody>
       </p:sp>
@@ -5400,7 +5315,7 @@
           <a:bodyPr/>
           <a:lstStyle/>
           <a:p>
-            <a:endParaRPr lang="en-TH"/>
+            <a:endParaRPr lang="en-TH" sz="2400"/>
           </a:p>
         </p:txBody>
       </p:sp>
@@ -5429,7 +5344,7 @@
               <a:buNone/>
             </a:pPr>
             <a:r>
-              <a:rPr lang="en-US" sz="2100" b="1" dirty="0">
+              <a:rPr lang="en-US" sz="2800" b="1" dirty="0">
                 <a:solidFill>
                   <a:srgbClr val="0F766E"/>
                 </a:solidFill>
@@ -5439,7 +5354,7 @@
               </a:rPr>
               <a:t>Spec-driven Development</a:t>
             </a:r>
-            <a:endParaRPr lang="en-US" sz="2100" dirty="0"/>
+            <a:endParaRPr lang="en-US" sz="2800" dirty="0"/>
           </a:p>
         </p:txBody>
       </p:sp>
@@ -5468,7 +5383,7 @@
               <a:buNone/>
             </a:pPr>
             <a:r>
-              <a:rPr lang="en-US" sz="1550" dirty="0">
+              <a:rPr lang="en-US" dirty="0">
                 <a:solidFill>
                   <a:srgbClr val="8A94A6"/>
                 </a:solidFill>
@@ -5478,7 +5393,7 @@
               </a:rPr>
               <a:t>เขียนข้อกำหนดให้ครบก่อน แล้วสั่งงานโดยอ้างหมายเลขหัวข้อ</a:t>
             </a:r>
-            <a:endParaRPr lang="en-US" sz="1550" dirty="0"/>
+            <a:endParaRPr lang="en-US" dirty="0"/>
           </a:p>
         </p:txBody>
       </p:sp>
@@ -5511,7 +5426,7 @@
               <a:buChar char="•"/>
             </a:pPr>
             <a:r>
-              <a:rPr lang="en-US" sz="1600" dirty="0">
+              <a:rPr lang="en-US" sz="2000" dirty="0">
                 <a:solidFill>
                   <a:srgbClr val="393E46"/>
                 </a:solidFill>
@@ -5521,7 +5436,7 @@
               </a:rPr>
               <a:t>ผลลัพธ์คงเส้นคงวา ทำซ้ำได้</a:t>
             </a:r>
-            <a:endParaRPr lang="en-US" sz="1600" dirty="0"/>
+            <a:endParaRPr lang="en-US" sz="2000" dirty="0"/>
           </a:p>
           <a:p>
             <a:pPr marL="342900" indent="-342900">
@@ -5532,7 +5447,7 @@
               <a:buChar char="•"/>
             </a:pPr>
             <a:r>
-              <a:rPr lang="en-US" sz="1600" dirty="0">
+              <a:rPr lang="en-US" sz="2000" dirty="0">
                 <a:solidFill>
                   <a:srgbClr val="393E46"/>
                 </a:solidFill>
@@ -5542,7 +5457,7 @@
               </a:rPr>
               <a:t>AI ไม่สร้างเกินขอบเขตที่เขียนไว้</a:t>
             </a:r>
-            <a:endParaRPr lang="en-US" sz="1600" dirty="0"/>
+            <a:endParaRPr lang="en-US" sz="2000" dirty="0"/>
           </a:p>
           <a:p>
             <a:pPr marL="342900" indent="-342900">
@@ -5553,7 +5468,7 @@
               <a:buChar char="•"/>
             </a:pPr>
             <a:r>
-              <a:rPr lang="en-US" sz="1600" dirty="0">
+              <a:rPr lang="en-US" sz="2000" dirty="0">
                 <a:solidFill>
                   <a:srgbClr val="393E46"/>
                 </a:solidFill>
@@ -5563,7 +5478,7 @@
               </a:rPr>
               <a:t>แก้สเปกที่เดียว งานตามทั้งระบบ</a:t>
             </a:r>
-            <a:endParaRPr lang="en-US" sz="1600" dirty="0"/>
+            <a:endParaRPr lang="en-US" sz="2000" dirty="0"/>
           </a:p>
           <a:p>
             <a:pPr marL="342900" indent="-342900">
@@ -5574,7 +5489,7 @@
               <a:buChar char="•"/>
             </a:pPr>
             <a:r>
-              <a:rPr lang="en-US" sz="1600" dirty="0">
+              <a:rPr lang="en-US" sz="2000" dirty="0">
                 <a:solidFill>
                   <a:srgbClr val="393E46"/>
                 </a:solidFill>
@@ -5584,7 +5499,7 @@
               </a:rPr>
               <a:t>มีเกณฑ์ยอมรับไว้ตรวจว่าผ่านหรือไม่</a:t>
             </a:r>
-            <a:endParaRPr lang="en-US" sz="1600" dirty="0"/>
+            <a:endParaRPr lang="en-US" sz="2000" dirty="0"/>
           </a:p>
           <a:p>
             <a:pPr marL="342900" indent="-342900">
@@ -5595,7 +5510,7 @@
               <a:buChar char="•"/>
             </a:pPr>
             <a:r>
-              <a:rPr lang="en-US" sz="1600" dirty="0">
+              <a:rPr lang="en-US" sz="2000" dirty="0">
                 <a:solidFill>
                   <a:srgbClr val="393E46"/>
                 </a:solidFill>
@@ -5605,7 +5520,7 @@
               </a:rPr>
               <a:t>prompt สั้นลงเหลือ 3–5 บรรทัด</a:t>
             </a:r>
-            <a:endParaRPr lang="en-US" sz="1600" dirty="0"/>
+            <a:endParaRPr lang="en-US" sz="2000" dirty="0"/>
           </a:p>
         </p:txBody>
       </p:sp>
@@ -5691,1171 +5606,6 @@
 </file>
 
 <file path=ppt/slides/slide14.xml><?xml version="1.0" encoding="utf-8"?>
-<p:sld xmlns:a="http://schemas.openxmlformats.org/drawingml/2006/main" xmlns:r="http://schemas.openxmlformats.org/officeDocument/2006/relationships" xmlns:p="http://schemas.openxmlformats.org/presentationml/2006/main">
-  <p:cSld name="Slide 15">
-    <p:bg>
-      <p:bgPr>
-        <a:solidFill>
-          <a:srgbClr val="FFFFFF"/>
-        </a:solidFill>
-        <a:effectLst/>
-      </p:bgPr>
-    </p:bg>
-    <p:spTree>
-      <p:nvGrpSpPr>
-        <p:cNvPr id="1" name=""/>
-        <p:cNvGrpSpPr/>
-        <p:nvPr/>
-      </p:nvGrpSpPr>
-      <p:grpSpPr>
-        <a:xfrm>
-          <a:off x="0" y="0"/>
-          <a:ext cx="0" cy="0"/>
-          <a:chOff x="0" y="0"/>
-          <a:chExt cx="0" cy="0"/>
-        </a:xfrm>
-      </p:grpSpPr>
-      <p:sp>
-        <p:nvSpPr>
-          <p:cNvPr id="2" name="Text 0"/>
-          <p:cNvSpPr/>
-          <p:nvPr/>
-        </p:nvSpPr>
-        <p:spPr>
-          <a:xfrm>
-            <a:off x="11018520" y="6263640"/>
-            <a:ext cx="548640" cy="274320"/>
-          </a:xfrm>
-          <a:prstGeom prst="rect">
-            <a:avLst/>
-          </a:prstGeom>
-          <a:noFill/>
-          <a:ln/>
-        </p:spPr>
-        <p:txBody>
-          <a:bodyPr wrap="square" lIns="0" tIns="0" rIns="0" bIns="0" rtlCol="0" anchor="ctr"/>
-          <a:lstStyle/>
-          <a:p>
-            <a:pPr marL="0" indent="0" algn="r">
-              <a:buNone/>
-            </a:pPr>
-            <a:r>
-              <a:rPr lang="en-US" sz="1200" dirty="0">
-                <a:solidFill>
-                  <a:srgbClr val="9AA3AD"/>
-                </a:solidFill>
-                <a:latin typeface="TH Sarabun New" pitchFamily="34" charset="0"/>
-                <a:ea typeface="TH Sarabun New" pitchFamily="34" charset="-122"/>
-                <a:cs typeface="TH Sarabun New" pitchFamily="34" charset="-120"/>
-              </a:rPr>
-              <a:t>15</a:t>
-            </a:r>
-            <a:endParaRPr lang="en-US" sz="1200" dirty="0"/>
-          </a:p>
-        </p:txBody>
-      </p:sp>
-      <p:sp>
-        <p:nvSpPr>
-          <p:cNvPr id="3" name="Text 1"/>
-          <p:cNvSpPr/>
-          <p:nvPr/>
-        </p:nvSpPr>
-        <p:spPr>
-          <a:xfrm>
-            <a:off x="594360" y="329184"/>
-            <a:ext cx="10972800" cy="566928"/>
-          </a:xfrm>
-          <a:prstGeom prst="rect">
-            <a:avLst/>
-          </a:prstGeom>
-          <a:noFill/>
-          <a:ln/>
-        </p:spPr>
-        <p:txBody>
-          <a:bodyPr wrap="square" lIns="0" tIns="0" rIns="0" bIns="0" rtlCol="0" anchor="ctr"/>
-          <a:lstStyle/>
-          <a:p>
-            <a:pPr marL="0" indent="0">
-              <a:buNone/>
-            </a:pPr>
-            <a:r>
-              <a:rPr lang="en-US" sz="3200" b="1" dirty="0">
-                <a:solidFill>
-                  <a:srgbClr val="222831"/>
-                </a:solidFill>
-                <a:latin typeface="TH Sarabun New" pitchFamily="34" charset="0"/>
-                <a:ea typeface="TH Sarabun New" pitchFamily="34" charset="-122"/>
-                <a:cs typeface="TH Sarabun New" pitchFamily="34" charset="-120"/>
-              </a:rPr>
-              <a:t>โครงสร้างของ Prompt ที่ใช้งานได้จริง</a:t>
-            </a:r>
-            <a:endParaRPr lang="en-US" sz="3200" dirty="0"/>
-          </a:p>
-        </p:txBody>
-      </p:sp>
-      <p:sp>
-        <p:nvSpPr>
-          <p:cNvPr id="4" name="Text 2"/>
-          <p:cNvSpPr/>
-          <p:nvPr/>
-        </p:nvSpPr>
-        <p:spPr>
-          <a:xfrm>
-            <a:off x="594360" y="896112"/>
-            <a:ext cx="10972800" cy="329184"/>
-          </a:xfrm>
-          <a:prstGeom prst="rect">
-            <a:avLst/>
-          </a:prstGeom>
-          <a:noFill/>
-          <a:ln/>
-        </p:spPr>
-        <p:txBody>
-          <a:bodyPr wrap="square" lIns="0" tIns="0" rIns="0" bIns="0" rtlCol="0" anchor="ctr"/>
-          <a:lstStyle/>
-          <a:p>
-            <a:pPr marL="0" indent="0">
-              <a:buNone/>
-            </a:pPr>
-            <a:r>
-              <a:rPr lang="en-US" sz="1700" dirty="0">
-                <a:solidFill>
-                  <a:srgbClr val="8A94A6"/>
-                </a:solidFill>
-                <a:latin typeface="TH Sarabun New" pitchFamily="34" charset="0"/>
-                <a:ea typeface="TH Sarabun New" pitchFamily="34" charset="-122"/>
-                <a:cs typeface="TH Sarabun New" pitchFamily="34" charset="-120"/>
-              </a:rPr>
-              <a:t>prompt ที่ดีไม่ใช่ prompt ที่ยาว แต่คือ prompt ที่ระบุครบและตรวจสอบได้</a:t>
-            </a:r>
-            <a:endParaRPr lang="en-US" sz="1700" dirty="0"/>
-          </a:p>
-        </p:txBody>
-      </p:sp>
-      <p:sp>
-        <p:nvSpPr>
-          <p:cNvPr id="5" name="Shape 3"/>
-          <p:cNvSpPr/>
-          <p:nvPr/>
-        </p:nvSpPr>
-        <p:spPr>
-          <a:xfrm>
-            <a:off x="594360" y="1463040"/>
-            <a:ext cx="5212080" cy="658368"/>
-          </a:xfrm>
-          <a:prstGeom prst="roundRect">
-            <a:avLst>
-              <a:gd name="adj" fmla="val 12500"/>
-            </a:avLst>
-          </a:prstGeom>
-          <a:solidFill>
-            <a:srgbClr val="F5F7F8"/>
-          </a:solidFill>
-          <a:ln w="9525">
-            <a:solidFill>
-              <a:srgbClr val="F5F7F8"/>
-            </a:solidFill>
-            <a:prstDash val="solid"/>
-          </a:ln>
-          <a:effectLst>
-            <a:outerShdw blurRad="101600" dist="12700" dir="5400000" algn="bl" rotWithShape="0">
-              <a:srgbClr val="222831">
-                <a:alpha val="10000"/>
-              </a:srgbClr>
-            </a:outerShdw>
-          </a:effectLst>
-        </p:spPr>
-        <p:txBody>
-          <a:bodyPr/>
-          <a:lstStyle/>
-          <a:p>
-            <a:endParaRPr lang="en-TH"/>
-          </a:p>
-        </p:txBody>
-      </p:sp>
-      <p:sp>
-        <p:nvSpPr>
-          <p:cNvPr id="6" name="Shape 4"/>
-          <p:cNvSpPr/>
-          <p:nvPr/>
-        </p:nvSpPr>
-        <p:spPr>
-          <a:xfrm>
-            <a:off x="813816" y="1627632"/>
-            <a:ext cx="329184" cy="329184"/>
-          </a:xfrm>
-          <a:prstGeom prst="ellipse">
-            <a:avLst/>
-          </a:prstGeom>
-          <a:solidFill>
-            <a:srgbClr val="00ADB5"/>
-          </a:solidFill>
-          <a:ln w="12700">
-            <a:solidFill>
-              <a:srgbClr val="00ADB5"/>
-            </a:solidFill>
-            <a:prstDash val="solid"/>
-          </a:ln>
-        </p:spPr>
-        <p:txBody>
-          <a:bodyPr/>
-          <a:lstStyle/>
-          <a:p>
-            <a:endParaRPr lang="en-TH"/>
-          </a:p>
-        </p:txBody>
-      </p:sp>
-      <p:sp>
-        <p:nvSpPr>
-          <p:cNvPr id="7" name="Text 5"/>
-          <p:cNvSpPr/>
-          <p:nvPr/>
-        </p:nvSpPr>
-        <p:spPr>
-          <a:xfrm>
-            <a:off x="813816" y="1627632"/>
-            <a:ext cx="329184" cy="329184"/>
-          </a:xfrm>
-          <a:prstGeom prst="rect">
-            <a:avLst/>
-          </a:prstGeom>
-          <a:noFill/>
-          <a:ln/>
-        </p:spPr>
-        <p:txBody>
-          <a:bodyPr wrap="square" lIns="0" tIns="0" rIns="0" bIns="0" rtlCol="0" anchor="ctr"/>
-          <a:lstStyle/>
-          <a:p>
-            <a:pPr marL="0" indent="0" algn="ctr">
-              <a:buNone/>
-            </a:pPr>
-            <a:r>
-              <a:rPr lang="en-US" sz="1500" b="1" dirty="0">
-                <a:solidFill>
-                  <a:srgbClr val="FFFFFF"/>
-                </a:solidFill>
-                <a:latin typeface="TH Sarabun New" pitchFamily="34" charset="0"/>
-                <a:ea typeface="TH Sarabun New" pitchFamily="34" charset="-122"/>
-                <a:cs typeface="TH Sarabun New" pitchFamily="34" charset="-120"/>
-              </a:rPr>
-              <a:t>1</a:t>
-            </a:r>
-            <a:endParaRPr lang="en-US" sz="1500" dirty="0"/>
-          </a:p>
-        </p:txBody>
-      </p:sp>
-      <p:sp>
-        <p:nvSpPr>
-          <p:cNvPr id="8" name="Text 6"/>
-          <p:cNvSpPr/>
-          <p:nvPr/>
-        </p:nvSpPr>
-        <p:spPr>
-          <a:xfrm>
-            <a:off x="1252728" y="1463040"/>
-            <a:ext cx="1828800" cy="658368"/>
-          </a:xfrm>
-          <a:prstGeom prst="rect">
-            <a:avLst/>
-          </a:prstGeom>
-          <a:noFill/>
-          <a:ln/>
-        </p:spPr>
-        <p:txBody>
-          <a:bodyPr wrap="square" lIns="0" tIns="0" rIns="0" bIns="0" rtlCol="0" anchor="ctr"/>
-          <a:lstStyle/>
-          <a:p>
-            <a:pPr marL="0" indent="0">
-              <a:buNone/>
-            </a:pPr>
-            <a:r>
-              <a:rPr lang="en-US" sz="1700" b="1" dirty="0">
-                <a:solidFill>
-                  <a:srgbClr val="222831"/>
-                </a:solidFill>
-                <a:latin typeface="TH Sarabun New" pitchFamily="34" charset="0"/>
-                <a:ea typeface="TH Sarabun New" pitchFamily="34" charset="-122"/>
-                <a:cs typeface="TH Sarabun New" pitchFamily="34" charset="-120"/>
-              </a:rPr>
-              <a:t>งานที่ต้องทำ</a:t>
-            </a:r>
-            <a:endParaRPr lang="en-US" sz="1700" dirty="0"/>
-          </a:p>
-        </p:txBody>
-      </p:sp>
-      <p:sp>
-        <p:nvSpPr>
-          <p:cNvPr id="9" name="Text 7"/>
-          <p:cNvSpPr/>
-          <p:nvPr/>
-        </p:nvSpPr>
-        <p:spPr>
-          <a:xfrm>
-            <a:off x="3136392" y="1463040"/>
-            <a:ext cx="2560320" cy="658368"/>
-          </a:xfrm>
-          <a:prstGeom prst="rect">
-            <a:avLst/>
-          </a:prstGeom>
-          <a:noFill/>
-          <a:ln/>
-        </p:spPr>
-        <p:txBody>
-          <a:bodyPr wrap="square" lIns="0" tIns="0" rIns="0" bIns="0" rtlCol="0" anchor="ctr"/>
-          <a:lstStyle/>
-          <a:p>
-            <a:pPr marL="0" indent="0">
-              <a:buNone/>
-            </a:pPr>
-            <a:r>
-              <a:rPr lang="en-US" sz="1500" dirty="0">
-                <a:solidFill>
-                  <a:srgbClr val="393E46"/>
-                </a:solidFill>
-                <a:latin typeface="TH Sarabun New" pitchFamily="34" charset="0"/>
-                <a:ea typeface="TH Sarabun New" pitchFamily="34" charset="-122"/>
-                <a:cs typeface="TH Sarabun New" pitchFamily="34" charset="-120"/>
-              </a:rPr>
-              <a:t>บอกให้ชัดว่าทำชั้นไหน ขั้นไหน</a:t>
-            </a:r>
-            <a:endParaRPr lang="en-US" sz="1500" dirty="0"/>
-          </a:p>
-        </p:txBody>
-      </p:sp>
-      <p:sp>
-        <p:nvSpPr>
-          <p:cNvPr id="10" name="Shape 8"/>
-          <p:cNvSpPr/>
-          <p:nvPr/>
-        </p:nvSpPr>
-        <p:spPr>
-          <a:xfrm>
-            <a:off x="594360" y="2249424"/>
-            <a:ext cx="5212080" cy="658368"/>
-          </a:xfrm>
-          <a:prstGeom prst="roundRect">
-            <a:avLst>
-              <a:gd name="adj" fmla="val 12500"/>
-            </a:avLst>
-          </a:prstGeom>
-          <a:solidFill>
-            <a:srgbClr val="F5F7F8"/>
-          </a:solidFill>
-          <a:ln w="9525">
-            <a:solidFill>
-              <a:srgbClr val="F5F7F8"/>
-            </a:solidFill>
-            <a:prstDash val="solid"/>
-          </a:ln>
-          <a:effectLst>
-            <a:outerShdw blurRad="101600" dist="12700" dir="5400000" algn="bl" rotWithShape="0">
-              <a:srgbClr val="222831">
-                <a:alpha val="10000"/>
-              </a:srgbClr>
-            </a:outerShdw>
-          </a:effectLst>
-        </p:spPr>
-        <p:txBody>
-          <a:bodyPr/>
-          <a:lstStyle/>
-          <a:p>
-            <a:endParaRPr lang="en-TH"/>
-          </a:p>
-        </p:txBody>
-      </p:sp>
-      <p:sp>
-        <p:nvSpPr>
-          <p:cNvPr id="11" name="Shape 9"/>
-          <p:cNvSpPr/>
-          <p:nvPr/>
-        </p:nvSpPr>
-        <p:spPr>
-          <a:xfrm>
-            <a:off x="813816" y="2414016"/>
-            <a:ext cx="329184" cy="329184"/>
-          </a:xfrm>
-          <a:prstGeom prst="ellipse">
-            <a:avLst/>
-          </a:prstGeom>
-          <a:solidFill>
-            <a:srgbClr val="00ADB5"/>
-          </a:solidFill>
-          <a:ln w="12700">
-            <a:solidFill>
-              <a:srgbClr val="00ADB5"/>
-            </a:solidFill>
-            <a:prstDash val="solid"/>
-          </a:ln>
-        </p:spPr>
-        <p:txBody>
-          <a:bodyPr/>
-          <a:lstStyle/>
-          <a:p>
-            <a:endParaRPr lang="en-TH"/>
-          </a:p>
-        </p:txBody>
-      </p:sp>
-      <p:sp>
-        <p:nvSpPr>
-          <p:cNvPr id="12" name="Text 10"/>
-          <p:cNvSpPr/>
-          <p:nvPr/>
-        </p:nvSpPr>
-        <p:spPr>
-          <a:xfrm>
-            <a:off x="813816" y="2414016"/>
-            <a:ext cx="329184" cy="329184"/>
-          </a:xfrm>
-          <a:prstGeom prst="rect">
-            <a:avLst/>
-          </a:prstGeom>
-          <a:noFill/>
-          <a:ln/>
-        </p:spPr>
-        <p:txBody>
-          <a:bodyPr wrap="square" lIns="0" tIns="0" rIns="0" bIns="0" rtlCol="0" anchor="ctr"/>
-          <a:lstStyle/>
-          <a:p>
-            <a:pPr marL="0" indent="0" algn="ctr">
-              <a:buNone/>
-            </a:pPr>
-            <a:r>
-              <a:rPr lang="en-US" sz="1500" b="1" dirty="0">
-                <a:solidFill>
-                  <a:srgbClr val="FFFFFF"/>
-                </a:solidFill>
-                <a:latin typeface="TH Sarabun New" pitchFamily="34" charset="0"/>
-                <a:ea typeface="TH Sarabun New" pitchFamily="34" charset="-122"/>
-                <a:cs typeface="TH Sarabun New" pitchFamily="34" charset="-120"/>
-              </a:rPr>
-              <a:t>2</a:t>
-            </a:r>
-            <a:endParaRPr lang="en-US" sz="1500" dirty="0"/>
-          </a:p>
-        </p:txBody>
-      </p:sp>
-      <p:sp>
-        <p:nvSpPr>
-          <p:cNvPr id="13" name="Text 11"/>
-          <p:cNvSpPr/>
-          <p:nvPr/>
-        </p:nvSpPr>
-        <p:spPr>
-          <a:xfrm>
-            <a:off x="1252728" y="2249424"/>
-            <a:ext cx="1828800" cy="658368"/>
-          </a:xfrm>
-          <a:prstGeom prst="rect">
-            <a:avLst/>
-          </a:prstGeom>
-          <a:noFill/>
-          <a:ln/>
-        </p:spPr>
-        <p:txBody>
-          <a:bodyPr wrap="square" lIns="0" tIns="0" rIns="0" bIns="0" rtlCol="0" anchor="ctr"/>
-          <a:lstStyle/>
-          <a:p>
-            <a:pPr marL="0" indent="0">
-              <a:buNone/>
-            </a:pPr>
-            <a:r>
-              <a:rPr lang="en-US" sz="1700" b="1" dirty="0">
-                <a:solidFill>
-                  <a:srgbClr val="222831"/>
-                </a:solidFill>
-                <a:latin typeface="TH Sarabun New" pitchFamily="34" charset="0"/>
-                <a:ea typeface="TH Sarabun New" pitchFamily="34" charset="-122"/>
-                <a:cs typeface="TH Sarabun New" pitchFamily="34" charset="-120"/>
-              </a:rPr>
-              <a:t>บริบทที่ต้องอ่าน</a:t>
-            </a:r>
-            <a:endParaRPr lang="en-US" sz="1700" dirty="0"/>
-          </a:p>
-        </p:txBody>
-      </p:sp>
-      <p:sp>
-        <p:nvSpPr>
-          <p:cNvPr id="14" name="Text 12"/>
-          <p:cNvSpPr/>
-          <p:nvPr/>
-        </p:nvSpPr>
-        <p:spPr>
-          <a:xfrm>
-            <a:off x="3136392" y="2249424"/>
-            <a:ext cx="2560320" cy="658368"/>
-          </a:xfrm>
-          <a:prstGeom prst="rect">
-            <a:avLst/>
-          </a:prstGeom>
-          <a:noFill/>
-          <a:ln/>
-        </p:spPr>
-        <p:txBody>
-          <a:bodyPr wrap="square" lIns="0" tIns="0" rIns="0" bIns="0" rtlCol="0" anchor="ctr"/>
-          <a:lstStyle/>
-          <a:p>
-            <a:pPr marL="0" indent="0">
-              <a:buNone/>
-            </a:pPr>
-            <a:r>
-              <a:rPr lang="en-US" sz="1500" dirty="0">
-                <a:solidFill>
-                  <a:srgbClr val="393E46"/>
-                </a:solidFill>
-                <a:latin typeface="TH Sarabun New" pitchFamily="34" charset="0"/>
-                <a:ea typeface="TH Sarabun New" pitchFamily="34" charset="-122"/>
-                <a:cs typeface="TH Sarabun New" pitchFamily="34" charset="-120"/>
-              </a:rPr>
-              <a:t>ระบุชื่อไฟล์และหมายเลขหัวข้อ</a:t>
-            </a:r>
-            <a:endParaRPr lang="en-US" sz="1500" dirty="0"/>
-          </a:p>
-        </p:txBody>
-      </p:sp>
-      <p:sp>
-        <p:nvSpPr>
-          <p:cNvPr id="15" name="Shape 13"/>
-          <p:cNvSpPr/>
-          <p:nvPr/>
-        </p:nvSpPr>
-        <p:spPr>
-          <a:xfrm>
-            <a:off x="594360" y="3035808"/>
-            <a:ext cx="5212080" cy="658368"/>
-          </a:xfrm>
-          <a:prstGeom prst="roundRect">
-            <a:avLst>
-              <a:gd name="adj" fmla="val 12500"/>
-            </a:avLst>
-          </a:prstGeom>
-          <a:solidFill>
-            <a:srgbClr val="F5F7F8"/>
-          </a:solidFill>
-          <a:ln w="9525">
-            <a:solidFill>
-              <a:srgbClr val="F5F7F8"/>
-            </a:solidFill>
-            <a:prstDash val="solid"/>
-          </a:ln>
-          <a:effectLst>
-            <a:outerShdw blurRad="101600" dist="12700" dir="5400000" algn="bl" rotWithShape="0">
-              <a:srgbClr val="222831">
-                <a:alpha val="10000"/>
-              </a:srgbClr>
-            </a:outerShdw>
-          </a:effectLst>
-        </p:spPr>
-        <p:txBody>
-          <a:bodyPr/>
-          <a:lstStyle/>
-          <a:p>
-            <a:endParaRPr lang="en-TH"/>
-          </a:p>
-        </p:txBody>
-      </p:sp>
-      <p:sp>
-        <p:nvSpPr>
-          <p:cNvPr id="16" name="Shape 14"/>
-          <p:cNvSpPr/>
-          <p:nvPr/>
-        </p:nvSpPr>
-        <p:spPr>
-          <a:xfrm>
-            <a:off x="813816" y="3200400"/>
-            <a:ext cx="329184" cy="329184"/>
-          </a:xfrm>
-          <a:prstGeom prst="ellipse">
-            <a:avLst/>
-          </a:prstGeom>
-          <a:solidFill>
-            <a:srgbClr val="00ADB5"/>
-          </a:solidFill>
-          <a:ln w="12700">
-            <a:solidFill>
-              <a:srgbClr val="00ADB5"/>
-            </a:solidFill>
-            <a:prstDash val="solid"/>
-          </a:ln>
-        </p:spPr>
-        <p:txBody>
-          <a:bodyPr/>
-          <a:lstStyle/>
-          <a:p>
-            <a:endParaRPr lang="en-TH"/>
-          </a:p>
-        </p:txBody>
-      </p:sp>
-      <p:sp>
-        <p:nvSpPr>
-          <p:cNvPr id="17" name="Text 15"/>
-          <p:cNvSpPr/>
-          <p:nvPr/>
-        </p:nvSpPr>
-        <p:spPr>
-          <a:xfrm>
-            <a:off x="813816" y="3200400"/>
-            <a:ext cx="329184" cy="329184"/>
-          </a:xfrm>
-          <a:prstGeom prst="rect">
-            <a:avLst/>
-          </a:prstGeom>
-          <a:noFill/>
-          <a:ln/>
-        </p:spPr>
-        <p:txBody>
-          <a:bodyPr wrap="square" lIns="0" tIns="0" rIns="0" bIns="0" rtlCol="0" anchor="ctr"/>
-          <a:lstStyle/>
-          <a:p>
-            <a:pPr marL="0" indent="0" algn="ctr">
-              <a:buNone/>
-            </a:pPr>
-            <a:r>
-              <a:rPr lang="en-US" sz="1500" b="1" dirty="0">
-                <a:solidFill>
-                  <a:srgbClr val="FFFFFF"/>
-                </a:solidFill>
-                <a:latin typeface="TH Sarabun New" pitchFamily="34" charset="0"/>
-                <a:ea typeface="TH Sarabun New" pitchFamily="34" charset="-122"/>
-                <a:cs typeface="TH Sarabun New" pitchFamily="34" charset="-120"/>
-              </a:rPr>
-              <a:t>3</a:t>
-            </a:r>
-            <a:endParaRPr lang="en-US" sz="1500" dirty="0"/>
-          </a:p>
-        </p:txBody>
-      </p:sp>
-      <p:sp>
-        <p:nvSpPr>
-          <p:cNvPr id="18" name="Text 16"/>
-          <p:cNvSpPr/>
-          <p:nvPr/>
-        </p:nvSpPr>
-        <p:spPr>
-          <a:xfrm>
-            <a:off x="1252728" y="3035808"/>
-            <a:ext cx="1828800" cy="658368"/>
-          </a:xfrm>
-          <a:prstGeom prst="rect">
-            <a:avLst/>
-          </a:prstGeom>
-          <a:noFill/>
-          <a:ln/>
-        </p:spPr>
-        <p:txBody>
-          <a:bodyPr wrap="square" lIns="0" tIns="0" rIns="0" bIns="0" rtlCol="0" anchor="ctr"/>
-          <a:lstStyle/>
-          <a:p>
-            <a:pPr marL="0" indent="0">
-              <a:buNone/>
-            </a:pPr>
-            <a:r>
-              <a:rPr lang="en-US" sz="1700" b="1" dirty="0">
-                <a:solidFill>
-                  <a:srgbClr val="222831"/>
-                </a:solidFill>
-                <a:latin typeface="TH Sarabun New" pitchFamily="34" charset="0"/>
-                <a:ea typeface="TH Sarabun New" pitchFamily="34" charset="-122"/>
-                <a:cs typeface="TH Sarabun New" pitchFamily="34" charset="-120"/>
-              </a:rPr>
-              <a:t>ข้อจำกัด</a:t>
-            </a:r>
-            <a:endParaRPr lang="en-US" sz="1700" dirty="0"/>
-          </a:p>
-        </p:txBody>
-      </p:sp>
-      <p:sp>
-        <p:nvSpPr>
-          <p:cNvPr id="19" name="Text 17"/>
-          <p:cNvSpPr/>
-          <p:nvPr/>
-        </p:nvSpPr>
-        <p:spPr>
-          <a:xfrm>
-            <a:off x="3136392" y="3035808"/>
-            <a:ext cx="2560320" cy="658368"/>
-          </a:xfrm>
-          <a:prstGeom prst="rect">
-            <a:avLst/>
-          </a:prstGeom>
-          <a:noFill/>
-          <a:ln/>
-        </p:spPr>
-        <p:txBody>
-          <a:bodyPr wrap="square" lIns="0" tIns="0" rIns="0" bIns="0" rtlCol="0" anchor="ctr"/>
-          <a:lstStyle/>
-          <a:p>
-            <a:pPr marL="0" indent="0">
-              <a:buNone/>
-            </a:pPr>
-            <a:r>
-              <a:rPr lang="en-US" sz="1500" dirty="0">
-                <a:solidFill>
-                  <a:srgbClr val="393E46"/>
-                </a:solidFill>
-                <a:latin typeface="TH Sarabun New" pitchFamily="34" charset="0"/>
-                <a:ea typeface="TH Sarabun New" pitchFamily="34" charset="-122"/>
-                <a:cs typeface="TH Sarabun New" pitchFamily="34" charset="-120"/>
-              </a:rPr>
-              <a:t>อะไรห้ามแตะ อะไรห้ามเพิ่ม</a:t>
-            </a:r>
-            <a:endParaRPr lang="en-US" sz="1500" dirty="0"/>
-          </a:p>
-        </p:txBody>
-      </p:sp>
-      <p:sp>
-        <p:nvSpPr>
-          <p:cNvPr id="20" name="Shape 18"/>
-          <p:cNvSpPr/>
-          <p:nvPr/>
-        </p:nvSpPr>
-        <p:spPr>
-          <a:xfrm>
-            <a:off x="594360" y="3822192"/>
-            <a:ext cx="5212080" cy="658368"/>
-          </a:xfrm>
-          <a:prstGeom prst="roundRect">
-            <a:avLst>
-              <a:gd name="adj" fmla="val 12500"/>
-            </a:avLst>
-          </a:prstGeom>
-          <a:solidFill>
-            <a:srgbClr val="F5F7F8"/>
-          </a:solidFill>
-          <a:ln w="9525">
-            <a:solidFill>
-              <a:srgbClr val="F5F7F8"/>
-            </a:solidFill>
-            <a:prstDash val="solid"/>
-          </a:ln>
-          <a:effectLst>
-            <a:outerShdw blurRad="101600" dist="12700" dir="5400000" algn="bl" rotWithShape="0">
-              <a:srgbClr val="222831">
-                <a:alpha val="10000"/>
-              </a:srgbClr>
-            </a:outerShdw>
-          </a:effectLst>
-        </p:spPr>
-        <p:txBody>
-          <a:bodyPr/>
-          <a:lstStyle/>
-          <a:p>
-            <a:endParaRPr lang="en-TH"/>
-          </a:p>
-        </p:txBody>
-      </p:sp>
-      <p:sp>
-        <p:nvSpPr>
-          <p:cNvPr id="21" name="Shape 19"/>
-          <p:cNvSpPr/>
-          <p:nvPr/>
-        </p:nvSpPr>
-        <p:spPr>
-          <a:xfrm>
-            <a:off x="813816" y="3986784"/>
-            <a:ext cx="329184" cy="329184"/>
-          </a:xfrm>
-          <a:prstGeom prst="ellipse">
-            <a:avLst/>
-          </a:prstGeom>
-          <a:solidFill>
-            <a:srgbClr val="00ADB5"/>
-          </a:solidFill>
-          <a:ln w="12700">
-            <a:solidFill>
-              <a:srgbClr val="00ADB5"/>
-            </a:solidFill>
-            <a:prstDash val="solid"/>
-          </a:ln>
-        </p:spPr>
-        <p:txBody>
-          <a:bodyPr/>
-          <a:lstStyle/>
-          <a:p>
-            <a:endParaRPr lang="en-TH"/>
-          </a:p>
-        </p:txBody>
-      </p:sp>
-      <p:sp>
-        <p:nvSpPr>
-          <p:cNvPr id="22" name="Text 20"/>
-          <p:cNvSpPr/>
-          <p:nvPr/>
-        </p:nvSpPr>
-        <p:spPr>
-          <a:xfrm>
-            <a:off x="813816" y="3986784"/>
-            <a:ext cx="329184" cy="329184"/>
-          </a:xfrm>
-          <a:prstGeom prst="rect">
-            <a:avLst/>
-          </a:prstGeom>
-          <a:noFill/>
-          <a:ln/>
-        </p:spPr>
-        <p:txBody>
-          <a:bodyPr wrap="square" lIns="0" tIns="0" rIns="0" bIns="0" rtlCol="0" anchor="ctr"/>
-          <a:lstStyle/>
-          <a:p>
-            <a:pPr marL="0" indent="0" algn="ctr">
-              <a:buNone/>
-            </a:pPr>
-            <a:r>
-              <a:rPr lang="en-US" sz="1500" b="1" dirty="0">
-                <a:solidFill>
-                  <a:srgbClr val="FFFFFF"/>
-                </a:solidFill>
-                <a:latin typeface="TH Sarabun New" pitchFamily="34" charset="0"/>
-                <a:ea typeface="TH Sarabun New" pitchFamily="34" charset="-122"/>
-                <a:cs typeface="TH Sarabun New" pitchFamily="34" charset="-120"/>
-              </a:rPr>
-              <a:t>4</a:t>
-            </a:r>
-            <a:endParaRPr lang="en-US" sz="1500" dirty="0"/>
-          </a:p>
-        </p:txBody>
-      </p:sp>
-      <p:sp>
-        <p:nvSpPr>
-          <p:cNvPr id="23" name="Text 21"/>
-          <p:cNvSpPr/>
-          <p:nvPr/>
-        </p:nvSpPr>
-        <p:spPr>
-          <a:xfrm>
-            <a:off x="1252728" y="3822192"/>
-            <a:ext cx="1828800" cy="658368"/>
-          </a:xfrm>
-          <a:prstGeom prst="rect">
-            <a:avLst/>
-          </a:prstGeom>
-          <a:noFill/>
-          <a:ln/>
-        </p:spPr>
-        <p:txBody>
-          <a:bodyPr wrap="square" lIns="0" tIns="0" rIns="0" bIns="0" rtlCol="0" anchor="ctr"/>
-          <a:lstStyle/>
-          <a:p>
-            <a:pPr marL="0" indent="0">
-              <a:buNone/>
-            </a:pPr>
-            <a:r>
-              <a:rPr lang="en-US" sz="1700" b="1" dirty="0">
-                <a:solidFill>
-                  <a:srgbClr val="222831"/>
-                </a:solidFill>
-                <a:latin typeface="TH Sarabun New" pitchFamily="34" charset="0"/>
-                <a:ea typeface="TH Sarabun New" pitchFamily="34" charset="-122"/>
-                <a:cs typeface="TH Sarabun New" pitchFamily="34" charset="-120"/>
-              </a:rPr>
-              <a:t>วิธียืนยันผล</a:t>
-            </a:r>
-            <a:endParaRPr lang="en-US" sz="1700" dirty="0"/>
-          </a:p>
-        </p:txBody>
-      </p:sp>
-      <p:sp>
-        <p:nvSpPr>
-          <p:cNvPr id="24" name="Text 22"/>
-          <p:cNvSpPr/>
-          <p:nvPr/>
-        </p:nvSpPr>
-        <p:spPr>
-          <a:xfrm>
-            <a:off x="3136392" y="3822192"/>
-            <a:ext cx="2560320" cy="658368"/>
-          </a:xfrm>
-          <a:prstGeom prst="rect">
-            <a:avLst/>
-          </a:prstGeom>
-          <a:noFill/>
-          <a:ln/>
-        </p:spPr>
-        <p:txBody>
-          <a:bodyPr wrap="square" lIns="0" tIns="0" rIns="0" bIns="0" rtlCol="0" anchor="ctr"/>
-          <a:lstStyle/>
-          <a:p>
-            <a:pPr marL="0" indent="0">
-              <a:buNone/>
-            </a:pPr>
-            <a:r>
-              <a:rPr lang="en-US" sz="1500" dirty="0">
-                <a:solidFill>
-                  <a:srgbClr val="393E46"/>
-                </a:solidFill>
-                <a:latin typeface="TH Sarabun New" pitchFamily="34" charset="0"/>
-                <a:ea typeface="TH Sarabun New" pitchFamily="34" charset="-122"/>
-                <a:cs typeface="TH Sarabun New" pitchFamily="34" charset="-120"/>
-              </a:rPr>
-              <a:t>ให้ทดสอบและถ่ายภาพหน้าจอมาให้ดู</a:t>
-            </a:r>
-            <a:endParaRPr lang="en-US" sz="1500" dirty="0"/>
-          </a:p>
-        </p:txBody>
-      </p:sp>
-      <p:sp>
-        <p:nvSpPr>
-          <p:cNvPr id="25" name="Text 23"/>
-          <p:cNvSpPr/>
-          <p:nvPr/>
-        </p:nvSpPr>
-        <p:spPr>
-          <a:xfrm>
-            <a:off x="6172200" y="1417320"/>
-            <a:ext cx="5394960" cy="329184"/>
-          </a:xfrm>
-          <a:prstGeom prst="rect">
-            <a:avLst/>
-          </a:prstGeom>
-          <a:noFill/>
-          <a:ln/>
-        </p:spPr>
-        <p:txBody>
-          <a:bodyPr wrap="square" lIns="0" tIns="0" rIns="0" bIns="0" rtlCol="0" anchor="ctr"/>
-          <a:lstStyle/>
-          <a:p>
-            <a:pPr marL="0" indent="0">
-              <a:buNone/>
-            </a:pPr>
-            <a:r>
-              <a:rPr lang="en-US" sz="1800" b="1" dirty="0">
-                <a:solidFill>
-                  <a:srgbClr val="222831"/>
-                </a:solidFill>
-                <a:latin typeface="TH Sarabun New" pitchFamily="34" charset="0"/>
-                <a:ea typeface="TH Sarabun New" pitchFamily="34" charset="-122"/>
-                <a:cs typeface="TH Sarabun New" pitchFamily="34" charset="-120"/>
-              </a:rPr>
-              <a:t>ตัวอย่าง prompt จริงที่จะใช้ใน LAB C</a:t>
-            </a:r>
-            <a:endParaRPr lang="en-US" sz="1800" dirty="0"/>
-          </a:p>
-        </p:txBody>
-      </p:sp>
-      <p:sp>
-        <p:nvSpPr>
-          <p:cNvPr id="26" name="Shape 24"/>
-          <p:cNvSpPr/>
-          <p:nvPr/>
-        </p:nvSpPr>
-        <p:spPr>
-          <a:xfrm>
-            <a:off x="6172200" y="1810512"/>
-            <a:ext cx="5394960" cy="1874520"/>
-          </a:xfrm>
-          <a:prstGeom prst="roundRect">
-            <a:avLst>
-              <a:gd name="adj" fmla="val 3415"/>
-            </a:avLst>
-          </a:prstGeom>
-          <a:solidFill>
-            <a:srgbClr val="222831"/>
-          </a:solidFill>
-          <a:ln w="12700">
-            <a:solidFill>
-              <a:srgbClr val="222831"/>
-            </a:solidFill>
-            <a:prstDash val="solid"/>
-          </a:ln>
-        </p:spPr>
-        <p:txBody>
-          <a:bodyPr/>
-          <a:lstStyle/>
-          <a:p>
-            <a:endParaRPr lang="en-TH"/>
-          </a:p>
-        </p:txBody>
-      </p:sp>
-      <p:sp>
-        <p:nvSpPr>
-          <p:cNvPr id="27" name="Text 25"/>
-          <p:cNvSpPr/>
-          <p:nvPr/>
-        </p:nvSpPr>
-        <p:spPr>
-          <a:xfrm>
-            <a:off x="6318504" y="1901952"/>
-            <a:ext cx="5102352" cy="1691640"/>
-          </a:xfrm>
-          <a:prstGeom prst="rect">
-            <a:avLst/>
-          </a:prstGeom>
-          <a:noFill/>
-          <a:ln/>
-        </p:spPr>
-        <p:txBody>
-          <a:bodyPr wrap="square" lIns="0" tIns="0" rIns="0" bIns="0" rtlCol="0" anchor="t"/>
-          <a:lstStyle/>
-          <a:p>
-            <a:pPr marL="0" indent="0">
-              <a:lnSpc>
-                <a:spcPts val="2000"/>
-              </a:lnSpc>
-              <a:buNone/>
-            </a:pPr>
-            <a:r>
-              <a:rPr lang="en-US" sz="1200" dirty="0">
-                <a:solidFill>
-                  <a:srgbClr val="D6F5F7"/>
-                </a:solidFill>
-                <a:latin typeface="Courier New" pitchFamily="34" charset="0"/>
-                <a:ea typeface="Courier New" pitchFamily="34" charset="-122"/>
-                <a:cs typeface="Courier New" pitchFamily="34" charset="-120"/>
-              </a:rPr>
-              <a:t>ทำชั้น L3 ตาม SPEC_FundingHub.md §11.3</a:t>
-            </a:r>
-            <a:endParaRPr lang="en-US" sz="1200" dirty="0"/>
-          </a:p>
-          <a:p>
-            <a:pPr marL="0" indent="0">
-              <a:lnSpc>
-                <a:spcPts val="2000"/>
-              </a:lnSpc>
-              <a:buNone/>
-            </a:pPr>
-            <a:r>
-              <a:rPr lang="en-US" sz="1200" dirty="0">
-                <a:solidFill>
-                  <a:srgbClr val="D6F5F7"/>
-                </a:solidFill>
-                <a:latin typeface="Courier New" pitchFamily="34" charset="0"/>
-                <a:ea typeface="Courier New" pitchFamily="34" charset="-122"/>
-                <a:cs typeface="Courier New" pitchFamily="34" charset="-120"/>
-              </a:rPr>
-              <a:t>สร้างหน้า /grants ให้ครบตาม §7.2</a:t>
-            </a:r>
-            <a:endParaRPr lang="en-US" sz="1200" dirty="0"/>
-          </a:p>
-          <a:p>
-            <a:pPr marL="0" indent="0">
-              <a:lnSpc>
-                <a:spcPts val="2000"/>
-              </a:lnSpc>
-              <a:buNone/>
-            </a:pPr>
-            <a:r>
-              <a:rPr lang="en-US" sz="1200" dirty="0">
-                <a:solidFill>
-                  <a:srgbClr val="D6F5F7"/>
-                </a:solidFill>
-                <a:latin typeface="Courier New" pitchFamily="34" charset="0"/>
-                <a:ea typeface="Courier New" pitchFamily="34" charset="-122"/>
-                <a:cs typeface="Courier New" pitchFamily="34" charset="-120"/>
-              </a:rPr>
-              <a:t>ใช้เฉพาะ token สีและตัวอักษรใน §4</a:t>
-            </a:r>
-            <a:endParaRPr lang="en-US" sz="1200" dirty="0"/>
-          </a:p>
-          <a:p>
-            <a:pPr marL="0" indent="0">
-              <a:lnSpc>
-                <a:spcPts val="2000"/>
-              </a:lnSpc>
-              <a:buNone/>
-            </a:pPr>
-            <a:r>
-              <a:rPr lang="en-US" sz="1200" dirty="0">
-                <a:solidFill>
-                  <a:srgbClr val="D6F5F7"/>
-                </a:solidFill>
-                <a:latin typeface="Courier New" pitchFamily="34" charset="0"/>
-                <a:ea typeface="Courier New" pitchFamily="34" charset="-122"/>
-                <a:cs typeface="Courier New" pitchFamily="34" charset="-120"/>
-              </a:rPr>
-              <a:t>ทดสอบด้วย Browser แล้วถ่าย screenshot</a:t>
-            </a:r>
-            <a:endParaRPr lang="en-US" sz="1200" dirty="0"/>
-          </a:p>
-        </p:txBody>
-      </p:sp>
-      <p:sp>
-        <p:nvSpPr>
-          <p:cNvPr id="28" name="Shape 26"/>
-          <p:cNvSpPr/>
-          <p:nvPr/>
-        </p:nvSpPr>
-        <p:spPr>
-          <a:xfrm>
-            <a:off x="6172200" y="3840480"/>
-            <a:ext cx="5394960" cy="1280160"/>
-          </a:xfrm>
-          <a:prstGeom prst="roundRect">
-            <a:avLst>
-              <a:gd name="adj" fmla="val 6429"/>
-            </a:avLst>
-          </a:prstGeom>
-          <a:solidFill>
-            <a:srgbClr val="E8F6F7"/>
-          </a:solidFill>
-          <a:ln w="9525">
-            <a:solidFill>
-              <a:srgbClr val="E8F6F7"/>
-            </a:solidFill>
-            <a:prstDash val="solid"/>
-          </a:ln>
-          <a:effectLst>
-            <a:outerShdw blurRad="101600" dist="12700" dir="5400000" algn="bl" rotWithShape="0">
-              <a:srgbClr val="222831">
-                <a:alpha val="10000"/>
-              </a:srgbClr>
-            </a:outerShdw>
-          </a:effectLst>
-        </p:spPr>
-        <p:txBody>
-          <a:bodyPr/>
-          <a:lstStyle/>
-          <a:p>
-            <a:endParaRPr lang="en-TH"/>
-          </a:p>
-        </p:txBody>
-      </p:sp>
-      <p:sp>
-        <p:nvSpPr>
-          <p:cNvPr id="29" name="Text 27"/>
-          <p:cNvSpPr/>
-          <p:nvPr/>
-        </p:nvSpPr>
-        <p:spPr>
-          <a:xfrm>
-            <a:off x="6400800" y="3977640"/>
-            <a:ext cx="4937760" cy="1005840"/>
-          </a:xfrm>
-          <a:prstGeom prst="rect">
-            <a:avLst/>
-          </a:prstGeom>
-          <a:noFill/>
-          <a:ln/>
-        </p:spPr>
-        <p:txBody>
-          <a:bodyPr wrap="square" lIns="0" tIns="0" rIns="0" bIns="0" rtlCol="0" anchor="ctr"/>
-          <a:lstStyle/>
-          <a:p>
-            <a:pPr marL="0" indent="0">
-              <a:buNone/>
-            </a:pPr>
-            <a:r>
-              <a:rPr lang="en-US" sz="1600" dirty="0">
-                <a:solidFill>
-                  <a:srgbClr val="00ADB5"/>
-                </a:solidFill>
-                <a:latin typeface="TH Sarabun New" pitchFamily="34" charset="0"/>
-                <a:ea typeface="TH Sarabun New" pitchFamily="34" charset="-122"/>
-                <a:cs typeface="TH Sarabun New" pitchFamily="34" charset="-120"/>
-              </a:rPr>
-              <a:t>สี่บรรทัดนี้แทนคำอธิบายกว่า 300 บรรทัด เพราะรายละเอียดทั้งหมดอยู่ในไฟล์สเปกแล้ว ไม่ต้องพิมพ์ซ้ำและไม่มีโอกาสพิมพ์ตกหล่น</a:t>
-            </a:r>
-            <a:endParaRPr lang="en-US" sz="1600" dirty="0"/>
-          </a:p>
-        </p:txBody>
-      </p:sp>
-    </p:spTree>
-  </p:cSld>
-  <p:clrMapOvr>
-    <a:masterClrMapping/>
-  </p:clrMapOvr>
-</p:sld>
-</file>
-
-<file path=ppt/slides/slide15.xml><?xml version="1.0" encoding="utf-8"?>
 <p:sld xmlns:a="http://schemas.openxmlformats.org/drawingml/2006/main" xmlns:r="http://schemas.openxmlformats.org/officeDocument/2006/relationships" xmlns:p="http://schemas.openxmlformats.org/presentationml/2006/main">
   <p:cSld name="Slide 16">
     <p:bg>
@@ -7917,7 +6667,7 @@
 </p:sld>
 </file>
 
-<file path=ppt/slides/slide16.xml><?xml version="1.0" encoding="utf-8"?>
+<file path=ppt/slides/slide15.xml><?xml version="1.0" encoding="utf-8"?>
 <p:sld xmlns:a="http://schemas.openxmlformats.org/drawingml/2006/main" xmlns:r="http://schemas.openxmlformats.org/officeDocument/2006/relationships" xmlns:p="http://schemas.openxmlformats.org/presentationml/2006/main">
   <p:cSld name="Slide 17">
     <p:bg>
@@ -8138,7 +6888,7 @@
 </p:sld>
 </file>
 
-<file path=ppt/slides/slide17.xml><?xml version="1.0" encoding="utf-8"?>
+<file path=ppt/slides/slide16.xml><?xml version="1.0" encoding="utf-8"?>
 <p:sld xmlns:a="http://schemas.openxmlformats.org/drawingml/2006/main" xmlns:r="http://schemas.openxmlformats.org/officeDocument/2006/relationships" xmlns:p="http://schemas.openxmlformats.org/presentationml/2006/main">
   <p:cSld name="Slide 18">
     <p:bg>
@@ -9114,7 +7864,7 @@
 </p:sld>
 </file>
 
-<file path=ppt/slides/slide18.xml><?xml version="1.0" encoding="utf-8"?>
+<file path=ppt/slides/slide17.xml><?xml version="1.0" encoding="utf-8"?>
 <p:sld xmlns:a="http://schemas.openxmlformats.org/drawingml/2006/main" xmlns:r="http://schemas.openxmlformats.org/officeDocument/2006/relationships" xmlns:p="http://schemas.openxmlformats.org/presentationml/2006/main">
   <p:cSld name="Slide 23">
     <p:bg>
@@ -9335,7 +8085,7 @@
 </p:sld>
 </file>
 
-<file path=ppt/slides/slide19.xml><?xml version="1.0" encoding="utf-8"?>
+<file path=ppt/slides/slide18.xml><?xml version="1.0" encoding="utf-8"?>
 <p:sld xmlns:a="http://schemas.openxmlformats.org/drawingml/2006/main" xmlns:r="http://schemas.openxmlformats.org/officeDocument/2006/relationships" xmlns:p="http://schemas.openxmlformats.org/presentationml/2006/main">
   <p:cSld name="Slide 24">
     <p:bg>
@@ -9475,7 +8225,7 @@
           <a:bodyPr/>
           <a:lstStyle/>
           <a:p>
-            <a:endParaRPr lang="en-TH"/>
+            <a:endParaRPr lang="en-TH" sz="2000"/>
           </a:p>
         </p:txBody>
       </p:sp>
@@ -9504,7 +8254,7 @@
               <a:buNone/>
             </a:pPr>
             <a:r>
-              <a:rPr lang="en-US" sz="2000" b="1" dirty="0">
+              <a:rPr lang="en-US" sz="2400" b="1" dirty="0">
                 <a:solidFill>
                   <a:srgbClr val="DC2626"/>
                 </a:solidFill>
@@ -9514,7 +8264,7 @@
               </a:rPr>
               <a:t>ถ้าไม่กำหนด</a:t>
             </a:r>
-            <a:endParaRPr lang="en-US" sz="2000" dirty="0"/>
+            <a:endParaRPr lang="en-US" sz="2400" dirty="0"/>
           </a:p>
         </p:txBody>
       </p:sp>
@@ -9547,7 +8297,7 @@
               <a:buChar char="•"/>
             </a:pPr>
             <a:r>
-              <a:rPr lang="en-US" sz="1600" dirty="0">
+              <a:rPr lang="en-US" sz="2000" dirty="0">
                 <a:solidFill>
                   <a:srgbClr val="393E46"/>
                 </a:solidFill>
@@ -9557,7 +8307,7 @@
               </a:rPr>
               <a:t>AI เลือกสีน้ำเงินและฟอนต์สากลให้ทุกครั้ง</a:t>
             </a:r>
-            <a:endParaRPr lang="en-US" sz="1600" dirty="0"/>
+            <a:endParaRPr lang="en-US" sz="2000" dirty="0"/>
           </a:p>
           <a:p>
             <a:pPr marL="342900" indent="-342900">
@@ -9568,7 +8318,7 @@
               <a:buChar char="•"/>
             </a:pPr>
             <a:r>
-              <a:rPr lang="en-US" sz="1600" dirty="0">
+              <a:rPr lang="en-US" sz="2000" dirty="0">
                 <a:solidFill>
                   <a:srgbClr val="393E46"/>
                 </a:solidFill>
@@ -9578,7 +8328,7 @@
               </a:rPr>
               <a:t>งานของผู้เข้าอบรมทุกคนหน้าตาเหมือนกันหมด</a:t>
             </a:r>
-            <a:endParaRPr lang="en-US" sz="1600" dirty="0"/>
+            <a:endParaRPr lang="en-US" sz="2000" dirty="0"/>
           </a:p>
           <a:p>
             <a:pPr marL="342900" indent="-342900">
@@ -9589,7 +8339,7 @@
               <a:buChar char="•"/>
             </a:pPr>
             <a:r>
-              <a:rPr lang="en-US" sz="1600" dirty="0">
+              <a:rPr lang="en-US" sz="2000" dirty="0">
                 <a:solidFill>
                   <a:srgbClr val="393E46"/>
                 </a:solidFill>
@@ -9599,7 +8349,7 @@
               </a:rPr>
               <a:t>สั่งแก้หน้าหนึ่ง สีเพี้ยนไปอีกหน้าหนึ่ง</a:t>
             </a:r>
-            <a:endParaRPr lang="en-US" sz="1600" dirty="0"/>
+            <a:endParaRPr lang="en-US" sz="2000" dirty="0"/>
           </a:p>
           <a:p>
             <a:pPr marL="342900" indent="-342900">
@@ -9610,7 +8360,7 @@
               <a:buChar char="•"/>
             </a:pPr>
             <a:r>
-              <a:rPr lang="en-US" sz="1600" dirty="0">
+              <a:rPr lang="en-US" sz="2000" dirty="0">
                 <a:solidFill>
                   <a:srgbClr val="393E46"/>
                 </a:solidFill>
@@ -9620,7 +8370,7 @@
               </a:rPr>
               <a:t>ภาษาไทยแสดงผลเพี้ยนเพราะฟอนต์ไม่รองรับ</a:t>
             </a:r>
-            <a:endParaRPr lang="en-US" sz="1600" dirty="0"/>
+            <a:endParaRPr lang="en-US" sz="2000" dirty="0"/>
           </a:p>
         </p:txBody>
       </p:sp>
@@ -9661,7 +8411,7 @@
           <a:bodyPr/>
           <a:lstStyle/>
           <a:p>
-            <a:endParaRPr lang="en-TH"/>
+            <a:endParaRPr lang="en-TH" sz="2000"/>
           </a:p>
         </p:txBody>
       </p:sp>
@@ -9690,7 +8440,7 @@
               <a:buNone/>
             </a:pPr>
             <a:r>
-              <a:rPr lang="en-US" sz="2000" b="1" dirty="0">
+              <a:rPr lang="en-US" sz="2400" b="1" dirty="0">
                 <a:solidFill>
                   <a:srgbClr val="0F766E"/>
                 </a:solidFill>
@@ -9700,7 +8450,7 @@
               </a:rPr>
               <a:t>ถ้ากำหนดไว้ใน §4</a:t>
             </a:r>
-            <a:endParaRPr lang="en-US" sz="2000" dirty="0"/>
+            <a:endParaRPr lang="en-US" sz="2400" dirty="0"/>
           </a:p>
         </p:txBody>
       </p:sp>
@@ -9733,7 +8483,7 @@
               <a:buChar char="•"/>
             </a:pPr>
             <a:r>
-              <a:rPr lang="en-US" sz="1600" dirty="0">
+              <a:rPr lang="en-US" sz="2000" dirty="0">
                 <a:solidFill>
                   <a:srgbClr val="393E46"/>
                 </a:solidFill>
@@ -9743,7 +8493,7 @@
               </a:rPr>
               <a:t>ทุกหน้าใช้สีและฟอนต์ชุดเดียวกันโดยอัตโนมัติ</a:t>
             </a:r>
-            <a:endParaRPr lang="en-US" sz="1600" dirty="0"/>
+            <a:endParaRPr lang="en-US" sz="2000" dirty="0"/>
           </a:p>
           <a:p>
             <a:pPr marL="342900" indent="-342900">
@@ -9754,7 +8504,7 @@
               <a:buChar char="•"/>
             </a:pPr>
             <a:r>
-              <a:rPr lang="en-US" sz="1600" dirty="0">
+              <a:rPr lang="en-US" sz="2000" dirty="0">
                 <a:solidFill>
                   <a:srgbClr val="393E46"/>
                 </a:solidFill>
@@ -9764,7 +8514,7 @@
               </a:rPr>
               <a:t>เปลี่ยนสีทั้งระบบด้วยการแก้ไฟล์สเปกที่เดียว</a:t>
             </a:r>
-            <a:endParaRPr lang="en-US" sz="1600" dirty="0"/>
+            <a:endParaRPr lang="en-US" sz="2000" dirty="0"/>
           </a:p>
           <a:p>
             <a:pPr marL="342900" indent="-342900">
@@ -9775,7 +8525,7 @@
               <a:buChar char="•"/>
             </a:pPr>
             <a:r>
-              <a:rPr lang="en-US" sz="1600" dirty="0">
+              <a:rPr lang="en-US" sz="2000" dirty="0">
                 <a:solidFill>
                   <a:srgbClr val="393E46"/>
                 </a:solidFill>
@@ -9785,7 +8535,7 @@
               </a:rPr>
               <a:t>งานออกมาเป็นเอกลักษณ์ของเราเอง</a:t>
             </a:r>
-            <a:endParaRPr lang="en-US" sz="1600" dirty="0"/>
+            <a:endParaRPr lang="en-US" sz="2000" dirty="0"/>
           </a:p>
           <a:p>
             <a:pPr marL="342900" indent="-342900">
@@ -9796,7 +8546,7 @@
               <a:buChar char="•"/>
             </a:pPr>
             <a:r>
-              <a:rPr lang="en-US" sz="1600" dirty="0">
+              <a:rPr lang="en-US" sz="2000" dirty="0">
                 <a:solidFill>
                   <a:srgbClr val="393E46"/>
                 </a:solidFill>
@@ -9806,7 +8556,7 @@
               </a:rPr>
               <a:t>ภาษาไทยอ่านง่าย เพราะเลือกฟอนต์ที่รองรับ</a:t>
             </a:r>
-            <a:endParaRPr lang="en-US" sz="1600" dirty="0"/>
+            <a:endParaRPr lang="en-US" sz="2000" dirty="0"/>
           </a:p>
         </p:txBody>
       </p:sp>
@@ -9835,7 +8585,7 @@
               <a:buNone/>
             </a:pPr>
             <a:r>
-              <a:rPr lang="en-US" sz="2000" b="1" dirty="0">
+              <a:rPr lang="en-US" sz="2400" b="1" dirty="0">
                 <a:solidFill>
                   <a:srgbClr val="222831"/>
                 </a:solidFill>
@@ -9845,7 +8595,7 @@
               </a:rPr>
               <a:t>สามสิ่งที่ต้องเลือกใน LAB 3</a:t>
             </a:r>
-            <a:endParaRPr lang="en-US" sz="2000" dirty="0"/>
+            <a:endParaRPr lang="en-US" sz="2400" dirty="0"/>
           </a:p>
         </p:txBody>
       </p:sp>
@@ -9886,7 +8636,7 @@
           <a:bodyPr/>
           <a:lstStyle/>
           <a:p>
-            <a:endParaRPr lang="en-TH"/>
+            <a:endParaRPr lang="en-TH" sz="2000"/>
           </a:p>
         </p:txBody>
       </p:sp>
@@ -9918,7 +8668,7 @@
           <a:bodyPr/>
           <a:lstStyle/>
           <a:p>
-            <a:endParaRPr lang="en-TH"/>
+            <a:endParaRPr lang="en-TH" sz="2000"/>
           </a:p>
         </p:txBody>
       </p:sp>
@@ -9947,7 +8697,7 @@
               <a:buNone/>
             </a:pPr>
             <a:r>
-              <a:rPr lang="en-US" sz="1500" b="1" dirty="0">
+              <a:rPr lang="en-US" sz="1600" b="1" dirty="0">
                 <a:solidFill>
                   <a:srgbClr val="FFFFFF"/>
                 </a:solidFill>
@@ -9957,7 +8707,7 @@
               </a:rPr>
               <a:t>1</a:t>
             </a:r>
-            <a:endParaRPr lang="en-US" sz="1500" dirty="0"/>
+            <a:endParaRPr lang="en-US" sz="1600" dirty="0"/>
           </a:p>
         </p:txBody>
       </p:sp>
@@ -9986,7 +8736,7 @@
               <a:buNone/>
             </a:pPr>
             <a:r>
-              <a:rPr lang="en-US" sz="1900" b="1" dirty="0">
+              <a:rPr lang="en-US" sz="2000" b="1" dirty="0">
                 <a:solidFill>
                   <a:srgbClr val="222831"/>
                 </a:solidFill>
@@ -9996,7 +8746,7 @@
               </a:rPr>
               <a:t>สไตล์</a:t>
             </a:r>
-            <a:endParaRPr lang="en-US" sz="1900" dirty="0"/>
+            <a:endParaRPr lang="en-US" sz="2000" dirty="0"/>
           </a:p>
         </p:txBody>
       </p:sp>
@@ -10025,7 +8775,7 @@
               <a:buNone/>
             </a:pPr>
             <a:r>
-              <a:rPr lang="en-US" sz="1150" dirty="0">
+              <a:rPr lang="en-US" sz="1400" dirty="0">
                 <a:solidFill>
                   <a:srgbClr val="00ADB5"/>
                 </a:solidFill>
@@ -10035,7 +8785,7 @@
               </a:rPr>
               <a:t>uistyleguide.com</a:t>
             </a:r>
-            <a:endParaRPr lang="en-US" sz="1150" dirty="0"/>
+            <a:endParaRPr lang="en-US" sz="1400" dirty="0"/>
           </a:p>
         </p:txBody>
       </p:sp>
@@ -10076,7 +8826,7 @@
           <a:bodyPr/>
           <a:lstStyle/>
           <a:p>
-            <a:endParaRPr lang="en-TH"/>
+            <a:endParaRPr lang="en-TH" sz="2000"/>
           </a:p>
         </p:txBody>
       </p:sp>
@@ -10108,7 +8858,7 @@
           <a:bodyPr/>
           <a:lstStyle/>
           <a:p>
-            <a:endParaRPr lang="en-TH"/>
+            <a:endParaRPr lang="en-TH" sz="2000"/>
           </a:p>
         </p:txBody>
       </p:sp>
@@ -10137,7 +8887,7 @@
               <a:buNone/>
             </a:pPr>
             <a:r>
-              <a:rPr lang="en-US" sz="1500" b="1" dirty="0">
+              <a:rPr lang="en-US" sz="1600" b="1" dirty="0">
                 <a:solidFill>
                   <a:srgbClr val="FFFFFF"/>
                 </a:solidFill>
@@ -10147,7 +8897,7 @@
               </a:rPr>
               <a:t>2</a:t>
             </a:r>
-            <a:endParaRPr lang="en-US" sz="1500" dirty="0"/>
+            <a:endParaRPr lang="en-US" sz="1600" dirty="0"/>
           </a:p>
         </p:txBody>
       </p:sp>
@@ -10176,7 +8926,7 @@
               <a:buNone/>
             </a:pPr>
             <a:r>
-              <a:rPr lang="en-US" sz="1900" b="1" dirty="0">
+              <a:rPr lang="en-US" sz="2000" b="1" dirty="0">
                 <a:solidFill>
                   <a:srgbClr val="222831"/>
                 </a:solidFill>
@@ -10186,7 +8936,7 @@
               </a:rPr>
               <a:t>จานสี</a:t>
             </a:r>
-            <a:endParaRPr lang="en-US" sz="1900" dirty="0"/>
+            <a:endParaRPr lang="en-US" sz="2000" dirty="0"/>
           </a:p>
         </p:txBody>
       </p:sp>
@@ -10215,7 +8965,7 @@
               <a:buNone/>
             </a:pPr>
             <a:r>
-              <a:rPr lang="en-US" sz="1150" dirty="0">
+              <a:rPr lang="en-US" sz="1400" dirty="0">
                 <a:solidFill>
                   <a:srgbClr val="00ADB5"/>
                 </a:solidFill>
@@ -10225,7 +8975,7 @@
               </a:rPr>
               <a:t>colorhunt.co</a:t>
             </a:r>
-            <a:endParaRPr lang="en-US" sz="1150" dirty="0"/>
+            <a:endParaRPr lang="en-US" sz="1400" dirty="0"/>
           </a:p>
         </p:txBody>
       </p:sp>
@@ -10266,7 +9016,7 @@
           <a:bodyPr/>
           <a:lstStyle/>
           <a:p>
-            <a:endParaRPr lang="en-TH"/>
+            <a:endParaRPr lang="en-TH" sz="2000"/>
           </a:p>
         </p:txBody>
       </p:sp>
@@ -10298,7 +9048,7 @@
           <a:bodyPr/>
           <a:lstStyle/>
           <a:p>
-            <a:endParaRPr lang="en-TH"/>
+            <a:endParaRPr lang="en-TH" sz="2000"/>
           </a:p>
         </p:txBody>
       </p:sp>
@@ -10327,7 +9077,7 @@
               <a:buNone/>
             </a:pPr>
             <a:r>
-              <a:rPr lang="en-US" sz="1500" b="1" dirty="0">
+              <a:rPr lang="en-US" sz="1600" b="1" dirty="0">
                 <a:solidFill>
                   <a:srgbClr val="FFFFFF"/>
                 </a:solidFill>
@@ -10337,7 +9087,7 @@
               </a:rPr>
               <a:t>3</a:t>
             </a:r>
-            <a:endParaRPr lang="en-US" sz="1500" dirty="0"/>
+            <a:endParaRPr lang="en-US" sz="1600" dirty="0"/>
           </a:p>
         </p:txBody>
       </p:sp>
@@ -10366,7 +9116,7 @@
               <a:buNone/>
             </a:pPr>
             <a:r>
-              <a:rPr lang="en-US" sz="1900" b="1" dirty="0">
+              <a:rPr lang="en-US" sz="2000" b="1" dirty="0">
                 <a:solidFill>
                   <a:srgbClr val="222831"/>
                 </a:solidFill>
@@ -10376,7 +9126,7 @@
               </a:rPr>
               <a:t>ฟอนต์</a:t>
             </a:r>
-            <a:endParaRPr lang="en-US" sz="1900" dirty="0"/>
+            <a:endParaRPr lang="en-US" sz="2000" dirty="0"/>
           </a:p>
         </p:txBody>
       </p:sp>
@@ -10405,7 +9155,7 @@
               <a:buNone/>
             </a:pPr>
             <a:r>
-              <a:rPr lang="en-US" sz="1150" dirty="0">
+              <a:rPr lang="en-US" sz="1400" dirty="0">
                 <a:solidFill>
                   <a:srgbClr val="00ADB5"/>
                 </a:solidFill>
@@ -10415,7 +9165,1280 @@
               </a:rPr>
               <a:t>fonts.google.com</a:t>
             </a:r>
-            <a:endParaRPr lang="en-US" sz="1150" dirty="0"/>
+            <a:endParaRPr lang="en-US" sz="1400" dirty="0"/>
+          </a:p>
+        </p:txBody>
+      </p:sp>
+    </p:spTree>
+  </p:cSld>
+  <p:clrMapOvr>
+    <a:masterClrMapping/>
+  </p:clrMapOvr>
+</p:sld>
+</file>
+
+<file path=ppt/slides/slide19.xml><?xml version="1.0" encoding="utf-8"?>
+<p:sld xmlns:a="http://schemas.openxmlformats.org/drawingml/2006/main" xmlns:r="http://schemas.openxmlformats.org/officeDocument/2006/relationships" xmlns:p="http://schemas.openxmlformats.org/presentationml/2006/main">
+  <p:cSld name="Slide 25">
+    <p:bg>
+      <p:bgPr>
+        <a:solidFill>
+          <a:srgbClr val="FFFFFF"/>
+        </a:solidFill>
+        <a:effectLst/>
+      </p:bgPr>
+    </p:bg>
+    <p:spTree>
+      <p:nvGrpSpPr>
+        <p:cNvPr id="1" name=""/>
+        <p:cNvGrpSpPr/>
+        <p:nvPr/>
+      </p:nvGrpSpPr>
+      <p:grpSpPr>
+        <a:xfrm>
+          <a:off x="0" y="0"/>
+          <a:ext cx="0" cy="0"/>
+          <a:chOff x="0" y="0"/>
+          <a:chExt cx="0" cy="0"/>
+        </a:xfrm>
+      </p:grpSpPr>
+      <p:sp>
+        <p:nvSpPr>
+          <p:cNvPr id="2" name="Text 0"/>
+          <p:cNvSpPr/>
+          <p:nvPr/>
+        </p:nvSpPr>
+        <p:spPr>
+          <a:xfrm>
+            <a:off x="11018520" y="6263640"/>
+            <a:ext cx="548640" cy="274320"/>
+          </a:xfrm>
+          <a:prstGeom prst="rect">
+            <a:avLst/>
+          </a:prstGeom>
+          <a:noFill/>
+          <a:ln/>
+        </p:spPr>
+        <p:txBody>
+          <a:bodyPr wrap="square" lIns="0" tIns="0" rIns="0" bIns="0" rtlCol="0" anchor="ctr"/>
+          <a:lstStyle/>
+          <a:p>
+            <a:pPr marL="0" indent="0" algn="r">
+              <a:buNone/>
+            </a:pPr>
+            <a:r>
+              <a:rPr lang="en-US" sz="1200" dirty="0">
+                <a:solidFill>
+                  <a:srgbClr val="9AA3AD"/>
+                </a:solidFill>
+                <a:latin typeface="TH Sarabun New" pitchFamily="34" charset="0"/>
+                <a:ea typeface="TH Sarabun New" pitchFamily="34" charset="-122"/>
+                <a:cs typeface="TH Sarabun New" pitchFamily="34" charset="-120"/>
+              </a:rPr>
+              <a:t>25</a:t>
+            </a:r>
+            <a:endParaRPr lang="en-US" sz="1200" dirty="0"/>
+          </a:p>
+        </p:txBody>
+      </p:sp>
+      <p:sp>
+        <p:nvSpPr>
+          <p:cNvPr id="3" name="Text 1"/>
+          <p:cNvSpPr/>
+          <p:nvPr/>
+        </p:nvSpPr>
+        <p:spPr>
+          <a:xfrm>
+            <a:off x="594360" y="329184"/>
+            <a:ext cx="10972800" cy="566928"/>
+          </a:xfrm>
+          <a:prstGeom prst="rect">
+            <a:avLst/>
+          </a:prstGeom>
+          <a:noFill/>
+          <a:ln/>
+        </p:spPr>
+        <p:txBody>
+          <a:bodyPr wrap="square" lIns="0" tIns="0" rIns="0" bIns="0" rtlCol="0" anchor="ctr"/>
+          <a:lstStyle/>
+          <a:p>
+            <a:pPr marL="0" indent="0">
+              <a:buNone/>
+            </a:pPr>
+            <a:r>
+              <a:rPr lang="en-US" sz="3200" b="1" dirty="0">
+                <a:solidFill>
+                  <a:srgbClr val="222831"/>
+                </a:solidFill>
+                <a:latin typeface="TH Sarabun New" pitchFamily="34" charset="0"/>
+                <a:ea typeface="TH Sarabun New" pitchFamily="34" charset="-122"/>
+                <a:cs typeface="TH Sarabun New" pitchFamily="34" charset="-120"/>
+              </a:rPr>
+              <a:t>เลือกสไตล์การออกแบบ : uistyleguide.com</a:t>
+            </a:r>
+            <a:endParaRPr lang="en-US" sz="3200" dirty="0"/>
+          </a:p>
+        </p:txBody>
+      </p:sp>
+      <p:sp>
+        <p:nvSpPr>
+          <p:cNvPr id="4" name="Text 2"/>
+          <p:cNvSpPr/>
+          <p:nvPr/>
+        </p:nvSpPr>
+        <p:spPr>
+          <a:xfrm>
+            <a:off x="594360" y="896112"/>
+            <a:ext cx="10972800" cy="329184"/>
+          </a:xfrm>
+          <a:prstGeom prst="rect">
+            <a:avLst/>
+          </a:prstGeom>
+          <a:noFill/>
+          <a:ln/>
+        </p:spPr>
+        <p:txBody>
+          <a:bodyPr wrap="square" lIns="0" tIns="0" rIns="0" bIns="0" rtlCol="0" anchor="ctr"/>
+          <a:lstStyle/>
+          <a:p>
+            <a:pPr marL="0" indent="0">
+              <a:buNone/>
+            </a:pPr>
+            <a:r>
+              <a:rPr lang="en-US" sz="1700" dirty="0">
+                <a:solidFill>
+                  <a:srgbClr val="8A94A6"/>
+                </a:solidFill>
+                <a:latin typeface="TH Sarabun New" pitchFamily="34" charset="0"/>
+                <a:ea typeface="TH Sarabun New" pitchFamily="34" charset="-122"/>
+                <a:cs typeface="TH Sarabun New" pitchFamily="34" charset="-120"/>
+              </a:rPr>
+              <a:t>เว็บรวมสไตล์ UI กว่า 67 แบบ พร้อมตัวอย่างที่กดเล่นได้จริงและคำแนะนำการใช้ CSS</a:t>
+            </a:r>
+            <a:endParaRPr lang="en-US" sz="1700" dirty="0"/>
+          </a:p>
+        </p:txBody>
+      </p:sp>
+      <p:sp>
+        <p:nvSpPr>
+          <p:cNvPr id="5" name="Shape 3"/>
+          <p:cNvSpPr/>
+          <p:nvPr/>
+        </p:nvSpPr>
+        <p:spPr>
+          <a:xfrm>
+            <a:off x="594360" y="1481328"/>
+            <a:ext cx="7680960" cy="621792"/>
+          </a:xfrm>
+          <a:prstGeom prst="roundRect">
+            <a:avLst>
+              <a:gd name="adj" fmla="val 13235"/>
+            </a:avLst>
+          </a:prstGeom>
+          <a:solidFill>
+            <a:srgbClr val="FFFFFF"/>
+          </a:solidFill>
+          <a:ln w="9525">
+            <a:solidFill>
+              <a:srgbClr val="E1E4E8"/>
+            </a:solidFill>
+            <a:prstDash val="solid"/>
+          </a:ln>
+          <a:effectLst>
+            <a:outerShdw blurRad="101600" dist="12700" dir="5400000" algn="bl" rotWithShape="0">
+              <a:srgbClr val="222831">
+                <a:alpha val="10000"/>
+              </a:srgbClr>
+            </a:outerShdw>
+          </a:effectLst>
+        </p:spPr>
+        <p:txBody>
+          <a:bodyPr/>
+          <a:lstStyle/>
+          <a:p>
+            <a:endParaRPr lang="en-TH" sz="2400"/>
+          </a:p>
+        </p:txBody>
+      </p:sp>
+      <p:sp>
+        <p:nvSpPr>
+          <p:cNvPr id="6" name="Text 4"/>
+          <p:cNvSpPr/>
+          <p:nvPr/>
+        </p:nvSpPr>
+        <p:spPr>
+          <a:xfrm>
+            <a:off x="868680" y="1481328"/>
+            <a:ext cx="2194560" cy="621792"/>
+          </a:xfrm>
+          <a:prstGeom prst="rect">
+            <a:avLst/>
+          </a:prstGeom>
+          <a:noFill/>
+          <a:ln/>
+        </p:spPr>
+        <p:txBody>
+          <a:bodyPr wrap="square" lIns="0" tIns="0" rIns="0" bIns="0" rtlCol="0" anchor="ctr"/>
+          <a:lstStyle/>
+          <a:p>
+            <a:pPr marL="0" indent="0">
+              <a:buNone/>
+            </a:pPr>
+            <a:r>
+              <a:rPr lang="en-US" sz="2400" b="1" dirty="0">
+                <a:solidFill>
+                  <a:srgbClr val="222831"/>
+                </a:solidFill>
+                <a:latin typeface="TH Sarabun New" pitchFamily="34" charset="0"/>
+                <a:ea typeface="TH Sarabun New" pitchFamily="34" charset="-122"/>
+                <a:cs typeface="TH Sarabun New" pitchFamily="34" charset="-120"/>
+              </a:rPr>
+              <a:t>Minimalism</a:t>
+            </a:r>
+            <a:endParaRPr lang="en-US" sz="2400" dirty="0"/>
+          </a:p>
+        </p:txBody>
+      </p:sp>
+      <p:sp>
+        <p:nvSpPr>
+          <p:cNvPr id="7" name="Text 5"/>
+          <p:cNvSpPr/>
+          <p:nvPr/>
+        </p:nvSpPr>
+        <p:spPr>
+          <a:xfrm>
+            <a:off x="3108960" y="1481328"/>
+            <a:ext cx="4023360" cy="621792"/>
+          </a:xfrm>
+          <a:prstGeom prst="rect">
+            <a:avLst/>
+          </a:prstGeom>
+          <a:noFill/>
+          <a:ln/>
+        </p:spPr>
+        <p:txBody>
+          <a:bodyPr wrap="square" lIns="0" tIns="0" rIns="0" bIns="0" rtlCol="0" anchor="ctr"/>
+          <a:lstStyle/>
+          <a:p>
+            <a:pPr marL="0" indent="0">
+              <a:buNone/>
+            </a:pPr>
+            <a:r>
+              <a:rPr lang="en-US" dirty="0">
+                <a:solidFill>
+                  <a:srgbClr val="393E46"/>
+                </a:solidFill>
+                <a:latin typeface="TH Sarabun New" pitchFamily="34" charset="0"/>
+                <a:ea typeface="TH Sarabun New" pitchFamily="34" charset="-122"/>
+                <a:cs typeface="TH Sarabun New" pitchFamily="34" charset="-120"/>
+              </a:rPr>
+              <a:t>อ่านข้อมูลง่าย เหมาะกับงานวิชาการและราชการ</a:t>
+            </a:r>
+            <a:endParaRPr lang="en-US" dirty="0"/>
+          </a:p>
+        </p:txBody>
+      </p:sp>
+      <p:sp>
+        <p:nvSpPr>
+          <p:cNvPr id="8" name="Shape 6"/>
+          <p:cNvSpPr/>
+          <p:nvPr/>
+        </p:nvSpPr>
+        <p:spPr>
+          <a:xfrm>
+            <a:off x="7178040" y="1627632"/>
+            <a:ext cx="960120" cy="329184"/>
+          </a:xfrm>
+          <a:prstGeom prst="roundRect">
+            <a:avLst>
+              <a:gd name="adj" fmla="val 50000"/>
+            </a:avLst>
+          </a:prstGeom>
+          <a:solidFill>
+            <a:srgbClr val="CCFBF1"/>
+          </a:solidFill>
+          <a:ln w="12700">
+            <a:solidFill>
+              <a:srgbClr val="CCFBF1"/>
+            </a:solidFill>
+            <a:prstDash val="solid"/>
+          </a:ln>
+        </p:spPr>
+        <p:txBody>
+          <a:bodyPr/>
+          <a:lstStyle/>
+          <a:p>
+            <a:endParaRPr lang="en-TH" sz="2400"/>
+          </a:p>
+        </p:txBody>
+      </p:sp>
+      <p:sp>
+        <p:nvSpPr>
+          <p:cNvPr id="9" name="Text 7"/>
+          <p:cNvSpPr/>
+          <p:nvPr/>
+        </p:nvSpPr>
+        <p:spPr>
+          <a:xfrm>
+            <a:off x="7178040" y="1627632"/>
+            <a:ext cx="960120" cy="329184"/>
+          </a:xfrm>
+          <a:prstGeom prst="rect">
+            <a:avLst/>
+          </a:prstGeom>
+          <a:noFill/>
+          <a:ln/>
+        </p:spPr>
+        <p:txBody>
+          <a:bodyPr wrap="square" lIns="0" tIns="0" rIns="0" bIns="0" rtlCol="0" anchor="ctr"/>
+          <a:lstStyle/>
+          <a:p>
+            <a:pPr marL="0" indent="0" algn="ctr">
+              <a:buNone/>
+            </a:pPr>
+            <a:r>
+              <a:rPr lang="en-US" sz="1600" b="1" dirty="0">
+                <a:solidFill>
+                  <a:srgbClr val="0F766E"/>
+                </a:solidFill>
+                <a:latin typeface="TH Sarabun New" pitchFamily="34" charset="0"/>
+                <a:ea typeface="TH Sarabun New" pitchFamily="34" charset="-122"/>
+                <a:cs typeface="TH Sarabun New" pitchFamily="34" charset="-120"/>
+              </a:rPr>
+              <a:t>แนะนำ</a:t>
+            </a:r>
+            <a:endParaRPr lang="en-US" sz="1600" dirty="0"/>
+          </a:p>
+        </p:txBody>
+      </p:sp>
+      <p:sp>
+        <p:nvSpPr>
+          <p:cNvPr id="10" name="Shape 8"/>
+          <p:cNvSpPr/>
+          <p:nvPr/>
+        </p:nvSpPr>
+        <p:spPr>
+          <a:xfrm>
+            <a:off x="594360" y="2212848"/>
+            <a:ext cx="7680960" cy="621792"/>
+          </a:xfrm>
+          <a:prstGeom prst="roundRect">
+            <a:avLst>
+              <a:gd name="adj" fmla="val 13235"/>
+            </a:avLst>
+          </a:prstGeom>
+          <a:solidFill>
+            <a:srgbClr val="FFFFFF"/>
+          </a:solidFill>
+          <a:ln w="9525">
+            <a:solidFill>
+              <a:srgbClr val="E1E4E8"/>
+            </a:solidFill>
+            <a:prstDash val="solid"/>
+          </a:ln>
+          <a:effectLst>
+            <a:outerShdw blurRad="101600" dist="12700" dir="5400000" algn="bl" rotWithShape="0">
+              <a:srgbClr val="222831">
+                <a:alpha val="10000"/>
+              </a:srgbClr>
+            </a:outerShdw>
+          </a:effectLst>
+        </p:spPr>
+        <p:txBody>
+          <a:bodyPr/>
+          <a:lstStyle/>
+          <a:p>
+            <a:endParaRPr lang="en-TH" sz="2400"/>
+          </a:p>
+        </p:txBody>
+      </p:sp>
+      <p:sp>
+        <p:nvSpPr>
+          <p:cNvPr id="11" name="Text 9"/>
+          <p:cNvSpPr/>
+          <p:nvPr/>
+        </p:nvSpPr>
+        <p:spPr>
+          <a:xfrm>
+            <a:off x="868680" y="2212848"/>
+            <a:ext cx="2194560" cy="621792"/>
+          </a:xfrm>
+          <a:prstGeom prst="rect">
+            <a:avLst/>
+          </a:prstGeom>
+          <a:noFill/>
+          <a:ln/>
+        </p:spPr>
+        <p:txBody>
+          <a:bodyPr wrap="square" lIns="0" tIns="0" rIns="0" bIns="0" rtlCol="0" anchor="ctr"/>
+          <a:lstStyle/>
+          <a:p>
+            <a:pPr marL="0" indent="0">
+              <a:buNone/>
+            </a:pPr>
+            <a:r>
+              <a:rPr lang="en-US" sz="2400" b="1" dirty="0">
+                <a:solidFill>
+                  <a:srgbClr val="222831"/>
+                </a:solidFill>
+                <a:latin typeface="TH Sarabun New" pitchFamily="34" charset="0"/>
+                <a:ea typeface="TH Sarabun New" pitchFamily="34" charset="-122"/>
+                <a:cs typeface="TH Sarabun New" pitchFamily="34" charset="-120"/>
+              </a:rPr>
+              <a:t>Flat Design</a:t>
+            </a:r>
+            <a:endParaRPr lang="en-US" sz="2400" dirty="0"/>
+          </a:p>
+        </p:txBody>
+      </p:sp>
+      <p:sp>
+        <p:nvSpPr>
+          <p:cNvPr id="12" name="Text 10"/>
+          <p:cNvSpPr/>
+          <p:nvPr/>
+        </p:nvSpPr>
+        <p:spPr>
+          <a:xfrm>
+            <a:off x="3108960" y="2212848"/>
+            <a:ext cx="4023360" cy="621792"/>
+          </a:xfrm>
+          <a:prstGeom prst="rect">
+            <a:avLst/>
+          </a:prstGeom>
+          <a:noFill/>
+          <a:ln/>
+        </p:spPr>
+        <p:txBody>
+          <a:bodyPr wrap="square" lIns="0" tIns="0" rIns="0" bIns="0" rtlCol="0" anchor="ctr"/>
+          <a:lstStyle/>
+          <a:p>
+            <a:pPr marL="0" indent="0">
+              <a:buNone/>
+            </a:pPr>
+            <a:r>
+              <a:rPr lang="en-US" dirty="0">
+                <a:solidFill>
+                  <a:srgbClr val="393E46"/>
+                </a:solidFill>
+                <a:latin typeface="TH Sarabun New" pitchFamily="34" charset="0"/>
+                <a:ea typeface="TH Sarabun New" pitchFamily="34" charset="-122"/>
+                <a:cs typeface="TH Sarabun New" pitchFamily="34" charset="-120"/>
+              </a:rPr>
+              <a:t>เรียบ ทำเร็ว รองรับหลายขนาดจอได้ดี</a:t>
+            </a:r>
+            <a:endParaRPr lang="en-US" dirty="0"/>
+          </a:p>
+        </p:txBody>
+      </p:sp>
+      <p:sp>
+        <p:nvSpPr>
+          <p:cNvPr id="13" name="Shape 11"/>
+          <p:cNvSpPr/>
+          <p:nvPr/>
+        </p:nvSpPr>
+        <p:spPr>
+          <a:xfrm>
+            <a:off x="7178040" y="2359152"/>
+            <a:ext cx="960120" cy="329184"/>
+          </a:xfrm>
+          <a:prstGeom prst="roundRect">
+            <a:avLst>
+              <a:gd name="adj" fmla="val 50000"/>
+            </a:avLst>
+          </a:prstGeom>
+          <a:solidFill>
+            <a:srgbClr val="E8F6F7"/>
+          </a:solidFill>
+          <a:ln w="12700">
+            <a:solidFill>
+              <a:srgbClr val="E8F6F7"/>
+            </a:solidFill>
+            <a:prstDash val="solid"/>
+          </a:ln>
+        </p:spPr>
+        <p:txBody>
+          <a:bodyPr/>
+          <a:lstStyle/>
+          <a:p>
+            <a:endParaRPr lang="en-TH" sz="2400"/>
+          </a:p>
+        </p:txBody>
+      </p:sp>
+      <p:sp>
+        <p:nvSpPr>
+          <p:cNvPr id="14" name="Text 12"/>
+          <p:cNvSpPr/>
+          <p:nvPr/>
+        </p:nvSpPr>
+        <p:spPr>
+          <a:xfrm>
+            <a:off x="7178040" y="2359152"/>
+            <a:ext cx="960120" cy="329184"/>
+          </a:xfrm>
+          <a:prstGeom prst="rect">
+            <a:avLst/>
+          </a:prstGeom>
+          <a:noFill/>
+          <a:ln/>
+        </p:spPr>
+        <p:txBody>
+          <a:bodyPr wrap="square" lIns="0" tIns="0" rIns="0" bIns="0" rtlCol="0" anchor="ctr"/>
+          <a:lstStyle/>
+          <a:p>
+            <a:pPr marL="0" indent="0" algn="ctr">
+              <a:buNone/>
+            </a:pPr>
+            <a:r>
+              <a:rPr lang="en-US" sz="1600" b="1" dirty="0">
+                <a:solidFill>
+                  <a:srgbClr val="00ADB5"/>
+                </a:solidFill>
+                <a:latin typeface="TH Sarabun New" pitchFamily="34" charset="0"/>
+                <a:ea typeface="TH Sarabun New" pitchFamily="34" charset="-122"/>
+                <a:cs typeface="TH Sarabun New" pitchFamily="34" charset="-120"/>
+              </a:rPr>
+              <a:t>ใช้ได้</a:t>
+            </a:r>
+            <a:endParaRPr lang="en-US" sz="1600" dirty="0"/>
+          </a:p>
+        </p:txBody>
+      </p:sp>
+      <p:sp>
+        <p:nvSpPr>
+          <p:cNvPr id="15" name="Shape 13"/>
+          <p:cNvSpPr/>
+          <p:nvPr/>
+        </p:nvSpPr>
+        <p:spPr>
+          <a:xfrm>
+            <a:off x="594360" y="2944368"/>
+            <a:ext cx="7680960" cy="621792"/>
+          </a:xfrm>
+          <a:prstGeom prst="roundRect">
+            <a:avLst>
+              <a:gd name="adj" fmla="val 13235"/>
+            </a:avLst>
+          </a:prstGeom>
+          <a:solidFill>
+            <a:srgbClr val="FFFFFF"/>
+          </a:solidFill>
+          <a:ln w="9525">
+            <a:solidFill>
+              <a:srgbClr val="E1E4E8"/>
+            </a:solidFill>
+            <a:prstDash val="solid"/>
+          </a:ln>
+          <a:effectLst>
+            <a:outerShdw blurRad="101600" dist="12700" dir="5400000" algn="bl" rotWithShape="0">
+              <a:srgbClr val="222831">
+                <a:alpha val="10000"/>
+              </a:srgbClr>
+            </a:outerShdw>
+          </a:effectLst>
+        </p:spPr>
+        <p:txBody>
+          <a:bodyPr/>
+          <a:lstStyle/>
+          <a:p>
+            <a:endParaRPr lang="en-TH" sz="2400"/>
+          </a:p>
+        </p:txBody>
+      </p:sp>
+      <p:sp>
+        <p:nvSpPr>
+          <p:cNvPr id="16" name="Text 14"/>
+          <p:cNvSpPr/>
+          <p:nvPr/>
+        </p:nvSpPr>
+        <p:spPr>
+          <a:xfrm>
+            <a:off x="868680" y="2944368"/>
+            <a:ext cx="2194560" cy="621792"/>
+          </a:xfrm>
+          <a:prstGeom prst="rect">
+            <a:avLst/>
+          </a:prstGeom>
+          <a:noFill/>
+          <a:ln/>
+        </p:spPr>
+        <p:txBody>
+          <a:bodyPr wrap="square" lIns="0" tIns="0" rIns="0" bIns="0" rtlCol="0" anchor="ctr"/>
+          <a:lstStyle/>
+          <a:p>
+            <a:pPr marL="0" indent="0">
+              <a:buNone/>
+            </a:pPr>
+            <a:r>
+              <a:rPr lang="en-US" sz="2400" b="1" dirty="0">
+                <a:solidFill>
+                  <a:srgbClr val="222831"/>
+                </a:solidFill>
+                <a:latin typeface="TH Sarabun New" pitchFamily="34" charset="0"/>
+                <a:ea typeface="TH Sarabun New" pitchFamily="34" charset="-122"/>
+                <a:cs typeface="TH Sarabun New" pitchFamily="34" charset="-120"/>
+              </a:rPr>
+              <a:t>Soft UI</a:t>
+            </a:r>
+            <a:endParaRPr lang="en-US" sz="2400" dirty="0"/>
+          </a:p>
+        </p:txBody>
+      </p:sp>
+      <p:sp>
+        <p:nvSpPr>
+          <p:cNvPr id="17" name="Text 15"/>
+          <p:cNvSpPr/>
+          <p:nvPr/>
+        </p:nvSpPr>
+        <p:spPr>
+          <a:xfrm>
+            <a:off x="3108960" y="2944368"/>
+            <a:ext cx="4023360" cy="621792"/>
+          </a:xfrm>
+          <a:prstGeom prst="rect">
+            <a:avLst/>
+          </a:prstGeom>
+          <a:noFill/>
+          <a:ln/>
+        </p:spPr>
+        <p:txBody>
+          <a:bodyPr wrap="square" lIns="0" tIns="0" rIns="0" bIns="0" rtlCol="0" anchor="ctr"/>
+          <a:lstStyle/>
+          <a:p>
+            <a:pPr marL="0" indent="0">
+              <a:buNone/>
+            </a:pPr>
+            <a:r>
+              <a:rPr lang="en-US" dirty="0">
+                <a:solidFill>
+                  <a:srgbClr val="393E46"/>
+                </a:solidFill>
+                <a:latin typeface="TH Sarabun New" pitchFamily="34" charset="0"/>
+                <a:ea typeface="TH Sarabun New" pitchFamily="34" charset="-122"/>
+                <a:cs typeface="TH Sarabun New" pitchFamily="34" charset="-120"/>
+              </a:rPr>
+              <a:t>นุ่มนวลสบายตา แต่ต้องระวังความคมชัดของตัวอักษร</a:t>
+            </a:r>
+            <a:endParaRPr lang="en-US" dirty="0"/>
+          </a:p>
+        </p:txBody>
+      </p:sp>
+      <p:sp>
+        <p:nvSpPr>
+          <p:cNvPr id="18" name="Shape 16"/>
+          <p:cNvSpPr/>
+          <p:nvPr/>
+        </p:nvSpPr>
+        <p:spPr>
+          <a:xfrm>
+            <a:off x="7178040" y="3090672"/>
+            <a:ext cx="960120" cy="329184"/>
+          </a:xfrm>
+          <a:prstGeom prst="roundRect">
+            <a:avLst>
+              <a:gd name="adj" fmla="val 50000"/>
+            </a:avLst>
+          </a:prstGeom>
+          <a:solidFill>
+            <a:srgbClr val="FEF3C7"/>
+          </a:solidFill>
+          <a:ln w="12700">
+            <a:solidFill>
+              <a:srgbClr val="FEF3C7"/>
+            </a:solidFill>
+            <a:prstDash val="solid"/>
+          </a:ln>
+        </p:spPr>
+        <p:txBody>
+          <a:bodyPr/>
+          <a:lstStyle/>
+          <a:p>
+            <a:endParaRPr lang="en-TH" sz="2400"/>
+          </a:p>
+        </p:txBody>
+      </p:sp>
+      <p:sp>
+        <p:nvSpPr>
+          <p:cNvPr id="19" name="Text 17"/>
+          <p:cNvSpPr/>
+          <p:nvPr/>
+        </p:nvSpPr>
+        <p:spPr>
+          <a:xfrm>
+            <a:off x="7178040" y="3090672"/>
+            <a:ext cx="960120" cy="329184"/>
+          </a:xfrm>
+          <a:prstGeom prst="rect">
+            <a:avLst/>
+          </a:prstGeom>
+          <a:noFill/>
+          <a:ln/>
+        </p:spPr>
+        <p:txBody>
+          <a:bodyPr wrap="square" lIns="0" tIns="0" rIns="0" bIns="0" rtlCol="0" anchor="ctr"/>
+          <a:lstStyle/>
+          <a:p>
+            <a:pPr marL="0" indent="0" algn="ctr">
+              <a:buNone/>
+            </a:pPr>
+            <a:r>
+              <a:rPr lang="en-US" sz="1600" b="1" dirty="0">
+                <a:solidFill>
+                  <a:srgbClr val="B45309"/>
+                </a:solidFill>
+                <a:latin typeface="TH Sarabun New" pitchFamily="34" charset="0"/>
+                <a:ea typeface="TH Sarabun New" pitchFamily="34" charset="-122"/>
+                <a:cs typeface="TH Sarabun New" pitchFamily="34" charset="-120"/>
+              </a:rPr>
+              <a:t>ระวัง</a:t>
+            </a:r>
+            <a:endParaRPr lang="en-US" sz="1600" dirty="0"/>
+          </a:p>
+        </p:txBody>
+      </p:sp>
+      <p:sp>
+        <p:nvSpPr>
+          <p:cNvPr id="20" name="Shape 18"/>
+          <p:cNvSpPr/>
+          <p:nvPr/>
+        </p:nvSpPr>
+        <p:spPr>
+          <a:xfrm>
+            <a:off x="594360" y="3675888"/>
+            <a:ext cx="7680960" cy="621792"/>
+          </a:xfrm>
+          <a:prstGeom prst="roundRect">
+            <a:avLst>
+              <a:gd name="adj" fmla="val 13235"/>
+            </a:avLst>
+          </a:prstGeom>
+          <a:solidFill>
+            <a:srgbClr val="FFFFFF"/>
+          </a:solidFill>
+          <a:ln w="9525">
+            <a:solidFill>
+              <a:srgbClr val="E1E4E8"/>
+            </a:solidFill>
+            <a:prstDash val="solid"/>
+          </a:ln>
+          <a:effectLst>
+            <a:outerShdw blurRad="101600" dist="12700" dir="5400000" algn="bl" rotWithShape="0">
+              <a:srgbClr val="222831">
+                <a:alpha val="10000"/>
+              </a:srgbClr>
+            </a:outerShdw>
+          </a:effectLst>
+        </p:spPr>
+        <p:txBody>
+          <a:bodyPr/>
+          <a:lstStyle/>
+          <a:p>
+            <a:endParaRPr lang="en-TH" sz="2400"/>
+          </a:p>
+        </p:txBody>
+      </p:sp>
+      <p:sp>
+        <p:nvSpPr>
+          <p:cNvPr id="21" name="Text 19"/>
+          <p:cNvSpPr/>
+          <p:nvPr/>
+        </p:nvSpPr>
+        <p:spPr>
+          <a:xfrm>
+            <a:off x="868680" y="3675888"/>
+            <a:ext cx="2194560" cy="621792"/>
+          </a:xfrm>
+          <a:prstGeom prst="rect">
+            <a:avLst/>
+          </a:prstGeom>
+          <a:noFill/>
+          <a:ln/>
+        </p:spPr>
+        <p:txBody>
+          <a:bodyPr wrap="square" lIns="0" tIns="0" rIns="0" bIns="0" rtlCol="0" anchor="ctr"/>
+          <a:lstStyle/>
+          <a:p>
+            <a:pPr marL="0" indent="0">
+              <a:buNone/>
+            </a:pPr>
+            <a:r>
+              <a:rPr lang="en-US" sz="2400" b="1" dirty="0">
+                <a:solidFill>
+                  <a:srgbClr val="222831"/>
+                </a:solidFill>
+                <a:latin typeface="TH Sarabun New" pitchFamily="34" charset="0"/>
+                <a:ea typeface="TH Sarabun New" pitchFamily="34" charset="-122"/>
+                <a:cs typeface="TH Sarabun New" pitchFamily="34" charset="-120"/>
+              </a:rPr>
+              <a:t>Glassmorphism</a:t>
+            </a:r>
+            <a:endParaRPr lang="en-US" sz="2400" dirty="0"/>
+          </a:p>
+        </p:txBody>
+      </p:sp>
+      <p:sp>
+        <p:nvSpPr>
+          <p:cNvPr id="22" name="Text 20"/>
+          <p:cNvSpPr/>
+          <p:nvPr/>
+        </p:nvSpPr>
+        <p:spPr>
+          <a:xfrm>
+            <a:off x="3108960" y="3675888"/>
+            <a:ext cx="4023360" cy="621792"/>
+          </a:xfrm>
+          <a:prstGeom prst="rect">
+            <a:avLst/>
+          </a:prstGeom>
+          <a:noFill/>
+          <a:ln/>
+        </p:spPr>
+        <p:txBody>
+          <a:bodyPr wrap="square" lIns="0" tIns="0" rIns="0" bIns="0" rtlCol="0" anchor="ctr"/>
+          <a:lstStyle/>
+          <a:p>
+            <a:pPr marL="0" indent="0">
+              <a:buNone/>
+            </a:pPr>
+            <a:r>
+              <a:rPr lang="en-US" dirty="0">
+                <a:solidFill>
+                  <a:srgbClr val="393E46"/>
+                </a:solidFill>
+                <a:latin typeface="TH Sarabun New" pitchFamily="34" charset="0"/>
+                <a:ea typeface="TH Sarabun New" pitchFamily="34" charset="-122"/>
+                <a:cs typeface="TH Sarabun New" pitchFamily="34" charset="-120"/>
+              </a:rPr>
+              <a:t>สวยแต่ทำให้อ่านตัวเลข KPI ยาก</a:t>
+            </a:r>
+            <a:endParaRPr lang="en-US" dirty="0"/>
+          </a:p>
+        </p:txBody>
+      </p:sp>
+      <p:sp>
+        <p:nvSpPr>
+          <p:cNvPr id="23" name="Shape 21"/>
+          <p:cNvSpPr/>
+          <p:nvPr/>
+        </p:nvSpPr>
+        <p:spPr>
+          <a:xfrm>
+            <a:off x="7178040" y="3822192"/>
+            <a:ext cx="960120" cy="329184"/>
+          </a:xfrm>
+          <a:prstGeom prst="roundRect">
+            <a:avLst>
+              <a:gd name="adj" fmla="val 50000"/>
+            </a:avLst>
+          </a:prstGeom>
+          <a:solidFill>
+            <a:srgbClr val="FEF2F2"/>
+          </a:solidFill>
+          <a:ln w="12700">
+            <a:solidFill>
+              <a:srgbClr val="FEF2F2"/>
+            </a:solidFill>
+            <a:prstDash val="solid"/>
+          </a:ln>
+        </p:spPr>
+        <p:txBody>
+          <a:bodyPr/>
+          <a:lstStyle/>
+          <a:p>
+            <a:endParaRPr lang="en-TH" sz="2400"/>
+          </a:p>
+        </p:txBody>
+      </p:sp>
+      <p:sp>
+        <p:nvSpPr>
+          <p:cNvPr id="24" name="Text 22"/>
+          <p:cNvSpPr/>
+          <p:nvPr/>
+        </p:nvSpPr>
+        <p:spPr>
+          <a:xfrm>
+            <a:off x="7178040" y="3822192"/>
+            <a:ext cx="960120" cy="329184"/>
+          </a:xfrm>
+          <a:prstGeom prst="rect">
+            <a:avLst/>
+          </a:prstGeom>
+          <a:noFill/>
+          <a:ln/>
+        </p:spPr>
+        <p:txBody>
+          <a:bodyPr wrap="square" lIns="0" tIns="0" rIns="0" bIns="0" rtlCol="0" anchor="ctr"/>
+          <a:lstStyle/>
+          <a:p>
+            <a:pPr marL="0" indent="0" algn="ctr">
+              <a:buNone/>
+            </a:pPr>
+            <a:r>
+              <a:rPr lang="en-US" sz="1600" b="1" dirty="0">
+                <a:solidFill>
+                  <a:srgbClr val="DC2626"/>
+                </a:solidFill>
+                <a:latin typeface="TH Sarabun New" pitchFamily="34" charset="0"/>
+                <a:ea typeface="TH Sarabun New" pitchFamily="34" charset="-122"/>
+                <a:cs typeface="TH Sarabun New" pitchFamily="34" charset="-120"/>
+              </a:rPr>
+              <a:t>ไม่แนะนำ</a:t>
+            </a:r>
+            <a:endParaRPr lang="en-US" sz="1600" dirty="0"/>
+          </a:p>
+        </p:txBody>
+      </p:sp>
+      <p:sp>
+        <p:nvSpPr>
+          <p:cNvPr id="25" name="Shape 23"/>
+          <p:cNvSpPr/>
+          <p:nvPr/>
+        </p:nvSpPr>
+        <p:spPr>
+          <a:xfrm>
+            <a:off x="8503920" y="1481328"/>
+            <a:ext cx="3063240" cy="2980944"/>
+          </a:xfrm>
+          <a:prstGeom prst="roundRect">
+            <a:avLst>
+              <a:gd name="adj" fmla="val 2761"/>
+            </a:avLst>
+          </a:prstGeom>
+          <a:solidFill>
+            <a:srgbClr val="E8F6F7"/>
+          </a:solidFill>
+          <a:ln w="9525">
+            <a:solidFill>
+              <a:srgbClr val="E8F6F7"/>
+            </a:solidFill>
+            <a:prstDash val="solid"/>
+          </a:ln>
+          <a:effectLst>
+            <a:outerShdw blurRad="101600" dist="12700" dir="5400000" algn="bl" rotWithShape="0">
+              <a:srgbClr val="222831">
+                <a:alpha val="10000"/>
+              </a:srgbClr>
+            </a:outerShdw>
+          </a:effectLst>
+        </p:spPr>
+        <p:txBody>
+          <a:bodyPr/>
+          <a:lstStyle/>
+          <a:p>
+            <a:endParaRPr lang="en-TH" sz="2400"/>
+          </a:p>
+        </p:txBody>
+      </p:sp>
+      <p:sp>
+        <p:nvSpPr>
+          <p:cNvPr id="26" name="Text 24"/>
+          <p:cNvSpPr/>
+          <p:nvPr/>
+        </p:nvSpPr>
+        <p:spPr>
+          <a:xfrm>
+            <a:off x="8732520" y="1627632"/>
+            <a:ext cx="2788920" cy="310896"/>
+          </a:xfrm>
+          <a:prstGeom prst="rect">
+            <a:avLst/>
+          </a:prstGeom>
+          <a:noFill/>
+          <a:ln/>
+        </p:spPr>
+        <p:txBody>
+          <a:bodyPr wrap="square" lIns="0" tIns="0" rIns="0" bIns="0" rtlCol="0" anchor="ctr"/>
+          <a:lstStyle/>
+          <a:p>
+            <a:pPr marL="0" indent="0">
+              <a:buNone/>
+            </a:pPr>
+            <a:r>
+              <a:rPr lang="en-US" sz="2400" b="1" dirty="0">
+                <a:solidFill>
+                  <a:srgbClr val="00ADB5"/>
+                </a:solidFill>
+                <a:latin typeface="TH Sarabun New" pitchFamily="34" charset="0"/>
+                <a:ea typeface="TH Sarabun New" pitchFamily="34" charset="-122"/>
+                <a:cs typeface="TH Sarabun New" pitchFamily="34" charset="-120"/>
+              </a:rPr>
+              <a:t>วิธีจดสไตล์ลงสเปก</a:t>
+            </a:r>
+            <a:endParaRPr lang="en-US" sz="2400" dirty="0"/>
+          </a:p>
+        </p:txBody>
+      </p:sp>
+      <p:sp>
+        <p:nvSpPr>
+          <p:cNvPr id="27" name="Text 25"/>
+          <p:cNvSpPr/>
+          <p:nvPr/>
+        </p:nvSpPr>
+        <p:spPr>
+          <a:xfrm>
+            <a:off x="8732520" y="1956816"/>
+            <a:ext cx="2560320" cy="310896"/>
+          </a:xfrm>
+          <a:prstGeom prst="rect">
+            <a:avLst/>
+          </a:prstGeom>
+          <a:noFill/>
+          <a:ln/>
+        </p:spPr>
+        <p:txBody>
+          <a:bodyPr wrap="square" lIns="0" tIns="0" rIns="0" bIns="0" rtlCol="0" anchor="ctr"/>
+          <a:lstStyle/>
+          <a:p>
+            <a:pPr marL="0" indent="0">
+              <a:buNone/>
+            </a:pPr>
+            <a:r>
+              <a:rPr lang="en-US" dirty="0">
+                <a:solidFill>
+                  <a:srgbClr val="393E46"/>
+                </a:solidFill>
+                <a:latin typeface="TH Sarabun New" pitchFamily="34" charset="0"/>
+                <a:ea typeface="TH Sarabun New" pitchFamily="34" charset="-122"/>
+                <a:cs typeface="TH Sarabun New" pitchFamily="34" charset="-120"/>
+              </a:rPr>
+              <a:t>เขียนหลักการที่ “มองเห็นได้จริง” 3–5 ข้อ</a:t>
+            </a:r>
+            <a:endParaRPr lang="en-US" dirty="0"/>
+          </a:p>
+        </p:txBody>
+      </p:sp>
+      <p:sp>
+        <p:nvSpPr>
+          <p:cNvPr id="28" name="Shape 26"/>
+          <p:cNvSpPr/>
+          <p:nvPr/>
+        </p:nvSpPr>
+        <p:spPr>
+          <a:xfrm>
+            <a:off x="8732520" y="2340864"/>
+            <a:ext cx="2560320" cy="777240"/>
+          </a:xfrm>
+          <a:prstGeom prst="roundRect">
+            <a:avLst>
+              <a:gd name="adj" fmla="val 8235"/>
+            </a:avLst>
+          </a:prstGeom>
+          <a:solidFill>
+            <a:srgbClr val="FEF2F2"/>
+          </a:solidFill>
+          <a:ln w="9525">
+            <a:solidFill>
+              <a:srgbClr val="FCA5A5"/>
+            </a:solidFill>
+            <a:prstDash val="solid"/>
+          </a:ln>
+        </p:spPr>
+        <p:txBody>
+          <a:bodyPr/>
+          <a:lstStyle/>
+          <a:p>
+            <a:endParaRPr lang="en-TH" sz="2400"/>
+          </a:p>
+        </p:txBody>
+      </p:sp>
+      <p:sp>
+        <p:nvSpPr>
+          <p:cNvPr id="29" name="Text 27"/>
+          <p:cNvSpPr/>
+          <p:nvPr/>
+        </p:nvSpPr>
+        <p:spPr>
+          <a:xfrm>
+            <a:off x="8915400" y="2395728"/>
+            <a:ext cx="2194560" cy="685800"/>
+          </a:xfrm>
+          <a:prstGeom prst="rect">
+            <a:avLst/>
+          </a:prstGeom>
+          <a:noFill/>
+          <a:ln/>
+        </p:spPr>
+        <p:txBody>
+          <a:bodyPr wrap="square" lIns="0" tIns="0" rIns="0" bIns="0" rtlCol="0" anchor="ctr"/>
+          <a:lstStyle/>
+          <a:p>
+            <a:pPr marL="0" indent="0">
+              <a:buNone/>
+            </a:pPr>
+            <a:r>
+              <a:rPr lang="en-US" dirty="0">
+                <a:solidFill>
+                  <a:srgbClr val="DC2626"/>
+                </a:solidFill>
+                <a:latin typeface="TH Sarabun New" pitchFamily="34" charset="0"/>
+                <a:ea typeface="TH Sarabun New" pitchFamily="34" charset="-122"/>
+                <a:cs typeface="TH Sarabun New" pitchFamily="34" charset="-120"/>
+              </a:rPr>
+              <a:t>อย่าเขียนว่า</a:t>
+            </a:r>
+            <a:endParaRPr lang="en-US" dirty="0"/>
+          </a:p>
+          <a:p>
+            <a:pPr marL="0" indent="0">
+              <a:buNone/>
+            </a:pPr>
+            <a:r>
+              <a:rPr lang="en-US" dirty="0">
+                <a:solidFill>
+                  <a:srgbClr val="DC2626"/>
+                </a:solidFill>
+                <a:latin typeface="TH Sarabun New" pitchFamily="34" charset="0"/>
+                <a:ea typeface="TH Sarabun New" pitchFamily="34" charset="-122"/>
+                <a:cs typeface="TH Sarabun New" pitchFamily="34" charset="-120"/>
+              </a:rPr>
+              <a:t>“ทำให้ดูโมเดิร์น”</a:t>
+            </a:r>
+            <a:endParaRPr lang="en-US" dirty="0"/>
+          </a:p>
+        </p:txBody>
+      </p:sp>
+      <p:sp>
+        <p:nvSpPr>
+          <p:cNvPr id="30" name="Shape 28"/>
+          <p:cNvSpPr/>
+          <p:nvPr/>
+        </p:nvSpPr>
+        <p:spPr>
+          <a:xfrm>
+            <a:off x="8732520" y="3218688"/>
+            <a:ext cx="2560320" cy="1097280"/>
+          </a:xfrm>
+          <a:prstGeom prst="roundRect">
+            <a:avLst>
+              <a:gd name="adj" fmla="val 5833"/>
+            </a:avLst>
+          </a:prstGeom>
+          <a:solidFill>
+            <a:srgbClr val="CCFBF1"/>
+          </a:solidFill>
+          <a:ln w="12700">
+            <a:solidFill>
+              <a:srgbClr val="CCFBF1"/>
+            </a:solidFill>
+            <a:prstDash val="solid"/>
+          </a:ln>
+        </p:spPr>
+        <p:txBody>
+          <a:bodyPr/>
+          <a:lstStyle/>
+          <a:p>
+            <a:endParaRPr lang="en-TH" sz="2400"/>
+          </a:p>
+        </p:txBody>
+      </p:sp>
+      <p:sp>
+        <p:nvSpPr>
+          <p:cNvPr id="31" name="Text 29"/>
+          <p:cNvSpPr/>
+          <p:nvPr/>
+        </p:nvSpPr>
+        <p:spPr>
+          <a:xfrm>
+            <a:off x="8915400" y="3291840"/>
+            <a:ext cx="2194560" cy="960120"/>
+          </a:xfrm>
+          <a:prstGeom prst="rect">
+            <a:avLst/>
+          </a:prstGeom>
+          <a:noFill/>
+          <a:ln/>
+        </p:spPr>
+        <p:txBody>
+          <a:bodyPr wrap="square" lIns="0" tIns="0" rIns="0" bIns="0" rtlCol="0" anchor="ctr"/>
+          <a:lstStyle/>
+          <a:p>
+            <a:pPr marL="0" indent="0">
+              <a:buNone/>
+            </a:pPr>
+            <a:r>
+              <a:rPr lang="en-US" dirty="0">
+                <a:solidFill>
+                  <a:srgbClr val="0F766E"/>
+                </a:solidFill>
+                <a:latin typeface="TH Sarabun New" pitchFamily="34" charset="0"/>
+                <a:ea typeface="TH Sarabun New" pitchFamily="34" charset="-122"/>
+                <a:cs typeface="TH Sarabun New" pitchFamily="34" charset="-120"/>
+              </a:rPr>
+              <a:t>ให้เขียนว่า</a:t>
+            </a:r>
+            <a:endParaRPr lang="en-US" dirty="0"/>
+          </a:p>
+          <a:p>
+            <a:pPr marL="0" indent="0">
+              <a:buNone/>
+            </a:pPr>
+            <a:r>
+              <a:rPr lang="en-US" dirty="0">
+                <a:solidFill>
+                  <a:srgbClr val="0F766E"/>
+                </a:solidFill>
+                <a:latin typeface="TH Sarabun New" pitchFamily="34" charset="0"/>
+                <a:ea typeface="TH Sarabun New" pitchFamily="34" charset="-122"/>
+                <a:cs typeface="TH Sarabun New" pitchFamily="34" charset="-120"/>
+              </a:rPr>
+              <a:t>“การ์ดพื้นขาว มุมมน 12px</a:t>
+            </a:r>
+            <a:endParaRPr lang="en-US" dirty="0"/>
+          </a:p>
+          <a:p>
+            <a:pPr marL="0" indent="0">
+              <a:buNone/>
+            </a:pPr>
+            <a:r>
+              <a:rPr lang="en-US" dirty="0">
+                <a:solidFill>
+                  <a:srgbClr val="0F766E"/>
+                </a:solidFill>
+                <a:latin typeface="TH Sarabun New" pitchFamily="34" charset="0"/>
+                <a:ea typeface="TH Sarabun New" pitchFamily="34" charset="-122"/>
+                <a:cs typeface="TH Sarabun New" pitchFamily="34" charset="-120"/>
+              </a:rPr>
+              <a:t>เงาอ่อน ไม่มีเส้นขอบหนา”</a:t>
+            </a:r>
+            <a:endParaRPr lang="en-US" dirty="0"/>
+          </a:p>
+        </p:txBody>
+      </p:sp>
+      <p:sp>
+        <p:nvSpPr>
+          <p:cNvPr id="32" name="Text 30"/>
+          <p:cNvSpPr/>
+          <p:nvPr/>
+        </p:nvSpPr>
+        <p:spPr>
+          <a:xfrm>
+            <a:off x="594360" y="6263640"/>
+            <a:ext cx="10972800" cy="292608"/>
+          </a:xfrm>
+          <a:prstGeom prst="rect">
+            <a:avLst/>
+          </a:prstGeom>
+          <a:noFill/>
+          <a:ln/>
+        </p:spPr>
+        <p:txBody>
+          <a:bodyPr wrap="square" lIns="0" tIns="0" rIns="0" bIns="0" rtlCol="0" anchor="ctr"/>
+          <a:lstStyle/>
+          <a:p>
+            <a:pPr marL="0" indent="0">
+              <a:buNone/>
+            </a:pPr>
+            <a:r>
+              <a:rPr lang="en-US" sz="1300" dirty="0">
+                <a:solidFill>
+                  <a:srgbClr val="8A94A6"/>
+                </a:solidFill>
+                <a:latin typeface="TH Sarabun New" pitchFamily="34" charset="0"/>
+                <a:ea typeface="TH Sarabun New" pitchFamily="34" charset="-122"/>
+                <a:cs typeface="TH Sarabun New" pitchFamily="34" charset="-120"/>
+              </a:rPr>
+              <a:t>เลือกเพียงหนึ่งสไตล์ แล้วยึดให้ตลอดทั้งระบบ — การผสมหลายสไตล์คือสาเหตุอันดับหนึ่งที่ทำให้งานดูไม่เป็นมืออาชีพ</a:t>
+            </a:r>
+            <a:endParaRPr lang="en-US" sz="1300" dirty="0"/>
           </a:p>
         </p:txBody>
       </p:sp>
@@ -11339,1279 +11362,6 @@
 
 <file path=ppt/slides/slide20.xml><?xml version="1.0" encoding="utf-8"?>
 <p:sld xmlns:a="http://schemas.openxmlformats.org/drawingml/2006/main" xmlns:r="http://schemas.openxmlformats.org/officeDocument/2006/relationships" xmlns:p="http://schemas.openxmlformats.org/presentationml/2006/main">
-  <p:cSld name="Slide 25">
-    <p:bg>
-      <p:bgPr>
-        <a:solidFill>
-          <a:srgbClr val="FFFFFF"/>
-        </a:solidFill>
-        <a:effectLst/>
-      </p:bgPr>
-    </p:bg>
-    <p:spTree>
-      <p:nvGrpSpPr>
-        <p:cNvPr id="1" name=""/>
-        <p:cNvGrpSpPr/>
-        <p:nvPr/>
-      </p:nvGrpSpPr>
-      <p:grpSpPr>
-        <a:xfrm>
-          <a:off x="0" y="0"/>
-          <a:ext cx="0" cy="0"/>
-          <a:chOff x="0" y="0"/>
-          <a:chExt cx="0" cy="0"/>
-        </a:xfrm>
-      </p:grpSpPr>
-      <p:sp>
-        <p:nvSpPr>
-          <p:cNvPr id="2" name="Text 0"/>
-          <p:cNvSpPr/>
-          <p:nvPr/>
-        </p:nvSpPr>
-        <p:spPr>
-          <a:xfrm>
-            <a:off x="11018520" y="6263640"/>
-            <a:ext cx="548640" cy="274320"/>
-          </a:xfrm>
-          <a:prstGeom prst="rect">
-            <a:avLst/>
-          </a:prstGeom>
-          <a:noFill/>
-          <a:ln/>
-        </p:spPr>
-        <p:txBody>
-          <a:bodyPr wrap="square" lIns="0" tIns="0" rIns="0" bIns="0" rtlCol="0" anchor="ctr"/>
-          <a:lstStyle/>
-          <a:p>
-            <a:pPr marL="0" indent="0" algn="r">
-              <a:buNone/>
-            </a:pPr>
-            <a:r>
-              <a:rPr lang="en-US" sz="1200" dirty="0">
-                <a:solidFill>
-                  <a:srgbClr val="9AA3AD"/>
-                </a:solidFill>
-                <a:latin typeface="TH Sarabun New" pitchFamily="34" charset="0"/>
-                <a:ea typeface="TH Sarabun New" pitchFamily="34" charset="-122"/>
-                <a:cs typeface="TH Sarabun New" pitchFamily="34" charset="-120"/>
-              </a:rPr>
-              <a:t>25</a:t>
-            </a:r>
-            <a:endParaRPr lang="en-US" sz="1200" dirty="0"/>
-          </a:p>
-        </p:txBody>
-      </p:sp>
-      <p:sp>
-        <p:nvSpPr>
-          <p:cNvPr id="3" name="Text 1"/>
-          <p:cNvSpPr/>
-          <p:nvPr/>
-        </p:nvSpPr>
-        <p:spPr>
-          <a:xfrm>
-            <a:off x="594360" y="329184"/>
-            <a:ext cx="10972800" cy="566928"/>
-          </a:xfrm>
-          <a:prstGeom prst="rect">
-            <a:avLst/>
-          </a:prstGeom>
-          <a:noFill/>
-          <a:ln/>
-        </p:spPr>
-        <p:txBody>
-          <a:bodyPr wrap="square" lIns="0" tIns="0" rIns="0" bIns="0" rtlCol="0" anchor="ctr"/>
-          <a:lstStyle/>
-          <a:p>
-            <a:pPr marL="0" indent="0">
-              <a:buNone/>
-            </a:pPr>
-            <a:r>
-              <a:rPr lang="en-US" sz="3200" b="1" dirty="0">
-                <a:solidFill>
-                  <a:srgbClr val="222831"/>
-                </a:solidFill>
-                <a:latin typeface="TH Sarabun New" pitchFamily="34" charset="0"/>
-                <a:ea typeface="TH Sarabun New" pitchFamily="34" charset="-122"/>
-                <a:cs typeface="TH Sarabun New" pitchFamily="34" charset="-120"/>
-              </a:rPr>
-              <a:t>เลือกสไตล์การออกแบบ : uistyleguide.com</a:t>
-            </a:r>
-            <a:endParaRPr lang="en-US" sz="3200" dirty="0"/>
-          </a:p>
-        </p:txBody>
-      </p:sp>
-      <p:sp>
-        <p:nvSpPr>
-          <p:cNvPr id="4" name="Text 2"/>
-          <p:cNvSpPr/>
-          <p:nvPr/>
-        </p:nvSpPr>
-        <p:spPr>
-          <a:xfrm>
-            <a:off x="594360" y="896112"/>
-            <a:ext cx="10972800" cy="329184"/>
-          </a:xfrm>
-          <a:prstGeom prst="rect">
-            <a:avLst/>
-          </a:prstGeom>
-          <a:noFill/>
-          <a:ln/>
-        </p:spPr>
-        <p:txBody>
-          <a:bodyPr wrap="square" lIns="0" tIns="0" rIns="0" bIns="0" rtlCol="0" anchor="ctr"/>
-          <a:lstStyle/>
-          <a:p>
-            <a:pPr marL="0" indent="0">
-              <a:buNone/>
-            </a:pPr>
-            <a:r>
-              <a:rPr lang="en-US" sz="1700" dirty="0">
-                <a:solidFill>
-                  <a:srgbClr val="8A94A6"/>
-                </a:solidFill>
-                <a:latin typeface="TH Sarabun New" pitchFamily="34" charset="0"/>
-                <a:ea typeface="TH Sarabun New" pitchFamily="34" charset="-122"/>
-                <a:cs typeface="TH Sarabun New" pitchFamily="34" charset="-120"/>
-              </a:rPr>
-              <a:t>เว็บรวมสไตล์ UI กว่า 67 แบบ พร้อมตัวอย่างที่กดเล่นได้จริงและคำแนะนำการใช้ CSS</a:t>
-            </a:r>
-            <a:endParaRPr lang="en-US" sz="1700" dirty="0"/>
-          </a:p>
-        </p:txBody>
-      </p:sp>
-      <p:sp>
-        <p:nvSpPr>
-          <p:cNvPr id="5" name="Shape 3"/>
-          <p:cNvSpPr/>
-          <p:nvPr/>
-        </p:nvSpPr>
-        <p:spPr>
-          <a:xfrm>
-            <a:off x="594360" y="1481328"/>
-            <a:ext cx="7680960" cy="621792"/>
-          </a:xfrm>
-          <a:prstGeom prst="roundRect">
-            <a:avLst>
-              <a:gd name="adj" fmla="val 13235"/>
-            </a:avLst>
-          </a:prstGeom>
-          <a:solidFill>
-            <a:srgbClr val="FFFFFF"/>
-          </a:solidFill>
-          <a:ln w="9525">
-            <a:solidFill>
-              <a:srgbClr val="E1E4E8"/>
-            </a:solidFill>
-            <a:prstDash val="solid"/>
-          </a:ln>
-          <a:effectLst>
-            <a:outerShdw blurRad="101600" dist="12700" dir="5400000" algn="bl" rotWithShape="0">
-              <a:srgbClr val="222831">
-                <a:alpha val="10000"/>
-              </a:srgbClr>
-            </a:outerShdw>
-          </a:effectLst>
-        </p:spPr>
-        <p:txBody>
-          <a:bodyPr/>
-          <a:lstStyle/>
-          <a:p>
-            <a:endParaRPr lang="en-TH"/>
-          </a:p>
-        </p:txBody>
-      </p:sp>
-      <p:sp>
-        <p:nvSpPr>
-          <p:cNvPr id="6" name="Text 4"/>
-          <p:cNvSpPr/>
-          <p:nvPr/>
-        </p:nvSpPr>
-        <p:spPr>
-          <a:xfrm>
-            <a:off x="868680" y="1481328"/>
-            <a:ext cx="2194560" cy="621792"/>
-          </a:xfrm>
-          <a:prstGeom prst="rect">
-            <a:avLst/>
-          </a:prstGeom>
-          <a:noFill/>
-          <a:ln/>
-        </p:spPr>
-        <p:txBody>
-          <a:bodyPr wrap="square" lIns="0" tIns="0" rIns="0" bIns="0" rtlCol="0" anchor="ctr"/>
-          <a:lstStyle/>
-          <a:p>
-            <a:pPr marL="0" indent="0">
-              <a:buNone/>
-            </a:pPr>
-            <a:r>
-              <a:rPr lang="en-US" sz="1800" b="1" dirty="0">
-                <a:solidFill>
-                  <a:srgbClr val="222831"/>
-                </a:solidFill>
-                <a:latin typeface="TH Sarabun New" pitchFamily="34" charset="0"/>
-                <a:ea typeface="TH Sarabun New" pitchFamily="34" charset="-122"/>
-                <a:cs typeface="TH Sarabun New" pitchFamily="34" charset="-120"/>
-              </a:rPr>
-              <a:t>Minimalism</a:t>
-            </a:r>
-            <a:endParaRPr lang="en-US" sz="1800" dirty="0"/>
-          </a:p>
-        </p:txBody>
-      </p:sp>
-      <p:sp>
-        <p:nvSpPr>
-          <p:cNvPr id="7" name="Text 5"/>
-          <p:cNvSpPr/>
-          <p:nvPr/>
-        </p:nvSpPr>
-        <p:spPr>
-          <a:xfrm>
-            <a:off x="3108960" y="1481328"/>
-            <a:ext cx="4023360" cy="621792"/>
-          </a:xfrm>
-          <a:prstGeom prst="rect">
-            <a:avLst/>
-          </a:prstGeom>
-          <a:noFill/>
-          <a:ln/>
-        </p:spPr>
-        <p:txBody>
-          <a:bodyPr wrap="square" lIns="0" tIns="0" rIns="0" bIns="0" rtlCol="0" anchor="ctr"/>
-          <a:lstStyle/>
-          <a:p>
-            <a:pPr marL="0" indent="0">
-              <a:buNone/>
-            </a:pPr>
-            <a:r>
-              <a:rPr lang="en-US" sz="1550" dirty="0">
-                <a:solidFill>
-                  <a:srgbClr val="393E46"/>
-                </a:solidFill>
-                <a:latin typeface="TH Sarabun New" pitchFamily="34" charset="0"/>
-                <a:ea typeface="TH Sarabun New" pitchFamily="34" charset="-122"/>
-                <a:cs typeface="TH Sarabun New" pitchFamily="34" charset="-120"/>
-              </a:rPr>
-              <a:t>อ่านข้อมูลง่าย เหมาะกับงานวิชาการและราชการ</a:t>
-            </a:r>
-            <a:endParaRPr lang="en-US" sz="1550" dirty="0"/>
-          </a:p>
-        </p:txBody>
-      </p:sp>
-      <p:sp>
-        <p:nvSpPr>
-          <p:cNvPr id="8" name="Shape 6"/>
-          <p:cNvSpPr/>
-          <p:nvPr/>
-        </p:nvSpPr>
-        <p:spPr>
-          <a:xfrm>
-            <a:off x="7178040" y="1627632"/>
-            <a:ext cx="960120" cy="329184"/>
-          </a:xfrm>
-          <a:prstGeom prst="roundRect">
-            <a:avLst>
-              <a:gd name="adj" fmla="val 50000"/>
-            </a:avLst>
-          </a:prstGeom>
-          <a:solidFill>
-            <a:srgbClr val="CCFBF1"/>
-          </a:solidFill>
-          <a:ln w="12700">
-            <a:solidFill>
-              <a:srgbClr val="CCFBF1"/>
-            </a:solidFill>
-            <a:prstDash val="solid"/>
-          </a:ln>
-        </p:spPr>
-        <p:txBody>
-          <a:bodyPr/>
-          <a:lstStyle/>
-          <a:p>
-            <a:endParaRPr lang="en-TH"/>
-          </a:p>
-        </p:txBody>
-      </p:sp>
-      <p:sp>
-        <p:nvSpPr>
-          <p:cNvPr id="9" name="Text 7"/>
-          <p:cNvSpPr/>
-          <p:nvPr/>
-        </p:nvSpPr>
-        <p:spPr>
-          <a:xfrm>
-            <a:off x="7178040" y="1627632"/>
-            <a:ext cx="960120" cy="329184"/>
-          </a:xfrm>
-          <a:prstGeom prst="rect">
-            <a:avLst/>
-          </a:prstGeom>
-          <a:noFill/>
-          <a:ln/>
-        </p:spPr>
-        <p:txBody>
-          <a:bodyPr wrap="square" lIns="0" tIns="0" rIns="0" bIns="0" rtlCol="0" anchor="ctr"/>
-          <a:lstStyle/>
-          <a:p>
-            <a:pPr marL="0" indent="0" algn="ctr">
-              <a:buNone/>
-            </a:pPr>
-            <a:r>
-              <a:rPr lang="en-US" sz="1350" b="1" dirty="0">
-                <a:solidFill>
-                  <a:srgbClr val="0F766E"/>
-                </a:solidFill>
-                <a:latin typeface="TH Sarabun New" pitchFamily="34" charset="0"/>
-                <a:ea typeface="TH Sarabun New" pitchFamily="34" charset="-122"/>
-                <a:cs typeface="TH Sarabun New" pitchFamily="34" charset="-120"/>
-              </a:rPr>
-              <a:t>แนะนำ</a:t>
-            </a:r>
-            <a:endParaRPr lang="en-US" sz="1350" dirty="0"/>
-          </a:p>
-        </p:txBody>
-      </p:sp>
-      <p:sp>
-        <p:nvSpPr>
-          <p:cNvPr id="10" name="Shape 8"/>
-          <p:cNvSpPr/>
-          <p:nvPr/>
-        </p:nvSpPr>
-        <p:spPr>
-          <a:xfrm>
-            <a:off x="594360" y="2212848"/>
-            <a:ext cx="7680960" cy="621792"/>
-          </a:xfrm>
-          <a:prstGeom prst="roundRect">
-            <a:avLst>
-              <a:gd name="adj" fmla="val 13235"/>
-            </a:avLst>
-          </a:prstGeom>
-          <a:solidFill>
-            <a:srgbClr val="FFFFFF"/>
-          </a:solidFill>
-          <a:ln w="9525">
-            <a:solidFill>
-              <a:srgbClr val="E1E4E8"/>
-            </a:solidFill>
-            <a:prstDash val="solid"/>
-          </a:ln>
-          <a:effectLst>
-            <a:outerShdw blurRad="101600" dist="12700" dir="5400000" algn="bl" rotWithShape="0">
-              <a:srgbClr val="222831">
-                <a:alpha val="10000"/>
-              </a:srgbClr>
-            </a:outerShdw>
-          </a:effectLst>
-        </p:spPr>
-        <p:txBody>
-          <a:bodyPr/>
-          <a:lstStyle/>
-          <a:p>
-            <a:endParaRPr lang="en-TH"/>
-          </a:p>
-        </p:txBody>
-      </p:sp>
-      <p:sp>
-        <p:nvSpPr>
-          <p:cNvPr id="11" name="Text 9"/>
-          <p:cNvSpPr/>
-          <p:nvPr/>
-        </p:nvSpPr>
-        <p:spPr>
-          <a:xfrm>
-            <a:off x="868680" y="2212848"/>
-            <a:ext cx="2194560" cy="621792"/>
-          </a:xfrm>
-          <a:prstGeom prst="rect">
-            <a:avLst/>
-          </a:prstGeom>
-          <a:noFill/>
-          <a:ln/>
-        </p:spPr>
-        <p:txBody>
-          <a:bodyPr wrap="square" lIns="0" tIns="0" rIns="0" bIns="0" rtlCol="0" anchor="ctr"/>
-          <a:lstStyle/>
-          <a:p>
-            <a:pPr marL="0" indent="0">
-              <a:buNone/>
-            </a:pPr>
-            <a:r>
-              <a:rPr lang="en-US" sz="1800" b="1" dirty="0">
-                <a:solidFill>
-                  <a:srgbClr val="222831"/>
-                </a:solidFill>
-                <a:latin typeface="TH Sarabun New" pitchFamily="34" charset="0"/>
-                <a:ea typeface="TH Sarabun New" pitchFamily="34" charset="-122"/>
-                <a:cs typeface="TH Sarabun New" pitchFamily="34" charset="-120"/>
-              </a:rPr>
-              <a:t>Flat Design</a:t>
-            </a:r>
-            <a:endParaRPr lang="en-US" sz="1800" dirty="0"/>
-          </a:p>
-        </p:txBody>
-      </p:sp>
-      <p:sp>
-        <p:nvSpPr>
-          <p:cNvPr id="12" name="Text 10"/>
-          <p:cNvSpPr/>
-          <p:nvPr/>
-        </p:nvSpPr>
-        <p:spPr>
-          <a:xfrm>
-            <a:off x="3108960" y="2212848"/>
-            <a:ext cx="4023360" cy="621792"/>
-          </a:xfrm>
-          <a:prstGeom prst="rect">
-            <a:avLst/>
-          </a:prstGeom>
-          <a:noFill/>
-          <a:ln/>
-        </p:spPr>
-        <p:txBody>
-          <a:bodyPr wrap="square" lIns="0" tIns="0" rIns="0" bIns="0" rtlCol="0" anchor="ctr"/>
-          <a:lstStyle/>
-          <a:p>
-            <a:pPr marL="0" indent="0">
-              <a:buNone/>
-            </a:pPr>
-            <a:r>
-              <a:rPr lang="en-US" sz="1550" dirty="0">
-                <a:solidFill>
-                  <a:srgbClr val="393E46"/>
-                </a:solidFill>
-                <a:latin typeface="TH Sarabun New" pitchFamily="34" charset="0"/>
-                <a:ea typeface="TH Sarabun New" pitchFamily="34" charset="-122"/>
-                <a:cs typeface="TH Sarabun New" pitchFamily="34" charset="-120"/>
-              </a:rPr>
-              <a:t>เรียบ ทำเร็ว รองรับหลายขนาดจอได้ดี</a:t>
-            </a:r>
-            <a:endParaRPr lang="en-US" sz="1550" dirty="0"/>
-          </a:p>
-        </p:txBody>
-      </p:sp>
-      <p:sp>
-        <p:nvSpPr>
-          <p:cNvPr id="13" name="Shape 11"/>
-          <p:cNvSpPr/>
-          <p:nvPr/>
-        </p:nvSpPr>
-        <p:spPr>
-          <a:xfrm>
-            <a:off x="7178040" y="2359152"/>
-            <a:ext cx="960120" cy="329184"/>
-          </a:xfrm>
-          <a:prstGeom prst="roundRect">
-            <a:avLst>
-              <a:gd name="adj" fmla="val 50000"/>
-            </a:avLst>
-          </a:prstGeom>
-          <a:solidFill>
-            <a:srgbClr val="E8F6F7"/>
-          </a:solidFill>
-          <a:ln w="12700">
-            <a:solidFill>
-              <a:srgbClr val="E8F6F7"/>
-            </a:solidFill>
-            <a:prstDash val="solid"/>
-          </a:ln>
-        </p:spPr>
-        <p:txBody>
-          <a:bodyPr/>
-          <a:lstStyle/>
-          <a:p>
-            <a:endParaRPr lang="en-TH"/>
-          </a:p>
-        </p:txBody>
-      </p:sp>
-      <p:sp>
-        <p:nvSpPr>
-          <p:cNvPr id="14" name="Text 12"/>
-          <p:cNvSpPr/>
-          <p:nvPr/>
-        </p:nvSpPr>
-        <p:spPr>
-          <a:xfrm>
-            <a:off x="7178040" y="2359152"/>
-            <a:ext cx="960120" cy="329184"/>
-          </a:xfrm>
-          <a:prstGeom prst="rect">
-            <a:avLst/>
-          </a:prstGeom>
-          <a:noFill/>
-          <a:ln/>
-        </p:spPr>
-        <p:txBody>
-          <a:bodyPr wrap="square" lIns="0" tIns="0" rIns="0" bIns="0" rtlCol="0" anchor="ctr"/>
-          <a:lstStyle/>
-          <a:p>
-            <a:pPr marL="0" indent="0" algn="ctr">
-              <a:buNone/>
-            </a:pPr>
-            <a:r>
-              <a:rPr lang="en-US" sz="1350" b="1" dirty="0">
-                <a:solidFill>
-                  <a:srgbClr val="00ADB5"/>
-                </a:solidFill>
-                <a:latin typeface="TH Sarabun New" pitchFamily="34" charset="0"/>
-                <a:ea typeface="TH Sarabun New" pitchFamily="34" charset="-122"/>
-                <a:cs typeface="TH Sarabun New" pitchFamily="34" charset="-120"/>
-              </a:rPr>
-              <a:t>ใช้ได้</a:t>
-            </a:r>
-            <a:endParaRPr lang="en-US" sz="1350" dirty="0"/>
-          </a:p>
-        </p:txBody>
-      </p:sp>
-      <p:sp>
-        <p:nvSpPr>
-          <p:cNvPr id="15" name="Shape 13"/>
-          <p:cNvSpPr/>
-          <p:nvPr/>
-        </p:nvSpPr>
-        <p:spPr>
-          <a:xfrm>
-            <a:off x="594360" y="2944368"/>
-            <a:ext cx="7680960" cy="621792"/>
-          </a:xfrm>
-          <a:prstGeom prst="roundRect">
-            <a:avLst>
-              <a:gd name="adj" fmla="val 13235"/>
-            </a:avLst>
-          </a:prstGeom>
-          <a:solidFill>
-            <a:srgbClr val="FFFFFF"/>
-          </a:solidFill>
-          <a:ln w="9525">
-            <a:solidFill>
-              <a:srgbClr val="E1E4E8"/>
-            </a:solidFill>
-            <a:prstDash val="solid"/>
-          </a:ln>
-          <a:effectLst>
-            <a:outerShdw blurRad="101600" dist="12700" dir="5400000" algn="bl" rotWithShape="0">
-              <a:srgbClr val="222831">
-                <a:alpha val="10000"/>
-              </a:srgbClr>
-            </a:outerShdw>
-          </a:effectLst>
-        </p:spPr>
-        <p:txBody>
-          <a:bodyPr/>
-          <a:lstStyle/>
-          <a:p>
-            <a:endParaRPr lang="en-TH"/>
-          </a:p>
-        </p:txBody>
-      </p:sp>
-      <p:sp>
-        <p:nvSpPr>
-          <p:cNvPr id="16" name="Text 14"/>
-          <p:cNvSpPr/>
-          <p:nvPr/>
-        </p:nvSpPr>
-        <p:spPr>
-          <a:xfrm>
-            <a:off x="868680" y="2944368"/>
-            <a:ext cx="2194560" cy="621792"/>
-          </a:xfrm>
-          <a:prstGeom prst="rect">
-            <a:avLst/>
-          </a:prstGeom>
-          <a:noFill/>
-          <a:ln/>
-        </p:spPr>
-        <p:txBody>
-          <a:bodyPr wrap="square" lIns="0" tIns="0" rIns="0" bIns="0" rtlCol="0" anchor="ctr"/>
-          <a:lstStyle/>
-          <a:p>
-            <a:pPr marL="0" indent="0">
-              <a:buNone/>
-            </a:pPr>
-            <a:r>
-              <a:rPr lang="en-US" sz="1800" b="1" dirty="0">
-                <a:solidFill>
-                  <a:srgbClr val="222831"/>
-                </a:solidFill>
-                <a:latin typeface="TH Sarabun New" pitchFamily="34" charset="0"/>
-                <a:ea typeface="TH Sarabun New" pitchFamily="34" charset="-122"/>
-                <a:cs typeface="TH Sarabun New" pitchFamily="34" charset="-120"/>
-              </a:rPr>
-              <a:t>Soft UI</a:t>
-            </a:r>
-            <a:endParaRPr lang="en-US" sz="1800" dirty="0"/>
-          </a:p>
-        </p:txBody>
-      </p:sp>
-      <p:sp>
-        <p:nvSpPr>
-          <p:cNvPr id="17" name="Text 15"/>
-          <p:cNvSpPr/>
-          <p:nvPr/>
-        </p:nvSpPr>
-        <p:spPr>
-          <a:xfrm>
-            <a:off x="3108960" y="2944368"/>
-            <a:ext cx="4023360" cy="621792"/>
-          </a:xfrm>
-          <a:prstGeom prst="rect">
-            <a:avLst/>
-          </a:prstGeom>
-          <a:noFill/>
-          <a:ln/>
-        </p:spPr>
-        <p:txBody>
-          <a:bodyPr wrap="square" lIns="0" tIns="0" rIns="0" bIns="0" rtlCol="0" anchor="ctr"/>
-          <a:lstStyle/>
-          <a:p>
-            <a:pPr marL="0" indent="0">
-              <a:buNone/>
-            </a:pPr>
-            <a:r>
-              <a:rPr lang="en-US" sz="1550" dirty="0">
-                <a:solidFill>
-                  <a:srgbClr val="393E46"/>
-                </a:solidFill>
-                <a:latin typeface="TH Sarabun New" pitchFamily="34" charset="0"/>
-                <a:ea typeface="TH Sarabun New" pitchFamily="34" charset="-122"/>
-                <a:cs typeface="TH Sarabun New" pitchFamily="34" charset="-120"/>
-              </a:rPr>
-              <a:t>นุ่มนวลสบายตา แต่ต้องระวังความคมชัดของตัวอักษร</a:t>
-            </a:r>
-            <a:endParaRPr lang="en-US" sz="1550" dirty="0"/>
-          </a:p>
-        </p:txBody>
-      </p:sp>
-      <p:sp>
-        <p:nvSpPr>
-          <p:cNvPr id="18" name="Shape 16"/>
-          <p:cNvSpPr/>
-          <p:nvPr/>
-        </p:nvSpPr>
-        <p:spPr>
-          <a:xfrm>
-            <a:off x="7178040" y="3090672"/>
-            <a:ext cx="960120" cy="329184"/>
-          </a:xfrm>
-          <a:prstGeom prst="roundRect">
-            <a:avLst>
-              <a:gd name="adj" fmla="val 50000"/>
-            </a:avLst>
-          </a:prstGeom>
-          <a:solidFill>
-            <a:srgbClr val="FEF3C7"/>
-          </a:solidFill>
-          <a:ln w="12700">
-            <a:solidFill>
-              <a:srgbClr val="FEF3C7"/>
-            </a:solidFill>
-            <a:prstDash val="solid"/>
-          </a:ln>
-        </p:spPr>
-        <p:txBody>
-          <a:bodyPr/>
-          <a:lstStyle/>
-          <a:p>
-            <a:endParaRPr lang="en-TH"/>
-          </a:p>
-        </p:txBody>
-      </p:sp>
-      <p:sp>
-        <p:nvSpPr>
-          <p:cNvPr id="19" name="Text 17"/>
-          <p:cNvSpPr/>
-          <p:nvPr/>
-        </p:nvSpPr>
-        <p:spPr>
-          <a:xfrm>
-            <a:off x="7178040" y="3090672"/>
-            <a:ext cx="960120" cy="329184"/>
-          </a:xfrm>
-          <a:prstGeom prst="rect">
-            <a:avLst/>
-          </a:prstGeom>
-          <a:noFill/>
-          <a:ln/>
-        </p:spPr>
-        <p:txBody>
-          <a:bodyPr wrap="square" lIns="0" tIns="0" rIns="0" bIns="0" rtlCol="0" anchor="ctr"/>
-          <a:lstStyle/>
-          <a:p>
-            <a:pPr marL="0" indent="0" algn="ctr">
-              <a:buNone/>
-            </a:pPr>
-            <a:r>
-              <a:rPr lang="en-US" sz="1350" b="1" dirty="0">
-                <a:solidFill>
-                  <a:srgbClr val="B45309"/>
-                </a:solidFill>
-                <a:latin typeface="TH Sarabun New" pitchFamily="34" charset="0"/>
-                <a:ea typeface="TH Sarabun New" pitchFamily="34" charset="-122"/>
-                <a:cs typeface="TH Sarabun New" pitchFamily="34" charset="-120"/>
-              </a:rPr>
-              <a:t>ระวัง</a:t>
-            </a:r>
-            <a:endParaRPr lang="en-US" sz="1350" dirty="0"/>
-          </a:p>
-        </p:txBody>
-      </p:sp>
-      <p:sp>
-        <p:nvSpPr>
-          <p:cNvPr id="20" name="Shape 18"/>
-          <p:cNvSpPr/>
-          <p:nvPr/>
-        </p:nvSpPr>
-        <p:spPr>
-          <a:xfrm>
-            <a:off x="594360" y="3675888"/>
-            <a:ext cx="7680960" cy="621792"/>
-          </a:xfrm>
-          <a:prstGeom prst="roundRect">
-            <a:avLst>
-              <a:gd name="adj" fmla="val 13235"/>
-            </a:avLst>
-          </a:prstGeom>
-          <a:solidFill>
-            <a:srgbClr val="FFFFFF"/>
-          </a:solidFill>
-          <a:ln w="9525">
-            <a:solidFill>
-              <a:srgbClr val="E1E4E8"/>
-            </a:solidFill>
-            <a:prstDash val="solid"/>
-          </a:ln>
-          <a:effectLst>
-            <a:outerShdw blurRad="101600" dist="12700" dir="5400000" algn="bl" rotWithShape="0">
-              <a:srgbClr val="222831">
-                <a:alpha val="10000"/>
-              </a:srgbClr>
-            </a:outerShdw>
-          </a:effectLst>
-        </p:spPr>
-        <p:txBody>
-          <a:bodyPr/>
-          <a:lstStyle/>
-          <a:p>
-            <a:endParaRPr lang="en-TH"/>
-          </a:p>
-        </p:txBody>
-      </p:sp>
-      <p:sp>
-        <p:nvSpPr>
-          <p:cNvPr id="21" name="Text 19"/>
-          <p:cNvSpPr/>
-          <p:nvPr/>
-        </p:nvSpPr>
-        <p:spPr>
-          <a:xfrm>
-            <a:off x="868680" y="3675888"/>
-            <a:ext cx="2194560" cy="621792"/>
-          </a:xfrm>
-          <a:prstGeom prst="rect">
-            <a:avLst/>
-          </a:prstGeom>
-          <a:noFill/>
-          <a:ln/>
-        </p:spPr>
-        <p:txBody>
-          <a:bodyPr wrap="square" lIns="0" tIns="0" rIns="0" bIns="0" rtlCol="0" anchor="ctr"/>
-          <a:lstStyle/>
-          <a:p>
-            <a:pPr marL="0" indent="0">
-              <a:buNone/>
-            </a:pPr>
-            <a:r>
-              <a:rPr lang="en-US" sz="1800" b="1" dirty="0">
-                <a:solidFill>
-                  <a:srgbClr val="222831"/>
-                </a:solidFill>
-                <a:latin typeface="TH Sarabun New" pitchFamily="34" charset="0"/>
-                <a:ea typeface="TH Sarabun New" pitchFamily="34" charset="-122"/>
-                <a:cs typeface="TH Sarabun New" pitchFamily="34" charset="-120"/>
-              </a:rPr>
-              <a:t>Glassmorphism</a:t>
-            </a:r>
-            <a:endParaRPr lang="en-US" sz="1800" dirty="0"/>
-          </a:p>
-        </p:txBody>
-      </p:sp>
-      <p:sp>
-        <p:nvSpPr>
-          <p:cNvPr id="22" name="Text 20"/>
-          <p:cNvSpPr/>
-          <p:nvPr/>
-        </p:nvSpPr>
-        <p:spPr>
-          <a:xfrm>
-            <a:off x="3108960" y="3675888"/>
-            <a:ext cx="4023360" cy="621792"/>
-          </a:xfrm>
-          <a:prstGeom prst="rect">
-            <a:avLst/>
-          </a:prstGeom>
-          <a:noFill/>
-          <a:ln/>
-        </p:spPr>
-        <p:txBody>
-          <a:bodyPr wrap="square" lIns="0" tIns="0" rIns="0" bIns="0" rtlCol="0" anchor="ctr"/>
-          <a:lstStyle/>
-          <a:p>
-            <a:pPr marL="0" indent="0">
-              <a:buNone/>
-            </a:pPr>
-            <a:r>
-              <a:rPr lang="en-US" sz="1550" dirty="0">
-                <a:solidFill>
-                  <a:srgbClr val="393E46"/>
-                </a:solidFill>
-                <a:latin typeface="TH Sarabun New" pitchFamily="34" charset="0"/>
-                <a:ea typeface="TH Sarabun New" pitchFamily="34" charset="-122"/>
-                <a:cs typeface="TH Sarabun New" pitchFamily="34" charset="-120"/>
-              </a:rPr>
-              <a:t>สวยแต่ทำให้อ่านตัวเลข KPI ยาก</a:t>
-            </a:r>
-            <a:endParaRPr lang="en-US" sz="1550" dirty="0"/>
-          </a:p>
-        </p:txBody>
-      </p:sp>
-      <p:sp>
-        <p:nvSpPr>
-          <p:cNvPr id="23" name="Shape 21"/>
-          <p:cNvSpPr/>
-          <p:nvPr/>
-        </p:nvSpPr>
-        <p:spPr>
-          <a:xfrm>
-            <a:off x="7178040" y="3822192"/>
-            <a:ext cx="960120" cy="329184"/>
-          </a:xfrm>
-          <a:prstGeom prst="roundRect">
-            <a:avLst>
-              <a:gd name="adj" fmla="val 50000"/>
-            </a:avLst>
-          </a:prstGeom>
-          <a:solidFill>
-            <a:srgbClr val="FEF2F2"/>
-          </a:solidFill>
-          <a:ln w="12700">
-            <a:solidFill>
-              <a:srgbClr val="FEF2F2"/>
-            </a:solidFill>
-            <a:prstDash val="solid"/>
-          </a:ln>
-        </p:spPr>
-        <p:txBody>
-          <a:bodyPr/>
-          <a:lstStyle/>
-          <a:p>
-            <a:endParaRPr lang="en-TH"/>
-          </a:p>
-        </p:txBody>
-      </p:sp>
-      <p:sp>
-        <p:nvSpPr>
-          <p:cNvPr id="24" name="Text 22"/>
-          <p:cNvSpPr/>
-          <p:nvPr/>
-        </p:nvSpPr>
-        <p:spPr>
-          <a:xfrm>
-            <a:off x="7178040" y="3822192"/>
-            <a:ext cx="960120" cy="329184"/>
-          </a:xfrm>
-          <a:prstGeom prst="rect">
-            <a:avLst/>
-          </a:prstGeom>
-          <a:noFill/>
-          <a:ln/>
-        </p:spPr>
-        <p:txBody>
-          <a:bodyPr wrap="square" lIns="0" tIns="0" rIns="0" bIns="0" rtlCol="0" anchor="ctr"/>
-          <a:lstStyle/>
-          <a:p>
-            <a:pPr marL="0" indent="0" algn="ctr">
-              <a:buNone/>
-            </a:pPr>
-            <a:r>
-              <a:rPr lang="en-US" sz="1350" b="1" dirty="0">
-                <a:solidFill>
-                  <a:srgbClr val="DC2626"/>
-                </a:solidFill>
-                <a:latin typeface="TH Sarabun New" pitchFamily="34" charset="0"/>
-                <a:ea typeface="TH Sarabun New" pitchFamily="34" charset="-122"/>
-                <a:cs typeface="TH Sarabun New" pitchFamily="34" charset="-120"/>
-              </a:rPr>
-              <a:t>ไม่แนะนำ</a:t>
-            </a:r>
-            <a:endParaRPr lang="en-US" sz="1350" dirty="0"/>
-          </a:p>
-        </p:txBody>
-      </p:sp>
-      <p:sp>
-        <p:nvSpPr>
-          <p:cNvPr id="25" name="Shape 23"/>
-          <p:cNvSpPr/>
-          <p:nvPr/>
-        </p:nvSpPr>
-        <p:spPr>
-          <a:xfrm>
-            <a:off x="8503920" y="1481328"/>
-            <a:ext cx="3063240" cy="2980944"/>
-          </a:xfrm>
-          <a:prstGeom prst="roundRect">
-            <a:avLst>
-              <a:gd name="adj" fmla="val 2761"/>
-            </a:avLst>
-          </a:prstGeom>
-          <a:solidFill>
-            <a:srgbClr val="E8F6F7"/>
-          </a:solidFill>
-          <a:ln w="9525">
-            <a:solidFill>
-              <a:srgbClr val="E8F6F7"/>
-            </a:solidFill>
-            <a:prstDash val="solid"/>
-          </a:ln>
-          <a:effectLst>
-            <a:outerShdw blurRad="101600" dist="12700" dir="5400000" algn="bl" rotWithShape="0">
-              <a:srgbClr val="222831">
-                <a:alpha val="10000"/>
-              </a:srgbClr>
-            </a:outerShdw>
-          </a:effectLst>
-        </p:spPr>
-        <p:txBody>
-          <a:bodyPr/>
-          <a:lstStyle/>
-          <a:p>
-            <a:endParaRPr lang="en-TH"/>
-          </a:p>
-        </p:txBody>
-      </p:sp>
-      <p:sp>
-        <p:nvSpPr>
-          <p:cNvPr id="26" name="Text 24"/>
-          <p:cNvSpPr/>
-          <p:nvPr/>
-        </p:nvSpPr>
-        <p:spPr>
-          <a:xfrm>
-            <a:off x="8732520" y="1627632"/>
-            <a:ext cx="2788920" cy="310896"/>
-          </a:xfrm>
-          <a:prstGeom prst="rect">
-            <a:avLst/>
-          </a:prstGeom>
-          <a:noFill/>
-          <a:ln/>
-        </p:spPr>
-        <p:txBody>
-          <a:bodyPr wrap="square" lIns="0" tIns="0" rIns="0" bIns="0" rtlCol="0" anchor="ctr"/>
-          <a:lstStyle/>
-          <a:p>
-            <a:pPr marL="0" indent="0">
-              <a:buNone/>
-            </a:pPr>
-            <a:r>
-              <a:rPr lang="en-US" sz="1800" b="1" dirty="0">
-                <a:solidFill>
-                  <a:srgbClr val="00ADB5"/>
-                </a:solidFill>
-                <a:latin typeface="TH Sarabun New" pitchFamily="34" charset="0"/>
-                <a:ea typeface="TH Sarabun New" pitchFamily="34" charset="-122"/>
-                <a:cs typeface="TH Sarabun New" pitchFamily="34" charset="-120"/>
-              </a:rPr>
-              <a:t>วิธีจดสไตล์ลงสเปก</a:t>
-            </a:r>
-            <a:endParaRPr lang="en-US" sz="1800" dirty="0"/>
-          </a:p>
-        </p:txBody>
-      </p:sp>
-      <p:sp>
-        <p:nvSpPr>
-          <p:cNvPr id="27" name="Text 25"/>
-          <p:cNvSpPr/>
-          <p:nvPr/>
-        </p:nvSpPr>
-        <p:spPr>
-          <a:xfrm>
-            <a:off x="8732520" y="1956816"/>
-            <a:ext cx="2560320" cy="310896"/>
-          </a:xfrm>
-          <a:prstGeom prst="rect">
-            <a:avLst/>
-          </a:prstGeom>
-          <a:noFill/>
-          <a:ln/>
-        </p:spPr>
-        <p:txBody>
-          <a:bodyPr wrap="square" lIns="0" tIns="0" rIns="0" bIns="0" rtlCol="0" anchor="ctr"/>
-          <a:lstStyle/>
-          <a:p>
-            <a:pPr marL="0" indent="0">
-              <a:buNone/>
-            </a:pPr>
-            <a:r>
-              <a:rPr lang="en-US" sz="1500" dirty="0">
-                <a:solidFill>
-                  <a:srgbClr val="393E46"/>
-                </a:solidFill>
-                <a:latin typeface="TH Sarabun New" pitchFamily="34" charset="0"/>
-                <a:ea typeface="TH Sarabun New" pitchFamily="34" charset="-122"/>
-                <a:cs typeface="TH Sarabun New" pitchFamily="34" charset="-120"/>
-              </a:rPr>
-              <a:t>เขียนหลักการที่ “มองเห็นได้จริง” 3–5 ข้อ</a:t>
-            </a:r>
-            <a:endParaRPr lang="en-US" sz="1500" dirty="0"/>
-          </a:p>
-        </p:txBody>
-      </p:sp>
-      <p:sp>
-        <p:nvSpPr>
-          <p:cNvPr id="28" name="Shape 26"/>
-          <p:cNvSpPr/>
-          <p:nvPr/>
-        </p:nvSpPr>
-        <p:spPr>
-          <a:xfrm>
-            <a:off x="8732520" y="2340864"/>
-            <a:ext cx="2560320" cy="777240"/>
-          </a:xfrm>
-          <a:prstGeom prst="roundRect">
-            <a:avLst>
-              <a:gd name="adj" fmla="val 8235"/>
-            </a:avLst>
-          </a:prstGeom>
-          <a:solidFill>
-            <a:srgbClr val="FEF2F2"/>
-          </a:solidFill>
-          <a:ln w="9525">
-            <a:solidFill>
-              <a:srgbClr val="FCA5A5"/>
-            </a:solidFill>
-            <a:prstDash val="solid"/>
-          </a:ln>
-        </p:spPr>
-        <p:txBody>
-          <a:bodyPr/>
-          <a:lstStyle/>
-          <a:p>
-            <a:endParaRPr lang="en-TH"/>
-          </a:p>
-        </p:txBody>
-      </p:sp>
-      <p:sp>
-        <p:nvSpPr>
-          <p:cNvPr id="29" name="Text 27"/>
-          <p:cNvSpPr/>
-          <p:nvPr/>
-        </p:nvSpPr>
-        <p:spPr>
-          <a:xfrm>
-            <a:off x="8915400" y="2395728"/>
-            <a:ext cx="2194560" cy="685800"/>
-          </a:xfrm>
-          <a:prstGeom prst="rect">
-            <a:avLst/>
-          </a:prstGeom>
-          <a:noFill/>
-          <a:ln/>
-        </p:spPr>
-        <p:txBody>
-          <a:bodyPr wrap="square" lIns="0" tIns="0" rIns="0" bIns="0" rtlCol="0" anchor="ctr"/>
-          <a:lstStyle/>
-          <a:p>
-            <a:pPr marL="0" indent="0">
-              <a:buNone/>
-            </a:pPr>
-            <a:r>
-              <a:rPr lang="en-US" sz="1500" dirty="0">
-                <a:solidFill>
-                  <a:srgbClr val="DC2626"/>
-                </a:solidFill>
-                <a:latin typeface="TH Sarabun New" pitchFamily="34" charset="0"/>
-                <a:ea typeface="TH Sarabun New" pitchFamily="34" charset="-122"/>
-                <a:cs typeface="TH Sarabun New" pitchFamily="34" charset="-120"/>
-              </a:rPr>
-              <a:t>อย่าเขียนว่า</a:t>
-            </a:r>
-            <a:endParaRPr lang="en-US" sz="1500" dirty="0"/>
-          </a:p>
-          <a:p>
-            <a:pPr marL="0" indent="0">
-              <a:buNone/>
-            </a:pPr>
-            <a:r>
-              <a:rPr lang="en-US" sz="1500" dirty="0">
-                <a:solidFill>
-                  <a:srgbClr val="DC2626"/>
-                </a:solidFill>
-                <a:latin typeface="TH Sarabun New" pitchFamily="34" charset="0"/>
-                <a:ea typeface="TH Sarabun New" pitchFamily="34" charset="-122"/>
-                <a:cs typeface="TH Sarabun New" pitchFamily="34" charset="-120"/>
-              </a:rPr>
-              <a:t>“ทำให้ดูโมเดิร์น”</a:t>
-            </a:r>
-            <a:endParaRPr lang="en-US" sz="1500" dirty="0"/>
-          </a:p>
-        </p:txBody>
-      </p:sp>
-      <p:sp>
-        <p:nvSpPr>
-          <p:cNvPr id="30" name="Shape 28"/>
-          <p:cNvSpPr/>
-          <p:nvPr/>
-        </p:nvSpPr>
-        <p:spPr>
-          <a:xfrm>
-            <a:off x="8732520" y="3218688"/>
-            <a:ext cx="2560320" cy="1097280"/>
-          </a:xfrm>
-          <a:prstGeom prst="roundRect">
-            <a:avLst>
-              <a:gd name="adj" fmla="val 5833"/>
-            </a:avLst>
-          </a:prstGeom>
-          <a:solidFill>
-            <a:srgbClr val="CCFBF1"/>
-          </a:solidFill>
-          <a:ln w="12700">
-            <a:solidFill>
-              <a:srgbClr val="CCFBF1"/>
-            </a:solidFill>
-            <a:prstDash val="solid"/>
-          </a:ln>
-        </p:spPr>
-        <p:txBody>
-          <a:bodyPr/>
-          <a:lstStyle/>
-          <a:p>
-            <a:endParaRPr lang="en-TH"/>
-          </a:p>
-        </p:txBody>
-      </p:sp>
-      <p:sp>
-        <p:nvSpPr>
-          <p:cNvPr id="31" name="Text 29"/>
-          <p:cNvSpPr/>
-          <p:nvPr/>
-        </p:nvSpPr>
-        <p:spPr>
-          <a:xfrm>
-            <a:off x="8915400" y="3291840"/>
-            <a:ext cx="2194560" cy="960120"/>
-          </a:xfrm>
-          <a:prstGeom prst="rect">
-            <a:avLst/>
-          </a:prstGeom>
-          <a:noFill/>
-          <a:ln/>
-        </p:spPr>
-        <p:txBody>
-          <a:bodyPr wrap="square" lIns="0" tIns="0" rIns="0" bIns="0" rtlCol="0" anchor="ctr"/>
-          <a:lstStyle/>
-          <a:p>
-            <a:pPr marL="0" indent="0">
-              <a:buNone/>
-            </a:pPr>
-            <a:r>
-              <a:rPr lang="en-US" sz="1500" dirty="0">
-                <a:solidFill>
-                  <a:srgbClr val="0F766E"/>
-                </a:solidFill>
-                <a:latin typeface="TH Sarabun New" pitchFamily="34" charset="0"/>
-                <a:ea typeface="TH Sarabun New" pitchFamily="34" charset="-122"/>
-                <a:cs typeface="TH Sarabun New" pitchFamily="34" charset="-120"/>
-              </a:rPr>
-              <a:t>ให้เขียนว่า</a:t>
-            </a:r>
-            <a:endParaRPr lang="en-US" sz="1500" dirty="0"/>
-          </a:p>
-          <a:p>
-            <a:pPr marL="0" indent="0">
-              <a:buNone/>
-            </a:pPr>
-            <a:r>
-              <a:rPr lang="en-US" sz="1500" dirty="0">
-                <a:solidFill>
-                  <a:srgbClr val="0F766E"/>
-                </a:solidFill>
-                <a:latin typeface="TH Sarabun New" pitchFamily="34" charset="0"/>
-                <a:ea typeface="TH Sarabun New" pitchFamily="34" charset="-122"/>
-                <a:cs typeface="TH Sarabun New" pitchFamily="34" charset="-120"/>
-              </a:rPr>
-              <a:t>“การ์ดพื้นขาว มุมมน 12px</a:t>
-            </a:r>
-            <a:endParaRPr lang="en-US" sz="1500" dirty="0"/>
-          </a:p>
-          <a:p>
-            <a:pPr marL="0" indent="0">
-              <a:buNone/>
-            </a:pPr>
-            <a:r>
-              <a:rPr lang="en-US" sz="1500" dirty="0">
-                <a:solidFill>
-                  <a:srgbClr val="0F766E"/>
-                </a:solidFill>
-                <a:latin typeface="TH Sarabun New" pitchFamily="34" charset="0"/>
-                <a:ea typeface="TH Sarabun New" pitchFamily="34" charset="-122"/>
-                <a:cs typeface="TH Sarabun New" pitchFamily="34" charset="-120"/>
-              </a:rPr>
-              <a:t>เงาอ่อน ไม่มีเส้นขอบหนา”</a:t>
-            </a:r>
-            <a:endParaRPr lang="en-US" sz="1500" dirty="0"/>
-          </a:p>
-        </p:txBody>
-      </p:sp>
-      <p:sp>
-        <p:nvSpPr>
-          <p:cNvPr id="32" name="Text 30"/>
-          <p:cNvSpPr/>
-          <p:nvPr/>
-        </p:nvSpPr>
-        <p:spPr>
-          <a:xfrm>
-            <a:off x="594360" y="6263640"/>
-            <a:ext cx="10972800" cy="292608"/>
-          </a:xfrm>
-          <a:prstGeom prst="rect">
-            <a:avLst/>
-          </a:prstGeom>
-          <a:noFill/>
-          <a:ln/>
-        </p:spPr>
-        <p:txBody>
-          <a:bodyPr wrap="square" lIns="0" tIns="0" rIns="0" bIns="0" rtlCol="0" anchor="ctr"/>
-          <a:lstStyle/>
-          <a:p>
-            <a:pPr marL="0" indent="0">
-              <a:buNone/>
-            </a:pPr>
-            <a:r>
-              <a:rPr lang="en-US" sz="1300" dirty="0">
-                <a:solidFill>
-                  <a:srgbClr val="8A94A6"/>
-                </a:solidFill>
-                <a:latin typeface="TH Sarabun New" pitchFamily="34" charset="0"/>
-                <a:ea typeface="TH Sarabun New" pitchFamily="34" charset="-122"/>
-                <a:cs typeface="TH Sarabun New" pitchFamily="34" charset="-120"/>
-              </a:rPr>
-              <a:t>เลือกเพียงหนึ่งสไตล์ แล้วยึดให้ตลอดทั้งระบบ — การผสมหลายสไตล์คือสาเหตุอันดับหนึ่งที่ทำให้งานดูไม่เป็นมืออาชีพ</a:t>
-            </a:r>
-            <a:endParaRPr lang="en-US" sz="1300" dirty="0"/>
-          </a:p>
-        </p:txBody>
-      </p:sp>
-    </p:spTree>
-  </p:cSld>
-  <p:clrMapOvr>
-    <a:masterClrMapping/>
-  </p:clrMapOvr>
-</p:sld>
-</file>
-
-<file path=ppt/slides/slide21.xml><?xml version="1.0" encoding="utf-8"?>
-<p:sld xmlns:a="http://schemas.openxmlformats.org/drawingml/2006/main" xmlns:r="http://schemas.openxmlformats.org/officeDocument/2006/relationships" xmlns:p="http://schemas.openxmlformats.org/presentationml/2006/main">
   <p:cSld>
     <p:spTree>
       <p:nvGrpSpPr>
@@ -12770,7 +11520,7 @@
 </p:sld>
 </file>
 
-<file path=ppt/slides/slide22.xml><?xml version="1.0" encoding="utf-8"?>
+<file path=ppt/slides/slide21.xml><?xml version="1.0" encoding="utf-8"?>
 <p:sld xmlns:a="http://schemas.openxmlformats.org/drawingml/2006/main" xmlns:r="http://schemas.openxmlformats.org/officeDocument/2006/relationships" xmlns:p="http://schemas.openxmlformats.org/presentationml/2006/main">
   <p:cSld name="Slide 26">
     <p:bg>
@@ -14238,7 +12988,7 @@
 </p:sld>
 </file>
 
-<file path=ppt/slides/slide23.xml><?xml version="1.0" encoding="utf-8"?>
+<file path=ppt/slides/slide22.xml><?xml version="1.0" encoding="utf-8"?>
 <p:sld xmlns:a="http://schemas.openxmlformats.org/drawingml/2006/main" xmlns:r="http://schemas.openxmlformats.org/officeDocument/2006/relationships" xmlns:p="http://schemas.openxmlformats.org/presentationml/2006/main">
   <p:cSld>
     <p:spTree>
@@ -14333,7 +13083,7 @@
 </p:sld>
 </file>
 
-<file path=ppt/slides/slide24.xml><?xml version="1.0" encoding="utf-8"?>
+<file path=ppt/slides/slide23.xml><?xml version="1.0" encoding="utf-8"?>
 <p:sld xmlns:a="http://schemas.openxmlformats.org/drawingml/2006/main" xmlns:r="http://schemas.openxmlformats.org/officeDocument/2006/relationships" xmlns:p="http://schemas.openxmlformats.org/presentationml/2006/main">
   <p:cSld name="Slide 27">
     <p:bg>
@@ -14512,7 +13262,7 @@
           <a:bodyPr/>
           <a:lstStyle/>
           <a:p>
-            <a:endParaRPr lang="en-TH"/>
+            <a:endParaRPr lang="en-TH" sz="2400"/>
           </a:p>
         </p:txBody>
       </p:sp>
@@ -14541,7 +13291,7 @@
               <a:buNone/>
             </a:pPr>
             <a:r>
-              <a:rPr lang="en-US" sz="1700" b="1" dirty="0">
+              <a:rPr lang="en-US" sz="2000" b="1" dirty="0">
                 <a:solidFill>
                   <a:srgbClr val="00ADB5"/>
                 </a:solidFill>
@@ -14551,7 +13301,7 @@
               </a:rPr>
               <a:t>Sarabun</a:t>
             </a:r>
-            <a:endParaRPr lang="en-US" sz="1700" dirty="0"/>
+            <a:endParaRPr lang="en-US" sz="2000" dirty="0"/>
           </a:p>
         </p:txBody>
       </p:sp>
@@ -14580,7 +13330,7 @@
               <a:buNone/>
             </a:pPr>
             <a:r>
-              <a:rPr lang="en-US" sz="1450" dirty="0">
+              <a:rPr lang="en-US" dirty="0">
                 <a:solidFill>
                   <a:srgbClr val="393E46"/>
                 </a:solidFill>
@@ -14590,7 +13340,7 @@
               </a:rPr>
               <a:t>ทางการ อ่านง่าย เป็นกลาง</a:t>
             </a:r>
-            <a:endParaRPr lang="en-US" sz="1450" dirty="0"/>
+            <a:endParaRPr lang="en-US" dirty="0"/>
           </a:p>
         </p:txBody>
       </p:sp>
@@ -14619,7 +13369,7 @@
               <a:buNone/>
             </a:pPr>
             <a:r>
-              <a:rPr lang="en-US" sz="1450" dirty="0">
+              <a:rPr lang="en-US" dirty="0">
                 <a:solidFill>
                   <a:srgbClr val="8A94A6"/>
                 </a:solidFill>
@@ -14629,7 +13379,7 @@
               </a:rPr>
               <a:t>เอกสารวิชาการและราชการ</a:t>
             </a:r>
-            <a:endParaRPr lang="en-US" sz="1450" dirty="0"/>
+            <a:endParaRPr lang="en-US" dirty="0"/>
           </a:p>
         </p:txBody>
       </p:sp>
@@ -14670,7 +13420,7 @@
           <a:bodyPr/>
           <a:lstStyle/>
           <a:p>
-            <a:endParaRPr lang="en-TH"/>
+            <a:endParaRPr lang="en-TH" sz="2400"/>
           </a:p>
         </p:txBody>
       </p:sp>
@@ -14699,7 +13449,7 @@
               <a:buNone/>
             </a:pPr>
             <a:r>
-              <a:rPr lang="en-US" sz="1700" b="1" dirty="0">
+              <a:rPr lang="en-US" sz="2000" b="1" dirty="0">
                 <a:solidFill>
                   <a:srgbClr val="222831"/>
                 </a:solidFill>
@@ -14709,7 +13459,7 @@
               </a:rPr>
               <a:t>IBM Plex Sans Thai</a:t>
             </a:r>
-            <a:endParaRPr lang="en-US" sz="1700" dirty="0"/>
+            <a:endParaRPr lang="en-US" sz="2000" dirty="0"/>
           </a:p>
         </p:txBody>
       </p:sp>
@@ -14738,7 +13488,7 @@
               <a:buNone/>
             </a:pPr>
             <a:r>
-              <a:rPr lang="en-US" sz="1450" dirty="0">
+              <a:rPr lang="en-US" dirty="0">
                 <a:solidFill>
                   <a:srgbClr val="393E46"/>
                 </a:solidFill>
@@ -14748,7 +13498,7 @@
               </a:rPr>
               <a:t>สมัยใหม่ ตัวเลขคมชัด</a:t>
             </a:r>
-            <a:endParaRPr lang="en-US" sz="1450" dirty="0"/>
+            <a:endParaRPr lang="en-US" dirty="0"/>
           </a:p>
         </p:txBody>
       </p:sp>
@@ -14777,7 +13527,7 @@
               <a:buNone/>
             </a:pPr>
             <a:r>
-              <a:rPr lang="en-US" sz="1450" dirty="0">
+              <a:rPr lang="en-US" dirty="0">
                 <a:solidFill>
                   <a:srgbClr val="8A94A6"/>
                 </a:solidFill>
@@ -14787,7 +13537,7 @@
               </a:rPr>
               <a:t>ระบบข้อมูลและแดชบอร์ด</a:t>
             </a:r>
-            <a:endParaRPr lang="en-US" sz="1450" dirty="0"/>
+            <a:endParaRPr lang="en-US" dirty="0"/>
           </a:p>
         </p:txBody>
       </p:sp>
@@ -14828,7 +13578,7 @@
           <a:bodyPr/>
           <a:lstStyle/>
           <a:p>
-            <a:endParaRPr lang="en-TH"/>
+            <a:endParaRPr lang="en-TH" sz="2400"/>
           </a:p>
         </p:txBody>
       </p:sp>
@@ -14857,7 +13607,7 @@
               <a:buNone/>
             </a:pPr>
             <a:r>
-              <a:rPr lang="en-US" sz="1700" b="1" dirty="0">
+              <a:rPr lang="en-US" sz="2000" b="1" dirty="0">
                 <a:solidFill>
                   <a:srgbClr val="222831"/>
                 </a:solidFill>
@@ -14867,7 +13617,7 @@
               </a:rPr>
               <a:t>Noto Sans Thai</a:t>
             </a:r>
-            <a:endParaRPr lang="en-US" sz="1700" dirty="0"/>
+            <a:endParaRPr lang="en-US" sz="2000" dirty="0"/>
           </a:p>
         </p:txBody>
       </p:sp>
@@ -14896,7 +13646,7 @@
               <a:buNone/>
             </a:pPr>
             <a:r>
-              <a:rPr lang="en-US" sz="1450" dirty="0">
+              <a:rPr lang="en-US" dirty="0">
                 <a:solidFill>
                   <a:srgbClr val="393E46"/>
                 </a:solidFill>
@@ -14906,7 +13656,7 @@
               </a:rPr>
               <a:t>กลาง ๆ ปลอดภัย</a:t>
             </a:r>
-            <a:endParaRPr lang="en-US" sz="1450" dirty="0"/>
+            <a:endParaRPr lang="en-US" dirty="0"/>
           </a:p>
         </p:txBody>
       </p:sp>
@@ -14935,7 +13685,7 @@
               <a:buNone/>
             </a:pPr>
             <a:r>
-              <a:rPr lang="en-US" sz="1450" dirty="0">
+              <a:rPr lang="en-US" dirty="0">
                 <a:solidFill>
                   <a:srgbClr val="8A94A6"/>
                 </a:solidFill>
@@ -14945,7 +13695,7 @@
               </a:rPr>
               <a:t>ใช้ได้กับทุกงาน</a:t>
             </a:r>
-            <a:endParaRPr lang="en-US" sz="1450" dirty="0"/>
+            <a:endParaRPr lang="en-US" dirty="0"/>
           </a:p>
         </p:txBody>
       </p:sp>
@@ -14986,7 +13736,7 @@
           <a:bodyPr/>
           <a:lstStyle/>
           <a:p>
-            <a:endParaRPr lang="en-TH"/>
+            <a:endParaRPr lang="en-TH" sz="2400"/>
           </a:p>
         </p:txBody>
       </p:sp>
@@ -15015,7 +13765,7 @@
               <a:buNone/>
             </a:pPr>
             <a:r>
-              <a:rPr lang="en-US" sz="1700" b="1" dirty="0">
+              <a:rPr lang="en-US" sz="2000" b="1" dirty="0">
                 <a:solidFill>
                   <a:srgbClr val="222831"/>
                 </a:solidFill>
@@ -15025,7 +13775,7 @@
               </a:rPr>
               <a:t>Prompt</a:t>
             </a:r>
-            <a:endParaRPr lang="en-US" sz="1700" dirty="0"/>
+            <a:endParaRPr lang="en-US" sz="2000" dirty="0"/>
           </a:p>
         </p:txBody>
       </p:sp>
@@ -15054,7 +13804,7 @@
               <a:buNone/>
             </a:pPr>
             <a:r>
-              <a:rPr lang="en-US" sz="1450" dirty="0">
+              <a:rPr lang="en-US" dirty="0">
                 <a:solidFill>
                   <a:srgbClr val="393E46"/>
                 </a:solidFill>
@@ -15064,7 +13814,7 @@
               </a:rPr>
               <a:t>โมเดิร์น เรขาคณิต</a:t>
             </a:r>
-            <a:endParaRPr lang="en-US" sz="1450" dirty="0"/>
+            <a:endParaRPr lang="en-US" dirty="0"/>
           </a:p>
         </p:txBody>
       </p:sp>
@@ -15093,7 +13843,7 @@
               <a:buNone/>
             </a:pPr>
             <a:r>
-              <a:rPr lang="en-US" sz="1450" dirty="0">
+              <a:rPr lang="en-US" dirty="0">
                 <a:solidFill>
                   <a:srgbClr val="8A94A6"/>
                 </a:solidFill>
@@ -15103,7 +13853,7 @@
               </a:rPr>
               <a:t>เว็บองค์กรและงาน ปชส.</a:t>
             </a:r>
-            <a:endParaRPr lang="en-US" sz="1450" dirty="0"/>
+            <a:endParaRPr lang="en-US" dirty="0"/>
           </a:p>
         </p:txBody>
       </p:sp>
@@ -15144,7 +13894,7 @@
           <a:bodyPr/>
           <a:lstStyle/>
           <a:p>
-            <a:endParaRPr lang="en-TH"/>
+            <a:endParaRPr lang="en-TH" sz="2400"/>
           </a:p>
         </p:txBody>
       </p:sp>
@@ -15173,7 +13923,7 @@
               <a:buNone/>
             </a:pPr>
             <a:r>
-              <a:rPr lang="en-US" sz="1700" b="1" dirty="0">
+              <a:rPr lang="en-US" sz="2000" b="1" dirty="0">
                 <a:solidFill>
                   <a:srgbClr val="222831"/>
                 </a:solidFill>
@@ -15183,7 +13933,7 @@
               </a:rPr>
               <a:t>Kanit</a:t>
             </a:r>
-            <a:endParaRPr lang="en-US" sz="1700" dirty="0"/>
+            <a:endParaRPr lang="en-US" sz="2000" dirty="0"/>
           </a:p>
         </p:txBody>
       </p:sp>
@@ -15212,7 +13962,7 @@
               <a:buNone/>
             </a:pPr>
             <a:r>
-              <a:rPr lang="en-US" sz="1450" dirty="0">
+              <a:rPr lang="en-US" dirty="0">
                 <a:solidFill>
                   <a:srgbClr val="393E46"/>
                 </a:solidFill>
@@ -15222,7 +13972,7 @@
               </a:rPr>
               <a:t>หนักแน่น เด่นชัด</a:t>
             </a:r>
-            <a:endParaRPr lang="en-US" sz="1450" dirty="0"/>
+            <a:endParaRPr lang="en-US" dirty="0"/>
           </a:p>
         </p:txBody>
       </p:sp>
@@ -15251,7 +14001,7 @@
               <a:buNone/>
             </a:pPr>
             <a:r>
-              <a:rPr lang="en-US" sz="1450" dirty="0">
+              <a:rPr lang="en-US" dirty="0">
                 <a:solidFill>
                   <a:srgbClr val="8A94A6"/>
                 </a:solidFill>
@@ -15261,7 +14011,7 @@
               </a:rPr>
               <a:t>หัวข้อใหญ่ ไม่เหมาะเนื้อหายาว</a:t>
             </a:r>
-            <a:endParaRPr lang="en-US" sz="1450" dirty="0"/>
+            <a:endParaRPr lang="en-US" dirty="0"/>
           </a:p>
         </p:txBody>
       </p:sp>
@@ -15302,7 +14052,7 @@
           <a:bodyPr/>
           <a:lstStyle/>
           <a:p>
-            <a:endParaRPr lang="en-TH"/>
+            <a:endParaRPr lang="en-TH" sz="2400"/>
           </a:p>
         </p:txBody>
       </p:sp>
@@ -15331,7 +14081,7 @@
               <a:buNone/>
             </a:pPr>
             <a:r>
-              <a:rPr lang="en-US" sz="1800" b="1" dirty="0">
+              <a:rPr lang="en-US" sz="2400" b="1" dirty="0">
                 <a:solidFill>
                   <a:srgbClr val="222831"/>
                 </a:solidFill>
@@ -15341,7 +14091,7 @@
               </a:rPr>
               <a:t>กฎการใช้ฟอนต์ไทย</a:t>
             </a:r>
-            <a:endParaRPr lang="en-US" sz="1800" dirty="0"/>
+            <a:endParaRPr lang="en-US" sz="2400" dirty="0"/>
           </a:p>
         </p:txBody>
       </p:sp>
@@ -15373,7 +14123,7 @@
           <a:bodyPr/>
           <a:lstStyle/>
           <a:p>
-            <a:endParaRPr lang="en-TH"/>
+            <a:endParaRPr lang="en-TH" sz="2400"/>
           </a:p>
         </p:txBody>
       </p:sp>
@@ -15402,7 +14152,7 @@
               <a:buNone/>
             </a:pPr>
             <a:r>
-              <a:rPr lang="en-US" sz="1500" b="1" dirty="0">
+              <a:rPr lang="en-US" b="1" dirty="0">
                 <a:solidFill>
                   <a:srgbClr val="FFFFFF"/>
                 </a:solidFill>
@@ -15412,7 +14162,7 @@
               </a:rPr>
               <a:t>1</a:t>
             </a:r>
-            <a:endParaRPr lang="en-US" sz="1500" dirty="0"/>
+            <a:endParaRPr lang="en-US" dirty="0"/>
           </a:p>
         </p:txBody>
       </p:sp>
@@ -15441,7 +14191,7 @@
               <a:buNone/>
             </a:pPr>
             <a:r>
-              <a:rPr lang="en-US" sz="1500" dirty="0">
+              <a:rPr lang="en-US" dirty="0">
                 <a:solidFill>
                   <a:srgbClr val="393E46"/>
                 </a:solidFill>
@@ -15451,7 +14201,7 @@
               </a:rPr>
               <a:t>โหลดแค่ 2–3 น้ำหนัก (400 / 600 / 700) โหลดหมดทำให้เว็บช้า</a:t>
             </a:r>
-            <a:endParaRPr lang="en-US" sz="1500" dirty="0"/>
+            <a:endParaRPr lang="en-US" dirty="0"/>
           </a:p>
         </p:txBody>
       </p:sp>
@@ -15483,7 +14233,7 @@
           <a:bodyPr/>
           <a:lstStyle/>
           <a:p>
-            <a:endParaRPr lang="en-TH"/>
+            <a:endParaRPr lang="en-TH" sz="2400"/>
           </a:p>
         </p:txBody>
       </p:sp>
@@ -15512,7 +14262,7 @@
               <a:buNone/>
             </a:pPr>
             <a:r>
-              <a:rPr lang="en-US" sz="1500" b="1" dirty="0">
+              <a:rPr lang="en-US" b="1" dirty="0">
                 <a:solidFill>
                   <a:srgbClr val="FFFFFF"/>
                 </a:solidFill>
@@ -15522,7 +14272,7 @@
               </a:rPr>
               <a:t>2</a:t>
             </a:r>
-            <a:endParaRPr lang="en-US" sz="1500" dirty="0"/>
+            <a:endParaRPr lang="en-US" dirty="0"/>
           </a:p>
         </p:txBody>
       </p:sp>
@@ -15551,7 +14301,7 @@
               <a:buNone/>
             </a:pPr>
             <a:r>
-              <a:rPr lang="en-US" sz="1500" dirty="0">
+              <a:rPr lang="en-US" dirty="0">
                 <a:solidFill>
                   <a:srgbClr val="393E46"/>
                 </a:solidFill>
@@ -15561,7 +14311,7 @@
               </a:rPr>
               <a:t>ตั้ง line-height อย่างน้อย 1.6 เพราะภาษาไทยมีสระบนและล่าง ถ้าบรรทัดชิดจะชนกัน</a:t>
             </a:r>
-            <a:endParaRPr lang="en-US" sz="1500" dirty="0"/>
+            <a:endParaRPr lang="en-US" dirty="0"/>
           </a:p>
         </p:txBody>
       </p:sp>
@@ -15593,7 +14343,7 @@
           <a:bodyPr/>
           <a:lstStyle/>
           <a:p>
-            <a:endParaRPr lang="en-TH"/>
+            <a:endParaRPr lang="en-TH" sz="2400"/>
           </a:p>
         </p:txBody>
       </p:sp>
@@ -15622,7 +14372,7 @@
               <a:buNone/>
             </a:pPr>
             <a:r>
-              <a:rPr lang="en-US" sz="1500" b="1" dirty="0">
+              <a:rPr lang="en-US" b="1" dirty="0">
                 <a:solidFill>
                   <a:srgbClr val="FFFFFF"/>
                 </a:solidFill>
@@ -15632,7 +14382,7 @@
               </a:rPr>
               <a:t>3</a:t>
             </a:r>
-            <a:endParaRPr lang="en-US" sz="1500" dirty="0"/>
+            <a:endParaRPr lang="en-US" dirty="0"/>
           </a:p>
         </p:txBody>
       </p:sp>
@@ -15661,7 +14411,7 @@
               <a:buNone/>
             </a:pPr>
             <a:r>
-              <a:rPr lang="en-US" sz="1500" dirty="0">
+              <a:rPr lang="en-US" dirty="0">
                 <a:solidFill>
                   <a:srgbClr val="393E46"/>
                 </a:solidFill>
@@ -15671,7 +14421,7 @@
               </a:rPr>
               <a:t>ห้ามใช้ text-transform uppercase เพราะภาษาไทยไม่มีตัวพิมพ์ใหญ่</a:t>
             </a:r>
-            <a:endParaRPr lang="en-US" sz="1500" dirty="0"/>
+            <a:endParaRPr lang="en-US" dirty="0"/>
           </a:p>
         </p:txBody>
       </p:sp>
@@ -15722,7 +14472,7 @@
 </p:sld>
 </file>
 
-<file path=ppt/slides/slide25.xml><?xml version="1.0" encoding="utf-8"?>
+<file path=ppt/slides/slide24.xml><?xml version="1.0" encoding="utf-8"?>
 <p:sld xmlns:a="http://schemas.openxmlformats.org/drawingml/2006/main" xmlns:r="http://schemas.openxmlformats.org/officeDocument/2006/relationships" xmlns:p="http://schemas.openxmlformats.org/presentationml/2006/main">
   <p:cSld>
     <p:spTree>
@@ -15817,7 +14567,7 @@
 </p:sld>
 </file>
 
-<file path=ppt/slides/slide26.xml><?xml version="1.0" encoding="utf-8"?>
+<file path=ppt/slides/slide25.xml><?xml version="1.0" encoding="utf-8"?>
 <p:sld xmlns:a="http://schemas.openxmlformats.org/drawingml/2006/main" xmlns:r="http://schemas.openxmlformats.org/officeDocument/2006/relationships" xmlns:p="http://schemas.openxmlformats.org/presentationml/2006/main">
   <p:cSld name="Slide 29">
     <p:bg>
@@ -16038,7 +14788,7 @@
 </p:sld>
 </file>
 
-<file path=ppt/slides/slide27.xml><?xml version="1.0" encoding="utf-8"?>
+<file path=ppt/slides/slide26.xml><?xml version="1.0" encoding="utf-8"?>
 <p:sld xmlns:a="http://schemas.openxmlformats.org/drawingml/2006/main" xmlns:r="http://schemas.openxmlformats.org/officeDocument/2006/relationships" xmlns:p="http://schemas.openxmlformats.org/presentationml/2006/main">
   <p:cSld name="Slide 30">
     <p:bg>
@@ -17170,7 +15920,7 @@
 </p:sld>
 </file>
 
-<file path=ppt/slides/slide28.xml><?xml version="1.0" encoding="utf-8"?>
+<file path=ppt/slides/slide27.xml><?xml version="1.0" encoding="utf-8"?>
 <p:sld xmlns:a="http://schemas.openxmlformats.org/drawingml/2006/main" xmlns:r="http://schemas.openxmlformats.org/officeDocument/2006/relationships" xmlns:p="http://schemas.openxmlformats.org/presentationml/2006/main">
   <p:cSld>
     <p:spTree>
@@ -17242,7 +15992,7 @@
 </p:sld>
 </file>
 
-<file path=ppt/slides/slide29.xml><?xml version="1.0" encoding="utf-8"?>
+<file path=ppt/slides/slide28.xml><?xml version="1.0" encoding="utf-8"?>
 <p:sld xmlns:a="http://schemas.openxmlformats.org/drawingml/2006/main" xmlns:r="http://schemas.openxmlformats.org/officeDocument/2006/relationships" xmlns:p="http://schemas.openxmlformats.org/presentationml/2006/main">
   <p:cSld name="Slide 37">
     <p:bg>
@@ -17421,7 +16171,7 @@
           <a:bodyPr/>
           <a:lstStyle/>
           <a:p>
-            <a:endParaRPr lang="en-TH"/>
+            <a:endParaRPr lang="en-TH" sz="2000"/>
           </a:p>
         </p:txBody>
       </p:sp>
@@ -17453,7 +16203,7 @@
           <a:bodyPr/>
           <a:lstStyle/>
           <a:p>
-            <a:endParaRPr lang="en-TH"/>
+            <a:endParaRPr lang="en-TH" sz="2000"/>
           </a:p>
         </p:txBody>
       </p:sp>
@@ -17482,7 +16232,7 @@
               <a:buNone/>
             </a:pPr>
             <a:r>
-              <a:rPr lang="en-US" sz="1500" b="1" dirty="0">
+              <a:rPr lang="en-US" sz="1600" b="1" dirty="0">
                 <a:solidFill>
                   <a:srgbClr val="FFFFFF"/>
                 </a:solidFill>
@@ -17492,7 +16242,7 @@
               </a:rPr>
               <a:t>1</a:t>
             </a:r>
-            <a:endParaRPr lang="en-US" sz="1500" dirty="0"/>
+            <a:endParaRPr lang="en-US" sz="1600" dirty="0"/>
           </a:p>
         </p:txBody>
       </p:sp>
@@ -17521,7 +16271,7 @@
               <a:buNone/>
             </a:pPr>
             <a:r>
-              <a:rPr lang="en-US" sz="1800" b="1" dirty="0">
+              <a:rPr lang="en-US" sz="2000" b="1" dirty="0">
                 <a:solidFill>
                   <a:srgbClr val="222831"/>
                 </a:solidFill>
@@ -17531,7 +16281,7 @@
               </a:rPr>
               <a:t>AI ไม่รู้ว่าอะไรถูก ถ้าเราไม่บอก</a:t>
             </a:r>
-            <a:endParaRPr lang="en-US" sz="1800" dirty="0"/>
+            <a:endParaRPr lang="en-US" sz="2000" dirty="0"/>
           </a:p>
         </p:txBody>
       </p:sp>
@@ -17560,7 +16310,7 @@
               <a:buNone/>
             </a:pPr>
             <a:r>
-              <a:rPr lang="en-US" sz="1550" dirty="0">
+              <a:rPr lang="en-US" dirty="0">
                 <a:solidFill>
                   <a:srgbClr val="393E46"/>
                 </a:solidFill>
@@ -17570,7 +16320,7 @@
               </a:rPr>
               <a:t>มันทำตามสิ่งที่เขียนไว้ ไม่ใช่สิ่งที่เราคิดในใจ ความคลุมเครือทุกจุดจะกลายเป็นการเดา</a:t>
             </a:r>
-            <a:endParaRPr lang="en-US" sz="1550" dirty="0"/>
+            <a:endParaRPr lang="en-US" dirty="0"/>
           </a:p>
         </p:txBody>
       </p:sp>
@@ -17611,7 +16361,7 @@
           <a:bodyPr/>
           <a:lstStyle/>
           <a:p>
-            <a:endParaRPr lang="en-TH"/>
+            <a:endParaRPr lang="en-TH" sz="2000"/>
           </a:p>
         </p:txBody>
       </p:sp>
@@ -17643,7 +16393,7 @@
           <a:bodyPr/>
           <a:lstStyle/>
           <a:p>
-            <a:endParaRPr lang="en-TH"/>
+            <a:endParaRPr lang="en-TH" sz="2000"/>
           </a:p>
         </p:txBody>
       </p:sp>
@@ -17672,7 +16422,7 @@
               <a:buNone/>
             </a:pPr>
             <a:r>
-              <a:rPr lang="en-US" sz="1500" b="1" dirty="0">
+              <a:rPr lang="en-US" sz="1600" b="1" dirty="0">
                 <a:solidFill>
                   <a:srgbClr val="FFFFFF"/>
                 </a:solidFill>
@@ -17682,7 +16432,7 @@
               </a:rPr>
               <a:t>2</a:t>
             </a:r>
-            <a:endParaRPr lang="en-US" sz="1500" dirty="0"/>
+            <a:endParaRPr lang="en-US" sz="1600" dirty="0"/>
           </a:p>
         </p:txBody>
       </p:sp>
@@ -17711,7 +16461,7 @@
               <a:buNone/>
             </a:pPr>
             <a:r>
-              <a:rPr lang="en-US" sz="1800" b="1" dirty="0">
+              <a:rPr lang="en-US" sz="2000" b="1" dirty="0">
                 <a:solidFill>
                   <a:srgbClr val="222831"/>
                 </a:solidFill>
@@ -17721,7 +16471,7 @@
               </a:rPr>
               <a:t>โค้ดที่ได้ยังเป็นความรับผิดชอบของเรา</a:t>
             </a:r>
-            <a:endParaRPr lang="en-US" sz="1800" dirty="0"/>
+            <a:endParaRPr lang="en-US" sz="2000" dirty="0"/>
           </a:p>
         </p:txBody>
       </p:sp>
@@ -17750,7 +16500,7 @@
               <a:buNone/>
             </a:pPr>
             <a:r>
-              <a:rPr lang="en-US" sz="1550" dirty="0">
+              <a:rPr lang="en-US" dirty="0">
                 <a:solidFill>
                   <a:srgbClr val="393E46"/>
                 </a:solidFill>
@@ -17760,7 +16510,7 @@
               </a:rPr>
               <a:t>ต้องอ่าน ต้องทดสอบ ต้องเข้าใจก่อนนำไปใช้จริง โดยเฉพาะระบบที่มีข้อมูลของคนอื่น</a:t>
             </a:r>
-            <a:endParaRPr lang="en-US" sz="1550" dirty="0"/>
+            <a:endParaRPr lang="en-US" dirty="0"/>
           </a:p>
         </p:txBody>
       </p:sp>
@@ -17801,7 +16551,7 @@
           <a:bodyPr/>
           <a:lstStyle/>
           <a:p>
-            <a:endParaRPr lang="en-TH"/>
+            <a:endParaRPr lang="en-TH" sz="2000"/>
           </a:p>
         </p:txBody>
       </p:sp>
@@ -17833,7 +16583,7 @@
           <a:bodyPr/>
           <a:lstStyle/>
           <a:p>
-            <a:endParaRPr lang="en-TH"/>
+            <a:endParaRPr lang="en-TH" sz="2000"/>
           </a:p>
         </p:txBody>
       </p:sp>
@@ -17862,7 +16612,7 @@
               <a:buNone/>
             </a:pPr>
             <a:r>
-              <a:rPr lang="en-US" sz="1500" b="1" dirty="0">
+              <a:rPr lang="en-US" sz="1600" b="1" dirty="0">
                 <a:solidFill>
                   <a:srgbClr val="FFFFFF"/>
                 </a:solidFill>
@@ -17872,7 +16622,7 @@
               </a:rPr>
               <a:t>3</a:t>
             </a:r>
-            <a:endParaRPr lang="en-US" sz="1500" dirty="0"/>
+            <a:endParaRPr lang="en-US" sz="1600" dirty="0"/>
           </a:p>
         </p:txBody>
       </p:sp>
@@ -17901,7 +16651,7 @@
               <a:buNone/>
             </a:pPr>
             <a:r>
-              <a:rPr lang="en-US" sz="1800" b="1" dirty="0">
+              <a:rPr lang="en-US" sz="2000" b="1" dirty="0">
                 <a:solidFill>
                   <a:srgbClr val="222831"/>
                 </a:solidFill>
@@ -17911,7 +16661,7 @@
               </a:rPr>
               <a:t>ความลับห้ามอยู่ในโค้ด</a:t>
             </a:r>
-            <a:endParaRPr lang="en-US" sz="1800" dirty="0"/>
+            <a:endParaRPr lang="en-US" sz="2000" dirty="0"/>
           </a:p>
         </p:txBody>
       </p:sp>
@@ -17940,7 +16690,7 @@
               <a:buNone/>
             </a:pPr>
             <a:r>
-              <a:rPr lang="en-US" sz="1550" dirty="0">
+              <a:rPr lang="en-US" dirty="0">
                 <a:solidFill>
                   <a:srgbClr val="393E46"/>
                 </a:solidFill>
@@ -17950,7 +16700,7 @@
               </a:rPr>
               <a:t>กุญแจ รหัสผ่าน และข้อมูลส่วนบุคคล ต้องอยู่นอกโปรเจกต์เสมอ</a:t>
             </a:r>
-            <a:endParaRPr lang="en-US" sz="1550" dirty="0"/>
+            <a:endParaRPr lang="en-US" dirty="0"/>
           </a:p>
         </p:txBody>
       </p:sp>
@@ -17991,7 +16741,7 @@
           <a:bodyPr/>
           <a:lstStyle/>
           <a:p>
-            <a:endParaRPr lang="en-TH"/>
+            <a:endParaRPr lang="en-TH" sz="2000"/>
           </a:p>
         </p:txBody>
       </p:sp>
@@ -18023,7 +16773,7 @@
           <a:bodyPr/>
           <a:lstStyle/>
           <a:p>
-            <a:endParaRPr lang="en-TH"/>
+            <a:endParaRPr lang="en-TH" sz="2000"/>
           </a:p>
         </p:txBody>
       </p:sp>
@@ -18052,7 +16802,7 @@
               <a:buNone/>
             </a:pPr>
             <a:r>
-              <a:rPr lang="en-US" sz="1500" b="1" dirty="0">
+              <a:rPr lang="en-US" sz="1600" b="1" dirty="0">
                 <a:solidFill>
                   <a:srgbClr val="FFFFFF"/>
                 </a:solidFill>
@@ -18062,7 +16812,7 @@
               </a:rPr>
               <a:t>4</a:t>
             </a:r>
-            <a:endParaRPr lang="en-US" sz="1500" dirty="0"/>
+            <a:endParaRPr lang="en-US" sz="1600" dirty="0"/>
           </a:p>
         </p:txBody>
       </p:sp>
@@ -18091,7 +16841,7 @@
               <a:buNone/>
             </a:pPr>
             <a:r>
-              <a:rPr lang="en-US" sz="1800" b="1" dirty="0">
+              <a:rPr lang="en-US" sz="2000" b="1" dirty="0">
                 <a:solidFill>
                   <a:srgbClr val="222831"/>
                 </a:solidFill>
@@ -18101,7 +16851,7 @@
               </a:rPr>
               <a:t>ระบบจริงต้องมีสิทธิ์ผู้ใช้จริง</a:t>
             </a:r>
-            <a:endParaRPr lang="en-US" sz="1800" dirty="0"/>
+            <a:endParaRPr lang="en-US" sz="2000" dirty="0"/>
           </a:p>
         </p:txBody>
       </p:sp>
@@ -18130,17 +16880,899 @@
               <a:buNone/>
             </a:pPr>
             <a:r>
+              <a:rPr lang="en-US" dirty="0">
+                <a:solidFill>
+                  <a:srgbClr val="393E46"/>
+                </a:solidFill>
+                <a:latin typeface="TH Sarabun New" pitchFamily="34" charset="0"/>
+                <a:ea typeface="TH Sarabun New" pitchFamily="34" charset="-122"/>
+                <a:cs typeface="TH Sarabun New" pitchFamily="34" charset="-120"/>
+              </a:rPr>
+              <a:t>RLS แบบเปิดทุกสิทธิ์ใช้ได้เฉพาะการฝึกอบรม ระบบที่มีข้อมูลจริงต้องผูกกับผู้ใช้ที่ล็อกอินและคำนึงถึง PDPA</a:t>
+            </a:r>
+            <a:endParaRPr lang="en-US" dirty="0"/>
+          </a:p>
+        </p:txBody>
+      </p:sp>
+    </p:spTree>
+  </p:cSld>
+  <p:clrMapOvr>
+    <a:masterClrMapping/>
+  </p:clrMapOvr>
+</p:sld>
+</file>
+
+<file path=ppt/slides/slide29.xml><?xml version="1.0" encoding="utf-8"?>
+<p:sld xmlns:a="http://schemas.openxmlformats.org/drawingml/2006/main" xmlns:r="http://schemas.openxmlformats.org/officeDocument/2006/relationships" xmlns:p="http://schemas.openxmlformats.org/presentationml/2006/main">
+  <p:cSld name="Slide 38">
+    <p:bg>
+      <p:bgPr>
+        <a:solidFill>
+          <a:srgbClr val="222831"/>
+        </a:solidFill>
+        <a:effectLst/>
+      </p:bgPr>
+    </p:bg>
+    <p:spTree>
+      <p:nvGrpSpPr>
+        <p:cNvPr id="1" name=""/>
+        <p:cNvGrpSpPr/>
+        <p:nvPr/>
+      </p:nvGrpSpPr>
+      <p:grpSpPr>
+        <a:xfrm>
+          <a:off x="0" y="0"/>
+          <a:ext cx="0" cy="0"/>
+          <a:chOff x="0" y="0"/>
+          <a:chExt cx="0" cy="0"/>
+        </a:xfrm>
+      </p:grpSpPr>
+      <p:sp>
+        <p:nvSpPr>
+          <p:cNvPr id="2" name="Text 0"/>
+          <p:cNvSpPr/>
+          <p:nvPr/>
+        </p:nvSpPr>
+        <p:spPr>
+          <a:xfrm>
+            <a:off x="11018520" y="6263640"/>
+            <a:ext cx="548640" cy="274320"/>
+          </a:xfrm>
+          <a:prstGeom prst="rect">
+            <a:avLst/>
+          </a:prstGeom>
+          <a:noFill/>
+          <a:ln/>
+        </p:spPr>
+        <p:txBody>
+          <a:bodyPr wrap="square" lIns="0" tIns="0" rIns="0" bIns="0" rtlCol="0" anchor="ctr"/>
+          <a:lstStyle/>
+          <a:p>
+            <a:pPr marL="0" indent="0" algn="r">
+              <a:buNone/>
+            </a:pPr>
+            <a:r>
+              <a:rPr lang="en-US" sz="1200" dirty="0">
+                <a:solidFill>
+                  <a:srgbClr val="9AA3AD"/>
+                </a:solidFill>
+                <a:latin typeface="TH Sarabun New" pitchFamily="34" charset="0"/>
+                <a:ea typeface="TH Sarabun New" pitchFamily="34" charset="-122"/>
+                <a:cs typeface="TH Sarabun New" pitchFamily="34" charset="-120"/>
+              </a:rPr>
+              <a:t>38</a:t>
+            </a:r>
+            <a:endParaRPr lang="en-US" sz="1200" dirty="0"/>
+          </a:p>
+        </p:txBody>
+      </p:sp>
+      <p:sp>
+        <p:nvSpPr>
+          <p:cNvPr id="3" name="Text 1"/>
+          <p:cNvSpPr/>
+          <p:nvPr/>
+        </p:nvSpPr>
+        <p:spPr>
+          <a:xfrm>
+            <a:off x="594360" y="685800"/>
+            <a:ext cx="10972800" cy="566928"/>
+          </a:xfrm>
+          <a:prstGeom prst="rect">
+            <a:avLst/>
+          </a:prstGeom>
+          <a:noFill/>
+          <a:ln/>
+        </p:spPr>
+        <p:txBody>
+          <a:bodyPr wrap="square" lIns="0" tIns="0" rIns="0" bIns="0" rtlCol="0" anchor="ctr"/>
+          <a:lstStyle/>
+          <a:p>
+            <a:pPr marL="0" indent="0">
+              <a:buNone/>
+            </a:pPr>
+            <a:r>
+              <a:rPr lang="en-US" sz="3400" b="1" dirty="0">
+                <a:solidFill>
+                  <a:srgbClr val="FFFFFF"/>
+                </a:solidFill>
+                <a:latin typeface="TH Sarabun New" pitchFamily="34" charset="0"/>
+                <a:ea typeface="TH Sarabun New" pitchFamily="34" charset="-122"/>
+                <a:cs typeface="TH Sarabun New" pitchFamily="34" charset="-120"/>
+              </a:rPr>
+              <a:t>สรุปสิ่งที่ได้เรียนรู้</a:t>
+            </a:r>
+            <a:endParaRPr lang="en-US" sz="3400" dirty="0"/>
+          </a:p>
+        </p:txBody>
+      </p:sp>
+      <p:sp>
+        <p:nvSpPr>
+          <p:cNvPr id="4" name="Shape 2"/>
+          <p:cNvSpPr/>
+          <p:nvPr/>
+        </p:nvSpPr>
+        <p:spPr>
+          <a:xfrm>
+            <a:off x="594360" y="1481328"/>
+            <a:ext cx="10972800" cy="713232"/>
+          </a:xfrm>
+          <a:prstGeom prst="roundRect">
+            <a:avLst>
+              <a:gd name="adj" fmla="val 11538"/>
+            </a:avLst>
+          </a:prstGeom>
+          <a:solidFill>
+            <a:srgbClr val="2E3742"/>
+          </a:solidFill>
+          <a:ln w="12700">
+            <a:solidFill>
+              <a:srgbClr val="2E3742"/>
+            </a:solidFill>
+            <a:prstDash val="solid"/>
+          </a:ln>
+        </p:spPr>
+        <p:txBody>
+          <a:bodyPr/>
+          <a:lstStyle/>
+          <a:p>
+            <a:endParaRPr lang="en-TH"/>
+          </a:p>
+        </p:txBody>
+      </p:sp>
+      <p:sp>
+        <p:nvSpPr>
+          <p:cNvPr id="5" name="Shape 3"/>
+          <p:cNvSpPr/>
+          <p:nvPr/>
+        </p:nvSpPr>
+        <p:spPr>
+          <a:xfrm>
+            <a:off x="832104" y="1655064"/>
+            <a:ext cx="365760" cy="365760"/>
+          </a:xfrm>
+          <a:prstGeom prst="ellipse">
+            <a:avLst/>
+          </a:prstGeom>
+          <a:solidFill>
+            <a:srgbClr val="00ADB5"/>
+          </a:solidFill>
+          <a:ln w="12700">
+            <a:solidFill>
+              <a:srgbClr val="00ADB5"/>
+            </a:solidFill>
+            <a:prstDash val="solid"/>
+          </a:ln>
+        </p:spPr>
+        <p:txBody>
+          <a:bodyPr/>
+          <a:lstStyle/>
+          <a:p>
+            <a:endParaRPr lang="en-TH"/>
+          </a:p>
+        </p:txBody>
+      </p:sp>
+      <p:sp>
+        <p:nvSpPr>
+          <p:cNvPr id="6" name="Text 4"/>
+          <p:cNvSpPr/>
+          <p:nvPr/>
+        </p:nvSpPr>
+        <p:spPr>
+          <a:xfrm>
+            <a:off x="832104" y="1655064"/>
+            <a:ext cx="365760" cy="365760"/>
+          </a:xfrm>
+          <a:prstGeom prst="rect">
+            <a:avLst/>
+          </a:prstGeom>
+          <a:noFill/>
+          <a:ln/>
+        </p:spPr>
+        <p:txBody>
+          <a:bodyPr wrap="square" lIns="0" tIns="0" rIns="0" bIns="0" rtlCol="0" anchor="ctr"/>
+          <a:lstStyle/>
+          <a:p>
+            <a:pPr marL="0" indent="0" algn="ctr">
+              <a:buNone/>
+            </a:pPr>
+            <a:r>
+              <a:rPr lang="en-US" sz="1500" b="1" dirty="0">
+                <a:solidFill>
+                  <a:srgbClr val="FFFFFF"/>
+                </a:solidFill>
+                <a:latin typeface="TH Sarabun New" pitchFamily="34" charset="0"/>
+                <a:ea typeface="TH Sarabun New" pitchFamily="34" charset="-122"/>
+                <a:cs typeface="TH Sarabun New" pitchFamily="34" charset="-120"/>
+              </a:rPr>
+              <a:t>1</a:t>
+            </a:r>
+            <a:endParaRPr lang="en-US" sz="1500" dirty="0"/>
+          </a:p>
+        </p:txBody>
+      </p:sp>
+      <p:sp>
+        <p:nvSpPr>
+          <p:cNvPr id="7" name="Text 5"/>
+          <p:cNvSpPr/>
+          <p:nvPr/>
+        </p:nvSpPr>
+        <p:spPr>
+          <a:xfrm>
+            <a:off x="1344168" y="1481328"/>
+            <a:ext cx="4206240" cy="713232"/>
+          </a:xfrm>
+          <a:prstGeom prst="rect">
+            <a:avLst/>
+          </a:prstGeom>
+          <a:noFill/>
+          <a:ln/>
+        </p:spPr>
+        <p:txBody>
+          <a:bodyPr wrap="square" lIns="0" tIns="0" rIns="0" bIns="0" rtlCol="0" anchor="ctr"/>
+          <a:lstStyle/>
+          <a:p>
+            <a:pPr marL="0" indent="0">
+              <a:buNone/>
+            </a:pPr>
+            <a:r>
+              <a:rPr lang="en-US" sz="1750" b="1" dirty="0">
+                <a:solidFill>
+                  <a:srgbClr val="FFFFFF"/>
+                </a:solidFill>
+                <a:latin typeface="TH Sarabun New" pitchFamily="34" charset="0"/>
+                <a:ea typeface="TH Sarabun New" pitchFamily="34" charset="-122"/>
+                <a:cs typeface="TH Sarabun New" pitchFamily="34" charset="-120"/>
+              </a:rPr>
+              <a:t>เขียนสเปกก่อน แล้วค่อยสั่ง</a:t>
+            </a:r>
+            <a:endParaRPr lang="en-US" sz="1750" dirty="0"/>
+          </a:p>
+        </p:txBody>
+      </p:sp>
+      <p:sp>
+        <p:nvSpPr>
+          <p:cNvPr id="8" name="Text 6"/>
+          <p:cNvSpPr/>
+          <p:nvPr/>
+        </p:nvSpPr>
+        <p:spPr>
+          <a:xfrm>
+            <a:off x="5623560" y="1481328"/>
+            <a:ext cx="5669280" cy="713232"/>
+          </a:xfrm>
+          <a:prstGeom prst="rect">
+            <a:avLst/>
+          </a:prstGeom>
+          <a:noFill/>
+          <a:ln/>
+        </p:spPr>
+        <p:txBody>
+          <a:bodyPr wrap="square" lIns="0" tIns="0" rIns="0" bIns="0" rtlCol="0" anchor="ctr"/>
+          <a:lstStyle/>
+          <a:p>
+            <a:pPr marL="0" indent="0">
+              <a:buNone/>
+            </a:pPr>
+            <a:r>
               <a:rPr lang="en-US" sz="1550" dirty="0">
                 <a:solidFill>
-                  <a:srgbClr val="393E46"/>
-                </a:solidFill>
-                <a:latin typeface="TH Sarabun New" pitchFamily="34" charset="0"/>
-                <a:ea typeface="TH Sarabun New" pitchFamily="34" charset="-122"/>
-                <a:cs typeface="TH Sarabun New" pitchFamily="34" charset="-120"/>
-              </a:rPr>
-              <a:t>RLS แบบเปิดทุกสิทธิ์ใช้ได้เฉพาะการฝึกอบรม ระบบที่มีข้อมูลจริงต้องผูกกับผู้ใช้ที่ล็อกอินและคำนึงถึง PDPA</a:t>
+                  <a:srgbClr val="9FB0B3"/>
+                </a:solidFill>
+                <a:latin typeface="TH Sarabun New" pitchFamily="34" charset="0"/>
+                <a:ea typeface="TH Sarabun New" pitchFamily="34" charset="-122"/>
+                <a:cs typeface="TH Sarabun New" pitchFamily="34" charset="-120"/>
+              </a:rPr>
+              <a:t>SPEC ไฟล์เดียว + prompt สั้นที่อ้างหมายเลขหัวข้อ</a:t>
             </a:r>
             <a:endParaRPr lang="en-US" sz="1550" dirty="0"/>
+          </a:p>
+        </p:txBody>
+      </p:sp>
+      <p:sp>
+        <p:nvSpPr>
+          <p:cNvPr id="9" name="Shape 7"/>
+          <p:cNvSpPr/>
+          <p:nvPr/>
+        </p:nvSpPr>
+        <p:spPr>
+          <a:xfrm>
+            <a:off x="594360" y="2322576"/>
+            <a:ext cx="10972800" cy="713232"/>
+          </a:xfrm>
+          <a:prstGeom prst="roundRect">
+            <a:avLst>
+              <a:gd name="adj" fmla="val 11538"/>
+            </a:avLst>
+          </a:prstGeom>
+          <a:solidFill>
+            <a:srgbClr val="2E3742"/>
+          </a:solidFill>
+          <a:ln w="12700">
+            <a:solidFill>
+              <a:srgbClr val="2E3742"/>
+            </a:solidFill>
+            <a:prstDash val="solid"/>
+          </a:ln>
+        </p:spPr>
+        <p:txBody>
+          <a:bodyPr/>
+          <a:lstStyle/>
+          <a:p>
+            <a:endParaRPr lang="en-TH"/>
+          </a:p>
+        </p:txBody>
+      </p:sp>
+      <p:sp>
+        <p:nvSpPr>
+          <p:cNvPr id="10" name="Shape 8"/>
+          <p:cNvSpPr/>
+          <p:nvPr/>
+        </p:nvSpPr>
+        <p:spPr>
+          <a:xfrm>
+            <a:off x="832104" y="2496312"/>
+            <a:ext cx="365760" cy="365760"/>
+          </a:xfrm>
+          <a:prstGeom prst="ellipse">
+            <a:avLst/>
+          </a:prstGeom>
+          <a:solidFill>
+            <a:srgbClr val="00ADB5"/>
+          </a:solidFill>
+          <a:ln w="12700">
+            <a:solidFill>
+              <a:srgbClr val="00ADB5"/>
+            </a:solidFill>
+            <a:prstDash val="solid"/>
+          </a:ln>
+        </p:spPr>
+        <p:txBody>
+          <a:bodyPr/>
+          <a:lstStyle/>
+          <a:p>
+            <a:endParaRPr lang="en-TH"/>
+          </a:p>
+        </p:txBody>
+      </p:sp>
+      <p:sp>
+        <p:nvSpPr>
+          <p:cNvPr id="11" name="Text 9"/>
+          <p:cNvSpPr/>
+          <p:nvPr/>
+        </p:nvSpPr>
+        <p:spPr>
+          <a:xfrm>
+            <a:off x="832104" y="2496312"/>
+            <a:ext cx="365760" cy="365760"/>
+          </a:xfrm>
+          <a:prstGeom prst="rect">
+            <a:avLst/>
+          </a:prstGeom>
+          <a:noFill/>
+          <a:ln/>
+        </p:spPr>
+        <p:txBody>
+          <a:bodyPr wrap="square" lIns="0" tIns="0" rIns="0" bIns="0" rtlCol="0" anchor="ctr"/>
+          <a:lstStyle/>
+          <a:p>
+            <a:pPr marL="0" indent="0" algn="ctr">
+              <a:buNone/>
+            </a:pPr>
+            <a:r>
+              <a:rPr lang="en-US" sz="1500" b="1" dirty="0">
+                <a:solidFill>
+                  <a:srgbClr val="FFFFFF"/>
+                </a:solidFill>
+                <a:latin typeface="TH Sarabun New" pitchFamily="34" charset="0"/>
+                <a:ea typeface="TH Sarabun New" pitchFamily="34" charset="-122"/>
+                <a:cs typeface="TH Sarabun New" pitchFamily="34" charset="-120"/>
+              </a:rPr>
+              <a:t>2</a:t>
+            </a:r>
+            <a:endParaRPr lang="en-US" sz="1500" dirty="0"/>
+          </a:p>
+        </p:txBody>
+      </p:sp>
+      <p:sp>
+        <p:nvSpPr>
+          <p:cNvPr id="12" name="Text 10"/>
+          <p:cNvSpPr/>
+          <p:nvPr/>
+        </p:nvSpPr>
+        <p:spPr>
+          <a:xfrm>
+            <a:off x="1344168" y="2322576"/>
+            <a:ext cx="4206240" cy="713232"/>
+          </a:xfrm>
+          <a:prstGeom prst="rect">
+            <a:avLst/>
+          </a:prstGeom>
+          <a:noFill/>
+          <a:ln/>
+        </p:spPr>
+        <p:txBody>
+          <a:bodyPr wrap="square" lIns="0" tIns="0" rIns="0" bIns="0" rtlCol="0" anchor="ctr"/>
+          <a:lstStyle/>
+          <a:p>
+            <a:pPr marL="0" indent="0">
+              <a:buNone/>
+            </a:pPr>
+            <a:r>
+              <a:rPr lang="en-US" sz="1750" b="1" dirty="0">
+                <a:solidFill>
+                  <a:srgbClr val="FFFFFF"/>
+                </a:solidFill>
+                <a:latin typeface="TH Sarabun New" pitchFamily="34" charset="0"/>
+                <a:ea typeface="TH Sarabun New" pitchFamily="34" charset="-122"/>
+                <a:cs typeface="TH Sarabun New" pitchFamily="34" charset="-120"/>
+              </a:rPr>
+              <a:t>ออกแบบก่อนสร้าง</a:t>
+            </a:r>
+            <a:endParaRPr lang="en-US" sz="1750" dirty="0"/>
+          </a:p>
+        </p:txBody>
+      </p:sp>
+      <p:sp>
+        <p:nvSpPr>
+          <p:cNvPr id="13" name="Text 11"/>
+          <p:cNvSpPr/>
+          <p:nvPr/>
+        </p:nvSpPr>
+        <p:spPr>
+          <a:xfrm>
+            <a:off x="5623560" y="2322576"/>
+            <a:ext cx="5669280" cy="713232"/>
+          </a:xfrm>
+          <a:prstGeom prst="rect">
+            <a:avLst/>
+          </a:prstGeom>
+          <a:noFill/>
+          <a:ln/>
+        </p:spPr>
+        <p:txBody>
+          <a:bodyPr wrap="square" lIns="0" tIns="0" rIns="0" bIns="0" rtlCol="0" anchor="ctr"/>
+          <a:lstStyle/>
+          <a:p>
+            <a:pPr marL="0" indent="0">
+              <a:buNone/>
+            </a:pPr>
+            <a:r>
+              <a:rPr lang="en-US" sz="1550" dirty="0">
+                <a:solidFill>
+                  <a:srgbClr val="9FB0B3"/>
+                </a:solidFill>
+                <a:latin typeface="TH Sarabun New" pitchFamily="34" charset="0"/>
+                <a:ea typeface="TH Sarabun New" pitchFamily="34" charset="-122"/>
+                <a:cs typeface="TH Sarabun New" pitchFamily="34" charset="-120"/>
+              </a:rPr>
+              <a:t>สไตล์จาก uistyleguide · สีจาก colorhunt · ฟอนต์จาก Google Fonts</a:t>
+            </a:r>
+            <a:endParaRPr lang="en-US" sz="1550" dirty="0"/>
+          </a:p>
+        </p:txBody>
+      </p:sp>
+      <p:sp>
+        <p:nvSpPr>
+          <p:cNvPr id="14" name="Shape 12"/>
+          <p:cNvSpPr/>
+          <p:nvPr/>
+        </p:nvSpPr>
+        <p:spPr>
+          <a:xfrm>
+            <a:off x="594360" y="3163824"/>
+            <a:ext cx="10972800" cy="713232"/>
+          </a:xfrm>
+          <a:prstGeom prst="roundRect">
+            <a:avLst>
+              <a:gd name="adj" fmla="val 11538"/>
+            </a:avLst>
+          </a:prstGeom>
+          <a:solidFill>
+            <a:srgbClr val="2E3742"/>
+          </a:solidFill>
+          <a:ln w="12700">
+            <a:solidFill>
+              <a:srgbClr val="2E3742"/>
+            </a:solidFill>
+            <a:prstDash val="solid"/>
+          </a:ln>
+        </p:spPr>
+        <p:txBody>
+          <a:bodyPr/>
+          <a:lstStyle/>
+          <a:p>
+            <a:endParaRPr lang="en-TH"/>
+          </a:p>
+        </p:txBody>
+      </p:sp>
+      <p:sp>
+        <p:nvSpPr>
+          <p:cNvPr id="15" name="Shape 13"/>
+          <p:cNvSpPr/>
+          <p:nvPr/>
+        </p:nvSpPr>
+        <p:spPr>
+          <a:xfrm>
+            <a:off x="832104" y="3337560"/>
+            <a:ext cx="365760" cy="365760"/>
+          </a:xfrm>
+          <a:prstGeom prst="ellipse">
+            <a:avLst/>
+          </a:prstGeom>
+          <a:solidFill>
+            <a:srgbClr val="00ADB5"/>
+          </a:solidFill>
+          <a:ln w="12700">
+            <a:solidFill>
+              <a:srgbClr val="00ADB5"/>
+            </a:solidFill>
+            <a:prstDash val="solid"/>
+          </a:ln>
+        </p:spPr>
+        <p:txBody>
+          <a:bodyPr/>
+          <a:lstStyle/>
+          <a:p>
+            <a:endParaRPr lang="en-TH"/>
+          </a:p>
+        </p:txBody>
+      </p:sp>
+      <p:sp>
+        <p:nvSpPr>
+          <p:cNvPr id="16" name="Text 14"/>
+          <p:cNvSpPr/>
+          <p:nvPr/>
+        </p:nvSpPr>
+        <p:spPr>
+          <a:xfrm>
+            <a:off x="832104" y="3337560"/>
+            <a:ext cx="365760" cy="365760"/>
+          </a:xfrm>
+          <a:prstGeom prst="rect">
+            <a:avLst/>
+          </a:prstGeom>
+          <a:noFill/>
+          <a:ln/>
+        </p:spPr>
+        <p:txBody>
+          <a:bodyPr wrap="square" lIns="0" tIns="0" rIns="0" bIns="0" rtlCol="0" anchor="ctr"/>
+          <a:lstStyle/>
+          <a:p>
+            <a:pPr marL="0" indent="0" algn="ctr">
+              <a:buNone/>
+            </a:pPr>
+            <a:r>
+              <a:rPr lang="en-US" sz="1500" b="1" dirty="0">
+                <a:solidFill>
+                  <a:srgbClr val="FFFFFF"/>
+                </a:solidFill>
+                <a:latin typeface="TH Sarabun New" pitchFamily="34" charset="0"/>
+                <a:ea typeface="TH Sarabun New" pitchFamily="34" charset="-122"/>
+                <a:cs typeface="TH Sarabun New" pitchFamily="34" charset="-120"/>
+              </a:rPr>
+              <a:t>3</a:t>
+            </a:r>
+            <a:endParaRPr lang="en-US" sz="1500" dirty="0"/>
+          </a:p>
+        </p:txBody>
+      </p:sp>
+      <p:sp>
+        <p:nvSpPr>
+          <p:cNvPr id="17" name="Text 15"/>
+          <p:cNvSpPr/>
+          <p:nvPr/>
+        </p:nvSpPr>
+        <p:spPr>
+          <a:xfrm>
+            <a:off x="1344168" y="3163824"/>
+            <a:ext cx="4206240" cy="713232"/>
+          </a:xfrm>
+          <a:prstGeom prst="rect">
+            <a:avLst/>
+          </a:prstGeom>
+          <a:noFill/>
+          <a:ln/>
+        </p:spPr>
+        <p:txBody>
+          <a:bodyPr wrap="square" lIns="0" tIns="0" rIns="0" bIns="0" rtlCol="0" anchor="ctr"/>
+          <a:lstStyle/>
+          <a:p>
+            <a:pPr marL="0" indent="0">
+              <a:buNone/>
+            </a:pPr>
+            <a:r>
+              <a:rPr lang="en-US" sz="1750" b="1" dirty="0">
+                <a:solidFill>
+                  <a:srgbClr val="FFFFFF"/>
+                </a:solidFill>
+                <a:latin typeface="TH Sarabun New" pitchFamily="34" charset="0"/>
+                <a:ea typeface="TH Sarabun New" pitchFamily="34" charset="-122"/>
+                <a:cs typeface="TH Sarabun New" pitchFamily="34" charset="-120"/>
+              </a:rPr>
+              <a:t>สร้างทีละชั้น ตรวจทีละชั้น</a:t>
+            </a:r>
+            <a:endParaRPr lang="en-US" sz="1750" dirty="0"/>
+          </a:p>
+        </p:txBody>
+      </p:sp>
+      <p:sp>
+        <p:nvSpPr>
+          <p:cNvPr id="18" name="Text 16"/>
+          <p:cNvSpPr/>
+          <p:nvPr/>
+        </p:nvSpPr>
+        <p:spPr>
+          <a:xfrm>
+            <a:off x="5623560" y="3163824"/>
+            <a:ext cx="5669280" cy="713232"/>
+          </a:xfrm>
+          <a:prstGeom prst="rect">
+            <a:avLst/>
+          </a:prstGeom>
+          <a:noFill/>
+          <a:ln/>
+        </p:spPr>
+        <p:txBody>
+          <a:bodyPr wrap="square" lIns="0" tIns="0" rIns="0" bIns="0" rtlCol="0" anchor="ctr"/>
+          <a:lstStyle/>
+          <a:p>
+            <a:pPr marL="0" indent="0">
+              <a:buNone/>
+            </a:pPr>
+            <a:r>
+              <a:rPr lang="en-US" sz="1550" dirty="0">
+                <a:solidFill>
+                  <a:srgbClr val="9FB0B3"/>
+                </a:solidFill>
+                <a:latin typeface="TH Sarabun New" pitchFamily="34" charset="0"/>
+                <a:ea typeface="TH Sarabun New" pitchFamily="34" charset="-122"/>
+                <a:cs typeface="TH Sarabun New" pitchFamily="34" charset="-120"/>
+              </a:rPr>
+              <a:t>ตรวจด้วยเกณฑ์ยอมรับที่วัดผลได้</a:t>
+            </a:r>
+            <a:endParaRPr lang="en-US" sz="1550" dirty="0"/>
+          </a:p>
+        </p:txBody>
+      </p:sp>
+      <p:sp>
+        <p:nvSpPr>
+          <p:cNvPr id="19" name="Shape 17"/>
+          <p:cNvSpPr/>
+          <p:nvPr/>
+        </p:nvSpPr>
+        <p:spPr>
+          <a:xfrm>
+            <a:off x="594360" y="4005072"/>
+            <a:ext cx="10972800" cy="713232"/>
+          </a:xfrm>
+          <a:prstGeom prst="roundRect">
+            <a:avLst>
+              <a:gd name="adj" fmla="val 11538"/>
+            </a:avLst>
+          </a:prstGeom>
+          <a:solidFill>
+            <a:srgbClr val="2E3742"/>
+          </a:solidFill>
+          <a:ln w="12700">
+            <a:solidFill>
+              <a:srgbClr val="2E3742"/>
+            </a:solidFill>
+            <a:prstDash val="solid"/>
+          </a:ln>
+        </p:spPr>
+        <p:txBody>
+          <a:bodyPr/>
+          <a:lstStyle/>
+          <a:p>
+            <a:endParaRPr lang="en-TH"/>
+          </a:p>
+        </p:txBody>
+      </p:sp>
+      <p:sp>
+        <p:nvSpPr>
+          <p:cNvPr id="20" name="Shape 18"/>
+          <p:cNvSpPr/>
+          <p:nvPr/>
+        </p:nvSpPr>
+        <p:spPr>
+          <a:xfrm>
+            <a:off x="832104" y="4178808"/>
+            <a:ext cx="365760" cy="365760"/>
+          </a:xfrm>
+          <a:prstGeom prst="ellipse">
+            <a:avLst/>
+          </a:prstGeom>
+          <a:solidFill>
+            <a:srgbClr val="00ADB5"/>
+          </a:solidFill>
+          <a:ln w="12700">
+            <a:solidFill>
+              <a:srgbClr val="00ADB5"/>
+            </a:solidFill>
+            <a:prstDash val="solid"/>
+          </a:ln>
+        </p:spPr>
+        <p:txBody>
+          <a:bodyPr/>
+          <a:lstStyle/>
+          <a:p>
+            <a:endParaRPr lang="en-TH"/>
+          </a:p>
+        </p:txBody>
+      </p:sp>
+      <p:sp>
+        <p:nvSpPr>
+          <p:cNvPr id="21" name="Text 19"/>
+          <p:cNvSpPr/>
+          <p:nvPr/>
+        </p:nvSpPr>
+        <p:spPr>
+          <a:xfrm>
+            <a:off x="832104" y="4178808"/>
+            <a:ext cx="365760" cy="365760"/>
+          </a:xfrm>
+          <a:prstGeom prst="rect">
+            <a:avLst/>
+          </a:prstGeom>
+          <a:noFill/>
+          <a:ln/>
+        </p:spPr>
+        <p:txBody>
+          <a:bodyPr wrap="square" lIns="0" tIns="0" rIns="0" bIns="0" rtlCol="0" anchor="ctr"/>
+          <a:lstStyle/>
+          <a:p>
+            <a:pPr marL="0" indent="0" algn="ctr">
+              <a:buNone/>
+            </a:pPr>
+            <a:r>
+              <a:rPr lang="en-US" sz="1500" b="1" dirty="0">
+                <a:solidFill>
+                  <a:srgbClr val="FFFFFF"/>
+                </a:solidFill>
+                <a:latin typeface="TH Sarabun New" pitchFamily="34" charset="0"/>
+                <a:ea typeface="TH Sarabun New" pitchFamily="34" charset="-122"/>
+                <a:cs typeface="TH Sarabun New" pitchFamily="34" charset="-120"/>
+              </a:rPr>
+              <a:t>4</a:t>
+            </a:r>
+            <a:endParaRPr lang="en-US" sz="1500" dirty="0"/>
+          </a:p>
+        </p:txBody>
+      </p:sp>
+      <p:sp>
+        <p:nvSpPr>
+          <p:cNvPr id="22" name="Text 20"/>
+          <p:cNvSpPr/>
+          <p:nvPr/>
+        </p:nvSpPr>
+        <p:spPr>
+          <a:xfrm>
+            <a:off x="1344168" y="4005072"/>
+            <a:ext cx="4206240" cy="713232"/>
+          </a:xfrm>
+          <a:prstGeom prst="rect">
+            <a:avLst/>
+          </a:prstGeom>
+          <a:noFill/>
+          <a:ln/>
+        </p:spPr>
+        <p:txBody>
+          <a:bodyPr wrap="square" lIns="0" tIns="0" rIns="0" bIns="0" rtlCol="0" anchor="ctr"/>
+          <a:lstStyle/>
+          <a:p>
+            <a:pPr marL="0" indent="0">
+              <a:buNone/>
+            </a:pPr>
+            <a:r>
+              <a:rPr lang="en-US" sz="1750" b="1" dirty="0">
+                <a:solidFill>
+                  <a:srgbClr val="FFFFFF"/>
+                </a:solidFill>
+                <a:latin typeface="TH Sarabun New" pitchFamily="34" charset="0"/>
+                <a:ea typeface="TH Sarabun New" pitchFamily="34" charset="-122"/>
+                <a:cs typeface="TH Sarabun New" pitchFamily="34" charset="-120"/>
+              </a:rPr>
+              <a:t>งานเสร็จเมื่อคนอื่นเปิดใช้ได้</a:t>
+            </a:r>
+            <a:endParaRPr lang="en-US" sz="1750" dirty="0"/>
+          </a:p>
+        </p:txBody>
+      </p:sp>
+      <p:sp>
+        <p:nvSpPr>
+          <p:cNvPr id="23" name="Text 21"/>
+          <p:cNvSpPr/>
+          <p:nvPr/>
+        </p:nvSpPr>
+        <p:spPr>
+          <a:xfrm>
+            <a:off x="5623560" y="4005072"/>
+            <a:ext cx="5669280" cy="713232"/>
+          </a:xfrm>
+          <a:prstGeom prst="rect">
+            <a:avLst/>
+          </a:prstGeom>
+          <a:noFill/>
+          <a:ln/>
+        </p:spPr>
+        <p:txBody>
+          <a:bodyPr wrap="square" lIns="0" tIns="0" rIns="0" bIns="0" rtlCol="0" anchor="ctr"/>
+          <a:lstStyle/>
+          <a:p>
+            <a:pPr marL="0" indent="0">
+              <a:buNone/>
+            </a:pPr>
+            <a:r>
+              <a:rPr lang="en-US" sz="1550" dirty="0">
+                <a:solidFill>
+                  <a:srgbClr val="9FB0B3"/>
+                </a:solidFill>
+                <a:latin typeface="TH Sarabun New" pitchFamily="34" charset="0"/>
+                <a:ea typeface="TH Sarabun New" pitchFamily="34" charset="-122"/>
+                <a:cs typeface="TH Sarabun New" pitchFamily="34" charset="-120"/>
+              </a:rPr>
+              <a:t>ทดสอบ 3 ระดับ แล้วนำขึ้น GitHub Pages</a:t>
+            </a:r>
+            <a:endParaRPr lang="en-US" sz="1550" dirty="0"/>
+          </a:p>
+        </p:txBody>
+      </p:sp>
+      <p:sp>
+        <p:nvSpPr>
+          <p:cNvPr id="24" name="Text 22"/>
+          <p:cNvSpPr/>
+          <p:nvPr/>
+        </p:nvSpPr>
+        <p:spPr>
+          <a:xfrm>
+            <a:off x="594360" y="5029200"/>
+            <a:ext cx="10972800" cy="457200"/>
+          </a:xfrm>
+          <a:prstGeom prst="rect">
+            <a:avLst/>
+          </a:prstGeom>
+          <a:noFill/>
+          <a:ln/>
+        </p:spPr>
+        <p:txBody>
+          <a:bodyPr wrap="square" lIns="0" tIns="0" rIns="0" bIns="0" rtlCol="0" anchor="ctr"/>
+          <a:lstStyle/>
+          <a:p>
+            <a:pPr marL="0" indent="0">
+              <a:buNone/>
+            </a:pPr>
+            <a:r>
+              <a:rPr lang="en-US" sz="2600" b="1" dirty="0">
+                <a:solidFill>
+                  <a:srgbClr val="00ADB5"/>
+                </a:solidFill>
+                <a:latin typeface="TH Sarabun New" pitchFamily="34" charset="0"/>
+                <a:ea typeface="TH Sarabun New" pitchFamily="34" charset="-122"/>
+                <a:cs typeface="TH Sarabun New" pitchFamily="34" charset="-120"/>
+              </a:rPr>
+              <a:t>ขอบคุณครับ  ·  ช่วงถาม-ตอบ</a:t>
+            </a:r>
+            <a:endParaRPr lang="en-US" sz="2600" dirty="0"/>
           </a:p>
         </p:txBody>
       </p:sp>
@@ -18351,7 +17983,7 @@
               <a:buNone/>
             </a:pPr>
             <a:r>
-              <a:rPr lang="en-US" sz="1700" dirty="0">
+              <a:rPr lang="en-US" sz="2400" dirty="0">
                 <a:solidFill>
                   <a:srgbClr val="9FB0B3"/>
                 </a:solidFill>
@@ -18361,889 +17993,7 @@
               </a:rPr>
               <a:t>รู้ว่าเรากำลังสร้างอะไร ก่อนจะสั่งให้ AI สร้างให้</a:t>
             </a:r>
-            <a:endParaRPr lang="en-US" sz="1700" dirty="0"/>
-          </a:p>
-        </p:txBody>
-      </p:sp>
-    </p:spTree>
-  </p:cSld>
-  <p:clrMapOvr>
-    <a:masterClrMapping/>
-  </p:clrMapOvr>
-</p:sld>
-</file>
-
-<file path=ppt/slides/slide30.xml><?xml version="1.0" encoding="utf-8"?>
-<p:sld xmlns:a="http://schemas.openxmlformats.org/drawingml/2006/main" xmlns:r="http://schemas.openxmlformats.org/officeDocument/2006/relationships" xmlns:p="http://schemas.openxmlformats.org/presentationml/2006/main">
-  <p:cSld name="Slide 38">
-    <p:bg>
-      <p:bgPr>
-        <a:solidFill>
-          <a:srgbClr val="222831"/>
-        </a:solidFill>
-        <a:effectLst/>
-      </p:bgPr>
-    </p:bg>
-    <p:spTree>
-      <p:nvGrpSpPr>
-        <p:cNvPr id="1" name=""/>
-        <p:cNvGrpSpPr/>
-        <p:nvPr/>
-      </p:nvGrpSpPr>
-      <p:grpSpPr>
-        <a:xfrm>
-          <a:off x="0" y="0"/>
-          <a:ext cx="0" cy="0"/>
-          <a:chOff x="0" y="0"/>
-          <a:chExt cx="0" cy="0"/>
-        </a:xfrm>
-      </p:grpSpPr>
-      <p:sp>
-        <p:nvSpPr>
-          <p:cNvPr id="2" name="Text 0"/>
-          <p:cNvSpPr/>
-          <p:nvPr/>
-        </p:nvSpPr>
-        <p:spPr>
-          <a:xfrm>
-            <a:off x="11018520" y="6263640"/>
-            <a:ext cx="548640" cy="274320"/>
-          </a:xfrm>
-          <a:prstGeom prst="rect">
-            <a:avLst/>
-          </a:prstGeom>
-          <a:noFill/>
-          <a:ln/>
-        </p:spPr>
-        <p:txBody>
-          <a:bodyPr wrap="square" lIns="0" tIns="0" rIns="0" bIns="0" rtlCol="0" anchor="ctr"/>
-          <a:lstStyle/>
-          <a:p>
-            <a:pPr marL="0" indent="0" algn="r">
-              <a:buNone/>
-            </a:pPr>
-            <a:r>
-              <a:rPr lang="en-US" sz="1200" dirty="0">
-                <a:solidFill>
-                  <a:srgbClr val="9AA3AD"/>
-                </a:solidFill>
-                <a:latin typeface="TH Sarabun New" pitchFamily="34" charset="0"/>
-                <a:ea typeface="TH Sarabun New" pitchFamily="34" charset="-122"/>
-                <a:cs typeface="TH Sarabun New" pitchFamily="34" charset="-120"/>
-              </a:rPr>
-              <a:t>38</a:t>
-            </a:r>
-            <a:endParaRPr lang="en-US" sz="1200" dirty="0"/>
-          </a:p>
-        </p:txBody>
-      </p:sp>
-      <p:sp>
-        <p:nvSpPr>
-          <p:cNvPr id="3" name="Text 1"/>
-          <p:cNvSpPr/>
-          <p:nvPr/>
-        </p:nvSpPr>
-        <p:spPr>
-          <a:xfrm>
-            <a:off x="594360" y="685800"/>
-            <a:ext cx="10972800" cy="566928"/>
-          </a:xfrm>
-          <a:prstGeom prst="rect">
-            <a:avLst/>
-          </a:prstGeom>
-          <a:noFill/>
-          <a:ln/>
-        </p:spPr>
-        <p:txBody>
-          <a:bodyPr wrap="square" lIns="0" tIns="0" rIns="0" bIns="0" rtlCol="0" anchor="ctr"/>
-          <a:lstStyle/>
-          <a:p>
-            <a:pPr marL="0" indent="0">
-              <a:buNone/>
-            </a:pPr>
-            <a:r>
-              <a:rPr lang="en-US" sz="3400" b="1" dirty="0">
-                <a:solidFill>
-                  <a:srgbClr val="FFFFFF"/>
-                </a:solidFill>
-                <a:latin typeface="TH Sarabun New" pitchFamily="34" charset="0"/>
-                <a:ea typeface="TH Sarabun New" pitchFamily="34" charset="-122"/>
-                <a:cs typeface="TH Sarabun New" pitchFamily="34" charset="-120"/>
-              </a:rPr>
-              <a:t>สรุปสิ่งที่ได้เรียนรู้</a:t>
-            </a:r>
-            <a:endParaRPr lang="en-US" sz="3400" dirty="0"/>
-          </a:p>
-        </p:txBody>
-      </p:sp>
-      <p:sp>
-        <p:nvSpPr>
-          <p:cNvPr id="4" name="Shape 2"/>
-          <p:cNvSpPr/>
-          <p:nvPr/>
-        </p:nvSpPr>
-        <p:spPr>
-          <a:xfrm>
-            <a:off x="594360" y="1481328"/>
-            <a:ext cx="10972800" cy="713232"/>
-          </a:xfrm>
-          <a:prstGeom prst="roundRect">
-            <a:avLst>
-              <a:gd name="adj" fmla="val 11538"/>
-            </a:avLst>
-          </a:prstGeom>
-          <a:solidFill>
-            <a:srgbClr val="2E3742"/>
-          </a:solidFill>
-          <a:ln w="12700">
-            <a:solidFill>
-              <a:srgbClr val="2E3742"/>
-            </a:solidFill>
-            <a:prstDash val="solid"/>
-          </a:ln>
-        </p:spPr>
-        <p:txBody>
-          <a:bodyPr/>
-          <a:lstStyle/>
-          <a:p>
-            <a:endParaRPr lang="en-TH"/>
-          </a:p>
-        </p:txBody>
-      </p:sp>
-      <p:sp>
-        <p:nvSpPr>
-          <p:cNvPr id="5" name="Shape 3"/>
-          <p:cNvSpPr/>
-          <p:nvPr/>
-        </p:nvSpPr>
-        <p:spPr>
-          <a:xfrm>
-            <a:off x="832104" y="1655064"/>
-            <a:ext cx="365760" cy="365760"/>
-          </a:xfrm>
-          <a:prstGeom prst="ellipse">
-            <a:avLst/>
-          </a:prstGeom>
-          <a:solidFill>
-            <a:srgbClr val="00ADB5"/>
-          </a:solidFill>
-          <a:ln w="12700">
-            <a:solidFill>
-              <a:srgbClr val="00ADB5"/>
-            </a:solidFill>
-            <a:prstDash val="solid"/>
-          </a:ln>
-        </p:spPr>
-        <p:txBody>
-          <a:bodyPr/>
-          <a:lstStyle/>
-          <a:p>
-            <a:endParaRPr lang="en-TH"/>
-          </a:p>
-        </p:txBody>
-      </p:sp>
-      <p:sp>
-        <p:nvSpPr>
-          <p:cNvPr id="6" name="Text 4"/>
-          <p:cNvSpPr/>
-          <p:nvPr/>
-        </p:nvSpPr>
-        <p:spPr>
-          <a:xfrm>
-            <a:off x="832104" y="1655064"/>
-            <a:ext cx="365760" cy="365760"/>
-          </a:xfrm>
-          <a:prstGeom prst="rect">
-            <a:avLst/>
-          </a:prstGeom>
-          <a:noFill/>
-          <a:ln/>
-        </p:spPr>
-        <p:txBody>
-          <a:bodyPr wrap="square" lIns="0" tIns="0" rIns="0" bIns="0" rtlCol="0" anchor="ctr"/>
-          <a:lstStyle/>
-          <a:p>
-            <a:pPr marL="0" indent="0" algn="ctr">
-              <a:buNone/>
-            </a:pPr>
-            <a:r>
-              <a:rPr lang="en-US" sz="1500" b="1" dirty="0">
-                <a:solidFill>
-                  <a:srgbClr val="FFFFFF"/>
-                </a:solidFill>
-                <a:latin typeface="TH Sarabun New" pitchFamily="34" charset="0"/>
-                <a:ea typeface="TH Sarabun New" pitchFamily="34" charset="-122"/>
-                <a:cs typeface="TH Sarabun New" pitchFamily="34" charset="-120"/>
-              </a:rPr>
-              <a:t>1</a:t>
-            </a:r>
-            <a:endParaRPr lang="en-US" sz="1500" dirty="0"/>
-          </a:p>
-        </p:txBody>
-      </p:sp>
-      <p:sp>
-        <p:nvSpPr>
-          <p:cNvPr id="7" name="Text 5"/>
-          <p:cNvSpPr/>
-          <p:nvPr/>
-        </p:nvSpPr>
-        <p:spPr>
-          <a:xfrm>
-            <a:off x="1344168" y="1481328"/>
-            <a:ext cx="4206240" cy="713232"/>
-          </a:xfrm>
-          <a:prstGeom prst="rect">
-            <a:avLst/>
-          </a:prstGeom>
-          <a:noFill/>
-          <a:ln/>
-        </p:spPr>
-        <p:txBody>
-          <a:bodyPr wrap="square" lIns="0" tIns="0" rIns="0" bIns="0" rtlCol="0" anchor="ctr"/>
-          <a:lstStyle/>
-          <a:p>
-            <a:pPr marL="0" indent="0">
-              <a:buNone/>
-            </a:pPr>
-            <a:r>
-              <a:rPr lang="en-US" sz="1750" b="1" dirty="0">
-                <a:solidFill>
-                  <a:srgbClr val="FFFFFF"/>
-                </a:solidFill>
-                <a:latin typeface="TH Sarabun New" pitchFamily="34" charset="0"/>
-                <a:ea typeface="TH Sarabun New" pitchFamily="34" charset="-122"/>
-                <a:cs typeface="TH Sarabun New" pitchFamily="34" charset="-120"/>
-              </a:rPr>
-              <a:t>เขียนสเปกก่อน แล้วค่อยสั่ง</a:t>
-            </a:r>
-            <a:endParaRPr lang="en-US" sz="1750" dirty="0"/>
-          </a:p>
-        </p:txBody>
-      </p:sp>
-      <p:sp>
-        <p:nvSpPr>
-          <p:cNvPr id="8" name="Text 6"/>
-          <p:cNvSpPr/>
-          <p:nvPr/>
-        </p:nvSpPr>
-        <p:spPr>
-          <a:xfrm>
-            <a:off x="5623560" y="1481328"/>
-            <a:ext cx="5669280" cy="713232"/>
-          </a:xfrm>
-          <a:prstGeom prst="rect">
-            <a:avLst/>
-          </a:prstGeom>
-          <a:noFill/>
-          <a:ln/>
-        </p:spPr>
-        <p:txBody>
-          <a:bodyPr wrap="square" lIns="0" tIns="0" rIns="0" bIns="0" rtlCol="0" anchor="ctr"/>
-          <a:lstStyle/>
-          <a:p>
-            <a:pPr marL="0" indent="0">
-              <a:buNone/>
-            </a:pPr>
-            <a:r>
-              <a:rPr lang="en-US" sz="1550" dirty="0">
-                <a:solidFill>
-                  <a:srgbClr val="9FB0B3"/>
-                </a:solidFill>
-                <a:latin typeface="TH Sarabun New" pitchFamily="34" charset="0"/>
-                <a:ea typeface="TH Sarabun New" pitchFamily="34" charset="-122"/>
-                <a:cs typeface="TH Sarabun New" pitchFamily="34" charset="-120"/>
-              </a:rPr>
-              <a:t>SPEC ไฟล์เดียว + prompt สั้นที่อ้างหมายเลขหัวข้อ</a:t>
-            </a:r>
-            <a:endParaRPr lang="en-US" sz="1550" dirty="0"/>
-          </a:p>
-        </p:txBody>
-      </p:sp>
-      <p:sp>
-        <p:nvSpPr>
-          <p:cNvPr id="9" name="Shape 7"/>
-          <p:cNvSpPr/>
-          <p:nvPr/>
-        </p:nvSpPr>
-        <p:spPr>
-          <a:xfrm>
-            <a:off x="594360" y="2322576"/>
-            <a:ext cx="10972800" cy="713232"/>
-          </a:xfrm>
-          <a:prstGeom prst="roundRect">
-            <a:avLst>
-              <a:gd name="adj" fmla="val 11538"/>
-            </a:avLst>
-          </a:prstGeom>
-          <a:solidFill>
-            <a:srgbClr val="2E3742"/>
-          </a:solidFill>
-          <a:ln w="12700">
-            <a:solidFill>
-              <a:srgbClr val="2E3742"/>
-            </a:solidFill>
-            <a:prstDash val="solid"/>
-          </a:ln>
-        </p:spPr>
-        <p:txBody>
-          <a:bodyPr/>
-          <a:lstStyle/>
-          <a:p>
-            <a:endParaRPr lang="en-TH"/>
-          </a:p>
-        </p:txBody>
-      </p:sp>
-      <p:sp>
-        <p:nvSpPr>
-          <p:cNvPr id="10" name="Shape 8"/>
-          <p:cNvSpPr/>
-          <p:nvPr/>
-        </p:nvSpPr>
-        <p:spPr>
-          <a:xfrm>
-            <a:off x="832104" y="2496312"/>
-            <a:ext cx="365760" cy="365760"/>
-          </a:xfrm>
-          <a:prstGeom prst="ellipse">
-            <a:avLst/>
-          </a:prstGeom>
-          <a:solidFill>
-            <a:srgbClr val="00ADB5"/>
-          </a:solidFill>
-          <a:ln w="12700">
-            <a:solidFill>
-              <a:srgbClr val="00ADB5"/>
-            </a:solidFill>
-            <a:prstDash val="solid"/>
-          </a:ln>
-        </p:spPr>
-        <p:txBody>
-          <a:bodyPr/>
-          <a:lstStyle/>
-          <a:p>
-            <a:endParaRPr lang="en-TH"/>
-          </a:p>
-        </p:txBody>
-      </p:sp>
-      <p:sp>
-        <p:nvSpPr>
-          <p:cNvPr id="11" name="Text 9"/>
-          <p:cNvSpPr/>
-          <p:nvPr/>
-        </p:nvSpPr>
-        <p:spPr>
-          <a:xfrm>
-            <a:off x="832104" y="2496312"/>
-            <a:ext cx="365760" cy="365760"/>
-          </a:xfrm>
-          <a:prstGeom prst="rect">
-            <a:avLst/>
-          </a:prstGeom>
-          <a:noFill/>
-          <a:ln/>
-        </p:spPr>
-        <p:txBody>
-          <a:bodyPr wrap="square" lIns="0" tIns="0" rIns="0" bIns="0" rtlCol="0" anchor="ctr"/>
-          <a:lstStyle/>
-          <a:p>
-            <a:pPr marL="0" indent="0" algn="ctr">
-              <a:buNone/>
-            </a:pPr>
-            <a:r>
-              <a:rPr lang="en-US" sz="1500" b="1" dirty="0">
-                <a:solidFill>
-                  <a:srgbClr val="FFFFFF"/>
-                </a:solidFill>
-                <a:latin typeface="TH Sarabun New" pitchFamily="34" charset="0"/>
-                <a:ea typeface="TH Sarabun New" pitchFamily="34" charset="-122"/>
-                <a:cs typeface="TH Sarabun New" pitchFamily="34" charset="-120"/>
-              </a:rPr>
-              <a:t>2</a:t>
-            </a:r>
-            <a:endParaRPr lang="en-US" sz="1500" dirty="0"/>
-          </a:p>
-        </p:txBody>
-      </p:sp>
-      <p:sp>
-        <p:nvSpPr>
-          <p:cNvPr id="12" name="Text 10"/>
-          <p:cNvSpPr/>
-          <p:nvPr/>
-        </p:nvSpPr>
-        <p:spPr>
-          <a:xfrm>
-            <a:off x="1344168" y="2322576"/>
-            <a:ext cx="4206240" cy="713232"/>
-          </a:xfrm>
-          <a:prstGeom prst="rect">
-            <a:avLst/>
-          </a:prstGeom>
-          <a:noFill/>
-          <a:ln/>
-        </p:spPr>
-        <p:txBody>
-          <a:bodyPr wrap="square" lIns="0" tIns="0" rIns="0" bIns="0" rtlCol="0" anchor="ctr"/>
-          <a:lstStyle/>
-          <a:p>
-            <a:pPr marL="0" indent="0">
-              <a:buNone/>
-            </a:pPr>
-            <a:r>
-              <a:rPr lang="en-US" sz="1750" b="1" dirty="0">
-                <a:solidFill>
-                  <a:srgbClr val="FFFFFF"/>
-                </a:solidFill>
-                <a:latin typeface="TH Sarabun New" pitchFamily="34" charset="0"/>
-                <a:ea typeface="TH Sarabun New" pitchFamily="34" charset="-122"/>
-                <a:cs typeface="TH Sarabun New" pitchFamily="34" charset="-120"/>
-              </a:rPr>
-              <a:t>ออกแบบก่อนสร้าง</a:t>
-            </a:r>
-            <a:endParaRPr lang="en-US" sz="1750" dirty="0"/>
-          </a:p>
-        </p:txBody>
-      </p:sp>
-      <p:sp>
-        <p:nvSpPr>
-          <p:cNvPr id="13" name="Text 11"/>
-          <p:cNvSpPr/>
-          <p:nvPr/>
-        </p:nvSpPr>
-        <p:spPr>
-          <a:xfrm>
-            <a:off x="5623560" y="2322576"/>
-            <a:ext cx="5669280" cy="713232"/>
-          </a:xfrm>
-          <a:prstGeom prst="rect">
-            <a:avLst/>
-          </a:prstGeom>
-          <a:noFill/>
-          <a:ln/>
-        </p:spPr>
-        <p:txBody>
-          <a:bodyPr wrap="square" lIns="0" tIns="0" rIns="0" bIns="0" rtlCol="0" anchor="ctr"/>
-          <a:lstStyle/>
-          <a:p>
-            <a:pPr marL="0" indent="0">
-              <a:buNone/>
-            </a:pPr>
-            <a:r>
-              <a:rPr lang="en-US" sz="1550" dirty="0">
-                <a:solidFill>
-                  <a:srgbClr val="9FB0B3"/>
-                </a:solidFill>
-                <a:latin typeface="TH Sarabun New" pitchFamily="34" charset="0"/>
-                <a:ea typeface="TH Sarabun New" pitchFamily="34" charset="-122"/>
-                <a:cs typeface="TH Sarabun New" pitchFamily="34" charset="-120"/>
-              </a:rPr>
-              <a:t>สไตล์จาก uistyleguide · สีจาก colorhunt · ฟอนต์จาก Google Fonts</a:t>
-            </a:r>
-            <a:endParaRPr lang="en-US" sz="1550" dirty="0"/>
-          </a:p>
-        </p:txBody>
-      </p:sp>
-      <p:sp>
-        <p:nvSpPr>
-          <p:cNvPr id="14" name="Shape 12"/>
-          <p:cNvSpPr/>
-          <p:nvPr/>
-        </p:nvSpPr>
-        <p:spPr>
-          <a:xfrm>
-            <a:off x="594360" y="3163824"/>
-            <a:ext cx="10972800" cy="713232"/>
-          </a:xfrm>
-          <a:prstGeom prst="roundRect">
-            <a:avLst>
-              <a:gd name="adj" fmla="val 11538"/>
-            </a:avLst>
-          </a:prstGeom>
-          <a:solidFill>
-            <a:srgbClr val="2E3742"/>
-          </a:solidFill>
-          <a:ln w="12700">
-            <a:solidFill>
-              <a:srgbClr val="2E3742"/>
-            </a:solidFill>
-            <a:prstDash val="solid"/>
-          </a:ln>
-        </p:spPr>
-        <p:txBody>
-          <a:bodyPr/>
-          <a:lstStyle/>
-          <a:p>
-            <a:endParaRPr lang="en-TH"/>
-          </a:p>
-        </p:txBody>
-      </p:sp>
-      <p:sp>
-        <p:nvSpPr>
-          <p:cNvPr id="15" name="Shape 13"/>
-          <p:cNvSpPr/>
-          <p:nvPr/>
-        </p:nvSpPr>
-        <p:spPr>
-          <a:xfrm>
-            <a:off x="832104" y="3337560"/>
-            <a:ext cx="365760" cy="365760"/>
-          </a:xfrm>
-          <a:prstGeom prst="ellipse">
-            <a:avLst/>
-          </a:prstGeom>
-          <a:solidFill>
-            <a:srgbClr val="00ADB5"/>
-          </a:solidFill>
-          <a:ln w="12700">
-            <a:solidFill>
-              <a:srgbClr val="00ADB5"/>
-            </a:solidFill>
-            <a:prstDash val="solid"/>
-          </a:ln>
-        </p:spPr>
-        <p:txBody>
-          <a:bodyPr/>
-          <a:lstStyle/>
-          <a:p>
-            <a:endParaRPr lang="en-TH"/>
-          </a:p>
-        </p:txBody>
-      </p:sp>
-      <p:sp>
-        <p:nvSpPr>
-          <p:cNvPr id="16" name="Text 14"/>
-          <p:cNvSpPr/>
-          <p:nvPr/>
-        </p:nvSpPr>
-        <p:spPr>
-          <a:xfrm>
-            <a:off x="832104" y="3337560"/>
-            <a:ext cx="365760" cy="365760"/>
-          </a:xfrm>
-          <a:prstGeom prst="rect">
-            <a:avLst/>
-          </a:prstGeom>
-          <a:noFill/>
-          <a:ln/>
-        </p:spPr>
-        <p:txBody>
-          <a:bodyPr wrap="square" lIns="0" tIns="0" rIns="0" bIns="0" rtlCol="0" anchor="ctr"/>
-          <a:lstStyle/>
-          <a:p>
-            <a:pPr marL="0" indent="0" algn="ctr">
-              <a:buNone/>
-            </a:pPr>
-            <a:r>
-              <a:rPr lang="en-US" sz="1500" b="1" dirty="0">
-                <a:solidFill>
-                  <a:srgbClr val="FFFFFF"/>
-                </a:solidFill>
-                <a:latin typeface="TH Sarabun New" pitchFamily="34" charset="0"/>
-                <a:ea typeface="TH Sarabun New" pitchFamily="34" charset="-122"/>
-                <a:cs typeface="TH Sarabun New" pitchFamily="34" charset="-120"/>
-              </a:rPr>
-              <a:t>3</a:t>
-            </a:r>
-            <a:endParaRPr lang="en-US" sz="1500" dirty="0"/>
-          </a:p>
-        </p:txBody>
-      </p:sp>
-      <p:sp>
-        <p:nvSpPr>
-          <p:cNvPr id="17" name="Text 15"/>
-          <p:cNvSpPr/>
-          <p:nvPr/>
-        </p:nvSpPr>
-        <p:spPr>
-          <a:xfrm>
-            <a:off x="1344168" y="3163824"/>
-            <a:ext cx="4206240" cy="713232"/>
-          </a:xfrm>
-          <a:prstGeom prst="rect">
-            <a:avLst/>
-          </a:prstGeom>
-          <a:noFill/>
-          <a:ln/>
-        </p:spPr>
-        <p:txBody>
-          <a:bodyPr wrap="square" lIns="0" tIns="0" rIns="0" bIns="0" rtlCol="0" anchor="ctr"/>
-          <a:lstStyle/>
-          <a:p>
-            <a:pPr marL="0" indent="0">
-              <a:buNone/>
-            </a:pPr>
-            <a:r>
-              <a:rPr lang="en-US" sz="1750" b="1" dirty="0">
-                <a:solidFill>
-                  <a:srgbClr val="FFFFFF"/>
-                </a:solidFill>
-                <a:latin typeface="TH Sarabun New" pitchFamily="34" charset="0"/>
-                <a:ea typeface="TH Sarabun New" pitchFamily="34" charset="-122"/>
-                <a:cs typeface="TH Sarabun New" pitchFamily="34" charset="-120"/>
-              </a:rPr>
-              <a:t>สร้างทีละชั้น ตรวจทีละชั้น</a:t>
-            </a:r>
-            <a:endParaRPr lang="en-US" sz="1750" dirty="0"/>
-          </a:p>
-        </p:txBody>
-      </p:sp>
-      <p:sp>
-        <p:nvSpPr>
-          <p:cNvPr id="18" name="Text 16"/>
-          <p:cNvSpPr/>
-          <p:nvPr/>
-        </p:nvSpPr>
-        <p:spPr>
-          <a:xfrm>
-            <a:off x="5623560" y="3163824"/>
-            <a:ext cx="5669280" cy="713232"/>
-          </a:xfrm>
-          <a:prstGeom prst="rect">
-            <a:avLst/>
-          </a:prstGeom>
-          <a:noFill/>
-          <a:ln/>
-        </p:spPr>
-        <p:txBody>
-          <a:bodyPr wrap="square" lIns="0" tIns="0" rIns="0" bIns="0" rtlCol="0" anchor="ctr"/>
-          <a:lstStyle/>
-          <a:p>
-            <a:pPr marL="0" indent="0">
-              <a:buNone/>
-            </a:pPr>
-            <a:r>
-              <a:rPr lang="en-US" sz="1550" dirty="0">
-                <a:solidFill>
-                  <a:srgbClr val="9FB0B3"/>
-                </a:solidFill>
-                <a:latin typeface="TH Sarabun New" pitchFamily="34" charset="0"/>
-                <a:ea typeface="TH Sarabun New" pitchFamily="34" charset="-122"/>
-                <a:cs typeface="TH Sarabun New" pitchFamily="34" charset="-120"/>
-              </a:rPr>
-              <a:t>ตรวจด้วยเกณฑ์ยอมรับที่วัดผลได้</a:t>
-            </a:r>
-            <a:endParaRPr lang="en-US" sz="1550" dirty="0"/>
-          </a:p>
-        </p:txBody>
-      </p:sp>
-      <p:sp>
-        <p:nvSpPr>
-          <p:cNvPr id="19" name="Shape 17"/>
-          <p:cNvSpPr/>
-          <p:nvPr/>
-        </p:nvSpPr>
-        <p:spPr>
-          <a:xfrm>
-            <a:off x="594360" y="4005072"/>
-            <a:ext cx="10972800" cy="713232"/>
-          </a:xfrm>
-          <a:prstGeom prst="roundRect">
-            <a:avLst>
-              <a:gd name="adj" fmla="val 11538"/>
-            </a:avLst>
-          </a:prstGeom>
-          <a:solidFill>
-            <a:srgbClr val="2E3742"/>
-          </a:solidFill>
-          <a:ln w="12700">
-            <a:solidFill>
-              <a:srgbClr val="2E3742"/>
-            </a:solidFill>
-            <a:prstDash val="solid"/>
-          </a:ln>
-        </p:spPr>
-        <p:txBody>
-          <a:bodyPr/>
-          <a:lstStyle/>
-          <a:p>
-            <a:endParaRPr lang="en-TH"/>
-          </a:p>
-        </p:txBody>
-      </p:sp>
-      <p:sp>
-        <p:nvSpPr>
-          <p:cNvPr id="20" name="Shape 18"/>
-          <p:cNvSpPr/>
-          <p:nvPr/>
-        </p:nvSpPr>
-        <p:spPr>
-          <a:xfrm>
-            <a:off x="832104" y="4178808"/>
-            <a:ext cx="365760" cy="365760"/>
-          </a:xfrm>
-          <a:prstGeom prst="ellipse">
-            <a:avLst/>
-          </a:prstGeom>
-          <a:solidFill>
-            <a:srgbClr val="00ADB5"/>
-          </a:solidFill>
-          <a:ln w="12700">
-            <a:solidFill>
-              <a:srgbClr val="00ADB5"/>
-            </a:solidFill>
-            <a:prstDash val="solid"/>
-          </a:ln>
-        </p:spPr>
-        <p:txBody>
-          <a:bodyPr/>
-          <a:lstStyle/>
-          <a:p>
-            <a:endParaRPr lang="en-TH"/>
-          </a:p>
-        </p:txBody>
-      </p:sp>
-      <p:sp>
-        <p:nvSpPr>
-          <p:cNvPr id="21" name="Text 19"/>
-          <p:cNvSpPr/>
-          <p:nvPr/>
-        </p:nvSpPr>
-        <p:spPr>
-          <a:xfrm>
-            <a:off x="832104" y="4178808"/>
-            <a:ext cx="365760" cy="365760"/>
-          </a:xfrm>
-          <a:prstGeom prst="rect">
-            <a:avLst/>
-          </a:prstGeom>
-          <a:noFill/>
-          <a:ln/>
-        </p:spPr>
-        <p:txBody>
-          <a:bodyPr wrap="square" lIns="0" tIns="0" rIns="0" bIns="0" rtlCol="0" anchor="ctr"/>
-          <a:lstStyle/>
-          <a:p>
-            <a:pPr marL="0" indent="0" algn="ctr">
-              <a:buNone/>
-            </a:pPr>
-            <a:r>
-              <a:rPr lang="en-US" sz="1500" b="1" dirty="0">
-                <a:solidFill>
-                  <a:srgbClr val="FFFFFF"/>
-                </a:solidFill>
-                <a:latin typeface="TH Sarabun New" pitchFamily="34" charset="0"/>
-                <a:ea typeface="TH Sarabun New" pitchFamily="34" charset="-122"/>
-                <a:cs typeface="TH Sarabun New" pitchFamily="34" charset="-120"/>
-              </a:rPr>
-              <a:t>4</a:t>
-            </a:r>
-            <a:endParaRPr lang="en-US" sz="1500" dirty="0"/>
-          </a:p>
-        </p:txBody>
-      </p:sp>
-      <p:sp>
-        <p:nvSpPr>
-          <p:cNvPr id="22" name="Text 20"/>
-          <p:cNvSpPr/>
-          <p:nvPr/>
-        </p:nvSpPr>
-        <p:spPr>
-          <a:xfrm>
-            <a:off x="1344168" y="4005072"/>
-            <a:ext cx="4206240" cy="713232"/>
-          </a:xfrm>
-          <a:prstGeom prst="rect">
-            <a:avLst/>
-          </a:prstGeom>
-          <a:noFill/>
-          <a:ln/>
-        </p:spPr>
-        <p:txBody>
-          <a:bodyPr wrap="square" lIns="0" tIns="0" rIns="0" bIns="0" rtlCol="0" anchor="ctr"/>
-          <a:lstStyle/>
-          <a:p>
-            <a:pPr marL="0" indent="0">
-              <a:buNone/>
-            </a:pPr>
-            <a:r>
-              <a:rPr lang="en-US" sz="1750" b="1" dirty="0">
-                <a:solidFill>
-                  <a:srgbClr val="FFFFFF"/>
-                </a:solidFill>
-                <a:latin typeface="TH Sarabun New" pitchFamily="34" charset="0"/>
-                <a:ea typeface="TH Sarabun New" pitchFamily="34" charset="-122"/>
-                <a:cs typeface="TH Sarabun New" pitchFamily="34" charset="-120"/>
-              </a:rPr>
-              <a:t>งานเสร็จเมื่อคนอื่นเปิดใช้ได้</a:t>
-            </a:r>
-            <a:endParaRPr lang="en-US" sz="1750" dirty="0"/>
-          </a:p>
-        </p:txBody>
-      </p:sp>
-      <p:sp>
-        <p:nvSpPr>
-          <p:cNvPr id="23" name="Text 21"/>
-          <p:cNvSpPr/>
-          <p:nvPr/>
-        </p:nvSpPr>
-        <p:spPr>
-          <a:xfrm>
-            <a:off x="5623560" y="4005072"/>
-            <a:ext cx="5669280" cy="713232"/>
-          </a:xfrm>
-          <a:prstGeom prst="rect">
-            <a:avLst/>
-          </a:prstGeom>
-          <a:noFill/>
-          <a:ln/>
-        </p:spPr>
-        <p:txBody>
-          <a:bodyPr wrap="square" lIns="0" tIns="0" rIns="0" bIns="0" rtlCol="0" anchor="ctr"/>
-          <a:lstStyle/>
-          <a:p>
-            <a:pPr marL="0" indent="0">
-              <a:buNone/>
-            </a:pPr>
-            <a:r>
-              <a:rPr lang="en-US" sz="1550" dirty="0">
-                <a:solidFill>
-                  <a:srgbClr val="9FB0B3"/>
-                </a:solidFill>
-                <a:latin typeface="TH Sarabun New" pitchFamily="34" charset="0"/>
-                <a:ea typeface="TH Sarabun New" pitchFamily="34" charset="-122"/>
-                <a:cs typeface="TH Sarabun New" pitchFamily="34" charset="-120"/>
-              </a:rPr>
-              <a:t>ทดสอบ 3 ระดับ แล้วนำขึ้น GitHub Pages</a:t>
-            </a:r>
-            <a:endParaRPr lang="en-US" sz="1550" dirty="0"/>
-          </a:p>
-        </p:txBody>
-      </p:sp>
-      <p:sp>
-        <p:nvSpPr>
-          <p:cNvPr id="24" name="Text 22"/>
-          <p:cNvSpPr/>
-          <p:nvPr/>
-        </p:nvSpPr>
-        <p:spPr>
-          <a:xfrm>
-            <a:off x="594360" y="5029200"/>
-            <a:ext cx="10972800" cy="457200"/>
-          </a:xfrm>
-          <a:prstGeom prst="rect">
-            <a:avLst/>
-          </a:prstGeom>
-          <a:noFill/>
-          <a:ln/>
-        </p:spPr>
-        <p:txBody>
-          <a:bodyPr wrap="square" lIns="0" tIns="0" rIns="0" bIns="0" rtlCol="0" anchor="ctr"/>
-          <a:lstStyle/>
-          <a:p>
-            <a:pPr marL="0" indent="0">
-              <a:buNone/>
-            </a:pPr>
-            <a:r>
-              <a:rPr lang="en-US" sz="2600" b="1" dirty="0">
-                <a:solidFill>
-                  <a:srgbClr val="00ADB5"/>
-                </a:solidFill>
-                <a:latin typeface="TH Sarabun New" pitchFamily="34" charset="0"/>
-                <a:ea typeface="TH Sarabun New" pitchFamily="34" charset="-122"/>
-                <a:cs typeface="TH Sarabun New" pitchFamily="34" charset="-120"/>
-              </a:rPr>
-              <a:t>ขอบคุณครับ  ·  ช่วงถาม-ตอบ</a:t>
-            </a:r>
-            <a:endParaRPr lang="en-US" sz="2600" dirty="0"/>
+            <a:endParaRPr lang="en-US" sz="2400" dirty="0"/>
           </a:p>
         </p:txBody>
       </p:sp>
@@ -19395,7 +18145,7 @@
           <a:bodyPr/>
           <a:lstStyle/>
           <a:p>
-            <a:endParaRPr lang="en-TH"/>
+            <a:endParaRPr lang="en-TH" sz="2000"/>
           </a:p>
         </p:txBody>
       </p:sp>
@@ -19424,7 +18174,7 @@
               <a:buNone/>
             </a:pPr>
             <a:r>
-              <a:rPr lang="en-US" sz="2000" b="1" dirty="0">
+              <a:rPr lang="en-US" sz="2400" b="1" dirty="0">
                 <a:solidFill>
                   <a:srgbClr val="8A94A6"/>
                 </a:solidFill>
@@ -19434,7 +18184,7 @@
               </a:rPr>
               <a:t>เว็บไซต์ (Website)</a:t>
             </a:r>
-            <a:endParaRPr lang="en-US" sz="2000" dirty="0"/>
+            <a:endParaRPr lang="en-US" sz="2400" dirty="0"/>
           </a:p>
         </p:txBody>
       </p:sp>
@@ -19467,7 +18217,7 @@
               <a:buChar char="•"/>
             </a:pPr>
             <a:r>
-              <a:rPr lang="en-US" sz="1700" dirty="0">
+              <a:rPr lang="en-US" dirty="0">
                 <a:solidFill>
                   <a:srgbClr val="393E46"/>
                 </a:solidFill>
@@ -19477,7 +18227,7 @@
               </a:rPr>
               <a:t>ผู้ใช้อ่านอย่างเดียว</a:t>
             </a:r>
-            <a:endParaRPr lang="en-US" sz="1700" dirty="0"/>
+            <a:endParaRPr lang="en-US" dirty="0"/>
           </a:p>
           <a:p>
             <a:pPr marL="342900" indent="-342900">
@@ -19488,7 +18238,7 @@
               <a:buChar char="•"/>
             </a:pPr>
             <a:r>
-              <a:rPr lang="en-US" sz="1700" dirty="0">
+              <a:rPr lang="en-US" dirty="0">
                 <a:solidFill>
                   <a:srgbClr val="393E46"/>
                 </a:solidFill>
@@ -19498,7 +18248,7 @@
               </a:rPr>
               <a:t>เนื้อหาคงที่ แก้ต้องแก้ไฟล์</a:t>
             </a:r>
-            <a:endParaRPr lang="en-US" sz="1700" dirty="0"/>
+            <a:endParaRPr lang="en-US" dirty="0"/>
           </a:p>
           <a:p>
             <a:pPr marL="342900" indent="-342900">
@@ -19509,7 +18259,7 @@
               <a:buChar char="•"/>
             </a:pPr>
             <a:r>
-              <a:rPr lang="en-US" sz="1700" dirty="0">
+              <a:rPr lang="en-US" dirty="0">
                 <a:solidFill>
                   <a:srgbClr val="393E46"/>
                 </a:solidFill>
@@ -19519,7 +18269,7 @@
               </a:rPr>
               <a:t>ไม่จำเป็นต้องมีฐานข้อมูล</a:t>
             </a:r>
-            <a:endParaRPr lang="en-US" sz="1700" dirty="0"/>
+            <a:endParaRPr lang="en-US" dirty="0"/>
           </a:p>
           <a:p>
             <a:pPr marL="342900" indent="-342900">
@@ -19530,7 +18280,7 @@
               <a:buChar char="•"/>
             </a:pPr>
             <a:r>
-              <a:rPr lang="en-US" sz="1700" dirty="0">
+              <a:rPr lang="en-US" dirty="0">
                 <a:solidFill>
                   <a:srgbClr val="393E46"/>
                 </a:solidFill>
@@ -19540,7 +18290,7 @@
               </a:rPr>
               <a:t>ตัวอย่าง : หน้าประชาสัมพันธ์คณะ</a:t>
             </a:r>
-            <a:endParaRPr lang="en-US" sz="1700" dirty="0"/>
+            <a:endParaRPr lang="en-US" dirty="0"/>
           </a:p>
         </p:txBody>
       </p:sp>
@@ -19581,7 +18331,7 @@
           <a:bodyPr/>
           <a:lstStyle/>
           <a:p>
-            <a:endParaRPr lang="en-TH"/>
+            <a:endParaRPr lang="en-TH" sz="2000"/>
           </a:p>
         </p:txBody>
       </p:sp>
@@ -19610,7 +18360,7 @@
               <a:buNone/>
             </a:pPr>
             <a:r>
-              <a:rPr lang="en-US" sz="2000" b="1" dirty="0">
+              <a:rPr lang="en-US" sz="2400" b="1" dirty="0">
                 <a:solidFill>
                   <a:srgbClr val="00ADB5"/>
                 </a:solidFill>
@@ -19620,7 +18370,7 @@
               </a:rPr>
               <a:t>เว็บแอปพลิเคชัน (Web Application)</a:t>
             </a:r>
-            <a:endParaRPr lang="en-US" sz="2000" dirty="0"/>
+            <a:endParaRPr lang="en-US" sz="2400" dirty="0"/>
           </a:p>
         </p:txBody>
       </p:sp>
@@ -19653,7 +18403,7 @@
               <a:buChar char="•"/>
             </a:pPr>
             <a:r>
-              <a:rPr lang="en-US" sz="1700" dirty="0">
+              <a:rPr lang="en-US" dirty="0">
                 <a:solidFill>
                   <a:srgbClr val="393E46"/>
                 </a:solidFill>
@@ -19663,7 +18413,7 @@
               </a:rPr>
               <a:t>ผู้ใช้ป้อน แก้ไข และลบข้อมูลได้</a:t>
             </a:r>
-            <a:endParaRPr lang="en-US" sz="1700" dirty="0"/>
+            <a:endParaRPr lang="en-US" dirty="0"/>
           </a:p>
           <a:p>
             <a:pPr marL="342900" indent="-342900">
@@ -19674,7 +18424,7 @@
               <a:buChar char="•"/>
             </a:pPr>
             <a:r>
-              <a:rPr lang="en-US" sz="1700" dirty="0">
+              <a:rPr lang="en-US" dirty="0">
                 <a:solidFill>
                   <a:srgbClr val="393E46"/>
                 </a:solidFill>
@@ -19684,7 +18434,7 @@
               </a:rPr>
               <a:t>เนื้อหาเปลี่ยนตามข้อมูลในระบบ</a:t>
             </a:r>
-            <a:endParaRPr lang="en-US" sz="1700" dirty="0"/>
+            <a:endParaRPr lang="en-US" dirty="0"/>
           </a:p>
           <a:p>
             <a:pPr marL="342900" indent="-342900">
@@ -19695,7 +18445,7 @@
               <a:buChar char="•"/>
             </a:pPr>
             <a:r>
-              <a:rPr lang="en-US" sz="1700" dirty="0">
+              <a:rPr lang="en-US" dirty="0">
                 <a:solidFill>
                   <a:srgbClr val="393E46"/>
                 </a:solidFill>
@@ -19705,7 +18455,7 @@
               </a:rPr>
               <a:t>ต้องมีฐานข้อมูลเสมอ</a:t>
             </a:r>
-            <a:endParaRPr lang="en-US" sz="1700" dirty="0"/>
+            <a:endParaRPr lang="en-US" dirty="0"/>
           </a:p>
           <a:p>
             <a:pPr marL="342900" indent="-342900">
@@ -19716,7 +18466,7 @@
               <a:buChar char="•"/>
             </a:pPr>
             <a:r>
-              <a:rPr lang="en-US" sz="1700" dirty="0">
+              <a:rPr lang="en-US" dirty="0">
                 <a:solidFill>
                   <a:srgbClr val="393E46"/>
                 </a:solidFill>
@@ -19726,7 +18476,7 @@
               </a:rPr>
               <a:t>ตัวอย่าง : Funding Hub ที่เราจะสร้าง</a:t>
             </a:r>
-            <a:endParaRPr lang="en-US" sz="1700" dirty="0"/>
+            <a:endParaRPr lang="en-US" dirty="0"/>
           </a:p>
         </p:txBody>
       </p:sp>
@@ -19760,7 +18510,7 @@
           <a:bodyPr/>
           <a:lstStyle/>
           <a:p>
-            <a:endParaRPr lang="en-TH"/>
+            <a:endParaRPr lang="en-TH" sz="2000"/>
           </a:p>
         </p:txBody>
       </p:sp>
@@ -19789,7 +18539,7 @@
               <a:buNone/>
             </a:pPr>
             <a:r>
-              <a:rPr lang="en-US" sz="1700" dirty="0">
+              <a:rPr lang="en-US" dirty="0">
                 <a:solidFill>
                   <a:srgbClr val="222831"/>
                 </a:solidFill>
@@ -19799,7 +18549,7 @@
               </a:rPr>
               <a:t>Funding Hub เป็นเว็บแอปพลิเคชัน เพราะมีการ เพิ่ม / อ่าน / แก้ไข / ลบ ข้อมูล — เรียกรวมว่า CRUD</a:t>
             </a:r>
-            <a:endParaRPr lang="en-US" sz="1700" dirty="0"/>
+            <a:endParaRPr lang="en-US" dirty="0"/>
           </a:p>
         </p:txBody>
       </p:sp>
@@ -19939,7 +18689,7 @@
               <a:buNone/>
             </a:pPr>
             <a:r>
-              <a:rPr lang="en-US" sz="1700" dirty="0">
+              <a:rPr lang="en-US" dirty="0">
                 <a:solidFill>
                   <a:srgbClr val="8A94A6"/>
                 </a:solidFill>
@@ -19949,7 +18699,7 @@
               </a:rPr>
               <a:t>ทุกเว็บแอปในโลกนี้ประกอบด้วยสามชั้นนี้เสมอ ไม่ว่าจะใช้เทคโนโลยีอะไร</a:t>
             </a:r>
-            <a:endParaRPr lang="en-US" sz="1700" dirty="0"/>
+            <a:endParaRPr lang="en-US" dirty="0"/>
           </a:p>
         </p:txBody>
       </p:sp>
@@ -19990,7 +18740,7 @@
           <a:bodyPr/>
           <a:lstStyle/>
           <a:p>
-            <a:endParaRPr lang="en-TH"/>
+            <a:endParaRPr lang="en-TH" sz="2000"/>
           </a:p>
         </p:txBody>
       </p:sp>
@@ -20019,7 +18769,7 @@
               <a:buNone/>
             </a:pPr>
             <a:r>
-              <a:rPr lang="en-US" sz="2100" b="1" dirty="0">
+              <a:rPr lang="en-US" sz="2400" b="1" dirty="0">
                 <a:solidFill>
                   <a:srgbClr val="222831"/>
                 </a:solidFill>
@@ -20029,7 +18779,7 @@
               </a:rPr>
               <a:t>Frontend</a:t>
             </a:r>
-            <a:endParaRPr lang="en-US" sz="2100" dirty="0"/>
+            <a:endParaRPr lang="en-US" sz="2400" dirty="0"/>
           </a:p>
         </p:txBody>
       </p:sp>
@@ -20058,7 +18808,7 @@
               <a:buNone/>
             </a:pPr>
             <a:r>
-              <a:rPr lang="en-US" sz="1650" dirty="0">
+              <a:rPr lang="en-US" dirty="0">
                 <a:solidFill>
                   <a:srgbClr val="393E46"/>
                 </a:solidFill>
@@ -20068,7 +18818,7 @@
               </a:rPr>
               <a:t>สิ่งที่ผู้ใช้เห็นและกด</a:t>
             </a:r>
-            <a:endParaRPr lang="en-US" sz="1650" dirty="0"/>
+            <a:endParaRPr lang="en-US" dirty="0"/>
           </a:p>
         </p:txBody>
       </p:sp>
@@ -20097,7 +18847,7 @@
               <a:buNone/>
             </a:pPr>
             <a:r>
-              <a:rPr lang="en-US" sz="1450" dirty="0">
+              <a:rPr lang="en-US" sz="1600" dirty="0">
                 <a:solidFill>
                   <a:srgbClr val="8A94A6"/>
                 </a:solidFill>
@@ -20107,7 +18857,7 @@
               </a:rPr>
               <a:t>ทำงานในเบราว์เซอร์</a:t>
             </a:r>
-            <a:endParaRPr lang="en-US" sz="1450" dirty="0"/>
+            <a:endParaRPr lang="en-US" sz="1600" dirty="0"/>
           </a:p>
         </p:txBody>
       </p:sp>
@@ -20141,7 +18891,7 @@
           <a:bodyPr/>
           <a:lstStyle/>
           <a:p>
-            <a:endParaRPr lang="en-TH"/>
+            <a:endParaRPr lang="en-TH" sz="2000"/>
           </a:p>
         </p:txBody>
       </p:sp>
@@ -20170,7 +18920,7 @@
               <a:buNone/>
             </a:pPr>
             <a:r>
-              <a:rPr lang="en-US" sz="1300" dirty="0">
+              <a:rPr lang="en-US" sz="1400" dirty="0">
                 <a:solidFill>
                   <a:srgbClr val="D6F5F7"/>
                 </a:solidFill>
@@ -20180,7 +18930,7 @@
               </a:rPr>
               <a:t>React + Vite</a:t>
             </a:r>
-            <a:endParaRPr lang="en-US" sz="1300" dirty="0"/>
+            <a:endParaRPr lang="en-US" sz="1400" dirty="0"/>
           </a:p>
         </p:txBody>
       </p:sp>
@@ -20209,7 +18959,7 @@
               <a:buNone/>
             </a:pPr>
             <a:r>
-              <a:rPr lang="en-US" sz="2600" b="1" dirty="0">
+              <a:rPr lang="en-US" sz="2800" b="1" dirty="0">
                 <a:solidFill>
                   <a:srgbClr val="00ADB5"/>
                 </a:solidFill>
@@ -20219,7 +18969,7 @@
               </a:rPr>
               <a:t>→</a:t>
             </a:r>
-            <a:endParaRPr lang="en-US" sz="2600" dirty="0"/>
+            <a:endParaRPr lang="en-US" sz="2800" dirty="0"/>
           </a:p>
         </p:txBody>
       </p:sp>
@@ -20260,7 +19010,7 @@
           <a:bodyPr/>
           <a:lstStyle/>
           <a:p>
-            <a:endParaRPr lang="en-TH"/>
+            <a:endParaRPr lang="en-TH" sz="2000"/>
           </a:p>
         </p:txBody>
       </p:sp>
@@ -20289,7 +19039,7 @@
               <a:buNone/>
             </a:pPr>
             <a:r>
-              <a:rPr lang="en-US" sz="2100" b="1" dirty="0">
+              <a:rPr lang="en-US" sz="2400" b="1" dirty="0">
                 <a:solidFill>
                   <a:srgbClr val="00ADB5"/>
                 </a:solidFill>
@@ -20299,7 +19049,7 @@
               </a:rPr>
               <a:t>Backend / API</a:t>
             </a:r>
-            <a:endParaRPr lang="en-US" sz="2100" dirty="0"/>
+            <a:endParaRPr lang="en-US" sz="2400" dirty="0"/>
           </a:p>
         </p:txBody>
       </p:sp>
@@ -20328,7 +19078,7 @@
               <a:buNone/>
             </a:pPr>
             <a:r>
-              <a:rPr lang="en-US" sz="1650" dirty="0">
+              <a:rPr lang="en-US" dirty="0">
                 <a:solidFill>
                   <a:srgbClr val="393E46"/>
                 </a:solidFill>
@@ -20338,7 +19088,7 @@
               </a:rPr>
               <a:t>รับคำขอ ตรวจสิทธิ์ ส่งข้อมูล</a:t>
             </a:r>
-            <a:endParaRPr lang="en-US" sz="1650" dirty="0"/>
+            <a:endParaRPr lang="en-US" dirty="0"/>
           </a:p>
         </p:txBody>
       </p:sp>
@@ -20367,7 +19117,7 @@
               <a:buNone/>
             </a:pPr>
             <a:r>
-              <a:rPr lang="en-US" sz="1450" dirty="0">
+              <a:rPr lang="en-US" sz="1600" dirty="0">
                 <a:solidFill>
                   <a:srgbClr val="8A94A6"/>
                 </a:solidFill>
@@ -20377,7 +19127,7 @@
               </a:rPr>
               <a:t>ทำงานบนเซิร์ฟเวอร์</a:t>
             </a:r>
-            <a:endParaRPr lang="en-US" sz="1450" dirty="0"/>
+            <a:endParaRPr lang="en-US" sz="1600" dirty="0"/>
           </a:p>
         </p:txBody>
       </p:sp>
@@ -20411,7 +19161,7 @@
           <a:bodyPr/>
           <a:lstStyle/>
           <a:p>
-            <a:endParaRPr lang="en-TH"/>
+            <a:endParaRPr lang="en-TH" sz="2000"/>
           </a:p>
         </p:txBody>
       </p:sp>
@@ -20440,7 +19190,7 @@
               <a:buNone/>
             </a:pPr>
             <a:r>
-              <a:rPr lang="en-US" sz="1300" dirty="0">
+              <a:rPr lang="en-US" sz="1400" dirty="0">
                 <a:solidFill>
                   <a:srgbClr val="D6F5F7"/>
                 </a:solidFill>
@@ -20450,7 +19200,7 @@
               </a:rPr>
               <a:t>Supabase API</a:t>
             </a:r>
-            <a:endParaRPr lang="en-US" sz="1300" dirty="0"/>
+            <a:endParaRPr lang="en-US" sz="1400" dirty="0"/>
           </a:p>
         </p:txBody>
       </p:sp>
@@ -20479,7 +19229,7 @@
               <a:buNone/>
             </a:pPr>
             <a:r>
-              <a:rPr lang="en-US" sz="2600" b="1" dirty="0">
+              <a:rPr lang="en-US" sz="2800" b="1" dirty="0">
                 <a:solidFill>
                   <a:srgbClr val="00ADB5"/>
                 </a:solidFill>
@@ -20489,7 +19239,7 @@
               </a:rPr>
               <a:t>→</a:t>
             </a:r>
-            <a:endParaRPr lang="en-US" sz="2600" dirty="0"/>
+            <a:endParaRPr lang="en-US" sz="2800" dirty="0"/>
           </a:p>
         </p:txBody>
       </p:sp>
@@ -20530,7 +19280,7 @@
           <a:bodyPr/>
           <a:lstStyle/>
           <a:p>
-            <a:endParaRPr lang="en-TH"/>
+            <a:endParaRPr lang="en-TH" sz="2000"/>
           </a:p>
         </p:txBody>
       </p:sp>
@@ -20559,7 +19309,7 @@
               <a:buNone/>
             </a:pPr>
             <a:r>
-              <a:rPr lang="en-US" sz="2100" b="1" dirty="0">
+              <a:rPr lang="en-US" sz="2400" b="1" dirty="0">
                 <a:solidFill>
                   <a:srgbClr val="222831"/>
                 </a:solidFill>
@@ -20569,7 +19319,7 @@
               </a:rPr>
               <a:t>Database</a:t>
             </a:r>
-            <a:endParaRPr lang="en-US" sz="2100" dirty="0"/>
+            <a:endParaRPr lang="en-US" sz="2400" dirty="0"/>
           </a:p>
         </p:txBody>
       </p:sp>
@@ -20598,7 +19348,7 @@
               <a:buNone/>
             </a:pPr>
             <a:r>
-              <a:rPr lang="en-US" sz="1650" dirty="0">
+              <a:rPr lang="en-US" dirty="0">
                 <a:solidFill>
                   <a:srgbClr val="393E46"/>
                 </a:solidFill>
@@ -20608,7 +19358,7 @@
               </a:rPr>
               <a:t>เก็บข้อมูลอย่างถาวร</a:t>
             </a:r>
-            <a:endParaRPr lang="en-US" sz="1650" dirty="0"/>
+            <a:endParaRPr lang="en-US" dirty="0"/>
           </a:p>
         </p:txBody>
       </p:sp>
@@ -20637,7 +19387,7 @@
               <a:buNone/>
             </a:pPr>
             <a:r>
-              <a:rPr lang="en-US" sz="1450" dirty="0">
+              <a:rPr lang="en-US" sz="1600" dirty="0">
                 <a:solidFill>
                   <a:srgbClr val="8A94A6"/>
                 </a:solidFill>
@@ -20647,7 +19397,7 @@
               </a:rPr>
               <a:t>ทำงานบนเซิร์ฟเวอร์</a:t>
             </a:r>
-            <a:endParaRPr lang="en-US" sz="1450" dirty="0"/>
+            <a:endParaRPr lang="en-US" sz="1600" dirty="0"/>
           </a:p>
         </p:txBody>
       </p:sp>
@@ -20681,7 +19431,7 @@
           <a:bodyPr/>
           <a:lstStyle/>
           <a:p>
-            <a:endParaRPr lang="en-TH"/>
+            <a:endParaRPr lang="en-TH" sz="2000"/>
           </a:p>
         </p:txBody>
       </p:sp>
@@ -20710,7 +19460,7 @@
               <a:buNone/>
             </a:pPr>
             <a:r>
-              <a:rPr lang="en-US" sz="1300" dirty="0">
+              <a:rPr lang="en-US" sz="1400" dirty="0">
                 <a:solidFill>
                   <a:srgbClr val="D6F5F7"/>
                 </a:solidFill>
@@ -20720,7 +19470,7 @@
               </a:rPr>
               <a:t>PostgreSQL</a:t>
             </a:r>
-            <a:endParaRPr lang="en-US" sz="1300" dirty="0"/>
+            <a:endParaRPr lang="en-US" sz="1400" dirty="0"/>
           </a:p>
         </p:txBody>
       </p:sp>
@@ -21193,7 +19943,7 @@
               <a:buNone/>
             </a:pPr>
             <a:r>
-              <a:rPr lang="en-US" sz="1250" dirty="0">
+              <a:rPr lang="en-US" sz="1250" b="1" dirty="0">
                 <a:solidFill>
                   <a:srgbClr val="D6F5F7"/>
                 </a:solidFill>
@@ -21203,7 +19953,7 @@
               </a:rPr>
               <a:t>CSS</a:t>
             </a:r>
-            <a:endParaRPr lang="en-US" sz="1250" dirty="0"/>
+            <a:endParaRPr lang="en-US" sz="1250" b="1" dirty="0"/>
           </a:p>
         </p:txBody>
       </p:sp>
@@ -21808,7 +20558,7 @@
           <a:bodyPr/>
           <a:lstStyle/>
           <a:p>
-            <a:endParaRPr lang="en-TH"/>
+            <a:endParaRPr lang="en-TH" sz="2800"/>
           </a:p>
         </p:txBody>
       </p:sp>
@@ -21837,7 +20587,7 @@
               <a:buNone/>
             </a:pPr>
             <a:r>
-              <a:rPr lang="en-US" sz="1500" b="1" dirty="0">
+              <a:rPr lang="en-US" sz="2000" b="1" dirty="0">
                 <a:solidFill>
                   <a:srgbClr val="8A94A6"/>
                 </a:solidFill>
@@ -21847,7 +20597,7 @@
               </a:rPr>
               <a:t>การกระทำ</a:t>
             </a:r>
-            <a:endParaRPr lang="en-US" sz="1500" dirty="0"/>
+            <a:endParaRPr lang="en-US" sz="2000" dirty="0"/>
           </a:p>
         </p:txBody>
       </p:sp>
@@ -21876,7 +20626,7 @@
               <a:buNone/>
             </a:pPr>
             <a:r>
-              <a:rPr lang="en-US" sz="1500" b="1" dirty="0">
+              <a:rPr lang="en-US" sz="2000" b="1" dirty="0">
                 <a:solidFill>
                   <a:srgbClr val="8A94A6"/>
                 </a:solidFill>
@@ -21886,7 +20636,7 @@
               </a:rPr>
               <a:t>HTTP</a:t>
             </a:r>
-            <a:endParaRPr lang="en-US" sz="1500" dirty="0"/>
+            <a:endParaRPr lang="en-US" sz="2000" dirty="0"/>
           </a:p>
         </p:txBody>
       </p:sp>
@@ -21915,7 +20665,7 @@
               <a:buNone/>
             </a:pPr>
             <a:r>
-              <a:rPr lang="en-US" sz="1500" b="1" dirty="0">
+              <a:rPr lang="en-US" sz="2000" b="1" dirty="0">
                 <a:solidFill>
                   <a:srgbClr val="8A94A6"/>
                 </a:solidFill>
@@ -21925,7 +20675,7 @@
               </a:rPr>
               <a:t>คำสั่ง SQL</a:t>
             </a:r>
-            <a:endParaRPr lang="en-US" sz="1500" dirty="0"/>
+            <a:endParaRPr lang="en-US" sz="2000" dirty="0"/>
           </a:p>
         </p:txBody>
       </p:sp>
@@ -21954,7 +20704,7 @@
               <a:buNone/>
             </a:pPr>
             <a:r>
-              <a:rPr lang="en-US" sz="1500" b="1" dirty="0">
+              <a:rPr lang="en-US" sz="2000" b="1" dirty="0">
                 <a:solidFill>
                   <a:srgbClr val="8A94A6"/>
                 </a:solidFill>
@@ -21964,7 +20714,7 @@
               </a:rPr>
               <a:t>ในระบบของเรา</a:t>
             </a:r>
-            <a:endParaRPr lang="en-US" sz="1500" dirty="0"/>
+            <a:endParaRPr lang="en-US" sz="2000" dirty="0"/>
           </a:p>
         </p:txBody>
       </p:sp>
@@ -21998,7 +20748,7 @@
           <a:bodyPr/>
           <a:lstStyle/>
           <a:p>
-            <a:endParaRPr lang="en-TH"/>
+            <a:endParaRPr lang="en-TH" sz="2800"/>
           </a:p>
         </p:txBody>
       </p:sp>
@@ -22027,7 +20777,7 @@
               <a:buNone/>
             </a:pPr>
             <a:r>
-              <a:rPr lang="en-US" sz="1650" b="1" dirty="0">
+              <a:rPr lang="en-US" sz="2400" b="1" dirty="0">
                 <a:solidFill>
                   <a:srgbClr val="222831"/>
                 </a:solidFill>
@@ -22037,7 +20787,7 @@
               </a:rPr>
               <a:t>Create — สร้าง</a:t>
             </a:r>
-            <a:endParaRPr lang="en-US" sz="1650" dirty="0"/>
+            <a:endParaRPr lang="en-US" sz="2400" dirty="0"/>
           </a:p>
         </p:txBody>
       </p:sp>
@@ -22066,7 +20816,7 @@
               <a:buNone/>
             </a:pPr>
             <a:r>
-              <a:rPr lang="en-US" sz="1250" dirty="0">
+              <a:rPr lang="en-US" dirty="0">
                 <a:solidFill>
                   <a:srgbClr val="00ADB5"/>
                 </a:solidFill>
@@ -22076,7 +20826,7 @@
               </a:rPr>
               <a:t>POST</a:t>
             </a:r>
-            <a:endParaRPr lang="en-US" sz="1250" dirty="0"/>
+            <a:endParaRPr lang="en-US" dirty="0"/>
           </a:p>
         </p:txBody>
       </p:sp>
@@ -22105,7 +20855,7 @@
               <a:buNone/>
             </a:pPr>
             <a:r>
-              <a:rPr lang="en-US" sz="1250" dirty="0">
+              <a:rPr lang="en-US" dirty="0">
                 <a:solidFill>
                   <a:srgbClr val="00ADB5"/>
                 </a:solidFill>
@@ -22115,7 +20865,7 @@
               </a:rPr>
               <a:t>insert</a:t>
             </a:r>
-            <a:endParaRPr lang="en-US" sz="1250" dirty="0"/>
+            <a:endParaRPr lang="en-US" dirty="0"/>
           </a:p>
         </p:txBody>
       </p:sp>
@@ -22144,7 +20894,7 @@
               <a:buNone/>
             </a:pPr>
             <a:r>
-              <a:rPr lang="en-US" sz="1650" dirty="0">
+              <a:rPr lang="en-US" sz="2400" dirty="0">
                 <a:solidFill>
                   <a:srgbClr val="393E46"/>
                 </a:solidFill>
@@ -22154,7 +20904,7 @@
               </a:rPr>
               <a:t>เพิ่มทุนวิจัยใหม่</a:t>
             </a:r>
-            <a:endParaRPr lang="en-US" sz="1650" dirty="0"/>
+            <a:endParaRPr lang="en-US" sz="2400" dirty="0"/>
           </a:p>
         </p:txBody>
       </p:sp>
@@ -22188,7 +20938,7 @@
           <a:bodyPr/>
           <a:lstStyle/>
           <a:p>
-            <a:endParaRPr lang="en-TH"/>
+            <a:endParaRPr lang="en-TH" sz="2800"/>
           </a:p>
         </p:txBody>
       </p:sp>
@@ -22217,7 +20967,7 @@
               <a:buNone/>
             </a:pPr>
             <a:r>
-              <a:rPr lang="en-US" sz="1650" b="1" dirty="0">
+              <a:rPr lang="en-US" sz="2400" b="1" dirty="0">
                 <a:solidFill>
                   <a:srgbClr val="222831"/>
                 </a:solidFill>
@@ -22227,7 +20977,7 @@
               </a:rPr>
               <a:t>Read — อ่าน</a:t>
             </a:r>
-            <a:endParaRPr lang="en-US" sz="1650" dirty="0"/>
+            <a:endParaRPr lang="en-US" sz="2400" dirty="0"/>
           </a:p>
         </p:txBody>
       </p:sp>
@@ -22256,7 +21006,7 @@
               <a:buNone/>
             </a:pPr>
             <a:r>
-              <a:rPr lang="en-US" sz="1250" dirty="0">
+              <a:rPr lang="en-US" dirty="0">
                 <a:solidFill>
                   <a:srgbClr val="00ADB5"/>
                 </a:solidFill>
@@ -22266,7 +21016,7 @@
               </a:rPr>
               <a:t>GET</a:t>
             </a:r>
-            <a:endParaRPr lang="en-US" sz="1250" dirty="0"/>
+            <a:endParaRPr lang="en-US" dirty="0"/>
           </a:p>
         </p:txBody>
       </p:sp>
@@ -22295,7 +21045,7 @@
               <a:buNone/>
             </a:pPr>
             <a:r>
-              <a:rPr lang="en-US" sz="1250" dirty="0">
+              <a:rPr lang="en-US" dirty="0">
                 <a:solidFill>
                   <a:srgbClr val="00ADB5"/>
                 </a:solidFill>
@@ -22305,7 +21055,7 @@
               </a:rPr>
               <a:t>select</a:t>
             </a:r>
-            <a:endParaRPr lang="en-US" sz="1250" dirty="0"/>
+            <a:endParaRPr lang="en-US" dirty="0"/>
           </a:p>
         </p:txBody>
       </p:sp>
@@ -22334,7 +21084,7 @@
               <a:buNone/>
             </a:pPr>
             <a:r>
-              <a:rPr lang="en-US" sz="1650" dirty="0">
+              <a:rPr lang="en-US" sz="2400" dirty="0">
                 <a:solidFill>
                   <a:srgbClr val="393E46"/>
                 </a:solidFill>
@@ -22344,7 +21094,7 @@
               </a:rPr>
               <a:t>แสดงรายการทุน</a:t>
             </a:r>
-            <a:endParaRPr lang="en-US" sz="1650" dirty="0"/>
+            <a:endParaRPr lang="en-US" sz="2400" dirty="0"/>
           </a:p>
         </p:txBody>
       </p:sp>
@@ -22378,7 +21128,7 @@
           <a:bodyPr/>
           <a:lstStyle/>
           <a:p>
-            <a:endParaRPr lang="en-TH"/>
+            <a:endParaRPr lang="en-TH" sz="2800"/>
           </a:p>
         </p:txBody>
       </p:sp>
@@ -22407,7 +21157,7 @@
               <a:buNone/>
             </a:pPr>
             <a:r>
-              <a:rPr lang="en-US" sz="1650" b="1" dirty="0">
+              <a:rPr lang="en-US" sz="2400" b="1" dirty="0">
                 <a:solidFill>
                   <a:srgbClr val="222831"/>
                 </a:solidFill>
@@ -22417,7 +21167,7 @@
               </a:rPr>
               <a:t>Update — แก้ไข</a:t>
             </a:r>
-            <a:endParaRPr lang="en-US" sz="1650" dirty="0"/>
+            <a:endParaRPr lang="en-US" sz="2400" dirty="0"/>
           </a:p>
         </p:txBody>
       </p:sp>
@@ -22446,7 +21196,7 @@
               <a:buNone/>
             </a:pPr>
             <a:r>
-              <a:rPr lang="en-US" sz="1250" dirty="0">
+              <a:rPr lang="en-US" dirty="0">
                 <a:solidFill>
                   <a:srgbClr val="00ADB5"/>
                 </a:solidFill>
@@ -22456,7 +21206,7 @@
               </a:rPr>
               <a:t>PATCH</a:t>
             </a:r>
-            <a:endParaRPr lang="en-US" sz="1250" dirty="0"/>
+            <a:endParaRPr lang="en-US" dirty="0"/>
           </a:p>
         </p:txBody>
       </p:sp>
@@ -22485,7 +21235,7 @@
               <a:buNone/>
             </a:pPr>
             <a:r>
-              <a:rPr lang="en-US" sz="1250" dirty="0">
+              <a:rPr lang="en-US" dirty="0">
                 <a:solidFill>
                   <a:srgbClr val="00ADB5"/>
                 </a:solidFill>
@@ -22495,7 +21245,7 @@
               </a:rPr>
               <a:t>update</a:t>
             </a:r>
-            <a:endParaRPr lang="en-US" sz="1250" dirty="0"/>
+            <a:endParaRPr lang="en-US" dirty="0"/>
           </a:p>
         </p:txBody>
       </p:sp>
@@ -22524,7 +21274,7 @@
               <a:buNone/>
             </a:pPr>
             <a:r>
-              <a:rPr lang="en-US" sz="1650" dirty="0">
+              <a:rPr lang="en-US" sz="2400" dirty="0">
                 <a:solidFill>
                   <a:srgbClr val="393E46"/>
                 </a:solidFill>
@@ -22534,7 +21284,7 @@
               </a:rPr>
               <a:t>แก้ข้อมูลทุนเดิม</a:t>
             </a:r>
-            <a:endParaRPr lang="en-US" sz="1650" dirty="0"/>
+            <a:endParaRPr lang="en-US" sz="2400" dirty="0"/>
           </a:p>
         </p:txBody>
       </p:sp>
@@ -22568,7 +21318,7 @@
           <a:bodyPr/>
           <a:lstStyle/>
           <a:p>
-            <a:endParaRPr lang="en-TH"/>
+            <a:endParaRPr lang="en-TH" sz="2800"/>
           </a:p>
         </p:txBody>
       </p:sp>
@@ -22597,7 +21347,7 @@
               <a:buNone/>
             </a:pPr>
             <a:r>
-              <a:rPr lang="en-US" sz="1650" b="1" dirty="0">
+              <a:rPr lang="en-US" sz="2400" b="1" dirty="0">
                 <a:solidFill>
                   <a:srgbClr val="222831"/>
                 </a:solidFill>
@@ -22607,7 +21357,7 @@
               </a:rPr>
               <a:t>Delete — ลบ</a:t>
             </a:r>
-            <a:endParaRPr lang="en-US" sz="1650" dirty="0"/>
+            <a:endParaRPr lang="en-US" sz="2400" dirty="0"/>
           </a:p>
         </p:txBody>
       </p:sp>
@@ -22636,7 +21386,7 @@
               <a:buNone/>
             </a:pPr>
             <a:r>
-              <a:rPr lang="en-US" sz="1250" dirty="0">
+              <a:rPr lang="en-US" dirty="0">
                 <a:solidFill>
                   <a:srgbClr val="00ADB5"/>
                 </a:solidFill>
@@ -22646,7 +21396,7 @@
               </a:rPr>
               <a:t>DELETE</a:t>
             </a:r>
-            <a:endParaRPr lang="en-US" sz="1250" dirty="0"/>
+            <a:endParaRPr lang="en-US" dirty="0"/>
           </a:p>
         </p:txBody>
       </p:sp>
@@ -22675,7 +21425,7 @@
               <a:buNone/>
             </a:pPr>
             <a:r>
-              <a:rPr lang="en-US" sz="1250" dirty="0">
+              <a:rPr lang="en-US" dirty="0">
                 <a:solidFill>
                   <a:srgbClr val="00ADB5"/>
                 </a:solidFill>
@@ -22685,7 +21435,7 @@
               </a:rPr>
               <a:t>delete</a:t>
             </a:r>
-            <a:endParaRPr lang="en-US" sz="1250" dirty="0"/>
+            <a:endParaRPr lang="en-US" dirty="0"/>
           </a:p>
         </p:txBody>
       </p:sp>
@@ -22714,7 +21464,7 @@
               <a:buNone/>
             </a:pPr>
             <a:r>
-              <a:rPr lang="en-US" sz="1650" dirty="0">
+              <a:rPr lang="en-US" sz="2400" dirty="0">
                 <a:solidFill>
                   <a:srgbClr val="393E46"/>
                 </a:solidFill>
@@ -22724,7 +21474,7 @@
               </a:rPr>
               <a:t>ลบทุนออกจากระบบ</a:t>
             </a:r>
-            <a:endParaRPr lang="en-US" sz="1650" dirty="0"/>
+            <a:endParaRPr lang="en-US" sz="2400" dirty="0"/>
           </a:p>
         </p:txBody>
       </p:sp>
@@ -22736,8 +21486,8 @@
         </p:nvSpPr>
         <p:spPr>
           <a:xfrm>
-            <a:off x="7772400" y="1371600"/>
-            <a:ext cx="3794760" cy="3566160"/>
+            <a:off x="7772400" y="1371599"/>
+            <a:ext cx="3794760" cy="4070733"/>
           </a:xfrm>
           <a:prstGeom prst="roundRect">
             <a:avLst>
@@ -22765,7 +21515,7 @@
           <a:bodyPr/>
           <a:lstStyle/>
           <a:p>
-            <a:endParaRPr lang="en-TH"/>
+            <a:endParaRPr lang="en-TH" sz="2800"/>
           </a:p>
         </p:txBody>
       </p:sp>
@@ -22794,7 +21544,7 @@
               <a:buNone/>
             </a:pPr>
             <a:r>
-              <a:rPr lang="en-US" sz="1900" b="1" dirty="0">
+              <a:rPr lang="en-US" sz="2800" b="1" dirty="0">
                 <a:solidFill>
                   <a:srgbClr val="222831"/>
                 </a:solidFill>
@@ -22804,7 +21554,7 @@
               </a:rPr>
               <a:t>ตารางในฐานข้อมูล</a:t>
             </a:r>
-            <a:endParaRPr lang="en-US" sz="1900" dirty="0"/>
+            <a:endParaRPr lang="en-US" sz="2800" dirty="0"/>
           </a:p>
         </p:txBody>
       </p:sp>
@@ -22837,7 +21587,7 @@
               <a:buChar char="•"/>
             </a:pPr>
             <a:r>
-              <a:rPr lang="en-US" sz="1550" dirty="0">
+              <a:rPr lang="en-US" sz="2000" dirty="0">
                 <a:solidFill>
                   <a:srgbClr val="393E46"/>
                 </a:solidFill>
@@ -22847,7 +21597,7 @@
               </a:rPr>
               <a:t>ตาราง (Table) — เก็บข้อมูลชนิดเดียวกัน เช่น ตาราง grants เก็บทุนวิจัย</a:t>
             </a:r>
-            <a:endParaRPr lang="en-US" sz="1550" dirty="0"/>
+            <a:endParaRPr lang="en-US" sz="2000" dirty="0"/>
           </a:p>
           <a:p>
             <a:pPr marL="342900" indent="-342900">
@@ -22858,7 +21608,7 @@
               <a:buChar char="•"/>
             </a:pPr>
             <a:r>
-              <a:rPr lang="en-US" sz="1550" dirty="0">
+              <a:rPr lang="en-US" sz="2000" dirty="0">
                 <a:solidFill>
                   <a:srgbClr val="393E46"/>
                 </a:solidFill>
@@ -22868,7 +21618,7 @@
               </a:rPr>
               <a:t>คอลัมน์ (Column) — ฟิลด์ข้อมูล เช่น ชื่อทุน แหล่งทุน กำหนดปิดรับ</a:t>
             </a:r>
-            <a:endParaRPr lang="en-US" sz="1550" dirty="0"/>
+            <a:endParaRPr lang="en-US" sz="2000" dirty="0"/>
           </a:p>
           <a:p>
             <a:pPr marL="342900" indent="-342900">
@@ -22879,7 +21629,7 @@
               <a:buChar char="•"/>
             </a:pPr>
             <a:r>
-              <a:rPr lang="en-US" sz="1550" dirty="0">
+              <a:rPr lang="en-US" sz="2000" dirty="0">
                 <a:solidFill>
                   <a:srgbClr val="393E46"/>
                 </a:solidFill>
@@ -22889,7 +21639,7 @@
               </a:rPr>
               <a:t>แถว (Row) — ทุน 1 รายการ</a:t>
             </a:r>
-            <a:endParaRPr lang="en-US" sz="1550" dirty="0"/>
+            <a:endParaRPr lang="en-US" sz="2000" dirty="0"/>
           </a:p>
           <a:p>
             <a:pPr marL="342900" indent="-342900">
@@ -22900,7 +21650,7 @@
               <a:buChar char="•"/>
             </a:pPr>
             <a:r>
-              <a:rPr lang="en-US" sz="1550" dirty="0">
+              <a:rPr lang="en-US" sz="2000" dirty="0">
                 <a:solidFill>
                   <a:srgbClr val="393E46"/>
                 </a:solidFill>
@@ -22910,7 +21660,7 @@
               </a:rPr>
               <a:t>Primary Key — รหัสประจำแถวที่ไม่ซ้ำกัน ใช้ระบุว่าจะแก้หรือลบแถวไหน</a:t>
             </a:r>
-            <a:endParaRPr lang="en-US" sz="1550" dirty="0"/>
+            <a:endParaRPr lang="en-US" sz="2000" dirty="0"/>
           </a:p>
           <a:p>
             <a:pPr marL="342900" indent="-342900">
@@ -22921,7 +21671,7 @@
               <a:buChar char="•"/>
             </a:pPr>
             <a:r>
-              <a:rPr lang="en-US" sz="1550" dirty="0">
+              <a:rPr lang="en-US" sz="2000" dirty="0">
                 <a:solidFill>
                   <a:srgbClr val="393E46"/>
                 </a:solidFill>
@@ -22931,7 +21681,7 @@
               </a:rPr>
               <a:t>ชนิดข้อมูล — text, date, uuid บอกว่าคอลัมน์นั้นเก็บอะไรได้</a:t>
             </a:r>
-            <a:endParaRPr lang="en-US" sz="1550" dirty="0"/>
+            <a:endParaRPr lang="en-US" sz="2000" dirty="0"/>
           </a:p>
         </p:txBody>
       </p:sp>
@@ -23122,7 +21872,7 @@
           <a:bodyPr/>
           <a:lstStyle/>
           <a:p>
-            <a:endParaRPr lang="en-TH"/>
+            <a:endParaRPr lang="en-TH" sz="2000"/>
           </a:p>
         </p:txBody>
       </p:sp>
@@ -23151,7 +21901,7 @@
               <a:buNone/>
             </a:pPr>
             <a:r>
-              <a:rPr lang="en-US" sz="2100" b="1" dirty="0">
+              <a:rPr lang="en-US" sz="2400" b="1" dirty="0">
                 <a:solidFill>
                   <a:srgbClr val="222831"/>
                 </a:solidFill>
@@ -23161,7 +21911,7 @@
               </a:rPr>
               <a:t>Supabase คืออะไร</a:t>
             </a:r>
-            <a:endParaRPr lang="en-US" sz="2100" dirty="0"/>
+            <a:endParaRPr lang="en-US" sz="2400" dirty="0"/>
           </a:p>
         </p:txBody>
       </p:sp>
@@ -23190,7 +21940,7 @@
               <a:buNone/>
             </a:pPr>
             <a:r>
-              <a:rPr lang="en-US" sz="1600" dirty="0">
+              <a:rPr lang="en-US" dirty="0">
                 <a:solidFill>
                   <a:srgbClr val="393E46"/>
                 </a:solidFill>
@@ -23200,14 +21950,14 @@
               </a:rPr>
               <a:t>บริการฐานข้อมูลสำเร็จรูปบนคลาวด์ (Backend as a Service)</a:t>
             </a:r>
-            <a:endParaRPr lang="en-US" sz="1600" dirty="0"/>
-          </a:p>
-          <a:p>
-            <a:pPr marL="0" indent="0">
-              <a:buNone/>
-            </a:pPr>
-            <a:r>
-              <a:rPr lang="en-US" sz="1600" dirty="0">
+            <a:endParaRPr lang="en-US" dirty="0"/>
+          </a:p>
+          <a:p>
+            <a:pPr marL="0" indent="0">
+              <a:buNone/>
+            </a:pPr>
+            <a:r>
+              <a:rPr lang="en-US" dirty="0">
                 <a:solidFill>
                   <a:srgbClr val="393E46"/>
                 </a:solidFill>
@@ -23217,7 +21967,7 @@
               </a:rPr>
               <a:t>สร้างตารางเสร็จ ได้ API ใช้ทันที ไม่ต้องเขียนเซิร์ฟเวอร์เอง</a:t>
             </a:r>
-            <a:endParaRPr lang="en-US" sz="1600" dirty="0"/>
+            <a:endParaRPr lang="en-US" dirty="0"/>
           </a:p>
         </p:txBody>
       </p:sp>
@@ -23249,7 +21999,7 @@
           <a:bodyPr/>
           <a:lstStyle/>
           <a:p>
-            <a:endParaRPr lang="en-TH"/>
+            <a:endParaRPr lang="en-TH" sz="2000"/>
           </a:p>
         </p:txBody>
       </p:sp>
@@ -23278,7 +22028,7 @@
               <a:buNone/>
             </a:pPr>
             <a:r>
-              <a:rPr lang="en-US" sz="1500" b="1" dirty="0">
+              <a:rPr lang="en-US" sz="1600" b="1" dirty="0">
                 <a:solidFill>
                   <a:srgbClr val="FFFFFF"/>
                 </a:solidFill>
@@ -23288,7 +22038,7 @@
               </a:rPr>
               <a:t>1</a:t>
             </a:r>
-            <a:endParaRPr lang="en-US" sz="1500" dirty="0"/>
+            <a:endParaRPr lang="en-US" sz="1600" dirty="0"/>
           </a:p>
         </p:txBody>
       </p:sp>
@@ -23317,7 +22067,7 @@
               <a:buNone/>
             </a:pPr>
             <a:r>
-              <a:rPr lang="en-US" sz="1650" b="1" dirty="0">
+              <a:rPr lang="en-US" b="1" dirty="0">
                 <a:solidFill>
                   <a:srgbClr val="222831"/>
                 </a:solidFill>
@@ -23327,7 +22077,7 @@
               </a:rPr>
               <a:t>PostgreSQL</a:t>
             </a:r>
-            <a:endParaRPr lang="en-US" sz="1650" dirty="0"/>
+            <a:endParaRPr lang="en-US" dirty="0"/>
           </a:p>
         </p:txBody>
       </p:sp>
@@ -23356,7 +22106,7 @@
               <a:buNone/>
             </a:pPr>
             <a:r>
-              <a:rPr lang="en-US" sz="1450" dirty="0">
+              <a:rPr lang="en-US" sz="1600" dirty="0">
                 <a:solidFill>
                   <a:srgbClr val="393E46"/>
                 </a:solidFill>
@@ -23366,7 +22116,7 @@
               </a:rPr>
               <a:t>ฐานข้อมูลมาตรฐานอุตสาหกรรม</a:t>
             </a:r>
-            <a:endParaRPr lang="en-US" sz="1450" dirty="0"/>
+            <a:endParaRPr lang="en-US" sz="1600" dirty="0"/>
           </a:p>
         </p:txBody>
       </p:sp>
@@ -23398,7 +22148,7 @@
           <a:bodyPr/>
           <a:lstStyle/>
           <a:p>
-            <a:endParaRPr lang="en-TH"/>
+            <a:endParaRPr lang="en-TH" sz="2000"/>
           </a:p>
         </p:txBody>
       </p:sp>
@@ -23427,7 +22177,7 @@
               <a:buNone/>
             </a:pPr>
             <a:r>
-              <a:rPr lang="en-US" sz="1500" b="1" dirty="0">
+              <a:rPr lang="en-US" sz="1600" b="1" dirty="0">
                 <a:solidFill>
                   <a:srgbClr val="FFFFFF"/>
                 </a:solidFill>
@@ -23437,7 +22187,7 @@
               </a:rPr>
               <a:t>2</a:t>
             </a:r>
-            <a:endParaRPr lang="en-US" sz="1500" dirty="0"/>
+            <a:endParaRPr lang="en-US" sz="1600" dirty="0"/>
           </a:p>
         </p:txBody>
       </p:sp>
@@ -23466,7 +22216,7 @@
               <a:buNone/>
             </a:pPr>
             <a:r>
-              <a:rPr lang="en-US" sz="1650" b="1" dirty="0">
+              <a:rPr lang="en-US" b="1" dirty="0">
                 <a:solidFill>
                   <a:srgbClr val="222831"/>
                 </a:solidFill>
@@ -23476,7 +22226,7 @@
               </a:rPr>
               <a:t>API อัตโนมัติ</a:t>
             </a:r>
-            <a:endParaRPr lang="en-US" sz="1650" dirty="0"/>
+            <a:endParaRPr lang="en-US" dirty="0"/>
           </a:p>
         </p:txBody>
       </p:sp>
@@ -23505,7 +22255,7 @@
               <a:buNone/>
             </a:pPr>
             <a:r>
-              <a:rPr lang="en-US" sz="1450" dirty="0">
+              <a:rPr lang="en-US" sz="1600" dirty="0">
                 <a:solidFill>
                   <a:srgbClr val="393E46"/>
                 </a:solidFill>
@@ -23515,7 +22265,7 @@
               </a:rPr>
               <a:t>สร้างให้ทันทีจากโครงสร้างตาราง</a:t>
             </a:r>
-            <a:endParaRPr lang="en-US" sz="1450" dirty="0"/>
+            <a:endParaRPr lang="en-US" sz="1600" dirty="0"/>
           </a:p>
         </p:txBody>
       </p:sp>
@@ -23547,7 +22297,7 @@
           <a:bodyPr/>
           <a:lstStyle/>
           <a:p>
-            <a:endParaRPr lang="en-TH"/>
+            <a:endParaRPr lang="en-TH" sz="2000"/>
           </a:p>
         </p:txBody>
       </p:sp>
@@ -23576,7 +22326,7 @@
               <a:buNone/>
             </a:pPr>
             <a:r>
-              <a:rPr lang="en-US" sz="1500" b="1" dirty="0">
+              <a:rPr lang="en-US" sz="1600" b="1" dirty="0">
                 <a:solidFill>
                   <a:srgbClr val="FFFFFF"/>
                 </a:solidFill>
@@ -23586,7 +22336,7 @@
               </a:rPr>
               <a:t>3</a:t>
             </a:r>
-            <a:endParaRPr lang="en-US" sz="1500" dirty="0"/>
+            <a:endParaRPr lang="en-US" sz="1600" dirty="0"/>
           </a:p>
         </p:txBody>
       </p:sp>
@@ -23615,7 +22365,7 @@
               <a:buNone/>
             </a:pPr>
             <a:r>
-              <a:rPr lang="en-US" sz="1650" b="1" dirty="0">
+              <a:rPr lang="en-US" b="1" dirty="0">
                 <a:solidFill>
                   <a:srgbClr val="222831"/>
                 </a:solidFill>
@@ -23625,7 +22375,7 @@
               </a:rPr>
               <a:t>RLS</a:t>
             </a:r>
-            <a:endParaRPr lang="en-US" sz="1650" dirty="0"/>
+            <a:endParaRPr lang="en-US" dirty="0"/>
           </a:p>
         </p:txBody>
       </p:sp>
@@ -23654,7 +22404,7 @@
               <a:buNone/>
             </a:pPr>
             <a:r>
-              <a:rPr lang="en-US" sz="1450" dirty="0">
+              <a:rPr lang="en-US" sz="1600" dirty="0">
                 <a:solidFill>
                   <a:srgbClr val="393E46"/>
                 </a:solidFill>
@@ -23664,7 +22414,7 @@
               </a:rPr>
               <a:t>กำหนดสิทธิ์ว่าใครทำอะไรได้บ้าง</a:t>
             </a:r>
-            <a:endParaRPr lang="en-US" sz="1450" dirty="0"/>
+            <a:endParaRPr lang="en-US" sz="1600" dirty="0"/>
           </a:p>
         </p:txBody>
       </p:sp>
@@ -23696,7 +22446,7 @@
           <a:bodyPr/>
           <a:lstStyle/>
           <a:p>
-            <a:endParaRPr lang="en-TH"/>
+            <a:endParaRPr lang="en-TH" sz="2000"/>
           </a:p>
         </p:txBody>
       </p:sp>
@@ -23725,7 +22475,7 @@
               <a:buNone/>
             </a:pPr>
             <a:r>
-              <a:rPr lang="en-US" sz="1500" b="1" dirty="0">
+              <a:rPr lang="en-US" sz="1600" b="1" dirty="0">
                 <a:solidFill>
                   <a:srgbClr val="FFFFFF"/>
                 </a:solidFill>
@@ -23735,7 +22485,7 @@
               </a:rPr>
               <a:t>4</a:t>
             </a:r>
-            <a:endParaRPr lang="en-US" sz="1500" dirty="0"/>
+            <a:endParaRPr lang="en-US" sz="1600" dirty="0"/>
           </a:p>
         </p:txBody>
       </p:sp>
@@ -23764,7 +22514,7 @@
               <a:buNone/>
             </a:pPr>
             <a:r>
-              <a:rPr lang="en-US" sz="1650" b="1" dirty="0">
+              <a:rPr lang="en-US" b="1" dirty="0">
                 <a:solidFill>
                   <a:srgbClr val="222831"/>
                 </a:solidFill>
@@ -23774,7 +22524,7 @@
               </a:rPr>
               <a:t>Storage / Auth</a:t>
             </a:r>
-            <a:endParaRPr lang="en-US" sz="1650" dirty="0"/>
+            <a:endParaRPr lang="en-US" dirty="0"/>
           </a:p>
         </p:txBody>
       </p:sp>
@@ -23803,7 +22553,7 @@
               <a:buNone/>
             </a:pPr>
             <a:r>
-              <a:rPr lang="en-US" sz="1450" dirty="0">
+              <a:rPr lang="en-US" sz="1600" dirty="0">
                 <a:solidFill>
                   <a:srgbClr val="393E46"/>
                 </a:solidFill>
@@ -23813,7 +22563,7 @@
               </a:rPr>
               <a:t>มีให้ใช้ แต่ไม่ใช้ในเวิร์กช็อปนี้</a:t>
             </a:r>
-            <a:endParaRPr lang="en-US" sz="1450" dirty="0"/>
+            <a:endParaRPr lang="en-US" sz="1600" dirty="0"/>
           </a:p>
         </p:txBody>
       </p:sp>
@@ -23854,7 +22604,7 @@
           <a:bodyPr/>
           <a:lstStyle/>
           <a:p>
-            <a:endParaRPr lang="en-TH"/>
+            <a:endParaRPr lang="en-TH" sz="2000"/>
           </a:p>
         </p:txBody>
       </p:sp>
@@ -23883,7 +22633,7 @@
               <a:buNone/>
             </a:pPr>
             <a:r>
-              <a:rPr lang="en-US" sz="2100" b="1" dirty="0">
+              <a:rPr lang="en-US" sz="2400" b="1" dirty="0">
                 <a:solidFill>
                   <a:srgbClr val="00ADB5"/>
                 </a:solidFill>
@@ -23893,7 +22643,7 @@
               </a:rPr>
               <a:t>ชุดเทคโนโลยีที่เราจะใช้</a:t>
             </a:r>
-            <a:endParaRPr lang="en-US" sz="2100" dirty="0"/>
+            <a:endParaRPr lang="en-US" sz="2400" dirty="0"/>
           </a:p>
         </p:txBody>
       </p:sp>
@@ -23927,7 +22677,7 @@
           <a:bodyPr/>
           <a:lstStyle/>
           <a:p>
-            <a:endParaRPr lang="en-TH"/>
+            <a:endParaRPr lang="en-TH" sz="2000"/>
           </a:p>
         </p:txBody>
       </p:sp>
@@ -23956,7 +22706,7 @@
               <a:buNone/>
             </a:pPr>
             <a:r>
-              <a:rPr lang="en-US" sz="1650" b="1" dirty="0">
+              <a:rPr lang="en-US" b="1" dirty="0">
                 <a:solidFill>
                   <a:srgbClr val="222831"/>
                 </a:solidFill>
@@ -23966,7 +22716,7 @@
               </a:rPr>
               <a:t>Vite + React</a:t>
             </a:r>
-            <a:endParaRPr lang="en-US" sz="1650" dirty="0"/>
+            <a:endParaRPr lang="en-US" dirty="0"/>
           </a:p>
         </p:txBody>
       </p:sp>
@@ -23995,7 +22745,7 @@
               <a:buNone/>
             </a:pPr>
             <a:r>
-              <a:rPr lang="en-US" sz="1500" dirty="0">
+              <a:rPr lang="en-US" sz="1600" dirty="0">
                 <a:solidFill>
                   <a:srgbClr val="393E46"/>
                 </a:solidFill>
@@ -24005,7 +22755,7 @@
               </a:rPr>
               <a:t>สร้างหน้าเว็บ</a:t>
             </a:r>
-            <a:endParaRPr lang="en-US" sz="1500" dirty="0"/>
+            <a:endParaRPr lang="en-US" sz="1600" dirty="0"/>
           </a:p>
         </p:txBody>
       </p:sp>
@@ -24039,7 +22789,7 @@
           <a:bodyPr/>
           <a:lstStyle/>
           <a:p>
-            <a:endParaRPr lang="en-TH"/>
+            <a:endParaRPr lang="en-TH" sz="2000"/>
           </a:p>
         </p:txBody>
       </p:sp>
@@ -24068,7 +22818,7 @@
               <a:buNone/>
             </a:pPr>
             <a:r>
-              <a:rPr lang="en-US" sz="1650" b="1" dirty="0">
+              <a:rPr lang="en-US" b="1" dirty="0">
                 <a:solidFill>
                   <a:srgbClr val="222831"/>
                 </a:solidFill>
@@ -24078,7 +22828,7 @@
               </a:rPr>
               <a:t>Tailwind CSS</a:t>
             </a:r>
-            <a:endParaRPr lang="en-US" sz="1650" dirty="0"/>
+            <a:endParaRPr lang="en-US" dirty="0"/>
           </a:p>
         </p:txBody>
       </p:sp>
@@ -24107,7 +22857,7 @@
               <a:buNone/>
             </a:pPr>
             <a:r>
-              <a:rPr lang="en-US" sz="1500" dirty="0">
+              <a:rPr lang="en-US" sz="1600" dirty="0">
                 <a:solidFill>
                   <a:srgbClr val="393E46"/>
                 </a:solidFill>
@@ -24117,7 +22867,7 @@
               </a:rPr>
               <a:t>จัดสไตล์ตาม Design System</a:t>
             </a:r>
-            <a:endParaRPr lang="en-US" sz="1500" dirty="0"/>
+            <a:endParaRPr lang="en-US" sz="1600" dirty="0"/>
           </a:p>
         </p:txBody>
       </p:sp>
@@ -24151,7 +22901,7 @@
           <a:bodyPr/>
           <a:lstStyle/>
           <a:p>
-            <a:endParaRPr lang="en-TH"/>
+            <a:endParaRPr lang="en-TH" sz="2000"/>
           </a:p>
         </p:txBody>
       </p:sp>
@@ -24180,7 +22930,7 @@
               <a:buNone/>
             </a:pPr>
             <a:r>
-              <a:rPr lang="en-US" sz="1650" b="1" dirty="0">
+              <a:rPr lang="en-US" b="1" dirty="0">
                 <a:solidFill>
                   <a:srgbClr val="222831"/>
                 </a:solidFill>
@@ -24190,7 +22940,7 @@
               </a:rPr>
               <a:t>Supabase</a:t>
             </a:r>
-            <a:endParaRPr lang="en-US" sz="1650" dirty="0"/>
+            <a:endParaRPr lang="en-US" dirty="0"/>
           </a:p>
         </p:txBody>
       </p:sp>
@@ -24219,7 +22969,7 @@
               <a:buNone/>
             </a:pPr>
             <a:r>
-              <a:rPr lang="en-US" sz="1500" dirty="0">
+              <a:rPr lang="en-US" sz="1600" dirty="0">
                 <a:solidFill>
                   <a:srgbClr val="393E46"/>
                 </a:solidFill>
@@ -24229,7 +22979,7 @@
               </a:rPr>
               <a:t>ฐานข้อมูลและ API</a:t>
             </a:r>
-            <a:endParaRPr lang="en-US" sz="1500" dirty="0"/>
+            <a:endParaRPr lang="en-US" sz="1600" dirty="0"/>
           </a:p>
         </p:txBody>
       </p:sp>
@@ -24263,7 +23013,7 @@
           <a:bodyPr/>
           <a:lstStyle/>
           <a:p>
-            <a:endParaRPr lang="en-TH"/>
+            <a:endParaRPr lang="en-TH" sz="2000"/>
           </a:p>
         </p:txBody>
       </p:sp>
@@ -24292,7 +23042,7 @@
               <a:buNone/>
             </a:pPr>
             <a:r>
-              <a:rPr lang="en-US" sz="1650" b="1" dirty="0">
+              <a:rPr lang="en-US" b="1" dirty="0">
                 <a:solidFill>
                   <a:srgbClr val="222831"/>
                 </a:solidFill>
@@ -24302,7 +23052,7 @@
               </a:rPr>
               <a:t>GitHub + Pages</a:t>
             </a:r>
-            <a:endParaRPr lang="en-US" sz="1650" dirty="0"/>
+            <a:endParaRPr lang="en-US" dirty="0"/>
           </a:p>
         </p:txBody>
       </p:sp>
@@ -24331,7 +23081,7 @@
               <a:buNone/>
             </a:pPr>
             <a:r>
-              <a:rPr lang="en-US" sz="1500" dirty="0">
+              <a:rPr lang="en-US" sz="1600" dirty="0">
                 <a:solidFill>
                   <a:srgbClr val="393E46"/>
                 </a:solidFill>
@@ -24341,7 +23091,7 @@
               </a:rPr>
               <a:t>เก็บโค้ดและนำขึ้นระบบฟรี</a:t>
             </a:r>
-            <a:endParaRPr lang="en-US" sz="1500" dirty="0"/>
+            <a:endParaRPr lang="en-US" sz="1600" dirty="0"/>
           </a:p>
         </p:txBody>
       </p:sp>
@@ -24375,7 +23125,7 @@
           <a:bodyPr/>
           <a:lstStyle/>
           <a:p>
-            <a:endParaRPr lang="en-TH"/>
+            <a:endParaRPr lang="en-TH" sz="2000"/>
           </a:p>
         </p:txBody>
       </p:sp>
@@ -24404,7 +23154,7 @@
               <a:buNone/>
             </a:pPr>
             <a:r>
-              <a:rPr lang="en-US" sz="1650" b="1" dirty="0">
+              <a:rPr lang="en-US" b="1" dirty="0">
                 <a:solidFill>
                   <a:srgbClr val="222831"/>
                 </a:solidFill>
@@ -24414,7 +23164,7 @@
               </a:rPr>
               <a:t>Antigravity</a:t>
             </a:r>
-            <a:endParaRPr lang="en-US" sz="1650" dirty="0"/>
+            <a:endParaRPr lang="en-US" dirty="0"/>
           </a:p>
         </p:txBody>
       </p:sp>
@@ -24443,7 +23193,7 @@
               <a:buNone/>
             </a:pPr>
             <a:r>
-              <a:rPr lang="en-US" sz="1500" dirty="0">
+              <a:rPr lang="en-US" sz="1600" dirty="0">
                 <a:solidFill>
                   <a:srgbClr val="393E46"/>
                 </a:solidFill>
@@ -24453,7 +23203,7 @@
               </a:rPr>
               <a:t>AI Agent ที่เขียนโค้ดให้เรา</a:t>
             </a:r>
-            <a:endParaRPr lang="en-US" sz="1500" dirty="0"/>
+            <a:endParaRPr lang="en-US" sz="1600" dirty="0"/>
           </a:p>
         </p:txBody>
       </p:sp>

--- a/Funding_Hub_Antigravity_Workshop.pptx
+++ b/Funding_Hub_Antigravity_Workshop.pptx
@@ -5,38 +5,39 @@
     <p:sldMasterId id="2147483648" r:id="rId1"/>
   </p:sldMasterIdLst>
   <p:notesMasterIdLst>
-    <p:notesMasterId r:id="rId31"/>
+    <p:notesMasterId r:id="rId32"/>
   </p:notesMasterIdLst>
   <p:sldIdLst>
     <p:sldId id="294" r:id="rId2"/>
-    <p:sldId id="257" r:id="rId3"/>
-    <p:sldId id="259" r:id="rId4"/>
-    <p:sldId id="260" r:id="rId5"/>
-    <p:sldId id="261" r:id="rId6"/>
-    <p:sldId id="262" r:id="rId7"/>
-    <p:sldId id="263" r:id="rId8"/>
-    <p:sldId id="264" r:id="rId9"/>
-    <p:sldId id="265" r:id="rId10"/>
-    <p:sldId id="266" r:id="rId11"/>
-    <p:sldId id="267" r:id="rId12"/>
-    <p:sldId id="268" r:id="rId13"/>
-    <p:sldId id="269" r:id="rId14"/>
-    <p:sldId id="271" r:id="rId15"/>
-    <p:sldId id="272" r:id="rId16"/>
-    <p:sldId id="273" r:id="rId17"/>
-    <p:sldId id="278" r:id="rId18"/>
-    <p:sldId id="279" r:id="rId19"/>
-    <p:sldId id="280" r:id="rId20"/>
-    <p:sldId id="297" r:id="rId21"/>
-    <p:sldId id="281" r:id="rId22"/>
-    <p:sldId id="296" r:id="rId23"/>
-    <p:sldId id="282" r:id="rId24"/>
-    <p:sldId id="298" r:id="rId25"/>
-    <p:sldId id="284" r:id="rId26"/>
-    <p:sldId id="285" r:id="rId27"/>
-    <p:sldId id="295" r:id="rId28"/>
-    <p:sldId id="292" r:id="rId29"/>
-    <p:sldId id="293" r:id="rId30"/>
+    <p:sldId id="299" r:id="rId3"/>
+    <p:sldId id="257" r:id="rId4"/>
+    <p:sldId id="259" r:id="rId5"/>
+    <p:sldId id="260" r:id="rId6"/>
+    <p:sldId id="261" r:id="rId7"/>
+    <p:sldId id="262" r:id="rId8"/>
+    <p:sldId id="263" r:id="rId9"/>
+    <p:sldId id="264" r:id="rId10"/>
+    <p:sldId id="265" r:id="rId11"/>
+    <p:sldId id="266" r:id="rId12"/>
+    <p:sldId id="267" r:id="rId13"/>
+    <p:sldId id="268" r:id="rId14"/>
+    <p:sldId id="269" r:id="rId15"/>
+    <p:sldId id="271" r:id="rId16"/>
+    <p:sldId id="272" r:id="rId17"/>
+    <p:sldId id="273" r:id="rId18"/>
+    <p:sldId id="278" r:id="rId19"/>
+    <p:sldId id="279" r:id="rId20"/>
+    <p:sldId id="280" r:id="rId21"/>
+    <p:sldId id="297" r:id="rId22"/>
+    <p:sldId id="281" r:id="rId23"/>
+    <p:sldId id="296" r:id="rId24"/>
+    <p:sldId id="282" r:id="rId25"/>
+    <p:sldId id="298" r:id="rId26"/>
+    <p:sldId id="284" r:id="rId27"/>
+    <p:sldId id="285" r:id="rId28"/>
+    <p:sldId id="295" r:id="rId29"/>
+    <p:sldId id="292" r:id="rId30"/>
+    <p:sldId id="293" r:id="rId31"/>
   </p:sldIdLst>
   <p:sldSz cx="12192000" cy="6858000"/>
   <p:notesSz cx="6858000" cy="12192000"/>
@@ -417,7 +418,7 @@
           <a:p>
             <a:fld id="{F7021451-1387-4CA6-816F-3879F97B5CBC}" type="slidenum">
               <a:rPr lang="en-US"/>
-              <a:t>10</a:t>
+              <a:t>11</a:t>
             </a:fld>
             <a:endParaRPr lang="en-US"/>
           </a:p>
@@ -501,7 +502,7 @@
           <a:p>
             <a:fld id="{F7021451-1387-4CA6-816F-3879F97B5CBC}" type="slidenum">
               <a:rPr lang="en-US"/>
-              <a:t>11</a:t>
+              <a:t>12</a:t>
             </a:fld>
             <a:endParaRPr lang="en-US"/>
           </a:p>
@@ -585,7 +586,7 @@
           <a:p>
             <a:fld id="{F7021451-1387-4CA6-816F-3879F97B5CBC}" type="slidenum">
               <a:rPr lang="en-US"/>
-              <a:t>12</a:t>
+              <a:t>13</a:t>
             </a:fld>
             <a:endParaRPr lang="en-US"/>
           </a:p>
@@ -669,7 +670,7 @@
           <a:p>
             <a:fld id="{F7021451-1387-4CA6-816F-3879F97B5CBC}" type="slidenum">
               <a:rPr lang="en-US"/>
-              <a:t>13</a:t>
+              <a:t>14</a:t>
             </a:fld>
             <a:endParaRPr lang="en-US"/>
           </a:p>
@@ -753,7 +754,7 @@
           <a:p>
             <a:fld id="{F7021451-1387-4CA6-816F-3879F97B5CBC}" type="slidenum">
               <a:rPr lang="en-US"/>
-              <a:t>14</a:t>
+              <a:t>15</a:t>
             </a:fld>
             <a:endParaRPr lang="en-US"/>
           </a:p>
@@ -837,7 +838,7 @@
           <a:p>
             <a:fld id="{F7021451-1387-4CA6-816F-3879F97B5CBC}" type="slidenum">
               <a:rPr lang="en-US"/>
-              <a:t>15</a:t>
+              <a:t>16</a:t>
             </a:fld>
             <a:endParaRPr lang="en-US"/>
           </a:p>
@@ -921,7 +922,7 @@
           <a:p>
             <a:fld id="{F7021451-1387-4CA6-816F-3879F97B5CBC}" type="slidenum">
               <a:rPr lang="en-US"/>
-              <a:t>16</a:t>
+              <a:t>17</a:t>
             </a:fld>
             <a:endParaRPr lang="en-US"/>
           </a:p>
@@ -1005,7 +1006,7 @@
           <a:p>
             <a:fld id="{F7021451-1387-4CA6-816F-3879F97B5CBC}" type="slidenum">
               <a:rPr lang="en-US"/>
-              <a:t>17</a:t>
+              <a:t>18</a:t>
             </a:fld>
             <a:endParaRPr lang="en-US"/>
           </a:p>
@@ -1089,7 +1090,7 @@
           <a:p>
             <a:fld id="{F7021451-1387-4CA6-816F-3879F97B5CBC}" type="slidenum">
               <a:rPr lang="en-US"/>
-              <a:t>18</a:t>
+              <a:t>19</a:t>
             </a:fld>
             <a:endParaRPr lang="en-US"/>
           </a:p>
@@ -1173,7 +1174,7 @@
           <a:p>
             <a:fld id="{F7021451-1387-4CA6-816F-3879F97B5CBC}" type="slidenum">
               <a:rPr lang="en-US"/>
-              <a:t>19</a:t>
+              <a:t>20</a:t>
             </a:fld>
             <a:endParaRPr lang="en-US"/>
           </a:p>
@@ -1257,7 +1258,7 @@
           <a:p>
             <a:fld id="{F7021451-1387-4CA6-816F-3879F97B5CBC}" type="slidenum">
               <a:rPr lang="en-US"/>
-              <a:t>2</a:t>
+              <a:t>3</a:t>
             </a:fld>
             <a:endParaRPr lang="en-US"/>
           </a:p>
@@ -1341,7 +1342,7 @@
           <a:p>
             <a:fld id="{F7021451-1387-4CA6-816F-3879F97B5CBC}" type="slidenum">
               <a:rPr lang="en-US"/>
-              <a:t>21</a:t>
+              <a:t>22</a:t>
             </a:fld>
             <a:endParaRPr lang="en-US"/>
           </a:p>
@@ -1425,7 +1426,7 @@
           <a:p>
             <a:fld id="{F7021451-1387-4CA6-816F-3879F97B5CBC}" type="slidenum">
               <a:rPr lang="en-US"/>
-              <a:t>23</a:t>
+              <a:t>24</a:t>
             </a:fld>
             <a:endParaRPr lang="en-US"/>
           </a:p>
@@ -1509,7 +1510,7 @@
           <a:p>
             <a:fld id="{F7021451-1387-4CA6-816F-3879F97B5CBC}" type="slidenum">
               <a:rPr lang="en-US"/>
-              <a:t>25</a:t>
+              <a:t>26</a:t>
             </a:fld>
             <a:endParaRPr lang="en-US"/>
           </a:p>
@@ -1593,7 +1594,7 @@
           <a:p>
             <a:fld id="{F7021451-1387-4CA6-816F-3879F97B5CBC}" type="slidenum">
               <a:rPr lang="en-US"/>
-              <a:t>26</a:t>
+              <a:t>27</a:t>
             </a:fld>
             <a:endParaRPr lang="en-US"/>
           </a:p>
@@ -1677,7 +1678,7 @@
           <a:p>
             <a:fld id="{F7021451-1387-4CA6-816F-3879F97B5CBC}" type="slidenum">
               <a:rPr lang="en-US"/>
-              <a:t>28</a:t>
+              <a:t>29</a:t>
             </a:fld>
             <a:endParaRPr lang="en-US"/>
           </a:p>
@@ -1761,7 +1762,7 @@
           <a:p>
             <a:fld id="{F7021451-1387-4CA6-816F-3879F97B5CBC}" type="slidenum">
               <a:rPr lang="en-US"/>
-              <a:t>29</a:t>
+              <a:t>30</a:t>
             </a:fld>
             <a:endParaRPr lang="en-US"/>
           </a:p>
@@ -1845,7 +1846,7 @@
           <a:p>
             <a:fld id="{F7021451-1387-4CA6-816F-3879F97B5CBC}" type="slidenum">
               <a:rPr lang="en-US"/>
-              <a:t>3</a:t>
+              <a:t>4</a:t>
             </a:fld>
             <a:endParaRPr lang="en-US"/>
           </a:p>
@@ -1929,7 +1930,7 @@
           <a:p>
             <a:fld id="{F7021451-1387-4CA6-816F-3879F97B5CBC}" type="slidenum">
               <a:rPr lang="en-US"/>
-              <a:t>4</a:t>
+              <a:t>5</a:t>
             </a:fld>
             <a:endParaRPr lang="en-US"/>
           </a:p>
@@ -2013,7 +2014,7 @@
           <a:p>
             <a:fld id="{F7021451-1387-4CA6-816F-3879F97B5CBC}" type="slidenum">
               <a:rPr lang="en-US"/>
-              <a:t>5</a:t>
+              <a:t>6</a:t>
             </a:fld>
             <a:endParaRPr lang="en-US"/>
           </a:p>
@@ -2097,7 +2098,7 @@
           <a:p>
             <a:fld id="{F7021451-1387-4CA6-816F-3879F97B5CBC}" type="slidenum">
               <a:rPr lang="en-US"/>
-              <a:t>6</a:t>
+              <a:t>7</a:t>
             </a:fld>
             <a:endParaRPr lang="en-US"/>
           </a:p>
@@ -2181,7 +2182,7 @@
           <a:p>
             <a:fld id="{F7021451-1387-4CA6-816F-3879F97B5CBC}" type="slidenum">
               <a:rPr lang="en-US"/>
-              <a:t>7</a:t>
+              <a:t>8</a:t>
             </a:fld>
             <a:endParaRPr lang="en-US"/>
           </a:p>
@@ -2265,7 +2266,7 @@
           <a:p>
             <a:fld id="{F7021451-1387-4CA6-816F-3879F97B5CBC}" type="slidenum">
               <a:rPr lang="en-US"/>
-              <a:t>8</a:t>
+              <a:t>9</a:t>
             </a:fld>
             <a:endParaRPr lang="en-US"/>
           </a:p>
@@ -2349,7 +2350,7 @@
           <a:p>
             <a:fld id="{F7021451-1387-4CA6-816F-3879F97B5CBC}" type="slidenum">
               <a:rPr lang="en-US"/>
-              <a:t>9</a:t>
+              <a:t>10</a:t>
             </a:fld>
             <a:endParaRPr lang="en-US"/>
           </a:p>
@@ -3297,6 +3298,1179 @@
 
 <file path=ppt/slides/slide10.xml><?xml version="1.0" encoding="utf-8"?>
 <p:sld xmlns:a="http://schemas.openxmlformats.org/drawingml/2006/main" xmlns:r="http://schemas.openxmlformats.org/officeDocument/2006/relationships" xmlns:p="http://schemas.openxmlformats.org/presentationml/2006/main">
+  <p:cSld name="Slide 10">
+    <p:bg>
+      <p:bgPr>
+        <a:solidFill>
+          <a:srgbClr val="E8F6F7"/>
+        </a:solidFill>
+        <a:effectLst/>
+      </p:bgPr>
+    </p:bg>
+    <p:spTree>
+      <p:nvGrpSpPr>
+        <p:cNvPr id="1" name=""/>
+        <p:cNvGrpSpPr/>
+        <p:nvPr/>
+      </p:nvGrpSpPr>
+      <p:grpSpPr>
+        <a:xfrm>
+          <a:off x="0" y="0"/>
+          <a:ext cx="0" cy="0"/>
+          <a:chOff x="0" y="0"/>
+          <a:chExt cx="0" cy="0"/>
+        </a:xfrm>
+      </p:grpSpPr>
+      <p:sp>
+        <p:nvSpPr>
+          <p:cNvPr id="2" name="Text 0"/>
+          <p:cNvSpPr/>
+          <p:nvPr/>
+        </p:nvSpPr>
+        <p:spPr>
+          <a:xfrm>
+            <a:off x="11018520" y="6263640"/>
+            <a:ext cx="548640" cy="274320"/>
+          </a:xfrm>
+          <a:prstGeom prst="rect">
+            <a:avLst/>
+          </a:prstGeom>
+          <a:noFill/>
+          <a:ln/>
+        </p:spPr>
+        <p:txBody>
+          <a:bodyPr wrap="square" lIns="0" tIns="0" rIns="0" bIns="0" rtlCol="0" anchor="ctr"/>
+          <a:lstStyle/>
+          <a:p>
+            <a:pPr marL="0" indent="0" algn="r">
+              <a:buNone/>
+            </a:pPr>
+            <a:r>
+              <a:rPr lang="en-US" sz="1200" dirty="0">
+                <a:solidFill>
+                  <a:srgbClr val="9AA3AD"/>
+                </a:solidFill>
+                <a:latin typeface="TH Sarabun New" pitchFamily="34" charset="0"/>
+                <a:ea typeface="TH Sarabun New" pitchFamily="34" charset="-122"/>
+                <a:cs typeface="TH Sarabun New" pitchFamily="34" charset="-120"/>
+              </a:rPr>
+              <a:t>10</a:t>
+            </a:r>
+            <a:endParaRPr lang="en-US" sz="1200" dirty="0"/>
+          </a:p>
+        </p:txBody>
+      </p:sp>
+      <p:sp>
+        <p:nvSpPr>
+          <p:cNvPr id="3" name="Shape 1"/>
+          <p:cNvSpPr/>
+          <p:nvPr/>
+        </p:nvSpPr>
+        <p:spPr>
+          <a:xfrm>
+            <a:off x="594360" y="310896"/>
+            <a:ext cx="1481328" cy="475488"/>
+          </a:xfrm>
+          <a:prstGeom prst="roundRect">
+            <a:avLst>
+              <a:gd name="adj" fmla="val 50000"/>
+            </a:avLst>
+          </a:prstGeom>
+          <a:solidFill>
+            <a:srgbClr val="00ADB5"/>
+          </a:solidFill>
+          <a:ln w="12700">
+            <a:solidFill>
+              <a:srgbClr val="00ADB5"/>
+            </a:solidFill>
+            <a:prstDash val="solid"/>
+          </a:ln>
+        </p:spPr>
+        <p:txBody>
+          <a:bodyPr/>
+          <a:lstStyle/>
+          <a:p>
+            <a:endParaRPr lang="en-TH"/>
+          </a:p>
+        </p:txBody>
+      </p:sp>
+      <p:sp>
+        <p:nvSpPr>
+          <p:cNvPr id="4" name="Text 2"/>
+          <p:cNvSpPr/>
+          <p:nvPr/>
+        </p:nvSpPr>
+        <p:spPr>
+          <a:xfrm>
+            <a:off x="594360" y="310896"/>
+            <a:ext cx="1481328" cy="475488"/>
+          </a:xfrm>
+          <a:prstGeom prst="rect">
+            <a:avLst/>
+          </a:prstGeom>
+          <a:noFill/>
+          <a:ln/>
+        </p:spPr>
+        <p:txBody>
+          <a:bodyPr wrap="square" lIns="0" tIns="0" rIns="0" bIns="0" rtlCol="0" anchor="ctr"/>
+          <a:lstStyle/>
+          <a:p>
+            <a:pPr marL="0" indent="0" algn="ctr">
+              <a:buNone/>
+            </a:pPr>
+            <a:r>
+              <a:rPr lang="en-US" sz="1800" b="1" dirty="0">
+                <a:solidFill>
+                  <a:srgbClr val="FFFFFF"/>
+                </a:solidFill>
+                <a:latin typeface="TH Sarabun New" pitchFamily="34" charset="0"/>
+                <a:ea typeface="TH Sarabun New" pitchFamily="34" charset="-122"/>
+                <a:cs typeface="TH Sarabun New" pitchFamily="34" charset="-120"/>
+              </a:rPr>
+              <a:t>LAB A</a:t>
+            </a:r>
+            <a:endParaRPr lang="en-US" sz="1800" dirty="0"/>
+          </a:p>
+        </p:txBody>
+      </p:sp>
+      <p:sp>
+        <p:nvSpPr>
+          <p:cNvPr id="5" name="Text 3"/>
+          <p:cNvSpPr/>
+          <p:nvPr/>
+        </p:nvSpPr>
+        <p:spPr>
+          <a:xfrm>
+            <a:off x="2286000" y="274320"/>
+            <a:ext cx="7315200" cy="548640"/>
+          </a:xfrm>
+          <a:prstGeom prst="rect">
+            <a:avLst/>
+          </a:prstGeom>
+          <a:noFill/>
+          <a:ln/>
+        </p:spPr>
+        <p:txBody>
+          <a:bodyPr wrap="square" lIns="0" tIns="0" rIns="0" bIns="0" rtlCol="0" anchor="ctr"/>
+          <a:lstStyle/>
+          <a:p>
+            <a:pPr marL="0" indent="0">
+              <a:buNone/>
+            </a:pPr>
+            <a:r>
+              <a:rPr lang="en-US" sz="3000" b="1" dirty="0">
+                <a:solidFill>
+                  <a:srgbClr val="222831"/>
+                </a:solidFill>
+                <a:latin typeface="TH Sarabun New" pitchFamily="34" charset="0"/>
+                <a:ea typeface="TH Sarabun New" pitchFamily="34" charset="-122"/>
+                <a:cs typeface="TH Sarabun New" pitchFamily="34" charset="-120"/>
+              </a:rPr>
+              <a:t>เตรียมเครื่องและเปิดโปรเจกต์</a:t>
+            </a:r>
+            <a:endParaRPr lang="en-US" sz="3000" dirty="0"/>
+          </a:p>
+        </p:txBody>
+      </p:sp>
+      <p:sp>
+        <p:nvSpPr>
+          <p:cNvPr id="6" name="Text 4"/>
+          <p:cNvSpPr/>
+          <p:nvPr/>
+        </p:nvSpPr>
+        <p:spPr>
+          <a:xfrm>
+            <a:off x="9738360" y="310896"/>
+            <a:ext cx="1828800" cy="475488"/>
+          </a:xfrm>
+          <a:prstGeom prst="rect">
+            <a:avLst/>
+          </a:prstGeom>
+          <a:noFill/>
+          <a:ln/>
+        </p:spPr>
+        <p:txBody>
+          <a:bodyPr wrap="square" lIns="0" tIns="0" rIns="0" bIns="0" rtlCol="0" anchor="ctr"/>
+          <a:lstStyle/>
+          <a:p>
+            <a:pPr marL="0" indent="0" algn="r">
+              <a:buNone/>
+            </a:pPr>
+            <a:r>
+              <a:rPr lang="en-US" sz="1700" dirty="0">
+                <a:solidFill>
+                  <a:srgbClr val="393E46"/>
+                </a:solidFill>
+                <a:latin typeface="TH Sarabun New" pitchFamily="34" charset="0"/>
+                <a:ea typeface="TH Sarabun New" pitchFamily="34" charset="-122"/>
+                <a:cs typeface="TH Sarabun New" pitchFamily="34" charset="-120"/>
+              </a:rPr>
+              <a:t>10 นาที</a:t>
+            </a:r>
+            <a:endParaRPr lang="en-US" sz="1700" dirty="0"/>
+          </a:p>
+        </p:txBody>
+      </p:sp>
+      <p:sp>
+        <p:nvSpPr>
+          <p:cNvPr id="7" name="Shape 5"/>
+          <p:cNvSpPr/>
+          <p:nvPr/>
+        </p:nvSpPr>
+        <p:spPr>
+          <a:xfrm>
+            <a:off x="594360" y="1024128"/>
+            <a:ext cx="5760720" cy="3794760"/>
+          </a:xfrm>
+          <a:prstGeom prst="roundRect">
+            <a:avLst>
+              <a:gd name="adj" fmla="val 2169"/>
+            </a:avLst>
+          </a:prstGeom>
+          <a:solidFill>
+            <a:srgbClr val="FFFFFF"/>
+          </a:solidFill>
+          <a:ln w="9525">
+            <a:solidFill>
+              <a:srgbClr val="FFFFFF"/>
+            </a:solidFill>
+            <a:prstDash val="solid"/>
+          </a:ln>
+          <a:effectLst>
+            <a:outerShdw blurRad="101600" dist="12700" dir="5400000" algn="bl" rotWithShape="0">
+              <a:srgbClr val="222831">
+                <a:alpha val="10000"/>
+              </a:srgbClr>
+            </a:outerShdw>
+          </a:effectLst>
+        </p:spPr>
+        <p:txBody>
+          <a:bodyPr/>
+          <a:lstStyle/>
+          <a:p>
+            <a:endParaRPr lang="en-TH"/>
+          </a:p>
+        </p:txBody>
+      </p:sp>
+      <p:sp>
+        <p:nvSpPr>
+          <p:cNvPr id="8" name="Text 6"/>
+          <p:cNvSpPr/>
+          <p:nvPr/>
+        </p:nvSpPr>
+        <p:spPr>
+          <a:xfrm>
+            <a:off x="850392" y="1188720"/>
+            <a:ext cx="5248656" cy="310896"/>
+          </a:xfrm>
+          <a:prstGeom prst="rect">
+            <a:avLst/>
+          </a:prstGeom>
+          <a:noFill/>
+          <a:ln/>
+        </p:spPr>
+        <p:txBody>
+          <a:bodyPr wrap="square" lIns="0" tIns="0" rIns="0" bIns="0" rtlCol="0" anchor="ctr"/>
+          <a:lstStyle/>
+          <a:p>
+            <a:pPr marL="0" indent="0">
+              <a:buNone/>
+            </a:pPr>
+            <a:r>
+              <a:rPr lang="en-US" sz="1900" b="1" dirty="0">
+                <a:solidFill>
+                  <a:srgbClr val="222831"/>
+                </a:solidFill>
+                <a:latin typeface="TH Sarabun New" pitchFamily="34" charset="0"/>
+                <a:ea typeface="TH Sarabun New" pitchFamily="34" charset="-122"/>
+                <a:cs typeface="TH Sarabun New" pitchFamily="34" charset="-120"/>
+              </a:rPr>
+              <a:t>สิ่งที่ต้องทำ</a:t>
+            </a:r>
+            <a:endParaRPr lang="en-US" sz="1900" dirty="0"/>
+          </a:p>
+        </p:txBody>
+      </p:sp>
+      <p:sp>
+        <p:nvSpPr>
+          <p:cNvPr id="9" name="Shape 7"/>
+          <p:cNvSpPr/>
+          <p:nvPr/>
+        </p:nvSpPr>
+        <p:spPr>
+          <a:xfrm>
+            <a:off x="868680" y="1636776"/>
+            <a:ext cx="329184" cy="329184"/>
+          </a:xfrm>
+          <a:prstGeom prst="ellipse">
+            <a:avLst/>
+          </a:prstGeom>
+          <a:solidFill>
+            <a:srgbClr val="00ADB5"/>
+          </a:solidFill>
+          <a:ln w="12700">
+            <a:solidFill>
+              <a:srgbClr val="00ADB5"/>
+            </a:solidFill>
+            <a:prstDash val="solid"/>
+          </a:ln>
+        </p:spPr>
+        <p:txBody>
+          <a:bodyPr/>
+          <a:lstStyle/>
+          <a:p>
+            <a:endParaRPr lang="en-TH"/>
+          </a:p>
+        </p:txBody>
+      </p:sp>
+      <p:sp>
+        <p:nvSpPr>
+          <p:cNvPr id="10" name="Text 8"/>
+          <p:cNvSpPr/>
+          <p:nvPr/>
+        </p:nvSpPr>
+        <p:spPr>
+          <a:xfrm>
+            <a:off x="868680" y="1636776"/>
+            <a:ext cx="329184" cy="329184"/>
+          </a:xfrm>
+          <a:prstGeom prst="rect">
+            <a:avLst/>
+          </a:prstGeom>
+          <a:noFill/>
+          <a:ln/>
+        </p:spPr>
+        <p:txBody>
+          <a:bodyPr wrap="square" lIns="0" tIns="0" rIns="0" bIns="0" rtlCol="0" anchor="ctr"/>
+          <a:lstStyle/>
+          <a:p>
+            <a:pPr marL="0" indent="0" algn="ctr">
+              <a:buNone/>
+            </a:pPr>
+            <a:r>
+              <a:rPr lang="en-US" sz="1500" b="1" dirty="0">
+                <a:solidFill>
+                  <a:srgbClr val="FFFFFF"/>
+                </a:solidFill>
+                <a:latin typeface="TH Sarabun New" pitchFamily="34" charset="0"/>
+                <a:ea typeface="TH Sarabun New" pitchFamily="34" charset="-122"/>
+                <a:cs typeface="TH Sarabun New" pitchFamily="34" charset="-120"/>
+              </a:rPr>
+              <a:t>1</a:t>
+            </a:r>
+            <a:endParaRPr lang="en-US" sz="1500" dirty="0"/>
+          </a:p>
+        </p:txBody>
+      </p:sp>
+      <p:sp>
+        <p:nvSpPr>
+          <p:cNvPr id="11" name="Text 9"/>
+          <p:cNvSpPr/>
+          <p:nvPr/>
+        </p:nvSpPr>
+        <p:spPr>
+          <a:xfrm>
+            <a:off x="1307592" y="1572768"/>
+            <a:ext cx="4754880" cy="457200"/>
+          </a:xfrm>
+          <a:prstGeom prst="rect">
+            <a:avLst/>
+          </a:prstGeom>
+          <a:noFill/>
+          <a:ln/>
+        </p:spPr>
+        <p:txBody>
+          <a:bodyPr wrap="square" lIns="0" tIns="0" rIns="0" bIns="0" rtlCol="0" anchor="ctr"/>
+          <a:lstStyle/>
+          <a:p>
+            <a:pPr marL="0" indent="0">
+              <a:buNone/>
+            </a:pPr>
+            <a:r>
+              <a:rPr lang="en-US" sz="1600" dirty="0">
+                <a:solidFill>
+                  <a:srgbClr val="393E46"/>
+                </a:solidFill>
+                <a:latin typeface="TH Sarabun New" pitchFamily="34" charset="0"/>
+                <a:ea typeface="TH Sarabun New" pitchFamily="34" charset="-122"/>
+                <a:cs typeface="TH Sarabun New" pitchFamily="34" charset="-120"/>
+              </a:rPr>
+              <a:t>ตรวจว่ามี Node.js, Git และ Antigravity IDE แล้ว</a:t>
+            </a:r>
+            <a:endParaRPr lang="en-US" sz="1600" dirty="0"/>
+          </a:p>
+        </p:txBody>
+      </p:sp>
+      <p:sp>
+        <p:nvSpPr>
+          <p:cNvPr id="12" name="Shape 10"/>
+          <p:cNvSpPr/>
+          <p:nvPr/>
+        </p:nvSpPr>
+        <p:spPr>
+          <a:xfrm>
+            <a:off x="868680" y="2221992"/>
+            <a:ext cx="329184" cy="329184"/>
+          </a:xfrm>
+          <a:prstGeom prst="ellipse">
+            <a:avLst/>
+          </a:prstGeom>
+          <a:solidFill>
+            <a:srgbClr val="00ADB5"/>
+          </a:solidFill>
+          <a:ln w="12700">
+            <a:solidFill>
+              <a:srgbClr val="00ADB5"/>
+            </a:solidFill>
+            <a:prstDash val="solid"/>
+          </a:ln>
+        </p:spPr>
+        <p:txBody>
+          <a:bodyPr/>
+          <a:lstStyle/>
+          <a:p>
+            <a:endParaRPr lang="en-TH"/>
+          </a:p>
+        </p:txBody>
+      </p:sp>
+      <p:sp>
+        <p:nvSpPr>
+          <p:cNvPr id="13" name="Text 11"/>
+          <p:cNvSpPr/>
+          <p:nvPr/>
+        </p:nvSpPr>
+        <p:spPr>
+          <a:xfrm>
+            <a:off x="868680" y="2221992"/>
+            <a:ext cx="329184" cy="329184"/>
+          </a:xfrm>
+          <a:prstGeom prst="rect">
+            <a:avLst/>
+          </a:prstGeom>
+          <a:noFill/>
+          <a:ln/>
+        </p:spPr>
+        <p:txBody>
+          <a:bodyPr wrap="square" lIns="0" tIns="0" rIns="0" bIns="0" rtlCol="0" anchor="ctr"/>
+          <a:lstStyle/>
+          <a:p>
+            <a:pPr marL="0" indent="0" algn="ctr">
+              <a:buNone/>
+            </a:pPr>
+            <a:r>
+              <a:rPr lang="en-US" sz="1500" b="1" dirty="0">
+                <a:solidFill>
+                  <a:srgbClr val="FFFFFF"/>
+                </a:solidFill>
+                <a:latin typeface="TH Sarabun New" pitchFamily="34" charset="0"/>
+                <a:ea typeface="TH Sarabun New" pitchFamily="34" charset="-122"/>
+                <a:cs typeface="TH Sarabun New" pitchFamily="34" charset="-120"/>
+              </a:rPr>
+              <a:t>2</a:t>
+            </a:r>
+            <a:endParaRPr lang="en-US" sz="1500" dirty="0"/>
+          </a:p>
+        </p:txBody>
+      </p:sp>
+      <p:sp>
+        <p:nvSpPr>
+          <p:cNvPr id="14" name="Text 12"/>
+          <p:cNvSpPr/>
+          <p:nvPr/>
+        </p:nvSpPr>
+        <p:spPr>
+          <a:xfrm>
+            <a:off x="1307592" y="2157984"/>
+            <a:ext cx="4754880" cy="457200"/>
+          </a:xfrm>
+          <a:prstGeom prst="rect">
+            <a:avLst/>
+          </a:prstGeom>
+          <a:noFill/>
+          <a:ln/>
+        </p:spPr>
+        <p:txBody>
+          <a:bodyPr wrap="square" lIns="0" tIns="0" rIns="0" bIns="0" rtlCol="0" anchor="ctr"/>
+          <a:lstStyle/>
+          <a:p>
+            <a:pPr marL="0" indent="0">
+              <a:buNone/>
+            </a:pPr>
+            <a:r>
+              <a:rPr lang="en-US" sz="1600" dirty="0">
+                <a:solidFill>
+                  <a:srgbClr val="393E46"/>
+                </a:solidFill>
+                <a:latin typeface="TH Sarabun New" pitchFamily="34" charset="0"/>
+                <a:ea typeface="TH Sarabun New" pitchFamily="34" charset="-122"/>
+                <a:cs typeface="TH Sarabun New" pitchFamily="34" charset="-120"/>
+              </a:rPr>
+              <a:t>สร้างโฟลเดอร์ fundinghub แล้วเปิดใน Antigravity</a:t>
+            </a:r>
+            <a:endParaRPr lang="en-US" sz="1600" dirty="0"/>
+          </a:p>
+        </p:txBody>
+      </p:sp>
+      <p:sp>
+        <p:nvSpPr>
+          <p:cNvPr id="15" name="Shape 13"/>
+          <p:cNvSpPr/>
+          <p:nvPr/>
+        </p:nvSpPr>
+        <p:spPr>
+          <a:xfrm>
+            <a:off x="868680" y="2807208"/>
+            <a:ext cx="329184" cy="329184"/>
+          </a:xfrm>
+          <a:prstGeom prst="ellipse">
+            <a:avLst/>
+          </a:prstGeom>
+          <a:solidFill>
+            <a:srgbClr val="00ADB5"/>
+          </a:solidFill>
+          <a:ln w="12700">
+            <a:solidFill>
+              <a:srgbClr val="00ADB5"/>
+            </a:solidFill>
+            <a:prstDash val="solid"/>
+          </a:ln>
+        </p:spPr>
+        <p:txBody>
+          <a:bodyPr/>
+          <a:lstStyle/>
+          <a:p>
+            <a:endParaRPr lang="en-TH"/>
+          </a:p>
+        </p:txBody>
+      </p:sp>
+      <p:sp>
+        <p:nvSpPr>
+          <p:cNvPr id="16" name="Text 14"/>
+          <p:cNvSpPr/>
+          <p:nvPr/>
+        </p:nvSpPr>
+        <p:spPr>
+          <a:xfrm>
+            <a:off x="868680" y="2807208"/>
+            <a:ext cx="329184" cy="329184"/>
+          </a:xfrm>
+          <a:prstGeom prst="rect">
+            <a:avLst/>
+          </a:prstGeom>
+          <a:noFill/>
+          <a:ln/>
+        </p:spPr>
+        <p:txBody>
+          <a:bodyPr wrap="square" lIns="0" tIns="0" rIns="0" bIns="0" rtlCol="0" anchor="ctr"/>
+          <a:lstStyle/>
+          <a:p>
+            <a:pPr marL="0" indent="0" algn="ctr">
+              <a:buNone/>
+            </a:pPr>
+            <a:r>
+              <a:rPr lang="en-US" sz="1500" b="1" dirty="0">
+                <a:solidFill>
+                  <a:srgbClr val="FFFFFF"/>
+                </a:solidFill>
+                <a:latin typeface="TH Sarabun New" pitchFamily="34" charset="0"/>
+                <a:ea typeface="TH Sarabun New" pitchFamily="34" charset="-122"/>
+                <a:cs typeface="TH Sarabun New" pitchFamily="34" charset="-120"/>
+              </a:rPr>
+              <a:t>3</a:t>
+            </a:r>
+            <a:endParaRPr lang="en-US" sz="1500" dirty="0"/>
+          </a:p>
+        </p:txBody>
+      </p:sp>
+      <p:sp>
+        <p:nvSpPr>
+          <p:cNvPr id="17" name="Text 15"/>
+          <p:cNvSpPr/>
+          <p:nvPr/>
+        </p:nvSpPr>
+        <p:spPr>
+          <a:xfrm>
+            <a:off x="1307592" y="2743200"/>
+            <a:ext cx="4754880" cy="457200"/>
+          </a:xfrm>
+          <a:prstGeom prst="rect">
+            <a:avLst/>
+          </a:prstGeom>
+          <a:noFill/>
+          <a:ln/>
+        </p:spPr>
+        <p:txBody>
+          <a:bodyPr wrap="square" lIns="0" tIns="0" rIns="0" bIns="0" rtlCol="0" anchor="ctr"/>
+          <a:lstStyle/>
+          <a:p>
+            <a:pPr marL="0" indent="0">
+              <a:buNone/>
+            </a:pPr>
+            <a:r>
+              <a:rPr lang="en-US" sz="1600" dirty="0">
+                <a:solidFill>
+                  <a:srgbClr val="393E46"/>
+                </a:solidFill>
+                <a:latin typeface="TH Sarabun New" pitchFamily="34" charset="0"/>
+                <a:ea typeface="TH Sarabun New" pitchFamily="34" charset="-122"/>
+                <a:cs typeface="TH Sarabun New" pitchFamily="34" charset="-120"/>
+              </a:rPr>
+              <a:t>สร้างไฟล์เปล่าชื่อ SPEC_FundingHub.md ที่รากโปรเจกต์</a:t>
+            </a:r>
+            <a:endParaRPr lang="en-US" sz="1600" dirty="0"/>
+          </a:p>
+        </p:txBody>
+      </p:sp>
+      <p:sp>
+        <p:nvSpPr>
+          <p:cNvPr id="18" name="Shape 16"/>
+          <p:cNvSpPr/>
+          <p:nvPr/>
+        </p:nvSpPr>
+        <p:spPr>
+          <a:xfrm>
+            <a:off x="868680" y="3392424"/>
+            <a:ext cx="329184" cy="329184"/>
+          </a:xfrm>
+          <a:prstGeom prst="ellipse">
+            <a:avLst/>
+          </a:prstGeom>
+          <a:solidFill>
+            <a:srgbClr val="00ADB5"/>
+          </a:solidFill>
+          <a:ln w="12700">
+            <a:solidFill>
+              <a:srgbClr val="00ADB5"/>
+            </a:solidFill>
+            <a:prstDash val="solid"/>
+          </a:ln>
+        </p:spPr>
+        <p:txBody>
+          <a:bodyPr/>
+          <a:lstStyle/>
+          <a:p>
+            <a:endParaRPr lang="en-TH"/>
+          </a:p>
+        </p:txBody>
+      </p:sp>
+      <p:sp>
+        <p:nvSpPr>
+          <p:cNvPr id="19" name="Text 17"/>
+          <p:cNvSpPr/>
+          <p:nvPr/>
+        </p:nvSpPr>
+        <p:spPr>
+          <a:xfrm>
+            <a:off x="868680" y="3392424"/>
+            <a:ext cx="329184" cy="329184"/>
+          </a:xfrm>
+          <a:prstGeom prst="rect">
+            <a:avLst/>
+          </a:prstGeom>
+          <a:noFill/>
+          <a:ln/>
+        </p:spPr>
+        <p:txBody>
+          <a:bodyPr wrap="square" lIns="0" tIns="0" rIns="0" bIns="0" rtlCol="0" anchor="ctr"/>
+          <a:lstStyle/>
+          <a:p>
+            <a:pPr marL="0" indent="0" algn="ctr">
+              <a:buNone/>
+            </a:pPr>
+            <a:r>
+              <a:rPr lang="en-US" sz="1500" b="1" dirty="0">
+                <a:solidFill>
+                  <a:srgbClr val="FFFFFF"/>
+                </a:solidFill>
+                <a:latin typeface="TH Sarabun New" pitchFamily="34" charset="0"/>
+                <a:ea typeface="TH Sarabun New" pitchFamily="34" charset="-122"/>
+                <a:cs typeface="TH Sarabun New" pitchFamily="34" charset="-120"/>
+              </a:rPr>
+              <a:t>4</a:t>
+            </a:r>
+            <a:endParaRPr lang="en-US" sz="1500" dirty="0"/>
+          </a:p>
+        </p:txBody>
+      </p:sp>
+      <p:sp>
+        <p:nvSpPr>
+          <p:cNvPr id="20" name="Text 18"/>
+          <p:cNvSpPr/>
+          <p:nvPr/>
+        </p:nvSpPr>
+        <p:spPr>
+          <a:xfrm>
+            <a:off x="1307592" y="3328416"/>
+            <a:ext cx="4754880" cy="457200"/>
+          </a:xfrm>
+          <a:prstGeom prst="rect">
+            <a:avLst/>
+          </a:prstGeom>
+          <a:noFill/>
+          <a:ln/>
+        </p:spPr>
+        <p:txBody>
+          <a:bodyPr wrap="square" lIns="0" tIns="0" rIns="0" bIns="0" rtlCol="0" anchor="ctr"/>
+          <a:lstStyle/>
+          <a:p>
+            <a:pPr marL="0" indent="0">
+              <a:buNone/>
+            </a:pPr>
+            <a:r>
+              <a:rPr lang="en-US" sz="1600" dirty="0">
+                <a:solidFill>
+                  <a:srgbClr val="393E46"/>
+                </a:solidFill>
+                <a:latin typeface="TH Sarabun New" pitchFamily="34" charset="0"/>
+                <a:ea typeface="TH Sarabun New" pitchFamily="34" charset="-122"/>
+                <a:cs typeface="TH Sarabun New" pitchFamily="34" charset="-120"/>
+              </a:rPr>
+              <a:t>เปิดไฟล์ SPEC_BLOCKS.md ที่แจกให้ ไว้อีกหน้าต่างหนึ่ง</a:t>
+            </a:r>
+            <a:endParaRPr lang="en-US" sz="1600" dirty="0"/>
+          </a:p>
+        </p:txBody>
+      </p:sp>
+      <p:sp>
+        <p:nvSpPr>
+          <p:cNvPr id="21" name="Shape 19"/>
+          <p:cNvSpPr/>
+          <p:nvPr/>
+        </p:nvSpPr>
+        <p:spPr>
+          <a:xfrm>
+            <a:off x="868680" y="3977640"/>
+            <a:ext cx="329184" cy="329184"/>
+          </a:xfrm>
+          <a:prstGeom prst="ellipse">
+            <a:avLst/>
+          </a:prstGeom>
+          <a:solidFill>
+            <a:srgbClr val="00ADB5"/>
+          </a:solidFill>
+          <a:ln w="12700">
+            <a:solidFill>
+              <a:srgbClr val="00ADB5"/>
+            </a:solidFill>
+            <a:prstDash val="solid"/>
+          </a:ln>
+        </p:spPr>
+        <p:txBody>
+          <a:bodyPr/>
+          <a:lstStyle/>
+          <a:p>
+            <a:endParaRPr lang="en-TH"/>
+          </a:p>
+        </p:txBody>
+      </p:sp>
+      <p:sp>
+        <p:nvSpPr>
+          <p:cNvPr id="22" name="Text 20"/>
+          <p:cNvSpPr/>
+          <p:nvPr/>
+        </p:nvSpPr>
+        <p:spPr>
+          <a:xfrm>
+            <a:off x="868680" y="3977640"/>
+            <a:ext cx="329184" cy="329184"/>
+          </a:xfrm>
+          <a:prstGeom prst="rect">
+            <a:avLst/>
+          </a:prstGeom>
+          <a:noFill/>
+          <a:ln/>
+        </p:spPr>
+        <p:txBody>
+          <a:bodyPr wrap="square" lIns="0" tIns="0" rIns="0" bIns="0" rtlCol="0" anchor="ctr"/>
+          <a:lstStyle/>
+          <a:p>
+            <a:pPr marL="0" indent="0" algn="ctr">
+              <a:buNone/>
+            </a:pPr>
+            <a:r>
+              <a:rPr lang="en-US" sz="1500" b="1" dirty="0">
+                <a:solidFill>
+                  <a:srgbClr val="FFFFFF"/>
+                </a:solidFill>
+                <a:latin typeface="TH Sarabun New" pitchFamily="34" charset="0"/>
+                <a:ea typeface="TH Sarabun New" pitchFamily="34" charset="-122"/>
+                <a:cs typeface="TH Sarabun New" pitchFamily="34" charset="-120"/>
+              </a:rPr>
+              <a:t>5</a:t>
+            </a:r>
+            <a:endParaRPr lang="en-US" sz="1500" dirty="0"/>
+          </a:p>
+        </p:txBody>
+      </p:sp>
+      <p:sp>
+        <p:nvSpPr>
+          <p:cNvPr id="23" name="Text 21"/>
+          <p:cNvSpPr/>
+          <p:nvPr/>
+        </p:nvSpPr>
+        <p:spPr>
+          <a:xfrm>
+            <a:off x="1307592" y="3913632"/>
+            <a:ext cx="4754880" cy="457200"/>
+          </a:xfrm>
+          <a:prstGeom prst="rect">
+            <a:avLst/>
+          </a:prstGeom>
+          <a:noFill/>
+          <a:ln/>
+        </p:spPr>
+        <p:txBody>
+          <a:bodyPr wrap="square" lIns="0" tIns="0" rIns="0" bIns="0" rtlCol="0" anchor="ctr"/>
+          <a:lstStyle/>
+          <a:p>
+            <a:pPr marL="0" indent="0">
+              <a:buNone/>
+            </a:pPr>
+            <a:r>
+              <a:rPr lang="en-US" sz="1600" dirty="0">
+                <a:solidFill>
+                  <a:srgbClr val="393E46"/>
+                </a:solidFill>
+                <a:latin typeface="TH Sarabun New" pitchFamily="34" charset="0"/>
+                <a:ea typeface="TH Sarabun New" pitchFamily="34" charset="-122"/>
+                <a:cs typeface="TH Sarabun New" pitchFamily="34" charset="-120"/>
+              </a:rPr>
+              <a:t>หาให้เจอ 4 ส่วน : Editor / Agent / Artifacts / Browser</a:t>
+            </a:r>
+            <a:endParaRPr lang="en-US" sz="1600" dirty="0"/>
+          </a:p>
+        </p:txBody>
+      </p:sp>
+      <p:sp>
+        <p:nvSpPr>
+          <p:cNvPr id="24" name="Shape 22"/>
+          <p:cNvSpPr/>
+          <p:nvPr/>
+        </p:nvSpPr>
+        <p:spPr>
+          <a:xfrm>
+            <a:off x="6583680" y="1024128"/>
+            <a:ext cx="4983480" cy="1600200"/>
+          </a:xfrm>
+          <a:prstGeom prst="roundRect">
+            <a:avLst>
+              <a:gd name="adj" fmla="val 4000"/>
+            </a:avLst>
+          </a:prstGeom>
+          <a:solidFill>
+            <a:srgbClr val="222831"/>
+          </a:solidFill>
+          <a:ln w="12700">
+            <a:solidFill>
+              <a:srgbClr val="222831"/>
+            </a:solidFill>
+            <a:prstDash val="solid"/>
+          </a:ln>
+        </p:spPr>
+        <p:txBody>
+          <a:bodyPr/>
+          <a:lstStyle/>
+          <a:p>
+            <a:endParaRPr lang="en-TH"/>
+          </a:p>
+        </p:txBody>
+      </p:sp>
+      <p:sp>
+        <p:nvSpPr>
+          <p:cNvPr id="25" name="Text 23"/>
+          <p:cNvSpPr/>
+          <p:nvPr/>
+        </p:nvSpPr>
+        <p:spPr>
+          <a:xfrm>
+            <a:off x="6729984" y="1115568"/>
+            <a:ext cx="4690872" cy="1417320"/>
+          </a:xfrm>
+          <a:prstGeom prst="rect">
+            <a:avLst/>
+          </a:prstGeom>
+          <a:noFill/>
+          <a:ln/>
+        </p:spPr>
+        <p:txBody>
+          <a:bodyPr wrap="square" lIns="0" tIns="0" rIns="0" bIns="0" rtlCol="0" anchor="t"/>
+          <a:lstStyle/>
+          <a:p>
+            <a:pPr marL="0" indent="0">
+              <a:lnSpc>
+                <a:spcPts val="1700"/>
+              </a:lnSpc>
+              <a:buNone/>
+            </a:pPr>
+            <a:r>
+              <a:rPr lang="en-US" sz="1150" dirty="0">
+                <a:solidFill>
+                  <a:srgbClr val="D6F5F7"/>
+                </a:solidFill>
+                <a:latin typeface="Courier New" pitchFamily="34" charset="0"/>
+                <a:ea typeface="Courier New" pitchFamily="34" charset="-122"/>
+                <a:cs typeface="Courier New" pitchFamily="34" charset="-120"/>
+              </a:rPr>
+              <a:t>node -v</a:t>
+            </a:r>
+            <a:endParaRPr lang="en-US" sz="1150" dirty="0"/>
+          </a:p>
+          <a:p>
+            <a:pPr marL="0" indent="0">
+              <a:lnSpc>
+                <a:spcPts val="1700"/>
+              </a:lnSpc>
+              <a:buNone/>
+            </a:pPr>
+            <a:r>
+              <a:rPr lang="en-US" sz="1150" dirty="0">
+                <a:solidFill>
+                  <a:srgbClr val="D6F5F7"/>
+                </a:solidFill>
+                <a:latin typeface="Courier New" pitchFamily="34" charset="0"/>
+                <a:ea typeface="Courier New" pitchFamily="34" charset="-122"/>
+                <a:cs typeface="Courier New" pitchFamily="34" charset="-120"/>
+              </a:rPr>
+              <a:t>npm -v</a:t>
+            </a:r>
+            <a:endParaRPr lang="en-US" sz="1150" dirty="0"/>
+          </a:p>
+          <a:p>
+            <a:pPr marL="0" indent="0">
+              <a:lnSpc>
+                <a:spcPts val="1700"/>
+              </a:lnSpc>
+              <a:buNone/>
+            </a:pPr>
+            <a:r>
+              <a:rPr lang="en-US" sz="1150" dirty="0">
+                <a:solidFill>
+                  <a:srgbClr val="D6F5F7"/>
+                </a:solidFill>
+                <a:latin typeface="Courier New" pitchFamily="34" charset="0"/>
+                <a:ea typeface="Courier New" pitchFamily="34" charset="-122"/>
+                <a:cs typeface="Courier New" pitchFamily="34" charset="-120"/>
+              </a:rPr>
+              <a:t>git --version</a:t>
+            </a:r>
+            <a:endParaRPr lang="en-US" sz="1150" dirty="0"/>
+          </a:p>
+        </p:txBody>
+      </p:sp>
+      <p:sp>
+        <p:nvSpPr>
+          <p:cNvPr id="26" name="Shape 24"/>
+          <p:cNvSpPr/>
+          <p:nvPr/>
+        </p:nvSpPr>
+        <p:spPr>
+          <a:xfrm>
+            <a:off x="6583680" y="2788920"/>
+            <a:ext cx="4983480" cy="2029968"/>
+          </a:xfrm>
+          <a:prstGeom prst="roundRect">
+            <a:avLst>
+              <a:gd name="adj" fmla="val 4054"/>
+            </a:avLst>
+          </a:prstGeom>
+          <a:solidFill>
+            <a:srgbClr val="FFFFFF"/>
+          </a:solidFill>
+          <a:ln w="9525">
+            <a:solidFill>
+              <a:srgbClr val="FFFFFF"/>
+            </a:solidFill>
+            <a:prstDash val="solid"/>
+          </a:ln>
+          <a:effectLst>
+            <a:outerShdw blurRad="101600" dist="12700" dir="5400000" algn="bl" rotWithShape="0">
+              <a:srgbClr val="222831">
+                <a:alpha val="10000"/>
+              </a:srgbClr>
+            </a:outerShdw>
+          </a:effectLst>
+        </p:spPr>
+        <p:txBody>
+          <a:bodyPr/>
+          <a:lstStyle/>
+          <a:p>
+            <a:endParaRPr lang="en-TH"/>
+          </a:p>
+        </p:txBody>
+      </p:sp>
+      <p:sp>
+        <p:nvSpPr>
+          <p:cNvPr id="27" name="Text 25"/>
+          <p:cNvSpPr/>
+          <p:nvPr/>
+        </p:nvSpPr>
+        <p:spPr>
+          <a:xfrm>
+            <a:off x="6812280" y="2926080"/>
+            <a:ext cx="4526280" cy="310896"/>
+          </a:xfrm>
+          <a:prstGeom prst="rect">
+            <a:avLst/>
+          </a:prstGeom>
+          <a:noFill/>
+          <a:ln/>
+        </p:spPr>
+        <p:txBody>
+          <a:bodyPr wrap="square" lIns="0" tIns="0" rIns="0" bIns="0" rtlCol="0" anchor="ctr"/>
+          <a:lstStyle/>
+          <a:p>
+            <a:pPr marL="0" indent="0">
+              <a:buNone/>
+            </a:pPr>
+            <a:r>
+              <a:rPr lang="en-US" sz="1800" b="1" dirty="0">
+                <a:solidFill>
+                  <a:srgbClr val="222831"/>
+                </a:solidFill>
+                <a:latin typeface="TH Sarabun New" pitchFamily="34" charset="0"/>
+                <a:ea typeface="TH Sarabun New" pitchFamily="34" charset="-122"/>
+                <a:cs typeface="TH Sarabun New" pitchFamily="34" charset="-120"/>
+              </a:rPr>
+              <a:t>เกณฑ์ผ่าน</a:t>
+            </a:r>
+            <a:endParaRPr lang="en-US" sz="1800" dirty="0"/>
+          </a:p>
+        </p:txBody>
+      </p:sp>
+      <p:sp>
+        <p:nvSpPr>
+          <p:cNvPr id="28" name="Text 26"/>
+          <p:cNvSpPr/>
+          <p:nvPr/>
+        </p:nvSpPr>
+        <p:spPr>
+          <a:xfrm>
+            <a:off x="6812280" y="3310128"/>
+            <a:ext cx="4480560" cy="1371600"/>
+          </a:xfrm>
+          <a:prstGeom prst="rect">
+            <a:avLst/>
+          </a:prstGeom>
+          <a:noFill/>
+          <a:ln/>
+        </p:spPr>
+        <p:txBody>
+          <a:bodyPr wrap="square" lIns="0" tIns="0" rIns="0" bIns="0" rtlCol="0" anchor="t"/>
+          <a:lstStyle/>
+          <a:p>
+            <a:pPr marL="342900" indent="-342900">
+              <a:spcAft>
+                <a:spcPts val="800"/>
+              </a:spcAft>
+              <a:buSzPct val="100000"/>
+              <a:buChar char="•"/>
+            </a:pPr>
+            <a:r>
+              <a:rPr lang="en-US" sz="1550" dirty="0">
+                <a:solidFill>
+                  <a:srgbClr val="393E46"/>
+                </a:solidFill>
+                <a:latin typeface="TH Sarabun New" pitchFamily="34" charset="0"/>
+                <a:ea typeface="TH Sarabun New" pitchFamily="34" charset="-122"/>
+                <a:cs typeface="TH Sarabun New" pitchFamily="34" charset="-120"/>
+              </a:rPr>
+              <a:t>ทุกคำสั่งขึ้นเลขเวอร์ชัน ไม่ขึ้น command not found</a:t>
+            </a:r>
+            <a:endParaRPr lang="en-US" sz="1550" dirty="0"/>
+          </a:p>
+          <a:p>
+            <a:pPr marL="342900" indent="-342900">
+              <a:spcAft>
+                <a:spcPts val="800"/>
+              </a:spcAft>
+              <a:buSzPct val="100000"/>
+              <a:buChar char="•"/>
+            </a:pPr>
+            <a:r>
+              <a:rPr lang="en-US" sz="1550" dirty="0">
+                <a:solidFill>
+                  <a:srgbClr val="393E46"/>
+                </a:solidFill>
+                <a:latin typeface="TH Sarabun New" pitchFamily="34" charset="0"/>
+                <a:ea typeface="TH Sarabun New" pitchFamily="34" charset="-122"/>
+                <a:cs typeface="TH Sarabun New" pitchFamily="34" charset="-120"/>
+              </a:rPr>
+              <a:t>เปิดโฟลเดอร์ fundinghub ใน Antigravity ได้</a:t>
+            </a:r>
+            <a:endParaRPr lang="en-US" sz="1550" dirty="0"/>
+          </a:p>
+          <a:p>
+            <a:pPr marL="342900" indent="-342900">
+              <a:spcAft>
+                <a:spcPts val="800"/>
+              </a:spcAft>
+              <a:buSzPct val="100000"/>
+              <a:buChar char="•"/>
+            </a:pPr>
+            <a:r>
+              <a:rPr lang="en-US" sz="1550" dirty="0">
+                <a:solidFill>
+                  <a:srgbClr val="393E46"/>
+                </a:solidFill>
+                <a:latin typeface="TH Sarabun New" pitchFamily="34" charset="0"/>
+                <a:ea typeface="TH Sarabun New" pitchFamily="34" charset="-122"/>
+                <a:cs typeface="TH Sarabun New" pitchFamily="34" charset="-120"/>
+              </a:rPr>
+              <a:t>มีไฟล์เปล่า SPEC_FundingHub.md รออยู่</a:t>
+            </a:r>
+            <a:endParaRPr lang="en-US" sz="1550" dirty="0"/>
+          </a:p>
+        </p:txBody>
+      </p:sp>
+      <p:sp>
+        <p:nvSpPr>
+          <p:cNvPr id="29" name="Text 27"/>
+          <p:cNvSpPr/>
+          <p:nvPr/>
+        </p:nvSpPr>
+        <p:spPr>
+          <a:xfrm>
+            <a:off x="594360" y="6263640"/>
+            <a:ext cx="10972800" cy="292608"/>
+          </a:xfrm>
+          <a:prstGeom prst="rect">
+            <a:avLst/>
+          </a:prstGeom>
+          <a:noFill/>
+          <a:ln/>
+        </p:spPr>
+        <p:txBody>
+          <a:bodyPr wrap="square" lIns="0" tIns="0" rIns="0" bIns="0" rtlCol="0" anchor="ctr"/>
+          <a:lstStyle/>
+          <a:p>
+            <a:pPr marL="0" indent="0">
+              <a:buNone/>
+            </a:pPr>
+            <a:r>
+              <a:rPr lang="en-US" sz="1300" dirty="0">
+                <a:solidFill>
+                  <a:srgbClr val="8A94A6"/>
+                </a:solidFill>
+                <a:latin typeface="TH Sarabun New" pitchFamily="34" charset="0"/>
+                <a:ea typeface="TH Sarabun New" pitchFamily="34" charset="-122"/>
+                <a:cs typeface="TH Sarabun New" pitchFamily="34" charset="-120"/>
+              </a:rPr>
+              <a:t>เอกสารแล็บ : LAB A  ·  การติดตั้งควรทำมาล่วงหน้าก่อนวันอบรม เวลาในห้องมีเพียง 10 นาทีสำหรับตรวจความพร้อม</a:t>
+            </a:r>
+            <a:endParaRPr lang="en-US" sz="1300" dirty="0"/>
+          </a:p>
+        </p:txBody>
+      </p:sp>
+    </p:spTree>
+  </p:cSld>
+  <p:clrMapOvr>
+    <a:masterClrMapping/>
+  </p:clrMapOvr>
+</p:sld>
+</file>
+
+<file path=ppt/slides/slide11.xml><?xml version="1.0" encoding="utf-8"?>
+<p:sld xmlns:a="http://schemas.openxmlformats.org/drawingml/2006/main" xmlns:r="http://schemas.openxmlformats.org/officeDocument/2006/relationships" xmlns:p="http://schemas.openxmlformats.org/presentationml/2006/main">
   <p:cSld name="Slide 11">
     <p:bg>
       <p:bgPr>
@@ -3516,7 +4690,7 @@
 </p:sld>
 </file>
 
-<file path=ppt/slides/slide11.xml><?xml version="1.0" encoding="utf-8"?>
+<file path=ppt/slides/slide12.xml><?xml version="1.0" encoding="utf-8"?>
 <p:sld xmlns:a="http://schemas.openxmlformats.org/drawingml/2006/main" xmlns:r="http://schemas.openxmlformats.org/officeDocument/2006/relationships" xmlns:p="http://schemas.openxmlformats.org/presentationml/2006/main">
   <p:cSld name="Slide 12">
     <p:bg>
@@ -3941,7 +5115,7 @@
 </p:sld>
 </file>
 
-<file path=ppt/slides/slide12.xml><?xml version="1.0" encoding="utf-8"?>
+<file path=ppt/slides/slide13.xml><?xml version="1.0" encoding="utf-8"?>
 <p:sld xmlns:a="http://schemas.openxmlformats.org/drawingml/2006/main" xmlns:r="http://schemas.openxmlformats.org/officeDocument/2006/relationships" xmlns:p="http://schemas.openxmlformats.org/presentationml/2006/main">
   <p:cSld name="Slide 13">
     <p:bg>
@@ -4890,7 +6064,7 @@
 </p:sld>
 </file>
 
-<file path=ppt/slides/slide13.xml><?xml version="1.0" encoding="utf-8"?>
+<file path=ppt/slides/slide14.xml><?xml version="1.0" encoding="utf-8"?>
 <p:sld xmlns:a="http://schemas.openxmlformats.org/drawingml/2006/main" xmlns:r="http://schemas.openxmlformats.org/officeDocument/2006/relationships" xmlns:p="http://schemas.openxmlformats.org/presentationml/2006/main">
   <p:cSld name="Slide 14">
     <p:bg>
@@ -5605,7 +6779,7 @@
 </p:sld>
 </file>
 
-<file path=ppt/slides/slide14.xml><?xml version="1.0" encoding="utf-8"?>
+<file path=ppt/slides/slide15.xml><?xml version="1.0" encoding="utf-8"?>
 <p:sld xmlns:a="http://schemas.openxmlformats.org/drawingml/2006/main" xmlns:r="http://schemas.openxmlformats.org/officeDocument/2006/relationships" xmlns:p="http://schemas.openxmlformats.org/presentationml/2006/main">
   <p:cSld name="Slide 16">
     <p:bg>
@@ -6667,7 +7841,7 @@
 </p:sld>
 </file>
 
-<file path=ppt/slides/slide15.xml><?xml version="1.0" encoding="utf-8"?>
+<file path=ppt/slides/slide16.xml><?xml version="1.0" encoding="utf-8"?>
 <p:sld xmlns:a="http://schemas.openxmlformats.org/drawingml/2006/main" xmlns:r="http://schemas.openxmlformats.org/officeDocument/2006/relationships" xmlns:p="http://schemas.openxmlformats.org/presentationml/2006/main">
   <p:cSld name="Slide 17">
     <p:bg>
@@ -6888,7 +8062,7 @@
 </p:sld>
 </file>
 
-<file path=ppt/slides/slide16.xml><?xml version="1.0" encoding="utf-8"?>
+<file path=ppt/slides/slide17.xml><?xml version="1.0" encoding="utf-8"?>
 <p:sld xmlns:a="http://schemas.openxmlformats.org/drawingml/2006/main" xmlns:r="http://schemas.openxmlformats.org/officeDocument/2006/relationships" xmlns:p="http://schemas.openxmlformats.org/presentationml/2006/main">
   <p:cSld name="Slide 18">
     <p:bg>
@@ -7864,7 +9038,7 @@
 </p:sld>
 </file>
 
-<file path=ppt/slides/slide17.xml><?xml version="1.0" encoding="utf-8"?>
+<file path=ppt/slides/slide18.xml><?xml version="1.0" encoding="utf-8"?>
 <p:sld xmlns:a="http://schemas.openxmlformats.org/drawingml/2006/main" xmlns:r="http://schemas.openxmlformats.org/officeDocument/2006/relationships" xmlns:p="http://schemas.openxmlformats.org/presentationml/2006/main">
   <p:cSld name="Slide 23">
     <p:bg>
@@ -8085,7 +9259,7 @@
 </p:sld>
 </file>
 
-<file path=ppt/slides/slide18.xml><?xml version="1.0" encoding="utf-8"?>
+<file path=ppt/slides/slide19.xml><?xml version="1.0" encoding="utf-8"?>
 <p:sld xmlns:a="http://schemas.openxmlformats.org/drawingml/2006/main" xmlns:r="http://schemas.openxmlformats.org/officeDocument/2006/relationships" xmlns:p="http://schemas.openxmlformats.org/presentationml/2006/main">
   <p:cSld name="Slide 24">
     <p:bg>
@@ -9177,7 +10351,110 @@
 </p:sld>
 </file>
 
-<file path=ppt/slides/slide19.xml><?xml version="1.0" encoding="utf-8"?>
+<file path=ppt/slides/slide2.xml><?xml version="1.0" encoding="utf-8"?>
+<p:sld xmlns:a="http://schemas.openxmlformats.org/drawingml/2006/main" xmlns:r="http://schemas.openxmlformats.org/officeDocument/2006/relationships" xmlns:p="http://schemas.openxmlformats.org/presentationml/2006/main">
+  <p:cSld>
+    <p:spTree>
+      <p:nvGrpSpPr>
+        <p:cNvPr id="1" name=""/>
+        <p:cNvGrpSpPr/>
+        <p:nvPr/>
+      </p:nvGrpSpPr>
+      <p:grpSpPr>
+        <a:xfrm>
+          <a:off x="0" y="0"/>
+          <a:ext cx="0" cy="0"/>
+          <a:chOff x="0" y="0"/>
+          <a:chExt cx="0" cy="0"/>
+        </a:xfrm>
+      </p:grpSpPr>
+      <p:pic>
+        <p:nvPicPr>
+          <p:cNvPr id="2" name="Picture 1">
+            <a:extLst>
+              <a:ext uri="{FF2B5EF4-FFF2-40B4-BE49-F238E27FC236}">
+                <a16:creationId xmlns:a16="http://schemas.microsoft.com/office/drawing/2014/main" id="{672B6859-8155-3FC0-4729-D2349EB114DD}"/>
+              </a:ext>
+            </a:extLst>
+          </p:cNvPr>
+          <p:cNvPicPr>
+            <a:picLocks noChangeAspect="1"/>
+          </p:cNvPicPr>
+          <p:nvPr/>
+        </p:nvPicPr>
+        <p:blipFill>
+          <a:blip r:embed="rId2"/>
+          <a:stretch>
+            <a:fillRect/>
+          </a:stretch>
+        </p:blipFill>
+        <p:spPr>
+          <a:xfrm>
+            <a:off x="1705449" y="1753538"/>
+            <a:ext cx="3621293" cy="3621293"/>
+          </a:xfrm>
+          <a:prstGeom prst="rect">
+            <a:avLst/>
+          </a:prstGeom>
+        </p:spPr>
+      </p:pic>
+      <p:sp>
+        <p:nvSpPr>
+          <p:cNvPr id="4" name="TextBox 3">
+            <a:extLst>
+              <a:ext uri="{FF2B5EF4-FFF2-40B4-BE49-F238E27FC236}">
+                <a16:creationId xmlns:a16="http://schemas.microsoft.com/office/drawing/2014/main" id="{266AA7FA-08A3-0813-318A-134AA6B5530F}"/>
+              </a:ext>
+            </a:extLst>
+          </p:cNvPr>
+          <p:cNvSpPr txBox="1"/>
+          <p:nvPr/>
+        </p:nvSpPr>
+        <p:spPr>
+          <a:xfrm>
+            <a:off x="6096000" y="3310268"/>
+            <a:ext cx="6096000" cy="523220"/>
+          </a:xfrm>
+          <a:prstGeom prst="rect">
+            <a:avLst/>
+          </a:prstGeom>
+          <a:noFill/>
+        </p:spPr>
+        <p:txBody>
+          <a:bodyPr wrap="square">
+            <a:spAutoFit/>
+          </a:bodyPr>
+          <a:lstStyle/>
+          <a:p>
+            <a:r>
+              <a:rPr lang="en-TH" sz="2800" b="0" i="0" u="none" strike="noStrike">
+                <a:solidFill>
+                  <a:schemeClr val="tx1"/>
+                </a:solidFill>
+                <a:effectLst/>
+                <a:latin typeface="+mn-lt"/>
+                <a:hlinkClick r:id="rId3"/>
+              </a:rPr>
+              <a:t>https://cmu.to/z84tQ</a:t>
+            </a:r>
+            <a:endParaRPr lang="en-TH" sz="2800"/>
+          </a:p>
+        </p:txBody>
+      </p:sp>
+    </p:spTree>
+    <p:extLst>
+      <p:ext uri="{BB962C8B-B14F-4D97-AF65-F5344CB8AC3E}">
+        <p14:creationId xmlns:p14="http://schemas.microsoft.com/office/powerpoint/2010/main" val="534680153"/>
+      </p:ext>
+    </p:extLst>
+  </p:cSld>
+  <p:clrMapOvr>
+    <a:masterClrMapping/>
+  </p:clrMapOvr>
+</p:sld>
+</file>
+
+<file path=ppt/slides/slide20.xml><?xml version="1.0" encoding="utf-8"?>
 <p:sld xmlns:a="http://schemas.openxmlformats.org/drawingml/2006/main" xmlns:r="http://schemas.openxmlformats.org/officeDocument/2006/relationships" xmlns:p="http://schemas.openxmlformats.org/presentationml/2006/main">
   <p:cSld name="Slide 25">
     <p:bg>
@@ -10450,917 +11727,7 @@
 </p:sld>
 </file>
 
-<file path=ppt/slides/slide2.xml><?xml version="1.0" encoding="utf-8"?>
-<p:sld xmlns:a="http://schemas.openxmlformats.org/drawingml/2006/main" xmlns:r="http://schemas.openxmlformats.org/officeDocument/2006/relationships" xmlns:p="http://schemas.openxmlformats.org/presentationml/2006/main">
-  <p:cSld name="Slide 2">
-    <p:bg>
-      <p:bgPr>
-        <a:solidFill>
-          <a:srgbClr val="FFFFFF"/>
-        </a:solidFill>
-        <a:effectLst/>
-      </p:bgPr>
-    </p:bg>
-    <p:spTree>
-      <p:nvGrpSpPr>
-        <p:cNvPr id="1" name=""/>
-        <p:cNvGrpSpPr/>
-        <p:nvPr/>
-      </p:nvGrpSpPr>
-      <p:grpSpPr>
-        <a:xfrm>
-          <a:off x="0" y="0"/>
-          <a:ext cx="0" cy="0"/>
-          <a:chOff x="0" y="0"/>
-          <a:chExt cx="0" cy="0"/>
-        </a:xfrm>
-      </p:grpSpPr>
-      <p:sp>
-        <p:nvSpPr>
-          <p:cNvPr id="2" name="Text 0"/>
-          <p:cNvSpPr/>
-          <p:nvPr/>
-        </p:nvSpPr>
-        <p:spPr>
-          <a:xfrm>
-            <a:off x="11018520" y="6263640"/>
-            <a:ext cx="548640" cy="274320"/>
-          </a:xfrm>
-          <a:prstGeom prst="rect">
-            <a:avLst/>
-          </a:prstGeom>
-          <a:noFill/>
-          <a:ln/>
-        </p:spPr>
-        <p:txBody>
-          <a:bodyPr wrap="square" lIns="0" tIns="0" rIns="0" bIns="0" rtlCol="0" anchor="ctr"/>
-          <a:lstStyle/>
-          <a:p>
-            <a:pPr marL="0" indent="0" algn="r">
-              <a:buNone/>
-            </a:pPr>
-            <a:r>
-              <a:rPr lang="en-US" sz="1200" dirty="0">
-                <a:solidFill>
-                  <a:srgbClr val="9AA3AD"/>
-                </a:solidFill>
-                <a:latin typeface="TH Sarabun New" pitchFamily="34" charset="0"/>
-                <a:ea typeface="TH Sarabun New" pitchFamily="34" charset="-122"/>
-                <a:cs typeface="TH Sarabun New" pitchFamily="34" charset="-120"/>
-              </a:rPr>
-              <a:t>2</a:t>
-            </a:r>
-            <a:endParaRPr lang="en-US" sz="1200" dirty="0"/>
-          </a:p>
-        </p:txBody>
-      </p:sp>
-      <p:sp>
-        <p:nvSpPr>
-          <p:cNvPr id="3" name="Text 1"/>
-          <p:cNvSpPr/>
-          <p:nvPr/>
-        </p:nvSpPr>
-        <p:spPr>
-          <a:xfrm>
-            <a:off x="594360" y="329184"/>
-            <a:ext cx="10972800" cy="566928"/>
-          </a:xfrm>
-          <a:prstGeom prst="rect">
-            <a:avLst/>
-          </a:prstGeom>
-          <a:noFill/>
-          <a:ln/>
-        </p:spPr>
-        <p:txBody>
-          <a:bodyPr wrap="square" lIns="0" tIns="0" rIns="0" bIns="0" rtlCol="0" anchor="ctr"/>
-          <a:lstStyle/>
-          <a:p>
-            <a:pPr marL="0" indent="0">
-              <a:buNone/>
-            </a:pPr>
-            <a:r>
-              <a:rPr lang="en-US" sz="3200" b="1" dirty="0">
-                <a:solidFill>
-                  <a:srgbClr val="222831"/>
-                </a:solidFill>
-                <a:latin typeface="TH Sarabun New" pitchFamily="34" charset="0"/>
-                <a:ea typeface="TH Sarabun New" pitchFamily="34" charset="-122"/>
-                <a:cs typeface="TH Sarabun New" pitchFamily="34" charset="-120"/>
-              </a:rPr>
-              <a:t>เป้าหมาย</a:t>
-            </a:r>
-            <a:endParaRPr lang="en-US" sz="3200" dirty="0"/>
-          </a:p>
-        </p:txBody>
-      </p:sp>
-      <p:sp>
-        <p:nvSpPr>
-          <p:cNvPr id="4" name="Text 2"/>
-          <p:cNvSpPr/>
-          <p:nvPr/>
-        </p:nvSpPr>
-        <p:spPr>
-          <a:xfrm>
-            <a:off x="594360" y="896112"/>
-            <a:ext cx="10972800" cy="329184"/>
-          </a:xfrm>
-          <a:prstGeom prst="rect">
-            <a:avLst/>
-          </a:prstGeom>
-          <a:noFill/>
-          <a:ln/>
-        </p:spPr>
-        <p:txBody>
-          <a:bodyPr wrap="square" lIns="0" tIns="0" rIns="0" bIns="0" rtlCol="0" anchor="ctr"/>
-          <a:lstStyle/>
-          <a:p>
-            <a:pPr marL="0" indent="0">
-              <a:buNone/>
-            </a:pPr>
-            <a:r>
-              <a:rPr lang="en-US" sz="1700" dirty="0">
-                <a:solidFill>
-                  <a:srgbClr val="8A94A6"/>
-                </a:solidFill>
-                <a:latin typeface="TH Sarabun New" pitchFamily="34" charset="0"/>
-                <a:ea typeface="TH Sarabun New" pitchFamily="34" charset="-122"/>
-                <a:cs typeface="TH Sarabun New" pitchFamily="34" charset="-120"/>
-              </a:rPr>
-              <a:t>เมื่อจบวันนี้ ผู้เข้าอบรมจะทำสิ่งเหล่านี้ได้ด้วยตนเอง</a:t>
-            </a:r>
-            <a:endParaRPr lang="en-US" sz="1700" dirty="0"/>
-          </a:p>
-        </p:txBody>
-      </p:sp>
-      <p:sp>
-        <p:nvSpPr>
-          <p:cNvPr id="5" name="Shape 3"/>
-          <p:cNvSpPr/>
-          <p:nvPr/>
-        </p:nvSpPr>
-        <p:spPr>
-          <a:xfrm>
-            <a:off x="594360" y="1481328"/>
-            <a:ext cx="5340096" cy="1371600"/>
-          </a:xfrm>
-          <a:prstGeom prst="roundRect">
-            <a:avLst>
-              <a:gd name="adj" fmla="val 6000"/>
-            </a:avLst>
-          </a:prstGeom>
-          <a:solidFill>
-            <a:srgbClr val="F5F7F8"/>
-          </a:solidFill>
-          <a:ln w="9525">
-            <a:solidFill>
-              <a:srgbClr val="F5F7F8"/>
-            </a:solidFill>
-            <a:prstDash val="solid"/>
-          </a:ln>
-          <a:effectLst>
-            <a:outerShdw blurRad="101600" dist="12700" dir="5400000" algn="bl" rotWithShape="0">
-              <a:srgbClr val="222831">
-                <a:alpha val="10000"/>
-              </a:srgbClr>
-            </a:outerShdw>
-          </a:effectLst>
-        </p:spPr>
-        <p:txBody>
-          <a:bodyPr/>
-          <a:lstStyle/>
-          <a:p>
-            <a:endParaRPr lang="en-TH"/>
-          </a:p>
-        </p:txBody>
-      </p:sp>
-      <p:sp>
-        <p:nvSpPr>
-          <p:cNvPr id="6" name="Shape 4"/>
-          <p:cNvSpPr/>
-          <p:nvPr/>
-        </p:nvSpPr>
-        <p:spPr>
-          <a:xfrm>
-            <a:off x="850392" y="1737360"/>
-            <a:ext cx="402336" cy="402336"/>
-          </a:xfrm>
-          <a:prstGeom prst="ellipse">
-            <a:avLst/>
-          </a:prstGeom>
-          <a:solidFill>
-            <a:srgbClr val="00ADB5"/>
-          </a:solidFill>
-          <a:ln w="12700">
-            <a:solidFill>
-              <a:srgbClr val="00ADB5"/>
-            </a:solidFill>
-            <a:prstDash val="solid"/>
-          </a:ln>
-        </p:spPr>
-        <p:txBody>
-          <a:bodyPr/>
-          <a:lstStyle/>
-          <a:p>
-            <a:endParaRPr lang="en-TH"/>
-          </a:p>
-        </p:txBody>
-      </p:sp>
-      <p:sp>
-        <p:nvSpPr>
-          <p:cNvPr id="7" name="Text 5"/>
-          <p:cNvSpPr/>
-          <p:nvPr/>
-        </p:nvSpPr>
-        <p:spPr>
-          <a:xfrm>
-            <a:off x="850392" y="1737360"/>
-            <a:ext cx="402336" cy="402336"/>
-          </a:xfrm>
-          <a:prstGeom prst="rect">
-            <a:avLst/>
-          </a:prstGeom>
-          <a:noFill/>
-          <a:ln/>
-        </p:spPr>
-        <p:txBody>
-          <a:bodyPr wrap="square" lIns="0" tIns="0" rIns="0" bIns="0" rtlCol="0" anchor="ctr"/>
-          <a:lstStyle/>
-          <a:p>
-            <a:pPr marL="0" indent="0" algn="ctr">
-              <a:buNone/>
-            </a:pPr>
-            <a:r>
-              <a:rPr lang="en-US" sz="1500" b="1" dirty="0">
-                <a:solidFill>
-                  <a:srgbClr val="FFFFFF"/>
-                </a:solidFill>
-                <a:latin typeface="TH Sarabun New" pitchFamily="34" charset="0"/>
-                <a:ea typeface="TH Sarabun New" pitchFamily="34" charset="-122"/>
-                <a:cs typeface="TH Sarabun New" pitchFamily="34" charset="-120"/>
-              </a:rPr>
-              <a:t>1</a:t>
-            </a:r>
-            <a:endParaRPr lang="en-US" sz="1500" dirty="0"/>
-          </a:p>
-        </p:txBody>
-      </p:sp>
-      <p:sp>
-        <p:nvSpPr>
-          <p:cNvPr id="8" name="Text 6"/>
-          <p:cNvSpPr/>
-          <p:nvPr/>
-        </p:nvSpPr>
-        <p:spPr>
-          <a:xfrm>
-            <a:off x="1380744" y="1700784"/>
-            <a:ext cx="4389120" cy="384048"/>
-          </a:xfrm>
-          <a:prstGeom prst="rect">
-            <a:avLst/>
-          </a:prstGeom>
-          <a:noFill/>
-          <a:ln/>
-        </p:spPr>
-        <p:txBody>
-          <a:bodyPr wrap="square" lIns="0" tIns="0" rIns="0" bIns="0" rtlCol="0" anchor="ctr"/>
-          <a:lstStyle/>
-          <a:p>
-            <a:pPr marL="0" indent="0">
-              <a:buNone/>
-            </a:pPr>
-            <a:r>
-              <a:rPr lang="en-US" sz="1900" b="1" dirty="0">
-                <a:solidFill>
-                  <a:srgbClr val="222831"/>
-                </a:solidFill>
-                <a:latin typeface="TH Sarabun New" pitchFamily="34" charset="0"/>
-                <a:ea typeface="TH Sarabun New" pitchFamily="34" charset="-122"/>
-                <a:cs typeface="TH Sarabun New" pitchFamily="34" charset="-120"/>
-              </a:rPr>
-              <a:t>เข้าใจโครงสร้างเว็บแอปพลิเคชัน</a:t>
-            </a:r>
-            <a:endParaRPr lang="en-US" sz="1900" dirty="0"/>
-          </a:p>
-        </p:txBody>
-      </p:sp>
-      <p:sp>
-        <p:nvSpPr>
-          <p:cNvPr id="9" name="Text 7"/>
-          <p:cNvSpPr/>
-          <p:nvPr/>
-        </p:nvSpPr>
-        <p:spPr>
-          <a:xfrm>
-            <a:off x="1380744" y="2121408"/>
-            <a:ext cx="4389120" cy="566928"/>
-          </a:xfrm>
-          <a:prstGeom prst="rect">
-            <a:avLst/>
-          </a:prstGeom>
-          <a:noFill/>
-          <a:ln/>
-        </p:spPr>
-        <p:txBody>
-          <a:bodyPr wrap="square" lIns="0" tIns="0" rIns="0" bIns="0" rtlCol="0" anchor="t"/>
-          <a:lstStyle/>
-          <a:p>
-            <a:pPr marL="0" indent="0">
-              <a:buNone/>
-            </a:pPr>
-            <a:r>
-              <a:rPr lang="en-US" sz="1550" dirty="0">
-                <a:solidFill>
-                  <a:srgbClr val="393E46"/>
-                </a:solidFill>
-                <a:latin typeface="TH Sarabun New" pitchFamily="34" charset="0"/>
-                <a:ea typeface="TH Sarabun New" pitchFamily="34" charset="-122"/>
-                <a:cs typeface="TH Sarabun New" pitchFamily="34" charset="-120"/>
-              </a:rPr>
-              <a:t>แยกออกว่า Frontend / Backend / Database ทำหน้าที่ต่างกันอย่างไร</a:t>
-            </a:r>
-            <a:endParaRPr lang="en-US" sz="1550" dirty="0"/>
-          </a:p>
-        </p:txBody>
-      </p:sp>
-      <p:sp>
-        <p:nvSpPr>
-          <p:cNvPr id="10" name="Shape 8"/>
-          <p:cNvSpPr/>
-          <p:nvPr/>
-        </p:nvSpPr>
-        <p:spPr>
-          <a:xfrm>
-            <a:off x="6227064" y="1481328"/>
-            <a:ext cx="5340096" cy="1371600"/>
-          </a:xfrm>
-          <a:prstGeom prst="roundRect">
-            <a:avLst>
-              <a:gd name="adj" fmla="val 6000"/>
-            </a:avLst>
-          </a:prstGeom>
-          <a:solidFill>
-            <a:srgbClr val="F5F7F8"/>
-          </a:solidFill>
-          <a:ln w="9525">
-            <a:solidFill>
-              <a:srgbClr val="F5F7F8"/>
-            </a:solidFill>
-            <a:prstDash val="solid"/>
-          </a:ln>
-          <a:effectLst>
-            <a:outerShdw blurRad="101600" dist="12700" dir="5400000" algn="bl" rotWithShape="0">
-              <a:srgbClr val="222831">
-                <a:alpha val="10000"/>
-              </a:srgbClr>
-            </a:outerShdw>
-          </a:effectLst>
-        </p:spPr>
-        <p:txBody>
-          <a:bodyPr/>
-          <a:lstStyle/>
-          <a:p>
-            <a:endParaRPr lang="en-TH"/>
-          </a:p>
-        </p:txBody>
-      </p:sp>
-      <p:sp>
-        <p:nvSpPr>
-          <p:cNvPr id="11" name="Shape 9"/>
-          <p:cNvSpPr/>
-          <p:nvPr/>
-        </p:nvSpPr>
-        <p:spPr>
-          <a:xfrm>
-            <a:off x="6483096" y="1737360"/>
-            <a:ext cx="402336" cy="402336"/>
-          </a:xfrm>
-          <a:prstGeom prst="ellipse">
-            <a:avLst/>
-          </a:prstGeom>
-          <a:solidFill>
-            <a:srgbClr val="00ADB5"/>
-          </a:solidFill>
-          <a:ln w="12700">
-            <a:solidFill>
-              <a:srgbClr val="00ADB5"/>
-            </a:solidFill>
-            <a:prstDash val="solid"/>
-          </a:ln>
-        </p:spPr>
-        <p:txBody>
-          <a:bodyPr/>
-          <a:lstStyle/>
-          <a:p>
-            <a:endParaRPr lang="en-TH"/>
-          </a:p>
-        </p:txBody>
-      </p:sp>
-      <p:sp>
-        <p:nvSpPr>
-          <p:cNvPr id="12" name="Text 10"/>
-          <p:cNvSpPr/>
-          <p:nvPr/>
-        </p:nvSpPr>
-        <p:spPr>
-          <a:xfrm>
-            <a:off x="6483096" y="1737360"/>
-            <a:ext cx="402336" cy="402336"/>
-          </a:xfrm>
-          <a:prstGeom prst="rect">
-            <a:avLst/>
-          </a:prstGeom>
-          <a:noFill/>
-          <a:ln/>
-        </p:spPr>
-        <p:txBody>
-          <a:bodyPr wrap="square" lIns="0" tIns="0" rIns="0" bIns="0" rtlCol="0" anchor="ctr"/>
-          <a:lstStyle/>
-          <a:p>
-            <a:pPr marL="0" indent="0" algn="ctr">
-              <a:buNone/>
-            </a:pPr>
-            <a:r>
-              <a:rPr lang="en-US" sz="1500" b="1" dirty="0">
-                <a:solidFill>
-                  <a:srgbClr val="FFFFFF"/>
-                </a:solidFill>
-                <a:latin typeface="TH Sarabun New" pitchFamily="34" charset="0"/>
-                <a:ea typeface="TH Sarabun New" pitchFamily="34" charset="-122"/>
-                <a:cs typeface="TH Sarabun New" pitchFamily="34" charset="-120"/>
-              </a:rPr>
-              <a:t>2</a:t>
-            </a:r>
-            <a:endParaRPr lang="en-US" sz="1500" dirty="0"/>
-          </a:p>
-        </p:txBody>
-      </p:sp>
-      <p:sp>
-        <p:nvSpPr>
-          <p:cNvPr id="13" name="Text 11"/>
-          <p:cNvSpPr/>
-          <p:nvPr/>
-        </p:nvSpPr>
-        <p:spPr>
-          <a:xfrm>
-            <a:off x="7013448" y="1700784"/>
-            <a:ext cx="4389120" cy="384048"/>
-          </a:xfrm>
-          <a:prstGeom prst="rect">
-            <a:avLst/>
-          </a:prstGeom>
-          <a:noFill/>
-          <a:ln/>
-        </p:spPr>
-        <p:txBody>
-          <a:bodyPr wrap="square" lIns="0" tIns="0" rIns="0" bIns="0" rtlCol="0" anchor="ctr"/>
-          <a:lstStyle/>
-          <a:p>
-            <a:pPr marL="0" indent="0">
-              <a:buNone/>
-            </a:pPr>
-            <a:r>
-              <a:rPr lang="en-US" sz="1900" b="1" dirty="0">
-                <a:solidFill>
-                  <a:srgbClr val="222831"/>
-                </a:solidFill>
-                <a:latin typeface="TH Sarabun New" pitchFamily="34" charset="0"/>
-                <a:ea typeface="TH Sarabun New" pitchFamily="34" charset="-122"/>
-                <a:cs typeface="TH Sarabun New" pitchFamily="34" charset="-120"/>
-              </a:rPr>
-              <a:t>สั่งงาน AI Agent ด้วย Antigravity</a:t>
-            </a:r>
-            <a:endParaRPr lang="en-US" sz="1900" dirty="0"/>
-          </a:p>
-        </p:txBody>
-      </p:sp>
-      <p:sp>
-        <p:nvSpPr>
-          <p:cNvPr id="14" name="Text 12"/>
-          <p:cNvSpPr/>
-          <p:nvPr/>
-        </p:nvSpPr>
-        <p:spPr>
-          <a:xfrm>
-            <a:off x="7013448" y="2121408"/>
-            <a:ext cx="4389120" cy="566928"/>
-          </a:xfrm>
-          <a:prstGeom prst="rect">
-            <a:avLst/>
-          </a:prstGeom>
-          <a:noFill/>
-          <a:ln/>
-        </p:spPr>
-        <p:txBody>
-          <a:bodyPr wrap="square" lIns="0" tIns="0" rIns="0" bIns="0" rtlCol="0" anchor="t"/>
-          <a:lstStyle/>
-          <a:p>
-            <a:pPr marL="0" indent="0">
-              <a:buNone/>
-            </a:pPr>
-            <a:r>
-              <a:rPr lang="en-US" sz="1550" dirty="0">
-                <a:solidFill>
-                  <a:srgbClr val="393E46"/>
-                </a:solidFill>
-                <a:latin typeface="TH Sarabun New" pitchFamily="34" charset="0"/>
-                <a:ea typeface="TH Sarabun New" pitchFamily="34" charset="-122"/>
-                <a:cs typeface="TH Sarabun New" pitchFamily="34" charset="-120"/>
-              </a:rPr>
-              <a:t>รู้จัก Editor, Agent, Artifacts และ Browser Subagent</a:t>
-            </a:r>
-            <a:endParaRPr lang="en-US" sz="1550" dirty="0"/>
-          </a:p>
-        </p:txBody>
-      </p:sp>
-      <p:sp>
-        <p:nvSpPr>
-          <p:cNvPr id="15" name="Shape 13"/>
-          <p:cNvSpPr/>
-          <p:nvPr/>
-        </p:nvSpPr>
-        <p:spPr>
-          <a:xfrm>
-            <a:off x="594360" y="3054096"/>
-            <a:ext cx="5340096" cy="1371600"/>
-          </a:xfrm>
-          <a:prstGeom prst="roundRect">
-            <a:avLst>
-              <a:gd name="adj" fmla="val 6000"/>
-            </a:avLst>
-          </a:prstGeom>
-          <a:solidFill>
-            <a:srgbClr val="F5F7F8"/>
-          </a:solidFill>
-          <a:ln w="9525">
-            <a:solidFill>
-              <a:srgbClr val="F5F7F8"/>
-            </a:solidFill>
-            <a:prstDash val="solid"/>
-          </a:ln>
-          <a:effectLst>
-            <a:outerShdw blurRad="101600" dist="12700" dir="5400000" algn="bl" rotWithShape="0">
-              <a:srgbClr val="222831">
-                <a:alpha val="10000"/>
-              </a:srgbClr>
-            </a:outerShdw>
-          </a:effectLst>
-        </p:spPr>
-        <p:txBody>
-          <a:bodyPr/>
-          <a:lstStyle/>
-          <a:p>
-            <a:endParaRPr lang="en-TH"/>
-          </a:p>
-        </p:txBody>
-      </p:sp>
-      <p:sp>
-        <p:nvSpPr>
-          <p:cNvPr id="16" name="Shape 14"/>
-          <p:cNvSpPr/>
-          <p:nvPr/>
-        </p:nvSpPr>
-        <p:spPr>
-          <a:xfrm>
-            <a:off x="850392" y="3310128"/>
-            <a:ext cx="402336" cy="402336"/>
-          </a:xfrm>
-          <a:prstGeom prst="ellipse">
-            <a:avLst/>
-          </a:prstGeom>
-          <a:solidFill>
-            <a:srgbClr val="00ADB5"/>
-          </a:solidFill>
-          <a:ln w="12700">
-            <a:solidFill>
-              <a:srgbClr val="00ADB5"/>
-            </a:solidFill>
-            <a:prstDash val="solid"/>
-          </a:ln>
-        </p:spPr>
-        <p:txBody>
-          <a:bodyPr/>
-          <a:lstStyle/>
-          <a:p>
-            <a:endParaRPr lang="en-TH"/>
-          </a:p>
-        </p:txBody>
-      </p:sp>
-      <p:sp>
-        <p:nvSpPr>
-          <p:cNvPr id="17" name="Text 15"/>
-          <p:cNvSpPr/>
-          <p:nvPr/>
-        </p:nvSpPr>
-        <p:spPr>
-          <a:xfrm>
-            <a:off x="850392" y="3310128"/>
-            <a:ext cx="402336" cy="402336"/>
-          </a:xfrm>
-          <a:prstGeom prst="rect">
-            <a:avLst/>
-          </a:prstGeom>
-          <a:noFill/>
-          <a:ln/>
-        </p:spPr>
-        <p:txBody>
-          <a:bodyPr wrap="square" lIns="0" tIns="0" rIns="0" bIns="0" rtlCol="0" anchor="ctr"/>
-          <a:lstStyle/>
-          <a:p>
-            <a:pPr marL="0" indent="0" algn="ctr">
-              <a:buNone/>
-            </a:pPr>
-            <a:r>
-              <a:rPr lang="en-US" sz="1500" b="1" dirty="0">
-                <a:solidFill>
-                  <a:srgbClr val="FFFFFF"/>
-                </a:solidFill>
-                <a:latin typeface="TH Sarabun New" pitchFamily="34" charset="0"/>
-                <a:ea typeface="TH Sarabun New" pitchFamily="34" charset="-122"/>
-                <a:cs typeface="TH Sarabun New" pitchFamily="34" charset="-120"/>
-              </a:rPr>
-              <a:t>3</a:t>
-            </a:r>
-            <a:endParaRPr lang="en-US" sz="1500" dirty="0"/>
-          </a:p>
-        </p:txBody>
-      </p:sp>
-      <p:sp>
-        <p:nvSpPr>
-          <p:cNvPr id="18" name="Text 16"/>
-          <p:cNvSpPr/>
-          <p:nvPr/>
-        </p:nvSpPr>
-        <p:spPr>
-          <a:xfrm>
-            <a:off x="1380744" y="3273552"/>
-            <a:ext cx="4389120" cy="384048"/>
-          </a:xfrm>
-          <a:prstGeom prst="rect">
-            <a:avLst/>
-          </a:prstGeom>
-          <a:noFill/>
-          <a:ln/>
-        </p:spPr>
-        <p:txBody>
-          <a:bodyPr wrap="square" lIns="0" tIns="0" rIns="0" bIns="0" rtlCol="0" anchor="ctr"/>
-          <a:lstStyle/>
-          <a:p>
-            <a:pPr marL="0" indent="0">
-              <a:buNone/>
-            </a:pPr>
-            <a:r>
-              <a:rPr lang="en-US" sz="1900" b="1" dirty="0">
-                <a:solidFill>
-                  <a:srgbClr val="222831"/>
-                </a:solidFill>
-                <a:latin typeface="TH Sarabun New" pitchFamily="34" charset="0"/>
-                <a:ea typeface="TH Sarabun New" pitchFamily="34" charset="-122"/>
-                <a:cs typeface="TH Sarabun New" pitchFamily="34" charset="-120"/>
-              </a:rPr>
-              <a:t>เขียนสเปกที่ AI ทำตามได้จริง</a:t>
-            </a:r>
-            <a:endParaRPr lang="en-US" sz="1900" dirty="0"/>
-          </a:p>
-        </p:txBody>
-      </p:sp>
-      <p:sp>
-        <p:nvSpPr>
-          <p:cNvPr id="19" name="Text 17"/>
-          <p:cNvSpPr/>
-          <p:nvPr/>
-        </p:nvSpPr>
-        <p:spPr>
-          <a:xfrm>
-            <a:off x="1380744" y="3694176"/>
-            <a:ext cx="4389120" cy="566928"/>
-          </a:xfrm>
-          <a:prstGeom prst="rect">
-            <a:avLst/>
-          </a:prstGeom>
-          <a:noFill/>
-          <a:ln/>
-        </p:spPr>
-        <p:txBody>
-          <a:bodyPr wrap="square" lIns="0" tIns="0" rIns="0" bIns="0" rtlCol="0" anchor="t"/>
-          <a:lstStyle/>
-          <a:p>
-            <a:pPr marL="0" indent="0">
-              <a:buNone/>
-            </a:pPr>
-            <a:r>
-              <a:rPr lang="en-US" sz="1550" dirty="0">
-                <a:solidFill>
-                  <a:srgbClr val="393E46"/>
-                </a:solidFill>
-                <a:latin typeface="TH Sarabun New" pitchFamily="34" charset="0"/>
-                <a:ea typeface="TH Sarabun New" pitchFamily="34" charset="-122"/>
-                <a:cs typeface="TH Sarabun New" pitchFamily="34" charset="-120"/>
-              </a:rPr>
-              <a:t>แปลงโจทย์เป็นเอกสารสเปกไฟล์เดียว พร้อมเกณฑ์ยอมรับที่วัดผลได้</a:t>
-            </a:r>
-            <a:endParaRPr lang="en-US" sz="1550" dirty="0"/>
-          </a:p>
-        </p:txBody>
-      </p:sp>
-      <p:sp>
-        <p:nvSpPr>
-          <p:cNvPr id="20" name="Shape 18"/>
-          <p:cNvSpPr/>
-          <p:nvPr/>
-        </p:nvSpPr>
-        <p:spPr>
-          <a:xfrm>
-            <a:off x="6227064" y="3054096"/>
-            <a:ext cx="5340096" cy="1371600"/>
-          </a:xfrm>
-          <a:prstGeom prst="roundRect">
-            <a:avLst>
-              <a:gd name="adj" fmla="val 6000"/>
-            </a:avLst>
-          </a:prstGeom>
-          <a:solidFill>
-            <a:srgbClr val="F5F7F8"/>
-          </a:solidFill>
-          <a:ln w="9525">
-            <a:solidFill>
-              <a:srgbClr val="F5F7F8"/>
-            </a:solidFill>
-            <a:prstDash val="solid"/>
-          </a:ln>
-          <a:effectLst>
-            <a:outerShdw blurRad="101600" dist="12700" dir="5400000" algn="bl" rotWithShape="0">
-              <a:srgbClr val="222831">
-                <a:alpha val="10000"/>
-              </a:srgbClr>
-            </a:outerShdw>
-          </a:effectLst>
-        </p:spPr>
-        <p:txBody>
-          <a:bodyPr/>
-          <a:lstStyle/>
-          <a:p>
-            <a:endParaRPr lang="en-TH"/>
-          </a:p>
-        </p:txBody>
-      </p:sp>
-      <p:sp>
-        <p:nvSpPr>
-          <p:cNvPr id="21" name="Shape 19"/>
-          <p:cNvSpPr/>
-          <p:nvPr/>
-        </p:nvSpPr>
-        <p:spPr>
-          <a:xfrm>
-            <a:off x="6483096" y="3310128"/>
-            <a:ext cx="402336" cy="402336"/>
-          </a:xfrm>
-          <a:prstGeom prst="ellipse">
-            <a:avLst/>
-          </a:prstGeom>
-          <a:solidFill>
-            <a:srgbClr val="00ADB5"/>
-          </a:solidFill>
-          <a:ln w="12700">
-            <a:solidFill>
-              <a:srgbClr val="00ADB5"/>
-            </a:solidFill>
-            <a:prstDash val="solid"/>
-          </a:ln>
-        </p:spPr>
-        <p:txBody>
-          <a:bodyPr/>
-          <a:lstStyle/>
-          <a:p>
-            <a:endParaRPr lang="en-TH"/>
-          </a:p>
-        </p:txBody>
-      </p:sp>
-      <p:sp>
-        <p:nvSpPr>
-          <p:cNvPr id="22" name="Text 20"/>
-          <p:cNvSpPr/>
-          <p:nvPr/>
-        </p:nvSpPr>
-        <p:spPr>
-          <a:xfrm>
-            <a:off x="6483096" y="3310128"/>
-            <a:ext cx="402336" cy="402336"/>
-          </a:xfrm>
-          <a:prstGeom prst="rect">
-            <a:avLst/>
-          </a:prstGeom>
-          <a:noFill/>
-          <a:ln/>
-        </p:spPr>
-        <p:txBody>
-          <a:bodyPr wrap="square" lIns="0" tIns="0" rIns="0" bIns="0" rtlCol="0" anchor="ctr"/>
-          <a:lstStyle/>
-          <a:p>
-            <a:pPr marL="0" indent="0" algn="ctr">
-              <a:buNone/>
-            </a:pPr>
-            <a:r>
-              <a:rPr lang="en-US" sz="1500" b="1" dirty="0">
-                <a:solidFill>
-                  <a:srgbClr val="FFFFFF"/>
-                </a:solidFill>
-                <a:latin typeface="TH Sarabun New" pitchFamily="34" charset="0"/>
-                <a:ea typeface="TH Sarabun New" pitchFamily="34" charset="-122"/>
-                <a:cs typeface="TH Sarabun New" pitchFamily="34" charset="-120"/>
-              </a:rPr>
-              <a:t>4</a:t>
-            </a:r>
-            <a:endParaRPr lang="en-US" sz="1500" dirty="0"/>
-          </a:p>
-        </p:txBody>
-      </p:sp>
-      <p:sp>
-        <p:nvSpPr>
-          <p:cNvPr id="23" name="Text 21"/>
-          <p:cNvSpPr/>
-          <p:nvPr/>
-        </p:nvSpPr>
-        <p:spPr>
-          <a:xfrm>
-            <a:off x="7013448" y="3273552"/>
-            <a:ext cx="4389120" cy="384048"/>
-          </a:xfrm>
-          <a:prstGeom prst="rect">
-            <a:avLst/>
-          </a:prstGeom>
-          <a:noFill/>
-          <a:ln/>
-        </p:spPr>
-        <p:txBody>
-          <a:bodyPr wrap="square" lIns="0" tIns="0" rIns="0" bIns="0" rtlCol="0" anchor="ctr"/>
-          <a:lstStyle/>
-          <a:p>
-            <a:pPr marL="0" indent="0">
-              <a:buNone/>
-            </a:pPr>
-            <a:r>
-              <a:rPr lang="en-US" sz="1900" b="1" dirty="0">
-                <a:solidFill>
-                  <a:srgbClr val="222831"/>
-                </a:solidFill>
-                <a:latin typeface="TH Sarabun New" pitchFamily="34" charset="0"/>
-                <a:ea typeface="TH Sarabun New" pitchFamily="34" charset="-122"/>
-                <a:cs typeface="TH Sarabun New" pitchFamily="34" charset="-120"/>
-              </a:rPr>
-              <a:t>สร้างเว็บที่ใช้งานได้จริงและนำขึ้นระบบ</a:t>
-            </a:r>
-            <a:endParaRPr lang="en-US" sz="1900" dirty="0"/>
-          </a:p>
-        </p:txBody>
-      </p:sp>
-      <p:sp>
-        <p:nvSpPr>
-          <p:cNvPr id="24" name="Text 22"/>
-          <p:cNvSpPr/>
-          <p:nvPr/>
-        </p:nvSpPr>
-        <p:spPr>
-          <a:xfrm>
-            <a:off x="7013448" y="3694176"/>
-            <a:ext cx="4389120" cy="566928"/>
-          </a:xfrm>
-          <a:prstGeom prst="rect">
-            <a:avLst/>
-          </a:prstGeom>
-          <a:noFill/>
-          <a:ln/>
-        </p:spPr>
-        <p:txBody>
-          <a:bodyPr wrap="square" lIns="0" tIns="0" rIns="0" bIns="0" rtlCol="0" anchor="t"/>
-          <a:lstStyle/>
-          <a:p>
-            <a:pPr marL="0" indent="0">
-              <a:buNone/>
-            </a:pPr>
-            <a:r>
-              <a:rPr lang="en-US" sz="1550" dirty="0">
-                <a:solidFill>
-                  <a:srgbClr val="393E46"/>
-                </a:solidFill>
-                <a:latin typeface="TH Sarabun New" pitchFamily="34" charset="0"/>
-                <a:ea typeface="TH Sarabun New" pitchFamily="34" charset="-122"/>
-                <a:cs typeface="TH Sarabun New" pitchFamily="34" charset="-120"/>
-              </a:rPr>
-              <a:t>ครบ 4 หน้า เชื่อมฐานข้อมูลจริง และเปิดจาก URL สาธารณะ</a:t>
-            </a:r>
-            <a:endParaRPr lang="en-US" sz="1550" dirty="0"/>
-          </a:p>
-        </p:txBody>
-      </p:sp>
-    </p:spTree>
-  </p:cSld>
-  <p:clrMapOvr>
-    <a:masterClrMapping/>
-  </p:clrMapOvr>
-</p:sld>
-</file>
-
-<file path=ppt/slides/slide20.xml><?xml version="1.0" encoding="utf-8"?>
+<file path=ppt/slides/slide21.xml><?xml version="1.0" encoding="utf-8"?>
 <p:sld xmlns:a="http://schemas.openxmlformats.org/drawingml/2006/main" xmlns:r="http://schemas.openxmlformats.org/officeDocument/2006/relationships" xmlns:p="http://schemas.openxmlformats.org/presentationml/2006/main">
   <p:cSld>
     <p:spTree>
@@ -11520,7 +11887,7 @@
 </p:sld>
 </file>
 
-<file path=ppt/slides/slide21.xml><?xml version="1.0" encoding="utf-8"?>
+<file path=ppt/slides/slide22.xml><?xml version="1.0" encoding="utf-8"?>
 <p:sld xmlns:a="http://schemas.openxmlformats.org/drawingml/2006/main" xmlns:r="http://schemas.openxmlformats.org/officeDocument/2006/relationships" xmlns:p="http://schemas.openxmlformats.org/presentationml/2006/main">
   <p:cSld name="Slide 26">
     <p:bg>
@@ -12988,7 +13355,7 @@
 </p:sld>
 </file>
 
-<file path=ppt/slides/slide22.xml><?xml version="1.0" encoding="utf-8"?>
+<file path=ppt/slides/slide23.xml><?xml version="1.0" encoding="utf-8"?>
 <p:sld xmlns:a="http://schemas.openxmlformats.org/drawingml/2006/main" xmlns:r="http://schemas.openxmlformats.org/officeDocument/2006/relationships" xmlns:p="http://schemas.openxmlformats.org/presentationml/2006/main">
   <p:cSld>
     <p:spTree>
@@ -13083,7 +13450,7 @@
 </p:sld>
 </file>
 
-<file path=ppt/slides/slide23.xml><?xml version="1.0" encoding="utf-8"?>
+<file path=ppt/slides/slide24.xml><?xml version="1.0" encoding="utf-8"?>
 <p:sld xmlns:a="http://schemas.openxmlformats.org/drawingml/2006/main" xmlns:r="http://schemas.openxmlformats.org/officeDocument/2006/relationships" xmlns:p="http://schemas.openxmlformats.org/presentationml/2006/main">
   <p:cSld name="Slide 27">
     <p:bg>
@@ -14472,7 +14839,7 @@
 </p:sld>
 </file>
 
-<file path=ppt/slides/slide24.xml><?xml version="1.0" encoding="utf-8"?>
+<file path=ppt/slides/slide25.xml><?xml version="1.0" encoding="utf-8"?>
 <p:sld xmlns:a="http://schemas.openxmlformats.org/drawingml/2006/main" xmlns:r="http://schemas.openxmlformats.org/officeDocument/2006/relationships" xmlns:p="http://schemas.openxmlformats.org/presentationml/2006/main">
   <p:cSld>
     <p:spTree>
@@ -14567,7 +14934,7 @@
 </p:sld>
 </file>
 
-<file path=ppt/slides/slide25.xml><?xml version="1.0" encoding="utf-8"?>
+<file path=ppt/slides/slide26.xml><?xml version="1.0" encoding="utf-8"?>
 <p:sld xmlns:a="http://schemas.openxmlformats.org/drawingml/2006/main" xmlns:r="http://schemas.openxmlformats.org/officeDocument/2006/relationships" xmlns:p="http://schemas.openxmlformats.org/presentationml/2006/main">
   <p:cSld name="Slide 29">
     <p:bg>
@@ -14788,7 +15155,7 @@
 </p:sld>
 </file>
 
-<file path=ppt/slides/slide26.xml><?xml version="1.0" encoding="utf-8"?>
+<file path=ppt/slides/slide27.xml><?xml version="1.0" encoding="utf-8"?>
 <p:sld xmlns:a="http://schemas.openxmlformats.org/drawingml/2006/main" xmlns:r="http://schemas.openxmlformats.org/officeDocument/2006/relationships" xmlns:p="http://schemas.openxmlformats.org/presentationml/2006/main">
   <p:cSld name="Slide 30">
     <p:bg>
@@ -15920,7 +16287,7 @@
 </p:sld>
 </file>
 
-<file path=ppt/slides/slide27.xml><?xml version="1.0" encoding="utf-8"?>
+<file path=ppt/slides/slide28.xml><?xml version="1.0" encoding="utf-8"?>
 <p:sld xmlns:a="http://schemas.openxmlformats.org/drawingml/2006/main" xmlns:r="http://schemas.openxmlformats.org/officeDocument/2006/relationships" xmlns:p="http://schemas.openxmlformats.org/presentationml/2006/main">
   <p:cSld>
     <p:spTree>
@@ -15992,7 +16359,7 @@
 </p:sld>
 </file>
 
-<file path=ppt/slides/slide28.xml><?xml version="1.0" encoding="utf-8"?>
+<file path=ppt/slides/slide29.xml><?xml version="1.0" encoding="utf-8"?>
 <p:sld xmlns:a="http://schemas.openxmlformats.org/drawingml/2006/main" xmlns:r="http://schemas.openxmlformats.org/officeDocument/2006/relationships" xmlns:p="http://schemas.openxmlformats.org/presentationml/2006/main">
   <p:cSld name="Slide 37">
     <p:bg>
@@ -16902,7 +17269,917 @@
 </p:sld>
 </file>
 
-<file path=ppt/slides/slide29.xml><?xml version="1.0" encoding="utf-8"?>
+<file path=ppt/slides/slide3.xml><?xml version="1.0" encoding="utf-8"?>
+<p:sld xmlns:a="http://schemas.openxmlformats.org/drawingml/2006/main" xmlns:r="http://schemas.openxmlformats.org/officeDocument/2006/relationships" xmlns:p="http://schemas.openxmlformats.org/presentationml/2006/main">
+  <p:cSld name="Slide 2">
+    <p:bg>
+      <p:bgPr>
+        <a:solidFill>
+          <a:srgbClr val="FFFFFF"/>
+        </a:solidFill>
+        <a:effectLst/>
+      </p:bgPr>
+    </p:bg>
+    <p:spTree>
+      <p:nvGrpSpPr>
+        <p:cNvPr id="1" name=""/>
+        <p:cNvGrpSpPr/>
+        <p:nvPr/>
+      </p:nvGrpSpPr>
+      <p:grpSpPr>
+        <a:xfrm>
+          <a:off x="0" y="0"/>
+          <a:ext cx="0" cy="0"/>
+          <a:chOff x="0" y="0"/>
+          <a:chExt cx="0" cy="0"/>
+        </a:xfrm>
+      </p:grpSpPr>
+      <p:sp>
+        <p:nvSpPr>
+          <p:cNvPr id="2" name="Text 0"/>
+          <p:cNvSpPr/>
+          <p:nvPr/>
+        </p:nvSpPr>
+        <p:spPr>
+          <a:xfrm>
+            <a:off x="11018520" y="6263640"/>
+            <a:ext cx="548640" cy="274320"/>
+          </a:xfrm>
+          <a:prstGeom prst="rect">
+            <a:avLst/>
+          </a:prstGeom>
+          <a:noFill/>
+          <a:ln/>
+        </p:spPr>
+        <p:txBody>
+          <a:bodyPr wrap="square" lIns="0" tIns="0" rIns="0" bIns="0" rtlCol="0" anchor="ctr"/>
+          <a:lstStyle/>
+          <a:p>
+            <a:pPr marL="0" indent="0" algn="r">
+              <a:buNone/>
+            </a:pPr>
+            <a:r>
+              <a:rPr lang="en-US" sz="1200" dirty="0">
+                <a:solidFill>
+                  <a:srgbClr val="9AA3AD"/>
+                </a:solidFill>
+                <a:latin typeface="TH Sarabun New" pitchFamily="34" charset="0"/>
+                <a:ea typeface="TH Sarabun New" pitchFamily="34" charset="-122"/>
+                <a:cs typeface="TH Sarabun New" pitchFamily="34" charset="-120"/>
+              </a:rPr>
+              <a:t>2</a:t>
+            </a:r>
+            <a:endParaRPr lang="en-US" sz="1200" dirty="0"/>
+          </a:p>
+        </p:txBody>
+      </p:sp>
+      <p:sp>
+        <p:nvSpPr>
+          <p:cNvPr id="3" name="Text 1"/>
+          <p:cNvSpPr/>
+          <p:nvPr/>
+        </p:nvSpPr>
+        <p:spPr>
+          <a:xfrm>
+            <a:off x="594360" y="329184"/>
+            <a:ext cx="10972800" cy="566928"/>
+          </a:xfrm>
+          <a:prstGeom prst="rect">
+            <a:avLst/>
+          </a:prstGeom>
+          <a:noFill/>
+          <a:ln/>
+        </p:spPr>
+        <p:txBody>
+          <a:bodyPr wrap="square" lIns="0" tIns="0" rIns="0" bIns="0" rtlCol="0" anchor="ctr"/>
+          <a:lstStyle/>
+          <a:p>
+            <a:pPr marL="0" indent="0">
+              <a:buNone/>
+            </a:pPr>
+            <a:r>
+              <a:rPr lang="en-US" sz="3200" b="1" dirty="0">
+                <a:solidFill>
+                  <a:srgbClr val="222831"/>
+                </a:solidFill>
+                <a:latin typeface="TH Sarabun New" pitchFamily="34" charset="0"/>
+                <a:ea typeface="TH Sarabun New" pitchFamily="34" charset="-122"/>
+                <a:cs typeface="TH Sarabun New" pitchFamily="34" charset="-120"/>
+              </a:rPr>
+              <a:t>เป้าหมาย</a:t>
+            </a:r>
+            <a:endParaRPr lang="en-US" sz="3200" dirty="0"/>
+          </a:p>
+        </p:txBody>
+      </p:sp>
+      <p:sp>
+        <p:nvSpPr>
+          <p:cNvPr id="4" name="Text 2"/>
+          <p:cNvSpPr/>
+          <p:nvPr/>
+        </p:nvSpPr>
+        <p:spPr>
+          <a:xfrm>
+            <a:off x="594360" y="896112"/>
+            <a:ext cx="10972800" cy="329184"/>
+          </a:xfrm>
+          <a:prstGeom prst="rect">
+            <a:avLst/>
+          </a:prstGeom>
+          <a:noFill/>
+          <a:ln/>
+        </p:spPr>
+        <p:txBody>
+          <a:bodyPr wrap="square" lIns="0" tIns="0" rIns="0" bIns="0" rtlCol="0" anchor="ctr"/>
+          <a:lstStyle/>
+          <a:p>
+            <a:pPr marL="0" indent="0">
+              <a:buNone/>
+            </a:pPr>
+            <a:r>
+              <a:rPr lang="en-US" sz="1700" dirty="0">
+                <a:solidFill>
+                  <a:srgbClr val="8A94A6"/>
+                </a:solidFill>
+                <a:latin typeface="TH Sarabun New" pitchFamily="34" charset="0"/>
+                <a:ea typeface="TH Sarabun New" pitchFamily="34" charset="-122"/>
+                <a:cs typeface="TH Sarabun New" pitchFamily="34" charset="-120"/>
+              </a:rPr>
+              <a:t>เมื่อจบวันนี้ ผู้เข้าอบรมจะทำสิ่งเหล่านี้ได้ด้วยตนเอง</a:t>
+            </a:r>
+            <a:endParaRPr lang="en-US" sz="1700" dirty="0"/>
+          </a:p>
+        </p:txBody>
+      </p:sp>
+      <p:sp>
+        <p:nvSpPr>
+          <p:cNvPr id="5" name="Shape 3"/>
+          <p:cNvSpPr/>
+          <p:nvPr/>
+        </p:nvSpPr>
+        <p:spPr>
+          <a:xfrm>
+            <a:off x="594360" y="1481328"/>
+            <a:ext cx="5340096" cy="1371600"/>
+          </a:xfrm>
+          <a:prstGeom prst="roundRect">
+            <a:avLst>
+              <a:gd name="adj" fmla="val 6000"/>
+            </a:avLst>
+          </a:prstGeom>
+          <a:solidFill>
+            <a:srgbClr val="F5F7F8"/>
+          </a:solidFill>
+          <a:ln w="9525">
+            <a:solidFill>
+              <a:srgbClr val="F5F7F8"/>
+            </a:solidFill>
+            <a:prstDash val="solid"/>
+          </a:ln>
+          <a:effectLst>
+            <a:outerShdw blurRad="101600" dist="12700" dir="5400000" algn="bl" rotWithShape="0">
+              <a:srgbClr val="222831">
+                <a:alpha val="10000"/>
+              </a:srgbClr>
+            </a:outerShdw>
+          </a:effectLst>
+        </p:spPr>
+        <p:txBody>
+          <a:bodyPr/>
+          <a:lstStyle/>
+          <a:p>
+            <a:endParaRPr lang="en-TH"/>
+          </a:p>
+        </p:txBody>
+      </p:sp>
+      <p:sp>
+        <p:nvSpPr>
+          <p:cNvPr id="6" name="Shape 4"/>
+          <p:cNvSpPr/>
+          <p:nvPr/>
+        </p:nvSpPr>
+        <p:spPr>
+          <a:xfrm>
+            <a:off x="850392" y="1737360"/>
+            <a:ext cx="402336" cy="402336"/>
+          </a:xfrm>
+          <a:prstGeom prst="ellipse">
+            <a:avLst/>
+          </a:prstGeom>
+          <a:solidFill>
+            <a:srgbClr val="00ADB5"/>
+          </a:solidFill>
+          <a:ln w="12700">
+            <a:solidFill>
+              <a:srgbClr val="00ADB5"/>
+            </a:solidFill>
+            <a:prstDash val="solid"/>
+          </a:ln>
+        </p:spPr>
+        <p:txBody>
+          <a:bodyPr/>
+          <a:lstStyle/>
+          <a:p>
+            <a:endParaRPr lang="en-TH"/>
+          </a:p>
+        </p:txBody>
+      </p:sp>
+      <p:sp>
+        <p:nvSpPr>
+          <p:cNvPr id="7" name="Text 5"/>
+          <p:cNvSpPr/>
+          <p:nvPr/>
+        </p:nvSpPr>
+        <p:spPr>
+          <a:xfrm>
+            <a:off x="850392" y="1737360"/>
+            <a:ext cx="402336" cy="402336"/>
+          </a:xfrm>
+          <a:prstGeom prst="rect">
+            <a:avLst/>
+          </a:prstGeom>
+          <a:noFill/>
+          <a:ln/>
+        </p:spPr>
+        <p:txBody>
+          <a:bodyPr wrap="square" lIns="0" tIns="0" rIns="0" bIns="0" rtlCol="0" anchor="ctr"/>
+          <a:lstStyle/>
+          <a:p>
+            <a:pPr marL="0" indent="0" algn="ctr">
+              <a:buNone/>
+            </a:pPr>
+            <a:r>
+              <a:rPr lang="en-US" sz="1500" b="1" dirty="0">
+                <a:solidFill>
+                  <a:srgbClr val="FFFFFF"/>
+                </a:solidFill>
+                <a:latin typeface="TH Sarabun New" pitchFamily="34" charset="0"/>
+                <a:ea typeface="TH Sarabun New" pitchFamily="34" charset="-122"/>
+                <a:cs typeface="TH Sarabun New" pitchFamily="34" charset="-120"/>
+              </a:rPr>
+              <a:t>1</a:t>
+            </a:r>
+            <a:endParaRPr lang="en-US" sz="1500" dirty="0"/>
+          </a:p>
+        </p:txBody>
+      </p:sp>
+      <p:sp>
+        <p:nvSpPr>
+          <p:cNvPr id="8" name="Text 6"/>
+          <p:cNvSpPr/>
+          <p:nvPr/>
+        </p:nvSpPr>
+        <p:spPr>
+          <a:xfrm>
+            <a:off x="1380744" y="1700784"/>
+            <a:ext cx="4389120" cy="384048"/>
+          </a:xfrm>
+          <a:prstGeom prst="rect">
+            <a:avLst/>
+          </a:prstGeom>
+          <a:noFill/>
+          <a:ln/>
+        </p:spPr>
+        <p:txBody>
+          <a:bodyPr wrap="square" lIns="0" tIns="0" rIns="0" bIns="0" rtlCol="0" anchor="ctr"/>
+          <a:lstStyle/>
+          <a:p>
+            <a:pPr marL="0" indent="0">
+              <a:buNone/>
+            </a:pPr>
+            <a:r>
+              <a:rPr lang="en-US" sz="1900" b="1" dirty="0">
+                <a:solidFill>
+                  <a:srgbClr val="222831"/>
+                </a:solidFill>
+                <a:latin typeface="TH Sarabun New" pitchFamily="34" charset="0"/>
+                <a:ea typeface="TH Sarabun New" pitchFamily="34" charset="-122"/>
+                <a:cs typeface="TH Sarabun New" pitchFamily="34" charset="-120"/>
+              </a:rPr>
+              <a:t>เข้าใจโครงสร้างเว็บแอปพลิเคชัน</a:t>
+            </a:r>
+            <a:endParaRPr lang="en-US" sz="1900" dirty="0"/>
+          </a:p>
+        </p:txBody>
+      </p:sp>
+      <p:sp>
+        <p:nvSpPr>
+          <p:cNvPr id="9" name="Text 7"/>
+          <p:cNvSpPr/>
+          <p:nvPr/>
+        </p:nvSpPr>
+        <p:spPr>
+          <a:xfrm>
+            <a:off x="1380744" y="2121408"/>
+            <a:ext cx="4389120" cy="566928"/>
+          </a:xfrm>
+          <a:prstGeom prst="rect">
+            <a:avLst/>
+          </a:prstGeom>
+          <a:noFill/>
+          <a:ln/>
+        </p:spPr>
+        <p:txBody>
+          <a:bodyPr wrap="square" lIns="0" tIns="0" rIns="0" bIns="0" rtlCol="0" anchor="t"/>
+          <a:lstStyle/>
+          <a:p>
+            <a:pPr marL="0" indent="0">
+              <a:buNone/>
+            </a:pPr>
+            <a:r>
+              <a:rPr lang="en-US" sz="1550" dirty="0">
+                <a:solidFill>
+                  <a:srgbClr val="393E46"/>
+                </a:solidFill>
+                <a:latin typeface="TH Sarabun New" pitchFamily="34" charset="0"/>
+                <a:ea typeface="TH Sarabun New" pitchFamily="34" charset="-122"/>
+                <a:cs typeface="TH Sarabun New" pitchFamily="34" charset="-120"/>
+              </a:rPr>
+              <a:t>แยกออกว่า Frontend / Backend / Database ทำหน้าที่ต่างกันอย่างไร</a:t>
+            </a:r>
+            <a:endParaRPr lang="en-US" sz="1550" dirty="0"/>
+          </a:p>
+        </p:txBody>
+      </p:sp>
+      <p:sp>
+        <p:nvSpPr>
+          <p:cNvPr id="10" name="Shape 8"/>
+          <p:cNvSpPr/>
+          <p:nvPr/>
+        </p:nvSpPr>
+        <p:spPr>
+          <a:xfrm>
+            <a:off x="6227064" y="1481328"/>
+            <a:ext cx="5340096" cy="1371600"/>
+          </a:xfrm>
+          <a:prstGeom prst="roundRect">
+            <a:avLst>
+              <a:gd name="adj" fmla="val 6000"/>
+            </a:avLst>
+          </a:prstGeom>
+          <a:solidFill>
+            <a:srgbClr val="F5F7F8"/>
+          </a:solidFill>
+          <a:ln w="9525">
+            <a:solidFill>
+              <a:srgbClr val="F5F7F8"/>
+            </a:solidFill>
+            <a:prstDash val="solid"/>
+          </a:ln>
+          <a:effectLst>
+            <a:outerShdw blurRad="101600" dist="12700" dir="5400000" algn="bl" rotWithShape="0">
+              <a:srgbClr val="222831">
+                <a:alpha val="10000"/>
+              </a:srgbClr>
+            </a:outerShdw>
+          </a:effectLst>
+        </p:spPr>
+        <p:txBody>
+          <a:bodyPr/>
+          <a:lstStyle/>
+          <a:p>
+            <a:endParaRPr lang="en-TH"/>
+          </a:p>
+        </p:txBody>
+      </p:sp>
+      <p:sp>
+        <p:nvSpPr>
+          <p:cNvPr id="11" name="Shape 9"/>
+          <p:cNvSpPr/>
+          <p:nvPr/>
+        </p:nvSpPr>
+        <p:spPr>
+          <a:xfrm>
+            <a:off x="6483096" y="1737360"/>
+            <a:ext cx="402336" cy="402336"/>
+          </a:xfrm>
+          <a:prstGeom prst="ellipse">
+            <a:avLst/>
+          </a:prstGeom>
+          <a:solidFill>
+            <a:srgbClr val="00ADB5"/>
+          </a:solidFill>
+          <a:ln w="12700">
+            <a:solidFill>
+              <a:srgbClr val="00ADB5"/>
+            </a:solidFill>
+            <a:prstDash val="solid"/>
+          </a:ln>
+        </p:spPr>
+        <p:txBody>
+          <a:bodyPr/>
+          <a:lstStyle/>
+          <a:p>
+            <a:endParaRPr lang="en-TH"/>
+          </a:p>
+        </p:txBody>
+      </p:sp>
+      <p:sp>
+        <p:nvSpPr>
+          <p:cNvPr id="12" name="Text 10"/>
+          <p:cNvSpPr/>
+          <p:nvPr/>
+        </p:nvSpPr>
+        <p:spPr>
+          <a:xfrm>
+            <a:off x="6483096" y="1737360"/>
+            <a:ext cx="402336" cy="402336"/>
+          </a:xfrm>
+          <a:prstGeom prst="rect">
+            <a:avLst/>
+          </a:prstGeom>
+          <a:noFill/>
+          <a:ln/>
+        </p:spPr>
+        <p:txBody>
+          <a:bodyPr wrap="square" lIns="0" tIns="0" rIns="0" bIns="0" rtlCol="0" anchor="ctr"/>
+          <a:lstStyle/>
+          <a:p>
+            <a:pPr marL="0" indent="0" algn="ctr">
+              <a:buNone/>
+            </a:pPr>
+            <a:r>
+              <a:rPr lang="en-US" sz="1500" b="1" dirty="0">
+                <a:solidFill>
+                  <a:srgbClr val="FFFFFF"/>
+                </a:solidFill>
+                <a:latin typeface="TH Sarabun New" pitchFamily="34" charset="0"/>
+                <a:ea typeface="TH Sarabun New" pitchFamily="34" charset="-122"/>
+                <a:cs typeface="TH Sarabun New" pitchFamily="34" charset="-120"/>
+              </a:rPr>
+              <a:t>2</a:t>
+            </a:r>
+            <a:endParaRPr lang="en-US" sz="1500" dirty="0"/>
+          </a:p>
+        </p:txBody>
+      </p:sp>
+      <p:sp>
+        <p:nvSpPr>
+          <p:cNvPr id="13" name="Text 11"/>
+          <p:cNvSpPr/>
+          <p:nvPr/>
+        </p:nvSpPr>
+        <p:spPr>
+          <a:xfrm>
+            <a:off x="7013448" y="1700784"/>
+            <a:ext cx="4389120" cy="384048"/>
+          </a:xfrm>
+          <a:prstGeom prst="rect">
+            <a:avLst/>
+          </a:prstGeom>
+          <a:noFill/>
+          <a:ln/>
+        </p:spPr>
+        <p:txBody>
+          <a:bodyPr wrap="square" lIns="0" tIns="0" rIns="0" bIns="0" rtlCol="0" anchor="ctr"/>
+          <a:lstStyle/>
+          <a:p>
+            <a:pPr marL="0" indent="0">
+              <a:buNone/>
+            </a:pPr>
+            <a:r>
+              <a:rPr lang="en-US" sz="1900" b="1" dirty="0">
+                <a:solidFill>
+                  <a:srgbClr val="222831"/>
+                </a:solidFill>
+                <a:latin typeface="TH Sarabun New" pitchFamily="34" charset="0"/>
+                <a:ea typeface="TH Sarabun New" pitchFamily="34" charset="-122"/>
+                <a:cs typeface="TH Sarabun New" pitchFamily="34" charset="-120"/>
+              </a:rPr>
+              <a:t>สั่งงาน AI Agent ด้วย Antigravity</a:t>
+            </a:r>
+            <a:endParaRPr lang="en-US" sz="1900" dirty="0"/>
+          </a:p>
+        </p:txBody>
+      </p:sp>
+      <p:sp>
+        <p:nvSpPr>
+          <p:cNvPr id="14" name="Text 12"/>
+          <p:cNvSpPr/>
+          <p:nvPr/>
+        </p:nvSpPr>
+        <p:spPr>
+          <a:xfrm>
+            <a:off x="7013448" y="2121408"/>
+            <a:ext cx="4389120" cy="566928"/>
+          </a:xfrm>
+          <a:prstGeom prst="rect">
+            <a:avLst/>
+          </a:prstGeom>
+          <a:noFill/>
+          <a:ln/>
+        </p:spPr>
+        <p:txBody>
+          <a:bodyPr wrap="square" lIns="0" tIns="0" rIns="0" bIns="0" rtlCol="0" anchor="t"/>
+          <a:lstStyle/>
+          <a:p>
+            <a:pPr marL="0" indent="0">
+              <a:buNone/>
+            </a:pPr>
+            <a:r>
+              <a:rPr lang="en-US" sz="1550" dirty="0">
+                <a:solidFill>
+                  <a:srgbClr val="393E46"/>
+                </a:solidFill>
+                <a:latin typeface="TH Sarabun New" pitchFamily="34" charset="0"/>
+                <a:ea typeface="TH Sarabun New" pitchFamily="34" charset="-122"/>
+                <a:cs typeface="TH Sarabun New" pitchFamily="34" charset="-120"/>
+              </a:rPr>
+              <a:t>รู้จัก Editor, Agent, Artifacts และ Browser Subagent</a:t>
+            </a:r>
+            <a:endParaRPr lang="en-US" sz="1550" dirty="0"/>
+          </a:p>
+        </p:txBody>
+      </p:sp>
+      <p:sp>
+        <p:nvSpPr>
+          <p:cNvPr id="15" name="Shape 13"/>
+          <p:cNvSpPr/>
+          <p:nvPr/>
+        </p:nvSpPr>
+        <p:spPr>
+          <a:xfrm>
+            <a:off x="594360" y="3054096"/>
+            <a:ext cx="5340096" cy="1371600"/>
+          </a:xfrm>
+          <a:prstGeom prst="roundRect">
+            <a:avLst>
+              <a:gd name="adj" fmla="val 6000"/>
+            </a:avLst>
+          </a:prstGeom>
+          <a:solidFill>
+            <a:srgbClr val="F5F7F8"/>
+          </a:solidFill>
+          <a:ln w="9525">
+            <a:solidFill>
+              <a:srgbClr val="F5F7F8"/>
+            </a:solidFill>
+            <a:prstDash val="solid"/>
+          </a:ln>
+          <a:effectLst>
+            <a:outerShdw blurRad="101600" dist="12700" dir="5400000" algn="bl" rotWithShape="0">
+              <a:srgbClr val="222831">
+                <a:alpha val="10000"/>
+              </a:srgbClr>
+            </a:outerShdw>
+          </a:effectLst>
+        </p:spPr>
+        <p:txBody>
+          <a:bodyPr/>
+          <a:lstStyle/>
+          <a:p>
+            <a:endParaRPr lang="en-TH"/>
+          </a:p>
+        </p:txBody>
+      </p:sp>
+      <p:sp>
+        <p:nvSpPr>
+          <p:cNvPr id="16" name="Shape 14"/>
+          <p:cNvSpPr/>
+          <p:nvPr/>
+        </p:nvSpPr>
+        <p:spPr>
+          <a:xfrm>
+            <a:off x="850392" y="3310128"/>
+            <a:ext cx="402336" cy="402336"/>
+          </a:xfrm>
+          <a:prstGeom prst="ellipse">
+            <a:avLst/>
+          </a:prstGeom>
+          <a:solidFill>
+            <a:srgbClr val="00ADB5"/>
+          </a:solidFill>
+          <a:ln w="12700">
+            <a:solidFill>
+              <a:srgbClr val="00ADB5"/>
+            </a:solidFill>
+            <a:prstDash val="solid"/>
+          </a:ln>
+        </p:spPr>
+        <p:txBody>
+          <a:bodyPr/>
+          <a:lstStyle/>
+          <a:p>
+            <a:endParaRPr lang="en-TH"/>
+          </a:p>
+        </p:txBody>
+      </p:sp>
+      <p:sp>
+        <p:nvSpPr>
+          <p:cNvPr id="17" name="Text 15"/>
+          <p:cNvSpPr/>
+          <p:nvPr/>
+        </p:nvSpPr>
+        <p:spPr>
+          <a:xfrm>
+            <a:off x="850392" y="3310128"/>
+            <a:ext cx="402336" cy="402336"/>
+          </a:xfrm>
+          <a:prstGeom prst="rect">
+            <a:avLst/>
+          </a:prstGeom>
+          <a:noFill/>
+          <a:ln/>
+        </p:spPr>
+        <p:txBody>
+          <a:bodyPr wrap="square" lIns="0" tIns="0" rIns="0" bIns="0" rtlCol="0" anchor="ctr"/>
+          <a:lstStyle/>
+          <a:p>
+            <a:pPr marL="0" indent="0" algn="ctr">
+              <a:buNone/>
+            </a:pPr>
+            <a:r>
+              <a:rPr lang="en-US" sz="1500" b="1" dirty="0">
+                <a:solidFill>
+                  <a:srgbClr val="FFFFFF"/>
+                </a:solidFill>
+                <a:latin typeface="TH Sarabun New" pitchFamily="34" charset="0"/>
+                <a:ea typeface="TH Sarabun New" pitchFamily="34" charset="-122"/>
+                <a:cs typeface="TH Sarabun New" pitchFamily="34" charset="-120"/>
+              </a:rPr>
+              <a:t>3</a:t>
+            </a:r>
+            <a:endParaRPr lang="en-US" sz="1500" dirty="0"/>
+          </a:p>
+        </p:txBody>
+      </p:sp>
+      <p:sp>
+        <p:nvSpPr>
+          <p:cNvPr id="18" name="Text 16"/>
+          <p:cNvSpPr/>
+          <p:nvPr/>
+        </p:nvSpPr>
+        <p:spPr>
+          <a:xfrm>
+            <a:off x="1380744" y="3273552"/>
+            <a:ext cx="4389120" cy="384048"/>
+          </a:xfrm>
+          <a:prstGeom prst="rect">
+            <a:avLst/>
+          </a:prstGeom>
+          <a:noFill/>
+          <a:ln/>
+        </p:spPr>
+        <p:txBody>
+          <a:bodyPr wrap="square" lIns="0" tIns="0" rIns="0" bIns="0" rtlCol="0" anchor="ctr"/>
+          <a:lstStyle/>
+          <a:p>
+            <a:pPr marL="0" indent="0">
+              <a:buNone/>
+            </a:pPr>
+            <a:r>
+              <a:rPr lang="en-US" sz="1900" b="1" dirty="0">
+                <a:solidFill>
+                  <a:srgbClr val="222831"/>
+                </a:solidFill>
+                <a:latin typeface="TH Sarabun New" pitchFamily="34" charset="0"/>
+                <a:ea typeface="TH Sarabun New" pitchFamily="34" charset="-122"/>
+                <a:cs typeface="TH Sarabun New" pitchFamily="34" charset="-120"/>
+              </a:rPr>
+              <a:t>เขียนสเปกที่ AI ทำตามได้จริง</a:t>
+            </a:r>
+            <a:endParaRPr lang="en-US" sz="1900" dirty="0"/>
+          </a:p>
+        </p:txBody>
+      </p:sp>
+      <p:sp>
+        <p:nvSpPr>
+          <p:cNvPr id="19" name="Text 17"/>
+          <p:cNvSpPr/>
+          <p:nvPr/>
+        </p:nvSpPr>
+        <p:spPr>
+          <a:xfrm>
+            <a:off x="1380744" y="3694176"/>
+            <a:ext cx="4389120" cy="566928"/>
+          </a:xfrm>
+          <a:prstGeom prst="rect">
+            <a:avLst/>
+          </a:prstGeom>
+          <a:noFill/>
+          <a:ln/>
+        </p:spPr>
+        <p:txBody>
+          <a:bodyPr wrap="square" lIns="0" tIns="0" rIns="0" bIns="0" rtlCol="0" anchor="t"/>
+          <a:lstStyle/>
+          <a:p>
+            <a:pPr marL="0" indent="0">
+              <a:buNone/>
+            </a:pPr>
+            <a:r>
+              <a:rPr lang="en-US" sz="1550" dirty="0">
+                <a:solidFill>
+                  <a:srgbClr val="393E46"/>
+                </a:solidFill>
+                <a:latin typeface="TH Sarabun New" pitchFamily="34" charset="0"/>
+                <a:ea typeface="TH Sarabun New" pitchFamily="34" charset="-122"/>
+                <a:cs typeface="TH Sarabun New" pitchFamily="34" charset="-120"/>
+              </a:rPr>
+              <a:t>แปลงโจทย์เป็นเอกสารสเปกไฟล์เดียว พร้อมเกณฑ์ยอมรับที่วัดผลได้</a:t>
+            </a:r>
+            <a:endParaRPr lang="en-US" sz="1550" dirty="0"/>
+          </a:p>
+        </p:txBody>
+      </p:sp>
+      <p:sp>
+        <p:nvSpPr>
+          <p:cNvPr id="20" name="Shape 18"/>
+          <p:cNvSpPr/>
+          <p:nvPr/>
+        </p:nvSpPr>
+        <p:spPr>
+          <a:xfrm>
+            <a:off x="6227064" y="3054096"/>
+            <a:ext cx="5340096" cy="1371600"/>
+          </a:xfrm>
+          <a:prstGeom prst="roundRect">
+            <a:avLst>
+              <a:gd name="adj" fmla="val 6000"/>
+            </a:avLst>
+          </a:prstGeom>
+          <a:solidFill>
+            <a:srgbClr val="F5F7F8"/>
+          </a:solidFill>
+          <a:ln w="9525">
+            <a:solidFill>
+              <a:srgbClr val="F5F7F8"/>
+            </a:solidFill>
+            <a:prstDash val="solid"/>
+          </a:ln>
+          <a:effectLst>
+            <a:outerShdw blurRad="101600" dist="12700" dir="5400000" algn="bl" rotWithShape="0">
+              <a:srgbClr val="222831">
+                <a:alpha val="10000"/>
+              </a:srgbClr>
+            </a:outerShdw>
+          </a:effectLst>
+        </p:spPr>
+        <p:txBody>
+          <a:bodyPr/>
+          <a:lstStyle/>
+          <a:p>
+            <a:endParaRPr lang="en-TH"/>
+          </a:p>
+        </p:txBody>
+      </p:sp>
+      <p:sp>
+        <p:nvSpPr>
+          <p:cNvPr id="21" name="Shape 19"/>
+          <p:cNvSpPr/>
+          <p:nvPr/>
+        </p:nvSpPr>
+        <p:spPr>
+          <a:xfrm>
+            <a:off x="6483096" y="3310128"/>
+            <a:ext cx="402336" cy="402336"/>
+          </a:xfrm>
+          <a:prstGeom prst="ellipse">
+            <a:avLst/>
+          </a:prstGeom>
+          <a:solidFill>
+            <a:srgbClr val="00ADB5"/>
+          </a:solidFill>
+          <a:ln w="12700">
+            <a:solidFill>
+              <a:srgbClr val="00ADB5"/>
+            </a:solidFill>
+            <a:prstDash val="solid"/>
+          </a:ln>
+        </p:spPr>
+        <p:txBody>
+          <a:bodyPr/>
+          <a:lstStyle/>
+          <a:p>
+            <a:endParaRPr lang="en-TH"/>
+          </a:p>
+        </p:txBody>
+      </p:sp>
+      <p:sp>
+        <p:nvSpPr>
+          <p:cNvPr id="22" name="Text 20"/>
+          <p:cNvSpPr/>
+          <p:nvPr/>
+        </p:nvSpPr>
+        <p:spPr>
+          <a:xfrm>
+            <a:off x="6483096" y="3310128"/>
+            <a:ext cx="402336" cy="402336"/>
+          </a:xfrm>
+          <a:prstGeom prst="rect">
+            <a:avLst/>
+          </a:prstGeom>
+          <a:noFill/>
+          <a:ln/>
+        </p:spPr>
+        <p:txBody>
+          <a:bodyPr wrap="square" lIns="0" tIns="0" rIns="0" bIns="0" rtlCol="0" anchor="ctr"/>
+          <a:lstStyle/>
+          <a:p>
+            <a:pPr marL="0" indent="0" algn="ctr">
+              <a:buNone/>
+            </a:pPr>
+            <a:r>
+              <a:rPr lang="en-US" sz="1500" b="1" dirty="0">
+                <a:solidFill>
+                  <a:srgbClr val="FFFFFF"/>
+                </a:solidFill>
+                <a:latin typeface="TH Sarabun New" pitchFamily="34" charset="0"/>
+                <a:ea typeface="TH Sarabun New" pitchFamily="34" charset="-122"/>
+                <a:cs typeface="TH Sarabun New" pitchFamily="34" charset="-120"/>
+              </a:rPr>
+              <a:t>4</a:t>
+            </a:r>
+            <a:endParaRPr lang="en-US" sz="1500" dirty="0"/>
+          </a:p>
+        </p:txBody>
+      </p:sp>
+      <p:sp>
+        <p:nvSpPr>
+          <p:cNvPr id="23" name="Text 21"/>
+          <p:cNvSpPr/>
+          <p:nvPr/>
+        </p:nvSpPr>
+        <p:spPr>
+          <a:xfrm>
+            <a:off x="7013448" y="3273552"/>
+            <a:ext cx="4389120" cy="384048"/>
+          </a:xfrm>
+          <a:prstGeom prst="rect">
+            <a:avLst/>
+          </a:prstGeom>
+          <a:noFill/>
+          <a:ln/>
+        </p:spPr>
+        <p:txBody>
+          <a:bodyPr wrap="square" lIns="0" tIns="0" rIns="0" bIns="0" rtlCol="0" anchor="ctr"/>
+          <a:lstStyle/>
+          <a:p>
+            <a:pPr marL="0" indent="0">
+              <a:buNone/>
+            </a:pPr>
+            <a:r>
+              <a:rPr lang="en-US" sz="1900" b="1" dirty="0">
+                <a:solidFill>
+                  <a:srgbClr val="222831"/>
+                </a:solidFill>
+                <a:latin typeface="TH Sarabun New" pitchFamily="34" charset="0"/>
+                <a:ea typeface="TH Sarabun New" pitchFamily="34" charset="-122"/>
+                <a:cs typeface="TH Sarabun New" pitchFamily="34" charset="-120"/>
+              </a:rPr>
+              <a:t>สร้างเว็บที่ใช้งานได้จริงและนำขึ้นระบบ</a:t>
+            </a:r>
+            <a:endParaRPr lang="en-US" sz="1900" dirty="0"/>
+          </a:p>
+        </p:txBody>
+      </p:sp>
+      <p:sp>
+        <p:nvSpPr>
+          <p:cNvPr id="24" name="Text 22"/>
+          <p:cNvSpPr/>
+          <p:nvPr/>
+        </p:nvSpPr>
+        <p:spPr>
+          <a:xfrm>
+            <a:off x="7013448" y="3694176"/>
+            <a:ext cx="4389120" cy="566928"/>
+          </a:xfrm>
+          <a:prstGeom prst="rect">
+            <a:avLst/>
+          </a:prstGeom>
+          <a:noFill/>
+          <a:ln/>
+        </p:spPr>
+        <p:txBody>
+          <a:bodyPr wrap="square" lIns="0" tIns="0" rIns="0" bIns="0" rtlCol="0" anchor="t"/>
+          <a:lstStyle/>
+          <a:p>
+            <a:pPr marL="0" indent="0">
+              <a:buNone/>
+            </a:pPr>
+            <a:r>
+              <a:rPr lang="en-US" sz="1550" dirty="0">
+                <a:solidFill>
+                  <a:srgbClr val="393E46"/>
+                </a:solidFill>
+                <a:latin typeface="TH Sarabun New" pitchFamily="34" charset="0"/>
+                <a:ea typeface="TH Sarabun New" pitchFamily="34" charset="-122"/>
+                <a:cs typeface="TH Sarabun New" pitchFamily="34" charset="-120"/>
+              </a:rPr>
+              <a:t>ครบ 4 หน้า เชื่อมฐานข้อมูลจริง และเปิดจาก URL สาธารณะ</a:t>
+            </a:r>
+            <a:endParaRPr lang="en-US" sz="1550" dirty="0"/>
+          </a:p>
+        </p:txBody>
+      </p:sp>
+    </p:spTree>
+  </p:cSld>
+  <p:clrMapOvr>
+    <a:masterClrMapping/>
+  </p:clrMapOvr>
+</p:sld>
+</file>
+
+<file path=ppt/slides/slide30.xml><?xml version="1.0" encoding="utf-8"?>
 <p:sld xmlns:a="http://schemas.openxmlformats.org/drawingml/2006/main" xmlns:r="http://schemas.openxmlformats.org/officeDocument/2006/relationships" xmlns:p="http://schemas.openxmlformats.org/presentationml/2006/main">
   <p:cSld name="Slide 38">
     <p:bg>
@@ -17784,7 +19061,7 @@
 </p:sld>
 </file>
 
-<file path=ppt/slides/slide3.xml><?xml version="1.0" encoding="utf-8"?>
+<file path=ppt/slides/slide4.xml><?xml version="1.0" encoding="utf-8"?>
 <p:sld xmlns:a="http://schemas.openxmlformats.org/drawingml/2006/main" xmlns:r="http://schemas.openxmlformats.org/officeDocument/2006/relationships" xmlns:p="http://schemas.openxmlformats.org/presentationml/2006/main">
   <p:cSld name="Slide 4">
     <p:bg>
@@ -18005,7 +19282,7 @@
 </p:sld>
 </file>
 
-<file path=ppt/slides/slide4.xml><?xml version="1.0" encoding="utf-8"?>
+<file path=ppt/slides/slide5.xml><?xml version="1.0" encoding="utf-8"?>
 <p:sld xmlns:a="http://schemas.openxmlformats.org/drawingml/2006/main" xmlns:r="http://schemas.openxmlformats.org/officeDocument/2006/relationships" xmlns:p="http://schemas.openxmlformats.org/presentationml/2006/main">
   <p:cSld name="Slide 5">
     <p:bg>
@@ -18561,7 +19838,7 @@
 </p:sld>
 </file>
 
-<file path=ppt/slides/slide5.xml><?xml version="1.0" encoding="utf-8"?>
+<file path=ppt/slides/slide6.xml><?xml version="1.0" encoding="utf-8"?>
 <p:sld xmlns:a="http://schemas.openxmlformats.org/drawingml/2006/main" xmlns:r="http://schemas.openxmlformats.org/officeDocument/2006/relationships" xmlns:p="http://schemas.openxmlformats.org/presentationml/2006/main">
   <p:cSld name="Slide 6">
     <p:bg>
@@ -19548,7 +20825,7 @@
 </p:sld>
 </file>
 
-<file path=ppt/slides/slide6.xml><?xml version="1.0" encoding="utf-8"?>
+<file path=ppt/slides/slide7.xml><?xml version="1.0" encoding="utf-8"?>
 <p:sld xmlns:a="http://schemas.openxmlformats.org/drawingml/2006/main" xmlns:r="http://schemas.openxmlformats.org/officeDocument/2006/relationships" xmlns:p="http://schemas.openxmlformats.org/presentationml/2006/main">
   <p:cSld name="Slide 7">
     <p:bg>
@@ -20379,7 +21656,7 @@
 </p:sld>
 </file>
 
-<file path=ppt/slides/slide7.xml><?xml version="1.0" encoding="utf-8"?>
+<file path=ppt/slides/slide8.xml><?xml version="1.0" encoding="utf-8"?>
 <p:sld xmlns:a="http://schemas.openxmlformats.org/drawingml/2006/main" xmlns:r="http://schemas.openxmlformats.org/officeDocument/2006/relationships" xmlns:p="http://schemas.openxmlformats.org/presentationml/2006/main">
   <p:cSld name="Slide 8">
     <p:bg>
@@ -21732,7 +23009,7 @@
 </p:sld>
 </file>
 
-<file path=ppt/slides/slide8.xml><?xml version="1.0" encoding="utf-8"?>
+<file path=ppt/slides/slide9.xml><?xml version="1.0" encoding="utf-8"?>
 <p:sld xmlns:a="http://schemas.openxmlformats.org/drawingml/2006/main" xmlns:r="http://schemas.openxmlformats.org/officeDocument/2006/relationships" xmlns:p="http://schemas.openxmlformats.org/presentationml/2006/main">
   <p:cSld name="Slide 9">
     <p:bg>
@@ -23204,1179 +24481,6 @@
               <a:t>AI Agent ที่เขียนโค้ดให้เรา</a:t>
             </a:r>
             <a:endParaRPr lang="en-US" sz="1600" dirty="0"/>
-          </a:p>
-        </p:txBody>
-      </p:sp>
-    </p:spTree>
-  </p:cSld>
-  <p:clrMapOvr>
-    <a:masterClrMapping/>
-  </p:clrMapOvr>
-</p:sld>
-</file>
-
-<file path=ppt/slides/slide9.xml><?xml version="1.0" encoding="utf-8"?>
-<p:sld xmlns:a="http://schemas.openxmlformats.org/drawingml/2006/main" xmlns:r="http://schemas.openxmlformats.org/officeDocument/2006/relationships" xmlns:p="http://schemas.openxmlformats.org/presentationml/2006/main">
-  <p:cSld name="Slide 10">
-    <p:bg>
-      <p:bgPr>
-        <a:solidFill>
-          <a:srgbClr val="E8F6F7"/>
-        </a:solidFill>
-        <a:effectLst/>
-      </p:bgPr>
-    </p:bg>
-    <p:spTree>
-      <p:nvGrpSpPr>
-        <p:cNvPr id="1" name=""/>
-        <p:cNvGrpSpPr/>
-        <p:nvPr/>
-      </p:nvGrpSpPr>
-      <p:grpSpPr>
-        <a:xfrm>
-          <a:off x="0" y="0"/>
-          <a:ext cx="0" cy="0"/>
-          <a:chOff x="0" y="0"/>
-          <a:chExt cx="0" cy="0"/>
-        </a:xfrm>
-      </p:grpSpPr>
-      <p:sp>
-        <p:nvSpPr>
-          <p:cNvPr id="2" name="Text 0"/>
-          <p:cNvSpPr/>
-          <p:nvPr/>
-        </p:nvSpPr>
-        <p:spPr>
-          <a:xfrm>
-            <a:off x="11018520" y="6263640"/>
-            <a:ext cx="548640" cy="274320"/>
-          </a:xfrm>
-          <a:prstGeom prst="rect">
-            <a:avLst/>
-          </a:prstGeom>
-          <a:noFill/>
-          <a:ln/>
-        </p:spPr>
-        <p:txBody>
-          <a:bodyPr wrap="square" lIns="0" tIns="0" rIns="0" bIns="0" rtlCol="0" anchor="ctr"/>
-          <a:lstStyle/>
-          <a:p>
-            <a:pPr marL="0" indent="0" algn="r">
-              <a:buNone/>
-            </a:pPr>
-            <a:r>
-              <a:rPr lang="en-US" sz="1200" dirty="0">
-                <a:solidFill>
-                  <a:srgbClr val="9AA3AD"/>
-                </a:solidFill>
-                <a:latin typeface="TH Sarabun New" pitchFamily="34" charset="0"/>
-                <a:ea typeface="TH Sarabun New" pitchFamily="34" charset="-122"/>
-                <a:cs typeface="TH Sarabun New" pitchFamily="34" charset="-120"/>
-              </a:rPr>
-              <a:t>10</a:t>
-            </a:r>
-            <a:endParaRPr lang="en-US" sz="1200" dirty="0"/>
-          </a:p>
-        </p:txBody>
-      </p:sp>
-      <p:sp>
-        <p:nvSpPr>
-          <p:cNvPr id="3" name="Shape 1"/>
-          <p:cNvSpPr/>
-          <p:nvPr/>
-        </p:nvSpPr>
-        <p:spPr>
-          <a:xfrm>
-            <a:off x="594360" y="310896"/>
-            <a:ext cx="1481328" cy="475488"/>
-          </a:xfrm>
-          <a:prstGeom prst="roundRect">
-            <a:avLst>
-              <a:gd name="adj" fmla="val 50000"/>
-            </a:avLst>
-          </a:prstGeom>
-          <a:solidFill>
-            <a:srgbClr val="00ADB5"/>
-          </a:solidFill>
-          <a:ln w="12700">
-            <a:solidFill>
-              <a:srgbClr val="00ADB5"/>
-            </a:solidFill>
-            <a:prstDash val="solid"/>
-          </a:ln>
-        </p:spPr>
-        <p:txBody>
-          <a:bodyPr/>
-          <a:lstStyle/>
-          <a:p>
-            <a:endParaRPr lang="en-TH"/>
-          </a:p>
-        </p:txBody>
-      </p:sp>
-      <p:sp>
-        <p:nvSpPr>
-          <p:cNvPr id="4" name="Text 2"/>
-          <p:cNvSpPr/>
-          <p:nvPr/>
-        </p:nvSpPr>
-        <p:spPr>
-          <a:xfrm>
-            <a:off x="594360" y="310896"/>
-            <a:ext cx="1481328" cy="475488"/>
-          </a:xfrm>
-          <a:prstGeom prst="rect">
-            <a:avLst/>
-          </a:prstGeom>
-          <a:noFill/>
-          <a:ln/>
-        </p:spPr>
-        <p:txBody>
-          <a:bodyPr wrap="square" lIns="0" tIns="0" rIns="0" bIns="0" rtlCol="0" anchor="ctr"/>
-          <a:lstStyle/>
-          <a:p>
-            <a:pPr marL="0" indent="0" algn="ctr">
-              <a:buNone/>
-            </a:pPr>
-            <a:r>
-              <a:rPr lang="en-US" sz="1800" b="1" dirty="0">
-                <a:solidFill>
-                  <a:srgbClr val="FFFFFF"/>
-                </a:solidFill>
-                <a:latin typeface="TH Sarabun New" pitchFamily="34" charset="0"/>
-                <a:ea typeface="TH Sarabun New" pitchFamily="34" charset="-122"/>
-                <a:cs typeface="TH Sarabun New" pitchFamily="34" charset="-120"/>
-              </a:rPr>
-              <a:t>LAB A</a:t>
-            </a:r>
-            <a:endParaRPr lang="en-US" sz="1800" dirty="0"/>
-          </a:p>
-        </p:txBody>
-      </p:sp>
-      <p:sp>
-        <p:nvSpPr>
-          <p:cNvPr id="5" name="Text 3"/>
-          <p:cNvSpPr/>
-          <p:nvPr/>
-        </p:nvSpPr>
-        <p:spPr>
-          <a:xfrm>
-            <a:off x="2286000" y="274320"/>
-            <a:ext cx="7315200" cy="548640"/>
-          </a:xfrm>
-          <a:prstGeom prst="rect">
-            <a:avLst/>
-          </a:prstGeom>
-          <a:noFill/>
-          <a:ln/>
-        </p:spPr>
-        <p:txBody>
-          <a:bodyPr wrap="square" lIns="0" tIns="0" rIns="0" bIns="0" rtlCol="0" anchor="ctr"/>
-          <a:lstStyle/>
-          <a:p>
-            <a:pPr marL="0" indent="0">
-              <a:buNone/>
-            </a:pPr>
-            <a:r>
-              <a:rPr lang="en-US" sz="3000" b="1" dirty="0">
-                <a:solidFill>
-                  <a:srgbClr val="222831"/>
-                </a:solidFill>
-                <a:latin typeface="TH Sarabun New" pitchFamily="34" charset="0"/>
-                <a:ea typeface="TH Sarabun New" pitchFamily="34" charset="-122"/>
-                <a:cs typeface="TH Sarabun New" pitchFamily="34" charset="-120"/>
-              </a:rPr>
-              <a:t>เตรียมเครื่องและเปิดโปรเจกต์</a:t>
-            </a:r>
-            <a:endParaRPr lang="en-US" sz="3000" dirty="0"/>
-          </a:p>
-        </p:txBody>
-      </p:sp>
-      <p:sp>
-        <p:nvSpPr>
-          <p:cNvPr id="6" name="Text 4"/>
-          <p:cNvSpPr/>
-          <p:nvPr/>
-        </p:nvSpPr>
-        <p:spPr>
-          <a:xfrm>
-            <a:off x="9738360" y="310896"/>
-            <a:ext cx="1828800" cy="475488"/>
-          </a:xfrm>
-          <a:prstGeom prst="rect">
-            <a:avLst/>
-          </a:prstGeom>
-          <a:noFill/>
-          <a:ln/>
-        </p:spPr>
-        <p:txBody>
-          <a:bodyPr wrap="square" lIns="0" tIns="0" rIns="0" bIns="0" rtlCol="0" anchor="ctr"/>
-          <a:lstStyle/>
-          <a:p>
-            <a:pPr marL="0" indent="0" algn="r">
-              <a:buNone/>
-            </a:pPr>
-            <a:r>
-              <a:rPr lang="en-US" sz="1700" dirty="0">
-                <a:solidFill>
-                  <a:srgbClr val="393E46"/>
-                </a:solidFill>
-                <a:latin typeface="TH Sarabun New" pitchFamily="34" charset="0"/>
-                <a:ea typeface="TH Sarabun New" pitchFamily="34" charset="-122"/>
-                <a:cs typeface="TH Sarabun New" pitchFamily="34" charset="-120"/>
-              </a:rPr>
-              <a:t>10 นาที</a:t>
-            </a:r>
-            <a:endParaRPr lang="en-US" sz="1700" dirty="0"/>
-          </a:p>
-        </p:txBody>
-      </p:sp>
-      <p:sp>
-        <p:nvSpPr>
-          <p:cNvPr id="7" name="Shape 5"/>
-          <p:cNvSpPr/>
-          <p:nvPr/>
-        </p:nvSpPr>
-        <p:spPr>
-          <a:xfrm>
-            <a:off x="594360" y="1024128"/>
-            <a:ext cx="5760720" cy="3794760"/>
-          </a:xfrm>
-          <a:prstGeom prst="roundRect">
-            <a:avLst>
-              <a:gd name="adj" fmla="val 2169"/>
-            </a:avLst>
-          </a:prstGeom>
-          <a:solidFill>
-            <a:srgbClr val="FFFFFF"/>
-          </a:solidFill>
-          <a:ln w="9525">
-            <a:solidFill>
-              <a:srgbClr val="FFFFFF"/>
-            </a:solidFill>
-            <a:prstDash val="solid"/>
-          </a:ln>
-          <a:effectLst>
-            <a:outerShdw blurRad="101600" dist="12700" dir="5400000" algn="bl" rotWithShape="0">
-              <a:srgbClr val="222831">
-                <a:alpha val="10000"/>
-              </a:srgbClr>
-            </a:outerShdw>
-          </a:effectLst>
-        </p:spPr>
-        <p:txBody>
-          <a:bodyPr/>
-          <a:lstStyle/>
-          <a:p>
-            <a:endParaRPr lang="en-TH"/>
-          </a:p>
-        </p:txBody>
-      </p:sp>
-      <p:sp>
-        <p:nvSpPr>
-          <p:cNvPr id="8" name="Text 6"/>
-          <p:cNvSpPr/>
-          <p:nvPr/>
-        </p:nvSpPr>
-        <p:spPr>
-          <a:xfrm>
-            <a:off x="850392" y="1188720"/>
-            <a:ext cx="5248656" cy="310896"/>
-          </a:xfrm>
-          <a:prstGeom prst="rect">
-            <a:avLst/>
-          </a:prstGeom>
-          <a:noFill/>
-          <a:ln/>
-        </p:spPr>
-        <p:txBody>
-          <a:bodyPr wrap="square" lIns="0" tIns="0" rIns="0" bIns="0" rtlCol="0" anchor="ctr"/>
-          <a:lstStyle/>
-          <a:p>
-            <a:pPr marL="0" indent="0">
-              <a:buNone/>
-            </a:pPr>
-            <a:r>
-              <a:rPr lang="en-US" sz="1900" b="1" dirty="0">
-                <a:solidFill>
-                  <a:srgbClr val="222831"/>
-                </a:solidFill>
-                <a:latin typeface="TH Sarabun New" pitchFamily="34" charset="0"/>
-                <a:ea typeface="TH Sarabun New" pitchFamily="34" charset="-122"/>
-                <a:cs typeface="TH Sarabun New" pitchFamily="34" charset="-120"/>
-              </a:rPr>
-              <a:t>สิ่งที่ต้องทำ</a:t>
-            </a:r>
-            <a:endParaRPr lang="en-US" sz="1900" dirty="0"/>
-          </a:p>
-        </p:txBody>
-      </p:sp>
-      <p:sp>
-        <p:nvSpPr>
-          <p:cNvPr id="9" name="Shape 7"/>
-          <p:cNvSpPr/>
-          <p:nvPr/>
-        </p:nvSpPr>
-        <p:spPr>
-          <a:xfrm>
-            <a:off x="868680" y="1636776"/>
-            <a:ext cx="329184" cy="329184"/>
-          </a:xfrm>
-          <a:prstGeom prst="ellipse">
-            <a:avLst/>
-          </a:prstGeom>
-          <a:solidFill>
-            <a:srgbClr val="00ADB5"/>
-          </a:solidFill>
-          <a:ln w="12700">
-            <a:solidFill>
-              <a:srgbClr val="00ADB5"/>
-            </a:solidFill>
-            <a:prstDash val="solid"/>
-          </a:ln>
-        </p:spPr>
-        <p:txBody>
-          <a:bodyPr/>
-          <a:lstStyle/>
-          <a:p>
-            <a:endParaRPr lang="en-TH"/>
-          </a:p>
-        </p:txBody>
-      </p:sp>
-      <p:sp>
-        <p:nvSpPr>
-          <p:cNvPr id="10" name="Text 8"/>
-          <p:cNvSpPr/>
-          <p:nvPr/>
-        </p:nvSpPr>
-        <p:spPr>
-          <a:xfrm>
-            <a:off x="868680" y="1636776"/>
-            <a:ext cx="329184" cy="329184"/>
-          </a:xfrm>
-          <a:prstGeom prst="rect">
-            <a:avLst/>
-          </a:prstGeom>
-          <a:noFill/>
-          <a:ln/>
-        </p:spPr>
-        <p:txBody>
-          <a:bodyPr wrap="square" lIns="0" tIns="0" rIns="0" bIns="0" rtlCol="0" anchor="ctr"/>
-          <a:lstStyle/>
-          <a:p>
-            <a:pPr marL="0" indent="0" algn="ctr">
-              <a:buNone/>
-            </a:pPr>
-            <a:r>
-              <a:rPr lang="en-US" sz="1500" b="1" dirty="0">
-                <a:solidFill>
-                  <a:srgbClr val="FFFFFF"/>
-                </a:solidFill>
-                <a:latin typeface="TH Sarabun New" pitchFamily="34" charset="0"/>
-                <a:ea typeface="TH Sarabun New" pitchFamily="34" charset="-122"/>
-                <a:cs typeface="TH Sarabun New" pitchFamily="34" charset="-120"/>
-              </a:rPr>
-              <a:t>1</a:t>
-            </a:r>
-            <a:endParaRPr lang="en-US" sz="1500" dirty="0"/>
-          </a:p>
-        </p:txBody>
-      </p:sp>
-      <p:sp>
-        <p:nvSpPr>
-          <p:cNvPr id="11" name="Text 9"/>
-          <p:cNvSpPr/>
-          <p:nvPr/>
-        </p:nvSpPr>
-        <p:spPr>
-          <a:xfrm>
-            <a:off x="1307592" y="1572768"/>
-            <a:ext cx="4754880" cy="457200"/>
-          </a:xfrm>
-          <a:prstGeom prst="rect">
-            <a:avLst/>
-          </a:prstGeom>
-          <a:noFill/>
-          <a:ln/>
-        </p:spPr>
-        <p:txBody>
-          <a:bodyPr wrap="square" lIns="0" tIns="0" rIns="0" bIns="0" rtlCol="0" anchor="ctr"/>
-          <a:lstStyle/>
-          <a:p>
-            <a:pPr marL="0" indent="0">
-              <a:buNone/>
-            </a:pPr>
-            <a:r>
-              <a:rPr lang="en-US" sz="1600" dirty="0">
-                <a:solidFill>
-                  <a:srgbClr val="393E46"/>
-                </a:solidFill>
-                <a:latin typeface="TH Sarabun New" pitchFamily="34" charset="0"/>
-                <a:ea typeface="TH Sarabun New" pitchFamily="34" charset="-122"/>
-                <a:cs typeface="TH Sarabun New" pitchFamily="34" charset="-120"/>
-              </a:rPr>
-              <a:t>ตรวจว่ามี Node.js, Git และ Antigravity IDE แล้ว</a:t>
-            </a:r>
-            <a:endParaRPr lang="en-US" sz="1600" dirty="0"/>
-          </a:p>
-        </p:txBody>
-      </p:sp>
-      <p:sp>
-        <p:nvSpPr>
-          <p:cNvPr id="12" name="Shape 10"/>
-          <p:cNvSpPr/>
-          <p:nvPr/>
-        </p:nvSpPr>
-        <p:spPr>
-          <a:xfrm>
-            <a:off x="868680" y="2221992"/>
-            <a:ext cx="329184" cy="329184"/>
-          </a:xfrm>
-          <a:prstGeom prst="ellipse">
-            <a:avLst/>
-          </a:prstGeom>
-          <a:solidFill>
-            <a:srgbClr val="00ADB5"/>
-          </a:solidFill>
-          <a:ln w="12700">
-            <a:solidFill>
-              <a:srgbClr val="00ADB5"/>
-            </a:solidFill>
-            <a:prstDash val="solid"/>
-          </a:ln>
-        </p:spPr>
-        <p:txBody>
-          <a:bodyPr/>
-          <a:lstStyle/>
-          <a:p>
-            <a:endParaRPr lang="en-TH"/>
-          </a:p>
-        </p:txBody>
-      </p:sp>
-      <p:sp>
-        <p:nvSpPr>
-          <p:cNvPr id="13" name="Text 11"/>
-          <p:cNvSpPr/>
-          <p:nvPr/>
-        </p:nvSpPr>
-        <p:spPr>
-          <a:xfrm>
-            <a:off x="868680" y="2221992"/>
-            <a:ext cx="329184" cy="329184"/>
-          </a:xfrm>
-          <a:prstGeom prst="rect">
-            <a:avLst/>
-          </a:prstGeom>
-          <a:noFill/>
-          <a:ln/>
-        </p:spPr>
-        <p:txBody>
-          <a:bodyPr wrap="square" lIns="0" tIns="0" rIns="0" bIns="0" rtlCol="0" anchor="ctr"/>
-          <a:lstStyle/>
-          <a:p>
-            <a:pPr marL="0" indent="0" algn="ctr">
-              <a:buNone/>
-            </a:pPr>
-            <a:r>
-              <a:rPr lang="en-US" sz="1500" b="1" dirty="0">
-                <a:solidFill>
-                  <a:srgbClr val="FFFFFF"/>
-                </a:solidFill>
-                <a:latin typeface="TH Sarabun New" pitchFamily="34" charset="0"/>
-                <a:ea typeface="TH Sarabun New" pitchFamily="34" charset="-122"/>
-                <a:cs typeface="TH Sarabun New" pitchFamily="34" charset="-120"/>
-              </a:rPr>
-              <a:t>2</a:t>
-            </a:r>
-            <a:endParaRPr lang="en-US" sz="1500" dirty="0"/>
-          </a:p>
-        </p:txBody>
-      </p:sp>
-      <p:sp>
-        <p:nvSpPr>
-          <p:cNvPr id="14" name="Text 12"/>
-          <p:cNvSpPr/>
-          <p:nvPr/>
-        </p:nvSpPr>
-        <p:spPr>
-          <a:xfrm>
-            <a:off x="1307592" y="2157984"/>
-            <a:ext cx="4754880" cy="457200"/>
-          </a:xfrm>
-          <a:prstGeom prst="rect">
-            <a:avLst/>
-          </a:prstGeom>
-          <a:noFill/>
-          <a:ln/>
-        </p:spPr>
-        <p:txBody>
-          <a:bodyPr wrap="square" lIns="0" tIns="0" rIns="0" bIns="0" rtlCol="0" anchor="ctr"/>
-          <a:lstStyle/>
-          <a:p>
-            <a:pPr marL="0" indent="0">
-              <a:buNone/>
-            </a:pPr>
-            <a:r>
-              <a:rPr lang="en-US" sz="1600" dirty="0">
-                <a:solidFill>
-                  <a:srgbClr val="393E46"/>
-                </a:solidFill>
-                <a:latin typeface="TH Sarabun New" pitchFamily="34" charset="0"/>
-                <a:ea typeface="TH Sarabun New" pitchFamily="34" charset="-122"/>
-                <a:cs typeface="TH Sarabun New" pitchFamily="34" charset="-120"/>
-              </a:rPr>
-              <a:t>สร้างโฟลเดอร์ fundinghub แล้วเปิดใน Antigravity</a:t>
-            </a:r>
-            <a:endParaRPr lang="en-US" sz="1600" dirty="0"/>
-          </a:p>
-        </p:txBody>
-      </p:sp>
-      <p:sp>
-        <p:nvSpPr>
-          <p:cNvPr id="15" name="Shape 13"/>
-          <p:cNvSpPr/>
-          <p:nvPr/>
-        </p:nvSpPr>
-        <p:spPr>
-          <a:xfrm>
-            <a:off x="868680" y="2807208"/>
-            <a:ext cx="329184" cy="329184"/>
-          </a:xfrm>
-          <a:prstGeom prst="ellipse">
-            <a:avLst/>
-          </a:prstGeom>
-          <a:solidFill>
-            <a:srgbClr val="00ADB5"/>
-          </a:solidFill>
-          <a:ln w="12700">
-            <a:solidFill>
-              <a:srgbClr val="00ADB5"/>
-            </a:solidFill>
-            <a:prstDash val="solid"/>
-          </a:ln>
-        </p:spPr>
-        <p:txBody>
-          <a:bodyPr/>
-          <a:lstStyle/>
-          <a:p>
-            <a:endParaRPr lang="en-TH"/>
-          </a:p>
-        </p:txBody>
-      </p:sp>
-      <p:sp>
-        <p:nvSpPr>
-          <p:cNvPr id="16" name="Text 14"/>
-          <p:cNvSpPr/>
-          <p:nvPr/>
-        </p:nvSpPr>
-        <p:spPr>
-          <a:xfrm>
-            <a:off x="868680" y="2807208"/>
-            <a:ext cx="329184" cy="329184"/>
-          </a:xfrm>
-          <a:prstGeom prst="rect">
-            <a:avLst/>
-          </a:prstGeom>
-          <a:noFill/>
-          <a:ln/>
-        </p:spPr>
-        <p:txBody>
-          <a:bodyPr wrap="square" lIns="0" tIns="0" rIns="0" bIns="0" rtlCol="0" anchor="ctr"/>
-          <a:lstStyle/>
-          <a:p>
-            <a:pPr marL="0" indent="0" algn="ctr">
-              <a:buNone/>
-            </a:pPr>
-            <a:r>
-              <a:rPr lang="en-US" sz="1500" b="1" dirty="0">
-                <a:solidFill>
-                  <a:srgbClr val="FFFFFF"/>
-                </a:solidFill>
-                <a:latin typeface="TH Sarabun New" pitchFamily="34" charset="0"/>
-                <a:ea typeface="TH Sarabun New" pitchFamily="34" charset="-122"/>
-                <a:cs typeface="TH Sarabun New" pitchFamily="34" charset="-120"/>
-              </a:rPr>
-              <a:t>3</a:t>
-            </a:r>
-            <a:endParaRPr lang="en-US" sz="1500" dirty="0"/>
-          </a:p>
-        </p:txBody>
-      </p:sp>
-      <p:sp>
-        <p:nvSpPr>
-          <p:cNvPr id="17" name="Text 15"/>
-          <p:cNvSpPr/>
-          <p:nvPr/>
-        </p:nvSpPr>
-        <p:spPr>
-          <a:xfrm>
-            <a:off x="1307592" y="2743200"/>
-            <a:ext cx="4754880" cy="457200"/>
-          </a:xfrm>
-          <a:prstGeom prst="rect">
-            <a:avLst/>
-          </a:prstGeom>
-          <a:noFill/>
-          <a:ln/>
-        </p:spPr>
-        <p:txBody>
-          <a:bodyPr wrap="square" lIns="0" tIns="0" rIns="0" bIns="0" rtlCol="0" anchor="ctr"/>
-          <a:lstStyle/>
-          <a:p>
-            <a:pPr marL="0" indent="0">
-              <a:buNone/>
-            </a:pPr>
-            <a:r>
-              <a:rPr lang="en-US" sz="1600" dirty="0">
-                <a:solidFill>
-                  <a:srgbClr val="393E46"/>
-                </a:solidFill>
-                <a:latin typeface="TH Sarabun New" pitchFamily="34" charset="0"/>
-                <a:ea typeface="TH Sarabun New" pitchFamily="34" charset="-122"/>
-                <a:cs typeface="TH Sarabun New" pitchFamily="34" charset="-120"/>
-              </a:rPr>
-              <a:t>สร้างไฟล์เปล่าชื่อ SPEC_FundingHub.md ที่รากโปรเจกต์</a:t>
-            </a:r>
-            <a:endParaRPr lang="en-US" sz="1600" dirty="0"/>
-          </a:p>
-        </p:txBody>
-      </p:sp>
-      <p:sp>
-        <p:nvSpPr>
-          <p:cNvPr id="18" name="Shape 16"/>
-          <p:cNvSpPr/>
-          <p:nvPr/>
-        </p:nvSpPr>
-        <p:spPr>
-          <a:xfrm>
-            <a:off x="868680" y="3392424"/>
-            <a:ext cx="329184" cy="329184"/>
-          </a:xfrm>
-          <a:prstGeom prst="ellipse">
-            <a:avLst/>
-          </a:prstGeom>
-          <a:solidFill>
-            <a:srgbClr val="00ADB5"/>
-          </a:solidFill>
-          <a:ln w="12700">
-            <a:solidFill>
-              <a:srgbClr val="00ADB5"/>
-            </a:solidFill>
-            <a:prstDash val="solid"/>
-          </a:ln>
-        </p:spPr>
-        <p:txBody>
-          <a:bodyPr/>
-          <a:lstStyle/>
-          <a:p>
-            <a:endParaRPr lang="en-TH"/>
-          </a:p>
-        </p:txBody>
-      </p:sp>
-      <p:sp>
-        <p:nvSpPr>
-          <p:cNvPr id="19" name="Text 17"/>
-          <p:cNvSpPr/>
-          <p:nvPr/>
-        </p:nvSpPr>
-        <p:spPr>
-          <a:xfrm>
-            <a:off x="868680" y="3392424"/>
-            <a:ext cx="329184" cy="329184"/>
-          </a:xfrm>
-          <a:prstGeom prst="rect">
-            <a:avLst/>
-          </a:prstGeom>
-          <a:noFill/>
-          <a:ln/>
-        </p:spPr>
-        <p:txBody>
-          <a:bodyPr wrap="square" lIns="0" tIns="0" rIns="0" bIns="0" rtlCol="0" anchor="ctr"/>
-          <a:lstStyle/>
-          <a:p>
-            <a:pPr marL="0" indent="0" algn="ctr">
-              <a:buNone/>
-            </a:pPr>
-            <a:r>
-              <a:rPr lang="en-US" sz="1500" b="1" dirty="0">
-                <a:solidFill>
-                  <a:srgbClr val="FFFFFF"/>
-                </a:solidFill>
-                <a:latin typeface="TH Sarabun New" pitchFamily="34" charset="0"/>
-                <a:ea typeface="TH Sarabun New" pitchFamily="34" charset="-122"/>
-                <a:cs typeface="TH Sarabun New" pitchFamily="34" charset="-120"/>
-              </a:rPr>
-              <a:t>4</a:t>
-            </a:r>
-            <a:endParaRPr lang="en-US" sz="1500" dirty="0"/>
-          </a:p>
-        </p:txBody>
-      </p:sp>
-      <p:sp>
-        <p:nvSpPr>
-          <p:cNvPr id="20" name="Text 18"/>
-          <p:cNvSpPr/>
-          <p:nvPr/>
-        </p:nvSpPr>
-        <p:spPr>
-          <a:xfrm>
-            <a:off x="1307592" y="3328416"/>
-            <a:ext cx="4754880" cy="457200"/>
-          </a:xfrm>
-          <a:prstGeom prst="rect">
-            <a:avLst/>
-          </a:prstGeom>
-          <a:noFill/>
-          <a:ln/>
-        </p:spPr>
-        <p:txBody>
-          <a:bodyPr wrap="square" lIns="0" tIns="0" rIns="0" bIns="0" rtlCol="0" anchor="ctr"/>
-          <a:lstStyle/>
-          <a:p>
-            <a:pPr marL="0" indent="0">
-              <a:buNone/>
-            </a:pPr>
-            <a:r>
-              <a:rPr lang="en-US" sz="1600" dirty="0">
-                <a:solidFill>
-                  <a:srgbClr val="393E46"/>
-                </a:solidFill>
-                <a:latin typeface="TH Sarabun New" pitchFamily="34" charset="0"/>
-                <a:ea typeface="TH Sarabun New" pitchFamily="34" charset="-122"/>
-                <a:cs typeface="TH Sarabun New" pitchFamily="34" charset="-120"/>
-              </a:rPr>
-              <a:t>เปิดไฟล์ SPEC_BLOCKS.md ที่แจกให้ ไว้อีกหน้าต่างหนึ่ง</a:t>
-            </a:r>
-            <a:endParaRPr lang="en-US" sz="1600" dirty="0"/>
-          </a:p>
-        </p:txBody>
-      </p:sp>
-      <p:sp>
-        <p:nvSpPr>
-          <p:cNvPr id="21" name="Shape 19"/>
-          <p:cNvSpPr/>
-          <p:nvPr/>
-        </p:nvSpPr>
-        <p:spPr>
-          <a:xfrm>
-            <a:off x="868680" y="3977640"/>
-            <a:ext cx="329184" cy="329184"/>
-          </a:xfrm>
-          <a:prstGeom prst="ellipse">
-            <a:avLst/>
-          </a:prstGeom>
-          <a:solidFill>
-            <a:srgbClr val="00ADB5"/>
-          </a:solidFill>
-          <a:ln w="12700">
-            <a:solidFill>
-              <a:srgbClr val="00ADB5"/>
-            </a:solidFill>
-            <a:prstDash val="solid"/>
-          </a:ln>
-        </p:spPr>
-        <p:txBody>
-          <a:bodyPr/>
-          <a:lstStyle/>
-          <a:p>
-            <a:endParaRPr lang="en-TH"/>
-          </a:p>
-        </p:txBody>
-      </p:sp>
-      <p:sp>
-        <p:nvSpPr>
-          <p:cNvPr id="22" name="Text 20"/>
-          <p:cNvSpPr/>
-          <p:nvPr/>
-        </p:nvSpPr>
-        <p:spPr>
-          <a:xfrm>
-            <a:off x="868680" y="3977640"/>
-            <a:ext cx="329184" cy="329184"/>
-          </a:xfrm>
-          <a:prstGeom prst="rect">
-            <a:avLst/>
-          </a:prstGeom>
-          <a:noFill/>
-          <a:ln/>
-        </p:spPr>
-        <p:txBody>
-          <a:bodyPr wrap="square" lIns="0" tIns="0" rIns="0" bIns="0" rtlCol="0" anchor="ctr"/>
-          <a:lstStyle/>
-          <a:p>
-            <a:pPr marL="0" indent="0" algn="ctr">
-              <a:buNone/>
-            </a:pPr>
-            <a:r>
-              <a:rPr lang="en-US" sz="1500" b="1" dirty="0">
-                <a:solidFill>
-                  <a:srgbClr val="FFFFFF"/>
-                </a:solidFill>
-                <a:latin typeface="TH Sarabun New" pitchFamily="34" charset="0"/>
-                <a:ea typeface="TH Sarabun New" pitchFamily="34" charset="-122"/>
-                <a:cs typeface="TH Sarabun New" pitchFamily="34" charset="-120"/>
-              </a:rPr>
-              <a:t>5</a:t>
-            </a:r>
-            <a:endParaRPr lang="en-US" sz="1500" dirty="0"/>
-          </a:p>
-        </p:txBody>
-      </p:sp>
-      <p:sp>
-        <p:nvSpPr>
-          <p:cNvPr id="23" name="Text 21"/>
-          <p:cNvSpPr/>
-          <p:nvPr/>
-        </p:nvSpPr>
-        <p:spPr>
-          <a:xfrm>
-            <a:off x="1307592" y="3913632"/>
-            <a:ext cx="4754880" cy="457200"/>
-          </a:xfrm>
-          <a:prstGeom prst="rect">
-            <a:avLst/>
-          </a:prstGeom>
-          <a:noFill/>
-          <a:ln/>
-        </p:spPr>
-        <p:txBody>
-          <a:bodyPr wrap="square" lIns="0" tIns="0" rIns="0" bIns="0" rtlCol="0" anchor="ctr"/>
-          <a:lstStyle/>
-          <a:p>
-            <a:pPr marL="0" indent="0">
-              <a:buNone/>
-            </a:pPr>
-            <a:r>
-              <a:rPr lang="en-US" sz="1600" dirty="0">
-                <a:solidFill>
-                  <a:srgbClr val="393E46"/>
-                </a:solidFill>
-                <a:latin typeface="TH Sarabun New" pitchFamily="34" charset="0"/>
-                <a:ea typeface="TH Sarabun New" pitchFamily="34" charset="-122"/>
-                <a:cs typeface="TH Sarabun New" pitchFamily="34" charset="-120"/>
-              </a:rPr>
-              <a:t>หาให้เจอ 4 ส่วน : Editor / Agent / Artifacts / Browser</a:t>
-            </a:r>
-            <a:endParaRPr lang="en-US" sz="1600" dirty="0"/>
-          </a:p>
-        </p:txBody>
-      </p:sp>
-      <p:sp>
-        <p:nvSpPr>
-          <p:cNvPr id="24" name="Shape 22"/>
-          <p:cNvSpPr/>
-          <p:nvPr/>
-        </p:nvSpPr>
-        <p:spPr>
-          <a:xfrm>
-            <a:off x="6583680" y="1024128"/>
-            <a:ext cx="4983480" cy="1600200"/>
-          </a:xfrm>
-          <a:prstGeom prst="roundRect">
-            <a:avLst>
-              <a:gd name="adj" fmla="val 4000"/>
-            </a:avLst>
-          </a:prstGeom>
-          <a:solidFill>
-            <a:srgbClr val="222831"/>
-          </a:solidFill>
-          <a:ln w="12700">
-            <a:solidFill>
-              <a:srgbClr val="222831"/>
-            </a:solidFill>
-            <a:prstDash val="solid"/>
-          </a:ln>
-        </p:spPr>
-        <p:txBody>
-          <a:bodyPr/>
-          <a:lstStyle/>
-          <a:p>
-            <a:endParaRPr lang="en-TH"/>
-          </a:p>
-        </p:txBody>
-      </p:sp>
-      <p:sp>
-        <p:nvSpPr>
-          <p:cNvPr id="25" name="Text 23"/>
-          <p:cNvSpPr/>
-          <p:nvPr/>
-        </p:nvSpPr>
-        <p:spPr>
-          <a:xfrm>
-            <a:off x="6729984" y="1115568"/>
-            <a:ext cx="4690872" cy="1417320"/>
-          </a:xfrm>
-          <a:prstGeom prst="rect">
-            <a:avLst/>
-          </a:prstGeom>
-          <a:noFill/>
-          <a:ln/>
-        </p:spPr>
-        <p:txBody>
-          <a:bodyPr wrap="square" lIns="0" tIns="0" rIns="0" bIns="0" rtlCol="0" anchor="t"/>
-          <a:lstStyle/>
-          <a:p>
-            <a:pPr marL="0" indent="0">
-              <a:lnSpc>
-                <a:spcPts val="1700"/>
-              </a:lnSpc>
-              <a:buNone/>
-            </a:pPr>
-            <a:r>
-              <a:rPr lang="en-US" sz="1150" dirty="0">
-                <a:solidFill>
-                  <a:srgbClr val="D6F5F7"/>
-                </a:solidFill>
-                <a:latin typeface="Courier New" pitchFamily="34" charset="0"/>
-                <a:ea typeface="Courier New" pitchFamily="34" charset="-122"/>
-                <a:cs typeface="Courier New" pitchFamily="34" charset="-120"/>
-              </a:rPr>
-              <a:t>node -v</a:t>
-            </a:r>
-            <a:endParaRPr lang="en-US" sz="1150" dirty="0"/>
-          </a:p>
-          <a:p>
-            <a:pPr marL="0" indent="0">
-              <a:lnSpc>
-                <a:spcPts val="1700"/>
-              </a:lnSpc>
-              <a:buNone/>
-            </a:pPr>
-            <a:r>
-              <a:rPr lang="en-US" sz="1150" dirty="0">
-                <a:solidFill>
-                  <a:srgbClr val="D6F5F7"/>
-                </a:solidFill>
-                <a:latin typeface="Courier New" pitchFamily="34" charset="0"/>
-                <a:ea typeface="Courier New" pitchFamily="34" charset="-122"/>
-                <a:cs typeface="Courier New" pitchFamily="34" charset="-120"/>
-              </a:rPr>
-              <a:t>npm -v</a:t>
-            </a:r>
-            <a:endParaRPr lang="en-US" sz="1150" dirty="0"/>
-          </a:p>
-          <a:p>
-            <a:pPr marL="0" indent="0">
-              <a:lnSpc>
-                <a:spcPts val="1700"/>
-              </a:lnSpc>
-              <a:buNone/>
-            </a:pPr>
-            <a:r>
-              <a:rPr lang="en-US" sz="1150" dirty="0">
-                <a:solidFill>
-                  <a:srgbClr val="D6F5F7"/>
-                </a:solidFill>
-                <a:latin typeface="Courier New" pitchFamily="34" charset="0"/>
-                <a:ea typeface="Courier New" pitchFamily="34" charset="-122"/>
-                <a:cs typeface="Courier New" pitchFamily="34" charset="-120"/>
-              </a:rPr>
-              <a:t>git --version</a:t>
-            </a:r>
-            <a:endParaRPr lang="en-US" sz="1150" dirty="0"/>
-          </a:p>
-        </p:txBody>
-      </p:sp>
-      <p:sp>
-        <p:nvSpPr>
-          <p:cNvPr id="26" name="Shape 24"/>
-          <p:cNvSpPr/>
-          <p:nvPr/>
-        </p:nvSpPr>
-        <p:spPr>
-          <a:xfrm>
-            <a:off x="6583680" y="2788920"/>
-            <a:ext cx="4983480" cy="2029968"/>
-          </a:xfrm>
-          <a:prstGeom prst="roundRect">
-            <a:avLst>
-              <a:gd name="adj" fmla="val 4054"/>
-            </a:avLst>
-          </a:prstGeom>
-          <a:solidFill>
-            <a:srgbClr val="FFFFFF"/>
-          </a:solidFill>
-          <a:ln w="9525">
-            <a:solidFill>
-              <a:srgbClr val="FFFFFF"/>
-            </a:solidFill>
-            <a:prstDash val="solid"/>
-          </a:ln>
-          <a:effectLst>
-            <a:outerShdw blurRad="101600" dist="12700" dir="5400000" algn="bl" rotWithShape="0">
-              <a:srgbClr val="222831">
-                <a:alpha val="10000"/>
-              </a:srgbClr>
-            </a:outerShdw>
-          </a:effectLst>
-        </p:spPr>
-        <p:txBody>
-          <a:bodyPr/>
-          <a:lstStyle/>
-          <a:p>
-            <a:endParaRPr lang="en-TH"/>
-          </a:p>
-        </p:txBody>
-      </p:sp>
-      <p:sp>
-        <p:nvSpPr>
-          <p:cNvPr id="27" name="Text 25"/>
-          <p:cNvSpPr/>
-          <p:nvPr/>
-        </p:nvSpPr>
-        <p:spPr>
-          <a:xfrm>
-            <a:off x="6812280" y="2926080"/>
-            <a:ext cx="4526280" cy="310896"/>
-          </a:xfrm>
-          <a:prstGeom prst="rect">
-            <a:avLst/>
-          </a:prstGeom>
-          <a:noFill/>
-          <a:ln/>
-        </p:spPr>
-        <p:txBody>
-          <a:bodyPr wrap="square" lIns="0" tIns="0" rIns="0" bIns="0" rtlCol="0" anchor="ctr"/>
-          <a:lstStyle/>
-          <a:p>
-            <a:pPr marL="0" indent="0">
-              <a:buNone/>
-            </a:pPr>
-            <a:r>
-              <a:rPr lang="en-US" sz="1800" b="1" dirty="0">
-                <a:solidFill>
-                  <a:srgbClr val="222831"/>
-                </a:solidFill>
-                <a:latin typeface="TH Sarabun New" pitchFamily="34" charset="0"/>
-                <a:ea typeface="TH Sarabun New" pitchFamily="34" charset="-122"/>
-                <a:cs typeface="TH Sarabun New" pitchFamily="34" charset="-120"/>
-              </a:rPr>
-              <a:t>เกณฑ์ผ่าน</a:t>
-            </a:r>
-            <a:endParaRPr lang="en-US" sz="1800" dirty="0"/>
-          </a:p>
-        </p:txBody>
-      </p:sp>
-      <p:sp>
-        <p:nvSpPr>
-          <p:cNvPr id="28" name="Text 26"/>
-          <p:cNvSpPr/>
-          <p:nvPr/>
-        </p:nvSpPr>
-        <p:spPr>
-          <a:xfrm>
-            <a:off x="6812280" y="3310128"/>
-            <a:ext cx="4480560" cy="1371600"/>
-          </a:xfrm>
-          <a:prstGeom prst="rect">
-            <a:avLst/>
-          </a:prstGeom>
-          <a:noFill/>
-          <a:ln/>
-        </p:spPr>
-        <p:txBody>
-          <a:bodyPr wrap="square" lIns="0" tIns="0" rIns="0" bIns="0" rtlCol="0" anchor="t"/>
-          <a:lstStyle/>
-          <a:p>
-            <a:pPr marL="342900" indent="-342900">
-              <a:spcAft>
-                <a:spcPts val="800"/>
-              </a:spcAft>
-              <a:buSzPct val="100000"/>
-              <a:buChar char="•"/>
-            </a:pPr>
-            <a:r>
-              <a:rPr lang="en-US" sz="1550" dirty="0">
-                <a:solidFill>
-                  <a:srgbClr val="393E46"/>
-                </a:solidFill>
-                <a:latin typeface="TH Sarabun New" pitchFamily="34" charset="0"/>
-                <a:ea typeface="TH Sarabun New" pitchFamily="34" charset="-122"/>
-                <a:cs typeface="TH Sarabun New" pitchFamily="34" charset="-120"/>
-              </a:rPr>
-              <a:t>ทุกคำสั่งขึ้นเลขเวอร์ชัน ไม่ขึ้น command not found</a:t>
-            </a:r>
-            <a:endParaRPr lang="en-US" sz="1550" dirty="0"/>
-          </a:p>
-          <a:p>
-            <a:pPr marL="342900" indent="-342900">
-              <a:spcAft>
-                <a:spcPts val="800"/>
-              </a:spcAft>
-              <a:buSzPct val="100000"/>
-              <a:buChar char="•"/>
-            </a:pPr>
-            <a:r>
-              <a:rPr lang="en-US" sz="1550" dirty="0">
-                <a:solidFill>
-                  <a:srgbClr val="393E46"/>
-                </a:solidFill>
-                <a:latin typeface="TH Sarabun New" pitchFamily="34" charset="0"/>
-                <a:ea typeface="TH Sarabun New" pitchFamily="34" charset="-122"/>
-                <a:cs typeface="TH Sarabun New" pitchFamily="34" charset="-120"/>
-              </a:rPr>
-              <a:t>เปิดโฟลเดอร์ fundinghub ใน Antigravity ได้</a:t>
-            </a:r>
-            <a:endParaRPr lang="en-US" sz="1550" dirty="0"/>
-          </a:p>
-          <a:p>
-            <a:pPr marL="342900" indent="-342900">
-              <a:spcAft>
-                <a:spcPts val="800"/>
-              </a:spcAft>
-              <a:buSzPct val="100000"/>
-              <a:buChar char="•"/>
-            </a:pPr>
-            <a:r>
-              <a:rPr lang="en-US" sz="1550" dirty="0">
-                <a:solidFill>
-                  <a:srgbClr val="393E46"/>
-                </a:solidFill>
-                <a:latin typeface="TH Sarabun New" pitchFamily="34" charset="0"/>
-                <a:ea typeface="TH Sarabun New" pitchFamily="34" charset="-122"/>
-                <a:cs typeface="TH Sarabun New" pitchFamily="34" charset="-120"/>
-              </a:rPr>
-              <a:t>มีไฟล์เปล่า SPEC_FundingHub.md รออยู่</a:t>
-            </a:r>
-            <a:endParaRPr lang="en-US" sz="1550" dirty="0"/>
-          </a:p>
-        </p:txBody>
-      </p:sp>
-      <p:sp>
-        <p:nvSpPr>
-          <p:cNvPr id="29" name="Text 27"/>
-          <p:cNvSpPr/>
-          <p:nvPr/>
-        </p:nvSpPr>
-        <p:spPr>
-          <a:xfrm>
-            <a:off x="594360" y="6263640"/>
-            <a:ext cx="10972800" cy="292608"/>
-          </a:xfrm>
-          <a:prstGeom prst="rect">
-            <a:avLst/>
-          </a:prstGeom>
-          <a:noFill/>
-          <a:ln/>
-        </p:spPr>
-        <p:txBody>
-          <a:bodyPr wrap="square" lIns="0" tIns="0" rIns="0" bIns="0" rtlCol="0" anchor="ctr"/>
-          <a:lstStyle/>
-          <a:p>
-            <a:pPr marL="0" indent="0">
-              <a:buNone/>
-            </a:pPr>
-            <a:r>
-              <a:rPr lang="en-US" sz="1300" dirty="0">
-                <a:solidFill>
-                  <a:srgbClr val="8A94A6"/>
-                </a:solidFill>
-                <a:latin typeface="TH Sarabun New" pitchFamily="34" charset="0"/>
-                <a:ea typeface="TH Sarabun New" pitchFamily="34" charset="-122"/>
-                <a:cs typeface="TH Sarabun New" pitchFamily="34" charset="-120"/>
-              </a:rPr>
-              <a:t>เอกสารแล็บ : LAB A  ·  การติดตั้งควรทำมาล่วงหน้าก่อนวันอบรม เวลาในห้องมีเพียง 10 นาทีสำหรับตรวจความพร้อม</a:t>
-            </a:r>
-            <a:endParaRPr lang="en-US" sz="1300" dirty="0"/>
           </a:p>
         </p:txBody>
       </p:sp>

--- a/Funding_Hub_Antigravity_Workshop.pptx
+++ b/Funding_Hub_Antigravity_Workshop.pptx
@@ -5,39 +5,40 @@
     <p:sldMasterId id="2147483648" r:id="rId1"/>
   </p:sldMasterIdLst>
   <p:notesMasterIdLst>
-    <p:notesMasterId r:id="rId32"/>
+    <p:notesMasterId r:id="rId33"/>
   </p:notesMasterIdLst>
   <p:sldIdLst>
     <p:sldId id="294" r:id="rId2"/>
     <p:sldId id="299" r:id="rId3"/>
-    <p:sldId id="257" r:id="rId4"/>
-    <p:sldId id="259" r:id="rId5"/>
-    <p:sldId id="260" r:id="rId6"/>
-    <p:sldId id="261" r:id="rId7"/>
-    <p:sldId id="262" r:id="rId8"/>
-    <p:sldId id="263" r:id="rId9"/>
-    <p:sldId id="264" r:id="rId10"/>
-    <p:sldId id="265" r:id="rId11"/>
-    <p:sldId id="266" r:id="rId12"/>
-    <p:sldId id="267" r:id="rId13"/>
-    <p:sldId id="268" r:id="rId14"/>
-    <p:sldId id="269" r:id="rId15"/>
-    <p:sldId id="271" r:id="rId16"/>
-    <p:sldId id="272" r:id="rId17"/>
-    <p:sldId id="273" r:id="rId18"/>
-    <p:sldId id="278" r:id="rId19"/>
-    <p:sldId id="279" r:id="rId20"/>
-    <p:sldId id="280" r:id="rId21"/>
-    <p:sldId id="297" r:id="rId22"/>
-    <p:sldId id="281" r:id="rId23"/>
-    <p:sldId id="296" r:id="rId24"/>
-    <p:sldId id="282" r:id="rId25"/>
-    <p:sldId id="298" r:id="rId26"/>
-    <p:sldId id="284" r:id="rId27"/>
-    <p:sldId id="285" r:id="rId28"/>
-    <p:sldId id="295" r:id="rId29"/>
-    <p:sldId id="292" r:id="rId30"/>
-    <p:sldId id="293" r:id="rId31"/>
+    <p:sldId id="300" r:id="rId4"/>
+    <p:sldId id="257" r:id="rId5"/>
+    <p:sldId id="259" r:id="rId6"/>
+    <p:sldId id="260" r:id="rId7"/>
+    <p:sldId id="261" r:id="rId8"/>
+    <p:sldId id="262" r:id="rId9"/>
+    <p:sldId id="263" r:id="rId10"/>
+    <p:sldId id="264" r:id="rId11"/>
+    <p:sldId id="265" r:id="rId12"/>
+    <p:sldId id="266" r:id="rId13"/>
+    <p:sldId id="267" r:id="rId14"/>
+    <p:sldId id="268" r:id="rId15"/>
+    <p:sldId id="269" r:id="rId16"/>
+    <p:sldId id="271" r:id="rId17"/>
+    <p:sldId id="272" r:id="rId18"/>
+    <p:sldId id="273" r:id="rId19"/>
+    <p:sldId id="278" r:id="rId20"/>
+    <p:sldId id="279" r:id="rId21"/>
+    <p:sldId id="280" r:id="rId22"/>
+    <p:sldId id="297" r:id="rId23"/>
+    <p:sldId id="281" r:id="rId24"/>
+    <p:sldId id="296" r:id="rId25"/>
+    <p:sldId id="282" r:id="rId26"/>
+    <p:sldId id="298" r:id="rId27"/>
+    <p:sldId id="284" r:id="rId28"/>
+    <p:sldId id="285" r:id="rId29"/>
+    <p:sldId id="295" r:id="rId30"/>
+    <p:sldId id="292" r:id="rId31"/>
+    <p:sldId id="293" r:id="rId32"/>
   </p:sldIdLst>
   <p:sldSz cx="12192000" cy="6858000"/>
   <p:notesSz cx="6858000" cy="12192000"/>
@@ -418,7 +419,7 @@
           <a:p>
             <a:fld id="{F7021451-1387-4CA6-816F-3879F97B5CBC}" type="slidenum">
               <a:rPr lang="en-US"/>
-              <a:t>11</a:t>
+              <a:t>12</a:t>
             </a:fld>
             <a:endParaRPr lang="en-US"/>
           </a:p>
@@ -502,7 +503,7 @@
           <a:p>
             <a:fld id="{F7021451-1387-4CA6-816F-3879F97B5CBC}" type="slidenum">
               <a:rPr lang="en-US"/>
-              <a:t>12</a:t>
+              <a:t>13</a:t>
             </a:fld>
             <a:endParaRPr lang="en-US"/>
           </a:p>
@@ -586,7 +587,7 @@
           <a:p>
             <a:fld id="{F7021451-1387-4CA6-816F-3879F97B5CBC}" type="slidenum">
               <a:rPr lang="en-US"/>
-              <a:t>13</a:t>
+              <a:t>14</a:t>
             </a:fld>
             <a:endParaRPr lang="en-US"/>
           </a:p>
@@ -670,7 +671,7 @@
           <a:p>
             <a:fld id="{F7021451-1387-4CA6-816F-3879F97B5CBC}" type="slidenum">
               <a:rPr lang="en-US"/>
-              <a:t>14</a:t>
+              <a:t>15</a:t>
             </a:fld>
             <a:endParaRPr lang="en-US"/>
           </a:p>
@@ -754,7 +755,7 @@
           <a:p>
             <a:fld id="{F7021451-1387-4CA6-816F-3879F97B5CBC}" type="slidenum">
               <a:rPr lang="en-US"/>
-              <a:t>15</a:t>
+              <a:t>16</a:t>
             </a:fld>
             <a:endParaRPr lang="en-US"/>
           </a:p>
@@ -838,7 +839,7 @@
           <a:p>
             <a:fld id="{F7021451-1387-4CA6-816F-3879F97B5CBC}" type="slidenum">
               <a:rPr lang="en-US"/>
-              <a:t>16</a:t>
+              <a:t>17</a:t>
             </a:fld>
             <a:endParaRPr lang="en-US"/>
           </a:p>
@@ -922,7 +923,7 @@
           <a:p>
             <a:fld id="{F7021451-1387-4CA6-816F-3879F97B5CBC}" type="slidenum">
               <a:rPr lang="en-US"/>
-              <a:t>17</a:t>
+              <a:t>18</a:t>
             </a:fld>
             <a:endParaRPr lang="en-US"/>
           </a:p>
@@ -1006,7 +1007,7 @@
           <a:p>
             <a:fld id="{F7021451-1387-4CA6-816F-3879F97B5CBC}" type="slidenum">
               <a:rPr lang="en-US"/>
-              <a:t>18</a:t>
+              <a:t>19</a:t>
             </a:fld>
             <a:endParaRPr lang="en-US"/>
           </a:p>
@@ -1090,7 +1091,7 @@
           <a:p>
             <a:fld id="{F7021451-1387-4CA6-816F-3879F97B5CBC}" type="slidenum">
               <a:rPr lang="en-US"/>
-              <a:t>19</a:t>
+              <a:t>20</a:t>
             </a:fld>
             <a:endParaRPr lang="en-US"/>
           </a:p>
@@ -1174,7 +1175,7 @@
           <a:p>
             <a:fld id="{F7021451-1387-4CA6-816F-3879F97B5CBC}" type="slidenum">
               <a:rPr lang="en-US"/>
-              <a:t>20</a:t>
+              <a:t>21</a:t>
             </a:fld>
             <a:endParaRPr lang="en-US"/>
           </a:p>
@@ -1258,7 +1259,7 @@
           <a:p>
             <a:fld id="{F7021451-1387-4CA6-816F-3879F97B5CBC}" type="slidenum">
               <a:rPr lang="en-US"/>
-              <a:t>3</a:t>
+              <a:t>4</a:t>
             </a:fld>
             <a:endParaRPr lang="en-US"/>
           </a:p>
@@ -1342,7 +1343,7 @@
           <a:p>
             <a:fld id="{F7021451-1387-4CA6-816F-3879F97B5CBC}" type="slidenum">
               <a:rPr lang="en-US"/>
-              <a:t>22</a:t>
+              <a:t>23</a:t>
             </a:fld>
             <a:endParaRPr lang="en-US"/>
           </a:p>
@@ -1426,7 +1427,7 @@
           <a:p>
             <a:fld id="{F7021451-1387-4CA6-816F-3879F97B5CBC}" type="slidenum">
               <a:rPr lang="en-US"/>
-              <a:t>24</a:t>
+              <a:t>25</a:t>
             </a:fld>
             <a:endParaRPr lang="en-US"/>
           </a:p>
@@ -1510,7 +1511,7 @@
           <a:p>
             <a:fld id="{F7021451-1387-4CA6-816F-3879F97B5CBC}" type="slidenum">
               <a:rPr lang="en-US"/>
-              <a:t>26</a:t>
+              <a:t>27</a:t>
             </a:fld>
             <a:endParaRPr lang="en-US"/>
           </a:p>
@@ -1594,7 +1595,7 @@
           <a:p>
             <a:fld id="{F7021451-1387-4CA6-816F-3879F97B5CBC}" type="slidenum">
               <a:rPr lang="en-US"/>
-              <a:t>27</a:t>
+              <a:t>28</a:t>
             </a:fld>
             <a:endParaRPr lang="en-US"/>
           </a:p>
@@ -1678,7 +1679,7 @@
           <a:p>
             <a:fld id="{F7021451-1387-4CA6-816F-3879F97B5CBC}" type="slidenum">
               <a:rPr lang="en-US"/>
-              <a:t>29</a:t>
+              <a:t>30</a:t>
             </a:fld>
             <a:endParaRPr lang="en-US"/>
           </a:p>
@@ -1762,7 +1763,7 @@
           <a:p>
             <a:fld id="{F7021451-1387-4CA6-816F-3879F97B5CBC}" type="slidenum">
               <a:rPr lang="en-US"/>
-              <a:t>30</a:t>
+              <a:t>31</a:t>
             </a:fld>
             <a:endParaRPr lang="en-US"/>
           </a:p>
@@ -1846,7 +1847,7 @@
           <a:p>
             <a:fld id="{F7021451-1387-4CA6-816F-3879F97B5CBC}" type="slidenum">
               <a:rPr lang="en-US"/>
-              <a:t>4</a:t>
+              <a:t>5</a:t>
             </a:fld>
             <a:endParaRPr lang="en-US"/>
           </a:p>
@@ -1930,7 +1931,7 @@
           <a:p>
             <a:fld id="{F7021451-1387-4CA6-816F-3879F97B5CBC}" type="slidenum">
               <a:rPr lang="en-US"/>
-              <a:t>5</a:t>
+              <a:t>6</a:t>
             </a:fld>
             <a:endParaRPr lang="en-US"/>
           </a:p>
@@ -2014,7 +2015,7 @@
           <a:p>
             <a:fld id="{F7021451-1387-4CA6-816F-3879F97B5CBC}" type="slidenum">
               <a:rPr lang="en-US"/>
-              <a:t>6</a:t>
+              <a:t>7</a:t>
             </a:fld>
             <a:endParaRPr lang="en-US"/>
           </a:p>
@@ -2098,7 +2099,7 @@
           <a:p>
             <a:fld id="{F7021451-1387-4CA6-816F-3879F97B5CBC}" type="slidenum">
               <a:rPr lang="en-US"/>
-              <a:t>7</a:t>
+              <a:t>8</a:t>
             </a:fld>
             <a:endParaRPr lang="en-US"/>
           </a:p>
@@ -2182,7 +2183,7 @@
           <a:p>
             <a:fld id="{F7021451-1387-4CA6-816F-3879F97B5CBC}" type="slidenum">
               <a:rPr lang="en-US"/>
-              <a:t>8</a:t>
+              <a:t>9</a:t>
             </a:fld>
             <a:endParaRPr lang="en-US"/>
           </a:p>
@@ -2266,7 +2267,7 @@
           <a:p>
             <a:fld id="{F7021451-1387-4CA6-816F-3879F97B5CBC}" type="slidenum">
               <a:rPr lang="en-US"/>
-              <a:t>9</a:t>
+              <a:t>10</a:t>
             </a:fld>
             <a:endParaRPr lang="en-US"/>
           </a:p>
@@ -2350,7 +2351,7 @@
           <a:p>
             <a:fld id="{F7021451-1387-4CA6-816F-3879F97B5CBC}" type="slidenum">
               <a:rPr lang="en-US"/>
-              <a:t>10</a:t>
+              <a:t>11</a:t>
             </a:fld>
             <a:endParaRPr lang="en-US"/>
           </a:p>
@@ -3298,6 +3299,1489 @@
 
 <file path=ppt/slides/slide10.xml><?xml version="1.0" encoding="utf-8"?>
 <p:sld xmlns:a="http://schemas.openxmlformats.org/drawingml/2006/main" xmlns:r="http://schemas.openxmlformats.org/officeDocument/2006/relationships" xmlns:p="http://schemas.openxmlformats.org/presentationml/2006/main">
+  <p:cSld name="Slide 9">
+    <p:bg>
+      <p:bgPr>
+        <a:solidFill>
+          <a:srgbClr val="FFFFFF"/>
+        </a:solidFill>
+        <a:effectLst/>
+      </p:bgPr>
+    </p:bg>
+    <p:spTree>
+      <p:nvGrpSpPr>
+        <p:cNvPr id="1" name=""/>
+        <p:cNvGrpSpPr/>
+        <p:nvPr/>
+      </p:nvGrpSpPr>
+      <p:grpSpPr>
+        <a:xfrm>
+          <a:off x="0" y="0"/>
+          <a:ext cx="0" cy="0"/>
+          <a:chOff x="0" y="0"/>
+          <a:chExt cx="0" cy="0"/>
+        </a:xfrm>
+      </p:grpSpPr>
+      <p:sp>
+        <p:nvSpPr>
+          <p:cNvPr id="2" name="Text 0"/>
+          <p:cNvSpPr/>
+          <p:nvPr/>
+        </p:nvSpPr>
+        <p:spPr>
+          <a:xfrm>
+            <a:off x="11018520" y="6263640"/>
+            <a:ext cx="548640" cy="274320"/>
+          </a:xfrm>
+          <a:prstGeom prst="rect">
+            <a:avLst/>
+          </a:prstGeom>
+          <a:noFill/>
+          <a:ln/>
+        </p:spPr>
+        <p:txBody>
+          <a:bodyPr wrap="square" lIns="0" tIns="0" rIns="0" bIns="0" rtlCol="0" anchor="ctr"/>
+          <a:lstStyle/>
+          <a:p>
+            <a:pPr marL="0" indent="0" algn="r">
+              <a:buNone/>
+            </a:pPr>
+            <a:r>
+              <a:rPr lang="en-US" sz="1200" dirty="0">
+                <a:solidFill>
+                  <a:srgbClr val="9AA3AD"/>
+                </a:solidFill>
+                <a:latin typeface="TH Sarabun New" pitchFamily="34" charset="0"/>
+                <a:ea typeface="TH Sarabun New" pitchFamily="34" charset="-122"/>
+                <a:cs typeface="TH Sarabun New" pitchFamily="34" charset="-120"/>
+              </a:rPr>
+              <a:t>9</a:t>
+            </a:r>
+            <a:endParaRPr lang="en-US" sz="1200" dirty="0"/>
+          </a:p>
+        </p:txBody>
+      </p:sp>
+      <p:sp>
+        <p:nvSpPr>
+          <p:cNvPr id="3" name="Text 1"/>
+          <p:cNvSpPr/>
+          <p:nvPr/>
+        </p:nvSpPr>
+        <p:spPr>
+          <a:xfrm>
+            <a:off x="594360" y="329184"/>
+            <a:ext cx="10972800" cy="566928"/>
+          </a:xfrm>
+          <a:prstGeom prst="rect">
+            <a:avLst/>
+          </a:prstGeom>
+          <a:noFill/>
+          <a:ln/>
+        </p:spPr>
+        <p:txBody>
+          <a:bodyPr wrap="square" lIns="0" tIns="0" rIns="0" bIns="0" rtlCol="0" anchor="ctr"/>
+          <a:lstStyle/>
+          <a:p>
+            <a:pPr marL="0" indent="0">
+              <a:buNone/>
+            </a:pPr>
+            <a:r>
+              <a:rPr lang="en-US" sz="3200" b="1" dirty="0">
+                <a:solidFill>
+                  <a:srgbClr val="222831"/>
+                </a:solidFill>
+                <a:latin typeface="TH Sarabun New" pitchFamily="34" charset="0"/>
+                <a:ea typeface="TH Sarabun New" pitchFamily="34" charset="-122"/>
+                <a:cs typeface="TH Sarabun New" pitchFamily="34" charset="-120"/>
+              </a:rPr>
+              <a:t>Supabase และชุดเทคโนโลยีของเวิร์กช็อป</a:t>
+            </a:r>
+            <a:endParaRPr lang="en-US" sz="3200" dirty="0"/>
+          </a:p>
+        </p:txBody>
+      </p:sp>
+      <p:sp>
+        <p:nvSpPr>
+          <p:cNvPr id="4" name="Shape 2"/>
+          <p:cNvSpPr/>
+          <p:nvPr/>
+        </p:nvSpPr>
+        <p:spPr>
+          <a:xfrm>
+            <a:off x="594360" y="1371600"/>
+            <a:ext cx="5760720" cy="3977640"/>
+          </a:xfrm>
+          <a:prstGeom prst="roundRect">
+            <a:avLst>
+              <a:gd name="adj" fmla="val 2069"/>
+            </a:avLst>
+          </a:prstGeom>
+          <a:solidFill>
+            <a:srgbClr val="F5F7F8"/>
+          </a:solidFill>
+          <a:ln w="9525">
+            <a:solidFill>
+              <a:srgbClr val="F5F7F8"/>
+            </a:solidFill>
+            <a:prstDash val="solid"/>
+          </a:ln>
+          <a:effectLst>
+            <a:outerShdw blurRad="101600" dist="12700" dir="5400000" algn="bl" rotWithShape="0">
+              <a:srgbClr val="222831">
+                <a:alpha val="10000"/>
+              </a:srgbClr>
+            </a:outerShdw>
+          </a:effectLst>
+        </p:spPr>
+        <p:txBody>
+          <a:bodyPr/>
+          <a:lstStyle/>
+          <a:p>
+            <a:endParaRPr lang="en-TH" sz="2000"/>
+          </a:p>
+        </p:txBody>
+      </p:sp>
+      <p:sp>
+        <p:nvSpPr>
+          <p:cNvPr id="5" name="Text 3"/>
+          <p:cNvSpPr/>
+          <p:nvPr/>
+        </p:nvSpPr>
+        <p:spPr>
+          <a:xfrm>
+            <a:off x="868680" y="1572768"/>
+            <a:ext cx="5212080" cy="347472"/>
+          </a:xfrm>
+          <a:prstGeom prst="rect">
+            <a:avLst/>
+          </a:prstGeom>
+          <a:noFill/>
+          <a:ln/>
+        </p:spPr>
+        <p:txBody>
+          <a:bodyPr wrap="square" lIns="0" tIns="0" rIns="0" bIns="0" rtlCol="0" anchor="ctr"/>
+          <a:lstStyle/>
+          <a:p>
+            <a:pPr marL="0" indent="0">
+              <a:buNone/>
+            </a:pPr>
+            <a:r>
+              <a:rPr lang="en-US" sz="2400" b="1" dirty="0">
+                <a:solidFill>
+                  <a:srgbClr val="222831"/>
+                </a:solidFill>
+                <a:latin typeface="TH Sarabun New" pitchFamily="34" charset="0"/>
+                <a:ea typeface="TH Sarabun New" pitchFamily="34" charset="-122"/>
+                <a:cs typeface="TH Sarabun New" pitchFamily="34" charset="-120"/>
+              </a:rPr>
+              <a:t>Supabase คืออะไร</a:t>
+            </a:r>
+            <a:endParaRPr lang="en-US" sz="2400" dirty="0"/>
+          </a:p>
+        </p:txBody>
+      </p:sp>
+      <p:sp>
+        <p:nvSpPr>
+          <p:cNvPr id="6" name="Text 4"/>
+          <p:cNvSpPr/>
+          <p:nvPr/>
+        </p:nvSpPr>
+        <p:spPr>
+          <a:xfrm>
+            <a:off x="868680" y="1965960"/>
+            <a:ext cx="5212080" cy="640080"/>
+          </a:xfrm>
+          <a:prstGeom prst="rect">
+            <a:avLst/>
+          </a:prstGeom>
+          <a:noFill/>
+          <a:ln/>
+        </p:spPr>
+        <p:txBody>
+          <a:bodyPr wrap="square" lIns="0" tIns="0" rIns="0" bIns="0" rtlCol="0" anchor="ctr"/>
+          <a:lstStyle/>
+          <a:p>
+            <a:pPr marL="0" indent="0">
+              <a:buNone/>
+            </a:pPr>
+            <a:r>
+              <a:rPr lang="en-US" dirty="0">
+                <a:solidFill>
+                  <a:srgbClr val="393E46"/>
+                </a:solidFill>
+                <a:latin typeface="TH Sarabun New" pitchFamily="34" charset="0"/>
+                <a:ea typeface="TH Sarabun New" pitchFamily="34" charset="-122"/>
+                <a:cs typeface="TH Sarabun New" pitchFamily="34" charset="-120"/>
+              </a:rPr>
+              <a:t>บริการฐานข้อมูลสำเร็จรูปบนคลาวด์ (Backend as a Service)</a:t>
+            </a:r>
+            <a:endParaRPr lang="en-US" dirty="0"/>
+          </a:p>
+          <a:p>
+            <a:pPr marL="0" indent="0">
+              <a:buNone/>
+            </a:pPr>
+            <a:r>
+              <a:rPr lang="en-US" dirty="0">
+                <a:solidFill>
+                  <a:srgbClr val="393E46"/>
+                </a:solidFill>
+                <a:latin typeface="TH Sarabun New" pitchFamily="34" charset="0"/>
+                <a:ea typeface="TH Sarabun New" pitchFamily="34" charset="-122"/>
+                <a:cs typeface="TH Sarabun New" pitchFamily="34" charset="-120"/>
+              </a:rPr>
+              <a:t>สร้างตารางเสร็จ ได้ API ใช้ทันที ไม่ต้องเขียนเซิร์ฟเวอร์เอง</a:t>
+            </a:r>
+            <a:endParaRPr lang="en-US" dirty="0"/>
+          </a:p>
+        </p:txBody>
+      </p:sp>
+      <p:sp>
+        <p:nvSpPr>
+          <p:cNvPr id="7" name="Shape 5"/>
+          <p:cNvSpPr/>
+          <p:nvPr/>
+        </p:nvSpPr>
+        <p:spPr>
+          <a:xfrm>
+            <a:off x="886968" y="2798064"/>
+            <a:ext cx="310896" cy="310896"/>
+          </a:xfrm>
+          <a:prstGeom prst="ellipse">
+            <a:avLst/>
+          </a:prstGeom>
+          <a:solidFill>
+            <a:srgbClr val="00ADB5"/>
+          </a:solidFill>
+          <a:ln w="12700">
+            <a:solidFill>
+              <a:srgbClr val="00ADB5"/>
+            </a:solidFill>
+            <a:prstDash val="solid"/>
+          </a:ln>
+        </p:spPr>
+        <p:txBody>
+          <a:bodyPr/>
+          <a:lstStyle/>
+          <a:p>
+            <a:endParaRPr lang="en-TH" sz="2000"/>
+          </a:p>
+        </p:txBody>
+      </p:sp>
+      <p:sp>
+        <p:nvSpPr>
+          <p:cNvPr id="8" name="Text 6"/>
+          <p:cNvSpPr/>
+          <p:nvPr/>
+        </p:nvSpPr>
+        <p:spPr>
+          <a:xfrm>
+            <a:off x="886968" y="2798064"/>
+            <a:ext cx="310896" cy="310896"/>
+          </a:xfrm>
+          <a:prstGeom prst="rect">
+            <a:avLst/>
+          </a:prstGeom>
+          <a:noFill/>
+          <a:ln/>
+        </p:spPr>
+        <p:txBody>
+          <a:bodyPr wrap="square" lIns="0" tIns="0" rIns="0" bIns="0" rtlCol="0" anchor="ctr"/>
+          <a:lstStyle/>
+          <a:p>
+            <a:pPr marL="0" indent="0" algn="ctr">
+              <a:buNone/>
+            </a:pPr>
+            <a:r>
+              <a:rPr lang="en-US" sz="1600" b="1" dirty="0">
+                <a:solidFill>
+                  <a:srgbClr val="FFFFFF"/>
+                </a:solidFill>
+                <a:latin typeface="TH Sarabun New" pitchFamily="34" charset="0"/>
+                <a:ea typeface="TH Sarabun New" pitchFamily="34" charset="-122"/>
+                <a:cs typeface="TH Sarabun New" pitchFamily="34" charset="-120"/>
+              </a:rPr>
+              <a:t>1</a:t>
+            </a:r>
+            <a:endParaRPr lang="en-US" sz="1600" dirty="0"/>
+          </a:p>
+        </p:txBody>
+      </p:sp>
+      <p:sp>
+        <p:nvSpPr>
+          <p:cNvPr id="9" name="Text 7"/>
+          <p:cNvSpPr/>
+          <p:nvPr/>
+        </p:nvSpPr>
+        <p:spPr>
+          <a:xfrm>
+            <a:off x="1307592" y="2743200"/>
+            <a:ext cx="2240280" cy="420624"/>
+          </a:xfrm>
+          <a:prstGeom prst="rect">
+            <a:avLst/>
+          </a:prstGeom>
+          <a:noFill/>
+          <a:ln/>
+        </p:spPr>
+        <p:txBody>
+          <a:bodyPr wrap="square" lIns="0" tIns="0" rIns="0" bIns="0" rtlCol="0" anchor="ctr"/>
+          <a:lstStyle/>
+          <a:p>
+            <a:pPr marL="0" indent="0">
+              <a:buNone/>
+            </a:pPr>
+            <a:r>
+              <a:rPr lang="en-US" b="1" dirty="0">
+                <a:solidFill>
+                  <a:srgbClr val="222831"/>
+                </a:solidFill>
+                <a:latin typeface="TH Sarabun New" pitchFamily="34" charset="0"/>
+                <a:ea typeface="TH Sarabun New" pitchFamily="34" charset="-122"/>
+                <a:cs typeface="TH Sarabun New" pitchFamily="34" charset="-120"/>
+              </a:rPr>
+              <a:t>PostgreSQL</a:t>
+            </a:r>
+            <a:endParaRPr lang="en-US" dirty="0"/>
+          </a:p>
+        </p:txBody>
+      </p:sp>
+      <p:sp>
+        <p:nvSpPr>
+          <p:cNvPr id="10" name="Text 8"/>
+          <p:cNvSpPr/>
+          <p:nvPr/>
+        </p:nvSpPr>
+        <p:spPr>
+          <a:xfrm>
+            <a:off x="3566160" y="2743200"/>
+            <a:ext cx="2560320" cy="420624"/>
+          </a:xfrm>
+          <a:prstGeom prst="rect">
+            <a:avLst/>
+          </a:prstGeom>
+          <a:noFill/>
+          <a:ln/>
+        </p:spPr>
+        <p:txBody>
+          <a:bodyPr wrap="square" lIns="0" tIns="0" rIns="0" bIns="0" rtlCol="0" anchor="ctr"/>
+          <a:lstStyle/>
+          <a:p>
+            <a:pPr marL="0" indent="0">
+              <a:buNone/>
+            </a:pPr>
+            <a:r>
+              <a:rPr lang="en-US" sz="1600" dirty="0">
+                <a:solidFill>
+                  <a:srgbClr val="393E46"/>
+                </a:solidFill>
+                <a:latin typeface="TH Sarabun New" pitchFamily="34" charset="0"/>
+                <a:ea typeface="TH Sarabun New" pitchFamily="34" charset="-122"/>
+                <a:cs typeface="TH Sarabun New" pitchFamily="34" charset="-120"/>
+              </a:rPr>
+              <a:t>ฐานข้อมูลมาตรฐานอุตสาหกรรม</a:t>
+            </a:r>
+            <a:endParaRPr lang="en-US" sz="1600" dirty="0"/>
+          </a:p>
+        </p:txBody>
+      </p:sp>
+      <p:sp>
+        <p:nvSpPr>
+          <p:cNvPr id="11" name="Shape 9"/>
+          <p:cNvSpPr/>
+          <p:nvPr/>
+        </p:nvSpPr>
+        <p:spPr>
+          <a:xfrm>
+            <a:off x="886968" y="3401568"/>
+            <a:ext cx="310896" cy="310896"/>
+          </a:xfrm>
+          <a:prstGeom prst="ellipse">
+            <a:avLst/>
+          </a:prstGeom>
+          <a:solidFill>
+            <a:srgbClr val="00ADB5"/>
+          </a:solidFill>
+          <a:ln w="12700">
+            <a:solidFill>
+              <a:srgbClr val="00ADB5"/>
+            </a:solidFill>
+            <a:prstDash val="solid"/>
+          </a:ln>
+        </p:spPr>
+        <p:txBody>
+          <a:bodyPr/>
+          <a:lstStyle/>
+          <a:p>
+            <a:endParaRPr lang="en-TH" sz="2000"/>
+          </a:p>
+        </p:txBody>
+      </p:sp>
+      <p:sp>
+        <p:nvSpPr>
+          <p:cNvPr id="12" name="Text 10"/>
+          <p:cNvSpPr/>
+          <p:nvPr/>
+        </p:nvSpPr>
+        <p:spPr>
+          <a:xfrm>
+            <a:off x="886968" y="3401568"/>
+            <a:ext cx="310896" cy="310896"/>
+          </a:xfrm>
+          <a:prstGeom prst="rect">
+            <a:avLst/>
+          </a:prstGeom>
+          <a:noFill/>
+          <a:ln/>
+        </p:spPr>
+        <p:txBody>
+          <a:bodyPr wrap="square" lIns="0" tIns="0" rIns="0" bIns="0" rtlCol="0" anchor="ctr"/>
+          <a:lstStyle/>
+          <a:p>
+            <a:pPr marL="0" indent="0" algn="ctr">
+              <a:buNone/>
+            </a:pPr>
+            <a:r>
+              <a:rPr lang="en-US" sz="1600" b="1" dirty="0">
+                <a:solidFill>
+                  <a:srgbClr val="FFFFFF"/>
+                </a:solidFill>
+                <a:latin typeface="TH Sarabun New" pitchFamily="34" charset="0"/>
+                <a:ea typeface="TH Sarabun New" pitchFamily="34" charset="-122"/>
+                <a:cs typeface="TH Sarabun New" pitchFamily="34" charset="-120"/>
+              </a:rPr>
+              <a:t>2</a:t>
+            </a:r>
+            <a:endParaRPr lang="en-US" sz="1600" dirty="0"/>
+          </a:p>
+        </p:txBody>
+      </p:sp>
+      <p:sp>
+        <p:nvSpPr>
+          <p:cNvPr id="13" name="Text 11"/>
+          <p:cNvSpPr/>
+          <p:nvPr/>
+        </p:nvSpPr>
+        <p:spPr>
+          <a:xfrm>
+            <a:off x="1307592" y="3346704"/>
+            <a:ext cx="2240280" cy="420624"/>
+          </a:xfrm>
+          <a:prstGeom prst="rect">
+            <a:avLst/>
+          </a:prstGeom>
+          <a:noFill/>
+          <a:ln/>
+        </p:spPr>
+        <p:txBody>
+          <a:bodyPr wrap="square" lIns="0" tIns="0" rIns="0" bIns="0" rtlCol="0" anchor="ctr"/>
+          <a:lstStyle/>
+          <a:p>
+            <a:pPr marL="0" indent="0">
+              <a:buNone/>
+            </a:pPr>
+            <a:r>
+              <a:rPr lang="en-US" b="1" dirty="0">
+                <a:solidFill>
+                  <a:srgbClr val="222831"/>
+                </a:solidFill>
+                <a:latin typeface="TH Sarabun New" pitchFamily="34" charset="0"/>
+                <a:ea typeface="TH Sarabun New" pitchFamily="34" charset="-122"/>
+                <a:cs typeface="TH Sarabun New" pitchFamily="34" charset="-120"/>
+              </a:rPr>
+              <a:t>API อัตโนมัติ</a:t>
+            </a:r>
+            <a:endParaRPr lang="en-US" dirty="0"/>
+          </a:p>
+        </p:txBody>
+      </p:sp>
+      <p:sp>
+        <p:nvSpPr>
+          <p:cNvPr id="14" name="Text 12"/>
+          <p:cNvSpPr/>
+          <p:nvPr/>
+        </p:nvSpPr>
+        <p:spPr>
+          <a:xfrm>
+            <a:off x="3566160" y="3346704"/>
+            <a:ext cx="2560320" cy="420624"/>
+          </a:xfrm>
+          <a:prstGeom prst="rect">
+            <a:avLst/>
+          </a:prstGeom>
+          <a:noFill/>
+          <a:ln/>
+        </p:spPr>
+        <p:txBody>
+          <a:bodyPr wrap="square" lIns="0" tIns="0" rIns="0" bIns="0" rtlCol="0" anchor="ctr"/>
+          <a:lstStyle/>
+          <a:p>
+            <a:pPr marL="0" indent="0">
+              <a:buNone/>
+            </a:pPr>
+            <a:r>
+              <a:rPr lang="en-US" sz="1600" dirty="0">
+                <a:solidFill>
+                  <a:srgbClr val="393E46"/>
+                </a:solidFill>
+                <a:latin typeface="TH Sarabun New" pitchFamily="34" charset="0"/>
+                <a:ea typeface="TH Sarabun New" pitchFamily="34" charset="-122"/>
+                <a:cs typeface="TH Sarabun New" pitchFamily="34" charset="-120"/>
+              </a:rPr>
+              <a:t>สร้างให้ทันทีจากโครงสร้างตาราง</a:t>
+            </a:r>
+            <a:endParaRPr lang="en-US" sz="1600" dirty="0"/>
+          </a:p>
+        </p:txBody>
+      </p:sp>
+      <p:sp>
+        <p:nvSpPr>
+          <p:cNvPr id="15" name="Shape 13"/>
+          <p:cNvSpPr/>
+          <p:nvPr/>
+        </p:nvSpPr>
+        <p:spPr>
+          <a:xfrm>
+            <a:off x="886968" y="4005072"/>
+            <a:ext cx="310896" cy="310896"/>
+          </a:xfrm>
+          <a:prstGeom prst="ellipse">
+            <a:avLst/>
+          </a:prstGeom>
+          <a:solidFill>
+            <a:srgbClr val="00ADB5"/>
+          </a:solidFill>
+          <a:ln w="12700">
+            <a:solidFill>
+              <a:srgbClr val="00ADB5"/>
+            </a:solidFill>
+            <a:prstDash val="solid"/>
+          </a:ln>
+        </p:spPr>
+        <p:txBody>
+          <a:bodyPr/>
+          <a:lstStyle/>
+          <a:p>
+            <a:endParaRPr lang="en-TH" sz="2000"/>
+          </a:p>
+        </p:txBody>
+      </p:sp>
+      <p:sp>
+        <p:nvSpPr>
+          <p:cNvPr id="16" name="Text 14"/>
+          <p:cNvSpPr/>
+          <p:nvPr/>
+        </p:nvSpPr>
+        <p:spPr>
+          <a:xfrm>
+            <a:off x="886968" y="4005072"/>
+            <a:ext cx="310896" cy="310896"/>
+          </a:xfrm>
+          <a:prstGeom prst="rect">
+            <a:avLst/>
+          </a:prstGeom>
+          <a:noFill/>
+          <a:ln/>
+        </p:spPr>
+        <p:txBody>
+          <a:bodyPr wrap="square" lIns="0" tIns="0" rIns="0" bIns="0" rtlCol="0" anchor="ctr"/>
+          <a:lstStyle/>
+          <a:p>
+            <a:pPr marL="0" indent="0" algn="ctr">
+              <a:buNone/>
+            </a:pPr>
+            <a:r>
+              <a:rPr lang="en-US" sz="1600" b="1" dirty="0">
+                <a:solidFill>
+                  <a:srgbClr val="FFFFFF"/>
+                </a:solidFill>
+                <a:latin typeface="TH Sarabun New" pitchFamily="34" charset="0"/>
+                <a:ea typeface="TH Sarabun New" pitchFamily="34" charset="-122"/>
+                <a:cs typeface="TH Sarabun New" pitchFamily="34" charset="-120"/>
+              </a:rPr>
+              <a:t>3</a:t>
+            </a:r>
+            <a:endParaRPr lang="en-US" sz="1600" dirty="0"/>
+          </a:p>
+        </p:txBody>
+      </p:sp>
+      <p:sp>
+        <p:nvSpPr>
+          <p:cNvPr id="17" name="Text 15"/>
+          <p:cNvSpPr/>
+          <p:nvPr/>
+        </p:nvSpPr>
+        <p:spPr>
+          <a:xfrm>
+            <a:off x="1307592" y="3950208"/>
+            <a:ext cx="2240280" cy="420624"/>
+          </a:xfrm>
+          <a:prstGeom prst="rect">
+            <a:avLst/>
+          </a:prstGeom>
+          <a:noFill/>
+          <a:ln/>
+        </p:spPr>
+        <p:txBody>
+          <a:bodyPr wrap="square" lIns="0" tIns="0" rIns="0" bIns="0" rtlCol="0" anchor="ctr"/>
+          <a:lstStyle/>
+          <a:p>
+            <a:pPr marL="0" indent="0">
+              <a:buNone/>
+            </a:pPr>
+            <a:r>
+              <a:rPr lang="en-US" b="1" dirty="0">
+                <a:solidFill>
+                  <a:srgbClr val="222831"/>
+                </a:solidFill>
+                <a:latin typeface="TH Sarabun New" pitchFamily="34" charset="0"/>
+                <a:ea typeface="TH Sarabun New" pitchFamily="34" charset="-122"/>
+                <a:cs typeface="TH Sarabun New" pitchFamily="34" charset="-120"/>
+              </a:rPr>
+              <a:t>RLS</a:t>
+            </a:r>
+            <a:endParaRPr lang="en-US" dirty="0"/>
+          </a:p>
+        </p:txBody>
+      </p:sp>
+      <p:sp>
+        <p:nvSpPr>
+          <p:cNvPr id="18" name="Text 16"/>
+          <p:cNvSpPr/>
+          <p:nvPr/>
+        </p:nvSpPr>
+        <p:spPr>
+          <a:xfrm>
+            <a:off x="3566160" y="3950208"/>
+            <a:ext cx="2560320" cy="420624"/>
+          </a:xfrm>
+          <a:prstGeom prst="rect">
+            <a:avLst/>
+          </a:prstGeom>
+          <a:noFill/>
+          <a:ln/>
+        </p:spPr>
+        <p:txBody>
+          <a:bodyPr wrap="square" lIns="0" tIns="0" rIns="0" bIns="0" rtlCol="0" anchor="ctr"/>
+          <a:lstStyle/>
+          <a:p>
+            <a:pPr marL="0" indent="0">
+              <a:buNone/>
+            </a:pPr>
+            <a:r>
+              <a:rPr lang="en-US" sz="1600" dirty="0">
+                <a:solidFill>
+                  <a:srgbClr val="393E46"/>
+                </a:solidFill>
+                <a:latin typeface="TH Sarabun New" pitchFamily="34" charset="0"/>
+                <a:ea typeface="TH Sarabun New" pitchFamily="34" charset="-122"/>
+                <a:cs typeface="TH Sarabun New" pitchFamily="34" charset="-120"/>
+              </a:rPr>
+              <a:t>กำหนดสิทธิ์ว่าใครทำอะไรได้บ้าง</a:t>
+            </a:r>
+            <a:endParaRPr lang="en-US" sz="1600" dirty="0"/>
+          </a:p>
+        </p:txBody>
+      </p:sp>
+      <p:sp>
+        <p:nvSpPr>
+          <p:cNvPr id="19" name="Shape 17"/>
+          <p:cNvSpPr/>
+          <p:nvPr/>
+        </p:nvSpPr>
+        <p:spPr>
+          <a:xfrm>
+            <a:off x="886968" y="4608576"/>
+            <a:ext cx="310896" cy="310896"/>
+          </a:xfrm>
+          <a:prstGeom prst="ellipse">
+            <a:avLst/>
+          </a:prstGeom>
+          <a:solidFill>
+            <a:srgbClr val="00ADB5"/>
+          </a:solidFill>
+          <a:ln w="12700">
+            <a:solidFill>
+              <a:srgbClr val="00ADB5"/>
+            </a:solidFill>
+            <a:prstDash val="solid"/>
+          </a:ln>
+        </p:spPr>
+        <p:txBody>
+          <a:bodyPr/>
+          <a:lstStyle/>
+          <a:p>
+            <a:endParaRPr lang="en-TH" sz="2000"/>
+          </a:p>
+        </p:txBody>
+      </p:sp>
+      <p:sp>
+        <p:nvSpPr>
+          <p:cNvPr id="20" name="Text 18"/>
+          <p:cNvSpPr/>
+          <p:nvPr/>
+        </p:nvSpPr>
+        <p:spPr>
+          <a:xfrm>
+            <a:off x="886968" y="4608576"/>
+            <a:ext cx="310896" cy="310896"/>
+          </a:xfrm>
+          <a:prstGeom prst="rect">
+            <a:avLst/>
+          </a:prstGeom>
+          <a:noFill/>
+          <a:ln/>
+        </p:spPr>
+        <p:txBody>
+          <a:bodyPr wrap="square" lIns="0" tIns="0" rIns="0" bIns="0" rtlCol="0" anchor="ctr"/>
+          <a:lstStyle/>
+          <a:p>
+            <a:pPr marL="0" indent="0" algn="ctr">
+              <a:buNone/>
+            </a:pPr>
+            <a:r>
+              <a:rPr lang="en-US" sz="1600" b="1" dirty="0">
+                <a:solidFill>
+                  <a:srgbClr val="FFFFFF"/>
+                </a:solidFill>
+                <a:latin typeface="TH Sarabun New" pitchFamily="34" charset="0"/>
+                <a:ea typeface="TH Sarabun New" pitchFamily="34" charset="-122"/>
+                <a:cs typeface="TH Sarabun New" pitchFamily="34" charset="-120"/>
+              </a:rPr>
+              <a:t>4</a:t>
+            </a:r>
+            <a:endParaRPr lang="en-US" sz="1600" dirty="0"/>
+          </a:p>
+        </p:txBody>
+      </p:sp>
+      <p:sp>
+        <p:nvSpPr>
+          <p:cNvPr id="21" name="Text 19"/>
+          <p:cNvSpPr/>
+          <p:nvPr/>
+        </p:nvSpPr>
+        <p:spPr>
+          <a:xfrm>
+            <a:off x="1307592" y="4553712"/>
+            <a:ext cx="2240280" cy="420624"/>
+          </a:xfrm>
+          <a:prstGeom prst="rect">
+            <a:avLst/>
+          </a:prstGeom>
+          <a:noFill/>
+          <a:ln/>
+        </p:spPr>
+        <p:txBody>
+          <a:bodyPr wrap="square" lIns="0" tIns="0" rIns="0" bIns="0" rtlCol="0" anchor="ctr"/>
+          <a:lstStyle/>
+          <a:p>
+            <a:pPr marL="0" indent="0">
+              <a:buNone/>
+            </a:pPr>
+            <a:r>
+              <a:rPr lang="en-US" b="1" dirty="0">
+                <a:solidFill>
+                  <a:srgbClr val="222831"/>
+                </a:solidFill>
+                <a:latin typeface="TH Sarabun New" pitchFamily="34" charset="0"/>
+                <a:ea typeface="TH Sarabun New" pitchFamily="34" charset="-122"/>
+                <a:cs typeface="TH Sarabun New" pitchFamily="34" charset="-120"/>
+              </a:rPr>
+              <a:t>Storage / Auth</a:t>
+            </a:r>
+            <a:endParaRPr lang="en-US" dirty="0"/>
+          </a:p>
+        </p:txBody>
+      </p:sp>
+      <p:sp>
+        <p:nvSpPr>
+          <p:cNvPr id="22" name="Text 20"/>
+          <p:cNvSpPr/>
+          <p:nvPr/>
+        </p:nvSpPr>
+        <p:spPr>
+          <a:xfrm>
+            <a:off x="3566160" y="4553712"/>
+            <a:ext cx="2560320" cy="420624"/>
+          </a:xfrm>
+          <a:prstGeom prst="rect">
+            <a:avLst/>
+          </a:prstGeom>
+          <a:noFill/>
+          <a:ln/>
+        </p:spPr>
+        <p:txBody>
+          <a:bodyPr wrap="square" lIns="0" tIns="0" rIns="0" bIns="0" rtlCol="0" anchor="ctr"/>
+          <a:lstStyle/>
+          <a:p>
+            <a:pPr marL="0" indent="0">
+              <a:buNone/>
+            </a:pPr>
+            <a:r>
+              <a:rPr lang="en-US" sz="1600" dirty="0">
+                <a:solidFill>
+                  <a:srgbClr val="393E46"/>
+                </a:solidFill>
+                <a:latin typeface="TH Sarabun New" pitchFamily="34" charset="0"/>
+                <a:ea typeface="TH Sarabun New" pitchFamily="34" charset="-122"/>
+                <a:cs typeface="TH Sarabun New" pitchFamily="34" charset="-120"/>
+              </a:rPr>
+              <a:t>มีให้ใช้ แต่ไม่ใช้ในเวิร์กช็อปนี้</a:t>
+            </a:r>
+            <a:endParaRPr lang="en-US" sz="1600" dirty="0"/>
+          </a:p>
+        </p:txBody>
+      </p:sp>
+      <p:sp>
+        <p:nvSpPr>
+          <p:cNvPr id="23" name="Shape 21"/>
+          <p:cNvSpPr/>
+          <p:nvPr/>
+        </p:nvSpPr>
+        <p:spPr>
+          <a:xfrm>
+            <a:off x="6647688" y="1371600"/>
+            <a:ext cx="4919472" cy="3977640"/>
+          </a:xfrm>
+          <a:prstGeom prst="roundRect">
+            <a:avLst>
+              <a:gd name="adj" fmla="val 2069"/>
+            </a:avLst>
+          </a:prstGeom>
+          <a:solidFill>
+            <a:srgbClr val="E8F6F7"/>
+          </a:solidFill>
+          <a:ln w="9525">
+            <a:solidFill>
+              <a:srgbClr val="E8F6F7"/>
+            </a:solidFill>
+            <a:prstDash val="solid"/>
+          </a:ln>
+          <a:effectLst>
+            <a:outerShdw blurRad="101600" dist="12700" dir="5400000" algn="bl" rotWithShape="0">
+              <a:srgbClr val="222831">
+                <a:alpha val="10000"/>
+              </a:srgbClr>
+            </a:outerShdw>
+          </a:effectLst>
+        </p:spPr>
+        <p:txBody>
+          <a:bodyPr/>
+          <a:lstStyle/>
+          <a:p>
+            <a:endParaRPr lang="en-TH" sz="2000"/>
+          </a:p>
+        </p:txBody>
+      </p:sp>
+      <p:sp>
+        <p:nvSpPr>
+          <p:cNvPr id="24" name="Text 22"/>
+          <p:cNvSpPr/>
+          <p:nvPr/>
+        </p:nvSpPr>
+        <p:spPr>
+          <a:xfrm>
+            <a:off x="6922008" y="1572768"/>
+            <a:ext cx="4370832" cy="347472"/>
+          </a:xfrm>
+          <a:prstGeom prst="rect">
+            <a:avLst/>
+          </a:prstGeom>
+          <a:noFill/>
+          <a:ln/>
+        </p:spPr>
+        <p:txBody>
+          <a:bodyPr wrap="square" lIns="0" tIns="0" rIns="0" bIns="0" rtlCol="0" anchor="ctr"/>
+          <a:lstStyle/>
+          <a:p>
+            <a:pPr marL="0" indent="0">
+              <a:buNone/>
+            </a:pPr>
+            <a:r>
+              <a:rPr lang="en-US" sz="2400" b="1" dirty="0">
+                <a:solidFill>
+                  <a:srgbClr val="00ADB5"/>
+                </a:solidFill>
+                <a:latin typeface="TH Sarabun New" pitchFamily="34" charset="0"/>
+                <a:ea typeface="TH Sarabun New" pitchFamily="34" charset="-122"/>
+                <a:cs typeface="TH Sarabun New" pitchFamily="34" charset="-120"/>
+              </a:rPr>
+              <a:t>ชุดเทคโนโลยีที่เราจะใช้</a:t>
+            </a:r>
+            <a:endParaRPr lang="en-US" sz="2400" dirty="0"/>
+          </a:p>
+        </p:txBody>
+      </p:sp>
+      <p:sp>
+        <p:nvSpPr>
+          <p:cNvPr id="25" name="Shape 23"/>
+          <p:cNvSpPr/>
+          <p:nvPr/>
+        </p:nvSpPr>
+        <p:spPr>
+          <a:xfrm>
+            <a:off x="6922008" y="2103120"/>
+            <a:ext cx="4370832" cy="512064"/>
+          </a:xfrm>
+          <a:prstGeom prst="roundRect">
+            <a:avLst>
+              <a:gd name="adj" fmla="val 12500"/>
+            </a:avLst>
+          </a:prstGeom>
+          <a:solidFill>
+            <a:srgbClr val="FFFFFF"/>
+          </a:solidFill>
+          <a:ln w="9525">
+            <a:solidFill>
+              <a:srgbClr val="BEE7EA"/>
+            </a:solidFill>
+            <a:prstDash val="solid"/>
+          </a:ln>
+        </p:spPr>
+        <p:txBody>
+          <a:bodyPr/>
+          <a:lstStyle/>
+          <a:p>
+            <a:endParaRPr lang="en-TH" sz="2000"/>
+          </a:p>
+        </p:txBody>
+      </p:sp>
+      <p:sp>
+        <p:nvSpPr>
+          <p:cNvPr id="26" name="Text 24"/>
+          <p:cNvSpPr/>
+          <p:nvPr/>
+        </p:nvSpPr>
+        <p:spPr>
+          <a:xfrm>
+            <a:off x="7104888" y="2103120"/>
+            <a:ext cx="2103120" cy="512064"/>
+          </a:xfrm>
+          <a:prstGeom prst="rect">
+            <a:avLst/>
+          </a:prstGeom>
+          <a:noFill/>
+          <a:ln/>
+        </p:spPr>
+        <p:txBody>
+          <a:bodyPr wrap="square" lIns="0" tIns="0" rIns="0" bIns="0" rtlCol="0" anchor="ctr"/>
+          <a:lstStyle/>
+          <a:p>
+            <a:pPr marL="0" indent="0">
+              <a:buNone/>
+            </a:pPr>
+            <a:r>
+              <a:rPr lang="en-US" b="1" dirty="0">
+                <a:solidFill>
+                  <a:srgbClr val="222831"/>
+                </a:solidFill>
+                <a:latin typeface="TH Sarabun New" pitchFamily="34" charset="0"/>
+                <a:ea typeface="TH Sarabun New" pitchFamily="34" charset="-122"/>
+                <a:cs typeface="TH Sarabun New" pitchFamily="34" charset="-120"/>
+              </a:rPr>
+              <a:t>Vite + React</a:t>
+            </a:r>
+            <a:endParaRPr lang="en-US" dirty="0"/>
+          </a:p>
+        </p:txBody>
+      </p:sp>
+      <p:sp>
+        <p:nvSpPr>
+          <p:cNvPr id="27" name="Text 25"/>
+          <p:cNvSpPr/>
+          <p:nvPr/>
+        </p:nvSpPr>
+        <p:spPr>
+          <a:xfrm>
+            <a:off x="9208008" y="2103120"/>
+            <a:ext cx="2011680" cy="512064"/>
+          </a:xfrm>
+          <a:prstGeom prst="rect">
+            <a:avLst/>
+          </a:prstGeom>
+          <a:noFill/>
+          <a:ln/>
+        </p:spPr>
+        <p:txBody>
+          <a:bodyPr wrap="square" lIns="0" tIns="0" rIns="0" bIns="0" rtlCol="0" anchor="ctr"/>
+          <a:lstStyle/>
+          <a:p>
+            <a:pPr marL="0" indent="0">
+              <a:buNone/>
+            </a:pPr>
+            <a:r>
+              <a:rPr lang="en-US" sz="1600" dirty="0">
+                <a:solidFill>
+                  <a:srgbClr val="393E46"/>
+                </a:solidFill>
+                <a:latin typeface="TH Sarabun New" pitchFamily="34" charset="0"/>
+                <a:ea typeface="TH Sarabun New" pitchFamily="34" charset="-122"/>
+                <a:cs typeface="TH Sarabun New" pitchFamily="34" charset="-120"/>
+              </a:rPr>
+              <a:t>สร้างหน้าเว็บ</a:t>
+            </a:r>
+            <a:endParaRPr lang="en-US" sz="1600" dirty="0"/>
+          </a:p>
+        </p:txBody>
+      </p:sp>
+      <p:sp>
+        <p:nvSpPr>
+          <p:cNvPr id="28" name="Shape 26"/>
+          <p:cNvSpPr/>
+          <p:nvPr/>
+        </p:nvSpPr>
+        <p:spPr>
+          <a:xfrm>
+            <a:off x="6922008" y="2724912"/>
+            <a:ext cx="4370832" cy="512064"/>
+          </a:xfrm>
+          <a:prstGeom prst="roundRect">
+            <a:avLst>
+              <a:gd name="adj" fmla="val 12500"/>
+            </a:avLst>
+          </a:prstGeom>
+          <a:solidFill>
+            <a:srgbClr val="FFFFFF"/>
+          </a:solidFill>
+          <a:ln w="9525">
+            <a:solidFill>
+              <a:srgbClr val="BEE7EA"/>
+            </a:solidFill>
+            <a:prstDash val="solid"/>
+          </a:ln>
+        </p:spPr>
+        <p:txBody>
+          <a:bodyPr/>
+          <a:lstStyle/>
+          <a:p>
+            <a:endParaRPr lang="en-TH" sz="2000"/>
+          </a:p>
+        </p:txBody>
+      </p:sp>
+      <p:sp>
+        <p:nvSpPr>
+          <p:cNvPr id="29" name="Text 27"/>
+          <p:cNvSpPr/>
+          <p:nvPr/>
+        </p:nvSpPr>
+        <p:spPr>
+          <a:xfrm>
+            <a:off x="7104888" y="2724912"/>
+            <a:ext cx="2103120" cy="512064"/>
+          </a:xfrm>
+          <a:prstGeom prst="rect">
+            <a:avLst/>
+          </a:prstGeom>
+          <a:noFill/>
+          <a:ln/>
+        </p:spPr>
+        <p:txBody>
+          <a:bodyPr wrap="square" lIns="0" tIns="0" rIns="0" bIns="0" rtlCol="0" anchor="ctr"/>
+          <a:lstStyle/>
+          <a:p>
+            <a:pPr marL="0" indent="0">
+              <a:buNone/>
+            </a:pPr>
+            <a:r>
+              <a:rPr lang="en-US" b="1" dirty="0">
+                <a:solidFill>
+                  <a:srgbClr val="222831"/>
+                </a:solidFill>
+                <a:latin typeface="TH Sarabun New" pitchFamily="34" charset="0"/>
+                <a:ea typeface="TH Sarabun New" pitchFamily="34" charset="-122"/>
+                <a:cs typeface="TH Sarabun New" pitchFamily="34" charset="-120"/>
+              </a:rPr>
+              <a:t>Tailwind CSS</a:t>
+            </a:r>
+            <a:endParaRPr lang="en-US" dirty="0"/>
+          </a:p>
+        </p:txBody>
+      </p:sp>
+      <p:sp>
+        <p:nvSpPr>
+          <p:cNvPr id="30" name="Text 28"/>
+          <p:cNvSpPr/>
+          <p:nvPr/>
+        </p:nvSpPr>
+        <p:spPr>
+          <a:xfrm>
+            <a:off x="9208008" y="2724912"/>
+            <a:ext cx="2011680" cy="512064"/>
+          </a:xfrm>
+          <a:prstGeom prst="rect">
+            <a:avLst/>
+          </a:prstGeom>
+          <a:noFill/>
+          <a:ln/>
+        </p:spPr>
+        <p:txBody>
+          <a:bodyPr wrap="square" lIns="0" tIns="0" rIns="0" bIns="0" rtlCol="0" anchor="ctr"/>
+          <a:lstStyle/>
+          <a:p>
+            <a:pPr marL="0" indent="0">
+              <a:buNone/>
+            </a:pPr>
+            <a:r>
+              <a:rPr lang="en-US" sz="1600" dirty="0">
+                <a:solidFill>
+                  <a:srgbClr val="393E46"/>
+                </a:solidFill>
+                <a:latin typeface="TH Sarabun New" pitchFamily="34" charset="0"/>
+                <a:ea typeface="TH Sarabun New" pitchFamily="34" charset="-122"/>
+                <a:cs typeface="TH Sarabun New" pitchFamily="34" charset="-120"/>
+              </a:rPr>
+              <a:t>จัดสไตล์ตาม Design System</a:t>
+            </a:r>
+            <a:endParaRPr lang="en-US" sz="1600" dirty="0"/>
+          </a:p>
+        </p:txBody>
+      </p:sp>
+      <p:sp>
+        <p:nvSpPr>
+          <p:cNvPr id="31" name="Shape 29"/>
+          <p:cNvSpPr/>
+          <p:nvPr/>
+        </p:nvSpPr>
+        <p:spPr>
+          <a:xfrm>
+            <a:off x="6922008" y="3346704"/>
+            <a:ext cx="4370832" cy="512064"/>
+          </a:xfrm>
+          <a:prstGeom prst="roundRect">
+            <a:avLst>
+              <a:gd name="adj" fmla="val 12500"/>
+            </a:avLst>
+          </a:prstGeom>
+          <a:solidFill>
+            <a:srgbClr val="FFFFFF"/>
+          </a:solidFill>
+          <a:ln w="9525">
+            <a:solidFill>
+              <a:srgbClr val="BEE7EA"/>
+            </a:solidFill>
+            <a:prstDash val="solid"/>
+          </a:ln>
+        </p:spPr>
+        <p:txBody>
+          <a:bodyPr/>
+          <a:lstStyle/>
+          <a:p>
+            <a:endParaRPr lang="en-TH" sz="2000"/>
+          </a:p>
+        </p:txBody>
+      </p:sp>
+      <p:sp>
+        <p:nvSpPr>
+          <p:cNvPr id="32" name="Text 30"/>
+          <p:cNvSpPr/>
+          <p:nvPr/>
+        </p:nvSpPr>
+        <p:spPr>
+          <a:xfrm>
+            <a:off x="7104888" y="3346704"/>
+            <a:ext cx="2103120" cy="512064"/>
+          </a:xfrm>
+          <a:prstGeom prst="rect">
+            <a:avLst/>
+          </a:prstGeom>
+          <a:noFill/>
+          <a:ln/>
+        </p:spPr>
+        <p:txBody>
+          <a:bodyPr wrap="square" lIns="0" tIns="0" rIns="0" bIns="0" rtlCol="0" anchor="ctr"/>
+          <a:lstStyle/>
+          <a:p>
+            <a:pPr marL="0" indent="0">
+              <a:buNone/>
+            </a:pPr>
+            <a:r>
+              <a:rPr lang="en-US" b="1" dirty="0">
+                <a:solidFill>
+                  <a:srgbClr val="222831"/>
+                </a:solidFill>
+                <a:latin typeface="TH Sarabun New" pitchFamily="34" charset="0"/>
+                <a:ea typeface="TH Sarabun New" pitchFamily="34" charset="-122"/>
+                <a:cs typeface="TH Sarabun New" pitchFamily="34" charset="-120"/>
+              </a:rPr>
+              <a:t>Supabase</a:t>
+            </a:r>
+            <a:endParaRPr lang="en-US" dirty="0"/>
+          </a:p>
+        </p:txBody>
+      </p:sp>
+      <p:sp>
+        <p:nvSpPr>
+          <p:cNvPr id="33" name="Text 31"/>
+          <p:cNvSpPr/>
+          <p:nvPr/>
+        </p:nvSpPr>
+        <p:spPr>
+          <a:xfrm>
+            <a:off x="9208008" y="3346704"/>
+            <a:ext cx="2011680" cy="512064"/>
+          </a:xfrm>
+          <a:prstGeom prst="rect">
+            <a:avLst/>
+          </a:prstGeom>
+          <a:noFill/>
+          <a:ln/>
+        </p:spPr>
+        <p:txBody>
+          <a:bodyPr wrap="square" lIns="0" tIns="0" rIns="0" bIns="0" rtlCol="0" anchor="ctr"/>
+          <a:lstStyle/>
+          <a:p>
+            <a:pPr marL="0" indent="0">
+              <a:buNone/>
+            </a:pPr>
+            <a:r>
+              <a:rPr lang="en-US" sz="1600" dirty="0">
+                <a:solidFill>
+                  <a:srgbClr val="393E46"/>
+                </a:solidFill>
+                <a:latin typeface="TH Sarabun New" pitchFamily="34" charset="0"/>
+                <a:ea typeface="TH Sarabun New" pitchFamily="34" charset="-122"/>
+                <a:cs typeface="TH Sarabun New" pitchFamily="34" charset="-120"/>
+              </a:rPr>
+              <a:t>ฐานข้อมูลและ API</a:t>
+            </a:r>
+            <a:endParaRPr lang="en-US" sz="1600" dirty="0"/>
+          </a:p>
+        </p:txBody>
+      </p:sp>
+      <p:sp>
+        <p:nvSpPr>
+          <p:cNvPr id="34" name="Shape 32"/>
+          <p:cNvSpPr/>
+          <p:nvPr/>
+        </p:nvSpPr>
+        <p:spPr>
+          <a:xfrm>
+            <a:off x="6922008" y="3968496"/>
+            <a:ext cx="4370832" cy="512064"/>
+          </a:xfrm>
+          <a:prstGeom prst="roundRect">
+            <a:avLst>
+              <a:gd name="adj" fmla="val 12500"/>
+            </a:avLst>
+          </a:prstGeom>
+          <a:solidFill>
+            <a:srgbClr val="FFFFFF"/>
+          </a:solidFill>
+          <a:ln w="9525">
+            <a:solidFill>
+              <a:srgbClr val="BEE7EA"/>
+            </a:solidFill>
+            <a:prstDash val="solid"/>
+          </a:ln>
+        </p:spPr>
+        <p:txBody>
+          <a:bodyPr/>
+          <a:lstStyle/>
+          <a:p>
+            <a:endParaRPr lang="en-TH" sz="2000"/>
+          </a:p>
+        </p:txBody>
+      </p:sp>
+      <p:sp>
+        <p:nvSpPr>
+          <p:cNvPr id="35" name="Text 33"/>
+          <p:cNvSpPr/>
+          <p:nvPr/>
+        </p:nvSpPr>
+        <p:spPr>
+          <a:xfrm>
+            <a:off x="7104888" y="3968496"/>
+            <a:ext cx="2103120" cy="512064"/>
+          </a:xfrm>
+          <a:prstGeom prst="rect">
+            <a:avLst/>
+          </a:prstGeom>
+          <a:noFill/>
+          <a:ln/>
+        </p:spPr>
+        <p:txBody>
+          <a:bodyPr wrap="square" lIns="0" tIns="0" rIns="0" bIns="0" rtlCol="0" anchor="ctr"/>
+          <a:lstStyle/>
+          <a:p>
+            <a:pPr marL="0" indent="0">
+              <a:buNone/>
+            </a:pPr>
+            <a:r>
+              <a:rPr lang="en-US" b="1" dirty="0">
+                <a:solidFill>
+                  <a:srgbClr val="222831"/>
+                </a:solidFill>
+                <a:latin typeface="TH Sarabun New" pitchFamily="34" charset="0"/>
+                <a:ea typeface="TH Sarabun New" pitchFamily="34" charset="-122"/>
+                <a:cs typeface="TH Sarabun New" pitchFamily="34" charset="-120"/>
+              </a:rPr>
+              <a:t>GitHub + Pages</a:t>
+            </a:r>
+            <a:endParaRPr lang="en-US" dirty="0"/>
+          </a:p>
+        </p:txBody>
+      </p:sp>
+      <p:sp>
+        <p:nvSpPr>
+          <p:cNvPr id="36" name="Text 34"/>
+          <p:cNvSpPr/>
+          <p:nvPr/>
+        </p:nvSpPr>
+        <p:spPr>
+          <a:xfrm>
+            <a:off x="9208008" y="3968496"/>
+            <a:ext cx="2011680" cy="512064"/>
+          </a:xfrm>
+          <a:prstGeom prst="rect">
+            <a:avLst/>
+          </a:prstGeom>
+          <a:noFill/>
+          <a:ln/>
+        </p:spPr>
+        <p:txBody>
+          <a:bodyPr wrap="square" lIns="0" tIns="0" rIns="0" bIns="0" rtlCol="0" anchor="ctr"/>
+          <a:lstStyle/>
+          <a:p>
+            <a:pPr marL="0" indent="0">
+              <a:buNone/>
+            </a:pPr>
+            <a:r>
+              <a:rPr lang="en-US" sz="1600" dirty="0">
+                <a:solidFill>
+                  <a:srgbClr val="393E46"/>
+                </a:solidFill>
+                <a:latin typeface="TH Sarabun New" pitchFamily="34" charset="0"/>
+                <a:ea typeface="TH Sarabun New" pitchFamily="34" charset="-122"/>
+                <a:cs typeface="TH Sarabun New" pitchFamily="34" charset="-120"/>
+              </a:rPr>
+              <a:t>เก็บโค้ดและนำขึ้นระบบฟรี</a:t>
+            </a:r>
+            <a:endParaRPr lang="en-US" sz="1600" dirty="0"/>
+          </a:p>
+        </p:txBody>
+      </p:sp>
+      <p:sp>
+        <p:nvSpPr>
+          <p:cNvPr id="37" name="Shape 35"/>
+          <p:cNvSpPr/>
+          <p:nvPr/>
+        </p:nvSpPr>
+        <p:spPr>
+          <a:xfrm>
+            <a:off x="6922008" y="4590288"/>
+            <a:ext cx="4370832" cy="512064"/>
+          </a:xfrm>
+          <a:prstGeom prst="roundRect">
+            <a:avLst>
+              <a:gd name="adj" fmla="val 12500"/>
+            </a:avLst>
+          </a:prstGeom>
+          <a:solidFill>
+            <a:srgbClr val="FFFFFF"/>
+          </a:solidFill>
+          <a:ln w="9525">
+            <a:solidFill>
+              <a:srgbClr val="BEE7EA"/>
+            </a:solidFill>
+            <a:prstDash val="solid"/>
+          </a:ln>
+        </p:spPr>
+        <p:txBody>
+          <a:bodyPr/>
+          <a:lstStyle/>
+          <a:p>
+            <a:endParaRPr lang="en-TH" sz="2000"/>
+          </a:p>
+        </p:txBody>
+      </p:sp>
+      <p:sp>
+        <p:nvSpPr>
+          <p:cNvPr id="38" name="Text 36"/>
+          <p:cNvSpPr/>
+          <p:nvPr/>
+        </p:nvSpPr>
+        <p:spPr>
+          <a:xfrm>
+            <a:off x="7104888" y="4590288"/>
+            <a:ext cx="2103120" cy="512064"/>
+          </a:xfrm>
+          <a:prstGeom prst="rect">
+            <a:avLst/>
+          </a:prstGeom>
+          <a:noFill/>
+          <a:ln/>
+        </p:spPr>
+        <p:txBody>
+          <a:bodyPr wrap="square" lIns="0" tIns="0" rIns="0" bIns="0" rtlCol="0" anchor="ctr"/>
+          <a:lstStyle/>
+          <a:p>
+            <a:pPr marL="0" indent="0">
+              <a:buNone/>
+            </a:pPr>
+            <a:r>
+              <a:rPr lang="en-US" b="1" dirty="0">
+                <a:solidFill>
+                  <a:srgbClr val="222831"/>
+                </a:solidFill>
+                <a:latin typeface="TH Sarabun New" pitchFamily="34" charset="0"/>
+                <a:ea typeface="TH Sarabun New" pitchFamily="34" charset="-122"/>
+                <a:cs typeface="TH Sarabun New" pitchFamily="34" charset="-120"/>
+              </a:rPr>
+              <a:t>Antigravity</a:t>
+            </a:r>
+            <a:endParaRPr lang="en-US" dirty="0"/>
+          </a:p>
+        </p:txBody>
+      </p:sp>
+      <p:sp>
+        <p:nvSpPr>
+          <p:cNvPr id="39" name="Text 37"/>
+          <p:cNvSpPr/>
+          <p:nvPr/>
+        </p:nvSpPr>
+        <p:spPr>
+          <a:xfrm>
+            <a:off x="9208008" y="4590288"/>
+            <a:ext cx="2011680" cy="512064"/>
+          </a:xfrm>
+          <a:prstGeom prst="rect">
+            <a:avLst/>
+          </a:prstGeom>
+          <a:noFill/>
+          <a:ln/>
+        </p:spPr>
+        <p:txBody>
+          <a:bodyPr wrap="square" lIns="0" tIns="0" rIns="0" bIns="0" rtlCol="0" anchor="ctr"/>
+          <a:lstStyle/>
+          <a:p>
+            <a:pPr marL="0" indent="0">
+              <a:buNone/>
+            </a:pPr>
+            <a:r>
+              <a:rPr lang="en-US" sz="1600" dirty="0">
+                <a:solidFill>
+                  <a:srgbClr val="393E46"/>
+                </a:solidFill>
+                <a:latin typeface="TH Sarabun New" pitchFamily="34" charset="0"/>
+                <a:ea typeface="TH Sarabun New" pitchFamily="34" charset="-122"/>
+                <a:cs typeface="TH Sarabun New" pitchFamily="34" charset="-120"/>
+              </a:rPr>
+              <a:t>AI Agent ที่เขียนโค้ดให้เรา</a:t>
+            </a:r>
+            <a:endParaRPr lang="en-US" sz="1600" dirty="0"/>
+          </a:p>
+        </p:txBody>
+      </p:sp>
+    </p:spTree>
+  </p:cSld>
+  <p:clrMapOvr>
+    <a:masterClrMapping/>
+  </p:clrMapOvr>
+</p:sld>
+</file>
+
+<file path=ppt/slides/slide11.xml><?xml version="1.0" encoding="utf-8"?>
+<p:sld xmlns:a="http://schemas.openxmlformats.org/drawingml/2006/main" xmlns:r="http://schemas.openxmlformats.org/officeDocument/2006/relationships" xmlns:p="http://schemas.openxmlformats.org/presentationml/2006/main">
   <p:cSld name="Slide 10">
     <p:bg>
       <p:bgPr>
@@ -4469,7 +5953,7 @@
 </p:sld>
 </file>
 
-<file path=ppt/slides/slide11.xml><?xml version="1.0" encoding="utf-8"?>
+<file path=ppt/slides/slide12.xml><?xml version="1.0" encoding="utf-8"?>
 <p:sld xmlns:a="http://schemas.openxmlformats.org/drawingml/2006/main" xmlns:r="http://schemas.openxmlformats.org/officeDocument/2006/relationships" xmlns:p="http://schemas.openxmlformats.org/presentationml/2006/main">
   <p:cSld name="Slide 11">
     <p:bg>
@@ -4690,7 +6174,7 @@
 </p:sld>
 </file>
 
-<file path=ppt/slides/slide12.xml><?xml version="1.0" encoding="utf-8"?>
+<file path=ppt/slides/slide13.xml><?xml version="1.0" encoding="utf-8"?>
 <p:sld xmlns:a="http://schemas.openxmlformats.org/drawingml/2006/main" xmlns:r="http://schemas.openxmlformats.org/officeDocument/2006/relationships" xmlns:p="http://schemas.openxmlformats.org/presentationml/2006/main">
   <p:cSld name="Slide 12">
     <p:bg>
@@ -5115,7 +6599,7 @@
 </p:sld>
 </file>
 
-<file path=ppt/slides/slide13.xml><?xml version="1.0" encoding="utf-8"?>
+<file path=ppt/slides/slide14.xml><?xml version="1.0" encoding="utf-8"?>
 <p:sld xmlns:a="http://schemas.openxmlformats.org/drawingml/2006/main" xmlns:r="http://schemas.openxmlformats.org/officeDocument/2006/relationships" xmlns:p="http://schemas.openxmlformats.org/presentationml/2006/main">
   <p:cSld name="Slide 13">
     <p:bg>
@@ -6064,7 +7548,7 @@
 </p:sld>
 </file>
 
-<file path=ppt/slides/slide14.xml><?xml version="1.0" encoding="utf-8"?>
+<file path=ppt/slides/slide15.xml><?xml version="1.0" encoding="utf-8"?>
 <p:sld xmlns:a="http://schemas.openxmlformats.org/drawingml/2006/main" xmlns:r="http://schemas.openxmlformats.org/officeDocument/2006/relationships" xmlns:p="http://schemas.openxmlformats.org/presentationml/2006/main">
   <p:cSld name="Slide 14">
     <p:bg>
@@ -6779,7 +8263,7 @@
 </p:sld>
 </file>
 
-<file path=ppt/slides/slide15.xml><?xml version="1.0" encoding="utf-8"?>
+<file path=ppt/slides/slide16.xml><?xml version="1.0" encoding="utf-8"?>
 <p:sld xmlns:a="http://schemas.openxmlformats.org/drawingml/2006/main" xmlns:r="http://schemas.openxmlformats.org/officeDocument/2006/relationships" xmlns:p="http://schemas.openxmlformats.org/presentationml/2006/main">
   <p:cSld name="Slide 16">
     <p:bg>
@@ -7841,7 +9325,7 @@
 </p:sld>
 </file>
 
-<file path=ppt/slides/slide16.xml><?xml version="1.0" encoding="utf-8"?>
+<file path=ppt/slides/slide17.xml><?xml version="1.0" encoding="utf-8"?>
 <p:sld xmlns:a="http://schemas.openxmlformats.org/drawingml/2006/main" xmlns:r="http://schemas.openxmlformats.org/officeDocument/2006/relationships" xmlns:p="http://schemas.openxmlformats.org/presentationml/2006/main">
   <p:cSld name="Slide 17">
     <p:bg>
@@ -8062,7 +9546,7 @@
 </p:sld>
 </file>
 
-<file path=ppt/slides/slide17.xml><?xml version="1.0" encoding="utf-8"?>
+<file path=ppt/slides/slide18.xml><?xml version="1.0" encoding="utf-8"?>
 <p:sld xmlns:a="http://schemas.openxmlformats.org/drawingml/2006/main" xmlns:r="http://schemas.openxmlformats.org/officeDocument/2006/relationships" xmlns:p="http://schemas.openxmlformats.org/presentationml/2006/main">
   <p:cSld name="Slide 18">
     <p:bg>
@@ -9038,7 +10522,7 @@
 </p:sld>
 </file>
 
-<file path=ppt/slides/slide18.xml><?xml version="1.0" encoding="utf-8"?>
+<file path=ppt/slides/slide19.xml><?xml version="1.0" encoding="utf-8"?>
 <p:sld xmlns:a="http://schemas.openxmlformats.org/drawingml/2006/main" xmlns:r="http://schemas.openxmlformats.org/officeDocument/2006/relationships" xmlns:p="http://schemas.openxmlformats.org/presentationml/2006/main">
   <p:cSld name="Slide 23">
     <p:bg>
@@ -9248,1098 +10732,6 @@
               <a:t>กำหนดสไตล์ สี และฟอนต์ด้วยตัวเอง เพื่อไม่ให้งานของทุกคนหน้าตาเหมือนกัน</a:t>
             </a:r>
             <a:endParaRPr lang="en-US" sz="1700" dirty="0"/>
-          </a:p>
-        </p:txBody>
-      </p:sp>
-    </p:spTree>
-  </p:cSld>
-  <p:clrMapOvr>
-    <a:masterClrMapping/>
-  </p:clrMapOvr>
-</p:sld>
-</file>
-
-<file path=ppt/slides/slide19.xml><?xml version="1.0" encoding="utf-8"?>
-<p:sld xmlns:a="http://schemas.openxmlformats.org/drawingml/2006/main" xmlns:r="http://schemas.openxmlformats.org/officeDocument/2006/relationships" xmlns:p="http://schemas.openxmlformats.org/presentationml/2006/main">
-  <p:cSld name="Slide 24">
-    <p:bg>
-      <p:bgPr>
-        <a:solidFill>
-          <a:srgbClr val="FFFFFF"/>
-        </a:solidFill>
-        <a:effectLst/>
-      </p:bgPr>
-    </p:bg>
-    <p:spTree>
-      <p:nvGrpSpPr>
-        <p:cNvPr id="1" name=""/>
-        <p:cNvGrpSpPr/>
-        <p:nvPr/>
-      </p:nvGrpSpPr>
-      <p:grpSpPr>
-        <a:xfrm>
-          <a:off x="0" y="0"/>
-          <a:ext cx="0" cy="0"/>
-          <a:chOff x="0" y="0"/>
-          <a:chExt cx="0" cy="0"/>
-        </a:xfrm>
-      </p:grpSpPr>
-      <p:sp>
-        <p:nvSpPr>
-          <p:cNvPr id="2" name="Text 0"/>
-          <p:cNvSpPr/>
-          <p:nvPr/>
-        </p:nvSpPr>
-        <p:spPr>
-          <a:xfrm>
-            <a:off x="11018520" y="6263640"/>
-            <a:ext cx="548640" cy="274320"/>
-          </a:xfrm>
-          <a:prstGeom prst="rect">
-            <a:avLst/>
-          </a:prstGeom>
-          <a:noFill/>
-          <a:ln/>
-        </p:spPr>
-        <p:txBody>
-          <a:bodyPr wrap="square" lIns="0" tIns="0" rIns="0" bIns="0" rtlCol="0" anchor="ctr"/>
-          <a:lstStyle/>
-          <a:p>
-            <a:pPr marL="0" indent="0" algn="r">
-              <a:buNone/>
-            </a:pPr>
-            <a:r>
-              <a:rPr lang="en-US" sz="1200" dirty="0">
-                <a:solidFill>
-                  <a:srgbClr val="9AA3AD"/>
-                </a:solidFill>
-                <a:latin typeface="TH Sarabun New" pitchFamily="34" charset="0"/>
-                <a:ea typeface="TH Sarabun New" pitchFamily="34" charset="-122"/>
-                <a:cs typeface="TH Sarabun New" pitchFamily="34" charset="-120"/>
-              </a:rPr>
-              <a:t>24</a:t>
-            </a:r>
-            <a:endParaRPr lang="en-US" sz="1200" dirty="0"/>
-          </a:p>
-        </p:txBody>
-      </p:sp>
-      <p:sp>
-        <p:nvSpPr>
-          <p:cNvPr id="3" name="Text 1"/>
-          <p:cNvSpPr/>
-          <p:nvPr/>
-        </p:nvSpPr>
-        <p:spPr>
-          <a:xfrm>
-            <a:off x="594360" y="329184"/>
-            <a:ext cx="10972800" cy="566928"/>
-          </a:xfrm>
-          <a:prstGeom prst="rect">
-            <a:avLst/>
-          </a:prstGeom>
-          <a:noFill/>
-          <a:ln/>
-        </p:spPr>
-        <p:txBody>
-          <a:bodyPr wrap="square" lIns="0" tIns="0" rIns="0" bIns="0" rtlCol="0" anchor="ctr"/>
-          <a:lstStyle/>
-          <a:p>
-            <a:pPr marL="0" indent="0">
-              <a:buNone/>
-            </a:pPr>
-            <a:r>
-              <a:rPr lang="en-US" sz="3200" b="1" dirty="0">
-                <a:solidFill>
-                  <a:srgbClr val="222831"/>
-                </a:solidFill>
-                <a:latin typeface="TH Sarabun New" pitchFamily="34" charset="0"/>
-                <a:ea typeface="TH Sarabun New" pitchFamily="34" charset="-122"/>
-                <a:cs typeface="TH Sarabun New" pitchFamily="34" charset="-120"/>
-              </a:rPr>
-              <a:t>ทำไมต้องกำหนด Design System ก่อน</a:t>
-            </a:r>
-            <a:endParaRPr lang="en-US" sz="3200" dirty="0"/>
-          </a:p>
-        </p:txBody>
-      </p:sp>
-      <p:sp>
-        <p:nvSpPr>
-          <p:cNvPr id="4" name="Shape 2"/>
-          <p:cNvSpPr/>
-          <p:nvPr/>
-        </p:nvSpPr>
-        <p:spPr>
-          <a:xfrm>
-            <a:off x="594360" y="1417320"/>
-            <a:ext cx="5303520" cy="2286000"/>
-          </a:xfrm>
-          <a:prstGeom prst="roundRect">
-            <a:avLst>
-              <a:gd name="adj" fmla="val 3600"/>
-            </a:avLst>
-          </a:prstGeom>
-          <a:solidFill>
-            <a:srgbClr val="FEF2F2"/>
-          </a:solidFill>
-          <a:ln w="9525">
-            <a:solidFill>
-              <a:srgbClr val="FCA5A5"/>
-            </a:solidFill>
-            <a:prstDash val="solid"/>
-          </a:ln>
-          <a:effectLst>
-            <a:outerShdw blurRad="101600" dist="12700" dir="5400000" algn="bl" rotWithShape="0">
-              <a:srgbClr val="222831">
-                <a:alpha val="10000"/>
-              </a:srgbClr>
-            </a:outerShdw>
-          </a:effectLst>
-        </p:spPr>
-        <p:txBody>
-          <a:bodyPr/>
-          <a:lstStyle/>
-          <a:p>
-            <a:endParaRPr lang="en-TH" sz="2000"/>
-          </a:p>
-        </p:txBody>
-      </p:sp>
-      <p:sp>
-        <p:nvSpPr>
-          <p:cNvPr id="5" name="Text 3"/>
-          <p:cNvSpPr/>
-          <p:nvPr/>
-        </p:nvSpPr>
-        <p:spPr>
-          <a:xfrm>
-            <a:off x="868680" y="1572768"/>
-            <a:ext cx="4754880" cy="347472"/>
-          </a:xfrm>
-          <a:prstGeom prst="rect">
-            <a:avLst/>
-          </a:prstGeom>
-          <a:noFill/>
-          <a:ln/>
-        </p:spPr>
-        <p:txBody>
-          <a:bodyPr wrap="square" lIns="0" tIns="0" rIns="0" bIns="0" rtlCol="0" anchor="ctr"/>
-          <a:lstStyle/>
-          <a:p>
-            <a:pPr marL="0" indent="0">
-              <a:buNone/>
-            </a:pPr>
-            <a:r>
-              <a:rPr lang="en-US" sz="2400" b="1" dirty="0">
-                <a:solidFill>
-                  <a:srgbClr val="DC2626"/>
-                </a:solidFill>
-                <a:latin typeface="TH Sarabun New" pitchFamily="34" charset="0"/>
-                <a:ea typeface="TH Sarabun New" pitchFamily="34" charset="-122"/>
-                <a:cs typeface="TH Sarabun New" pitchFamily="34" charset="-120"/>
-              </a:rPr>
-              <a:t>ถ้าไม่กำหนด</a:t>
-            </a:r>
-            <a:endParaRPr lang="en-US" sz="2400" dirty="0"/>
-          </a:p>
-        </p:txBody>
-      </p:sp>
-      <p:sp>
-        <p:nvSpPr>
-          <p:cNvPr id="6" name="Text 4"/>
-          <p:cNvSpPr/>
-          <p:nvPr/>
-        </p:nvSpPr>
-        <p:spPr>
-          <a:xfrm>
-            <a:off x="868680" y="1993392"/>
-            <a:ext cx="4754880" cy="1554480"/>
-          </a:xfrm>
-          <a:prstGeom prst="rect">
-            <a:avLst/>
-          </a:prstGeom>
-          <a:noFill/>
-          <a:ln/>
-        </p:spPr>
-        <p:txBody>
-          <a:bodyPr wrap="square" lIns="0" tIns="0" rIns="0" bIns="0" rtlCol="0" anchor="t"/>
-          <a:lstStyle/>
-          <a:p>
-            <a:pPr marL="342900" indent="-342900">
-              <a:spcAft>
-                <a:spcPts val="700"/>
-              </a:spcAft>
-              <a:buSzPct val="100000"/>
-              <a:buChar char="•"/>
-            </a:pPr>
-            <a:r>
-              <a:rPr lang="en-US" sz="2000" dirty="0">
-                <a:solidFill>
-                  <a:srgbClr val="393E46"/>
-                </a:solidFill>
-                <a:latin typeface="TH Sarabun New" pitchFamily="34" charset="0"/>
-                <a:ea typeface="TH Sarabun New" pitchFamily="34" charset="-122"/>
-                <a:cs typeface="TH Sarabun New" pitchFamily="34" charset="-120"/>
-              </a:rPr>
-              <a:t>AI เลือกสีน้ำเงินและฟอนต์สากลให้ทุกครั้ง</a:t>
-            </a:r>
-            <a:endParaRPr lang="en-US" sz="2000" dirty="0"/>
-          </a:p>
-          <a:p>
-            <a:pPr marL="342900" indent="-342900">
-              <a:spcAft>
-                <a:spcPts val="700"/>
-              </a:spcAft>
-              <a:buSzPct val="100000"/>
-              <a:buChar char="•"/>
-            </a:pPr>
-            <a:r>
-              <a:rPr lang="en-US" sz="2000" dirty="0">
-                <a:solidFill>
-                  <a:srgbClr val="393E46"/>
-                </a:solidFill>
-                <a:latin typeface="TH Sarabun New" pitchFamily="34" charset="0"/>
-                <a:ea typeface="TH Sarabun New" pitchFamily="34" charset="-122"/>
-                <a:cs typeface="TH Sarabun New" pitchFamily="34" charset="-120"/>
-              </a:rPr>
-              <a:t>งานของผู้เข้าอบรมทุกคนหน้าตาเหมือนกันหมด</a:t>
-            </a:r>
-            <a:endParaRPr lang="en-US" sz="2000" dirty="0"/>
-          </a:p>
-          <a:p>
-            <a:pPr marL="342900" indent="-342900">
-              <a:spcAft>
-                <a:spcPts val="700"/>
-              </a:spcAft>
-              <a:buSzPct val="100000"/>
-              <a:buChar char="•"/>
-            </a:pPr>
-            <a:r>
-              <a:rPr lang="en-US" sz="2000" dirty="0">
-                <a:solidFill>
-                  <a:srgbClr val="393E46"/>
-                </a:solidFill>
-                <a:latin typeface="TH Sarabun New" pitchFamily="34" charset="0"/>
-                <a:ea typeface="TH Sarabun New" pitchFamily="34" charset="-122"/>
-                <a:cs typeface="TH Sarabun New" pitchFamily="34" charset="-120"/>
-              </a:rPr>
-              <a:t>สั่งแก้หน้าหนึ่ง สีเพี้ยนไปอีกหน้าหนึ่ง</a:t>
-            </a:r>
-            <a:endParaRPr lang="en-US" sz="2000" dirty="0"/>
-          </a:p>
-          <a:p>
-            <a:pPr marL="342900" indent="-342900">
-              <a:spcAft>
-                <a:spcPts val="700"/>
-              </a:spcAft>
-              <a:buSzPct val="100000"/>
-              <a:buChar char="•"/>
-            </a:pPr>
-            <a:r>
-              <a:rPr lang="en-US" sz="2000" dirty="0">
-                <a:solidFill>
-                  <a:srgbClr val="393E46"/>
-                </a:solidFill>
-                <a:latin typeface="TH Sarabun New" pitchFamily="34" charset="0"/>
-                <a:ea typeface="TH Sarabun New" pitchFamily="34" charset="-122"/>
-                <a:cs typeface="TH Sarabun New" pitchFamily="34" charset="-120"/>
-              </a:rPr>
-              <a:t>ภาษาไทยแสดงผลเพี้ยนเพราะฟอนต์ไม่รองรับ</a:t>
-            </a:r>
-            <a:endParaRPr lang="en-US" sz="2000" dirty="0"/>
-          </a:p>
-        </p:txBody>
-      </p:sp>
-      <p:sp>
-        <p:nvSpPr>
-          <p:cNvPr id="7" name="Shape 5"/>
-          <p:cNvSpPr/>
-          <p:nvPr/>
-        </p:nvSpPr>
-        <p:spPr>
-          <a:xfrm>
-            <a:off x="6263640" y="1417320"/>
-            <a:ext cx="5303520" cy="2286000"/>
-          </a:xfrm>
-          <a:prstGeom prst="roundRect">
-            <a:avLst>
-              <a:gd name="adj" fmla="val 3600"/>
-            </a:avLst>
-          </a:prstGeom>
-          <a:solidFill>
-            <a:srgbClr val="CCFBF1"/>
-          </a:solidFill>
-          <a:ln w="9525">
-            <a:solidFill>
-              <a:srgbClr val="CCFBF1"/>
-            </a:solidFill>
-            <a:prstDash val="solid"/>
-          </a:ln>
-          <a:effectLst>
-            <a:outerShdw blurRad="101600" dist="12700" dir="5400000" algn="bl" rotWithShape="0">
-              <a:srgbClr val="222831">
-                <a:alpha val="10000"/>
-              </a:srgbClr>
-            </a:outerShdw>
-          </a:effectLst>
-        </p:spPr>
-        <p:txBody>
-          <a:bodyPr/>
-          <a:lstStyle/>
-          <a:p>
-            <a:endParaRPr lang="en-TH" sz="2000"/>
-          </a:p>
-        </p:txBody>
-      </p:sp>
-      <p:sp>
-        <p:nvSpPr>
-          <p:cNvPr id="8" name="Text 6"/>
-          <p:cNvSpPr/>
-          <p:nvPr/>
-        </p:nvSpPr>
-        <p:spPr>
-          <a:xfrm>
-            <a:off x="6537960" y="1572768"/>
-            <a:ext cx="4754880" cy="347472"/>
-          </a:xfrm>
-          <a:prstGeom prst="rect">
-            <a:avLst/>
-          </a:prstGeom>
-          <a:noFill/>
-          <a:ln/>
-        </p:spPr>
-        <p:txBody>
-          <a:bodyPr wrap="square" lIns="0" tIns="0" rIns="0" bIns="0" rtlCol="0" anchor="ctr"/>
-          <a:lstStyle/>
-          <a:p>
-            <a:pPr marL="0" indent="0">
-              <a:buNone/>
-            </a:pPr>
-            <a:r>
-              <a:rPr lang="en-US" sz="2400" b="1" dirty="0">
-                <a:solidFill>
-                  <a:srgbClr val="0F766E"/>
-                </a:solidFill>
-                <a:latin typeface="TH Sarabun New" pitchFamily="34" charset="0"/>
-                <a:ea typeface="TH Sarabun New" pitchFamily="34" charset="-122"/>
-                <a:cs typeface="TH Sarabun New" pitchFamily="34" charset="-120"/>
-              </a:rPr>
-              <a:t>ถ้ากำหนดไว้ใน §4</a:t>
-            </a:r>
-            <a:endParaRPr lang="en-US" sz="2400" dirty="0"/>
-          </a:p>
-        </p:txBody>
-      </p:sp>
-      <p:sp>
-        <p:nvSpPr>
-          <p:cNvPr id="9" name="Text 7"/>
-          <p:cNvSpPr/>
-          <p:nvPr/>
-        </p:nvSpPr>
-        <p:spPr>
-          <a:xfrm>
-            <a:off x="6537960" y="1993392"/>
-            <a:ext cx="4754880" cy="1554480"/>
-          </a:xfrm>
-          <a:prstGeom prst="rect">
-            <a:avLst/>
-          </a:prstGeom>
-          <a:noFill/>
-          <a:ln/>
-        </p:spPr>
-        <p:txBody>
-          <a:bodyPr wrap="square" lIns="0" tIns="0" rIns="0" bIns="0" rtlCol="0" anchor="t"/>
-          <a:lstStyle/>
-          <a:p>
-            <a:pPr marL="342900" indent="-342900">
-              <a:spcAft>
-                <a:spcPts val="700"/>
-              </a:spcAft>
-              <a:buSzPct val="100000"/>
-              <a:buChar char="•"/>
-            </a:pPr>
-            <a:r>
-              <a:rPr lang="en-US" sz="2000" dirty="0">
-                <a:solidFill>
-                  <a:srgbClr val="393E46"/>
-                </a:solidFill>
-                <a:latin typeface="TH Sarabun New" pitchFamily="34" charset="0"/>
-                <a:ea typeface="TH Sarabun New" pitchFamily="34" charset="-122"/>
-                <a:cs typeface="TH Sarabun New" pitchFamily="34" charset="-120"/>
-              </a:rPr>
-              <a:t>ทุกหน้าใช้สีและฟอนต์ชุดเดียวกันโดยอัตโนมัติ</a:t>
-            </a:r>
-            <a:endParaRPr lang="en-US" sz="2000" dirty="0"/>
-          </a:p>
-          <a:p>
-            <a:pPr marL="342900" indent="-342900">
-              <a:spcAft>
-                <a:spcPts val="700"/>
-              </a:spcAft>
-              <a:buSzPct val="100000"/>
-              <a:buChar char="•"/>
-            </a:pPr>
-            <a:r>
-              <a:rPr lang="en-US" sz="2000" dirty="0">
-                <a:solidFill>
-                  <a:srgbClr val="393E46"/>
-                </a:solidFill>
-                <a:latin typeface="TH Sarabun New" pitchFamily="34" charset="0"/>
-                <a:ea typeface="TH Sarabun New" pitchFamily="34" charset="-122"/>
-                <a:cs typeface="TH Sarabun New" pitchFamily="34" charset="-120"/>
-              </a:rPr>
-              <a:t>เปลี่ยนสีทั้งระบบด้วยการแก้ไฟล์สเปกที่เดียว</a:t>
-            </a:r>
-            <a:endParaRPr lang="en-US" sz="2000" dirty="0"/>
-          </a:p>
-          <a:p>
-            <a:pPr marL="342900" indent="-342900">
-              <a:spcAft>
-                <a:spcPts val="700"/>
-              </a:spcAft>
-              <a:buSzPct val="100000"/>
-              <a:buChar char="•"/>
-            </a:pPr>
-            <a:r>
-              <a:rPr lang="en-US" sz="2000" dirty="0">
-                <a:solidFill>
-                  <a:srgbClr val="393E46"/>
-                </a:solidFill>
-                <a:latin typeface="TH Sarabun New" pitchFamily="34" charset="0"/>
-                <a:ea typeface="TH Sarabun New" pitchFamily="34" charset="-122"/>
-                <a:cs typeface="TH Sarabun New" pitchFamily="34" charset="-120"/>
-              </a:rPr>
-              <a:t>งานออกมาเป็นเอกลักษณ์ของเราเอง</a:t>
-            </a:r>
-            <a:endParaRPr lang="en-US" sz="2000" dirty="0"/>
-          </a:p>
-          <a:p>
-            <a:pPr marL="342900" indent="-342900">
-              <a:spcAft>
-                <a:spcPts val="700"/>
-              </a:spcAft>
-              <a:buSzPct val="100000"/>
-              <a:buChar char="•"/>
-            </a:pPr>
-            <a:r>
-              <a:rPr lang="en-US" sz="2000" dirty="0">
-                <a:solidFill>
-                  <a:srgbClr val="393E46"/>
-                </a:solidFill>
-                <a:latin typeface="TH Sarabun New" pitchFamily="34" charset="0"/>
-                <a:ea typeface="TH Sarabun New" pitchFamily="34" charset="-122"/>
-                <a:cs typeface="TH Sarabun New" pitchFamily="34" charset="-120"/>
-              </a:rPr>
-              <a:t>ภาษาไทยอ่านง่าย เพราะเลือกฟอนต์ที่รองรับ</a:t>
-            </a:r>
-            <a:endParaRPr lang="en-US" sz="2000" dirty="0"/>
-          </a:p>
-        </p:txBody>
-      </p:sp>
-      <p:sp>
-        <p:nvSpPr>
-          <p:cNvPr id="10" name="Text 8"/>
-          <p:cNvSpPr/>
-          <p:nvPr/>
-        </p:nvSpPr>
-        <p:spPr>
-          <a:xfrm>
-            <a:off x="594360" y="3931920"/>
-            <a:ext cx="10972800" cy="329184"/>
-          </a:xfrm>
-          <a:prstGeom prst="rect">
-            <a:avLst/>
-          </a:prstGeom>
-          <a:noFill/>
-          <a:ln/>
-        </p:spPr>
-        <p:txBody>
-          <a:bodyPr wrap="square" lIns="0" tIns="0" rIns="0" bIns="0" rtlCol="0" anchor="ctr"/>
-          <a:lstStyle/>
-          <a:p>
-            <a:pPr marL="0" indent="0">
-              <a:buNone/>
-            </a:pPr>
-            <a:r>
-              <a:rPr lang="en-US" sz="2400" b="1" dirty="0">
-                <a:solidFill>
-                  <a:srgbClr val="222831"/>
-                </a:solidFill>
-                <a:latin typeface="TH Sarabun New" pitchFamily="34" charset="0"/>
-                <a:ea typeface="TH Sarabun New" pitchFamily="34" charset="-122"/>
-                <a:cs typeface="TH Sarabun New" pitchFamily="34" charset="-120"/>
-              </a:rPr>
-              <a:t>สามสิ่งที่ต้องเลือกใน LAB 3</a:t>
-            </a:r>
-            <a:endParaRPr lang="en-US" sz="2400" dirty="0"/>
-          </a:p>
-        </p:txBody>
-      </p:sp>
-      <p:sp>
-        <p:nvSpPr>
-          <p:cNvPr id="11" name="Shape 9"/>
-          <p:cNvSpPr/>
-          <p:nvPr/>
-        </p:nvSpPr>
-        <p:spPr>
-          <a:xfrm>
-            <a:off x="594360" y="4343400"/>
-            <a:ext cx="3566160" cy="1097280"/>
-          </a:xfrm>
-          <a:prstGeom prst="roundRect">
-            <a:avLst>
-              <a:gd name="adj" fmla="val 7500"/>
-            </a:avLst>
-          </a:prstGeom>
-          <a:solidFill>
-            <a:srgbClr val="E8F6F7"/>
-          </a:solidFill>
-          <a:ln w="9525">
-            <a:solidFill>
-              <a:srgbClr val="E8F6F7"/>
-            </a:solidFill>
-            <a:prstDash val="solid"/>
-          </a:ln>
-          <a:effectLst>
-            <a:outerShdw blurRad="101600" dist="12700" dir="5400000" algn="bl" rotWithShape="0">
-              <a:srgbClr val="222831">
-                <a:alpha val="10000"/>
-              </a:srgbClr>
-            </a:outerShdw>
-          </a:effectLst>
-        </p:spPr>
-        <p:txBody>
-          <a:bodyPr/>
-          <a:lstStyle/>
-          <a:p>
-            <a:endParaRPr lang="en-TH" sz="2000"/>
-          </a:p>
-        </p:txBody>
-      </p:sp>
-      <p:sp>
-        <p:nvSpPr>
-          <p:cNvPr id="12" name="Shape 10"/>
-          <p:cNvSpPr/>
-          <p:nvPr/>
-        </p:nvSpPr>
-        <p:spPr>
-          <a:xfrm>
-            <a:off x="850392" y="4617720"/>
-            <a:ext cx="384048" cy="384048"/>
-          </a:xfrm>
-          <a:prstGeom prst="ellipse">
-            <a:avLst/>
-          </a:prstGeom>
-          <a:solidFill>
-            <a:srgbClr val="00ADB5"/>
-          </a:solidFill>
-          <a:ln w="12700">
-            <a:solidFill>
-              <a:srgbClr val="00ADB5"/>
-            </a:solidFill>
-            <a:prstDash val="solid"/>
-          </a:ln>
-        </p:spPr>
-        <p:txBody>
-          <a:bodyPr/>
-          <a:lstStyle/>
-          <a:p>
-            <a:endParaRPr lang="en-TH" sz="2000"/>
-          </a:p>
-        </p:txBody>
-      </p:sp>
-      <p:sp>
-        <p:nvSpPr>
-          <p:cNvPr id="13" name="Text 11"/>
-          <p:cNvSpPr/>
-          <p:nvPr/>
-        </p:nvSpPr>
-        <p:spPr>
-          <a:xfrm>
-            <a:off x="850392" y="4617720"/>
-            <a:ext cx="384048" cy="384048"/>
-          </a:xfrm>
-          <a:prstGeom prst="rect">
-            <a:avLst/>
-          </a:prstGeom>
-          <a:noFill/>
-          <a:ln/>
-        </p:spPr>
-        <p:txBody>
-          <a:bodyPr wrap="square" lIns="0" tIns="0" rIns="0" bIns="0" rtlCol="0" anchor="ctr"/>
-          <a:lstStyle/>
-          <a:p>
-            <a:pPr marL="0" indent="0" algn="ctr">
-              <a:buNone/>
-            </a:pPr>
-            <a:r>
-              <a:rPr lang="en-US" sz="1600" b="1" dirty="0">
-                <a:solidFill>
-                  <a:srgbClr val="FFFFFF"/>
-                </a:solidFill>
-                <a:latin typeface="TH Sarabun New" pitchFamily="34" charset="0"/>
-                <a:ea typeface="TH Sarabun New" pitchFamily="34" charset="-122"/>
-                <a:cs typeface="TH Sarabun New" pitchFamily="34" charset="-120"/>
-              </a:rPr>
-              <a:t>1</a:t>
-            </a:r>
-            <a:endParaRPr lang="en-US" sz="1600" dirty="0"/>
-          </a:p>
-        </p:txBody>
-      </p:sp>
-      <p:sp>
-        <p:nvSpPr>
-          <p:cNvPr id="14" name="Text 12"/>
-          <p:cNvSpPr/>
-          <p:nvPr/>
-        </p:nvSpPr>
-        <p:spPr>
-          <a:xfrm>
-            <a:off x="1380744" y="4526280"/>
-            <a:ext cx="2560320" cy="329184"/>
-          </a:xfrm>
-          <a:prstGeom prst="rect">
-            <a:avLst/>
-          </a:prstGeom>
-          <a:noFill/>
-          <a:ln/>
-        </p:spPr>
-        <p:txBody>
-          <a:bodyPr wrap="square" lIns="0" tIns="0" rIns="0" bIns="0" rtlCol="0" anchor="ctr"/>
-          <a:lstStyle/>
-          <a:p>
-            <a:pPr marL="0" indent="0">
-              <a:buNone/>
-            </a:pPr>
-            <a:r>
-              <a:rPr lang="en-US" sz="2000" b="1" dirty="0">
-                <a:solidFill>
-                  <a:srgbClr val="222831"/>
-                </a:solidFill>
-                <a:latin typeface="TH Sarabun New" pitchFamily="34" charset="0"/>
-                <a:ea typeface="TH Sarabun New" pitchFamily="34" charset="-122"/>
-                <a:cs typeface="TH Sarabun New" pitchFamily="34" charset="-120"/>
-              </a:rPr>
-              <a:t>สไตล์</a:t>
-            </a:r>
-            <a:endParaRPr lang="en-US" sz="2000" dirty="0"/>
-          </a:p>
-        </p:txBody>
-      </p:sp>
-      <p:sp>
-        <p:nvSpPr>
-          <p:cNvPr id="15" name="Text 13"/>
-          <p:cNvSpPr/>
-          <p:nvPr/>
-        </p:nvSpPr>
-        <p:spPr>
-          <a:xfrm>
-            <a:off x="1380744" y="4864608"/>
-            <a:ext cx="2560320" cy="310896"/>
-          </a:xfrm>
-          <a:prstGeom prst="rect">
-            <a:avLst/>
-          </a:prstGeom>
-          <a:noFill/>
-          <a:ln/>
-        </p:spPr>
-        <p:txBody>
-          <a:bodyPr wrap="square" lIns="0" tIns="0" rIns="0" bIns="0" rtlCol="0" anchor="ctr"/>
-          <a:lstStyle/>
-          <a:p>
-            <a:pPr marL="0" indent="0">
-              <a:buNone/>
-            </a:pPr>
-            <a:r>
-              <a:rPr lang="en-US" sz="1400" dirty="0">
-                <a:solidFill>
-                  <a:srgbClr val="00ADB5"/>
-                </a:solidFill>
-                <a:latin typeface="Courier New" pitchFamily="34" charset="0"/>
-                <a:ea typeface="Courier New" pitchFamily="34" charset="-122"/>
-                <a:cs typeface="Courier New" pitchFamily="34" charset="-120"/>
-              </a:rPr>
-              <a:t>uistyleguide.com</a:t>
-            </a:r>
-            <a:endParaRPr lang="en-US" sz="1400" dirty="0"/>
-          </a:p>
-        </p:txBody>
-      </p:sp>
-      <p:sp>
-        <p:nvSpPr>
-          <p:cNvPr id="16" name="Shape 14"/>
-          <p:cNvSpPr/>
-          <p:nvPr/>
-        </p:nvSpPr>
-        <p:spPr>
-          <a:xfrm>
-            <a:off x="4297680" y="4343400"/>
-            <a:ext cx="3566160" cy="1097280"/>
-          </a:xfrm>
-          <a:prstGeom prst="roundRect">
-            <a:avLst>
-              <a:gd name="adj" fmla="val 7500"/>
-            </a:avLst>
-          </a:prstGeom>
-          <a:solidFill>
-            <a:srgbClr val="E8F6F7"/>
-          </a:solidFill>
-          <a:ln w="9525">
-            <a:solidFill>
-              <a:srgbClr val="E8F6F7"/>
-            </a:solidFill>
-            <a:prstDash val="solid"/>
-          </a:ln>
-          <a:effectLst>
-            <a:outerShdw blurRad="101600" dist="12700" dir="5400000" algn="bl" rotWithShape="0">
-              <a:srgbClr val="222831">
-                <a:alpha val="10000"/>
-              </a:srgbClr>
-            </a:outerShdw>
-          </a:effectLst>
-        </p:spPr>
-        <p:txBody>
-          <a:bodyPr/>
-          <a:lstStyle/>
-          <a:p>
-            <a:endParaRPr lang="en-TH" sz="2000"/>
-          </a:p>
-        </p:txBody>
-      </p:sp>
-      <p:sp>
-        <p:nvSpPr>
-          <p:cNvPr id="17" name="Shape 15"/>
-          <p:cNvSpPr/>
-          <p:nvPr/>
-        </p:nvSpPr>
-        <p:spPr>
-          <a:xfrm>
-            <a:off x="4553712" y="4617720"/>
-            <a:ext cx="384048" cy="384048"/>
-          </a:xfrm>
-          <a:prstGeom prst="ellipse">
-            <a:avLst/>
-          </a:prstGeom>
-          <a:solidFill>
-            <a:srgbClr val="00ADB5"/>
-          </a:solidFill>
-          <a:ln w="12700">
-            <a:solidFill>
-              <a:srgbClr val="00ADB5"/>
-            </a:solidFill>
-            <a:prstDash val="solid"/>
-          </a:ln>
-        </p:spPr>
-        <p:txBody>
-          <a:bodyPr/>
-          <a:lstStyle/>
-          <a:p>
-            <a:endParaRPr lang="en-TH" sz="2000"/>
-          </a:p>
-        </p:txBody>
-      </p:sp>
-      <p:sp>
-        <p:nvSpPr>
-          <p:cNvPr id="18" name="Text 16"/>
-          <p:cNvSpPr/>
-          <p:nvPr/>
-        </p:nvSpPr>
-        <p:spPr>
-          <a:xfrm>
-            <a:off x="4553712" y="4617720"/>
-            <a:ext cx="384048" cy="384048"/>
-          </a:xfrm>
-          <a:prstGeom prst="rect">
-            <a:avLst/>
-          </a:prstGeom>
-          <a:noFill/>
-          <a:ln/>
-        </p:spPr>
-        <p:txBody>
-          <a:bodyPr wrap="square" lIns="0" tIns="0" rIns="0" bIns="0" rtlCol="0" anchor="ctr"/>
-          <a:lstStyle/>
-          <a:p>
-            <a:pPr marL="0" indent="0" algn="ctr">
-              <a:buNone/>
-            </a:pPr>
-            <a:r>
-              <a:rPr lang="en-US" sz="1600" b="1" dirty="0">
-                <a:solidFill>
-                  <a:srgbClr val="FFFFFF"/>
-                </a:solidFill>
-                <a:latin typeface="TH Sarabun New" pitchFamily="34" charset="0"/>
-                <a:ea typeface="TH Sarabun New" pitchFamily="34" charset="-122"/>
-                <a:cs typeface="TH Sarabun New" pitchFamily="34" charset="-120"/>
-              </a:rPr>
-              <a:t>2</a:t>
-            </a:r>
-            <a:endParaRPr lang="en-US" sz="1600" dirty="0"/>
-          </a:p>
-        </p:txBody>
-      </p:sp>
-      <p:sp>
-        <p:nvSpPr>
-          <p:cNvPr id="19" name="Text 17"/>
-          <p:cNvSpPr/>
-          <p:nvPr/>
-        </p:nvSpPr>
-        <p:spPr>
-          <a:xfrm>
-            <a:off x="5084064" y="4526280"/>
-            <a:ext cx="2560320" cy="329184"/>
-          </a:xfrm>
-          <a:prstGeom prst="rect">
-            <a:avLst/>
-          </a:prstGeom>
-          <a:noFill/>
-          <a:ln/>
-        </p:spPr>
-        <p:txBody>
-          <a:bodyPr wrap="square" lIns="0" tIns="0" rIns="0" bIns="0" rtlCol="0" anchor="ctr"/>
-          <a:lstStyle/>
-          <a:p>
-            <a:pPr marL="0" indent="0">
-              <a:buNone/>
-            </a:pPr>
-            <a:r>
-              <a:rPr lang="en-US" sz="2000" b="1" dirty="0">
-                <a:solidFill>
-                  <a:srgbClr val="222831"/>
-                </a:solidFill>
-                <a:latin typeface="TH Sarabun New" pitchFamily="34" charset="0"/>
-                <a:ea typeface="TH Sarabun New" pitchFamily="34" charset="-122"/>
-                <a:cs typeface="TH Sarabun New" pitchFamily="34" charset="-120"/>
-              </a:rPr>
-              <a:t>จานสี</a:t>
-            </a:r>
-            <a:endParaRPr lang="en-US" sz="2000" dirty="0"/>
-          </a:p>
-        </p:txBody>
-      </p:sp>
-      <p:sp>
-        <p:nvSpPr>
-          <p:cNvPr id="20" name="Text 18"/>
-          <p:cNvSpPr/>
-          <p:nvPr/>
-        </p:nvSpPr>
-        <p:spPr>
-          <a:xfrm>
-            <a:off x="5084064" y="4864608"/>
-            <a:ext cx="2560320" cy="310896"/>
-          </a:xfrm>
-          <a:prstGeom prst="rect">
-            <a:avLst/>
-          </a:prstGeom>
-          <a:noFill/>
-          <a:ln/>
-        </p:spPr>
-        <p:txBody>
-          <a:bodyPr wrap="square" lIns="0" tIns="0" rIns="0" bIns="0" rtlCol="0" anchor="ctr"/>
-          <a:lstStyle/>
-          <a:p>
-            <a:pPr marL="0" indent="0">
-              <a:buNone/>
-            </a:pPr>
-            <a:r>
-              <a:rPr lang="en-US" sz="1400" dirty="0">
-                <a:solidFill>
-                  <a:srgbClr val="00ADB5"/>
-                </a:solidFill>
-                <a:latin typeface="Courier New" pitchFamily="34" charset="0"/>
-                <a:ea typeface="Courier New" pitchFamily="34" charset="-122"/>
-                <a:cs typeface="Courier New" pitchFamily="34" charset="-120"/>
-              </a:rPr>
-              <a:t>colorhunt.co</a:t>
-            </a:r>
-            <a:endParaRPr lang="en-US" sz="1400" dirty="0"/>
-          </a:p>
-        </p:txBody>
-      </p:sp>
-      <p:sp>
-        <p:nvSpPr>
-          <p:cNvPr id="21" name="Shape 19"/>
-          <p:cNvSpPr/>
-          <p:nvPr/>
-        </p:nvSpPr>
-        <p:spPr>
-          <a:xfrm>
-            <a:off x="8001000" y="4343400"/>
-            <a:ext cx="3566160" cy="1097280"/>
-          </a:xfrm>
-          <a:prstGeom prst="roundRect">
-            <a:avLst>
-              <a:gd name="adj" fmla="val 7500"/>
-            </a:avLst>
-          </a:prstGeom>
-          <a:solidFill>
-            <a:srgbClr val="E8F6F7"/>
-          </a:solidFill>
-          <a:ln w="9525">
-            <a:solidFill>
-              <a:srgbClr val="E8F6F7"/>
-            </a:solidFill>
-            <a:prstDash val="solid"/>
-          </a:ln>
-          <a:effectLst>
-            <a:outerShdw blurRad="101600" dist="12700" dir="5400000" algn="bl" rotWithShape="0">
-              <a:srgbClr val="222831">
-                <a:alpha val="10000"/>
-              </a:srgbClr>
-            </a:outerShdw>
-          </a:effectLst>
-        </p:spPr>
-        <p:txBody>
-          <a:bodyPr/>
-          <a:lstStyle/>
-          <a:p>
-            <a:endParaRPr lang="en-TH" sz="2000"/>
-          </a:p>
-        </p:txBody>
-      </p:sp>
-      <p:sp>
-        <p:nvSpPr>
-          <p:cNvPr id="22" name="Shape 20"/>
-          <p:cNvSpPr/>
-          <p:nvPr/>
-        </p:nvSpPr>
-        <p:spPr>
-          <a:xfrm>
-            <a:off x="8257032" y="4617720"/>
-            <a:ext cx="384048" cy="384048"/>
-          </a:xfrm>
-          <a:prstGeom prst="ellipse">
-            <a:avLst/>
-          </a:prstGeom>
-          <a:solidFill>
-            <a:srgbClr val="00ADB5"/>
-          </a:solidFill>
-          <a:ln w="12700">
-            <a:solidFill>
-              <a:srgbClr val="00ADB5"/>
-            </a:solidFill>
-            <a:prstDash val="solid"/>
-          </a:ln>
-        </p:spPr>
-        <p:txBody>
-          <a:bodyPr/>
-          <a:lstStyle/>
-          <a:p>
-            <a:endParaRPr lang="en-TH" sz="2000"/>
-          </a:p>
-        </p:txBody>
-      </p:sp>
-      <p:sp>
-        <p:nvSpPr>
-          <p:cNvPr id="23" name="Text 21"/>
-          <p:cNvSpPr/>
-          <p:nvPr/>
-        </p:nvSpPr>
-        <p:spPr>
-          <a:xfrm>
-            <a:off x="8257032" y="4617720"/>
-            <a:ext cx="384048" cy="384048"/>
-          </a:xfrm>
-          <a:prstGeom prst="rect">
-            <a:avLst/>
-          </a:prstGeom>
-          <a:noFill/>
-          <a:ln/>
-        </p:spPr>
-        <p:txBody>
-          <a:bodyPr wrap="square" lIns="0" tIns="0" rIns="0" bIns="0" rtlCol="0" anchor="ctr"/>
-          <a:lstStyle/>
-          <a:p>
-            <a:pPr marL="0" indent="0" algn="ctr">
-              <a:buNone/>
-            </a:pPr>
-            <a:r>
-              <a:rPr lang="en-US" sz="1600" b="1" dirty="0">
-                <a:solidFill>
-                  <a:srgbClr val="FFFFFF"/>
-                </a:solidFill>
-                <a:latin typeface="TH Sarabun New" pitchFamily="34" charset="0"/>
-                <a:ea typeface="TH Sarabun New" pitchFamily="34" charset="-122"/>
-                <a:cs typeface="TH Sarabun New" pitchFamily="34" charset="-120"/>
-              </a:rPr>
-              <a:t>3</a:t>
-            </a:r>
-            <a:endParaRPr lang="en-US" sz="1600" dirty="0"/>
-          </a:p>
-        </p:txBody>
-      </p:sp>
-      <p:sp>
-        <p:nvSpPr>
-          <p:cNvPr id="24" name="Text 22"/>
-          <p:cNvSpPr/>
-          <p:nvPr/>
-        </p:nvSpPr>
-        <p:spPr>
-          <a:xfrm>
-            <a:off x="8787384" y="4526280"/>
-            <a:ext cx="2560320" cy="329184"/>
-          </a:xfrm>
-          <a:prstGeom prst="rect">
-            <a:avLst/>
-          </a:prstGeom>
-          <a:noFill/>
-          <a:ln/>
-        </p:spPr>
-        <p:txBody>
-          <a:bodyPr wrap="square" lIns="0" tIns="0" rIns="0" bIns="0" rtlCol="0" anchor="ctr"/>
-          <a:lstStyle/>
-          <a:p>
-            <a:pPr marL="0" indent="0">
-              <a:buNone/>
-            </a:pPr>
-            <a:r>
-              <a:rPr lang="en-US" sz="2000" b="1" dirty="0">
-                <a:solidFill>
-                  <a:srgbClr val="222831"/>
-                </a:solidFill>
-                <a:latin typeface="TH Sarabun New" pitchFamily="34" charset="0"/>
-                <a:ea typeface="TH Sarabun New" pitchFamily="34" charset="-122"/>
-                <a:cs typeface="TH Sarabun New" pitchFamily="34" charset="-120"/>
-              </a:rPr>
-              <a:t>ฟอนต์</a:t>
-            </a:r>
-            <a:endParaRPr lang="en-US" sz="2000" dirty="0"/>
-          </a:p>
-        </p:txBody>
-      </p:sp>
-      <p:sp>
-        <p:nvSpPr>
-          <p:cNvPr id="25" name="Text 23"/>
-          <p:cNvSpPr/>
-          <p:nvPr/>
-        </p:nvSpPr>
-        <p:spPr>
-          <a:xfrm>
-            <a:off x="8787384" y="4864608"/>
-            <a:ext cx="2560320" cy="310896"/>
-          </a:xfrm>
-          <a:prstGeom prst="rect">
-            <a:avLst/>
-          </a:prstGeom>
-          <a:noFill/>
-          <a:ln/>
-        </p:spPr>
-        <p:txBody>
-          <a:bodyPr wrap="square" lIns="0" tIns="0" rIns="0" bIns="0" rtlCol="0" anchor="ctr"/>
-          <a:lstStyle/>
-          <a:p>
-            <a:pPr marL="0" indent="0">
-              <a:buNone/>
-            </a:pPr>
-            <a:r>
-              <a:rPr lang="en-US" sz="1400" dirty="0">
-                <a:solidFill>
-                  <a:srgbClr val="00ADB5"/>
-                </a:solidFill>
-                <a:latin typeface="Courier New" pitchFamily="34" charset="0"/>
-                <a:ea typeface="Courier New" pitchFamily="34" charset="-122"/>
-                <a:cs typeface="Courier New" pitchFamily="34" charset="-120"/>
-              </a:rPr>
-              <a:t>fonts.google.com</a:t>
-            </a:r>
-            <a:endParaRPr lang="en-US" sz="1400" dirty="0"/>
           </a:p>
         </p:txBody>
       </p:sp>
@@ -10456,6 +10848,1098 @@
 
 <file path=ppt/slides/slide20.xml><?xml version="1.0" encoding="utf-8"?>
 <p:sld xmlns:a="http://schemas.openxmlformats.org/drawingml/2006/main" xmlns:r="http://schemas.openxmlformats.org/officeDocument/2006/relationships" xmlns:p="http://schemas.openxmlformats.org/presentationml/2006/main">
+  <p:cSld name="Slide 24">
+    <p:bg>
+      <p:bgPr>
+        <a:solidFill>
+          <a:srgbClr val="FFFFFF"/>
+        </a:solidFill>
+        <a:effectLst/>
+      </p:bgPr>
+    </p:bg>
+    <p:spTree>
+      <p:nvGrpSpPr>
+        <p:cNvPr id="1" name=""/>
+        <p:cNvGrpSpPr/>
+        <p:nvPr/>
+      </p:nvGrpSpPr>
+      <p:grpSpPr>
+        <a:xfrm>
+          <a:off x="0" y="0"/>
+          <a:ext cx="0" cy="0"/>
+          <a:chOff x="0" y="0"/>
+          <a:chExt cx="0" cy="0"/>
+        </a:xfrm>
+      </p:grpSpPr>
+      <p:sp>
+        <p:nvSpPr>
+          <p:cNvPr id="2" name="Text 0"/>
+          <p:cNvSpPr/>
+          <p:nvPr/>
+        </p:nvSpPr>
+        <p:spPr>
+          <a:xfrm>
+            <a:off x="11018520" y="6263640"/>
+            <a:ext cx="548640" cy="274320"/>
+          </a:xfrm>
+          <a:prstGeom prst="rect">
+            <a:avLst/>
+          </a:prstGeom>
+          <a:noFill/>
+          <a:ln/>
+        </p:spPr>
+        <p:txBody>
+          <a:bodyPr wrap="square" lIns="0" tIns="0" rIns="0" bIns="0" rtlCol="0" anchor="ctr"/>
+          <a:lstStyle/>
+          <a:p>
+            <a:pPr marL="0" indent="0" algn="r">
+              <a:buNone/>
+            </a:pPr>
+            <a:r>
+              <a:rPr lang="en-US" sz="1200" dirty="0">
+                <a:solidFill>
+                  <a:srgbClr val="9AA3AD"/>
+                </a:solidFill>
+                <a:latin typeface="TH Sarabun New" pitchFamily="34" charset="0"/>
+                <a:ea typeface="TH Sarabun New" pitchFamily="34" charset="-122"/>
+                <a:cs typeface="TH Sarabun New" pitchFamily="34" charset="-120"/>
+              </a:rPr>
+              <a:t>24</a:t>
+            </a:r>
+            <a:endParaRPr lang="en-US" sz="1200" dirty="0"/>
+          </a:p>
+        </p:txBody>
+      </p:sp>
+      <p:sp>
+        <p:nvSpPr>
+          <p:cNvPr id="3" name="Text 1"/>
+          <p:cNvSpPr/>
+          <p:nvPr/>
+        </p:nvSpPr>
+        <p:spPr>
+          <a:xfrm>
+            <a:off x="594360" y="329184"/>
+            <a:ext cx="10972800" cy="566928"/>
+          </a:xfrm>
+          <a:prstGeom prst="rect">
+            <a:avLst/>
+          </a:prstGeom>
+          <a:noFill/>
+          <a:ln/>
+        </p:spPr>
+        <p:txBody>
+          <a:bodyPr wrap="square" lIns="0" tIns="0" rIns="0" bIns="0" rtlCol="0" anchor="ctr"/>
+          <a:lstStyle/>
+          <a:p>
+            <a:pPr marL="0" indent="0">
+              <a:buNone/>
+            </a:pPr>
+            <a:r>
+              <a:rPr lang="en-US" sz="3200" b="1" dirty="0">
+                <a:solidFill>
+                  <a:srgbClr val="222831"/>
+                </a:solidFill>
+                <a:latin typeface="TH Sarabun New" pitchFamily="34" charset="0"/>
+                <a:ea typeface="TH Sarabun New" pitchFamily="34" charset="-122"/>
+                <a:cs typeface="TH Sarabun New" pitchFamily="34" charset="-120"/>
+              </a:rPr>
+              <a:t>ทำไมต้องกำหนด Design System ก่อน</a:t>
+            </a:r>
+            <a:endParaRPr lang="en-US" sz="3200" dirty="0"/>
+          </a:p>
+        </p:txBody>
+      </p:sp>
+      <p:sp>
+        <p:nvSpPr>
+          <p:cNvPr id="4" name="Shape 2"/>
+          <p:cNvSpPr/>
+          <p:nvPr/>
+        </p:nvSpPr>
+        <p:spPr>
+          <a:xfrm>
+            <a:off x="594360" y="1417320"/>
+            <a:ext cx="5303520" cy="2286000"/>
+          </a:xfrm>
+          <a:prstGeom prst="roundRect">
+            <a:avLst>
+              <a:gd name="adj" fmla="val 3600"/>
+            </a:avLst>
+          </a:prstGeom>
+          <a:solidFill>
+            <a:srgbClr val="FEF2F2"/>
+          </a:solidFill>
+          <a:ln w="9525">
+            <a:solidFill>
+              <a:srgbClr val="FCA5A5"/>
+            </a:solidFill>
+            <a:prstDash val="solid"/>
+          </a:ln>
+          <a:effectLst>
+            <a:outerShdw blurRad="101600" dist="12700" dir="5400000" algn="bl" rotWithShape="0">
+              <a:srgbClr val="222831">
+                <a:alpha val="10000"/>
+              </a:srgbClr>
+            </a:outerShdw>
+          </a:effectLst>
+        </p:spPr>
+        <p:txBody>
+          <a:bodyPr/>
+          <a:lstStyle/>
+          <a:p>
+            <a:endParaRPr lang="en-TH" sz="2000"/>
+          </a:p>
+        </p:txBody>
+      </p:sp>
+      <p:sp>
+        <p:nvSpPr>
+          <p:cNvPr id="5" name="Text 3"/>
+          <p:cNvSpPr/>
+          <p:nvPr/>
+        </p:nvSpPr>
+        <p:spPr>
+          <a:xfrm>
+            <a:off x="868680" y="1572768"/>
+            <a:ext cx="4754880" cy="347472"/>
+          </a:xfrm>
+          <a:prstGeom prst="rect">
+            <a:avLst/>
+          </a:prstGeom>
+          <a:noFill/>
+          <a:ln/>
+        </p:spPr>
+        <p:txBody>
+          <a:bodyPr wrap="square" lIns="0" tIns="0" rIns="0" bIns="0" rtlCol="0" anchor="ctr"/>
+          <a:lstStyle/>
+          <a:p>
+            <a:pPr marL="0" indent="0">
+              <a:buNone/>
+            </a:pPr>
+            <a:r>
+              <a:rPr lang="en-US" sz="2400" b="1" dirty="0">
+                <a:solidFill>
+                  <a:srgbClr val="DC2626"/>
+                </a:solidFill>
+                <a:latin typeface="TH Sarabun New" pitchFamily="34" charset="0"/>
+                <a:ea typeface="TH Sarabun New" pitchFamily="34" charset="-122"/>
+                <a:cs typeface="TH Sarabun New" pitchFamily="34" charset="-120"/>
+              </a:rPr>
+              <a:t>ถ้าไม่กำหนด</a:t>
+            </a:r>
+            <a:endParaRPr lang="en-US" sz="2400" dirty="0"/>
+          </a:p>
+        </p:txBody>
+      </p:sp>
+      <p:sp>
+        <p:nvSpPr>
+          <p:cNvPr id="6" name="Text 4"/>
+          <p:cNvSpPr/>
+          <p:nvPr/>
+        </p:nvSpPr>
+        <p:spPr>
+          <a:xfrm>
+            <a:off x="868680" y="1993392"/>
+            <a:ext cx="4754880" cy="1554480"/>
+          </a:xfrm>
+          <a:prstGeom prst="rect">
+            <a:avLst/>
+          </a:prstGeom>
+          <a:noFill/>
+          <a:ln/>
+        </p:spPr>
+        <p:txBody>
+          <a:bodyPr wrap="square" lIns="0" tIns="0" rIns="0" bIns="0" rtlCol="0" anchor="t"/>
+          <a:lstStyle/>
+          <a:p>
+            <a:pPr marL="342900" indent="-342900">
+              <a:spcAft>
+                <a:spcPts val="700"/>
+              </a:spcAft>
+              <a:buSzPct val="100000"/>
+              <a:buChar char="•"/>
+            </a:pPr>
+            <a:r>
+              <a:rPr lang="en-US" sz="2000" dirty="0">
+                <a:solidFill>
+                  <a:srgbClr val="393E46"/>
+                </a:solidFill>
+                <a:latin typeface="TH Sarabun New" pitchFamily="34" charset="0"/>
+                <a:ea typeface="TH Sarabun New" pitchFamily="34" charset="-122"/>
+                <a:cs typeface="TH Sarabun New" pitchFamily="34" charset="-120"/>
+              </a:rPr>
+              <a:t>AI เลือกสีน้ำเงินและฟอนต์สากลให้ทุกครั้ง</a:t>
+            </a:r>
+            <a:endParaRPr lang="en-US" sz="2000" dirty="0"/>
+          </a:p>
+          <a:p>
+            <a:pPr marL="342900" indent="-342900">
+              <a:spcAft>
+                <a:spcPts val="700"/>
+              </a:spcAft>
+              <a:buSzPct val="100000"/>
+              <a:buChar char="•"/>
+            </a:pPr>
+            <a:r>
+              <a:rPr lang="en-US" sz="2000" dirty="0">
+                <a:solidFill>
+                  <a:srgbClr val="393E46"/>
+                </a:solidFill>
+                <a:latin typeface="TH Sarabun New" pitchFamily="34" charset="0"/>
+                <a:ea typeface="TH Sarabun New" pitchFamily="34" charset="-122"/>
+                <a:cs typeface="TH Sarabun New" pitchFamily="34" charset="-120"/>
+              </a:rPr>
+              <a:t>งานของผู้เข้าอบรมทุกคนหน้าตาเหมือนกันหมด</a:t>
+            </a:r>
+            <a:endParaRPr lang="en-US" sz="2000" dirty="0"/>
+          </a:p>
+          <a:p>
+            <a:pPr marL="342900" indent="-342900">
+              <a:spcAft>
+                <a:spcPts val="700"/>
+              </a:spcAft>
+              <a:buSzPct val="100000"/>
+              <a:buChar char="•"/>
+            </a:pPr>
+            <a:r>
+              <a:rPr lang="en-US" sz="2000" dirty="0">
+                <a:solidFill>
+                  <a:srgbClr val="393E46"/>
+                </a:solidFill>
+                <a:latin typeface="TH Sarabun New" pitchFamily="34" charset="0"/>
+                <a:ea typeface="TH Sarabun New" pitchFamily="34" charset="-122"/>
+                <a:cs typeface="TH Sarabun New" pitchFamily="34" charset="-120"/>
+              </a:rPr>
+              <a:t>สั่งแก้หน้าหนึ่ง สีเพี้ยนไปอีกหน้าหนึ่ง</a:t>
+            </a:r>
+            <a:endParaRPr lang="en-US" sz="2000" dirty="0"/>
+          </a:p>
+          <a:p>
+            <a:pPr marL="342900" indent="-342900">
+              <a:spcAft>
+                <a:spcPts val="700"/>
+              </a:spcAft>
+              <a:buSzPct val="100000"/>
+              <a:buChar char="•"/>
+            </a:pPr>
+            <a:r>
+              <a:rPr lang="en-US" sz="2000" dirty="0">
+                <a:solidFill>
+                  <a:srgbClr val="393E46"/>
+                </a:solidFill>
+                <a:latin typeface="TH Sarabun New" pitchFamily="34" charset="0"/>
+                <a:ea typeface="TH Sarabun New" pitchFamily="34" charset="-122"/>
+                <a:cs typeface="TH Sarabun New" pitchFamily="34" charset="-120"/>
+              </a:rPr>
+              <a:t>ภาษาไทยแสดงผลเพี้ยนเพราะฟอนต์ไม่รองรับ</a:t>
+            </a:r>
+            <a:endParaRPr lang="en-US" sz="2000" dirty="0"/>
+          </a:p>
+        </p:txBody>
+      </p:sp>
+      <p:sp>
+        <p:nvSpPr>
+          <p:cNvPr id="7" name="Shape 5"/>
+          <p:cNvSpPr/>
+          <p:nvPr/>
+        </p:nvSpPr>
+        <p:spPr>
+          <a:xfrm>
+            <a:off x="6263640" y="1417320"/>
+            <a:ext cx="5303520" cy="2286000"/>
+          </a:xfrm>
+          <a:prstGeom prst="roundRect">
+            <a:avLst>
+              <a:gd name="adj" fmla="val 3600"/>
+            </a:avLst>
+          </a:prstGeom>
+          <a:solidFill>
+            <a:srgbClr val="CCFBF1"/>
+          </a:solidFill>
+          <a:ln w="9525">
+            <a:solidFill>
+              <a:srgbClr val="CCFBF1"/>
+            </a:solidFill>
+            <a:prstDash val="solid"/>
+          </a:ln>
+          <a:effectLst>
+            <a:outerShdw blurRad="101600" dist="12700" dir="5400000" algn="bl" rotWithShape="0">
+              <a:srgbClr val="222831">
+                <a:alpha val="10000"/>
+              </a:srgbClr>
+            </a:outerShdw>
+          </a:effectLst>
+        </p:spPr>
+        <p:txBody>
+          <a:bodyPr/>
+          <a:lstStyle/>
+          <a:p>
+            <a:endParaRPr lang="en-TH" sz="2000"/>
+          </a:p>
+        </p:txBody>
+      </p:sp>
+      <p:sp>
+        <p:nvSpPr>
+          <p:cNvPr id="8" name="Text 6"/>
+          <p:cNvSpPr/>
+          <p:nvPr/>
+        </p:nvSpPr>
+        <p:spPr>
+          <a:xfrm>
+            <a:off x="6537960" y="1572768"/>
+            <a:ext cx="4754880" cy="347472"/>
+          </a:xfrm>
+          <a:prstGeom prst="rect">
+            <a:avLst/>
+          </a:prstGeom>
+          <a:noFill/>
+          <a:ln/>
+        </p:spPr>
+        <p:txBody>
+          <a:bodyPr wrap="square" lIns="0" tIns="0" rIns="0" bIns="0" rtlCol="0" anchor="ctr"/>
+          <a:lstStyle/>
+          <a:p>
+            <a:pPr marL="0" indent="0">
+              <a:buNone/>
+            </a:pPr>
+            <a:r>
+              <a:rPr lang="en-US" sz="2400" b="1" dirty="0">
+                <a:solidFill>
+                  <a:srgbClr val="0F766E"/>
+                </a:solidFill>
+                <a:latin typeface="TH Sarabun New" pitchFamily="34" charset="0"/>
+                <a:ea typeface="TH Sarabun New" pitchFamily="34" charset="-122"/>
+                <a:cs typeface="TH Sarabun New" pitchFamily="34" charset="-120"/>
+              </a:rPr>
+              <a:t>ถ้ากำหนดไว้ใน §4</a:t>
+            </a:r>
+            <a:endParaRPr lang="en-US" sz="2400" dirty="0"/>
+          </a:p>
+        </p:txBody>
+      </p:sp>
+      <p:sp>
+        <p:nvSpPr>
+          <p:cNvPr id="9" name="Text 7"/>
+          <p:cNvSpPr/>
+          <p:nvPr/>
+        </p:nvSpPr>
+        <p:spPr>
+          <a:xfrm>
+            <a:off x="6537960" y="1993392"/>
+            <a:ext cx="4754880" cy="1554480"/>
+          </a:xfrm>
+          <a:prstGeom prst="rect">
+            <a:avLst/>
+          </a:prstGeom>
+          <a:noFill/>
+          <a:ln/>
+        </p:spPr>
+        <p:txBody>
+          <a:bodyPr wrap="square" lIns="0" tIns="0" rIns="0" bIns="0" rtlCol="0" anchor="t"/>
+          <a:lstStyle/>
+          <a:p>
+            <a:pPr marL="342900" indent="-342900">
+              <a:spcAft>
+                <a:spcPts val="700"/>
+              </a:spcAft>
+              <a:buSzPct val="100000"/>
+              <a:buChar char="•"/>
+            </a:pPr>
+            <a:r>
+              <a:rPr lang="en-US" sz="2000" dirty="0">
+                <a:solidFill>
+                  <a:srgbClr val="393E46"/>
+                </a:solidFill>
+                <a:latin typeface="TH Sarabun New" pitchFamily="34" charset="0"/>
+                <a:ea typeface="TH Sarabun New" pitchFamily="34" charset="-122"/>
+                <a:cs typeface="TH Sarabun New" pitchFamily="34" charset="-120"/>
+              </a:rPr>
+              <a:t>ทุกหน้าใช้สีและฟอนต์ชุดเดียวกันโดยอัตโนมัติ</a:t>
+            </a:r>
+            <a:endParaRPr lang="en-US" sz="2000" dirty="0"/>
+          </a:p>
+          <a:p>
+            <a:pPr marL="342900" indent="-342900">
+              <a:spcAft>
+                <a:spcPts val="700"/>
+              </a:spcAft>
+              <a:buSzPct val="100000"/>
+              <a:buChar char="•"/>
+            </a:pPr>
+            <a:r>
+              <a:rPr lang="en-US" sz="2000" dirty="0">
+                <a:solidFill>
+                  <a:srgbClr val="393E46"/>
+                </a:solidFill>
+                <a:latin typeface="TH Sarabun New" pitchFamily="34" charset="0"/>
+                <a:ea typeface="TH Sarabun New" pitchFamily="34" charset="-122"/>
+                <a:cs typeface="TH Sarabun New" pitchFamily="34" charset="-120"/>
+              </a:rPr>
+              <a:t>เปลี่ยนสีทั้งระบบด้วยการแก้ไฟล์สเปกที่เดียว</a:t>
+            </a:r>
+            <a:endParaRPr lang="en-US" sz="2000" dirty="0"/>
+          </a:p>
+          <a:p>
+            <a:pPr marL="342900" indent="-342900">
+              <a:spcAft>
+                <a:spcPts val="700"/>
+              </a:spcAft>
+              <a:buSzPct val="100000"/>
+              <a:buChar char="•"/>
+            </a:pPr>
+            <a:r>
+              <a:rPr lang="en-US" sz="2000" dirty="0">
+                <a:solidFill>
+                  <a:srgbClr val="393E46"/>
+                </a:solidFill>
+                <a:latin typeface="TH Sarabun New" pitchFamily="34" charset="0"/>
+                <a:ea typeface="TH Sarabun New" pitchFamily="34" charset="-122"/>
+                <a:cs typeface="TH Sarabun New" pitchFamily="34" charset="-120"/>
+              </a:rPr>
+              <a:t>งานออกมาเป็นเอกลักษณ์ของเราเอง</a:t>
+            </a:r>
+            <a:endParaRPr lang="en-US" sz="2000" dirty="0"/>
+          </a:p>
+          <a:p>
+            <a:pPr marL="342900" indent="-342900">
+              <a:spcAft>
+                <a:spcPts val="700"/>
+              </a:spcAft>
+              <a:buSzPct val="100000"/>
+              <a:buChar char="•"/>
+            </a:pPr>
+            <a:r>
+              <a:rPr lang="en-US" sz="2000" dirty="0">
+                <a:solidFill>
+                  <a:srgbClr val="393E46"/>
+                </a:solidFill>
+                <a:latin typeface="TH Sarabun New" pitchFamily="34" charset="0"/>
+                <a:ea typeface="TH Sarabun New" pitchFamily="34" charset="-122"/>
+                <a:cs typeface="TH Sarabun New" pitchFamily="34" charset="-120"/>
+              </a:rPr>
+              <a:t>ภาษาไทยอ่านง่าย เพราะเลือกฟอนต์ที่รองรับ</a:t>
+            </a:r>
+            <a:endParaRPr lang="en-US" sz="2000" dirty="0"/>
+          </a:p>
+        </p:txBody>
+      </p:sp>
+      <p:sp>
+        <p:nvSpPr>
+          <p:cNvPr id="10" name="Text 8"/>
+          <p:cNvSpPr/>
+          <p:nvPr/>
+        </p:nvSpPr>
+        <p:spPr>
+          <a:xfrm>
+            <a:off x="594360" y="3931920"/>
+            <a:ext cx="10972800" cy="329184"/>
+          </a:xfrm>
+          <a:prstGeom prst="rect">
+            <a:avLst/>
+          </a:prstGeom>
+          <a:noFill/>
+          <a:ln/>
+        </p:spPr>
+        <p:txBody>
+          <a:bodyPr wrap="square" lIns="0" tIns="0" rIns="0" bIns="0" rtlCol="0" anchor="ctr"/>
+          <a:lstStyle/>
+          <a:p>
+            <a:pPr marL="0" indent="0">
+              <a:buNone/>
+            </a:pPr>
+            <a:r>
+              <a:rPr lang="en-US" sz="2400" b="1" dirty="0">
+                <a:solidFill>
+                  <a:srgbClr val="222831"/>
+                </a:solidFill>
+                <a:latin typeface="TH Sarabun New" pitchFamily="34" charset="0"/>
+                <a:ea typeface="TH Sarabun New" pitchFamily="34" charset="-122"/>
+                <a:cs typeface="TH Sarabun New" pitchFamily="34" charset="-120"/>
+              </a:rPr>
+              <a:t>สามสิ่งที่ต้องเลือกใน LAB 3</a:t>
+            </a:r>
+            <a:endParaRPr lang="en-US" sz="2400" dirty="0"/>
+          </a:p>
+        </p:txBody>
+      </p:sp>
+      <p:sp>
+        <p:nvSpPr>
+          <p:cNvPr id="11" name="Shape 9"/>
+          <p:cNvSpPr/>
+          <p:nvPr/>
+        </p:nvSpPr>
+        <p:spPr>
+          <a:xfrm>
+            <a:off x="594360" y="4343400"/>
+            <a:ext cx="3566160" cy="1097280"/>
+          </a:xfrm>
+          <a:prstGeom prst="roundRect">
+            <a:avLst>
+              <a:gd name="adj" fmla="val 7500"/>
+            </a:avLst>
+          </a:prstGeom>
+          <a:solidFill>
+            <a:srgbClr val="E8F6F7"/>
+          </a:solidFill>
+          <a:ln w="9525">
+            <a:solidFill>
+              <a:srgbClr val="E8F6F7"/>
+            </a:solidFill>
+            <a:prstDash val="solid"/>
+          </a:ln>
+          <a:effectLst>
+            <a:outerShdw blurRad="101600" dist="12700" dir="5400000" algn="bl" rotWithShape="0">
+              <a:srgbClr val="222831">
+                <a:alpha val="10000"/>
+              </a:srgbClr>
+            </a:outerShdw>
+          </a:effectLst>
+        </p:spPr>
+        <p:txBody>
+          <a:bodyPr/>
+          <a:lstStyle/>
+          <a:p>
+            <a:endParaRPr lang="en-TH" sz="2000"/>
+          </a:p>
+        </p:txBody>
+      </p:sp>
+      <p:sp>
+        <p:nvSpPr>
+          <p:cNvPr id="12" name="Shape 10"/>
+          <p:cNvSpPr/>
+          <p:nvPr/>
+        </p:nvSpPr>
+        <p:spPr>
+          <a:xfrm>
+            <a:off x="850392" y="4617720"/>
+            <a:ext cx="384048" cy="384048"/>
+          </a:xfrm>
+          <a:prstGeom prst="ellipse">
+            <a:avLst/>
+          </a:prstGeom>
+          <a:solidFill>
+            <a:srgbClr val="00ADB5"/>
+          </a:solidFill>
+          <a:ln w="12700">
+            <a:solidFill>
+              <a:srgbClr val="00ADB5"/>
+            </a:solidFill>
+            <a:prstDash val="solid"/>
+          </a:ln>
+        </p:spPr>
+        <p:txBody>
+          <a:bodyPr/>
+          <a:lstStyle/>
+          <a:p>
+            <a:endParaRPr lang="en-TH" sz="2000"/>
+          </a:p>
+        </p:txBody>
+      </p:sp>
+      <p:sp>
+        <p:nvSpPr>
+          <p:cNvPr id="13" name="Text 11"/>
+          <p:cNvSpPr/>
+          <p:nvPr/>
+        </p:nvSpPr>
+        <p:spPr>
+          <a:xfrm>
+            <a:off x="850392" y="4617720"/>
+            <a:ext cx="384048" cy="384048"/>
+          </a:xfrm>
+          <a:prstGeom prst="rect">
+            <a:avLst/>
+          </a:prstGeom>
+          <a:noFill/>
+          <a:ln/>
+        </p:spPr>
+        <p:txBody>
+          <a:bodyPr wrap="square" lIns="0" tIns="0" rIns="0" bIns="0" rtlCol="0" anchor="ctr"/>
+          <a:lstStyle/>
+          <a:p>
+            <a:pPr marL="0" indent="0" algn="ctr">
+              <a:buNone/>
+            </a:pPr>
+            <a:r>
+              <a:rPr lang="en-US" sz="1600" b="1" dirty="0">
+                <a:solidFill>
+                  <a:srgbClr val="FFFFFF"/>
+                </a:solidFill>
+                <a:latin typeface="TH Sarabun New" pitchFamily="34" charset="0"/>
+                <a:ea typeface="TH Sarabun New" pitchFamily="34" charset="-122"/>
+                <a:cs typeface="TH Sarabun New" pitchFamily="34" charset="-120"/>
+              </a:rPr>
+              <a:t>1</a:t>
+            </a:r>
+            <a:endParaRPr lang="en-US" sz="1600" dirty="0"/>
+          </a:p>
+        </p:txBody>
+      </p:sp>
+      <p:sp>
+        <p:nvSpPr>
+          <p:cNvPr id="14" name="Text 12"/>
+          <p:cNvSpPr/>
+          <p:nvPr/>
+        </p:nvSpPr>
+        <p:spPr>
+          <a:xfrm>
+            <a:off x="1380744" y="4526280"/>
+            <a:ext cx="2560320" cy="329184"/>
+          </a:xfrm>
+          <a:prstGeom prst="rect">
+            <a:avLst/>
+          </a:prstGeom>
+          <a:noFill/>
+          <a:ln/>
+        </p:spPr>
+        <p:txBody>
+          <a:bodyPr wrap="square" lIns="0" tIns="0" rIns="0" bIns="0" rtlCol="0" anchor="ctr"/>
+          <a:lstStyle/>
+          <a:p>
+            <a:pPr marL="0" indent="0">
+              <a:buNone/>
+            </a:pPr>
+            <a:r>
+              <a:rPr lang="en-US" sz="2000" b="1" dirty="0">
+                <a:solidFill>
+                  <a:srgbClr val="222831"/>
+                </a:solidFill>
+                <a:latin typeface="TH Sarabun New" pitchFamily="34" charset="0"/>
+                <a:ea typeface="TH Sarabun New" pitchFamily="34" charset="-122"/>
+                <a:cs typeface="TH Sarabun New" pitchFamily="34" charset="-120"/>
+              </a:rPr>
+              <a:t>สไตล์</a:t>
+            </a:r>
+            <a:endParaRPr lang="en-US" sz="2000" dirty="0"/>
+          </a:p>
+        </p:txBody>
+      </p:sp>
+      <p:sp>
+        <p:nvSpPr>
+          <p:cNvPr id="15" name="Text 13"/>
+          <p:cNvSpPr/>
+          <p:nvPr/>
+        </p:nvSpPr>
+        <p:spPr>
+          <a:xfrm>
+            <a:off x="1380744" y="4864608"/>
+            <a:ext cx="2560320" cy="310896"/>
+          </a:xfrm>
+          <a:prstGeom prst="rect">
+            <a:avLst/>
+          </a:prstGeom>
+          <a:noFill/>
+          <a:ln/>
+        </p:spPr>
+        <p:txBody>
+          <a:bodyPr wrap="square" lIns="0" tIns="0" rIns="0" bIns="0" rtlCol="0" anchor="ctr"/>
+          <a:lstStyle/>
+          <a:p>
+            <a:pPr marL="0" indent="0">
+              <a:buNone/>
+            </a:pPr>
+            <a:r>
+              <a:rPr lang="en-US" sz="1400" dirty="0">
+                <a:solidFill>
+                  <a:srgbClr val="00ADB5"/>
+                </a:solidFill>
+                <a:latin typeface="Courier New" pitchFamily="34" charset="0"/>
+                <a:ea typeface="Courier New" pitchFamily="34" charset="-122"/>
+                <a:cs typeface="Courier New" pitchFamily="34" charset="-120"/>
+              </a:rPr>
+              <a:t>uistyleguide.com</a:t>
+            </a:r>
+            <a:endParaRPr lang="en-US" sz="1400" dirty="0"/>
+          </a:p>
+        </p:txBody>
+      </p:sp>
+      <p:sp>
+        <p:nvSpPr>
+          <p:cNvPr id="16" name="Shape 14"/>
+          <p:cNvSpPr/>
+          <p:nvPr/>
+        </p:nvSpPr>
+        <p:spPr>
+          <a:xfrm>
+            <a:off x="4297680" y="4343400"/>
+            <a:ext cx="3566160" cy="1097280"/>
+          </a:xfrm>
+          <a:prstGeom prst="roundRect">
+            <a:avLst>
+              <a:gd name="adj" fmla="val 7500"/>
+            </a:avLst>
+          </a:prstGeom>
+          <a:solidFill>
+            <a:srgbClr val="E8F6F7"/>
+          </a:solidFill>
+          <a:ln w="9525">
+            <a:solidFill>
+              <a:srgbClr val="E8F6F7"/>
+            </a:solidFill>
+            <a:prstDash val="solid"/>
+          </a:ln>
+          <a:effectLst>
+            <a:outerShdw blurRad="101600" dist="12700" dir="5400000" algn="bl" rotWithShape="0">
+              <a:srgbClr val="222831">
+                <a:alpha val="10000"/>
+              </a:srgbClr>
+            </a:outerShdw>
+          </a:effectLst>
+        </p:spPr>
+        <p:txBody>
+          <a:bodyPr/>
+          <a:lstStyle/>
+          <a:p>
+            <a:endParaRPr lang="en-TH" sz="2000"/>
+          </a:p>
+        </p:txBody>
+      </p:sp>
+      <p:sp>
+        <p:nvSpPr>
+          <p:cNvPr id="17" name="Shape 15"/>
+          <p:cNvSpPr/>
+          <p:nvPr/>
+        </p:nvSpPr>
+        <p:spPr>
+          <a:xfrm>
+            <a:off x="4553712" y="4617720"/>
+            <a:ext cx="384048" cy="384048"/>
+          </a:xfrm>
+          <a:prstGeom prst="ellipse">
+            <a:avLst/>
+          </a:prstGeom>
+          <a:solidFill>
+            <a:srgbClr val="00ADB5"/>
+          </a:solidFill>
+          <a:ln w="12700">
+            <a:solidFill>
+              <a:srgbClr val="00ADB5"/>
+            </a:solidFill>
+            <a:prstDash val="solid"/>
+          </a:ln>
+        </p:spPr>
+        <p:txBody>
+          <a:bodyPr/>
+          <a:lstStyle/>
+          <a:p>
+            <a:endParaRPr lang="en-TH" sz="2000"/>
+          </a:p>
+        </p:txBody>
+      </p:sp>
+      <p:sp>
+        <p:nvSpPr>
+          <p:cNvPr id="18" name="Text 16"/>
+          <p:cNvSpPr/>
+          <p:nvPr/>
+        </p:nvSpPr>
+        <p:spPr>
+          <a:xfrm>
+            <a:off x="4553712" y="4617720"/>
+            <a:ext cx="384048" cy="384048"/>
+          </a:xfrm>
+          <a:prstGeom prst="rect">
+            <a:avLst/>
+          </a:prstGeom>
+          <a:noFill/>
+          <a:ln/>
+        </p:spPr>
+        <p:txBody>
+          <a:bodyPr wrap="square" lIns="0" tIns="0" rIns="0" bIns="0" rtlCol="0" anchor="ctr"/>
+          <a:lstStyle/>
+          <a:p>
+            <a:pPr marL="0" indent="0" algn="ctr">
+              <a:buNone/>
+            </a:pPr>
+            <a:r>
+              <a:rPr lang="en-US" sz="1600" b="1" dirty="0">
+                <a:solidFill>
+                  <a:srgbClr val="FFFFFF"/>
+                </a:solidFill>
+                <a:latin typeface="TH Sarabun New" pitchFamily="34" charset="0"/>
+                <a:ea typeface="TH Sarabun New" pitchFamily="34" charset="-122"/>
+                <a:cs typeface="TH Sarabun New" pitchFamily="34" charset="-120"/>
+              </a:rPr>
+              <a:t>2</a:t>
+            </a:r>
+            <a:endParaRPr lang="en-US" sz="1600" dirty="0"/>
+          </a:p>
+        </p:txBody>
+      </p:sp>
+      <p:sp>
+        <p:nvSpPr>
+          <p:cNvPr id="19" name="Text 17"/>
+          <p:cNvSpPr/>
+          <p:nvPr/>
+        </p:nvSpPr>
+        <p:spPr>
+          <a:xfrm>
+            <a:off x="5084064" y="4526280"/>
+            <a:ext cx="2560320" cy="329184"/>
+          </a:xfrm>
+          <a:prstGeom prst="rect">
+            <a:avLst/>
+          </a:prstGeom>
+          <a:noFill/>
+          <a:ln/>
+        </p:spPr>
+        <p:txBody>
+          <a:bodyPr wrap="square" lIns="0" tIns="0" rIns="0" bIns="0" rtlCol="0" anchor="ctr"/>
+          <a:lstStyle/>
+          <a:p>
+            <a:pPr marL="0" indent="0">
+              <a:buNone/>
+            </a:pPr>
+            <a:r>
+              <a:rPr lang="en-US" sz="2000" b="1" dirty="0">
+                <a:solidFill>
+                  <a:srgbClr val="222831"/>
+                </a:solidFill>
+                <a:latin typeface="TH Sarabun New" pitchFamily="34" charset="0"/>
+                <a:ea typeface="TH Sarabun New" pitchFamily="34" charset="-122"/>
+                <a:cs typeface="TH Sarabun New" pitchFamily="34" charset="-120"/>
+              </a:rPr>
+              <a:t>จานสี</a:t>
+            </a:r>
+            <a:endParaRPr lang="en-US" sz="2000" dirty="0"/>
+          </a:p>
+        </p:txBody>
+      </p:sp>
+      <p:sp>
+        <p:nvSpPr>
+          <p:cNvPr id="20" name="Text 18"/>
+          <p:cNvSpPr/>
+          <p:nvPr/>
+        </p:nvSpPr>
+        <p:spPr>
+          <a:xfrm>
+            <a:off x="5084064" y="4864608"/>
+            <a:ext cx="2560320" cy="310896"/>
+          </a:xfrm>
+          <a:prstGeom prst="rect">
+            <a:avLst/>
+          </a:prstGeom>
+          <a:noFill/>
+          <a:ln/>
+        </p:spPr>
+        <p:txBody>
+          <a:bodyPr wrap="square" lIns="0" tIns="0" rIns="0" bIns="0" rtlCol="0" anchor="ctr"/>
+          <a:lstStyle/>
+          <a:p>
+            <a:pPr marL="0" indent="0">
+              <a:buNone/>
+            </a:pPr>
+            <a:r>
+              <a:rPr lang="en-US" sz="1400" dirty="0">
+                <a:solidFill>
+                  <a:srgbClr val="00ADB5"/>
+                </a:solidFill>
+                <a:latin typeface="Courier New" pitchFamily="34" charset="0"/>
+                <a:ea typeface="Courier New" pitchFamily="34" charset="-122"/>
+                <a:cs typeface="Courier New" pitchFamily="34" charset="-120"/>
+              </a:rPr>
+              <a:t>colorhunt.co</a:t>
+            </a:r>
+            <a:endParaRPr lang="en-US" sz="1400" dirty="0"/>
+          </a:p>
+        </p:txBody>
+      </p:sp>
+      <p:sp>
+        <p:nvSpPr>
+          <p:cNvPr id="21" name="Shape 19"/>
+          <p:cNvSpPr/>
+          <p:nvPr/>
+        </p:nvSpPr>
+        <p:spPr>
+          <a:xfrm>
+            <a:off x="8001000" y="4343400"/>
+            <a:ext cx="3566160" cy="1097280"/>
+          </a:xfrm>
+          <a:prstGeom prst="roundRect">
+            <a:avLst>
+              <a:gd name="adj" fmla="val 7500"/>
+            </a:avLst>
+          </a:prstGeom>
+          <a:solidFill>
+            <a:srgbClr val="E8F6F7"/>
+          </a:solidFill>
+          <a:ln w="9525">
+            <a:solidFill>
+              <a:srgbClr val="E8F6F7"/>
+            </a:solidFill>
+            <a:prstDash val="solid"/>
+          </a:ln>
+          <a:effectLst>
+            <a:outerShdw blurRad="101600" dist="12700" dir="5400000" algn="bl" rotWithShape="0">
+              <a:srgbClr val="222831">
+                <a:alpha val="10000"/>
+              </a:srgbClr>
+            </a:outerShdw>
+          </a:effectLst>
+        </p:spPr>
+        <p:txBody>
+          <a:bodyPr/>
+          <a:lstStyle/>
+          <a:p>
+            <a:endParaRPr lang="en-TH" sz="2000"/>
+          </a:p>
+        </p:txBody>
+      </p:sp>
+      <p:sp>
+        <p:nvSpPr>
+          <p:cNvPr id="22" name="Shape 20"/>
+          <p:cNvSpPr/>
+          <p:nvPr/>
+        </p:nvSpPr>
+        <p:spPr>
+          <a:xfrm>
+            <a:off x="8257032" y="4617720"/>
+            <a:ext cx="384048" cy="384048"/>
+          </a:xfrm>
+          <a:prstGeom prst="ellipse">
+            <a:avLst/>
+          </a:prstGeom>
+          <a:solidFill>
+            <a:srgbClr val="00ADB5"/>
+          </a:solidFill>
+          <a:ln w="12700">
+            <a:solidFill>
+              <a:srgbClr val="00ADB5"/>
+            </a:solidFill>
+            <a:prstDash val="solid"/>
+          </a:ln>
+        </p:spPr>
+        <p:txBody>
+          <a:bodyPr/>
+          <a:lstStyle/>
+          <a:p>
+            <a:endParaRPr lang="en-TH" sz="2000"/>
+          </a:p>
+        </p:txBody>
+      </p:sp>
+      <p:sp>
+        <p:nvSpPr>
+          <p:cNvPr id="23" name="Text 21"/>
+          <p:cNvSpPr/>
+          <p:nvPr/>
+        </p:nvSpPr>
+        <p:spPr>
+          <a:xfrm>
+            <a:off x="8257032" y="4617720"/>
+            <a:ext cx="384048" cy="384048"/>
+          </a:xfrm>
+          <a:prstGeom prst="rect">
+            <a:avLst/>
+          </a:prstGeom>
+          <a:noFill/>
+          <a:ln/>
+        </p:spPr>
+        <p:txBody>
+          <a:bodyPr wrap="square" lIns="0" tIns="0" rIns="0" bIns="0" rtlCol="0" anchor="ctr"/>
+          <a:lstStyle/>
+          <a:p>
+            <a:pPr marL="0" indent="0" algn="ctr">
+              <a:buNone/>
+            </a:pPr>
+            <a:r>
+              <a:rPr lang="en-US" sz="1600" b="1" dirty="0">
+                <a:solidFill>
+                  <a:srgbClr val="FFFFFF"/>
+                </a:solidFill>
+                <a:latin typeface="TH Sarabun New" pitchFamily="34" charset="0"/>
+                <a:ea typeface="TH Sarabun New" pitchFamily="34" charset="-122"/>
+                <a:cs typeface="TH Sarabun New" pitchFamily="34" charset="-120"/>
+              </a:rPr>
+              <a:t>3</a:t>
+            </a:r>
+            <a:endParaRPr lang="en-US" sz="1600" dirty="0"/>
+          </a:p>
+        </p:txBody>
+      </p:sp>
+      <p:sp>
+        <p:nvSpPr>
+          <p:cNvPr id="24" name="Text 22"/>
+          <p:cNvSpPr/>
+          <p:nvPr/>
+        </p:nvSpPr>
+        <p:spPr>
+          <a:xfrm>
+            <a:off x="8787384" y="4526280"/>
+            <a:ext cx="2560320" cy="329184"/>
+          </a:xfrm>
+          <a:prstGeom prst="rect">
+            <a:avLst/>
+          </a:prstGeom>
+          <a:noFill/>
+          <a:ln/>
+        </p:spPr>
+        <p:txBody>
+          <a:bodyPr wrap="square" lIns="0" tIns="0" rIns="0" bIns="0" rtlCol="0" anchor="ctr"/>
+          <a:lstStyle/>
+          <a:p>
+            <a:pPr marL="0" indent="0">
+              <a:buNone/>
+            </a:pPr>
+            <a:r>
+              <a:rPr lang="en-US" sz="2000" b="1" dirty="0">
+                <a:solidFill>
+                  <a:srgbClr val="222831"/>
+                </a:solidFill>
+                <a:latin typeface="TH Sarabun New" pitchFamily="34" charset="0"/>
+                <a:ea typeface="TH Sarabun New" pitchFamily="34" charset="-122"/>
+                <a:cs typeface="TH Sarabun New" pitchFamily="34" charset="-120"/>
+              </a:rPr>
+              <a:t>ฟอนต์</a:t>
+            </a:r>
+            <a:endParaRPr lang="en-US" sz="2000" dirty="0"/>
+          </a:p>
+        </p:txBody>
+      </p:sp>
+      <p:sp>
+        <p:nvSpPr>
+          <p:cNvPr id="25" name="Text 23"/>
+          <p:cNvSpPr/>
+          <p:nvPr/>
+        </p:nvSpPr>
+        <p:spPr>
+          <a:xfrm>
+            <a:off x="8787384" y="4864608"/>
+            <a:ext cx="2560320" cy="310896"/>
+          </a:xfrm>
+          <a:prstGeom prst="rect">
+            <a:avLst/>
+          </a:prstGeom>
+          <a:noFill/>
+          <a:ln/>
+        </p:spPr>
+        <p:txBody>
+          <a:bodyPr wrap="square" lIns="0" tIns="0" rIns="0" bIns="0" rtlCol="0" anchor="ctr"/>
+          <a:lstStyle/>
+          <a:p>
+            <a:pPr marL="0" indent="0">
+              <a:buNone/>
+            </a:pPr>
+            <a:r>
+              <a:rPr lang="en-US" sz="1400" dirty="0">
+                <a:solidFill>
+                  <a:srgbClr val="00ADB5"/>
+                </a:solidFill>
+                <a:latin typeface="Courier New" pitchFamily="34" charset="0"/>
+                <a:ea typeface="Courier New" pitchFamily="34" charset="-122"/>
+                <a:cs typeface="Courier New" pitchFamily="34" charset="-120"/>
+              </a:rPr>
+              <a:t>fonts.google.com</a:t>
+            </a:r>
+            <a:endParaRPr lang="en-US" sz="1400" dirty="0"/>
+          </a:p>
+        </p:txBody>
+      </p:sp>
+    </p:spTree>
+  </p:cSld>
+  <p:clrMapOvr>
+    <a:masterClrMapping/>
+  </p:clrMapOvr>
+</p:sld>
+</file>
+
+<file path=ppt/slides/slide21.xml><?xml version="1.0" encoding="utf-8"?>
+<p:sld xmlns:a="http://schemas.openxmlformats.org/drawingml/2006/main" xmlns:r="http://schemas.openxmlformats.org/officeDocument/2006/relationships" xmlns:p="http://schemas.openxmlformats.org/presentationml/2006/main">
   <p:cSld name="Slide 25">
     <p:bg>
       <p:bgPr>
@@ -11727,7 +13211,7 @@
 </p:sld>
 </file>
 
-<file path=ppt/slides/slide21.xml><?xml version="1.0" encoding="utf-8"?>
+<file path=ppt/slides/slide22.xml><?xml version="1.0" encoding="utf-8"?>
 <p:sld xmlns:a="http://schemas.openxmlformats.org/drawingml/2006/main" xmlns:r="http://schemas.openxmlformats.org/officeDocument/2006/relationships" xmlns:p="http://schemas.openxmlformats.org/presentationml/2006/main">
   <p:cSld>
     <p:spTree>
@@ -11887,7 +13371,7 @@
 </p:sld>
 </file>
 
-<file path=ppt/slides/slide22.xml><?xml version="1.0" encoding="utf-8"?>
+<file path=ppt/slides/slide23.xml><?xml version="1.0" encoding="utf-8"?>
 <p:sld xmlns:a="http://schemas.openxmlformats.org/drawingml/2006/main" xmlns:r="http://schemas.openxmlformats.org/officeDocument/2006/relationships" xmlns:p="http://schemas.openxmlformats.org/presentationml/2006/main">
   <p:cSld name="Slide 26">
     <p:bg>
@@ -13355,7 +14839,7 @@
 </p:sld>
 </file>
 
-<file path=ppt/slides/slide23.xml><?xml version="1.0" encoding="utf-8"?>
+<file path=ppt/slides/slide24.xml><?xml version="1.0" encoding="utf-8"?>
 <p:sld xmlns:a="http://schemas.openxmlformats.org/drawingml/2006/main" xmlns:r="http://schemas.openxmlformats.org/officeDocument/2006/relationships" xmlns:p="http://schemas.openxmlformats.org/presentationml/2006/main">
   <p:cSld>
     <p:spTree>
@@ -13450,7 +14934,7 @@
 </p:sld>
 </file>
 
-<file path=ppt/slides/slide24.xml><?xml version="1.0" encoding="utf-8"?>
+<file path=ppt/slides/slide25.xml><?xml version="1.0" encoding="utf-8"?>
 <p:sld xmlns:a="http://schemas.openxmlformats.org/drawingml/2006/main" xmlns:r="http://schemas.openxmlformats.org/officeDocument/2006/relationships" xmlns:p="http://schemas.openxmlformats.org/presentationml/2006/main">
   <p:cSld name="Slide 27">
     <p:bg>
@@ -14839,7 +16323,7 @@
 </p:sld>
 </file>
 
-<file path=ppt/slides/slide25.xml><?xml version="1.0" encoding="utf-8"?>
+<file path=ppt/slides/slide26.xml><?xml version="1.0" encoding="utf-8"?>
 <p:sld xmlns:a="http://schemas.openxmlformats.org/drawingml/2006/main" xmlns:r="http://schemas.openxmlformats.org/officeDocument/2006/relationships" xmlns:p="http://schemas.openxmlformats.org/presentationml/2006/main">
   <p:cSld>
     <p:spTree>
@@ -14934,7 +16418,7 @@
 </p:sld>
 </file>
 
-<file path=ppt/slides/slide26.xml><?xml version="1.0" encoding="utf-8"?>
+<file path=ppt/slides/slide27.xml><?xml version="1.0" encoding="utf-8"?>
 <p:sld xmlns:a="http://schemas.openxmlformats.org/drawingml/2006/main" xmlns:r="http://schemas.openxmlformats.org/officeDocument/2006/relationships" xmlns:p="http://schemas.openxmlformats.org/presentationml/2006/main">
   <p:cSld name="Slide 29">
     <p:bg>
@@ -15155,7 +16639,7 @@
 </p:sld>
 </file>
 
-<file path=ppt/slides/slide27.xml><?xml version="1.0" encoding="utf-8"?>
+<file path=ppt/slides/slide28.xml><?xml version="1.0" encoding="utf-8"?>
 <p:sld xmlns:a="http://schemas.openxmlformats.org/drawingml/2006/main" xmlns:r="http://schemas.openxmlformats.org/officeDocument/2006/relationships" xmlns:p="http://schemas.openxmlformats.org/presentationml/2006/main">
   <p:cSld name="Slide 30">
     <p:bg>
@@ -16287,7 +17771,7 @@
 </p:sld>
 </file>
 
-<file path=ppt/slides/slide28.xml><?xml version="1.0" encoding="utf-8"?>
+<file path=ppt/slides/slide29.xml><?xml version="1.0" encoding="utf-8"?>
 <p:sld xmlns:a="http://schemas.openxmlformats.org/drawingml/2006/main" xmlns:r="http://schemas.openxmlformats.org/officeDocument/2006/relationships" xmlns:p="http://schemas.openxmlformats.org/presentationml/2006/main">
   <p:cSld>
     <p:spTree>
@@ -16340,7 +17824,7 @@
                   <a:srgbClr val="12324A"/>
                 </a:solidFill>
               </a:rPr>
-              <a:t>Requirement → Spec → UI/Data Model → Implementation → Test → Deploy</a:t>
+              <a:t>Requirement → Spec → UI/DB → Implementation → Test → Deploy</a:t>
             </a:r>
             <a:endParaRPr lang="en-US" sz="2800" dirty="0"/>
           </a:p>
@@ -16359,7 +17843,324 @@
 </p:sld>
 </file>
 
-<file path=ppt/slides/slide29.xml><?xml version="1.0" encoding="utf-8"?>
+<file path=ppt/slides/slide3.xml><?xml version="1.0" encoding="utf-8"?>
+<p:sld xmlns:a="http://schemas.openxmlformats.org/drawingml/2006/main" xmlns:r="http://schemas.openxmlformats.org/officeDocument/2006/relationships" xmlns:p="http://schemas.openxmlformats.org/presentationml/2006/main">
+  <p:cSld>
+    <p:spTree>
+      <p:nvGrpSpPr>
+        <p:cNvPr id="1" name=""/>
+        <p:cNvGrpSpPr/>
+        <p:nvPr/>
+      </p:nvGrpSpPr>
+      <p:grpSpPr>
+        <a:xfrm>
+          <a:off x="0" y="0"/>
+          <a:ext cx="0" cy="0"/>
+          <a:chOff x="0" y="0"/>
+          <a:chExt cx="0" cy="0"/>
+        </a:xfrm>
+      </p:grpSpPr>
+      <p:sp>
+        <p:nvSpPr>
+          <p:cNvPr id="3" name="TextBox 2">
+            <a:extLst>
+              <a:ext uri="{FF2B5EF4-FFF2-40B4-BE49-F238E27FC236}">
+                <a16:creationId xmlns:a16="http://schemas.microsoft.com/office/drawing/2014/main" id="{95CF7D5A-DB25-AF93-122B-B0A6F49D6AC3}"/>
+              </a:ext>
+            </a:extLst>
+          </p:cNvPr>
+          <p:cNvSpPr txBox="1"/>
+          <p:nvPr/>
+        </p:nvSpPr>
+        <p:spPr>
+          <a:xfrm>
+            <a:off x="3045342" y="2780689"/>
+            <a:ext cx="6097772" cy="461665"/>
+          </a:xfrm>
+          <a:prstGeom prst="rect">
+            <a:avLst/>
+          </a:prstGeom>
+          <a:noFill/>
+        </p:spPr>
+        <p:txBody>
+          <a:bodyPr wrap="square">
+            <a:spAutoFit/>
+          </a:bodyPr>
+          <a:lstStyle/>
+          <a:p>
+            <a:r>
+              <a:rPr lang="en-TH" sz="2400" b="0" i="0" u="sng">
+                <a:solidFill>
+                  <a:schemeClr val="tx1"/>
+                </a:solidFill>
+                <a:effectLst/>
+                <a:latin typeface="+mn-lt"/>
+                <a:hlinkClick r:id="rId2"/>
+              </a:rPr>
+              <a:t>https://nodejs.org</a:t>
+            </a:r>
+            <a:r>
+              <a:rPr lang="en-TH" sz="2400" b="0" i="0">
+                <a:solidFill>
+                  <a:schemeClr val="tx1"/>
+                </a:solidFill>
+                <a:effectLst/>
+                <a:latin typeface="+mn-lt"/>
+              </a:rPr>
+              <a:t> </a:t>
+            </a:r>
+            <a:endParaRPr lang="en-TH" sz="2400"/>
+          </a:p>
+        </p:txBody>
+      </p:sp>
+      <p:sp>
+        <p:nvSpPr>
+          <p:cNvPr id="5" name="TextBox 4">
+            <a:extLst>
+              <a:ext uri="{FF2B5EF4-FFF2-40B4-BE49-F238E27FC236}">
+                <a16:creationId xmlns:a16="http://schemas.microsoft.com/office/drawing/2014/main" id="{64536CF3-0596-0AEF-18B6-DAE494C279EB}"/>
+              </a:ext>
+            </a:extLst>
+          </p:cNvPr>
+          <p:cNvSpPr txBox="1"/>
+          <p:nvPr/>
+        </p:nvSpPr>
+        <p:spPr>
+          <a:xfrm>
+            <a:off x="3045342" y="3615071"/>
+            <a:ext cx="6097772" cy="461665"/>
+          </a:xfrm>
+          <a:prstGeom prst="rect">
+            <a:avLst/>
+          </a:prstGeom>
+          <a:noFill/>
+        </p:spPr>
+        <p:txBody>
+          <a:bodyPr wrap="square">
+            <a:spAutoFit/>
+          </a:bodyPr>
+          <a:lstStyle/>
+          <a:p>
+            <a:r>
+              <a:rPr lang="en-TH" sz="2400" b="0" i="0" u="sng">
+                <a:solidFill>
+                  <a:schemeClr val="tx1"/>
+                </a:solidFill>
+                <a:effectLst/>
+                <a:latin typeface="+mn-lt"/>
+                <a:hlinkClick r:id="rId3"/>
+              </a:rPr>
+              <a:t>https://git-scm.com</a:t>
+            </a:r>
+            <a:endParaRPr lang="en-TH" sz="2400"/>
+          </a:p>
+        </p:txBody>
+      </p:sp>
+      <p:sp>
+        <p:nvSpPr>
+          <p:cNvPr id="7" name="TextBox 6">
+            <a:extLst>
+              <a:ext uri="{FF2B5EF4-FFF2-40B4-BE49-F238E27FC236}">
+                <a16:creationId xmlns:a16="http://schemas.microsoft.com/office/drawing/2014/main" id="{047D6457-44D1-3A3F-BE33-1D683B8C6047}"/>
+              </a:ext>
+            </a:extLst>
+          </p:cNvPr>
+          <p:cNvSpPr txBox="1"/>
+          <p:nvPr/>
+        </p:nvSpPr>
+        <p:spPr>
+          <a:xfrm>
+            <a:off x="3045342" y="3978821"/>
+            <a:ext cx="6097772" cy="461665"/>
+          </a:xfrm>
+          <a:prstGeom prst="rect">
+            <a:avLst/>
+          </a:prstGeom>
+          <a:noFill/>
+        </p:spPr>
+        <p:txBody>
+          <a:bodyPr wrap="square">
+            <a:spAutoFit/>
+          </a:bodyPr>
+          <a:lstStyle/>
+          <a:p>
+            <a:r>
+              <a:rPr lang="en-TH" sz="2400" b="0" i="0" u="sng">
+                <a:solidFill>
+                  <a:schemeClr val="tx1"/>
+                </a:solidFill>
+                <a:effectLst/>
+                <a:latin typeface="+mn-lt"/>
+                <a:hlinkClick r:id="rId4"/>
+              </a:rPr>
+              <a:t>https://github.com</a:t>
+            </a:r>
+            <a:r>
+              <a:rPr lang="en-TH" sz="2400" b="0" i="0">
+                <a:solidFill>
+                  <a:schemeClr val="tx1"/>
+                </a:solidFill>
+                <a:effectLst/>
+                <a:latin typeface="+mn-lt"/>
+              </a:rPr>
+              <a:t> </a:t>
+            </a:r>
+            <a:endParaRPr lang="en-TH" sz="2400"/>
+          </a:p>
+        </p:txBody>
+      </p:sp>
+      <p:sp>
+        <p:nvSpPr>
+          <p:cNvPr id="9" name="TextBox 8">
+            <a:extLst>
+              <a:ext uri="{FF2B5EF4-FFF2-40B4-BE49-F238E27FC236}">
+                <a16:creationId xmlns:a16="http://schemas.microsoft.com/office/drawing/2014/main" id="{F7C6C22A-0D40-8B4F-849B-10A93C1D1698}"/>
+              </a:ext>
+            </a:extLst>
+          </p:cNvPr>
+          <p:cNvSpPr txBox="1"/>
+          <p:nvPr/>
+        </p:nvSpPr>
+        <p:spPr>
+          <a:xfrm>
+            <a:off x="3045342" y="4874753"/>
+            <a:ext cx="6097772" cy="461665"/>
+          </a:xfrm>
+          <a:prstGeom prst="rect">
+            <a:avLst/>
+          </a:prstGeom>
+          <a:noFill/>
+        </p:spPr>
+        <p:txBody>
+          <a:bodyPr wrap="square">
+            <a:spAutoFit/>
+          </a:bodyPr>
+          <a:lstStyle/>
+          <a:p>
+            <a:r>
+              <a:rPr lang="en-TH" sz="2400" b="0" i="0" u="sng">
+                <a:solidFill>
+                  <a:schemeClr val="tx1"/>
+                </a:solidFill>
+                <a:effectLst/>
+                <a:latin typeface="+mn-lt"/>
+                <a:hlinkClick r:id="rId5"/>
+              </a:rPr>
+              <a:t>https://supabase.com</a:t>
+            </a:r>
+            <a:r>
+              <a:rPr lang="en-TH" sz="2400" b="0" i="0">
+                <a:solidFill>
+                  <a:schemeClr val="tx1"/>
+                </a:solidFill>
+                <a:effectLst/>
+                <a:latin typeface="+mn-lt"/>
+              </a:rPr>
+              <a:t> </a:t>
+            </a:r>
+            <a:endParaRPr lang="en-TH" sz="2400"/>
+          </a:p>
+        </p:txBody>
+      </p:sp>
+      <p:sp>
+        <p:nvSpPr>
+          <p:cNvPr id="11" name="TextBox 10">
+            <a:extLst>
+              <a:ext uri="{FF2B5EF4-FFF2-40B4-BE49-F238E27FC236}">
+                <a16:creationId xmlns:a16="http://schemas.microsoft.com/office/drawing/2014/main" id="{E0B0C1BD-EB80-EFF8-9E77-F8E98E193FA2}"/>
+              </a:ext>
+            </a:extLst>
+          </p:cNvPr>
+          <p:cNvSpPr txBox="1"/>
+          <p:nvPr/>
+        </p:nvSpPr>
+        <p:spPr>
+          <a:xfrm>
+            <a:off x="3045342" y="1946307"/>
+            <a:ext cx="6097772" cy="461665"/>
+          </a:xfrm>
+          <a:prstGeom prst="rect">
+            <a:avLst/>
+          </a:prstGeom>
+          <a:noFill/>
+        </p:spPr>
+        <p:txBody>
+          <a:bodyPr wrap="square">
+            <a:spAutoFit/>
+          </a:bodyPr>
+          <a:lstStyle/>
+          <a:p>
+            <a:r>
+              <a:rPr lang="en-TH" sz="2400" b="0" i="0" u="sng">
+                <a:solidFill>
+                  <a:schemeClr val="tx1"/>
+                </a:solidFill>
+                <a:effectLst/>
+                <a:latin typeface="+mn-lt"/>
+                <a:hlinkClick r:id="rId6"/>
+              </a:rPr>
+              <a:t>https://antigravity.google/download</a:t>
+            </a:r>
+            <a:endParaRPr lang="en-TH" sz="2400"/>
+          </a:p>
+        </p:txBody>
+      </p:sp>
+      <p:sp>
+        <p:nvSpPr>
+          <p:cNvPr id="12" name="TextBox 11">
+            <a:extLst>
+              <a:ext uri="{FF2B5EF4-FFF2-40B4-BE49-F238E27FC236}">
+                <a16:creationId xmlns:a16="http://schemas.microsoft.com/office/drawing/2014/main" id="{20E47F86-9AFA-F635-C8EA-C3A0BA474F52}"/>
+              </a:ext>
+            </a:extLst>
+          </p:cNvPr>
+          <p:cNvSpPr txBox="1"/>
+          <p:nvPr/>
+        </p:nvSpPr>
+        <p:spPr>
+          <a:xfrm>
+            <a:off x="3045342" y="1127051"/>
+            <a:ext cx="4121002" cy="584775"/>
+          </a:xfrm>
+          <a:prstGeom prst="rect">
+            <a:avLst/>
+          </a:prstGeom>
+          <a:noFill/>
+        </p:spPr>
+        <p:txBody>
+          <a:bodyPr wrap="square" rtlCol="0">
+            <a:spAutoFit/>
+          </a:bodyPr>
+          <a:lstStyle/>
+          <a:p>
+            <a:r>
+              <a:rPr lang="th-TH" sz="3200">
+                <a:latin typeface="TH Sarabun New" panose="020B0500040200020003" pitchFamily="34" charset="-34"/>
+                <a:cs typeface="TH Sarabun New" panose="020B0500040200020003" pitchFamily="34" charset="-34"/>
+              </a:rPr>
+              <a:t>เครื่องมือที่ใช้</a:t>
+            </a:r>
+            <a:endParaRPr lang="en-TH" sz="3200">
+              <a:latin typeface="TH Sarabun New" panose="020B0500040200020003" pitchFamily="34" charset="-34"/>
+              <a:cs typeface="TH Sarabun New" panose="020B0500040200020003" pitchFamily="34" charset="-34"/>
+            </a:endParaRPr>
+          </a:p>
+        </p:txBody>
+      </p:sp>
+    </p:spTree>
+    <p:extLst>
+      <p:ext uri="{BB962C8B-B14F-4D97-AF65-F5344CB8AC3E}">
+        <p14:creationId xmlns:p14="http://schemas.microsoft.com/office/powerpoint/2010/main" val="2092749852"/>
+      </p:ext>
+    </p:extLst>
+  </p:cSld>
+  <p:clrMapOvr>
+    <a:masterClrMapping/>
+  </p:clrMapOvr>
+</p:sld>
+</file>
+
+<file path=ppt/slides/slide30.xml><?xml version="1.0" encoding="utf-8"?>
 <p:sld xmlns:a="http://schemas.openxmlformats.org/drawingml/2006/main" xmlns:r="http://schemas.openxmlformats.org/officeDocument/2006/relationships" xmlns:p="http://schemas.openxmlformats.org/presentationml/2006/main">
   <p:cSld name="Slide 37">
     <p:bg>
@@ -17269,7 +19070,889 @@
 </p:sld>
 </file>
 
-<file path=ppt/slides/slide3.xml><?xml version="1.0" encoding="utf-8"?>
+<file path=ppt/slides/slide31.xml><?xml version="1.0" encoding="utf-8"?>
+<p:sld xmlns:a="http://schemas.openxmlformats.org/drawingml/2006/main" xmlns:r="http://schemas.openxmlformats.org/officeDocument/2006/relationships" xmlns:p="http://schemas.openxmlformats.org/presentationml/2006/main">
+  <p:cSld name="Slide 38">
+    <p:bg>
+      <p:bgPr>
+        <a:solidFill>
+          <a:srgbClr val="222831"/>
+        </a:solidFill>
+        <a:effectLst/>
+      </p:bgPr>
+    </p:bg>
+    <p:spTree>
+      <p:nvGrpSpPr>
+        <p:cNvPr id="1" name=""/>
+        <p:cNvGrpSpPr/>
+        <p:nvPr/>
+      </p:nvGrpSpPr>
+      <p:grpSpPr>
+        <a:xfrm>
+          <a:off x="0" y="0"/>
+          <a:ext cx="0" cy="0"/>
+          <a:chOff x="0" y="0"/>
+          <a:chExt cx="0" cy="0"/>
+        </a:xfrm>
+      </p:grpSpPr>
+      <p:sp>
+        <p:nvSpPr>
+          <p:cNvPr id="2" name="Text 0"/>
+          <p:cNvSpPr/>
+          <p:nvPr/>
+        </p:nvSpPr>
+        <p:spPr>
+          <a:xfrm>
+            <a:off x="11018520" y="6263640"/>
+            <a:ext cx="548640" cy="274320"/>
+          </a:xfrm>
+          <a:prstGeom prst="rect">
+            <a:avLst/>
+          </a:prstGeom>
+          <a:noFill/>
+          <a:ln/>
+        </p:spPr>
+        <p:txBody>
+          <a:bodyPr wrap="square" lIns="0" tIns="0" rIns="0" bIns="0" rtlCol="0" anchor="ctr"/>
+          <a:lstStyle/>
+          <a:p>
+            <a:pPr marL="0" indent="0" algn="r">
+              <a:buNone/>
+            </a:pPr>
+            <a:r>
+              <a:rPr lang="en-US" sz="1200" dirty="0">
+                <a:solidFill>
+                  <a:srgbClr val="9AA3AD"/>
+                </a:solidFill>
+                <a:latin typeface="TH Sarabun New" pitchFamily="34" charset="0"/>
+                <a:ea typeface="TH Sarabun New" pitchFamily="34" charset="-122"/>
+                <a:cs typeface="TH Sarabun New" pitchFamily="34" charset="-120"/>
+              </a:rPr>
+              <a:t>38</a:t>
+            </a:r>
+            <a:endParaRPr lang="en-US" sz="1200" dirty="0"/>
+          </a:p>
+        </p:txBody>
+      </p:sp>
+      <p:sp>
+        <p:nvSpPr>
+          <p:cNvPr id="3" name="Text 1"/>
+          <p:cNvSpPr/>
+          <p:nvPr/>
+        </p:nvSpPr>
+        <p:spPr>
+          <a:xfrm>
+            <a:off x="594360" y="685800"/>
+            <a:ext cx="10972800" cy="566928"/>
+          </a:xfrm>
+          <a:prstGeom prst="rect">
+            <a:avLst/>
+          </a:prstGeom>
+          <a:noFill/>
+          <a:ln/>
+        </p:spPr>
+        <p:txBody>
+          <a:bodyPr wrap="square" lIns="0" tIns="0" rIns="0" bIns="0" rtlCol="0" anchor="ctr"/>
+          <a:lstStyle/>
+          <a:p>
+            <a:pPr marL="0" indent="0">
+              <a:buNone/>
+            </a:pPr>
+            <a:r>
+              <a:rPr lang="en-US" sz="3400" b="1" dirty="0">
+                <a:solidFill>
+                  <a:srgbClr val="FFFFFF"/>
+                </a:solidFill>
+                <a:latin typeface="TH Sarabun New" pitchFamily="34" charset="0"/>
+                <a:ea typeface="TH Sarabun New" pitchFamily="34" charset="-122"/>
+                <a:cs typeface="TH Sarabun New" pitchFamily="34" charset="-120"/>
+              </a:rPr>
+              <a:t>สรุปสิ่งที่ได้เรียนรู้</a:t>
+            </a:r>
+            <a:endParaRPr lang="en-US" sz="3400" dirty="0"/>
+          </a:p>
+        </p:txBody>
+      </p:sp>
+      <p:sp>
+        <p:nvSpPr>
+          <p:cNvPr id="4" name="Shape 2"/>
+          <p:cNvSpPr/>
+          <p:nvPr/>
+        </p:nvSpPr>
+        <p:spPr>
+          <a:xfrm>
+            <a:off x="594360" y="1481328"/>
+            <a:ext cx="10972800" cy="713232"/>
+          </a:xfrm>
+          <a:prstGeom prst="roundRect">
+            <a:avLst>
+              <a:gd name="adj" fmla="val 11538"/>
+            </a:avLst>
+          </a:prstGeom>
+          <a:solidFill>
+            <a:srgbClr val="2E3742"/>
+          </a:solidFill>
+          <a:ln w="12700">
+            <a:solidFill>
+              <a:srgbClr val="2E3742"/>
+            </a:solidFill>
+            <a:prstDash val="solid"/>
+          </a:ln>
+        </p:spPr>
+        <p:txBody>
+          <a:bodyPr/>
+          <a:lstStyle/>
+          <a:p>
+            <a:endParaRPr lang="en-TH"/>
+          </a:p>
+        </p:txBody>
+      </p:sp>
+      <p:sp>
+        <p:nvSpPr>
+          <p:cNvPr id="5" name="Shape 3"/>
+          <p:cNvSpPr/>
+          <p:nvPr/>
+        </p:nvSpPr>
+        <p:spPr>
+          <a:xfrm>
+            <a:off x="832104" y="1655064"/>
+            <a:ext cx="365760" cy="365760"/>
+          </a:xfrm>
+          <a:prstGeom prst="ellipse">
+            <a:avLst/>
+          </a:prstGeom>
+          <a:solidFill>
+            <a:srgbClr val="00ADB5"/>
+          </a:solidFill>
+          <a:ln w="12700">
+            <a:solidFill>
+              <a:srgbClr val="00ADB5"/>
+            </a:solidFill>
+            <a:prstDash val="solid"/>
+          </a:ln>
+        </p:spPr>
+        <p:txBody>
+          <a:bodyPr/>
+          <a:lstStyle/>
+          <a:p>
+            <a:endParaRPr lang="en-TH"/>
+          </a:p>
+        </p:txBody>
+      </p:sp>
+      <p:sp>
+        <p:nvSpPr>
+          <p:cNvPr id="6" name="Text 4"/>
+          <p:cNvSpPr/>
+          <p:nvPr/>
+        </p:nvSpPr>
+        <p:spPr>
+          <a:xfrm>
+            <a:off x="832104" y="1655064"/>
+            <a:ext cx="365760" cy="365760"/>
+          </a:xfrm>
+          <a:prstGeom prst="rect">
+            <a:avLst/>
+          </a:prstGeom>
+          <a:noFill/>
+          <a:ln/>
+        </p:spPr>
+        <p:txBody>
+          <a:bodyPr wrap="square" lIns="0" tIns="0" rIns="0" bIns="0" rtlCol="0" anchor="ctr"/>
+          <a:lstStyle/>
+          <a:p>
+            <a:pPr marL="0" indent="0" algn="ctr">
+              <a:buNone/>
+            </a:pPr>
+            <a:r>
+              <a:rPr lang="en-US" sz="1500" b="1" dirty="0">
+                <a:solidFill>
+                  <a:srgbClr val="FFFFFF"/>
+                </a:solidFill>
+                <a:latin typeface="TH Sarabun New" pitchFamily="34" charset="0"/>
+                <a:ea typeface="TH Sarabun New" pitchFamily="34" charset="-122"/>
+                <a:cs typeface="TH Sarabun New" pitchFamily="34" charset="-120"/>
+              </a:rPr>
+              <a:t>1</a:t>
+            </a:r>
+            <a:endParaRPr lang="en-US" sz="1500" dirty="0"/>
+          </a:p>
+        </p:txBody>
+      </p:sp>
+      <p:sp>
+        <p:nvSpPr>
+          <p:cNvPr id="7" name="Text 5"/>
+          <p:cNvSpPr/>
+          <p:nvPr/>
+        </p:nvSpPr>
+        <p:spPr>
+          <a:xfrm>
+            <a:off x="1344168" y="1481328"/>
+            <a:ext cx="4206240" cy="713232"/>
+          </a:xfrm>
+          <a:prstGeom prst="rect">
+            <a:avLst/>
+          </a:prstGeom>
+          <a:noFill/>
+          <a:ln/>
+        </p:spPr>
+        <p:txBody>
+          <a:bodyPr wrap="square" lIns="0" tIns="0" rIns="0" bIns="0" rtlCol="0" anchor="ctr"/>
+          <a:lstStyle/>
+          <a:p>
+            <a:pPr marL="0" indent="0">
+              <a:buNone/>
+            </a:pPr>
+            <a:r>
+              <a:rPr lang="en-US" sz="1750" b="1" dirty="0">
+                <a:solidFill>
+                  <a:srgbClr val="FFFFFF"/>
+                </a:solidFill>
+                <a:latin typeface="TH Sarabun New" pitchFamily="34" charset="0"/>
+                <a:ea typeface="TH Sarabun New" pitchFamily="34" charset="-122"/>
+                <a:cs typeface="TH Sarabun New" pitchFamily="34" charset="-120"/>
+              </a:rPr>
+              <a:t>เขียนสเปกก่อน แล้วค่อยสั่ง</a:t>
+            </a:r>
+            <a:endParaRPr lang="en-US" sz="1750" dirty="0"/>
+          </a:p>
+        </p:txBody>
+      </p:sp>
+      <p:sp>
+        <p:nvSpPr>
+          <p:cNvPr id="8" name="Text 6"/>
+          <p:cNvSpPr/>
+          <p:nvPr/>
+        </p:nvSpPr>
+        <p:spPr>
+          <a:xfrm>
+            <a:off x="5623560" y="1481328"/>
+            <a:ext cx="5669280" cy="713232"/>
+          </a:xfrm>
+          <a:prstGeom prst="rect">
+            <a:avLst/>
+          </a:prstGeom>
+          <a:noFill/>
+          <a:ln/>
+        </p:spPr>
+        <p:txBody>
+          <a:bodyPr wrap="square" lIns="0" tIns="0" rIns="0" bIns="0" rtlCol="0" anchor="ctr"/>
+          <a:lstStyle/>
+          <a:p>
+            <a:pPr marL="0" indent="0">
+              <a:buNone/>
+            </a:pPr>
+            <a:r>
+              <a:rPr lang="en-US" sz="1550" dirty="0">
+                <a:solidFill>
+                  <a:srgbClr val="9FB0B3"/>
+                </a:solidFill>
+                <a:latin typeface="TH Sarabun New" pitchFamily="34" charset="0"/>
+                <a:ea typeface="TH Sarabun New" pitchFamily="34" charset="-122"/>
+                <a:cs typeface="TH Sarabun New" pitchFamily="34" charset="-120"/>
+              </a:rPr>
+              <a:t>SPEC ไฟล์เดียว + prompt สั้นที่อ้างหมายเลขหัวข้อ</a:t>
+            </a:r>
+            <a:endParaRPr lang="en-US" sz="1550" dirty="0"/>
+          </a:p>
+        </p:txBody>
+      </p:sp>
+      <p:sp>
+        <p:nvSpPr>
+          <p:cNvPr id="9" name="Shape 7"/>
+          <p:cNvSpPr/>
+          <p:nvPr/>
+        </p:nvSpPr>
+        <p:spPr>
+          <a:xfrm>
+            <a:off x="594360" y="2322576"/>
+            <a:ext cx="10972800" cy="713232"/>
+          </a:xfrm>
+          <a:prstGeom prst="roundRect">
+            <a:avLst>
+              <a:gd name="adj" fmla="val 11538"/>
+            </a:avLst>
+          </a:prstGeom>
+          <a:solidFill>
+            <a:srgbClr val="2E3742"/>
+          </a:solidFill>
+          <a:ln w="12700">
+            <a:solidFill>
+              <a:srgbClr val="2E3742"/>
+            </a:solidFill>
+            <a:prstDash val="solid"/>
+          </a:ln>
+        </p:spPr>
+        <p:txBody>
+          <a:bodyPr/>
+          <a:lstStyle/>
+          <a:p>
+            <a:endParaRPr lang="en-TH"/>
+          </a:p>
+        </p:txBody>
+      </p:sp>
+      <p:sp>
+        <p:nvSpPr>
+          <p:cNvPr id="10" name="Shape 8"/>
+          <p:cNvSpPr/>
+          <p:nvPr/>
+        </p:nvSpPr>
+        <p:spPr>
+          <a:xfrm>
+            <a:off x="832104" y="2496312"/>
+            <a:ext cx="365760" cy="365760"/>
+          </a:xfrm>
+          <a:prstGeom prst="ellipse">
+            <a:avLst/>
+          </a:prstGeom>
+          <a:solidFill>
+            <a:srgbClr val="00ADB5"/>
+          </a:solidFill>
+          <a:ln w="12700">
+            <a:solidFill>
+              <a:srgbClr val="00ADB5"/>
+            </a:solidFill>
+            <a:prstDash val="solid"/>
+          </a:ln>
+        </p:spPr>
+        <p:txBody>
+          <a:bodyPr/>
+          <a:lstStyle/>
+          <a:p>
+            <a:endParaRPr lang="en-TH"/>
+          </a:p>
+        </p:txBody>
+      </p:sp>
+      <p:sp>
+        <p:nvSpPr>
+          <p:cNvPr id="11" name="Text 9"/>
+          <p:cNvSpPr/>
+          <p:nvPr/>
+        </p:nvSpPr>
+        <p:spPr>
+          <a:xfrm>
+            <a:off x="832104" y="2496312"/>
+            <a:ext cx="365760" cy="365760"/>
+          </a:xfrm>
+          <a:prstGeom prst="rect">
+            <a:avLst/>
+          </a:prstGeom>
+          <a:noFill/>
+          <a:ln/>
+        </p:spPr>
+        <p:txBody>
+          <a:bodyPr wrap="square" lIns="0" tIns="0" rIns="0" bIns="0" rtlCol="0" anchor="ctr"/>
+          <a:lstStyle/>
+          <a:p>
+            <a:pPr marL="0" indent="0" algn="ctr">
+              <a:buNone/>
+            </a:pPr>
+            <a:r>
+              <a:rPr lang="en-US" sz="1500" b="1" dirty="0">
+                <a:solidFill>
+                  <a:srgbClr val="FFFFFF"/>
+                </a:solidFill>
+                <a:latin typeface="TH Sarabun New" pitchFamily="34" charset="0"/>
+                <a:ea typeface="TH Sarabun New" pitchFamily="34" charset="-122"/>
+                <a:cs typeface="TH Sarabun New" pitchFamily="34" charset="-120"/>
+              </a:rPr>
+              <a:t>2</a:t>
+            </a:r>
+            <a:endParaRPr lang="en-US" sz="1500" dirty="0"/>
+          </a:p>
+        </p:txBody>
+      </p:sp>
+      <p:sp>
+        <p:nvSpPr>
+          <p:cNvPr id="12" name="Text 10"/>
+          <p:cNvSpPr/>
+          <p:nvPr/>
+        </p:nvSpPr>
+        <p:spPr>
+          <a:xfrm>
+            <a:off x="1344168" y="2322576"/>
+            <a:ext cx="4206240" cy="713232"/>
+          </a:xfrm>
+          <a:prstGeom prst="rect">
+            <a:avLst/>
+          </a:prstGeom>
+          <a:noFill/>
+          <a:ln/>
+        </p:spPr>
+        <p:txBody>
+          <a:bodyPr wrap="square" lIns="0" tIns="0" rIns="0" bIns="0" rtlCol="0" anchor="ctr"/>
+          <a:lstStyle/>
+          <a:p>
+            <a:pPr marL="0" indent="0">
+              <a:buNone/>
+            </a:pPr>
+            <a:r>
+              <a:rPr lang="en-US" sz="1750" b="1" dirty="0">
+                <a:solidFill>
+                  <a:srgbClr val="FFFFFF"/>
+                </a:solidFill>
+                <a:latin typeface="TH Sarabun New" pitchFamily="34" charset="0"/>
+                <a:ea typeface="TH Sarabun New" pitchFamily="34" charset="-122"/>
+                <a:cs typeface="TH Sarabun New" pitchFamily="34" charset="-120"/>
+              </a:rPr>
+              <a:t>ออกแบบก่อนสร้าง</a:t>
+            </a:r>
+            <a:endParaRPr lang="en-US" sz="1750" dirty="0"/>
+          </a:p>
+        </p:txBody>
+      </p:sp>
+      <p:sp>
+        <p:nvSpPr>
+          <p:cNvPr id="13" name="Text 11"/>
+          <p:cNvSpPr/>
+          <p:nvPr/>
+        </p:nvSpPr>
+        <p:spPr>
+          <a:xfrm>
+            <a:off x="5623560" y="2322576"/>
+            <a:ext cx="5669280" cy="713232"/>
+          </a:xfrm>
+          <a:prstGeom prst="rect">
+            <a:avLst/>
+          </a:prstGeom>
+          <a:noFill/>
+          <a:ln/>
+        </p:spPr>
+        <p:txBody>
+          <a:bodyPr wrap="square" lIns="0" tIns="0" rIns="0" bIns="0" rtlCol="0" anchor="ctr"/>
+          <a:lstStyle/>
+          <a:p>
+            <a:pPr marL="0" indent="0">
+              <a:buNone/>
+            </a:pPr>
+            <a:r>
+              <a:rPr lang="en-US" sz="1550" dirty="0">
+                <a:solidFill>
+                  <a:srgbClr val="9FB0B3"/>
+                </a:solidFill>
+                <a:latin typeface="TH Sarabun New" pitchFamily="34" charset="0"/>
+                <a:ea typeface="TH Sarabun New" pitchFamily="34" charset="-122"/>
+                <a:cs typeface="TH Sarabun New" pitchFamily="34" charset="-120"/>
+              </a:rPr>
+              <a:t>สไตล์จาก uistyleguide · สีจาก colorhunt · ฟอนต์จาก Google Fonts</a:t>
+            </a:r>
+            <a:endParaRPr lang="en-US" sz="1550" dirty="0"/>
+          </a:p>
+        </p:txBody>
+      </p:sp>
+      <p:sp>
+        <p:nvSpPr>
+          <p:cNvPr id="14" name="Shape 12"/>
+          <p:cNvSpPr/>
+          <p:nvPr/>
+        </p:nvSpPr>
+        <p:spPr>
+          <a:xfrm>
+            <a:off x="594360" y="3163824"/>
+            <a:ext cx="10972800" cy="713232"/>
+          </a:xfrm>
+          <a:prstGeom prst="roundRect">
+            <a:avLst>
+              <a:gd name="adj" fmla="val 11538"/>
+            </a:avLst>
+          </a:prstGeom>
+          <a:solidFill>
+            <a:srgbClr val="2E3742"/>
+          </a:solidFill>
+          <a:ln w="12700">
+            <a:solidFill>
+              <a:srgbClr val="2E3742"/>
+            </a:solidFill>
+            <a:prstDash val="solid"/>
+          </a:ln>
+        </p:spPr>
+        <p:txBody>
+          <a:bodyPr/>
+          <a:lstStyle/>
+          <a:p>
+            <a:endParaRPr lang="en-TH"/>
+          </a:p>
+        </p:txBody>
+      </p:sp>
+      <p:sp>
+        <p:nvSpPr>
+          <p:cNvPr id="15" name="Shape 13"/>
+          <p:cNvSpPr/>
+          <p:nvPr/>
+        </p:nvSpPr>
+        <p:spPr>
+          <a:xfrm>
+            <a:off x="832104" y="3337560"/>
+            <a:ext cx="365760" cy="365760"/>
+          </a:xfrm>
+          <a:prstGeom prst="ellipse">
+            <a:avLst/>
+          </a:prstGeom>
+          <a:solidFill>
+            <a:srgbClr val="00ADB5"/>
+          </a:solidFill>
+          <a:ln w="12700">
+            <a:solidFill>
+              <a:srgbClr val="00ADB5"/>
+            </a:solidFill>
+            <a:prstDash val="solid"/>
+          </a:ln>
+        </p:spPr>
+        <p:txBody>
+          <a:bodyPr/>
+          <a:lstStyle/>
+          <a:p>
+            <a:endParaRPr lang="en-TH"/>
+          </a:p>
+        </p:txBody>
+      </p:sp>
+      <p:sp>
+        <p:nvSpPr>
+          <p:cNvPr id="16" name="Text 14"/>
+          <p:cNvSpPr/>
+          <p:nvPr/>
+        </p:nvSpPr>
+        <p:spPr>
+          <a:xfrm>
+            <a:off x="832104" y="3337560"/>
+            <a:ext cx="365760" cy="365760"/>
+          </a:xfrm>
+          <a:prstGeom prst="rect">
+            <a:avLst/>
+          </a:prstGeom>
+          <a:noFill/>
+          <a:ln/>
+        </p:spPr>
+        <p:txBody>
+          <a:bodyPr wrap="square" lIns="0" tIns="0" rIns="0" bIns="0" rtlCol="0" anchor="ctr"/>
+          <a:lstStyle/>
+          <a:p>
+            <a:pPr marL="0" indent="0" algn="ctr">
+              <a:buNone/>
+            </a:pPr>
+            <a:r>
+              <a:rPr lang="en-US" sz="1500" b="1" dirty="0">
+                <a:solidFill>
+                  <a:srgbClr val="FFFFFF"/>
+                </a:solidFill>
+                <a:latin typeface="TH Sarabun New" pitchFamily="34" charset="0"/>
+                <a:ea typeface="TH Sarabun New" pitchFamily="34" charset="-122"/>
+                <a:cs typeface="TH Sarabun New" pitchFamily="34" charset="-120"/>
+              </a:rPr>
+              <a:t>3</a:t>
+            </a:r>
+            <a:endParaRPr lang="en-US" sz="1500" dirty="0"/>
+          </a:p>
+        </p:txBody>
+      </p:sp>
+      <p:sp>
+        <p:nvSpPr>
+          <p:cNvPr id="17" name="Text 15"/>
+          <p:cNvSpPr/>
+          <p:nvPr/>
+        </p:nvSpPr>
+        <p:spPr>
+          <a:xfrm>
+            <a:off x="1344168" y="3163824"/>
+            <a:ext cx="4206240" cy="713232"/>
+          </a:xfrm>
+          <a:prstGeom prst="rect">
+            <a:avLst/>
+          </a:prstGeom>
+          <a:noFill/>
+          <a:ln/>
+        </p:spPr>
+        <p:txBody>
+          <a:bodyPr wrap="square" lIns="0" tIns="0" rIns="0" bIns="0" rtlCol="0" anchor="ctr"/>
+          <a:lstStyle/>
+          <a:p>
+            <a:pPr marL="0" indent="0">
+              <a:buNone/>
+            </a:pPr>
+            <a:r>
+              <a:rPr lang="en-US" sz="1750" b="1" dirty="0">
+                <a:solidFill>
+                  <a:srgbClr val="FFFFFF"/>
+                </a:solidFill>
+                <a:latin typeface="TH Sarabun New" pitchFamily="34" charset="0"/>
+                <a:ea typeface="TH Sarabun New" pitchFamily="34" charset="-122"/>
+                <a:cs typeface="TH Sarabun New" pitchFamily="34" charset="-120"/>
+              </a:rPr>
+              <a:t>สร้างทีละชั้น ตรวจทีละชั้น</a:t>
+            </a:r>
+            <a:endParaRPr lang="en-US" sz="1750" dirty="0"/>
+          </a:p>
+        </p:txBody>
+      </p:sp>
+      <p:sp>
+        <p:nvSpPr>
+          <p:cNvPr id="18" name="Text 16"/>
+          <p:cNvSpPr/>
+          <p:nvPr/>
+        </p:nvSpPr>
+        <p:spPr>
+          <a:xfrm>
+            <a:off x="5623560" y="3163824"/>
+            <a:ext cx="5669280" cy="713232"/>
+          </a:xfrm>
+          <a:prstGeom prst="rect">
+            <a:avLst/>
+          </a:prstGeom>
+          <a:noFill/>
+          <a:ln/>
+        </p:spPr>
+        <p:txBody>
+          <a:bodyPr wrap="square" lIns="0" tIns="0" rIns="0" bIns="0" rtlCol="0" anchor="ctr"/>
+          <a:lstStyle/>
+          <a:p>
+            <a:pPr marL="0" indent="0">
+              <a:buNone/>
+            </a:pPr>
+            <a:r>
+              <a:rPr lang="en-US" sz="1550" dirty="0">
+                <a:solidFill>
+                  <a:srgbClr val="9FB0B3"/>
+                </a:solidFill>
+                <a:latin typeface="TH Sarabun New" pitchFamily="34" charset="0"/>
+                <a:ea typeface="TH Sarabun New" pitchFamily="34" charset="-122"/>
+                <a:cs typeface="TH Sarabun New" pitchFamily="34" charset="-120"/>
+              </a:rPr>
+              <a:t>ตรวจด้วยเกณฑ์ยอมรับที่วัดผลได้</a:t>
+            </a:r>
+            <a:endParaRPr lang="en-US" sz="1550" dirty="0"/>
+          </a:p>
+        </p:txBody>
+      </p:sp>
+      <p:sp>
+        <p:nvSpPr>
+          <p:cNvPr id="19" name="Shape 17"/>
+          <p:cNvSpPr/>
+          <p:nvPr/>
+        </p:nvSpPr>
+        <p:spPr>
+          <a:xfrm>
+            <a:off x="594360" y="4005072"/>
+            <a:ext cx="10972800" cy="713232"/>
+          </a:xfrm>
+          <a:prstGeom prst="roundRect">
+            <a:avLst>
+              <a:gd name="adj" fmla="val 11538"/>
+            </a:avLst>
+          </a:prstGeom>
+          <a:solidFill>
+            <a:srgbClr val="2E3742"/>
+          </a:solidFill>
+          <a:ln w="12700">
+            <a:solidFill>
+              <a:srgbClr val="2E3742"/>
+            </a:solidFill>
+            <a:prstDash val="solid"/>
+          </a:ln>
+        </p:spPr>
+        <p:txBody>
+          <a:bodyPr/>
+          <a:lstStyle/>
+          <a:p>
+            <a:endParaRPr lang="en-TH"/>
+          </a:p>
+        </p:txBody>
+      </p:sp>
+      <p:sp>
+        <p:nvSpPr>
+          <p:cNvPr id="20" name="Shape 18"/>
+          <p:cNvSpPr/>
+          <p:nvPr/>
+        </p:nvSpPr>
+        <p:spPr>
+          <a:xfrm>
+            <a:off x="832104" y="4178808"/>
+            <a:ext cx="365760" cy="365760"/>
+          </a:xfrm>
+          <a:prstGeom prst="ellipse">
+            <a:avLst/>
+          </a:prstGeom>
+          <a:solidFill>
+            <a:srgbClr val="00ADB5"/>
+          </a:solidFill>
+          <a:ln w="12700">
+            <a:solidFill>
+              <a:srgbClr val="00ADB5"/>
+            </a:solidFill>
+            <a:prstDash val="solid"/>
+          </a:ln>
+        </p:spPr>
+        <p:txBody>
+          <a:bodyPr/>
+          <a:lstStyle/>
+          <a:p>
+            <a:endParaRPr lang="en-TH"/>
+          </a:p>
+        </p:txBody>
+      </p:sp>
+      <p:sp>
+        <p:nvSpPr>
+          <p:cNvPr id="21" name="Text 19"/>
+          <p:cNvSpPr/>
+          <p:nvPr/>
+        </p:nvSpPr>
+        <p:spPr>
+          <a:xfrm>
+            <a:off x="832104" y="4178808"/>
+            <a:ext cx="365760" cy="365760"/>
+          </a:xfrm>
+          <a:prstGeom prst="rect">
+            <a:avLst/>
+          </a:prstGeom>
+          <a:noFill/>
+          <a:ln/>
+        </p:spPr>
+        <p:txBody>
+          <a:bodyPr wrap="square" lIns="0" tIns="0" rIns="0" bIns="0" rtlCol="0" anchor="ctr"/>
+          <a:lstStyle/>
+          <a:p>
+            <a:pPr marL="0" indent="0" algn="ctr">
+              <a:buNone/>
+            </a:pPr>
+            <a:r>
+              <a:rPr lang="en-US" sz="1500" b="1" dirty="0">
+                <a:solidFill>
+                  <a:srgbClr val="FFFFFF"/>
+                </a:solidFill>
+                <a:latin typeface="TH Sarabun New" pitchFamily="34" charset="0"/>
+                <a:ea typeface="TH Sarabun New" pitchFamily="34" charset="-122"/>
+                <a:cs typeface="TH Sarabun New" pitchFamily="34" charset="-120"/>
+              </a:rPr>
+              <a:t>4</a:t>
+            </a:r>
+            <a:endParaRPr lang="en-US" sz="1500" dirty="0"/>
+          </a:p>
+        </p:txBody>
+      </p:sp>
+      <p:sp>
+        <p:nvSpPr>
+          <p:cNvPr id="22" name="Text 20"/>
+          <p:cNvSpPr/>
+          <p:nvPr/>
+        </p:nvSpPr>
+        <p:spPr>
+          <a:xfrm>
+            <a:off x="1344168" y="4005072"/>
+            <a:ext cx="4206240" cy="713232"/>
+          </a:xfrm>
+          <a:prstGeom prst="rect">
+            <a:avLst/>
+          </a:prstGeom>
+          <a:noFill/>
+          <a:ln/>
+        </p:spPr>
+        <p:txBody>
+          <a:bodyPr wrap="square" lIns="0" tIns="0" rIns="0" bIns="0" rtlCol="0" anchor="ctr"/>
+          <a:lstStyle/>
+          <a:p>
+            <a:pPr marL="0" indent="0">
+              <a:buNone/>
+            </a:pPr>
+            <a:r>
+              <a:rPr lang="en-US" sz="1750" b="1" dirty="0">
+                <a:solidFill>
+                  <a:srgbClr val="FFFFFF"/>
+                </a:solidFill>
+                <a:latin typeface="TH Sarabun New" pitchFamily="34" charset="0"/>
+                <a:ea typeface="TH Sarabun New" pitchFamily="34" charset="-122"/>
+                <a:cs typeface="TH Sarabun New" pitchFamily="34" charset="-120"/>
+              </a:rPr>
+              <a:t>งานเสร็จเมื่อคนอื่นเปิดใช้ได้</a:t>
+            </a:r>
+            <a:endParaRPr lang="en-US" sz="1750" dirty="0"/>
+          </a:p>
+        </p:txBody>
+      </p:sp>
+      <p:sp>
+        <p:nvSpPr>
+          <p:cNvPr id="23" name="Text 21"/>
+          <p:cNvSpPr/>
+          <p:nvPr/>
+        </p:nvSpPr>
+        <p:spPr>
+          <a:xfrm>
+            <a:off x="5623560" y="4005072"/>
+            <a:ext cx="5669280" cy="713232"/>
+          </a:xfrm>
+          <a:prstGeom prst="rect">
+            <a:avLst/>
+          </a:prstGeom>
+          <a:noFill/>
+          <a:ln/>
+        </p:spPr>
+        <p:txBody>
+          <a:bodyPr wrap="square" lIns="0" tIns="0" rIns="0" bIns="0" rtlCol="0" anchor="ctr"/>
+          <a:lstStyle/>
+          <a:p>
+            <a:pPr marL="0" indent="0">
+              <a:buNone/>
+            </a:pPr>
+            <a:r>
+              <a:rPr lang="en-US" sz="1550" dirty="0">
+                <a:solidFill>
+                  <a:srgbClr val="9FB0B3"/>
+                </a:solidFill>
+                <a:latin typeface="TH Sarabun New" pitchFamily="34" charset="0"/>
+                <a:ea typeface="TH Sarabun New" pitchFamily="34" charset="-122"/>
+                <a:cs typeface="TH Sarabun New" pitchFamily="34" charset="-120"/>
+              </a:rPr>
+              <a:t>ทดสอบ 3 ระดับ แล้วนำขึ้น GitHub Pages</a:t>
+            </a:r>
+            <a:endParaRPr lang="en-US" sz="1550" dirty="0"/>
+          </a:p>
+        </p:txBody>
+      </p:sp>
+      <p:sp>
+        <p:nvSpPr>
+          <p:cNvPr id="24" name="Text 22"/>
+          <p:cNvSpPr/>
+          <p:nvPr/>
+        </p:nvSpPr>
+        <p:spPr>
+          <a:xfrm>
+            <a:off x="594360" y="5029200"/>
+            <a:ext cx="10972800" cy="457200"/>
+          </a:xfrm>
+          <a:prstGeom prst="rect">
+            <a:avLst/>
+          </a:prstGeom>
+          <a:noFill/>
+          <a:ln/>
+        </p:spPr>
+        <p:txBody>
+          <a:bodyPr wrap="square" lIns="0" tIns="0" rIns="0" bIns="0" rtlCol="0" anchor="ctr"/>
+          <a:lstStyle/>
+          <a:p>
+            <a:pPr marL="0" indent="0">
+              <a:buNone/>
+            </a:pPr>
+            <a:r>
+              <a:rPr lang="en-US" sz="2600" b="1" dirty="0">
+                <a:solidFill>
+                  <a:srgbClr val="00ADB5"/>
+                </a:solidFill>
+                <a:latin typeface="TH Sarabun New" pitchFamily="34" charset="0"/>
+                <a:ea typeface="TH Sarabun New" pitchFamily="34" charset="-122"/>
+                <a:cs typeface="TH Sarabun New" pitchFamily="34" charset="-120"/>
+              </a:rPr>
+              <a:t>ขอบคุณครับ  ·  ช่วงถาม-ตอบ</a:t>
+            </a:r>
+            <a:endParaRPr lang="en-US" sz="2600" dirty="0"/>
+          </a:p>
+        </p:txBody>
+      </p:sp>
+    </p:spTree>
+  </p:cSld>
+  <p:clrMapOvr>
+    <a:masterClrMapping/>
+  </p:clrMapOvr>
+</p:sld>
+</file>
+
+<file path=ppt/slides/slide4.xml><?xml version="1.0" encoding="utf-8"?>
 <p:sld xmlns:a="http://schemas.openxmlformats.org/drawingml/2006/main" xmlns:r="http://schemas.openxmlformats.org/officeDocument/2006/relationships" xmlns:p="http://schemas.openxmlformats.org/presentationml/2006/main">
   <p:cSld name="Slide 2">
     <p:bg>
@@ -18179,889 +20862,7 @@
 </p:sld>
 </file>
 
-<file path=ppt/slides/slide30.xml><?xml version="1.0" encoding="utf-8"?>
-<p:sld xmlns:a="http://schemas.openxmlformats.org/drawingml/2006/main" xmlns:r="http://schemas.openxmlformats.org/officeDocument/2006/relationships" xmlns:p="http://schemas.openxmlformats.org/presentationml/2006/main">
-  <p:cSld name="Slide 38">
-    <p:bg>
-      <p:bgPr>
-        <a:solidFill>
-          <a:srgbClr val="222831"/>
-        </a:solidFill>
-        <a:effectLst/>
-      </p:bgPr>
-    </p:bg>
-    <p:spTree>
-      <p:nvGrpSpPr>
-        <p:cNvPr id="1" name=""/>
-        <p:cNvGrpSpPr/>
-        <p:nvPr/>
-      </p:nvGrpSpPr>
-      <p:grpSpPr>
-        <a:xfrm>
-          <a:off x="0" y="0"/>
-          <a:ext cx="0" cy="0"/>
-          <a:chOff x="0" y="0"/>
-          <a:chExt cx="0" cy="0"/>
-        </a:xfrm>
-      </p:grpSpPr>
-      <p:sp>
-        <p:nvSpPr>
-          <p:cNvPr id="2" name="Text 0"/>
-          <p:cNvSpPr/>
-          <p:nvPr/>
-        </p:nvSpPr>
-        <p:spPr>
-          <a:xfrm>
-            <a:off x="11018520" y="6263640"/>
-            <a:ext cx="548640" cy="274320"/>
-          </a:xfrm>
-          <a:prstGeom prst="rect">
-            <a:avLst/>
-          </a:prstGeom>
-          <a:noFill/>
-          <a:ln/>
-        </p:spPr>
-        <p:txBody>
-          <a:bodyPr wrap="square" lIns="0" tIns="0" rIns="0" bIns="0" rtlCol="0" anchor="ctr"/>
-          <a:lstStyle/>
-          <a:p>
-            <a:pPr marL="0" indent="0" algn="r">
-              <a:buNone/>
-            </a:pPr>
-            <a:r>
-              <a:rPr lang="en-US" sz="1200" dirty="0">
-                <a:solidFill>
-                  <a:srgbClr val="9AA3AD"/>
-                </a:solidFill>
-                <a:latin typeface="TH Sarabun New" pitchFamily="34" charset="0"/>
-                <a:ea typeface="TH Sarabun New" pitchFamily="34" charset="-122"/>
-                <a:cs typeface="TH Sarabun New" pitchFamily="34" charset="-120"/>
-              </a:rPr>
-              <a:t>38</a:t>
-            </a:r>
-            <a:endParaRPr lang="en-US" sz="1200" dirty="0"/>
-          </a:p>
-        </p:txBody>
-      </p:sp>
-      <p:sp>
-        <p:nvSpPr>
-          <p:cNvPr id="3" name="Text 1"/>
-          <p:cNvSpPr/>
-          <p:nvPr/>
-        </p:nvSpPr>
-        <p:spPr>
-          <a:xfrm>
-            <a:off x="594360" y="685800"/>
-            <a:ext cx="10972800" cy="566928"/>
-          </a:xfrm>
-          <a:prstGeom prst="rect">
-            <a:avLst/>
-          </a:prstGeom>
-          <a:noFill/>
-          <a:ln/>
-        </p:spPr>
-        <p:txBody>
-          <a:bodyPr wrap="square" lIns="0" tIns="0" rIns="0" bIns="0" rtlCol="0" anchor="ctr"/>
-          <a:lstStyle/>
-          <a:p>
-            <a:pPr marL="0" indent="0">
-              <a:buNone/>
-            </a:pPr>
-            <a:r>
-              <a:rPr lang="en-US" sz="3400" b="1" dirty="0">
-                <a:solidFill>
-                  <a:srgbClr val="FFFFFF"/>
-                </a:solidFill>
-                <a:latin typeface="TH Sarabun New" pitchFamily="34" charset="0"/>
-                <a:ea typeface="TH Sarabun New" pitchFamily="34" charset="-122"/>
-                <a:cs typeface="TH Sarabun New" pitchFamily="34" charset="-120"/>
-              </a:rPr>
-              <a:t>สรุปสิ่งที่ได้เรียนรู้</a:t>
-            </a:r>
-            <a:endParaRPr lang="en-US" sz="3400" dirty="0"/>
-          </a:p>
-        </p:txBody>
-      </p:sp>
-      <p:sp>
-        <p:nvSpPr>
-          <p:cNvPr id="4" name="Shape 2"/>
-          <p:cNvSpPr/>
-          <p:nvPr/>
-        </p:nvSpPr>
-        <p:spPr>
-          <a:xfrm>
-            <a:off x="594360" y="1481328"/>
-            <a:ext cx="10972800" cy="713232"/>
-          </a:xfrm>
-          <a:prstGeom prst="roundRect">
-            <a:avLst>
-              <a:gd name="adj" fmla="val 11538"/>
-            </a:avLst>
-          </a:prstGeom>
-          <a:solidFill>
-            <a:srgbClr val="2E3742"/>
-          </a:solidFill>
-          <a:ln w="12700">
-            <a:solidFill>
-              <a:srgbClr val="2E3742"/>
-            </a:solidFill>
-            <a:prstDash val="solid"/>
-          </a:ln>
-        </p:spPr>
-        <p:txBody>
-          <a:bodyPr/>
-          <a:lstStyle/>
-          <a:p>
-            <a:endParaRPr lang="en-TH"/>
-          </a:p>
-        </p:txBody>
-      </p:sp>
-      <p:sp>
-        <p:nvSpPr>
-          <p:cNvPr id="5" name="Shape 3"/>
-          <p:cNvSpPr/>
-          <p:nvPr/>
-        </p:nvSpPr>
-        <p:spPr>
-          <a:xfrm>
-            <a:off x="832104" y="1655064"/>
-            <a:ext cx="365760" cy="365760"/>
-          </a:xfrm>
-          <a:prstGeom prst="ellipse">
-            <a:avLst/>
-          </a:prstGeom>
-          <a:solidFill>
-            <a:srgbClr val="00ADB5"/>
-          </a:solidFill>
-          <a:ln w="12700">
-            <a:solidFill>
-              <a:srgbClr val="00ADB5"/>
-            </a:solidFill>
-            <a:prstDash val="solid"/>
-          </a:ln>
-        </p:spPr>
-        <p:txBody>
-          <a:bodyPr/>
-          <a:lstStyle/>
-          <a:p>
-            <a:endParaRPr lang="en-TH"/>
-          </a:p>
-        </p:txBody>
-      </p:sp>
-      <p:sp>
-        <p:nvSpPr>
-          <p:cNvPr id="6" name="Text 4"/>
-          <p:cNvSpPr/>
-          <p:nvPr/>
-        </p:nvSpPr>
-        <p:spPr>
-          <a:xfrm>
-            <a:off x="832104" y="1655064"/>
-            <a:ext cx="365760" cy="365760"/>
-          </a:xfrm>
-          <a:prstGeom prst="rect">
-            <a:avLst/>
-          </a:prstGeom>
-          <a:noFill/>
-          <a:ln/>
-        </p:spPr>
-        <p:txBody>
-          <a:bodyPr wrap="square" lIns="0" tIns="0" rIns="0" bIns="0" rtlCol="0" anchor="ctr"/>
-          <a:lstStyle/>
-          <a:p>
-            <a:pPr marL="0" indent="0" algn="ctr">
-              <a:buNone/>
-            </a:pPr>
-            <a:r>
-              <a:rPr lang="en-US" sz="1500" b="1" dirty="0">
-                <a:solidFill>
-                  <a:srgbClr val="FFFFFF"/>
-                </a:solidFill>
-                <a:latin typeface="TH Sarabun New" pitchFamily="34" charset="0"/>
-                <a:ea typeface="TH Sarabun New" pitchFamily="34" charset="-122"/>
-                <a:cs typeface="TH Sarabun New" pitchFamily="34" charset="-120"/>
-              </a:rPr>
-              <a:t>1</a:t>
-            </a:r>
-            <a:endParaRPr lang="en-US" sz="1500" dirty="0"/>
-          </a:p>
-        </p:txBody>
-      </p:sp>
-      <p:sp>
-        <p:nvSpPr>
-          <p:cNvPr id="7" name="Text 5"/>
-          <p:cNvSpPr/>
-          <p:nvPr/>
-        </p:nvSpPr>
-        <p:spPr>
-          <a:xfrm>
-            <a:off x="1344168" y="1481328"/>
-            <a:ext cx="4206240" cy="713232"/>
-          </a:xfrm>
-          <a:prstGeom prst="rect">
-            <a:avLst/>
-          </a:prstGeom>
-          <a:noFill/>
-          <a:ln/>
-        </p:spPr>
-        <p:txBody>
-          <a:bodyPr wrap="square" lIns="0" tIns="0" rIns="0" bIns="0" rtlCol="0" anchor="ctr"/>
-          <a:lstStyle/>
-          <a:p>
-            <a:pPr marL="0" indent="0">
-              <a:buNone/>
-            </a:pPr>
-            <a:r>
-              <a:rPr lang="en-US" sz="1750" b="1" dirty="0">
-                <a:solidFill>
-                  <a:srgbClr val="FFFFFF"/>
-                </a:solidFill>
-                <a:latin typeface="TH Sarabun New" pitchFamily="34" charset="0"/>
-                <a:ea typeface="TH Sarabun New" pitchFamily="34" charset="-122"/>
-                <a:cs typeface="TH Sarabun New" pitchFamily="34" charset="-120"/>
-              </a:rPr>
-              <a:t>เขียนสเปกก่อน แล้วค่อยสั่ง</a:t>
-            </a:r>
-            <a:endParaRPr lang="en-US" sz="1750" dirty="0"/>
-          </a:p>
-        </p:txBody>
-      </p:sp>
-      <p:sp>
-        <p:nvSpPr>
-          <p:cNvPr id="8" name="Text 6"/>
-          <p:cNvSpPr/>
-          <p:nvPr/>
-        </p:nvSpPr>
-        <p:spPr>
-          <a:xfrm>
-            <a:off x="5623560" y="1481328"/>
-            <a:ext cx="5669280" cy="713232"/>
-          </a:xfrm>
-          <a:prstGeom prst="rect">
-            <a:avLst/>
-          </a:prstGeom>
-          <a:noFill/>
-          <a:ln/>
-        </p:spPr>
-        <p:txBody>
-          <a:bodyPr wrap="square" lIns="0" tIns="0" rIns="0" bIns="0" rtlCol="0" anchor="ctr"/>
-          <a:lstStyle/>
-          <a:p>
-            <a:pPr marL="0" indent="0">
-              <a:buNone/>
-            </a:pPr>
-            <a:r>
-              <a:rPr lang="en-US" sz="1550" dirty="0">
-                <a:solidFill>
-                  <a:srgbClr val="9FB0B3"/>
-                </a:solidFill>
-                <a:latin typeface="TH Sarabun New" pitchFamily="34" charset="0"/>
-                <a:ea typeface="TH Sarabun New" pitchFamily="34" charset="-122"/>
-                <a:cs typeface="TH Sarabun New" pitchFamily="34" charset="-120"/>
-              </a:rPr>
-              <a:t>SPEC ไฟล์เดียว + prompt สั้นที่อ้างหมายเลขหัวข้อ</a:t>
-            </a:r>
-            <a:endParaRPr lang="en-US" sz="1550" dirty="0"/>
-          </a:p>
-        </p:txBody>
-      </p:sp>
-      <p:sp>
-        <p:nvSpPr>
-          <p:cNvPr id="9" name="Shape 7"/>
-          <p:cNvSpPr/>
-          <p:nvPr/>
-        </p:nvSpPr>
-        <p:spPr>
-          <a:xfrm>
-            <a:off x="594360" y="2322576"/>
-            <a:ext cx="10972800" cy="713232"/>
-          </a:xfrm>
-          <a:prstGeom prst="roundRect">
-            <a:avLst>
-              <a:gd name="adj" fmla="val 11538"/>
-            </a:avLst>
-          </a:prstGeom>
-          <a:solidFill>
-            <a:srgbClr val="2E3742"/>
-          </a:solidFill>
-          <a:ln w="12700">
-            <a:solidFill>
-              <a:srgbClr val="2E3742"/>
-            </a:solidFill>
-            <a:prstDash val="solid"/>
-          </a:ln>
-        </p:spPr>
-        <p:txBody>
-          <a:bodyPr/>
-          <a:lstStyle/>
-          <a:p>
-            <a:endParaRPr lang="en-TH"/>
-          </a:p>
-        </p:txBody>
-      </p:sp>
-      <p:sp>
-        <p:nvSpPr>
-          <p:cNvPr id="10" name="Shape 8"/>
-          <p:cNvSpPr/>
-          <p:nvPr/>
-        </p:nvSpPr>
-        <p:spPr>
-          <a:xfrm>
-            <a:off x="832104" y="2496312"/>
-            <a:ext cx="365760" cy="365760"/>
-          </a:xfrm>
-          <a:prstGeom prst="ellipse">
-            <a:avLst/>
-          </a:prstGeom>
-          <a:solidFill>
-            <a:srgbClr val="00ADB5"/>
-          </a:solidFill>
-          <a:ln w="12700">
-            <a:solidFill>
-              <a:srgbClr val="00ADB5"/>
-            </a:solidFill>
-            <a:prstDash val="solid"/>
-          </a:ln>
-        </p:spPr>
-        <p:txBody>
-          <a:bodyPr/>
-          <a:lstStyle/>
-          <a:p>
-            <a:endParaRPr lang="en-TH"/>
-          </a:p>
-        </p:txBody>
-      </p:sp>
-      <p:sp>
-        <p:nvSpPr>
-          <p:cNvPr id="11" name="Text 9"/>
-          <p:cNvSpPr/>
-          <p:nvPr/>
-        </p:nvSpPr>
-        <p:spPr>
-          <a:xfrm>
-            <a:off x="832104" y="2496312"/>
-            <a:ext cx="365760" cy="365760"/>
-          </a:xfrm>
-          <a:prstGeom prst="rect">
-            <a:avLst/>
-          </a:prstGeom>
-          <a:noFill/>
-          <a:ln/>
-        </p:spPr>
-        <p:txBody>
-          <a:bodyPr wrap="square" lIns="0" tIns="0" rIns="0" bIns="0" rtlCol="0" anchor="ctr"/>
-          <a:lstStyle/>
-          <a:p>
-            <a:pPr marL="0" indent="0" algn="ctr">
-              <a:buNone/>
-            </a:pPr>
-            <a:r>
-              <a:rPr lang="en-US" sz="1500" b="1" dirty="0">
-                <a:solidFill>
-                  <a:srgbClr val="FFFFFF"/>
-                </a:solidFill>
-                <a:latin typeface="TH Sarabun New" pitchFamily="34" charset="0"/>
-                <a:ea typeface="TH Sarabun New" pitchFamily="34" charset="-122"/>
-                <a:cs typeface="TH Sarabun New" pitchFamily="34" charset="-120"/>
-              </a:rPr>
-              <a:t>2</a:t>
-            </a:r>
-            <a:endParaRPr lang="en-US" sz="1500" dirty="0"/>
-          </a:p>
-        </p:txBody>
-      </p:sp>
-      <p:sp>
-        <p:nvSpPr>
-          <p:cNvPr id="12" name="Text 10"/>
-          <p:cNvSpPr/>
-          <p:nvPr/>
-        </p:nvSpPr>
-        <p:spPr>
-          <a:xfrm>
-            <a:off x="1344168" y="2322576"/>
-            <a:ext cx="4206240" cy="713232"/>
-          </a:xfrm>
-          <a:prstGeom prst="rect">
-            <a:avLst/>
-          </a:prstGeom>
-          <a:noFill/>
-          <a:ln/>
-        </p:spPr>
-        <p:txBody>
-          <a:bodyPr wrap="square" lIns="0" tIns="0" rIns="0" bIns="0" rtlCol="0" anchor="ctr"/>
-          <a:lstStyle/>
-          <a:p>
-            <a:pPr marL="0" indent="0">
-              <a:buNone/>
-            </a:pPr>
-            <a:r>
-              <a:rPr lang="en-US" sz="1750" b="1" dirty="0">
-                <a:solidFill>
-                  <a:srgbClr val="FFFFFF"/>
-                </a:solidFill>
-                <a:latin typeface="TH Sarabun New" pitchFamily="34" charset="0"/>
-                <a:ea typeface="TH Sarabun New" pitchFamily="34" charset="-122"/>
-                <a:cs typeface="TH Sarabun New" pitchFamily="34" charset="-120"/>
-              </a:rPr>
-              <a:t>ออกแบบก่อนสร้าง</a:t>
-            </a:r>
-            <a:endParaRPr lang="en-US" sz="1750" dirty="0"/>
-          </a:p>
-        </p:txBody>
-      </p:sp>
-      <p:sp>
-        <p:nvSpPr>
-          <p:cNvPr id="13" name="Text 11"/>
-          <p:cNvSpPr/>
-          <p:nvPr/>
-        </p:nvSpPr>
-        <p:spPr>
-          <a:xfrm>
-            <a:off x="5623560" y="2322576"/>
-            <a:ext cx="5669280" cy="713232"/>
-          </a:xfrm>
-          <a:prstGeom prst="rect">
-            <a:avLst/>
-          </a:prstGeom>
-          <a:noFill/>
-          <a:ln/>
-        </p:spPr>
-        <p:txBody>
-          <a:bodyPr wrap="square" lIns="0" tIns="0" rIns="0" bIns="0" rtlCol="0" anchor="ctr"/>
-          <a:lstStyle/>
-          <a:p>
-            <a:pPr marL="0" indent="0">
-              <a:buNone/>
-            </a:pPr>
-            <a:r>
-              <a:rPr lang="en-US" sz="1550" dirty="0">
-                <a:solidFill>
-                  <a:srgbClr val="9FB0B3"/>
-                </a:solidFill>
-                <a:latin typeface="TH Sarabun New" pitchFamily="34" charset="0"/>
-                <a:ea typeface="TH Sarabun New" pitchFamily="34" charset="-122"/>
-                <a:cs typeface="TH Sarabun New" pitchFamily="34" charset="-120"/>
-              </a:rPr>
-              <a:t>สไตล์จาก uistyleguide · สีจาก colorhunt · ฟอนต์จาก Google Fonts</a:t>
-            </a:r>
-            <a:endParaRPr lang="en-US" sz="1550" dirty="0"/>
-          </a:p>
-        </p:txBody>
-      </p:sp>
-      <p:sp>
-        <p:nvSpPr>
-          <p:cNvPr id="14" name="Shape 12"/>
-          <p:cNvSpPr/>
-          <p:nvPr/>
-        </p:nvSpPr>
-        <p:spPr>
-          <a:xfrm>
-            <a:off x="594360" y="3163824"/>
-            <a:ext cx="10972800" cy="713232"/>
-          </a:xfrm>
-          <a:prstGeom prst="roundRect">
-            <a:avLst>
-              <a:gd name="adj" fmla="val 11538"/>
-            </a:avLst>
-          </a:prstGeom>
-          <a:solidFill>
-            <a:srgbClr val="2E3742"/>
-          </a:solidFill>
-          <a:ln w="12700">
-            <a:solidFill>
-              <a:srgbClr val="2E3742"/>
-            </a:solidFill>
-            <a:prstDash val="solid"/>
-          </a:ln>
-        </p:spPr>
-        <p:txBody>
-          <a:bodyPr/>
-          <a:lstStyle/>
-          <a:p>
-            <a:endParaRPr lang="en-TH"/>
-          </a:p>
-        </p:txBody>
-      </p:sp>
-      <p:sp>
-        <p:nvSpPr>
-          <p:cNvPr id="15" name="Shape 13"/>
-          <p:cNvSpPr/>
-          <p:nvPr/>
-        </p:nvSpPr>
-        <p:spPr>
-          <a:xfrm>
-            <a:off x="832104" y="3337560"/>
-            <a:ext cx="365760" cy="365760"/>
-          </a:xfrm>
-          <a:prstGeom prst="ellipse">
-            <a:avLst/>
-          </a:prstGeom>
-          <a:solidFill>
-            <a:srgbClr val="00ADB5"/>
-          </a:solidFill>
-          <a:ln w="12700">
-            <a:solidFill>
-              <a:srgbClr val="00ADB5"/>
-            </a:solidFill>
-            <a:prstDash val="solid"/>
-          </a:ln>
-        </p:spPr>
-        <p:txBody>
-          <a:bodyPr/>
-          <a:lstStyle/>
-          <a:p>
-            <a:endParaRPr lang="en-TH"/>
-          </a:p>
-        </p:txBody>
-      </p:sp>
-      <p:sp>
-        <p:nvSpPr>
-          <p:cNvPr id="16" name="Text 14"/>
-          <p:cNvSpPr/>
-          <p:nvPr/>
-        </p:nvSpPr>
-        <p:spPr>
-          <a:xfrm>
-            <a:off x="832104" y="3337560"/>
-            <a:ext cx="365760" cy="365760"/>
-          </a:xfrm>
-          <a:prstGeom prst="rect">
-            <a:avLst/>
-          </a:prstGeom>
-          <a:noFill/>
-          <a:ln/>
-        </p:spPr>
-        <p:txBody>
-          <a:bodyPr wrap="square" lIns="0" tIns="0" rIns="0" bIns="0" rtlCol="0" anchor="ctr"/>
-          <a:lstStyle/>
-          <a:p>
-            <a:pPr marL="0" indent="0" algn="ctr">
-              <a:buNone/>
-            </a:pPr>
-            <a:r>
-              <a:rPr lang="en-US" sz="1500" b="1" dirty="0">
-                <a:solidFill>
-                  <a:srgbClr val="FFFFFF"/>
-                </a:solidFill>
-                <a:latin typeface="TH Sarabun New" pitchFamily="34" charset="0"/>
-                <a:ea typeface="TH Sarabun New" pitchFamily="34" charset="-122"/>
-                <a:cs typeface="TH Sarabun New" pitchFamily="34" charset="-120"/>
-              </a:rPr>
-              <a:t>3</a:t>
-            </a:r>
-            <a:endParaRPr lang="en-US" sz="1500" dirty="0"/>
-          </a:p>
-        </p:txBody>
-      </p:sp>
-      <p:sp>
-        <p:nvSpPr>
-          <p:cNvPr id="17" name="Text 15"/>
-          <p:cNvSpPr/>
-          <p:nvPr/>
-        </p:nvSpPr>
-        <p:spPr>
-          <a:xfrm>
-            <a:off x="1344168" y="3163824"/>
-            <a:ext cx="4206240" cy="713232"/>
-          </a:xfrm>
-          <a:prstGeom prst="rect">
-            <a:avLst/>
-          </a:prstGeom>
-          <a:noFill/>
-          <a:ln/>
-        </p:spPr>
-        <p:txBody>
-          <a:bodyPr wrap="square" lIns="0" tIns="0" rIns="0" bIns="0" rtlCol="0" anchor="ctr"/>
-          <a:lstStyle/>
-          <a:p>
-            <a:pPr marL="0" indent="0">
-              <a:buNone/>
-            </a:pPr>
-            <a:r>
-              <a:rPr lang="en-US" sz="1750" b="1" dirty="0">
-                <a:solidFill>
-                  <a:srgbClr val="FFFFFF"/>
-                </a:solidFill>
-                <a:latin typeface="TH Sarabun New" pitchFamily="34" charset="0"/>
-                <a:ea typeface="TH Sarabun New" pitchFamily="34" charset="-122"/>
-                <a:cs typeface="TH Sarabun New" pitchFamily="34" charset="-120"/>
-              </a:rPr>
-              <a:t>สร้างทีละชั้น ตรวจทีละชั้น</a:t>
-            </a:r>
-            <a:endParaRPr lang="en-US" sz="1750" dirty="0"/>
-          </a:p>
-        </p:txBody>
-      </p:sp>
-      <p:sp>
-        <p:nvSpPr>
-          <p:cNvPr id="18" name="Text 16"/>
-          <p:cNvSpPr/>
-          <p:nvPr/>
-        </p:nvSpPr>
-        <p:spPr>
-          <a:xfrm>
-            <a:off x="5623560" y="3163824"/>
-            <a:ext cx="5669280" cy="713232"/>
-          </a:xfrm>
-          <a:prstGeom prst="rect">
-            <a:avLst/>
-          </a:prstGeom>
-          <a:noFill/>
-          <a:ln/>
-        </p:spPr>
-        <p:txBody>
-          <a:bodyPr wrap="square" lIns="0" tIns="0" rIns="0" bIns="0" rtlCol="0" anchor="ctr"/>
-          <a:lstStyle/>
-          <a:p>
-            <a:pPr marL="0" indent="0">
-              <a:buNone/>
-            </a:pPr>
-            <a:r>
-              <a:rPr lang="en-US" sz="1550" dirty="0">
-                <a:solidFill>
-                  <a:srgbClr val="9FB0B3"/>
-                </a:solidFill>
-                <a:latin typeface="TH Sarabun New" pitchFamily="34" charset="0"/>
-                <a:ea typeface="TH Sarabun New" pitchFamily="34" charset="-122"/>
-                <a:cs typeface="TH Sarabun New" pitchFamily="34" charset="-120"/>
-              </a:rPr>
-              <a:t>ตรวจด้วยเกณฑ์ยอมรับที่วัดผลได้</a:t>
-            </a:r>
-            <a:endParaRPr lang="en-US" sz="1550" dirty="0"/>
-          </a:p>
-        </p:txBody>
-      </p:sp>
-      <p:sp>
-        <p:nvSpPr>
-          <p:cNvPr id="19" name="Shape 17"/>
-          <p:cNvSpPr/>
-          <p:nvPr/>
-        </p:nvSpPr>
-        <p:spPr>
-          <a:xfrm>
-            <a:off x="594360" y="4005072"/>
-            <a:ext cx="10972800" cy="713232"/>
-          </a:xfrm>
-          <a:prstGeom prst="roundRect">
-            <a:avLst>
-              <a:gd name="adj" fmla="val 11538"/>
-            </a:avLst>
-          </a:prstGeom>
-          <a:solidFill>
-            <a:srgbClr val="2E3742"/>
-          </a:solidFill>
-          <a:ln w="12700">
-            <a:solidFill>
-              <a:srgbClr val="2E3742"/>
-            </a:solidFill>
-            <a:prstDash val="solid"/>
-          </a:ln>
-        </p:spPr>
-        <p:txBody>
-          <a:bodyPr/>
-          <a:lstStyle/>
-          <a:p>
-            <a:endParaRPr lang="en-TH"/>
-          </a:p>
-        </p:txBody>
-      </p:sp>
-      <p:sp>
-        <p:nvSpPr>
-          <p:cNvPr id="20" name="Shape 18"/>
-          <p:cNvSpPr/>
-          <p:nvPr/>
-        </p:nvSpPr>
-        <p:spPr>
-          <a:xfrm>
-            <a:off x="832104" y="4178808"/>
-            <a:ext cx="365760" cy="365760"/>
-          </a:xfrm>
-          <a:prstGeom prst="ellipse">
-            <a:avLst/>
-          </a:prstGeom>
-          <a:solidFill>
-            <a:srgbClr val="00ADB5"/>
-          </a:solidFill>
-          <a:ln w="12700">
-            <a:solidFill>
-              <a:srgbClr val="00ADB5"/>
-            </a:solidFill>
-            <a:prstDash val="solid"/>
-          </a:ln>
-        </p:spPr>
-        <p:txBody>
-          <a:bodyPr/>
-          <a:lstStyle/>
-          <a:p>
-            <a:endParaRPr lang="en-TH"/>
-          </a:p>
-        </p:txBody>
-      </p:sp>
-      <p:sp>
-        <p:nvSpPr>
-          <p:cNvPr id="21" name="Text 19"/>
-          <p:cNvSpPr/>
-          <p:nvPr/>
-        </p:nvSpPr>
-        <p:spPr>
-          <a:xfrm>
-            <a:off x="832104" y="4178808"/>
-            <a:ext cx="365760" cy="365760"/>
-          </a:xfrm>
-          <a:prstGeom prst="rect">
-            <a:avLst/>
-          </a:prstGeom>
-          <a:noFill/>
-          <a:ln/>
-        </p:spPr>
-        <p:txBody>
-          <a:bodyPr wrap="square" lIns="0" tIns="0" rIns="0" bIns="0" rtlCol="0" anchor="ctr"/>
-          <a:lstStyle/>
-          <a:p>
-            <a:pPr marL="0" indent="0" algn="ctr">
-              <a:buNone/>
-            </a:pPr>
-            <a:r>
-              <a:rPr lang="en-US" sz="1500" b="1" dirty="0">
-                <a:solidFill>
-                  <a:srgbClr val="FFFFFF"/>
-                </a:solidFill>
-                <a:latin typeface="TH Sarabun New" pitchFamily="34" charset="0"/>
-                <a:ea typeface="TH Sarabun New" pitchFamily="34" charset="-122"/>
-                <a:cs typeface="TH Sarabun New" pitchFamily="34" charset="-120"/>
-              </a:rPr>
-              <a:t>4</a:t>
-            </a:r>
-            <a:endParaRPr lang="en-US" sz="1500" dirty="0"/>
-          </a:p>
-        </p:txBody>
-      </p:sp>
-      <p:sp>
-        <p:nvSpPr>
-          <p:cNvPr id="22" name="Text 20"/>
-          <p:cNvSpPr/>
-          <p:nvPr/>
-        </p:nvSpPr>
-        <p:spPr>
-          <a:xfrm>
-            <a:off x="1344168" y="4005072"/>
-            <a:ext cx="4206240" cy="713232"/>
-          </a:xfrm>
-          <a:prstGeom prst="rect">
-            <a:avLst/>
-          </a:prstGeom>
-          <a:noFill/>
-          <a:ln/>
-        </p:spPr>
-        <p:txBody>
-          <a:bodyPr wrap="square" lIns="0" tIns="0" rIns="0" bIns="0" rtlCol="0" anchor="ctr"/>
-          <a:lstStyle/>
-          <a:p>
-            <a:pPr marL="0" indent="0">
-              <a:buNone/>
-            </a:pPr>
-            <a:r>
-              <a:rPr lang="en-US" sz="1750" b="1" dirty="0">
-                <a:solidFill>
-                  <a:srgbClr val="FFFFFF"/>
-                </a:solidFill>
-                <a:latin typeface="TH Sarabun New" pitchFamily="34" charset="0"/>
-                <a:ea typeface="TH Sarabun New" pitchFamily="34" charset="-122"/>
-                <a:cs typeface="TH Sarabun New" pitchFamily="34" charset="-120"/>
-              </a:rPr>
-              <a:t>งานเสร็จเมื่อคนอื่นเปิดใช้ได้</a:t>
-            </a:r>
-            <a:endParaRPr lang="en-US" sz="1750" dirty="0"/>
-          </a:p>
-        </p:txBody>
-      </p:sp>
-      <p:sp>
-        <p:nvSpPr>
-          <p:cNvPr id="23" name="Text 21"/>
-          <p:cNvSpPr/>
-          <p:nvPr/>
-        </p:nvSpPr>
-        <p:spPr>
-          <a:xfrm>
-            <a:off x="5623560" y="4005072"/>
-            <a:ext cx="5669280" cy="713232"/>
-          </a:xfrm>
-          <a:prstGeom prst="rect">
-            <a:avLst/>
-          </a:prstGeom>
-          <a:noFill/>
-          <a:ln/>
-        </p:spPr>
-        <p:txBody>
-          <a:bodyPr wrap="square" lIns="0" tIns="0" rIns="0" bIns="0" rtlCol="0" anchor="ctr"/>
-          <a:lstStyle/>
-          <a:p>
-            <a:pPr marL="0" indent="0">
-              <a:buNone/>
-            </a:pPr>
-            <a:r>
-              <a:rPr lang="en-US" sz="1550" dirty="0">
-                <a:solidFill>
-                  <a:srgbClr val="9FB0B3"/>
-                </a:solidFill>
-                <a:latin typeface="TH Sarabun New" pitchFamily="34" charset="0"/>
-                <a:ea typeface="TH Sarabun New" pitchFamily="34" charset="-122"/>
-                <a:cs typeface="TH Sarabun New" pitchFamily="34" charset="-120"/>
-              </a:rPr>
-              <a:t>ทดสอบ 3 ระดับ แล้วนำขึ้น GitHub Pages</a:t>
-            </a:r>
-            <a:endParaRPr lang="en-US" sz="1550" dirty="0"/>
-          </a:p>
-        </p:txBody>
-      </p:sp>
-      <p:sp>
-        <p:nvSpPr>
-          <p:cNvPr id="24" name="Text 22"/>
-          <p:cNvSpPr/>
-          <p:nvPr/>
-        </p:nvSpPr>
-        <p:spPr>
-          <a:xfrm>
-            <a:off x="594360" y="5029200"/>
-            <a:ext cx="10972800" cy="457200"/>
-          </a:xfrm>
-          <a:prstGeom prst="rect">
-            <a:avLst/>
-          </a:prstGeom>
-          <a:noFill/>
-          <a:ln/>
-        </p:spPr>
-        <p:txBody>
-          <a:bodyPr wrap="square" lIns="0" tIns="0" rIns="0" bIns="0" rtlCol="0" anchor="ctr"/>
-          <a:lstStyle/>
-          <a:p>
-            <a:pPr marL="0" indent="0">
-              <a:buNone/>
-            </a:pPr>
-            <a:r>
-              <a:rPr lang="en-US" sz="2600" b="1" dirty="0">
-                <a:solidFill>
-                  <a:srgbClr val="00ADB5"/>
-                </a:solidFill>
-                <a:latin typeface="TH Sarabun New" pitchFamily="34" charset="0"/>
-                <a:ea typeface="TH Sarabun New" pitchFamily="34" charset="-122"/>
-                <a:cs typeface="TH Sarabun New" pitchFamily="34" charset="-120"/>
-              </a:rPr>
-              <a:t>ขอบคุณครับ  ·  ช่วงถาม-ตอบ</a:t>
-            </a:r>
-            <a:endParaRPr lang="en-US" sz="2600" dirty="0"/>
-          </a:p>
-        </p:txBody>
-      </p:sp>
-    </p:spTree>
-  </p:cSld>
-  <p:clrMapOvr>
-    <a:masterClrMapping/>
-  </p:clrMapOvr>
-</p:sld>
-</file>
-
-<file path=ppt/slides/slide4.xml><?xml version="1.0" encoding="utf-8"?>
+<file path=ppt/slides/slide5.xml><?xml version="1.0" encoding="utf-8"?>
 <p:sld xmlns:a="http://schemas.openxmlformats.org/drawingml/2006/main" xmlns:r="http://schemas.openxmlformats.org/officeDocument/2006/relationships" xmlns:p="http://schemas.openxmlformats.org/presentationml/2006/main">
   <p:cSld name="Slide 4">
     <p:bg>
@@ -19282,7 +21083,7 @@
 </p:sld>
 </file>
 
-<file path=ppt/slides/slide5.xml><?xml version="1.0" encoding="utf-8"?>
+<file path=ppt/slides/slide6.xml><?xml version="1.0" encoding="utf-8"?>
 <p:sld xmlns:a="http://schemas.openxmlformats.org/drawingml/2006/main" xmlns:r="http://schemas.openxmlformats.org/officeDocument/2006/relationships" xmlns:p="http://schemas.openxmlformats.org/presentationml/2006/main">
   <p:cSld name="Slide 5">
     <p:bg>
@@ -19838,7 +21639,7 @@
 </p:sld>
 </file>
 
-<file path=ppt/slides/slide6.xml><?xml version="1.0" encoding="utf-8"?>
+<file path=ppt/slides/slide7.xml><?xml version="1.0" encoding="utf-8"?>
 <p:sld xmlns:a="http://schemas.openxmlformats.org/drawingml/2006/main" xmlns:r="http://schemas.openxmlformats.org/officeDocument/2006/relationships" xmlns:p="http://schemas.openxmlformats.org/presentationml/2006/main">
   <p:cSld name="Slide 6">
     <p:bg>
@@ -20825,7 +22626,7 @@
 </p:sld>
 </file>
 
-<file path=ppt/slides/slide7.xml><?xml version="1.0" encoding="utf-8"?>
+<file path=ppt/slides/slide8.xml><?xml version="1.0" encoding="utf-8"?>
 <p:sld xmlns:a="http://schemas.openxmlformats.org/drawingml/2006/main" xmlns:r="http://schemas.openxmlformats.org/officeDocument/2006/relationships" xmlns:p="http://schemas.openxmlformats.org/presentationml/2006/main">
   <p:cSld name="Slide 7">
     <p:bg>
@@ -21656,7 +23457,7 @@
 </p:sld>
 </file>
 
-<file path=ppt/slides/slide8.xml><?xml version="1.0" encoding="utf-8"?>
+<file path=ppt/slides/slide9.xml><?xml version="1.0" encoding="utf-8"?>
 <p:sld xmlns:a="http://schemas.openxmlformats.org/drawingml/2006/main" xmlns:r="http://schemas.openxmlformats.org/officeDocument/2006/relationships" xmlns:p="http://schemas.openxmlformats.org/presentationml/2006/main">
   <p:cSld name="Slide 8">
     <p:bg>
@@ -22998,1489 +24799,6 @@
               <a:t>ทุกหน้าจอในระบบเรา เป็นเพียงหน้าตาที่สวยงามของคำสั่งสี่คำนี้เท่านั้น</a:t>
             </a:r>
             <a:endParaRPr lang="en-US" sz="1300" dirty="0"/>
-          </a:p>
-        </p:txBody>
-      </p:sp>
-    </p:spTree>
-  </p:cSld>
-  <p:clrMapOvr>
-    <a:masterClrMapping/>
-  </p:clrMapOvr>
-</p:sld>
-</file>
-
-<file path=ppt/slides/slide9.xml><?xml version="1.0" encoding="utf-8"?>
-<p:sld xmlns:a="http://schemas.openxmlformats.org/drawingml/2006/main" xmlns:r="http://schemas.openxmlformats.org/officeDocument/2006/relationships" xmlns:p="http://schemas.openxmlformats.org/presentationml/2006/main">
-  <p:cSld name="Slide 9">
-    <p:bg>
-      <p:bgPr>
-        <a:solidFill>
-          <a:srgbClr val="FFFFFF"/>
-        </a:solidFill>
-        <a:effectLst/>
-      </p:bgPr>
-    </p:bg>
-    <p:spTree>
-      <p:nvGrpSpPr>
-        <p:cNvPr id="1" name=""/>
-        <p:cNvGrpSpPr/>
-        <p:nvPr/>
-      </p:nvGrpSpPr>
-      <p:grpSpPr>
-        <a:xfrm>
-          <a:off x="0" y="0"/>
-          <a:ext cx="0" cy="0"/>
-          <a:chOff x="0" y="0"/>
-          <a:chExt cx="0" cy="0"/>
-        </a:xfrm>
-      </p:grpSpPr>
-      <p:sp>
-        <p:nvSpPr>
-          <p:cNvPr id="2" name="Text 0"/>
-          <p:cNvSpPr/>
-          <p:nvPr/>
-        </p:nvSpPr>
-        <p:spPr>
-          <a:xfrm>
-            <a:off x="11018520" y="6263640"/>
-            <a:ext cx="548640" cy="274320"/>
-          </a:xfrm>
-          <a:prstGeom prst="rect">
-            <a:avLst/>
-          </a:prstGeom>
-          <a:noFill/>
-          <a:ln/>
-        </p:spPr>
-        <p:txBody>
-          <a:bodyPr wrap="square" lIns="0" tIns="0" rIns="0" bIns="0" rtlCol="0" anchor="ctr"/>
-          <a:lstStyle/>
-          <a:p>
-            <a:pPr marL="0" indent="0" algn="r">
-              <a:buNone/>
-            </a:pPr>
-            <a:r>
-              <a:rPr lang="en-US" sz="1200" dirty="0">
-                <a:solidFill>
-                  <a:srgbClr val="9AA3AD"/>
-                </a:solidFill>
-                <a:latin typeface="TH Sarabun New" pitchFamily="34" charset="0"/>
-                <a:ea typeface="TH Sarabun New" pitchFamily="34" charset="-122"/>
-                <a:cs typeface="TH Sarabun New" pitchFamily="34" charset="-120"/>
-              </a:rPr>
-              <a:t>9</a:t>
-            </a:r>
-            <a:endParaRPr lang="en-US" sz="1200" dirty="0"/>
-          </a:p>
-        </p:txBody>
-      </p:sp>
-      <p:sp>
-        <p:nvSpPr>
-          <p:cNvPr id="3" name="Text 1"/>
-          <p:cNvSpPr/>
-          <p:nvPr/>
-        </p:nvSpPr>
-        <p:spPr>
-          <a:xfrm>
-            <a:off x="594360" y="329184"/>
-            <a:ext cx="10972800" cy="566928"/>
-          </a:xfrm>
-          <a:prstGeom prst="rect">
-            <a:avLst/>
-          </a:prstGeom>
-          <a:noFill/>
-          <a:ln/>
-        </p:spPr>
-        <p:txBody>
-          <a:bodyPr wrap="square" lIns="0" tIns="0" rIns="0" bIns="0" rtlCol="0" anchor="ctr"/>
-          <a:lstStyle/>
-          <a:p>
-            <a:pPr marL="0" indent="0">
-              <a:buNone/>
-            </a:pPr>
-            <a:r>
-              <a:rPr lang="en-US" sz="3200" b="1" dirty="0">
-                <a:solidFill>
-                  <a:srgbClr val="222831"/>
-                </a:solidFill>
-                <a:latin typeface="TH Sarabun New" pitchFamily="34" charset="0"/>
-                <a:ea typeface="TH Sarabun New" pitchFamily="34" charset="-122"/>
-                <a:cs typeface="TH Sarabun New" pitchFamily="34" charset="-120"/>
-              </a:rPr>
-              <a:t>Supabase และชุดเทคโนโลยีของเวิร์กช็อป</a:t>
-            </a:r>
-            <a:endParaRPr lang="en-US" sz="3200" dirty="0"/>
-          </a:p>
-        </p:txBody>
-      </p:sp>
-      <p:sp>
-        <p:nvSpPr>
-          <p:cNvPr id="4" name="Shape 2"/>
-          <p:cNvSpPr/>
-          <p:nvPr/>
-        </p:nvSpPr>
-        <p:spPr>
-          <a:xfrm>
-            <a:off x="594360" y="1371600"/>
-            <a:ext cx="5760720" cy="3977640"/>
-          </a:xfrm>
-          <a:prstGeom prst="roundRect">
-            <a:avLst>
-              <a:gd name="adj" fmla="val 2069"/>
-            </a:avLst>
-          </a:prstGeom>
-          <a:solidFill>
-            <a:srgbClr val="F5F7F8"/>
-          </a:solidFill>
-          <a:ln w="9525">
-            <a:solidFill>
-              <a:srgbClr val="F5F7F8"/>
-            </a:solidFill>
-            <a:prstDash val="solid"/>
-          </a:ln>
-          <a:effectLst>
-            <a:outerShdw blurRad="101600" dist="12700" dir="5400000" algn="bl" rotWithShape="0">
-              <a:srgbClr val="222831">
-                <a:alpha val="10000"/>
-              </a:srgbClr>
-            </a:outerShdw>
-          </a:effectLst>
-        </p:spPr>
-        <p:txBody>
-          <a:bodyPr/>
-          <a:lstStyle/>
-          <a:p>
-            <a:endParaRPr lang="en-TH" sz="2000"/>
-          </a:p>
-        </p:txBody>
-      </p:sp>
-      <p:sp>
-        <p:nvSpPr>
-          <p:cNvPr id="5" name="Text 3"/>
-          <p:cNvSpPr/>
-          <p:nvPr/>
-        </p:nvSpPr>
-        <p:spPr>
-          <a:xfrm>
-            <a:off x="868680" y="1572768"/>
-            <a:ext cx="5212080" cy="347472"/>
-          </a:xfrm>
-          <a:prstGeom prst="rect">
-            <a:avLst/>
-          </a:prstGeom>
-          <a:noFill/>
-          <a:ln/>
-        </p:spPr>
-        <p:txBody>
-          <a:bodyPr wrap="square" lIns="0" tIns="0" rIns="0" bIns="0" rtlCol="0" anchor="ctr"/>
-          <a:lstStyle/>
-          <a:p>
-            <a:pPr marL="0" indent="0">
-              <a:buNone/>
-            </a:pPr>
-            <a:r>
-              <a:rPr lang="en-US" sz="2400" b="1" dirty="0">
-                <a:solidFill>
-                  <a:srgbClr val="222831"/>
-                </a:solidFill>
-                <a:latin typeface="TH Sarabun New" pitchFamily="34" charset="0"/>
-                <a:ea typeface="TH Sarabun New" pitchFamily="34" charset="-122"/>
-                <a:cs typeface="TH Sarabun New" pitchFamily="34" charset="-120"/>
-              </a:rPr>
-              <a:t>Supabase คืออะไร</a:t>
-            </a:r>
-            <a:endParaRPr lang="en-US" sz="2400" dirty="0"/>
-          </a:p>
-        </p:txBody>
-      </p:sp>
-      <p:sp>
-        <p:nvSpPr>
-          <p:cNvPr id="6" name="Text 4"/>
-          <p:cNvSpPr/>
-          <p:nvPr/>
-        </p:nvSpPr>
-        <p:spPr>
-          <a:xfrm>
-            <a:off x="868680" y="1965960"/>
-            <a:ext cx="5212080" cy="640080"/>
-          </a:xfrm>
-          <a:prstGeom prst="rect">
-            <a:avLst/>
-          </a:prstGeom>
-          <a:noFill/>
-          <a:ln/>
-        </p:spPr>
-        <p:txBody>
-          <a:bodyPr wrap="square" lIns="0" tIns="0" rIns="0" bIns="0" rtlCol="0" anchor="ctr"/>
-          <a:lstStyle/>
-          <a:p>
-            <a:pPr marL="0" indent="0">
-              <a:buNone/>
-            </a:pPr>
-            <a:r>
-              <a:rPr lang="en-US" dirty="0">
-                <a:solidFill>
-                  <a:srgbClr val="393E46"/>
-                </a:solidFill>
-                <a:latin typeface="TH Sarabun New" pitchFamily="34" charset="0"/>
-                <a:ea typeface="TH Sarabun New" pitchFamily="34" charset="-122"/>
-                <a:cs typeface="TH Sarabun New" pitchFamily="34" charset="-120"/>
-              </a:rPr>
-              <a:t>บริการฐานข้อมูลสำเร็จรูปบนคลาวด์ (Backend as a Service)</a:t>
-            </a:r>
-            <a:endParaRPr lang="en-US" dirty="0"/>
-          </a:p>
-          <a:p>
-            <a:pPr marL="0" indent="0">
-              <a:buNone/>
-            </a:pPr>
-            <a:r>
-              <a:rPr lang="en-US" dirty="0">
-                <a:solidFill>
-                  <a:srgbClr val="393E46"/>
-                </a:solidFill>
-                <a:latin typeface="TH Sarabun New" pitchFamily="34" charset="0"/>
-                <a:ea typeface="TH Sarabun New" pitchFamily="34" charset="-122"/>
-                <a:cs typeface="TH Sarabun New" pitchFamily="34" charset="-120"/>
-              </a:rPr>
-              <a:t>สร้างตารางเสร็จ ได้ API ใช้ทันที ไม่ต้องเขียนเซิร์ฟเวอร์เอง</a:t>
-            </a:r>
-            <a:endParaRPr lang="en-US" dirty="0"/>
-          </a:p>
-        </p:txBody>
-      </p:sp>
-      <p:sp>
-        <p:nvSpPr>
-          <p:cNvPr id="7" name="Shape 5"/>
-          <p:cNvSpPr/>
-          <p:nvPr/>
-        </p:nvSpPr>
-        <p:spPr>
-          <a:xfrm>
-            <a:off x="886968" y="2798064"/>
-            <a:ext cx="310896" cy="310896"/>
-          </a:xfrm>
-          <a:prstGeom prst="ellipse">
-            <a:avLst/>
-          </a:prstGeom>
-          <a:solidFill>
-            <a:srgbClr val="00ADB5"/>
-          </a:solidFill>
-          <a:ln w="12700">
-            <a:solidFill>
-              <a:srgbClr val="00ADB5"/>
-            </a:solidFill>
-            <a:prstDash val="solid"/>
-          </a:ln>
-        </p:spPr>
-        <p:txBody>
-          <a:bodyPr/>
-          <a:lstStyle/>
-          <a:p>
-            <a:endParaRPr lang="en-TH" sz="2000"/>
-          </a:p>
-        </p:txBody>
-      </p:sp>
-      <p:sp>
-        <p:nvSpPr>
-          <p:cNvPr id="8" name="Text 6"/>
-          <p:cNvSpPr/>
-          <p:nvPr/>
-        </p:nvSpPr>
-        <p:spPr>
-          <a:xfrm>
-            <a:off x="886968" y="2798064"/>
-            <a:ext cx="310896" cy="310896"/>
-          </a:xfrm>
-          <a:prstGeom prst="rect">
-            <a:avLst/>
-          </a:prstGeom>
-          <a:noFill/>
-          <a:ln/>
-        </p:spPr>
-        <p:txBody>
-          <a:bodyPr wrap="square" lIns="0" tIns="0" rIns="0" bIns="0" rtlCol="0" anchor="ctr"/>
-          <a:lstStyle/>
-          <a:p>
-            <a:pPr marL="0" indent="0" algn="ctr">
-              <a:buNone/>
-            </a:pPr>
-            <a:r>
-              <a:rPr lang="en-US" sz="1600" b="1" dirty="0">
-                <a:solidFill>
-                  <a:srgbClr val="FFFFFF"/>
-                </a:solidFill>
-                <a:latin typeface="TH Sarabun New" pitchFamily="34" charset="0"/>
-                <a:ea typeface="TH Sarabun New" pitchFamily="34" charset="-122"/>
-                <a:cs typeface="TH Sarabun New" pitchFamily="34" charset="-120"/>
-              </a:rPr>
-              <a:t>1</a:t>
-            </a:r>
-            <a:endParaRPr lang="en-US" sz="1600" dirty="0"/>
-          </a:p>
-        </p:txBody>
-      </p:sp>
-      <p:sp>
-        <p:nvSpPr>
-          <p:cNvPr id="9" name="Text 7"/>
-          <p:cNvSpPr/>
-          <p:nvPr/>
-        </p:nvSpPr>
-        <p:spPr>
-          <a:xfrm>
-            <a:off x="1307592" y="2743200"/>
-            <a:ext cx="2240280" cy="420624"/>
-          </a:xfrm>
-          <a:prstGeom prst="rect">
-            <a:avLst/>
-          </a:prstGeom>
-          <a:noFill/>
-          <a:ln/>
-        </p:spPr>
-        <p:txBody>
-          <a:bodyPr wrap="square" lIns="0" tIns="0" rIns="0" bIns="0" rtlCol="0" anchor="ctr"/>
-          <a:lstStyle/>
-          <a:p>
-            <a:pPr marL="0" indent="0">
-              <a:buNone/>
-            </a:pPr>
-            <a:r>
-              <a:rPr lang="en-US" b="1" dirty="0">
-                <a:solidFill>
-                  <a:srgbClr val="222831"/>
-                </a:solidFill>
-                <a:latin typeface="TH Sarabun New" pitchFamily="34" charset="0"/>
-                <a:ea typeface="TH Sarabun New" pitchFamily="34" charset="-122"/>
-                <a:cs typeface="TH Sarabun New" pitchFamily="34" charset="-120"/>
-              </a:rPr>
-              <a:t>PostgreSQL</a:t>
-            </a:r>
-            <a:endParaRPr lang="en-US" dirty="0"/>
-          </a:p>
-        </p:txBody>
-      </p:sp>
-      <p:sp>
-        <p:nvSpPr>
-          <p:cNvPr id="10" name="Text 8"/>
-          <p:cNvSpPr/>
-          <p:nvPr/>
-        </p:nvSpPr>
-        <p:spPr>
-          <a:xfrm>
-            <a:off x="3566160" y="2743200"/>
-            <a:ext cx="2560320" cy="420624"/>
-          </a:xfrm>
-          <a:prstGeom prst="rect">
-            <a:avLst/>
-          </a:prstGeom>
-          <a:noFill/>
-          <a:ln/>
-        </p:spPr>
-        <p:txBody>
-          <a:bodyPr wrap="square" lIns="0" tIns="0" rIns="0" bIns="0" rtlCol="0" anchor="ctr"/>
-          <a:lstStyle/>
-          <a:p>
-            <a:pPr marL="0" indent="0">
-              <a:buNone/>
-            </a:pPr>
-            <a:r>
-              <a:rPr lang="en-US" sz="1600" dirty="0">
-                <a:solidFill>
-                  <a:srgbClr val="393E46"/>
-                </a:solidFill>
-                <a:latin typeface="TH Sarabun New" pitchFamily="34" charset="0"/>
-                <a:ea typeface="TH Sarabun New" pitchFamily="34" charset="-122"/>
-                <a:cs typeface="TH Sarabun New" pitchFamily="34" charset="-120"/>
-              </a:rPr>
-              <a:t>ฐานข้อมูลมาตรฐานอุตสาหกรรม</a:t>
-            </a:r>
-            <a:endParaRPr lang="en-US" sz="1600" dirty="0"/>
-          </a:p>
-        </p:txBody>
-      </p:sp>
-      <p:sp>
-        <p:nvSpPr>
-          <p:cNvPr id="11" name="Shape 9"/>
-          <p:cNvSpPr/>
-          <p:nvPr/>
-        </p:nvSpPr>
-        <p:spPr>
-          <a:xfrm>
-            <a:off x="886968" y="3401568"/>
-            <a:ext cx="310896" cy="310896"/>
-          </a:xfrm>
-          <a:prstGeom prst="ellipse">
-            <a:avLst/>
-          </a:prstGeom>
-          <a:solidFill>
-            <a:srgbClr val="00ADB5"/>
-          </a:solidFill>
-          <a:ln w="12700">
-            <a:solidFill>
-              <a:srgbClr val="00ADB5"/>
-            </a:solidFill>
-            <a:prstDash val="solid"/>
-          </a:ln>
-        </p:spPr>
-        <p:txBody>
-          <a:bodyPr/>
-          <a:lstStyle/>
-          <a:p>
-            <a:endParaRPr lang="en-TH" sz="2000"/>
-          </a:p>
-        </p:txBody>
-      </p:sp>
-      <p:sp>
-        <p:nvSpPr>
-          <p:cNvPr id="12" name="Text 10"/>
-          <p:cNvSpPr/>
-          <p:nvPr/>
-        </p:nvSpPr>
-        <p:spPr>
-          <a:xfrm>
-            <a:off x="886968" y="3401568"/>
-            <a:ext cx="310896" cy="310896"/>
-          </a:xfrm>
-          <a:prstGeom prst="rect">
-            <a:avLst/>
-          </a:prstGeom>
-          <a:noFill/>
-          <a:ln/>
-        </p:spPr>
-        <p:txBody>
-          <a:bodyPr wrap="square" lIns="0" tIns="0" rIns="0" bIns="0" rtlCol="0" anchor="ctr"/>
-          <a:lstStyle/>
-          <a:p>
-            <a:pPr marL="0" indent="0" algn="ctr">
-              <a:buNone/>
-            </a:pPr>
-            <a:r>
-              <a:rPr lang="en-US" sz="1600" b="1" dirty="0">
-                <a:solidFill>
-                  <a:srgbClr val="FFFFFF"/>
-                </a:solidFill>
-                <a:latin typeface="TH Sarabun New" pitchFamily="34" charset="0"/>
-                <a:ea typeface="TH Sarabun New" pitchFamily="34" charset="-122"/>
-                <a:cs typeface="TH Sarabun New" pitchFamily="34" charset="-120"/>
-              </a:rPr>
-              <a:t>2</a:t>
-            </a:r>
-            <a:endParaRPr lang="en-US" sz="1600" dirty="0"/>
-          </a:p>
-        </p:txBody>
-      </p:sp>
-      <p:sp>
-        <p:nvSpPr>
-          <p:cNvPr id="13" name="Text 11"/>
-          <p:cNvSpPr/>
-          <p:nvPr/>
-        </p:nvSpPr>
-        <p:spPr>
-          <a:xfrm>
-            <a:off x="1307592" y="3346704"/>
-            <a:ext cx="2240280" cy="420624"/>
-          </a:xfrm>
-          <a:prstGeom prst="rect">
-            <a:avLst/>
-          </a:prstGeom>
-          <a:noFill/>
-          <a:ln/>
-        </p:spPr>
-        <p:txBody>
-          <a:bodyPr wrap="square" lIns="0" tIns="0" rIns="0" bIns="0" rtlCol="0" anchor="ctr"/>
-          <a:lstStyle/>
-          <a:p>
-            <a:pPr marL="0" indent="0">
-              <a:buNone/>
-            </a:pPr>
-            <a:r>
-              <a:rPr lang="en-US" b="1" dirty="0">
-                <a:solidFill>
-                  <a:srgbClr val="222831"/>
-                </a:solidFill>
-                <a:latin typeface="TH Sarabun New" pitchFamily="34" charset="0"/>
-                <a:ea typeface="TH Sarabun New" pitchFamily="34" charset="-122"/>
-                <a:cs typeface="TH Sarabun New" pitchFamily="34" charset="-120"/>
-              </a:rPr>
-              <a:t>API อัตโนมัติ</a:t>
-            </a:r>
-            <a:endParaRPr lang="en-US" dirty="0"/>
-          </a:p>
-        </p:txBody>
-      </p:sp>
-      <p:sp>
-        <p:nvSpPr>
-          <p:cNvPr id="14" name="Text 12"/>
-          <p:cNvSpPr/>
-          <p:nvPr/>
-        </p:nvSpPr>
-        <p:spPr>
-          <a:xfrm>
-            <a:off x="3566160" y="3346704"/>
-            <a:ext cx="2560320" cy="420624"/>
-          </a:xfrm>
-          <a:prstGeom prst="rect">
-            <a:avLst/>
-          </a:prstGeom>
-          <a:noFill/>
-          <a:ln/>
-        </p:spPr>
-        <p:txBody>
-          <a:bodyPr wrap="square" lIns="0" tIns="0" rIns="0" bIns="0" rtlCol="0" anchor="ctr"/>
-          <a:lstStyle/>
-          <a:p>
-            <a:pPr marL="0" indent="0">
-              <a:buNone/>
-            </a:pPr>
-            <a:r>
-              <a:rPr lang="en-US" sz="1600" dirty="0">
-                <a:solidFill>
-                  <a:srgbClr val="393E46"/>
-                </a:solidFill>
-                <a:latin typeface="TH Sarabun New" pitchFamily="34" charset="0"/>
-                <a:ea typeface="TH Sarabun New" pitchFamily="34" charset="-122"/>
-                <a:cs typeface="TH Sarabun New" pitchFamily="34" charset="-120"/>
-              </a:rPr>
-              <a:t>สร้างให้ทันทีจากโครงสร้างตาราง</a:t>
-            </a:r>
-            <a:endParaRPr lang="en-US" sz="1600" dirty="0"/>
-          </a:p>
-        </p:txBody>
-      </p:sp>
-      <p:sp>
-        <p:nvSpPr>
-          <p:cNvPr id="15" name="Shape 13"/>
-          <p:cNvSpPr/>
-          <p:nvPr/>
-        </p:nvSpPr>
-        <p:spPr>
-          <a:xfrm>
-            <a:off x="886968" y="4005072"/>
-            <a:ext cx="310896" cy="310896"/>
-          </a:xfrm>
-          <a:prstGeom prst="ellipse">
-            <a:avLst/>
-          </a:prstGeom>
-          <a:solidFill>
-            <a:srgbClr val="00ADB5"/>
-          </a:solidFill>
-          <a:ln w="12700">
-            <a:solidFill>
-              <a:srgbClr val="00ADB5"/>
-            </a:solidFill>
-            <a:prstDash val="solid"/>
-          </a:ln>
-        </p:spPr>
-        <p:txBody>
-          <a:bodyPr/>
-          <a:lstStyle/>
-          <a:p>
-            <a:endParaRPr lang="en-TH" sz="2000"/>
-          </a:p>
-        </p:txBody>
-      </p:sp>
-      <p:sp>
-        <p:nvSpPr>
-          <p:cNvPr id="16" name="Text 14"/>
-          <p:cNvSpPr/>
-          <p:nvPr/>
-        </p:nvSpPr>
-        <p:spPr>
-          <a:xfrm>
-            <a:off x="886968" y="4005072"/>
-            <a:ext cx="310896" cy="310896"/>
-          </a:xfrm>
-          <a:prstGeom prst="rect">
-            <a:avLst/>
-          </a:prstGeom>
-          <a:noFill/>
-          <a:ln/>
-        </p:spPr>
-        <p:txBody>
-          <a:bodyPr wrap="square" lIns="0" tIns="0" rIns="0" bIns="0" rtlCol="0" anchor="ctr"/>
-          <a:lstStyle/>
-          <a:p>
-            <a:pPr marL="0" indent="0" algn="ctr">
-              <a:buNone/>
-            </a:pPr>
-            <a:r>
-              <a:rPr lang="en-US" sz="1600" b="1" dirty="0">
-                <a:solidFill>
-                  <a:srgbClr val="FFFFFF"/>
-                </a:solidFill>
-                <a:latin typeface="TH Sarabun New" pitchFamily="34" charset="0"/>
-                <a:ea typeface="TH Sarabun New" pitchFamily="34" charset="-122"/>
-                <a:cs typeface="TH Sarabun New" pitchFamily="34" charset="-120"/>
-              </a:rPr>
-              <a:t>3</a:t>
-            </a:r>
-            <a:endParaRPr lang="en-US" sz="1600" dirty="0"/>
-          </a:p>
-        </p:txBody>
-      </p:sp>
-      <p:sp>
-        <p:nvSpPr>
-          <p:cNvPr id="17" name="Text 15"/>
-          <p:cNvSpPr/>
-          <p:nvPr/>
-        </p:nvSpPr>
-        <p:spPr>
-          <a:xfrm>
-            <a:off x="1307592" y="3950208"/>
-            <a:ext cx="2240280" cy="420624"/>
-          </a:xfrm>
-          <a:prstGeom prst="rect">
-            <a:avLst/>
-          </a:prstGeom>
-          <a:noFill/>
-          <a:ln/>
-        </p:spPr>
-        <p:txBody>
-          <a:bodyPr wrap="square" lIns="0" tIns="0" rIns="0" bIns="0" rtlCol="0" anchor="ctr"/>
-          <a:lstStyle/>
-          <a:p>
-            <a:pPr marL="0" indent="0">
-              <a:buNone/>
-            </a:pPr>
-            <a:r>
-              <a:rPr lang="en-US" b="1" dirty="0">
-                <a:solidFill>
-                  <a:srgbClr val="222831"/>
-                </a:solidFill>
-                <a:latin typeface="TH Sarabun New" pitchFamily="34" charset="0"/>
-                <a:ea typeface="TH Sarabun New" pitchFamily="34" charset="-122"/>
-                <a:cs typeface="TH Sarabun New" pitchFamily="34" charset="-120"/>
-              </a:rPr>
-              <a:t>RLS</a:t>
-            </a:r>
-            <a:endParaRPr lang="en-US" dirty="0"/>
-          </a:p>
-        </p:txBody>
-      </p:sp>
-      <p:sp>
-        <p:nvSpPr>
-          <p:cNvPr id="18" name="Text 16"/>
-          <p:cNvSpPr/>
-          <p:nvPr/>
-        </p:nvSpPr>
-        <p:spPr>
-          <a:xfrm>
-            <a:off x="3566160" y="3950208"/>
-            <a:ext cx="2560320" cy="420624"/>
-          </a:xfrm>
-          <a:prstGeom prst="rect">
-            <a:avLst/>
-          </a:prstGeom>
-          <a:noFill/>
-          <a:ln/>
-        </p:spPr>
-        <p:txBody>
-          <a:bodyPr wrap="square" lIns="0" tIns="0" rIns="0" bIns="0" rtlCol="0" anchor="ctr"/>
-          <a:lstStyle/>
-          <a:p>
-            <a:pPr marL="0" indent="0">
-              <a:buNone/>
-            </a:pPr>
-            <a:r>
-              <a:rPr lang="en-US" sz="1600" dirty="0">
-                <a:solidFill>
-                  <a:srgbClr val="393E46"/>
-                </a:solidFill>
-                <a:latin typeface="TH Sarabun New" pitchFamily="34" charset="0"/>
-                <a:ea typeface="TH Sarabun New" pitchFamily="34" charset="-122"/>
-                <a:cs typeface="TH Sarabun New" pitchFamily="34" charset="-120"/>
-              </a:rPr>
-              <a:t>กำหนดสิทธิ์ว่าใครทำอะไรได้บ้าง</a:t>
-            </a:r>
-            <a:endParaRPr lang="en-US" sz="1600" dirty="0"/>
-          </a:p>
-        </p:txBody>
-      </p:sp>
-      <p:sp>
-        <p:nvSpPr>
-          <p:cNvPr id="19" name="Shape 17"/>
-          <p:cNvSpPr/>
-          <p:nvPr/>
-        </p:nvSpPr>
-        <p:spPr>
-          <a:xfrm>
-            <a:off x="886968" y="4608576"/>
-            <a:ext cx="310896" cy="310896"/>
-          </a:xfrm>
-          <a:prstGeom prst="ellipse">
-            <a:avLst/>
-          </a:prstGeom>
-          <a:solidFill>
-            <a:srgbClr val="00ADB5"/>
-          </a:solidFill>
-          <a:ln w="12700">
-            <a:solidFill>
-              <a:srgbClr val="00ADB5"/>
-            </a:solidFill>
-            <a:prstDash val="solid"/>
-          </a:ln>
-        </p:spPr>
-        <p:txBody>
-          <a:bodyPr/>
-          <a:lstStyle/>
-          <a:p>
-            <a:endParaRPr lang="en-TH" sz="2000"/>
-          </a:p>
-        </p:txBody>
-      </p:sp>
-      <p:sp>
-        <p:nvSpPr>
-          <p:cNvPr id="20" name="Text 18"/>
-          <p:cNvSpPr/>
-          <p:nvPr/>
-        </p:nvSpPr>
-        <p:spPr>
-          <a:xfrm>
-            <a:off x="886968" y="4608576"/>
-            <a:ext cx="310896" cy="310896"/>
-          </a:xfrm>
-          <a:prstGeom prst="rect">
-            <a:avLst/>
-          </a:prstGeom>
-          <a:noFill/>
-          <a:ln/>
-        </p:spPr>
-        <p:txBody>
-          <a:bodyPr wrap="square" lIns="0" tIns="0" rIns="0" bIns="0" rtlCol="0" anchor="ctr"/>
-          <a:lstStyle/>
-          <a:p>
-            <a:pPr marL="0" indent="0" algn="ctr">
-              <a:buNone/>
-            </a:pPr>
-            <a:r>
-              <a:rPr lang="en-US" sz="1600" b="1" dirty="0">
-                <a:solidFill>
-                  <a:srgbClr val="FFFFFF"/>
-                </a:solidFill>
-                <a:latin typeface="TH Sarabun New" pitchFamily="34" charset="0"/>
-                <a:ea typeface="TH Sarabun New" pitchFamily="34" charset="-122"/>
-                <a:cs typeface="TH Sarabun New" pitchFamily="34" charset="-120"/>
-              </a:rPr>
-              <a:t>4</a:t>
-            </a:r>
-            <a:endParaRPr lang="en-US" sz="1600" dirty="0"/>
-          </a:p>
-        </p:txBody>
-      </p:sp>
-      <p:sp>
-        <p:nvSpPr>
-          <p:cNvPr id="21" name="Text 19"/>
-          <p:cNvSpPr/>
-          <p:nvPr/>
-        </p:nvSpPr>
-        <p:spPr>
-          <a:xfrm>
-            <a:off x="1307592" y="4553712"/>
-            <a:ext cx="2240280" cy="420624"/>
-          </a:xfrm>
-          <a:prstGeom prst="rect">
-            <a:avLst/>
-          </a:prstGeom>
-          <a:noFill/>
-          <a:ln/>
-        </p:spPr>
-        <p:txBody>
-          <a:bodyPr wrap="square" lIns="0" tIns="0" rIns="0" bIns="0" rtlCol="0" anchor="ctr"/>
-          <a:lstStyle/>
-          <a:p>
-            <a:pPr marL="0" indent="0">
-              <a:buNone/>
-            </a:pPr>
-            <a:r>
-              <a:rPr lang="en-US" b="1" dirty="0">
-                <a:solidFill>
-                  <a:srgbClr val="222831"/>
-                </a:solidFill>
-                <a:latin typeface="TH Sarabun New" pitchFamily="34" charset="0"/>
-                <a:ea typeface="TH Sarabun New" pitchFamily="34" charset="-122"/>
-                <a:cs typeface="TH Sarabun New" pitchFamily="34" charset="-120"/>
-              </a:rPr>
-              <a:t>Storage / Auth</a:t>
-            </a:r>
-            <a:endParaRPr lang="en-US" dirty="0"/>
-          </a:p>
-        </p:txBody>
-      </p:sp>
-      <p:sp>
-        <p:nvSpPr>
-          <p:cNvPr id="22" name="Text 20"/>
-          <p:cNvSpPr/>
-          <p:nvPr/>
-        </p:nvSpPr>
-        <p:spPr>
-          <a:xfrm>
-            <a:off x="3566160" y="4553712"/>
-            <a:ext cx="2560320" cy="420624"/>
-          </a:xfrm>
-          <a:prstGeom prst="rect">
-            <a:avLst/>
-          </a:prstGeom>
-          <a:noFill/>
-          <a:ln/>
-        </p:spPr>
-        <p:txBody>
-          <a:bodyPr wrap="square" lIns="0" tIns="0" rIns="0" bIns="0" rtlCol="0" anchor="ctr"/>
-          <a:lstStyle/>
-          <a:p>
-            <a:pPr marL="0" indent="0">
-              <a:buNone/>
-            </a:pPr>
-            <a:r>
-              <a:rPr lang="en-US" sz="1600" dirty="0">
-                <a:solidFill>
-                  <a:srgbClr val="393E46"/>
-                </a:solidFill>
-                <a:latin typeface="TH Sarabun New" pitchFamily="34" charset="0"/>
-                <a:ea typeface="TH Sarabun New" pitchFamily="34" charset="-122"/>
-                <a:cs typeface="TH Sarabun New" pitchFamily="34" charset="-120"/>
-              </a:rPr>
-              <a:t>มีให้ใช้ แต่ไม่ใช้ในเวิร์กช็อปนี้</a:t>
-            </a:r>
-            <a:endParaRPr lang="en-US" sz="1600" dirty="0"/>
-          </a:p>
-        </p:txBody>
-      </p:sp>
-      <p:sp>
-        <p:nvSpPr>
-          <p:cNvPr id="23" name="Shape 21"/>
-          <p:cNvSpPr/>
-          <p:nvPr/>
-        </p:nvSpPr>
-        <p:spPr>
-          <a:xfrm>
-            <a:off x="6647688" y="1371600"/>
-            <a:ext cx="4919472" cy="3977640"/>
-          </a:xfrm>
-          <a:prstGeom prst="roundRect">
-            <a:avLst>
-              <a:gd name="adj" fmla="val 2069"/>
-            </a:avLst>
-          </a:prstGeom>
-          <a:solidFill>
-            <a:srgbClr val="E8F6F7"/>
-          </a:solidFill>
-          <a:ln w="9525">
-            <a:solidFill>
-              <a:srgbClr val="E8F6F7"/>
-            </a:solidFill>
-            <a:prstDash val="solid"/>
-          </a:ln>
-          <a:effectLst>
-            <a:outerShdw blurRad="101600" dist="12700" dir="5400000" algn="bl" rotWithShape="0">
-              <a:srgbClr val="222831">
-                <a:alpha val="10000"/>
-              </a:srgbClr>
-            </a:outerShdw>
-          </a:effectLst>
-        </p:spPr>
-        <p:txBody>
-          <a:bodyPr/>
-          <a:lstStyle/>
-          <a:p>
-            <a:endParaRPr lang="en-TH" sz="2000"/>
-          </a:p>
-        </p:txBody>
-      </p:sp>
-      <p:sp>
-        <p:nvSpPr>
-          <p:cNvPr id="24" name="Text 22"/>
-          <p:cNvSpPr/>
-          <p:nvPr/>
-        </p:nvSpPr>
-        <p:spPr>
-          <a:xfrm>
-            <a:off x="6922008" y="1572768"/>
-            <a:ext cx="4370832" cy="347472"/>
-          </a:xfrm>
-          <a:prstGeom prst="rect">
-            <a:avLst/>
-          </a:prstGeom>
-          <a:noFill/>
-          <a:ln/>
-        </p:spPr>
-        <p:txBody>
-          <a:bodyPr wrap="square" lIns="0" tIns="0" rIns="0" bIns="0" rtlCol="0" anchor="ctr"/>
-          <a:lstStyle/>
-          <a:p>
-            <a:pPr marL="0" indent="0">
-              <a:buNone/>
-            </a:pPr>
-            <a:r>
-              <a:rPr lang="en-US" sz="2400" b="1" dirty="0">
-                <a:solidFill>
-                  <a:srgbClr val="00ADB5"/>
-                </a:solidFill>
-                <a:latin typeface="TH Sarabun New" pitchFamily="34" charset="0"/>
-                <a:ea typeface="TH Sarabun New" pitchFamily="34" charset="-122"/>
-                <a:cs typeface="TH Sarabun New" pitchFamily="34" charset="-120"/>
-              </a:rPr>
-              <a:t>ชุดเทคโนโลยีที่เราจะใช้</a:t>
-            </a:r>
-            <a:endParaRPr lang="en-US" sz="2400" dirty="0"/>
-          </a:p>
-        </p:txBody>
-      </p:sp>
-      <p:sp>
-        <p:nvSpPr>
-          <p:cNvPr id="25" name="Shape 23"/>
-          <p:cNvSpPr/>
-          <p:nvPr/>
-        </p:nvSpPr>
-        <p:spPr>
-          <a:xfrm>
-            <a:off x="6922008" y="2103120"/>
-            <a:ext cx="4370832" cy="512064"/>
-          </a:xfrm>
-          <a:prstGeom prst="roundRect">
-            <a:avLst>
-              <a:gd name="adj" fmla="val 12500"/>
-            </a:avLst>
-          </a:prstGeom>
-          <a:solidFill>
-            <a:srgbClr val="FFFFFF"/>
-          </a:solidFill>
-          <a:ln w="9525">
-            <a:solidFill>
-              <a:srgbClr val="BEE7EA"/>
-            </a:solidFill>
-            <a:prstDash val="solid"/>
-          </a:ln>
-        </p:spPr>
-        <p:txBody>
-          <a:bodyPr/>
-          <a:lstStyle/>
-          <a:p>
-            <a:endParaRPr lang="en-TH" sz="2000"/>
-          </a:p>
-        </p:txBody>
-      </p:sp>
-      <p:sp>
-        <p:nvSpPr>
-          <p:cNvPr id="26" name="Text 24"/>
-          <p:cNvSpPr/>
-          <p:nvPr/>
-        </p:nvSpPr>
-        <p:spPr>
-          <a:xfrm>
-            <a:off x="7104888" y="2103120"/>
-            <a:ext cx="2103120" cy="512064"/>
-          </a:xfrm>
-          <a:prstGeom prst="rect">
-            <a:avLst/>
-          </a:prstGeom>
-          <a:noFill/>
-          <a:ln/>
-        </p:spPr>
-        <p:txBody>
-          <a:bodyPr wrap="square" lIns="0" tIns="0" rIns="0" bIns="0" rtlCol="0" anchor="ctr"/>
-          <a:lstStyle/>
-          <a:p>
-            <a:pPr marL="0" indent="0">
-              <a:buNone/>
-            </a:pPr>
-            <a:r>
-              <a:rPr lang="en-US" b="1" dirty="0">
-                <a:solidFill>
-                  <a:srgbClr val="222831"/>
-                </a:solidFill>
-                <a:latin typeface="TH Sarabun New" pitchFamily="34" charset="0"/>
-                <a:ea typeface="TH Sarabun New" pitchFamily="34" charset="-122"/>
-                <a:cs typeface="TH Sarabun New" pitchFamily="34" charset="-120"/>
-              </a:rPr>
-              <a:t>Vite + React</a:t>
-            </a:r>
-            <a:endParaRPr lang="en-US" dirty="0"/>
-          </a:p>
-        </p:txBody>
-      </p:sp>
-      <p:sp>
-        <p:nvSpPr>
-          <p:cNvPr id="27" name="Text 25"/>
-          <p:cNvSpPr/>
-          <p:nvPr/>
-        </p:nvSpPr>
-        <p:spPr>
-          <a:xfrm>
-            <a:off x="9208008" y="2103120"/>
-            <a:ext cx="2011680" cy="512064"/>
-          </a:xfrm>
-          <a:prstGeom prst="rect">
-            <a:avLst/>
-          </a:prstGeom>
-          <a:noFill/>
-          <a:ln/>
-        </p:spPr>
-        <p:txBody>
-          <a:bodyPr wrap="square" lIns="0" tIns="0" rIns="0" bIns="0" rtlCol="0" anchor="ctr"/>
-          <a:lstStyle/>
-          <a:p>
-            <a:pPr marL="0" indent="0">
-              <a:buNone/>
-            </a:pPr>
-            <a:r>
-              <a:rPr lang="en-US" sz="1600" dirty="0">
-                <a:solidFill>
-                  <a:srgbClr val="393E46"/>
-                </a:solidFill>
-                <a:latin typeface="TH Sarabun New" pitchFamily="34" charset="0"/>
-                <a:ea typeface="TH Sarabun New" pitchFamily="34" charset="-122"/>
-                <a:cs typeface="TH Sarabun New" pitchFamily="34" charset="-120"/>
-              </a:rPr>
-              <a:t>สร้างหน้าเว็บ</a:t>
-            </a:r>
-            <a:endParaRPr lang="en-US" sz="1600" dirty="0"/>
-          </a:p>
-        </p:txBody>
-      </p:sp>
-      <p:sp>
-        <p:nvSpPr>
-          <p:cNvPr id="28" name="Shape 26"/>
-          <p:cNvSpPr/>
-          <p:nvPr/>
-        </p:nvSpPr>
-        <p:spPr>
-          <a:xfrm>
-            <a:off x="6922008" y="2724912"/>
-            <a:ext cx="4370832" cy="512064"/>
-          </a:xfrm>
-          <a:prstGeom prst="roundRect">
-            <a:avLst>
-              <a:gd name="adj" fmla="val 12500"/>
-            </a:avLst>
-          </a:prstGeom>
-          <a:solidFill>
-            <a:srgbClr val="FFFFFF"/>
-          </a:solidFill>
-          <a:ln w="9525">
-            <a:solidFill>
-              <a:srgbClr val="BEE7EA"/>
-            </a:solidFill>
-            <a:prstDash val="solid"/>
-          </a:ln>
-        </p:spPr>
-        <p:txBody>
-          <a:bodyPr/>
-          <a:lstStyle/>
-          <a:p>
-            <a:endParaRPr lang="en-TH" sz="2000"/>
-          </a:p>
-        </p:txBody>
-      </p:sp>
-      <p:sp>
-        <p:nvSpPr>
-          <p:cNvPr id="29" name="Text 27"/>
-          <p:cNvSpPr/>
-          <p:nvPr/>
-        </p:nvSpPr>
-        <p:spPr>
-          <a:xfrm>
-            <a:off x="7104888" y="2724912"/>
-            <a:ext cx="2103120" cy="512064"/>
-          </a:xfrm>
-          <a:prstGeom prst="rect">
-            <a:avLst/>
-          </a:prstGeom>
-          <a:noFill/>
-          <a:ln/>
-        </p:spPr>
-        <p:txBody>
-          <a:bodyPr wrap="square" lIns="0" tIns="0" rIns="0" bIns="0" rtlCol="0" anchor="ctr"/>
-          <a:lstStyle/>
-          <a:p>
-            <a:pPr marL="0" indent="0">
-              <a:buNone/>
-            </a:pPr>
-            <a:r>
-              <a:rPr lang="en-US" b="1" dirty="0">
-                <a:solidFill>
-                  <a:srgbClr val="222831"/>
-                </a:solidFill>
-                <a:latin typeface="TH Sarabun New" pitchFamily="34" charset="0"/>
-                <a:ea typeface="TH Sarabun New" pitchFamily="34" charset="-122"/>
-                <a:cs typeface="TH Sarabun New" pitchFamily="34" charset="-120"/>
-              </a:rPr>
-              <a:t>Tailwind CSS</a:t>
-            </a:r>
-            <a:endParaRPr lang="en-US" dirty="0"/>
-          </a:p>
-        </p:txBody>
-      </p:sp>
-      <p:sp>
-        <p:nvSpPr>
-          <p:cNvPr id="30" name="Text 28"/>
-          <p:cNvSpPr/>
-          <p:nvPr/>
-        </p:nvSpPr>
-        <p:spPr>
-          <a:xfrm>
-            <a:off x="9208008" y="2724912"/>
-            <a:ext cx="2011680" cy="512064"/>
-          </a:xfrm>
-          <a:prstGeom prst="rect">
-            <a:avLst/>
-          </a:prstGeom>
-          <a:noFill/>
-          <a:ln/>
-        </p:spPr>
-        <p:txBody>
-          <a:bodyPr wrap="square" lIns="0" tIns="0" rIns="0" bIns="0" rtlCol="0" anchor="ctr"/>
-          <a:lstStyle/>
-          <a:p>
-            <a:pPr marL="0" indent="0">
-              <a:buNone/>
-            </a:pPr>
-            <a:r>
-              <a:rPr lang="en-US" sz="1600" dirty="0">
-                <a:solidFill>
-                  <a:srgbClr val="393E46"/>
-                </a:solidFill>
-                <a:latin typeface="TH Sarabun New" pitchFamily="34" charset="0"/>
-                <a:ea typeface="TH Sarabun New" pitchFamily="34" charset="-122"/>
-                <a:cs typeface="TH Sarabun New" pitchFamily="34" charset="-120"/>
-              </a:rPr>
-              <a:t>จัดสไตล์ตาม Design System</a:t>
-            </a:r>
-            <a:endParaRPr lang="en-US" sz="1600" dirty="0"/>
-          </a:p>
-        </p:txBody>
-      </p:sp>
-      <p:sp>
-        <p:nvSpPr>
-          <p:cNvPr id="31" name="Shape 29"/>
-          <p:cNvSpPr/>
-          <p:nvPr/>
-        </p:nvSpPr>
-        <p:spPr>
-          <a:xfrm>
-            <a:off x="6922008" y="3346704"/>
-            <a:ext cx="4370832" cy="512064"/>
-          </a:xfrm>
-          <a:prstGeom prst="roundRect">
-            <a:avLst>
-              <a:gd name="adj" fmla="val 12500"/>
-            </a:avLst>
-          </a:prstGeom>
-          <a:solidFill>
-            <a:srgbClr val="FFFFFF"/>
-          </a:solidFill>
-          <a:ln w="9525">
-            <a:solidFill>
-              <a:srgbClr val="BEE7EA"/>
-            </a:solidFill>
-            <a:prstDash val="solid"/>
-          </a:ln>
-        </p:spPr>
-        <p:txBody>
-          <a:bodyPr/>
-          <a:lstStyle/>
-          <a:p>
-            <a:endParaRPr lang="en-TH" sz="2000"/>
-          </a:p>
-        </p:txBody>
-      </p:sp>
-      <p:sp>
-        <p:nvSpPr>
-          <p:cNvPr id="32" name="Text 30"/>
-          <p:cNvSpPr/>
-          <p:nvPr/>
-        </p:nvSpPr>
-        <p:spPr>
-          <a:xfrm>
-            <a:off x="7104888" y="3346704"/>
-            <a:ext cx="2103120" cy="512064"/>
-          </a:xfrm>
-          <a:prstGeom prst="rect">
-            <a:avLst/>
-          </a:prstGeom>
-          <a:noFill/>
-          <a:ln/>
-        </p:spPr>
-        <p:txBody>
-          <a:bodyPr wrap="square" lIns="0" tIns="0" rIns="0" bIns="0" rtlCol="0" anchor="ctr"/>
-          <a:lstStyle/>
-          <a:p>
-            <a:pPr marL="0" indent="0">
-              <a:buNone/>
-            </a:pPr>
-            <a:r>
-              <a:rPr lang="en-US" b="1" dirty="0">
-                <a:solidFill>
-                  <a:srgbClr val="222831"/>
-                </a:solidFill>
-                <a:latin typeface="TH Sarabun New" pitchFamily="34" charset="0"/>
-                <a:ea typeface="TH Sarabun New" pitchFamily="34" charset="-122"/>
-                <a:cs typeface="TH Sarabun New" pitchFamily="34" charset="-120"/>
-              </a:rPr>
-              <a:t>Supabase</a:t>
-            </a:r>
-            <a:endParaRPr lang="en-US" dirty="0"/>
-          </a:p>
-        </p:txBody>
-      </p:sp>
-      <p:sp>
-        <p:nvSpPr>
-          <p:cNvPr id="33" name="Text 31"/>
-          <p:cNvSpPr/>
-          <p:nvPr/>
-        </p:nvSpPr>
-        <p:spPr>
-          <a:xfrm>
-            <a:off x="9208008" y="3346704"/>
-            <a:ext cx="2011680" cy="512064"/>
-          </a:xfrm>
-          <a:prstGeom prst="rect">
-            <a:avLst/>
-          </a:prstGeom>
-          <a:noFill/>
-          <a:ln/>
-        </p:spPr>
-        <p:txBody>
-          <a:bodyPr wrap="square" lIns="0" tIns="0" rIns="0" bIns="0" rtlCol="0" anchor="ctr"/>
-          <a:lstStyle/>
-          <a:p>
-            <a:pPr marL="0" indent="0">
-              <a:buNone/>
-            </a:pPr>
-            <a:r>
-              <a:rPr lang="en-US" sz="1600" dirty="0">
-                <a:solidFill>
-                  <a:srgbClr val="393E46"/>
-                </a:solidFill>
-                <a:latin typeface="TH Sarabun New" pitchFamily="34" charset="0"/>
-                <a:ea typeface="TH Sarabun New" pitchFamily="34" charset="-122"/>
-                <a:cs typeface="TH Sarabun New" pitchFamily="34" charset="-120"/>
-              </a:rPr>
-              <a:t>ฐานข้อมูลและ API</a:t>
-            </a:r>
-            <a:endParaRPr lang="en-US" sz="1600" dirty="0"/>
-          </a:p>
-        </p:txBody>
-      </p:sp>
-      <p:sp>
-        <p:nvSpPr>
-          <p:cNvPr id="34" name="Shape 32"/>
-          <p:cNvSpPr/>
-          <p:nvPr/>
-        </p:nvSpPr>
-        <p:spPr>
-          <a:xfrm>
-            <a:off x="6922008" y="3968496"/>
-            <a:ext cx="4370832" cy="512064"/>
-          </a:xfrm>
-          <a:prstGeom prst="roundRect">
-            <a:avLst>
-              <a:gd name="adj" fmla="val 12500"/>
-            </a:avLst>
-          </a:prstGeom>
-          <a:solidFill>
-            <a:srgbClr val="FFFFFF"/>
-          </a:solidFill>
-          <a:ln w="9525">
-            <a:solidFill>
-              <a:srgbClr val="BEE7EA"/>
-            </a:solidFill>
-            <a:prstDash val="solid"/>
-          </a:ln>
-        </p:spPr>
-        <p:txBody>
-          <a:bodyPr/>
-          <a:lstStyle/>
-          <a:p>
-            <a:endParaRPr lang="en-TH" sz="2000"/>
-          </a:p>
-        </p:txBody>
-      </p:sp>
-      <p:sp>
-        <p:nvSpPr>
-          <p:cNvPr id="35" name="Text 33"/>
-          <p:cNvSpPr/>
-          <p:nvPr/>
-        </p:nvSpPr>
-        <p:spPr>
-          <a:xfrm>
-            <a:off x="7104888" y="3968496"/>
-            <a:ext cx="2103120" cy="512064"/>
-          </a:xfrm>
-          <a:prstGeom prst="rect">
-            <a:avLst/>
-          </a:prstGeom>
-          <a:noFill/>
-          <a:ln/>
-        </p:spPr>
-        <p:txBody>
-          <a:bodyPr wrap="square" lIns="0" tIns="0" rIns="0" bIns="0" rtlCol="0" anchor="ctr"/>
-          <a:lstStyle/>
-          <a:p>
-            <a:pPr marL="0" indent="0">
-              <a:buNone/>
-            </a:pPr>
-            <a:r>
-              <a:rPr lang="en-US" b="1" dirty="0">
-                <a:solidFill>
-                  <a:srgbClr val="222831"/>
-                </a:solidFill>
-                <a:latin typeface="TH Sarabun New" pitchFamily="34" charset="0"/>
-                <a:ea typeface="TH Sarabun New" pitchFamily="34" charset="-122"/>
-                <a:cs typeface="TH Sarabun New" pitchFamily="34" charset="-120"/>
-              </a:rPr>
-              <a:t>GitHub + Pages</a:t>
-            </a:r>
-            <a:endParaRPr lang="en-US" dirty="0"/>
-          </a:p>
-        </p:txBody>
-      </p:sp>
-      <p:sp>
-        <p:nvSpPr>
-          <p:cNvPr id="36" name="Text 34"/>
-          <p:cNvSpPr/>
-          <p:nvPr/>
-        </p:nvSpPr>
-        <p:spPr>
-          <a:xfrm>
-            <a:off x="9208008" y="3968496"/>
-            <a:ext cx="2011680" cy="512064"/>
-          </a:xfrm>
-          <a:prstGeom prst="rect">
-            <a:avLst/>
-          </a:prstGeom>
-          <a:noFill/>
-          <a:ln/>
-        </p:spPr>
-        <p:txBody>
-          <a:bodyPr wrap="square" lIns="0" tIns="0" rIns="0" bIns="0" rtlCol="0" anchor="ctr"/>
-          <a:lstStyle/>
-          <a:p>
-            <a:pPr marL="0" indent="0">
-              <a:buNone/>
-            </a:pPr>
-            <a:r>
-              <a:rPr lang="en-US" sz="1600" dirty="0">
-                <a:solidFill>
-                  <a:srgbClr val="393E46"/>
-                </a:solidFill>
-                <a:latin typeface="TH Sarabun New" pitchFamily="34" charset="0"/>
-                <a:ea typeface="TH Sarabun New" pitchFamily="34" charset="-122"/>
-                <a:cs typeface="TH Sarabun New" pitchFamily="34" charset="-120"/>
-              </a:rPr>
-              <a:t>เก็บโค้ดและนำขึ้นระบบฟรี</a:t>
-            </a:r>
-            <a:endParaRPr lang="en-US" sz="1600" dirty="0"/>
-          </a:p>
-        </p:txBody>
-      </p:sp>
-      <p:sp>
-        <p:nvSpPr>
-          <p:cNvPr id="37" name="Shape 35"/>
-          <p:cNvSpPr/>
-          <p:nvPr/>
-        </p:nvSpPr>
-        <p:spPr>
-          <a:xfrm>
-            <a:off x="6922008" y="4590288"/>
-            <a:ext cx="4370832" cy="512064"/>
-          </a:xfrm>
-          <a:prstGeom prst="roundRect">
-            <a:avLst>
-              <a:gd name="adj" fmla="val 12500"/>
-            </a:avLst>
-          </a:prstGeom>
-          <a:solidFill>
-            <a:srgbClr val="FFFFFF"/>
-          </a:solidFill>
-          <a:ln w="9525">
-            <a:solidFill>
-              <a:srgbClr val="BEE7EA"/>
-            </a:solidFill>
-            <a:prstDash val="solid"/>
-          </a:ln>
-        </p:spPr>
-        <p:txBody>
-          <a:bodyPr/>
-          <a:lstStyle/>
-          <a:p>
-            <a:endParaRPr lang="en-TH" sz="2000"/>
-          </a:p>
-        </p:txBody>
-      </p:sp>
-      <p:sp>
-        <p:nvSpPr>
-          <p:cNvPr id="38" name="Text 36"/>
-          <p:cNvSpPr/>
-          <p:nvPr/>
-        </p:nvSpPr>
-        <p:spPr>
-          <a:xfrm>
-            <a:off x="7104888" y="4590288"/>
-            <a:ext cx="2103120" cy="512064"/>
-          </a:xfrm>
-          <a:prstGeom prst="rect">
-            <a:avLst/>
-          </a:prstGeom>
-          <a:noFill/>
-          <a:ln/>
-        </p:spPr>
-        <p:txBody>
-          <a:bodyPr wrap="square" lIns="0" tIns="0" rIns="0" bIns="0" rtlCol="0" anchor="ctr"/>
-          <a:lstStyle/>
-          <a:p>
-            <a:pPr marL="0" indent="0">
-              <a:buNone/>
-            </a:pPr>
-            <a:r>
-              <a:rPr lang="en-US" b="1" dirty="0">
-                <a:solidFill>
-                  <a:srgbClr val="222831"/>
-                </a:solidFill>
-                <a:latin typeface="TH Sarabun New" pitchFamily="34" charset="0"/>
-                <a:ea typeface="TH Sarabun New" pitchFamily="34" charset="-122"/>
-                <a:cs typeface="TH Sarabun New" pitchFamily="34" charset="-120"/>
-              </a:rPr>
-              <a:t>Antigravity</a:t>
-            </a:r>
-            <a:endParaRPr lang="en-US" dirty="0"/>
-          </a:p>
-        </p:txBody>
-      </p:sp>
-      <p:sp>
-        <p:nvSpPr>
-          <p:cNvPr id="39" name="Text 37"/>
-          <p:cNvSpPr/>
-          <p:nvPr/>
-        </p:nvSpPr>
-        <p:spPr>
-          <a:xfrm>
-            <a:off x="9208008" y="4590288"/>
-            <a:ext cx="2011680" cy="512064"/>
-          </a:xfrm>
-          <a:prstGeom prst="rect">
-            <a:avLst/>
-          </a:prstGeom>
-          <a:noFill/>
-          <a:ln/>
-        </p:spPr>
-        <p:txBody>
-          <a:bodyPr wrap="square" lIns="0" tIns="0" rIns="0" bIns="0" rtlCol="0" anchor="ctr"/>
-          <a:lstStyle/>
-          <a:p>
-            <a:pPr marL="0" indent="0">
-              <a:buNone/>
-            </a:pPr>
-            <a:r>
-              <a:rPr lang="en-US" sz="1600" dirty="0">
-                <a:solidFill>
-                  <a:srgbClr val="393E46"/>
-                </a:solidFill>
-                <a:latin typeface="TH Sarabun New" pitchFamily="34" charset="0"/>
-                <a:ea typeface="TH Sarabun New" pitchFamily="34" charset="-122"/>
-                <a:cs typeface="TH Sarabun New" pitchFamily="34" charset="-120"/>
-              </a:rPr>
-              <a:t>AI Agent ที่เขียนโค้ดให้เรา</a:t>
-            </a:r>
-            <a:endParaRPr lang="en-US" sz="1600" dirty="0"/>
           </a:p>
         </p:txBody>
       </p:sp>
